--- a/RISCVstage4.pptx
+++ b/RISCVstage4.pptx
@@ -112,6 +112,379 @@
 </p:presentation>
 </file>
 
+<file path=ppt/revisionInfo.xml><?xml version="1.0" encoding="utf-8"?>
+<p1510:revInfo xmlns:a="http://schemas.openxmlformats.org/drawingml/2006/main" xmlns:r="http://schemas.openxmlformats.org/officeDocument/2006/relationships" xmlns:p1510="http://schemas.microsoft.com/office/powerpoint/2015/10/main">
+  <p1510:revLst>
+    <p1510:client id="{5550478D-03C3-4A9B-9853-97954EEDE79F}" v="6" dt="2026-03-05T22:38:16.057"/>
+  </p1510:revLst>
+</p1510:revInfo>
+</file>
+
+<file path=ppt/changesInfos/changesInfo1.xml><?xml version="1.0" encoding="utf-8"?>
+<pc:chgInfo xmlns:a="http://schemas.openxmlformats.org/drawingml/2006/main" xmlns:r="http://schemas.openxmlformats.org/officeDocument/2006/relationships" xmlns:ac="http://schemas.microsoft.com/office/drawing/2013/main/command" xmlns:pc="http://schemas.microsoft.com/office/powerpoint/2013/main/command">
+  <pc:docChgLst>
+    <pc:chgData name="York, George W CIV USAF USAFA DF/DFEC" userId="1fb5875a-4594-4db2-80fb-f0db3de11280" providerId="ADAL" clId="{09330963-85FD-4C99-A81B-94D0EE5CFFEB}"/>
+    <pc:docChg chg="custSel modSld">
+      <pc:chgData name="York, George W CIV USAF USAFA DF/DFEC" userId="1fb5875a-4594-4db2-80fb-f0db3de11280" providerId="ADAL" clId="{09330963-85FD-4C99-A81B-94D0EE5CFFEB}" dt="2026-03-05T22:38:22.200" v="19" actId="1076"/>
+      <pc:docMkLst>
+        <pc:docMk/>
+      </pc:docMkLst>
+      <pc:sldChg chg="addSp delSp modSp mod">
+        <pc:chgData name="York, George W CIV USAF USAFA DF/DFEC" userId="1fb5875a-4594-4db2-80fb-f0db3de11280" providerId="ADAL" clId="{09330963-85FD-4C99-A81B-94D0EE5CFFEB}" dt="2026-03-05T22:38:22.200" v="19" actId="1076"/>
+        <pc:sldMkLst>
+          <pc:docMk/>
+          <pc:sldMk cId="1501170907" sldId="256"/>
+        </pc:sldMkLst>
+        <pc:spChg chg="del">
+          <ac:chgData name="York, George W CIV USAF USAFA DF/DFEC" userId="1fb5875a-4594-4db2-80fb-f0db3de11280" providerId="ADAL" clId="{09330963-85FD-4C99-A81B-94D0EE5CFFEB}" dt="2026-03-05T22:36:35.379" v="13" actId="478"/>
+          <ac:spMkLst>
+            <pc:docMk/>
+            <pc:sldMk cId="1501170907" sldId="256"/>
+            <ac:spMk id="37" creationId="{FEBD6354-C348-CAC9-89DB-E3F28A4B9C7A}"/>
+          </ac:spMkLst>
+        </pc:spChg>
+        <pc:spChg chg="ord">
+          <ac:chgData name="York, George W CIV USAF USAFA DF/DFEC" userId="1fb5875a-4594-4db2-80fb-f0db3de11280" providerId="ADAL" clId="{09330963-85FD-4C99-A81B-94D0EE5CFFEB}" dt="2026-03-05T22:33:00.568" v="3" actId="167"/>
+          <ac:spMkLst>
+            <pc:docMk/>
+            <pc:sldMk cId="1501170907" sldId="256"/>
+            <ac:spMk id="90" creationId="{E5E3C8FC-BB27-8EAD-AA8B-33B131880EBA}"/>
+          </ac:spMkLst>
+        </pc:spChg>
+        <pc:spChg chg="add mod">
+          <ac:chgData name="York, George W CIV USAF USAFA DF/DFEC" userId="1fb5875a-4594-4db2-80fb-f0db3de11280" providerId="ADAL" clId="{09330963-85FD-4C99-A81B-94D0EE5CFFEB}" dt="2026-03-05T22:37:02.711" v="15" actId="1076"/>
+          <ac:spMkLst>
+            <pc:docMk/>
+            <pc:sldMk cId="1501170907" sldId="256"/>
+            <ac:spMk id="119" creationId="{71CFDDD6-C726-691B-9CA9-125BE7E5CADA}"/>
+          </ac:spMkLst>
+        </pc:spChg>
+        <pc:spChg chg="add mod">
+          <ac:chgData name="York, George W CIV USAF USAFA DF/DFEC" userId="1fb5875a-4594-4db2-80fb-f0db3de11280" providerId="ADAL" clId="{09330963-85FD-4C99-A81B-94D0EE5CFFEB}" dt="2026-03-05T22:37:02.711" v="15" actId="1076"/>
+          <ac:spMkLst>
+            <pc:docMk/>
+            <pc:sldMk cId="1501170907" sldId="256"/>
+            <ac:spMk id="120" creationId="{B5FAFD36-E7BE-8A22-0C52-FA46F61778F0}"/>
+          </ac:spMkLst>
+        </pc:spChg>
+        <pc:spChg chg="add mod">
+          <ac:chgData name="York, George W CIV USAF USAFA DF/DFEC" userId="1fb5875a-4594-4db2-80fb-f0db3de11280" providerId="ADAL" clId="{09330963-85FD-4C99-A81B-94D0EE5CFFEB}" dt="2026-03-05T22:37:02.711" v="15" actId="1076"/>
+          <ac:spMkLst>
+            <pc:docMk/>
+            <pc:sldMk cId="1501170907" sldId="256"/>
+            <ac:spMk id="132" creationId="{0D9A6022-1D6D-F3DA-CC84-317FF5FD6666}"/>
+          </ac:spMkLst>
+        </pc:spChg>
+        <pc:spChg chg="del">
+          <ac:chgData name="York, George W CIV USAF USAFA DF/DFEC" userId="1fb5875a-4594-4db2-80fb-f0db3de11280" providerId="ADAL" clId="{09330963-85FD-4C99-A81B-94D0EE5CFFEB}" dt="2026-03-05T22:36:35.379" v="13" actId="478"/>
+          <ac:spMkLst>
+            <pc:docMk/>
+            <pc:sldMk cId="1501170907" sldId="256"/>
+            <ac:spMk id="145" creationId="{D48BF948-61BF-AC37-8597-388094170D18}"/>
+          </ac:spMkLst>
+        </pc:spChg>
+        <pc:spChg chg="del">
+          <ac:chgData name="York, George W CIV USAF USAFA DF/DFEC" userId="1fb5875a-4594-4db2-80fb-f0db3de11280" providerId="ADAL" clId="{09330963-85FD-4C99-A81B-94D0EE5CFFEB}" dt="2026-03-05T22:36:35.379" v="13" actId="478"/>
+          <ac:spMkLst>
+            <pc:docMk/>
+            <pc:sldMk cId="1501170907" sldId="256"/>
+            <ac:spMk id="146" creationId="{69719632-7E59-F7B2-AEF4-E4C30AA0AEF2}"/>
+          </ac:spMkLst>
+        </pc:spChg>
+        <pc:spChg chg="del">
+          <ac:chgData name="York, George W CIV USAF USAFA DF/DFEC" userId="1fb5875a-4594-4db2-80fb-f0db3de11280" providerId="ADAL" clId="{09330963-85FD-4C99-A81B-94D0EE5CFFEB}" dt="2026-03-05T22:36:35.379" v="13" actId="478"/>
+          <ac:spMkLst>
+            <pc:docMk/>
+            <pc:sldMk cId="1501170907" sldId="256"/>
+            <ac:spMk id="148" creationId="{6432B689-7D1C-F807-6B45-D8272427DA3A}"/>
+          </ac:spMkLst>
+        </pc:spChg>
+        <pc:spChg chg="del">
+          <ac:chgData name="York, George W CIV USAF USAFA DF/DFEC" userId="1fb5875a-4594-4db2-80fb-f0db3de11280" providerId="ADAL" clId="{09330963-85FD-4C99-A81B-94D0EE5CFFEB}" dt="2026-03-05T22:36:35.379" v="13" actId="478"/>
+          <ac:spMkLst>
+            <pc:docMk/>
+            <pc:sldMk cId="1501170907" sldId="256"/>
+            <ac:spMk id="149" creationId="{831B5896-D57B-4667-02CD-6AAF11DEE5E2}"/>
+          </ac:spMkLst>
+        </pc:spChg>
+        <pc:spChg chg="del">
+          <ac:chgData name="York, George W CIV USAF USAFA DF/DFEC" userId="1fb5875a-4594-4db2-80fb-f0db3de11280" providerId="ADAL" clId="{09330963-85FD-4C99-A81B-94D0EE5CFFEB}" dt="2026-03-05T22:36:35.379" v="13" actId="478"/>
+          <ac:spMkLst>
+            <pc:docMk/>
+            <pc:sldMk cId="1501170907" sldId="256"/>
+            <ac:spMk id="151" creationId="{BC6DDD09-EA41-1470-2429-DBE27164913F}"/>
+          </ac:spMkLst>
+        </pc:spChg>
+        <pc:spChg chg="del">
+          <ac:chgData name="York, George W CIV USAF USAFA DF/DFEC" userId="1fb5875a-4594-4db2-80fb-f0db3de11280" providerId="ADAL" clId="{09330963-85FD-4C99-A81B-94D0EE5CFFEB}" dt="2026-03-05T22:36:35.379" v="13" actId="478"/>
+          <ac:spMkLst>
+            <pc:docMk/>
+            <pc:sldMk cId="1501170907" sldId="256"/>
+            <ac:spMk id="155" creationId="{75FA3F6B-D94A-A494-28FD-7D4F921979A2}"/>
+          </ac:spMkLst>
+        </pc:spChg>
+        <pc:spChg chg="del">
+          <ac:chgData name="York, George W CIV USAF USAFA DF/DFEC" userId="1fb5875a-4594-4db2-80fb-f0db3de11280" providerId="ADAL" clId="{09330963-85FD-4C99-A81B-94D0EE5CFFEB}" dt="2026-03-05T22:37:06.857" v="16" actId="478"/>
+          <ac:spMkLst>
+            <pc:docMk/>
+            <pc:sldMk cId="1501170907" sldId="256"/>
+            <ac:spMk id="160" creationId="{3BF5B236-4D8B-849D-0CDF-2CB1B5EE7284}"/>
+          </ac:spMkLst>
+        </pc:spChg>
+        <pc:spChg chg="del">
+          <ac:chgData name="York, George W CIV USAF USAFA DF/DFEC" userId="1fb5875a-4594-4db2-80fb-f0db3de11280" providerId="ADAL" clId="{09330963-85FD-4C99-A81B-94D0EE5CFFEB}" dt="2026-03-05T22:37:09.590" v="17" actId="478"/>
+          <ac:spMkLst>
+            <pc:docMk/>
+            <pc:sldMk cId="1501170907" sldId="256"/>
+            <ac:spMk id="161" creationId="{0E9784F2-B3AB-C0FA-FDFE-48C83AB9B12E}"/>
+          </ac:spMkLst>
+        </pc:spChg>
+        <pc:spChg chg="add mod">
+          <ac:chgData name="York, George W CIV USAF USAFA DF/DFEC" userId="1fb5875a-4594-4db2-80fb-f0db3de11280" providerId="ADAL" clId="{09330963-85FD-4C99-A81B-94D0EE5CFFEB}" dt="2026-03-05T22:37:02.711" v="15" actId="1076"/>
+          <ac:spMkLst>
+            <pc:docMk/>
+            <pc:sldMk cId="1501170907" sldId="256"/>
+            <ac:spMk id="184" creationId="{58EBC1B8-4825-3984-18AF-440ADACF2ABF}"/>
+          </ac:spMkLst>
+        </pc:spChg>
+        <pc:spChg chg="add mod">
+          <ac:chgData name="York, George W CIV USAF USAFA DF/DFEC" userId="1fb5875a-4594-4db2-80fb-f0db3de11280" providerId="ADAL" clId="{09330963-85FD-4C99-A81B-94D0EE5CFFEB}" dt="2026-03-05T22:37:02.711" v="15" actId="1076"/>
+          <ac:spMkLst>
+            <pc:docMk/>
+            <pc:sldMk cId="1501170907" sldId="256"/>
+            <ac:spMk id="189" creationId="{0E85AB3B-858D-5BF6-ED0E-B3C0624C86F7}"/>
+          </ac:spMkLst>
+        </pc:spChg>
+        <pc:spChg chg="add mod">
+          <ac:chgData name="York, George W CIV USAF USAFA DF/DFEC" userId="1fb5875a-4594-4db2-80fb-f0db3de11280" providerId="ADAL" clId="{09330963-85FD-4C99-A81B-94D0EE5CFFEB}" dt="2026-03-05T22:38:22.200" v="19" actId="1076"/>
+          <ac:spMkLst>
+            <pc:docMk/>
+            <pc:sldMk cId="1501170907" sldId="256"/>
+            <ac:spMk id="199" creationId="{5BBDEEB3-B3C4-1244-0A2C-DEAADDC8E330}"/>
+          </ac:spMkLst>
+        </pc:spChg>
+        <pc:spChg chg="del">
+          <ac:chgData name="York, George W CIV USAF USAFA DF/DFEC" userId="1fb5875a-4594-4db2-80fb-f0db3de11280" providerId="ADAL" clId="{09330963-85FD-4C99-A81B-94D0EE5CFFEB}" dt="2026-03-05T22:36:35.379" v="13" actId="478"/>
+          <ac:spMkLst>
+            <pc:docMk/>
+            <pc:sldMk cId="1501170907" sldId="256"/>
+            <ac:spMk id="270" creationId="{E335D321-53C8-872A-430E-7732E67F0A79}"/>
+          </ac:spMkLst>
+        </pc:spChg>
+        <pc:grpChg chg="add mod">
+          <ac:chgData name="York, George W CIV USAF USAFA DF/DFEC" userId="1fb5875a-4594-4db2-80fb-f0db3de11280" providerId="ADAL" clId="{09330963-85FD-4C99-A81B-94D0EE5CFFEB}" dt="2026-03-05T22:33:38.945" v="6" actId="1076"/>
+          <ac:grpSpMkLst>
+            <pc:docMk/>
+            <pc:sldMk cId="1501170907" sldId="256"/>
+            <ac:grpSpMk id="59" creationId="{A7BBB30E-D888-2009-5408-9916614F6B62}"/>
+          </ac:grpSpMkLst>
+        </pc:grpChg>
+        <pc:grpChg chg="add mod">
+          <ac:chgData name="York, George W CIV USAF USAFA DF/DFEC" userId="1fb5875a-4594-4db2-80fb-f0db3de11280" providerId="ADAL" clId="{09330963-85FD-4C99-A81B-94D0EE5CFFEB}" dt="2026-03-05T22:37:02.711" v="15" actId="1076"/>
+          <ac:grpSpMkLst>
+            <pc:docMk/>
+            <pc:sldMk cId="1501170907" sldId="256"/>
+            <ac:grpSpMk id="137" creationId="{8B5AEF34-ADB3-754B-DE80-ABD4D3F0450B}"/>
+          </ac:grpSpMkLst>
+        </pc:grpChg>
+        <pc:picChg chg="add mod">
+          <ac:chgData name="York, George W CIV USAF USAFA DF/DFEC" userId="1fb5875a-4594-4db2-80fb-f0db3de11280" providerId="ADAL" clId="{09330963-85FD-4C99-A81B-94D0EE5CFFEB}" dt="2026-03-05T22:32:55.650" v="2" actId="1076"/>
+          <ac:picMkLst>
+            <pc:docMk/>
+            <pc:sldMk cId="1501170907" sldId="256"/>
+            <ac:picMk id="52" creationId="{6A6C7C57-77EC-C685-E542-B85B64EC2272}"/>
+          </ac:picMkLst>
+        </pc:picChg>
+        <pc:picChg chg="mod">
+          <ac:chgData name="York, George W CIV USAF USAFA DF/DFEC" userId="1fb5875a-4594-4db2-80fb-f0db3de11280" providerId="ADAL" clId="{09330963-85FD-4C99-A81B-94D0EE5CFFEB}" dt="2026-03-05T22:33:30.055" v="5"/>
+          <ac:picMkLst>
+            <pc:docMk/>
+            <pc:sldMk cId="1501170907" sldId="256"/>
+            <ac:picMk id="66" creationId="{A404E675-8456-AD52-514C-9920A86819FF}"/>
+          </ac:picMkLst>
+        </pc:picChg>
+        <pc:cxnChg chg="del">
+          <ac:chgData name="York, George W CIV USAF USAFA DF/DFEC" userId="1fb5875a-4594-4db2-80fb-f0db3de11280" providerId="ADAL" clId="{09330963-85FD-4C99-A81B-94D0EE5CFFEB}" dt="2026-03-05T22:36:35.379" v="13" actId="478"/>
+          <ac:cxnSpMkLst>
+            <pc:docMk/>
+            <pc:sldMk cId="1501170907" sldId="256"/>
+            <ac:cxnSpMk id="36" creationId="{1EE0AD67-CB2F-1EA8-73F4-A610CE181BCB}"/>
+          </ac:cxnSpMkLst>
+        </pc:cxnChg>
+        <pc:cxnChg chg="add mod">
+          <ac:chgData name="York, George W CIV USAF USAFA DF/DFEC" userId="1fb5875a-4594-4db2-80fb-f0db3de11280" providerId="ADAL" clId="{09330963-85FD-4C99-A81B-94D0EE5CFFEB}" dt="2026-03-05T22:32:55.650" v="2" actId="1076"/>
+          <ac:cxnSpMkLst>
+            <pc:docMk/>
+            <pc:sldMk cId="1501170907" sldId="256"/>
+            <ac:cxnSpMk id="57" creationId="{C6FDD443-491D-B8C9-0359-814E397D9C25}"/>
+          </ac:cxnSpMkLst>
+        </pc:cxnChg>
+        <pc:cxnChg chg="add mod">
+          <ac:chgData name="York, George W CIV USAF USAFA DF/DFEC" userId="1fb5875a-4594-4db2-80fb-f0db3de11280" providerId="ADAL" clId="{09330963-85FD-4C99-A81B-94D0EE5CFFEB}" dt="2026-03-05T22:32:55.650" v="2" actId="1076"/>
+          <ac:cxnSpMkLst>
+            <pc:docMk/>
+            <pc:sldMk cId="1501170907" sldId="256"/>
+            <ac:cxnSpMk id="58" creationId="{6F75C507-0674-59E5-259C-2F94883C5048}"/>
+          </ac:cxnSpMkLst>
+        </pc:cxnChg>
+        <pc:cxnChg chg="mod">
+          <ac:chgData name="York, George W CIV USAF USAFA DF/DFEC" userId="1fb5875a-4594-4db2-80fb-f0db3de11280" providerId="ADAL" clId="{09330963-85FD-4C99-A81B-94D0EE5CFFEB}" dt="2026-03-05T22:33:30.055" v="5"/>
+          <ac:cxnSpMkLst>
+            <pc:docMk/>
+            <pc:sldMk cId="1501170907" sldId="256"/>
+            <ac:cxnSpMk id="67" creationId="{E2589DE8-97EF-80AF-BA79-119014A37941}"/>
+          </ac:cxnSpMkLst>
+        </pc:cxnChg>
+        <pc:cxnChg chg="mod">
+          <ac:chgData name="York, George W CIV USAF USAFA DF/DFEC" userId="1fb5875a-4594-4db2-80fb-f0db3de11280" providerId="ADAL" clId="{09330963-85FD-4C99-A81B-94D0EE5CFFEB}" dt="2026-03-05T22:33:30.055" v="5"/>
+          <ac:cxnSpMkLst>
+            <pc:docMk/>
+            <pc:sldMk cId="1501170907" sldId="256"/>
+            <ac:cxnSpMk id="75" creationId="{DD16B353-8132-284E-F417-41F2A2DEDC16}"/>
+          </ac:cxnSpMkLst>
+        </pc:cxnChg>
+        <pc:cxnChg chg="add mod">
+          <ac:chgData name="York, George W CIV USAF USAFA DF/DFEC" userId="1fb5875a-4594-4db2-80fb-f0db3de11280" providerId="ADAL" clId="{09330963-85FD-4C99-A81B-94D0EE5CFFEB}" dt="2026-03-05T22:34:07.944" v="9" actId="1076"/>
+          <ac:cxnSpMkLst>
+            <pc:docMk/>
+            <pc:sldMk cId="1501170907" sldId="256"/>
+            <ac:cxnSpMk id="78" creationId="{C0897BF0-6C1F-2380-907E-3CFD22113357}"/>
+          </ac:cxnSpMkLst>
+        </pc:cxnChg>
+        <pc:cxnChg chg="add mod">
+          <ac:chgData name="York, George W CIV USAF USAFA DF/DFEC" userId="1fb5875a-4594-4db2-80fb-f0db3de11280" providerId="ADAL" clId="{09330963-85FD-4C99-A81B-94D0EE5CFFEB}" dt="2026-03-05T22:34:07.944" v="9" actId="1076"/>
+          <ac:cxnSpMkLst>
+            <pc:docMk/>
+            <pc:sldMk cId="1501170907" sldId="256"/>
+            <ac:cxnSpMk id="80" creationId="{3211B8BE-2D5F-DC40-493A-A011203B18F9}"/>
+          </ac:cxnSpMkLst>
+        </pc:cxnChg>
+        <pc:cxnChg chg="add mod">
+          <ac:chgData name="York, George W CIV USAF USAFA DF/DFEC" userId="1fb5875a-4594-4db2-80fb-f0db3de11280" providerId="ADAL" clId="{09330963-85FD-4C99-A81B-94D0EE5CFFEB}" dt="2026-03-05T22:34:07.944" v="9" actId="1076"/>
+          <ac:cxnSpMkLst>
+            <pc:docMk/>
+            <pc:sldMk cId="1501170907" sldId="256"/>
+            <ac:cxnSpMk id="86" creationId="{2999216A-F5BD-5C3B-C483-7A84E97A2C87}"/>
+          </ac:cxnSpMkLst>
+        </pc:cxnChg>
+        <pc:cxnChg chg="del">
+          <ac:chgData name="York, George W CIV USAF USAFA DF/DFEC" userId="1fb5875a-4594-4db2-80fb-f0db3de11280" providerId="ADAL" clId="{09330963-85FD-4C99-A81B-94D0EE5CFFEB}" dt="2026-03-05T22:32:49.073" v="0" actId="478"/>
+          <ac:cxnSpMkLst>
+            <pc:docMk/>
+            <pc:sldMk cId="1501170907" sldId="256"/>
+            <ac:cxnSpMk id="105" creationId="{96194351-1F6F-6ECD-551A-2B077972FE1F}"/>
+          </ac:cxnSpMkLst>
+        </pc:cxnChg>
+        <pc:cxnChg chg="add mod">
+          <ac:chgData name="York, George W CIV USAF USAFA DF/DFEC" userId="1fb5875a-4594-4db2-80fb-f0db3de11280" providerId="ADAL" clId="{09330963-85FD-4C99-A81B-94D0EE5CFFEB}" dt="2026-03-05T22:36:14.760" v="12" actId="1076"/>
+          <ac:cxnSpMkLst>
+            <pc:docMk/>
+            <pc:sldMk cId="1501170907" sldId="256"/>
+            <ac:cxnSpMk id="106" creationId="{CE17DD74-D95F-A684-5F8D-79C75CBE937A}"/>
+          </ac:cxnSpMkLst>
+        </pc:cxnChg>
+        <pc:cxnChg chg="add mod">
+          <ac:chgData name="York, George W CIV USAF USAFA DF/DFEC" userId="1fb5875a-4594-4db2-80fb-f0db3de11280" providerId="ADAL" clId="{09330963-85FD-4C99-A81B-94D0EE5CFFEB}" dt="2026-03-05T22:36:14.760" v="12" actId="1076"/>
+          <ac:cxnSpMkLst>
+            <pc:docMk/>
+            <pc:sldMk cId="1501170907" sldId="256"/>
+            <ac:cxnSpMk id="109" creationId="{2EE93D9E-E510-40BC-F5F1-AAE75522A320}"/>
+          </ac:cxnSpMkLst>
+        </pc:cxnChg>
+        <pc:cxnChg chg="add mod">
+          <ac:chgData name="York, George W CIV USAF USAFA DF/DFEC" userId="1fb5875a-4594-4db2-80fb-f0db3de11280" providerId="ADAL" clId="{09330963-85FD-4C99-A81B-94D0EE5CFFEB}" dt="2026-03-05T22:36:14.760" v="12" actId="1076"/>
+          <ac:cxnSpMkLst>
+            <pc:docMk/>
+            <pc:sldMk cId="1501170907" sldId="256"/>
+            <ac:cxnSpMk id="110" creationId="{24CA2D82-8BE4-31B9-200E-D75DD793007C}"/>
+          </ac:cxnSpMkLst>
+        </pc:cxnChg>
+        <pc:cxnChg chg="add mod">
+          <ac:chgData name="York, George W CIV USAF USAFA DF/DFEC" userId="1fb5875a-4594-4db2-80fb-f0db3de11280" providerId="ADAL" clId="{09330963-85FD-4C99-A81B-94D0EE5CFFEB}" dt="2026-03-05T22:37:02.711" v="15" actId="1076"/>
+          <ac:cxnSpMkLst>
+            <pc:docMk/>
+            <pc:sldMk cId="1501170907" sldId="256"/>
+            <ac:cxnSpMk id="121" creationId="{C3290510-9088-6A3E-5DFA-AEBEB6FBD1A1}"/>
+          </ac:cxnSpMkLst>
+        </pc:cxnChg>
+        <pc:cxnChg chg="mod">
+          <ac:chgData name="York, George W CIV USAF USAFA DF/DFEC" userId="1fb5875a-4594-4db2-80fb-f0db3de11280" providerId="ADAL" clId="{09330963-85FD-4C99-A81B-94D0EE5CFFEB}" dt="2026-03-05T22:36:51.305" v="14"/>
+          <ac:cxnSpMkLst>
+            <pc:docMk/>
+            <pc:sldMk cId="1501170907" sldId="256"/>
+            <ac:cxnSpMk id="140" creationId="{1CDC5C6D-A82B-99F5-6FC5-EEDD54CCF190}"/>
+          </ac:cxnSpMkLst>
+        </pc:cxnChg>
+        <pc:cxnChg chg="mod">
+          <ac:chgData name="York, George W CIV USAF USAFA DF/DFEC" userId="1fb5875a-4594-4db2-80fb-f0db3de11280" providerId="ADAL" clId="{09330963-85FD-4C99-A81B-94D0EE5CFFEB}" dt="2026-03-05T22:36:51.305" v="14"/>
+          <ac:cxnSpMkLst>
+            <pc:docMk/>
+            <pc:sldMk cId="1501170907" sldId="256"/>
+            <ac:cxnSpMk id="144" creationId="{735B5BAB-BBDC-4A8E-3A36-97A6349BBE95}"/>
+          </ac:cxnSpMkLst>
+        </pc:cxnChg>
+        <pc:cxnChg chg="del">
+          <ac:chgData name="York, George W CIV USAF USAFA DF/DFEC" userId="1fb5875a-4594-4db2-80fb-f0db3de11280" providerId="ADAL" clId="{09330963-85FD-4C99-A81B-94D0EE5CFFEB}" dt="2026-03-05T22:36:35.379" v="13" actId="478"/>
+          <ac:cxnSpMkLst>
+            <pc:docMk/>
+            <pc:sldMk cId="1501170907" sldId="256"/>
+            <ac:cxnSpMk id="156" creationId="{4E8E377D-848A-C4CD-E531-28E5114DF352}"/>
+          </ac:cxnSpMkLst>
+        </pc:cxnChg>
+        <pc:cxnChg chg="add mod">
+          <ac:chgData name="York, George W CIV USAF USAFA DF/DFEC" userId="1fb5875a-4594-4db2-80fb-f0db3de11280" providerId="ADAL" clId="{09330963-85FD-4C99-A81B-94D0EE5CFFEB}" dt="2026-03-05T22:37:02.711" v="15" actId="1076"/>
+          <ac:cxnSpMkLst>
+            <pc:docMk/>
+            <pc:sldMk cId="1501170907" sldId="256"/>
+            <ac:cxnSpMk id="174" creationId="{73CA6134-70D5-34FA-00BD-59378BC13DD1}"/>
+          </ac:cxnSpMkLst>
+        </pc:cxnChg>
+        <pc:cxnChg chg="mod">
+          <ac:chgData name="York, George W CIV USAF USAFA DF/DFEC" userId="1fb5875a-4594-4db2-80fb-f0db3de11280" providerId="ADAL" clId="{09330963-85FD-4C99-A81B-94D0EE5CFFEB}" dt="2026-03-05T22:37:02.711" v="15" actId="1076"/>
+          <ac:cxnSpMkLst>
+            <pc:docMk/>
+            <pc:sldMk cId="1501170907" sldId="256"/>
+            <ac:cxnSpMk id="187" creationId="{0D200FF7-E333-ACB1-85A2-D9AC30E6FCDF}"/>
+          </ac:cxnSpMkLst>
+        </pc:cxnChg>
+        <pc:cxnChg chg="mod">
+          <ac:chgData name="York, George W CIV USAF USAFA DF/DFEC" userId="1fb5875a-4594-4db2-80fb-f0db3de11280" providerId="ADAL" clId="{09330963-85FD-4C99-A81B-94D0EE5CFFEB}" dt="2026-03-05T22:37:02.711" v="15" actId="1076"/>
+          <ac:cxnSpMkLst>
+            <pc:docMk/>
+            <pc:sldMk cId="1501170907" sldId="256"/>
+            <ac:cxnSpMk id="198" creationId="{E418A0F2-C32C-CA49-AA0F-30FCCCAA2766}"/>
+          </ac:cxnSpMkLst>
+        </pc:cxnChg>
+        <pc:cxnChg chg="del">
+          <ac:chgData name="York, George W CIV USAF USAFA DF/DFEC" userId="1fb5875a-4594-4db2-80fb-f0db3de11280" providerId="ADAL" clId="{09330963-85FD-4C99-A81B-94D0EE5CFFEB}" dt="2026-03-05T22:33:29.304" v="4" actId="478"/>
+          <ac:cxnSpMkLst>
+            <pc:docMk/>
+            <pc:sldMk cId="1501170907" sldId="256"/>
+            <ac:cxnSpMk id="245" creationId="{44285445-3673-F463-34B1-B7F351676027}"/>
+          </ac:cxnSpMkLst>
+        </pc:cxnChg>
+        <pc:cxnChg chg="del">
+          <ac:chgData name="York, George W CIV USAF USAFA DF/DFEC" userId="1fb5875a-4594-4db2-80fb-f0db3de11280" providerId="ADAL" clId="{09330963-85FD-4C99-A81B-94D0EE5CFFEB}" dt="2026-03-05T22:36:08.988" v="10" actId="478"/>
+          <ac:cxnSpMkLst>
+            <pc:docMk/>
+            <pc:sldMk cId="1501170907" sldId="256"/>
+            <ac:cxnSpMk id="275" creationId="{FF5E826E-C5DA-266A-3DEA-9D97594449EE}"/>
+          </ac:cxnSpMkLst>
+        </pc:cxnChg>
+        <pc:cxnChg chg="del">
+          <ac:chgData name="York, George W CIV USAF USAFA DF/DFEC" userId="1fb5875a-4594-4db2-80fb-f0db3de11280" providerId="ADAL" clId="{09330963-85FD-4C99-A81B-94D0EE5CFFEB}" dt="2026-03-05T22:34:02.253" v="7" actId="478"/>
+          <ac:cxnSpMkLst>
+            <pc:docMk/>
+            <pc:sldMk cId="1501170907" sldId="256"/>
+            <ac:cxnSpMk id="315" creationId="{CC2E6CF6-7F9B-DF2E-8401-A11C6FFE7D1D}"/>
+          </ac:cxnSpMkLst>
+        </pc:cxnChg>
+      </pc:sldChg>
+    </pc:docChg>
+  </pc:docChgLst>
+</pc:chgInfo>
+</file>
+
 <file path=ppt/slideLayouts/slideLayout1.xml><?xml version="1.0" encoding="utf-8"?>
 <p:sldLayout xmlns:a="http://schemas.openxmlformats.org/drawingml/2006/main" xmlns:r="http://schemas.openxmlformats.org/officeDocument/2006/relationships" xmlns:p="http://schemas.openxmlformats.org/presentationml/2006/main" type="title" preserve="1">
   <p:cSld name="Title Slide">
@@ -259,7 +632,7 @@
           <a:p>
             <a:fld id="{51AFF834-1BEC-4F95-9622-28B5DCC1FE16}" type="datetimeFigureOut">
               <a:rPr lang="en-US" smtClean="0"/>
-              <a:t>7/1/2025</a:t>
+              <a:t>3/5/2026</a:t>
             </a:fld>
             <a:endParaRPr lang="en-US"/>
           </a:p>
@@ -457,7 +830,7 @@
           <a:p>
             <a:fld id="{51AFF834-1BEC-4F95-9622-28B5DCC1FE16}" type="datetimeFigureOut">
               <a:rPr lang="en-US" smtClean="0"/>
-              <a:t>7/1/2025</a:t>
+              <a:t>3/5/2026</a:t>
             </a:fld>
             <a:endParaRPr lang="en-US"/>
           </a:p>
@@ -665,7 +1038,7 @@
           <a:p>
             <a:fld id="{51AFF834-1BEC-4F95-9622-28B5DCC1FE16}" type="datetimeFigureOut">
               <a:rPr lang="en-US" smtClean="0"/>
-              <a:t>7/1/2025</a:t>
+              <a:t>3/5/2026</a:t>
             </a:fld>
             <a:endParaRPr lang="en-US"/>
           </a:p>
@@ -863,7 +1236,7 @@
           <a:p>
             <a:fld id="{51AFF834-1BEC-4F95-9622-28B5DCC1FE16}" type="datetimeFigureOut">
               <a:rPr lang="en-US" smtClean="0"/>
-              <a:t>7/1/2025</a:t>
+              <a:t>3/5/2026</a:t>
             </a:fld>
             <a:endParaRPr lang="en-US"/>
           </a:p>
@@ -1138,7 +1511,7 @@
           <a:p>
             <a:fld id="{51AFF834-1BEC-4F95-9622-28B5DCC1FE16}" type="datetimeFigureOut">
               <a:rPr lang="en-US" smtClean="0"/>
-              <a:t>7/1/2025</a:t>
+              <a:t>3/5/2026</a:t>
             </a:fld>
             <a:endParaRPr lang="en-US"/>
           </a:p>
@@ -1403,7 +1776,7 @@
           <a:p>
             <a:fld id="{51AFF834-1BEC-4F95-9622-28B5DCC1FE16}" type="datetimeFigureOut">
               <a:rPr lang="en-US" smtClean="0"/>
-              <a:t>7/1/2025</a:t>
+              <a:t>3/5/2026</a:t>
             </a:fld>
             <a:endParaRPr lang="en-US"/>
           </a:p>
@@ -1815,7 +2188,7 @@
           <a:p>
             <a:fld id="{51AFF834-1BEC-4F95-9622-28B5DCC1FE16}" type="datetimeFigureOut">
               <a:rPr lang="en-US" smtClean="0"/>
-              <a:t>7/1/2025</a:t>
+              <a:t>3/5/2026</a:t>
             </a:fld>
             <a:endParaRPr lang="en-US"/>
           </a:p>
@@ -1956,7 +2329,7 @@
           <a:p>
             <a:fld id="{51AFF834-1BEC-4F95-9622-28B5DCC1FE16}" type="datetimeFigureOut">
               <a:rPr lang="en-US" smtClean="0"/>
-              <a:t>7/1/2025</a:t>
+              <a:t>3/5/2026</a:t>
             </a:fld>
             <a:endParaRPr lang="en-US"/>
           </a:p>
@@ -2069,7 +2442,7 @@
           <a:p>
             <a:fld id="{51AFF834-1BEC-4F95-9622-28B5DCC1FE16}" type="datetimeFigureOut">
               <a:rPr lang="en-US" smtClean="0"/>
-              <a:t>7/1/2025</a:t>
+              <a:t>3/5/2026</a:t>
             </a:fld>
             <a:endParaRPr lang="en-US"/>
           </a:p>
@@ -2380,7 +2753,7 @@
           <a:p>
             <a:fld id="{51AFF834-1BEC-4F95-9622-28B5DCC1FE16}" type="datetimeFigureOut">
               <a:rPr lang="en-US" smtClean="0"/>
-              <a:t>7/1/2025</a:t>
+              <a:t>3/5/2026</a:t>
             </a:fld>
             <a:endParaRPr lang="en-US"/>
           </a:p>
@@ -2668,7 +3041,7 @@
           <a:p>
             <a:fld id="{51AFF834-1BEC-4F95-9622-28B5DCC1FE16}" type="datetimeFigureOut">
               <a:rPr lang="en-US" smtClean="0"/>
-              <a:t>7/1/2025</a:t>
+              <a:t>3/5/2026</a:t>
             </a:fld>
             <a:endParaRPr lang="en-US"/>
           </a:p>
@@ -2909,7 +3282,7 @@
           <a:p>
             <a:fld id="{51AFF834-1BEC-4F95-9622-28B5DCC1FE16}" type="datetimeFigureOut">
               <a:rPr lang="en-US" smtClean="0"/>
-              <a:t>7/1/2025</a:t>
+              <a:t>3/5/2026</a:t>
             </a:fld>
             <a:endParaRPr lang="en-US"/>
           </a:p>
@@ -3328,6 +3701,58 @@
       </p:grpSpPr>
       <p:sp>
         <p:nvSpPr>
+          <p:cNvPr id="90" name="Rectangle 89">
+            <a:extLst>
+              <a:ext uri="{FF2B5EF4-FFF2-40B4-BE49-F238E27FC236}">
+                <a16:creationId xmlns:a16="http://schemas.microsoft.com/office/drawing/2014/main" id="{E5E3C8FC-BB27-8EAD-AA8B-33B131880EBA}"/>
+              </a:ext>
+            </a:extLst>
+          </p:cNvPr>
+          <p:cNvSpPr/>
+          <p:nvPr/>
+        </p:nvSpPr>
+        <p:spPr>
+          <a:xfrm>
+            <a:off x="3538057" y="3099557"/>
+            <a:ext cx="865785" cy="1243414"/>
+          </a:xfrm>
+          <a:prstGeom prst="rect">
+            <a:avLst/>
+          </a:prstGeom>
+          <a:solidFill>
+            <a:schemeClr val="bg1"/>
+          </a:solidFill>
+        </p:spPr>
+        <p:style>
+          <a:lnRef idx="2">
+            <a:schemeClr val="accent1">
+              <a:shade val="15000"/>
+            </a:schemeClr>
+          </a:lnRef>
+          <a:fillRef idx="1">
+            <a:schemeClr val="accent1"/>
+          </a:fillRef>
+          <a:effectRef idx="0">
+            <a:schemeClr val="accent1"/>
+          </a:effectRef>
+          <a:fontRef idx="minor">
+            <a:schemeClr val="lt1"/>
+          </a:fontRef>
+        </p:style>
+        <p:txBody>
+          <a:bodyPr rtlCol="0" anchor="ctr"/>
+          <a:lstStyle/>
+          <a:p>
+            <a:pPr algn="ctr"/>
+            <a:r>
+              <a:rPr lang="en-US" dirty="0"/>
+              <a:t>PC</a:t>
+            </a:r>
+          </a:p>
+        </p:txBody>
+      </p:sp>
+      <p:sp>
+        <p:nvSpPr>
           <p:cNvPr id="4" name="TextBox 3">
             <a:extLst>
               <a:ext uri="{FF2B5EF4-FFF2-40B4-BE49-F238E27FC236}">
@@ -5242,58 +5667,6 @@
       </p:cxnSp>
       <p:sp>
         <p:nvSpPr>
-          <p:cNvPr id="90" name="Rectangle 89">
-            <a:extLst>
-              <a:ext uri="{FF2B5EF4-FFF2-40B4-BE49-F238E27FC236}">
-                <a16:creationId xmlns:a16="http://schemas.microsoft.com/office/drawing/2014/main" id="{E5E3C8FC-BB27-8EAD-AA8B-33B131880EBA}"/>
-              </a:ext>
-            </a:extLst>
-          </p:cNvPr>
-          <p:cNvSpPr/>
-          <p:nvPr/>
-        </p:nvSpPr>
-        <p:spPr>
-          <a:xfrm>
-            <a:off x="3538057" y="3099557"/>
-            <a:ext cx="865785" cy="1243414"/>
-          </a:xfrm>
-          <a:prstGeom prst="rect">
-            <a:avLst/>
-          </a:prstGeom>
-          <a:solidFill>
-            <a:schemeClr val="bg1"/>
-          </a:solidFill>
-        </p:spPr>
-        <p:style>
-          <a:lnRef idx="2">
-            <a:schemeClr val="accent1">
-              <a:shade val="15000"/>
-            </a:schemeClr>
-          </a:lnRef>
-          <a:fillRef idx="1">
-            <a:schemeClr val="accent1"/>
-          </a:fillRef>
-          <a:effectRef idx="0">
-            <a:schemeClr val="accent1"/>
-          </a:effectRef>
-          <a:fontRef idx="minor">
-            <a:schemeClr val="lt1"/>
-          </a:fontRef>
-        </p:style>
-        <p:txBody>
-          <a:bodyPr rtlCol="0" anchor="ctr"/>
-          <a:lstStyle/>
-          <a:p>
-            <a:pPr algn="ctr"/>
-            <a:r>
-              <a:rPr lang="en-US" dirty="0"/>
-              <a:t>PC</a:t>
-            </a:r>
-          </a:p>
-        </p:txBody>
-      </p:sp>
-      <p:sp>
-        <p:nvSpPr>
           <p:cNvPr id="91" name="TextBox 90">
             <a:extLst>
               <a:ext uri="{FF2B5EF4-FFF2-40B4-BE49-F238E27FC236}">
@@ -5788,48 +6161,6 @@
           </a:fontRef>
         </p:style>
       </p:cxnSp>
-      <p:cxnSp>
-        <p:nvCxnSpPr>
-          <p:cNvPr id="105" name="Straight Arrow Connector 104">
-            <a:extLst>
-              <a:ext uri="{FF2B5EF4-FFF2-40B4-BE49-F238E27FC236}">
-                <a16:creationId xmlns:a16="http://schemas.microsoft.com/office/drawing/2014/main" id="{96194351-1F6F-6ECD-551A-2B077972FE1F}"/>
-              </a:ext>
-            </a:extLst>
-          </p:cNvPr>
-          <p:cNvCxnSpPr/>
-          <p:nvPr/>
-        </p:nvCxnSpPr>
-        <p:spPr>
-          <a:xfrm>
-            <a:off x="3359244" y="4256626"/>
-            <a:ext cx="177808" cy="0"/>
-          </a:xfrm>
-          <a:prstGeom prst="straightConnector1">
-            <a:avLst/>
-          </a:prstGeom>
-          <a:ln>
-            <a:solidFill>
-              <a:srgbClr val="FF0000"/>
-            </a:solidFill>
-            <a:tailEnd type="triangle"/>
-          </a:ln>
-        </p:spPr>
-        <p:style>
-          <a:lnRef idx="2">
-            <a:schemeClr val="accent1"/>
-          </a:lnRef>
-          <a:fillRef idx="0">
-            <a:schemeClr val="accent1"/>
-          </a:fillRef>
-          <a:effectRef idx="1">
-            <a:schemeClr val="accent1"/>
-          </a:effectRef>
-          <a:fontRef idx="minor">
-            <a:schemeClr val="tx1"/>
-          </a:fontRef>
-        </p:style>
-      </p:cxnSp>
       <p:sp>
         <p:nvSpPr>
           <p:cNvPr id="111" name="Rectangle 110">
@@ -6367,213 +6698,12 @@
           </a:fontRef>
         </p:style>
       </p:cxnSp>
-      <p:sp>
-        <p:nvSpPr>
-          <p:cNvPr id="145" name="Rectangle 144">
-            <a:extLst>
-              <a:ext uri="{FF2B5EF4-FFF2-40B4-BE49-F238E27FC236}">
-                <a16:creationId xmlns:a16="http://schemas.microsoft.com/office/drawing/2014/main" id="{D48BF948-61BF-AC37-8597-388094170D18}"/>
-              </a:ext>
-            </a:extLst>
-          </p:cNvPr>
-          <p:cNvSpPr/>
-          <p:nvPr/>
-        </p:nvSpPr>
-        <p:spPr>
-          <a:xfrm>
-            <a:off x="3509538" y="1883241"/>
-            <a:ext cx="865785" cy="1056594"/>
-          </a:xfrm>
-          <a:prstGeom prst="rect">
-            <a:avLst/>
-          </a:prstGeom>
-          <a:solidFill>
-            <a:schemeClr val="bg1"/>
-          </a:solidFill>
-        </p:spPr>
-        <p:style>
-          <a:lnRef idx="2">
-            <a:schemeClr val="accent1">
-              <a:shade val="15000"/>
-            </a:schemeClr>
-          </a:lnRef>
-          <a:fillRef idx="1">
-            <a:schemeClr val="accent1"/>
-          </a:fillRef>
-          <a:effectRef idx="0">
-            <a:schemeClr val="accent1"/>
-          </a:effectRef>
-          <a:fontRef idx="minor">
-            <a:schemeClr val="lt1"/>
-          </a:fontRef>
-        </p:style>
-        <p:txBody>
-          <a:bodyPr rtlCol="0" anchor="ctr"/>
-          <a:lstStyle/>
-          <a:p>
-            <a:pPr algn="ctr"/>
-            <a:r>
-              <a:rPr lang="en-US" dirty="0"/>
-              <a:t>PC</a:t>
-            </a:r>
-          </a:p>
-        </p:txBody>
-      </p:sp>
-      <p:sp>
-        <p:nvSpPr>
-          <p:cNvPr id="146" name="TextBox 145">
-            <a:extLst>
-              <a:ext uri="{FF2B5EF4-FFF2-40B4-BE49-F238E27FC236}">
-                <a16:creationId xmlns:a16="http://schemas.microsoft.com/office/drawing/2014/main" id="{69719632-7E59-F7B2-AEF4-E4C30AA0AEF2}"/>
-              </a:ext>
-            </a:extLst>
-          </p:cNvPr>
-          <p:cNvSpPr txBox="1"/>
-          <p:nvPr/>
-        </p:nvSpPr>
-        <p:spPr>
-          <a:xfrm>
-            <a:off x="3688008" y="1852238"/>
-            <a:ext cx="527709" cy="400110"/>
-          </a:xfrm>
-          <a:prstGeom prst="rect">
-            <a:avLst/>
-          </a:prstGeom>
-          <a:noFill/>
-        </p:spPr>
-        <p:txBody>
-          <a:bodyPr wrap="none" rtlCol="0">
-            <a:spAutoFit/>
-          </a:bodyPr>
-          <a:lstStyle/>
-          <a:p>
-            <a:pPr algn="ctr"/>
-            <a:r>
-              <a:rPr lang="en-US" sz="1000" dirty="0"/>
-              <a:t>Offset</a:t>
-            </a:r>
-          </a:p>
-          <a:p>
-            <a:pPr algn="ctr"/>
-            <a:endParaRPr lang="en-US" sz="1000" dirty="0"/>
-          </a:p>
-        </p:txBody>
-      </p:sp>
-      <p:sp>
-        <p:nvSpPr>
-          <p:cNvPr id="148" name="TextBox 147">
-            <a:extLst>
-              <a:ext uri="{FF2B5EF4-FFF2-40B4-BE49-F238E27FC236}">
-                <a16:creationId xmlns:a16="http://schemas.microsoft.com/office/drawing/2014/main" id="{6432B689-7D1C-F807-6B45-D8272427DA3A}"/>
-              </a:ext>
-            </a:extLst>
-          </p:cNvPr>
-          <p:cNvSpPr txBox="1"/>
-          <p:nvPr/>
-        </p:nvSpPr>
-        <p:spPr>
-          <a:xfrm>
-            <a:off x="3459092" y="2100756"/>
-            <a:ext cx="413896" cy="230832"/>
-          </a:xfrm>
-          <a:prstGeom prst="rect">
-            <a:avLst/>
-          </a:prstGeom>
-          <a:noFill/>
-        </p:spPr>
-        <p:txBody>
-          <a:bodyPr wrap="none" rtlCol="0">
-            <a:spAutoFit/>
-          </a:bodyPr>
-          <a:lstStyle/>
-          <a:p>
-            <a:pPr algn="ctr"/>
-            <a:r>
-              <a:rPr lang="en-US" sz="900" dirty="0"/>
-              <a:t>NPC</a:t>
-            </a:r>
-          </a:p>
-        </p:txBody>
-      </p:sp>
-      <p:sp>
-        <p:nvSpPr>
-          <p:cNvPr id="149" name="TextBox 148">
-            <a:extLst>
-              <a:ext uri="{FF2B5EF4-FFF2-40B4-BE49-F238E27FC236}">
-                <a16:creationId xmlns:a16="http://schemas.microsoft.com/office/drawing/2014/main" id="{831B5896-D57B-4667-02CD-6AAF11DEE5E2}"/>
-              </a:ext>
-            </a:extLst>
-          </p:cNvPr>
-          <p:cNvSpPr txBox="1"/>
-          <p:nvPr/>
-        </p:nvSpPr>
-        <p:spPr>
-          <a:xfrm>
-            <a:off x="3473367" y="2290875"/>
-            <a:ext cx="407484" cy="230832"/>
-          </a:xfrm>
-          <a:prstGeom prst="rect">
-            <a:avLst/>
-          </a:prstGeom>
-          <a:noFill/>
-        </p:spPr>
-        <p:txBody>
-          <a:bodyPr wrap="none" rtlCol="0">
-            <a:spAutoFit/>
-          </a:bodyPr>
-          <a:lstStyle/>
-          <a:p>
-            <a:pPr algn="ctr"/>
-            <a:r>
-              <a:rPr lang="en-US" sz="900" dirty="0" err="1"/>
-              <a:t>imm</a:t>
-            </a:r>
-            <a:endParaRPr lang="en-US" sz="900" dirty="0"/>
-          </a:p>
-        </p:txBody>
-      </p:sp>
-      <p:sp>
-        <p:nvSpPr>
-          <p:cNvPr id="151" name="TextBox 150">
-            <a:extLst>
-              <a:ext uri="{FF2B5EF4-FFF2-40B4-BE49-F238E27FC236}">
-                <a16:creationId xmlns:a16="http://schemas.microsoft.com/office/drawing/2014/main" id="{BC6DDD09-EA41-1470-2429-DBE27164913F}"/>
-              </a:ext>
-            </a:extLst>
-          </p:cNvPr>
-          <p:cNvSpPr txBox="1"/>
-          <p:nvPr/>
-        </p:nvSpPr>
-        <p:spPr>
-          <a:xfrm>
-            <a:off x="3660579" y="2517961"/>
-            <a:ext cx="713658" cy="230832"/>
-          </a:xfrm>
-          <a:prstGeom prst="rect">
-            <a:avLst/>
-          </a:prstGeom>
-          <a:noFill/>
-        </p:spPr>
-        <p:txBody>
-          <a:bodyPr wrap="none" rtlCol="0">
-            <a:spAutoFit/>
-          </a:bodyPr>
-          <a:lstStyle/>
-          <a:p>
-            <a:pPr algn="ctr"/>
-            <a:r>
-              <a:rPr lang="en-US" sz="900" dirty="0"/>
-              <a:t>Branch PC</a:t>
-            </a:r>
-          </a:p>
-        </p:txBody>
-      </p:sp>
       <p:cxnSp>
         <p:nvCxnSpPr>
-          <p:cNvPr id="152" name="Straight Arrow Connector 151">
-            <a:extLst>
-              <a:ext uri="{FF2B5EF4-FFF2-40B4-BE49-F238E27FC236}">
-                <a16:creationId xmlns:a16="http://schemas.microsoft.com/office/drawing/2014/main" id="{0B969FF2-6DAD-23DC-28B8-ACF737E02DB2}"/>
+          <p:cNvPr id="158" name="Straight Connector 157">
+            <a:extLst>
+              <a:ext uri="{FF2B5EF4-FFF2-40B4-BE49-F238E27FC236}">
+                <a16:creationId xmlns:a16="http://schemas.microsoft.com/office/drawing/2014/main" id="{1691EF3B-B49C-E8C7-89F0-04E2CEA7B43B}"/>
               </a:ext>
             </a:extLst>
           </p:cNvPr>
@@ -6584,15 +6714,12 @@
         </p:nvCxnSpPr>
         <p:spPr>
           <a:xfrm>
-            <a:off x="4373315" y="2633377"/>
-            <a:ext cx="374301" cy="0"/>
-          </a:xfrm>
-          <a:prstGeom prst="straightConnector1">
-            <a:avLst/>
-          </a:prstGeom>
-          <a:ln>
-            <a:tailEnd type="triangle"/>
-          </a:ln>
+            <a:off x="2782224" y="4120669"/>
+            <a:ext cx="0" cy="1014753"/>
+          </a:xfrm>
+          <a:prstGeom prst="line">
+            <a:avLst/>
+          </a:prstGeom>
         </p:spPr>
         <p:style>
           <a:lnRef idx="2">
@@ -6609,276 +6736,6 @@
           </a:fontRef>
         </p:style>
       </p:cxnSp>
-      <p:cxnSp>
-        <p:nvCxnSpPr>
-          <p:cNvPr id="153" name="Straight Arrow Connector 152">
-            <a:extLst>
-              <a:ext uri="{FF2B5EF4-FFF2-40B4-BE49-F238E27FC236}">
-                <a16:creationId xmlns:a16="http://schemas.microsoft.com/office/drawing/2014/main" id="{F030B5C6-68FA-2DA5-919A-5B353DA9C1A8}"/>
-              </a:ext>
-            </a:extLst>
-          </p:cNvPr>
-          <p:cNvCxnSpPr>
-            <a:cxnSpLocks/>
-          </p:cNvCxnSpPr>
-          <p:nvPr/>
-        </p:nvCxnSpPr>
-        <p:spPr>
-          <a:xfrm>
-            <a:off x="3331730" y="2213674"/>
-            <a:ext cx="177808" cy="0"/>
-          </a:xfrm>
-          <a:prstGeom prst="straightConnector1">
-            <a:avLst/>
-          </a:prstGeom>
-          <a:ln>
-            <a:tailEnd type="triangle"/>
-          </a:ln>
-        </p:spPr>
-        <p:style>
-          <a:lnRef idx="2">
-            <a:schemeClr val="accent1"/>
-          </a:lnRef>
-          <a:fillRef idx="0">
-            <a:schemeClr val="accent1"/>
-          </a:fillRef>
-          <a:effectRef idx="1">
-            <a:schemeClr val="accent1"/>
-          </a:effectRef>
-          <a:fontRef idx="minor">
-            <a:schemeClr val="tx1"/>
-          </a:fontRef>
-        </p:style>
-      </p:cxnSp>
-      <p:cxnSp>
-        <p:nvCxnSpPr>
-          <p:cNvPr id="154" name="Straight Arrow Connector 153">
-            <a:extLst>
-              <a:ext uri="{FF2B5EF4-FFF2-40B4-BE49-F238E27FC236}">
-                <a16:creationId xmlns:a16="http://schemas.microsoft.com/office/drawing/2014/main" id="{9779A5A3-D9AC-4884-E09E-088355A5273D}"/>
-              </a:ext>
-            </a:extLst>
-          </p:cNvPr>
-          <p:cNvCxnSpPr>
-            <a:cxnSpLocks/>
-          </p:cNvCxnSpPr>
-          <p:nvPr/>
-        </p:nvCxnSpPr>
-        <p:spPr>
-          <a:xfrm>
-            <a:off x="3331730" y="2413994"/>
-            <a:ext cx="177808" cy="0"/>
-          </a:xfrm>
-          <a:prstGeom prst="straightConnector1">
-            <a:avLst/>
-          </a:prstGeom>
-          <a:ln>
-            <a:tailEnd type="triangle"/>
-          </a:ln>
-        </p:spPr>
-        <p:style>
-          <a:lnRef idx="2">
-            <a:schemeClr val="accent1"/>
-          </a:lnRef>
-          <a:fillRef idx="0">
-            <a:schemeClr val="accent1"/>
-          </a:fillRef>
-          <a:effectRef idx="1">
-            <a:schemeClr val="accent1"/>
-          </a:effectRef>
-          <a:fontRef idx="minor">
-            <a:schemeClr val="tx1"/>
-          </a:fontRef>
-        </p:style>
-      </p:cxnSp>
-      <p:sp>
-        <p:nvSpPr>
-          <p:cNvPr id="155" name="TextBox 154">
-            <a:extLst>
-              <a:ext uri="{FF2B5EF4-FFF2-40B4-BE49-F238E27FC236}">
-                <a16:creationId xmlns:a16="http://schemas.microsoft.com/office/drawing/2014/main" id="{75FA3F6B-D94A-A494-28FD-7D4F921979A2}"/>
-              </a:ext>
-            </a:extLst>
-          </p:cNvPr>
-          <p:cNvSpPr txBox="1"/>
-          <p:nvPr/>
-        </p:nvSpPr>
-        <p:spPr>
-          <a:xfrm>
-            <a:off x="3746992" y="2671904"/>
-            <a:ext cx="620684" cy="230832"/>
-          </a:xfrm>
-          <a:prstGeom prst="rect">
-            <a:avLst/>
-          </a:prstGeom>
-          <a:noFill/>
-        </p:spPr>
-        <p:txBody>
-          <a:bodyPr wrap="none" rtlCol="0">
-            <a:spAutoFit/>
-          </a:bodyPr>
-          <a:lstStyle/>
-          <a:p>
-            <a:pPr algn="ctr"/>
-            <a:r>
-              <a:rPr lang="en-US" sz="900" dirty="0"/>
-              <a:t>Jump PC</a:t>
-            </a:r>
-          </a:p>
-        </p:txBody>
-      </p:sp>
-      <p:cxnSp>
-        <p:nvCxnSpPr>
-          <p:cNvPr id="156" name="Straight Arrow Connector 155">
-            <a:extLst>
-              <a:ext uri="{FF2B5EF4-FFF2-40B4-BE49-F238E27FC236}">
-                <a16:creationId xmlns:a16="http://schemas.microsoft.com/office/drawing/2014/main" id="{4E8E377D-848A-C4CD-E531-28E5114DF352}"/>
-              </a:ext>
-            </a:extLst>
-          </p:cNvPr>
-          <p:cNvCxnSpPr>
-            <a:cxnSpLocks/>
-          </p:cNvCxnSpPr>
-          <p:nvPr/>
-        </p:nvCxnSpPr>
-        <p:spPr>
-          <a:xfrm>
-            <a:off x="4373315" y="2802227"/>
-            <a:ext cx="379410" cy="0"/>
-          </a:xfrm>
-          <a:prstGeom prst="straightConnector1">
-            <a:avLst/>
-          </a:prstGeom>
-          <a:ln>
-            <a:tailEnd type="triangle"/>
-          </a:ln>
-        </p:spPr>
-        <p:style>
-          <a:lnRef idx="2">
-            <a:schemeClr val="accent1"/>
-          </a:lnRef>
-          <a:fillRef idx="0">
-            <a:schemeClr val="accent1"/>
-          </a:fillRef>
-          <a:effectRef idx="1">
-            <a:schemeClr val="accent1"/>
-          </a:effectRef>
-          <a:fontRef idx="minor">
-            <a:schemeClr val="tx1"/>
-          </a:fontRef>
-        </p:style>
-      </p:cxnSp>
-      <p:cxnSp>
-        <p:nvCxnSpPr>
-          <p:cNvPr id="158" name="Straight Connector 157">
-            <a:extLst>
-              <a:ext uri="{FF2B5EF4-FFF2-40B4-BE49-F238E27FC236}">
-                <a16:creationId xmlns:a16="http://schemas.microsoft.com/office/drawing/2014/main" id="{1691EF3B-B49C-E8C7-89F0-04E2CEA7B43B}"/>
-              </a:ext>
-            </a:extLst>
-          </p:cNvPr>
-          <p:cNvCxnSpPr>
-            <a:cxnSpLocks/>
-          </p:cNvCxnSpPr>
-          <p:nvPr/>
-        </p:nvCxnSpPr>
-        <p:spPr>
-          <a:xfrm>
-            <a:off x="2782224" y="4120669"/>
-            <a:ext cx="0" cy="1014753"/>
-          </a:xfrm>
-          <a:prstGeom prst="line">
-            <a:avLst/>
-          </a:prstGeom>
-        </p:spPr>
-        <p:style>
-          <a:lnRef idx="2">
-            <a:schemeClr val="accent1"/>
-          </a:lnRef>
-          <a:fillRef idx="0">
-            <a:schemeClr val="accent1"/>
-          </a:fillRef>
-          <a:effectRef idx="1">
-            <a:schemeClr val="accent1"/>
-          </a:effectRef>
-          <a:fontRef idx="minor">
-            <a:schemeClr val="tx1"/>
-          </a:fontRef>
-        </p:style>
-      </p:cxnSp>
-      <p:sp>
-        <p:nvSpPr>
-          <p:cNvPr id="160" name="TextBox 159">
-            <a:extLst>
-              <a:ext uri="{FF2B5EF4-FFF2-40B4-BE49-F238E27FC236}">
-                <a16:creationId xmlns:a16="http://schemas.microsoft.com/office/drawing/2014/main" id="{3BF5B236-4D8B-849D-0CDF-2CB1B5EE7284}"/>
-              </a:ext>
-            </a:extLst>
-          </p:cNvPr>
-          <p:cNvSpPr txBox="1"/>
-          <p:nvPr/>
-        </p:nvSpPr>
-        <p:spPr>
-          <a:xfrm>
-            <a:off x="2837258" y="2105422"/>
-            <a:ext cx="413896" cy="230832"/>
-          </a:xfrm>
-          <a:prstGeom prst="rect">
-            <a:avLst/>
-          </a:prstGeom>
-          <a:noFill/>
-        </p:spPr>
-        <p:txBody>
-          <a:bodyPr wrap="none" rtlCol="0">
-            <a:spAutoFit/>
-          </a:bodyPr>
-          <a:lstStyle/>
-          <a:p>
-            <a:pPr algn="ctr"/>
-            <a:r>
-              <a:rPr lang="en-US" sz="900" dirty="0"/>
-              <a:t>NPC</a:t>
-            </a:r>
-          </a:p>
-        </p:txBody>
-      </p:sp>
-      <p:sp>
-        <p:nvSpPr>
-          <p:cNvPr id="161" name="TextBox 160">
-            <a:extLst>
-              <a:ext uri="{FF2B5EF4-FFF2-40B4-BE49-F238E27FC236}">
-                <a16:creationId xmlns:a16="http://schemas.microsoft.com/office/drawing/2014/main" id="{0E9784F2-B3AB-C0FA-FDFE-48C83AB9B12E}"/>
-              </a:ext>
-            </a:extLst>
-          </p:cNvPr>
-          <p:cNvSpPr txBox="1"/>
-          <p:nvPr/>
-        </p:nvSpPr>
-        <p:spPr>
-          <a:xfrm>
-            <a:off x="2834278" y="2284121"/>
-            <a:ext cx="407484" cy="230832"/>
-          </a:xfrm>
-          <a:prstGeom prst="rect">
-            <a:avLst/>
-          </a:prstGeom>
-          <a:noFill/>
-        </p:spPr>
-        <p:txBody>
-          <a:bodyPr wrap="none" rtlCol="0">
-            <a:spAutoFit/>
-          </a:bodyPr>
-          <a:lstStyle/>
-          <a:p>
-            <a:pPr algn="ctr"/>
-            <a:r>
-              <a:rPr lang="en-US" sz="900" dirty="0" err="1"/>
-              <a:t>imm</a:t>
-            </a:r>
-            <a:endParaRPr lang="en-US" sz="900" dirty="0"/>
-          </a:p>
-        </p:txBody>
-      </p:sp>
       <p:grpSp>
         <p:nvGrpSpPr>
           <p:cNvPr id="162" name="Group 161">
@@ -8305,48 +8162,6 @@
           </a:fontRef>
         </p:style>
       </p:cxnSp>
-      <p:cxnSp>
-        <p:nvCxnSpPr>
-          <p:cNvPr id="245" name="Straight Arrow Connector 244">
-            <a:extLst>
-              <a:ext uri="{FF2B5EF4-FFF2-40B4-BE49-F238E27FC236}">
-                <a16:creationId xmlns:a16="http://schemas.microsoft.com/office/drawing/2014/main" id="{44285445-3673-F463-34B1-B7F351676027}"/>
-              </a:ext>
-            </a:extLst>
-          </p:cNvPr>
-          <p:cNvCxnSpPr/>
-          <p:nvPr/>
-        </p:nvCxnSpPr>
-        <p:spPr>
-          <a:xfrm flipV="1">
-            <a:off x="8859066" y="3303944"/>
-            <a:ext cx="0" cy="167673"/>
-          </a:xfrm>
-          <a:prstGeom prst="straightConnector1">
-            <a:avLst/>
-          </a:prstGeom>
-          <a:ln>
-            <a:solidFill>
-              <a:srgbClr val="FF0000"/>
-            </a:solidFill>
-            <a:tailEnd type="triangle"/>
-          </a:ln>
-        </p:spPr>
-        <p:style>
-          <a:lnRef idx="2">
-            <a:schemeClr val="accent1"/>
-          </a:lnRef>
-          <a:fillRef idx="0">
-            <a:schemeClr val="accent1"/>
-          </a:fillRef>
-          <a:effectRef idx="1">
-            <a:schemeClr val="accent1"/>
-          </a:effectRef>
-          <a:fontRef idx="minor">
-            <a:schemeClr val="tx1"/>
-          </a:fontRef>
-        </p:style>
-      </p:cxnSp>
       <p:grpSp>
         <p:nvGrpSpPr>
           <p:cNvPr id="247" name="Group 246">
@@ -8777,125 +8592,6 @@
       </p:sp>
       <p:cxnSp>
         <p:nvCxnSpPr>
-          <p:cNvPr id="269" name="Straight Arrow Connector 268">
-            <a:extLst>
-              <a:ext uri="{FF2B5EF4-FFF2-40B4-BE49-F238E27FC236}">
-                <a16:creationId xmlns:a16="http://schemas.microsoft.com/office/drawing/2014/main" id="{87860765-22E8-2DBF-0155-43937E1810EB}"/>
-              </a:ext>
-            </a:extLst>
-          </p:cNvPr>
-          <p:cNvCxnSpPr>
-            <a:cxnSpLocks/>
-          </p:cNvCxnSpPr>
-          <p:nvPr/>
-        </p:nvCxnSpPr>
-        <p:spPr>
-          <a:xfrm flipV="1">
-            <a:off x="4640422" y="2427694"/>
-            <a:ext cx="100338" cy="2498"/>
-          </a:xfrm>
-          <a:prstGeom prst="straightConnector1">
-            <a:avLst/>
-          </a:prstGeom>
-          <a:ln>
-            <a:tailEnd type="triangle"/>
-          </a:ln>
-        </p:spPr>
-        <p:style>
-          <a:lnRef idx="2">
-            <a:schemeClr val="accent1"/>
-          </a:lnRef>
-          <a:fillRef idx="0">
-            <a:schemeClr val="accent1"/>
-          </a:fillRef>
-          <a:effectRef idx="1">
-            <a:schemeClr val="accent1"/>
-          </a:effectRef>
-          <a:fontRef idx="minor">
-            <a:schemeClr val="tx1"/>
-          </a:fontRef>
-        </p:style>
-      </p:cxnSp>
-      <p:sp>
-        <p:nvSpPr>
-          <p:cNvPr id="270" name="TextBox 269">
-            <a:extLst>
-              <a:ext uri="{FF2B5EF4-FFF2-40B4-BE49-F238E27FC236}">
-                <a16:creationId xmlns:a16="http://schemas.microsoft.com/office/drawing/2014/main" id="{E335D321-53C8-872A-430E-7732E67F0A79}"/>
-              </a:ext>
-            </a:extLst>
-          </p:cNvPr>
-          <p:cNvSpPr txBox="1"/>
-          <p:nvPr/>
-        </p:nvSpPr>
-        <p:spPr>
-          <a:xfrm>
-            <a:off x="4318329" y="2309359"/>
-            <a:ext cx="413896" cy="230832"/>
-          </a:xfrm>
-          <a:prstGeom prst="rect">
-            <a:avLst/>
-          </a:prstGeom>
-          <a:noFill/>
-        </p:spPr>
-        <p:txBody>
-          <a:bodyPr wrap="none" rtlCol="0">
-            <a:spAutoFit/>
-          </a:bodyPr>
-          <a:lstStyle/>
-          <a:p>
-            <a:pPr algn="ctr"/>
-            <a:r>
-              <a:rPr lang="en-US" sz="900" dirty="0"/>
-              <a:t>NPC</a:t>
-            </a:r>
-          </a:p>
-        </p:txBody>
-      </p:sp>
-      <p:cxnSp>
-        <p:nvCxnSpPr>
-          <p:cNvPr id="275" name="Straight Arrow Connector 274">
-            <a:extLst>
-              <a:ext uri="{FF2B5EF4-FFF2-40B4-BE49-F238E27FC236}">
-                <a16:creationId xmlns:a16="http://schemas.microsoft.com/office/drawing/2014/main" id="{FF5E826E-C5DA-266A-3DEA-9D97594449EE}"/>
-              </a:ext>
-            </a:extLst>
-          </p:cNvPr>
-          <p:cNvCxnSpPr/>
-          <p:nvPr/>
-        </p:nvCxnSpPr>
-        <p:spPr>
-          <a:xfrm>
-            <a:off x="4942403" y="2006525"/>
-            <a:ext cx="0" cy="230832"/>
-          </a:xfrm>
-          <a:prstGeom prst="straightConnector1">
-            <a:avLst/>
-          </a:prstGeom>
-          <a:ln>
-            <a:solidFill>
-              <a:srgbClr val="FF0000"/>
-            </a:solidFill>
-            <a:tailEnd type="triangle"/>
-          </a:ln>
-        </p:spPr>
-        <p:style>
-          <a:lnRef idx="2">
-            <a:schemeClr val="accent1"/>
-          </a:lnRef>
-          <a:fillRef idx="0">
-            <a:schemeClr val="accent1"/>
-          </a:fillRef>
-          <a:effectRef idx="1">
-            <a:schemeClr val="accent1"/>
-          </a:effectRef>
-          <a:fontRef idx="minor">
-            <a:schemeClr val="tx1"/>
-          </a:fontRef>
-        </p:style>
-      </p:cxnSp>
-      <p:cxnSp>
-        <p:nvCxnSpPr>
           <p:cNvPr id="276" name="Straight Arrow Connector 275">
             <a:extLst>
               <a:ext uri="{FF2B5EF4-FFF2-40B4-BE49-F238E27FC236}">
@@ -9579,50 +9275,6 @@
       </p:sp>
       <p:cxnSp>
         <p:nvCxnSpPr>
-          <p:cNvPr id="315" name="Straight Arrow Connector 314">
-            <a:extLst>
-              <a:ext uri="{FF2B5EF4-FFF2-40B4-BE49-F238E27FC236}">
-                <a16:creationId xmlns:a16="http://schemas.microsoft.com/office/drawing/2014/main" id="{CC2E6CF6-7F9B-DF2E-8401-A11C6FFE7D1D}"/>
-              </a:ext>
-            </a:extLst>
-          </p:cNvPr>
-          <p:cNvCxnSpPr>
-            <a:cxnSpLocks/>
-          </p:cNvCxnSpPr>
-          <p:nvPr/>
-        </p:nvCxnSpPr>
-        <p:spPr>
-          <a:xfrm flipV="1">
-            <a:off x="10995342" y="4023062"/>
-            <a:ext cx="0" cy="195214"/>
-          </a:xfrm>
-          <a:prstGeom prst="straightConnector1">
-            <a:avLst/>
-          </a:prstGeom>
-          <a:ln>
-            <a:solidFill>
-              <a:srgbClr val="FF0000"/>
-            </a:solidFill>
-            <a:tailEnd type="triangle"/>
-          </a:ln>
-        </p:spPr>
-        <p:style>
-          <a:lnRef idx="2">
-            <a:schemeClr val="accent1"/>
-          </a:lnRef>
-          <a:fillRef idx="0">
-            <a:schemeClr val="accent1"/>
-          </a:fillRef>
-          <a:effectRef idx="1">
-            <a:schemeClr val="accent1"/>
-          </a:effectRef>
-          <a:fontRef idx="minor">
-            <a:schemeClr val="tx1"/>
-          </a:fontRef>
-        </p:style>
-      </p:cxnSp>
-      <p:cxnSp>
-        <p:nvCxnSpPr>
           <p:cNvPr id="316" name="Straight Connector 315">
             <a:extLst>
               <a:ext uri="{FF2B5EF4-FFF2-40B4-BE49-F238E27FC236}">
@@ -10806,83 +10458,6 @@
           </a:fontRef>
         </p:style>
       </p:cxnSp>
-      <p:cxnSp>
-        <p:nvCxnSpPr>
-          <p:cNvPr id="36" name="Straight Arrow Connector 35">
-            <a:extLst>
-              <a:ext uri="{FF2B5EF4-FFF2-40B4-BE49-F238E27FC236}">
-                <a16:creationId xmlns:a16="http://schemas.microsoft.com/office/drawing/2014/main" id="{1EE0AD67-CB2F-1EA8-73F4-A610CE181BCB}"/>
-              </a:ext>
-            </a:extLst>
-          </p:cNvPr>
-          <p:cNvCxnSpPr>
-            <a:cxnSpLocks/>
-          </p:cNvCxnSpPr>
-          <p:nvPr/>
-        </p:nvCxnSpPr>
-        <p:spPr>
-          <a:xfrm flipV="1">
-            <a:off x="4643012" y="2252348"/>
-            <a:ext cx="100338" cy="2498"/>
-          </a:xfrm>
-          <a:prstGeom prst="straightConnector1">
-            <a:avLst/>
-          </a:prstGeom>
-          <a:ln>
-            <a:tailEnd type="triangle"/>
-          </a:ln>
-        </p:spPr>
-        <p:style>
-          <a:lnRef idx="2">
-            <a:schemeClr val="accent1"/>
-          </a:lnRef>
-          <a:fillRef idx="0">
-            <a:schemeClr val="accent1"/>
-          </a:fillRef>
-          <a:effectRef idx="1">
-            <a:schemeClr val="accent1"/>
-          </a:effectRef>
-          <a:fontRef idx="minor">
-            <a:schemeClr val="tx1"/>
-          </a:fontRef>
-        </p:style>
-      </p:cxnSp>
-      <p:sp>
-        <p:nvSpPr>
-          <p:cNvPr id="37" name="TextBox 36">
-            <a:extLst>
-              <a:ext uri="{FF2B5EF4-FFF2-40B4-BE49-F238E27FC236}">
-                <a16:creationId xmlns:a16="http://schemas.microsoft.com/office/drawing/2014/main" id="{FEBD6354-C348-CAC9-89DB-E3F28A4B9C7A}"/>
-              </a:ext>
-            </a:extLst>
-          </p:cNvPr>
-          <p:cNvSpPr txBox="1"/>
-          <p:nvPr/>
-        </p:nvSpPr>
-        <p:spPr>
-          <a:xfrm>
-            <a:off x="4349773" y="2134013"/>
-            <a:ext cx="356188" cy="230832"/>
-          </a:xfrm>
-          <a:prstGeom prst="rect">
-            <a:avLst/>
-          </a:prstGeom>
-          <a:noFill/>
-        </p:spPr>
-        <p:txBody>
-          <a:bodyPr wrap="none" rtlCol="0">
-            <a:spAutoFit/>
-          </a:bodyPr>
-          <a:lstStyle/>
-          <a:p>
-            <a:pPr algn="ctr"/>
-            <a:r>
-              <a:rPr lang="en-US" sz="900" dirty="0"/>
-              <a:t> PC</a:t>
-            </a:r>
-          </a:p>
-        </p:txBody>
-      </p:sp>
       <p:cxnSp>
         <p:nvCxnSpPr>
           <p:cNvPr id="47" name="Straight Arrow Connector 46">
@@ -12016,6 +11591,1347 @@
           </a:fontRef>
         </p:style>
       </p:cxnSp>
+      <p:pic>
+        <p:nvPicPr>
+          <p:cNvPr id="52" name="Picture 51">
+            <a:extLst>
+              <a:ext uri="{FF2B5EF4-FFF2-40B4-BE49-F238E27FC236}">
+                <a16:creationId xmlns:a16="http://schemas.microsoft.com/office/drawing/2014/main" id="{6A6C7C57-77EC-C685-E542-B85B64EC2272}"/>
+              </a:ext>
+            </a:extLst>
+          </p:cNvPr>
+          <p:cNvPicPr>
+            <a:picLocks noChangeAspect="1"/>
+          </p:cNvPicPr>
+          <p:nvPr/>
+        </p:nvPicPr>
+        <p:blipFill>
+          <a:blip r:embed="rId2"/>
+          <a:stretch>
+            <a:fillRect/>
+          </a:stretch>
+        </p:blipFill>
+        <p:spPr>
+          <a:xfrm>
+            <a:off x="3033334" y="4128534"/>
+            <a:ext cx="503999" cy="267608"/>
+          </a:xfrm>
+          <a:prstGeom prst="rect">
+            <a:avLst/>
+          </a:prstGeom>
+        </p:spPr>
+      </p:pic>
+      <p:cxnSp>
+        <p:nvCxnSpPr>
+          <p:cNvPr id="57" name="Straight Arrow Connector 56">
+            <a:extLst>
+              <a:ext uri="{FF2B5EF4-FFF2-40B4-BE49-F238E27FC236}">
+                <a16:creationId xmlns:a16="http://schemas.microsoft.com/office/drawing/2014/main" id="{C6FDD443-491D-B8C9-0359-814E397D9C25}"/>
+              </a:ext>
+            </a:extLst>
+          </p:cNvPr>
+          <p:cNvCxnSpPr/>
+          <p:nvPr/>
+        </p:nvCxnSpPr>
+        <p:spPr>
+          <a:xfrm>
+            <a:off x="3003853" y="4200631"/>
+            <a:ext cx="177808" cy="0"/>
+          </a:xfrm>
+          <a:prstGeom prst="straightConnector1">
+            <a:avLst/>
+          </a:prstGeom>
+          <a:ln>
+            <a:solidFill>
+              <a:srgbClr val="FF0000"/>
+            </a:solidFill>
+            <a:tailEnd type="triangle"/>
+          </a:ln>
+        </p:spPr>
+        <p:style>
+          <a:lnRef idx="2">
+            <a:schemeClr val="accent1"/>
+          </a:lnRef>
+          <a:fillRef idx="0">
+            <a:schemeClr val="accent1"/>
+          </a:fillRef>
+          <a:effectRef idx="1">
+            <a:schemeClr val="accent1"/>
+          </a:effectRef>
+          <a:fontRef idx="minor">
+            <a:schemeClr val="tx1"/>
+          </a:fontRef>
+        </p:style>
+      </p:cxnSp>
+      <p:cxnSp>
+        <p:nvCxnSpPr>
+          <p:cNvPr id="58" name="Straight Arrow Connector 57">
+            <a:extLst>
+              <a:ext uri="{FF2B5EF4-FFF2-40B4-BE49-F238E27FC236}">
+                <a16:creationId xmlns:a16="http://schemas.microsoft.com/office/drawing/2014/main" id="{6F75C507-0674-59E5-259C-2F94883C5048}"/>
+              </a:ext>
+            </a:extLst>
+          </p:cNvPr>
+          <p:cNvCxnSpPr/>
+          <p:nvPr/>
+        </p:nvCxnSpPr>
+        <p:spPr>
+          <a:xfrm>
+            <a:off x="3003853" y="4320229"/>
+            <a:ext cx="177808" cy="0"/>
+          </a:xfrm>
+          <a:prstGeom prst="straightConnector1">
+            <a:avLst/>
+          </a:prstGeom>
+          <a:ln>
+            <a:solidFill>
+              <a:srgbClr val="FF0000"/>
+            </a:solidFill>
+            <a:tailEnd type="triangle"/>
+          </a:ln>
+        </p:spPr>
+        <p:style>
+          <a:lnRef idx="2">
+            <a:schemeClr val="accent1"/>
+          </a:lnRef>
+          <a:fillRef idx="0">
+            <a:schemeClr val="accent1"/>
+          </a:fillRef>
+          <a:effectRef idx="1">
+            <a:schemeClr val="accent1"/>
+          </a:effectRef>
+          <a:fontRef idx="minor">
+            <a:schemeClr val="tx1"/>
+          </a:fontRef>
+        </p:style>
+      </p:cxnSp>
+      <p:grpSp>
+        <p:nvGrpSpPr>
+          <p:cNvPr id="59" name="Group 58">
+            <a:extLst>
+              <a:ext uri="{FF2B5EF4-FFF2-40B4-BE49-F238E27FC236}">
+                <a16:creationId xmlns:a16="http://schemas.microsoft.com/office/drawing/2014/main" id="{A7BBB30E-D888-2009-5408-9916614F6B62}"/>
+              </a:ext>
+            </a:extLst>
+          </p:cNvPr>
+          <p:cNvGrpSpPr/>
+          <p:nvPr/>
+        </p:nvGrpSpPr>
+        <p:grpSpPr>
+          <a:xfrm rot="16200000">
+            <a:off x="8652972" y="3384715"/>
+            <a:ext cx="405246" cy="267608"/>
+            <a:chOff x="6169099" y="3766490"/>
+            <a:chExt cx="533480" cy="267608"/>
+          </a:xfrm>
+        </p:grpSpPr>
+        <p:pic>
+          <p:nvPicPr>
+            <p:cNvPr id="66" name="Picture 65">
+              <a:extLst>
+                <a:ext uri="{FF2B5EF4-FFF2-40B4-BE49-F238E27FC236}">
+                  <a16:creationId xmlns:a16="http://schemas.microsoft.com/office/drawing/2014/main" id="{A404E675-8456-AD52-514C-9920A86819FF}"/>
+                </a:ext>
+              </a:extLst>
+            </p:cNvPr>
+            <p:cNvPicPr>
+              <a:picLocks noChangeAspect="1"/>
+            </p:cNvPicPr>
+            <p:nvPr/>
+          </p:nvPicPr>
+          <p:blipFill>
+            <a:blip r:embed="rId2"/>
+            <a:stretch>
+              <a:fillRect/>
+            </a:stretch>
+          </p:blipFill>
+          <p:spPr>
+            <a:xfrm>
+              <a:off x="6198580" y="3766490"/>
+              <a:ext cx="503999" cy="267608"/>
+            </a:xfrm>
+            <a:prstGeom prst="rect">
+              <a:avLst/>
+            </a:prstGeom>
+          </p:spPr>
+        </p:pic>
+        <p:cxnSp>
+          <p:nvCxnSpPr>
+            <p:cNvPr id="67" name="Straight Arrow Connector 66">
+              <a:extLst>
+                <a:ext uri="{FF2B5EF4-FFF2-40B4-BE49-F238E27FC236}">
+                  <a16:creationId xmlns:a16="http://schemas.microsoft.com/office/drawing/2014/main" id="{E2589DE8-97EF-80AF-BA79-119014A37941}"/>
+                </a:ext>
+              </a:extLst>
+            </p:cNvPr>
+            <p:cNvCxnSpPr>
+              <a:cxnSpLocks/>
+            </p:cNvCxnSpPr>
+            <p:nvPr/>
+          </p:nvCxnSpPr>
+          <p:spPr>
+            <a:xfrm>
+              <a:off x="6169099" y="3838587"/>
+              <a:ext cx="177808" cy="0"/>
+            </a:xfrm>
+            <a:prstGeom prst="straightConnector1">
+              <a:avLst/>
+            </a:prstGeom>
+            <a:ln>
+              <a:solidFill>
+                <a:srgbClr val="FF0000"/>
+              </a:solidFill>
+              <a:tailEnd type="triangle"/>
+            </a:ln>
+          </p:spPr>
+          <p:style>
+            <a:lnRef idx="2">
+              <a:schemeClr val="accent1"/>
+            </a:lnRef>
+            <a:fillRef idx="0">
+              <a:schemeClr val="accent1"/>
+            </a:fillRef>
+            <a:effectRef idx="1">
+              <a:schemeClr val="accent1"/>
+            </a:effectRef>
+            <a:fontRef idx="minor">
+              <a:schemeClr val="tx1"/>
+            </a:fontRef>
+          </p:style>
+        </p:cxnSp>
+        <p:cxnSp>
+          <p:nvCxnSpPr>
+            <p:cNvPr id="75" name="Straight Arrow Connector 74">
+              <a:extLst>
+                <a:ext uri="{FF2B5EF4-FFF2-40B4-BE49-F238E27FC236}">
+                  <a16:creationId xmlns:a16="http://schemas.microsoft.com/office/drawing/2014/main" id="{DD16B353-8132-284E-F417-41F2A2DEDC16}"/>
+                </a:ext>
+              </a:extLst>
+            </p:cNvPr>
+            <p:cNvCxnSpPr>
+              <a:cxnSpLocks/>
+            </p:cNvCxnSpPr>
+            <p:nvPr/>
+          </p:nvCxnSpPr>
+          <p:spPr>
+            <a:xfrm>
+              <a:off x="6169099" y="3958185"/>
+              <a:ext cx="177808" cy="0"/>
+            </a:xfrm>
+            <a:prstGeom prst="straightConnector1">
+              <a:avLst/>
+            </a:prstGeom>
+            <a:ln>
+              <a:solidFill>
+                <a:srgbClr val="FF0000"/>
+              </a:solidFill>
+              <a:tailEnd type="triangle"/>
+            </a:ln>
+          </p:spPr>
+          <p:style>
+            <a:lnRef idx="2">
+              <a:schemeClr val="accent1"/>
+            </a:lnRef>
+            <a:fillRef idx="0">
+              <a:schemeClr val="accent1"/>
+            </a:fillRef>
+            <a:effectRef idx="1">
+              <a:schemeClr val="accent1"/>
+            </a:effectRef>
+            <a:fontRef idx="minor">
+              <a:schemeClr val="tx1"/>
+            </a:fontRef>
+          </p:style>
+        </p:cxnSp>
+      </p:grpSp>
+      <p:cxnSp>
+        <p:nvCxnSpPr>
+          <p:cNvPr id="78" name="Straight Arrow Connector 77">
+            <a:extLst>
+              <a:ext uri="{FF2B5EF4-FFF2-40B4-BE49-F238E27FC236}">
+                <a16:creationId xmlns:a16="http://schemas.microsoft.com/office/drawing/2014/main" id="{C0897BF0-6C1F-2380-907E-3CFD22113357}"/>
+              </a:ext>
+            </a:extLst>
+          </p:cNvPr>
+          <p:cNvCxnSpPr>
+            <a:cxnSpLocks/>
+          </p:cNvCxnSpPr>
+          <p:nvPr/>
+        </p:nvCxnSpPr>
+        <p:spPr>
+          <a:xfrm flipV="1">
+            <a:off x="10987639" y="4023062"/>
+            <a:ext cx="0" cy="195214"/>
+          </a:xfrm>
+          <a:prstGeom prst="straightConnector1">
+            <a:avLst/>
+          </a:prstGeom>
+          <a:ln>
+            <a:solidFill>
+              <a:srgbClr val="FF0000"/>
+            </a:solidFill>
+            <a:tailEnd type="triangle"/>
+          </a:ln>
+        </p:spPr>
+        <p:style>
+          <a:lnRef idx="2">
+            <a:schemeClr val="accent1"/>
+          </a:lnRef>
+          <a:fillRef idx="0">
+            <a:schemeClr val="accent1"/>
+          </a:fillRef>
+          <a:effectRef idx="1">
+            <a:schemeClr val="accent1"/>
+          </a:effectRef>
+          <a:fontRef idx="minor">
+            <a:schemeClr val="tx1"/>
+          </a:fontRef>
+        </p:style>
+      </p:cxnSp>
+      <p:cxnSp>
+        <p:nvCxnSpPr>
+          <p:cNvPr id="80" name="Straight Arrow Connector 79">
+            <a:extLst>
+              <a:ext uri="{FF2B5EF4-FFF2-40B4-BE49-F238E27FC236}">
+                <a16:creationId xmlns:a16="http://schemas.microsoft.com/office/drawing/2014/main" id="{3211B8BE-2D5F-DC40-493A-A011203B18F9}"/>
+              </a:ext>
+            </a:extLst>
+          </p:cNvPr>
+          <p:cNvCxnSpPr>
+            <a:cxnSpLocks/>
+          </p:cNvCxnSpPr>
+          <p:nvPr/>
+        </p:nvCxnSpPr>
+        <p:spPr>
+          <a:xfrm flipV="1">
+            <a:off x="11051139" y="3983250"/>
+            <a:ext cx="0" cy="195214"/>
+          </a:xfrm>
+          <a:prstGeom prst="straightConnector1">
+            <a:avLst/>
+          </a:prstGeom>
+          <a:ln>
+            <a:solidFill>
+              <a:srgbClr val="FF0000"/>
+            </a:solidFill>
+            <a:tailEnd type="triangle"/>
+          </a:ln>
+        </p:spPr>
+        <p:style>
+          <a:lnRef idx="2">
+            <a:schemeClr val="accent1"/>
+          </a:lnRef>
+          <a:fillRef idx="0">
+            <a:schemeClr val="accent1"/>
+          </a:fillRef>
+          <a:effectRef idx="1">
+            <a:schemeClr val="accent1"/>
+          </a:effectRef>
+          <a:fontRef idx="minor">
+            <a:schemeClr val="tx1"/>
+          </a:fontRef>
+        </p:style>
+      </p:cxnSp>
+      <p:cxnSp>
+        <p:nvCxnSpPr>
+          <p:cNvPr id="86" name="Straight Arrow Connector 85">
+            <a:extLst>
+              <a:ext uri="{FF2B5EF4-FFF2-40B4-BE49-F238E27FC236}">
+                <a16:creationId xmlns:a16="http://schemas.microsoft.com/office/drawing/2014/main" id="{2999216A-F5BD-5C3B-C483-7A84E97A2C87}"/>
+              </a:ext>
+            </a:extLst>
+          </p:cNvPr>
+          <p:cNvCxnSpPr>
+            <a:cxnSpLocks/>
+          </p:cNvCxnSpPr>
+          <p:nvPr/>
+        </p:nvCxnSpPr>
+        <p:spPr>
+          <a:xfrm flipV="1">
+            <a:off x="10911439" y="4102848"/>
+            <a:ext cx="0" cy="195214"/>
+          </a:xfrm>
+          <a:prstGeom prst="straightConnector1">
+            <a:avLst/>
+          </a:prstGeom>
+          <a:ln>
+            <a:solidFill>
+              <a:srgbClr val="FF0000"/>
+            </a:solidFill>
+            <a:tailEnd type="triangle"/>
+          </a:ln>
+        </p:spPr>
+        <p:style>
+          <a:lnRef idx="2">
+            <a:schemeClr val="accent1"/>
+          </a:lnRef>
+          <a:fillRef idx="0">
+            <a:schemeClr val="accent1"/>
+          </a:fillRef>
+          <a:effectRef idx="1">
+            <a:schemeClr val="accent1"/>
+          </a:effectRef>
+          <a:fontRef idx="minor">
+            <a:schemeClr val="tx1"/>
+          </a:fontRef>
+        </p:style>
+      </p:cxnSp>
+      <p:cxnSp>
+        <p:nvCxnSpPr>
+          <p:cNvPr id="106" name="Straight Arrow Connector 105">
+            <a:extLst>
+              <a:ext uri="{FF2B5EF4-FFF2-40B4-BE49-F238E27FC236}">
+                <a16:creationId xmlns:a16="http://schemas.microsoft.com/office/drawing/2014/main" id="{CE17DD74-D95F-A684-5F8D-79C75CBE937A}"/>
+              </a:ext>
+            </a:extLst>
+          </p:cNvPr>
+          <p:cNvCxnSpPr/>
+          <p:nvPr/>
+        </p:nvCxnSpPr>
+        <p:spPr>
+          <a:xfrm>
+            <a:off x="4876122" y="1953342"/>
+            <a:ext cx="0" cy="230832"/>
+          </a:xfrm>
+          <a:prstGeom prst="straightConnector1">
+            <a:avLst/>
+          </a:prstGeom>
+          <a:ln>
+            <a:solidFill>
+              <a:srgbClr val="FF0000"/>
+            </a:solidFill>
+            <a:tailEnd type="triangle"/>
+          </a:ln>
+        </p:spPr>
+        <p:style>
+          <a:lnRef idx="2">
+            <a:schemeClr val="accent1"/>
+          </a:lnRef>
+          <a:fillRef idx="0">
+            <a:schemeClr val="accent1"/>
+          </a:fillRef>
+          <a:effectRef idx="1">
+            <a:schemeClr val="accent1"/>
+          </a:effectRef>
+          <a:fontRef idx="minor">
+            <a:schemeClr val="tx1"/>
+          </a:fontRef>
+        </p:style>
+      </p:cxnSp>
+      <p:cxnSp>
+        <p:nvCxnSpPr>
+          <p:cNvPr id="109" name="Straight Arrow Connector 108">
+            <a:extLst>
+              <a:ext uri="{FF2B5EF4-FFF2-40B4-BE49-F238E27FC236}">
+                <a16:creationId xmlns:a16="http://schemas.microsoft.com/office/drawing/2014/main" id="{2EE93D9E-E510-40BC-F5F1-AAE75522A320}"/>
+              </a:ext>
+            </a:extLst>
+          </p:cNvPr>
+          <p:cNvCxnSpPr/>
+          <p:nvPr/>
+        </p:nvCxnSpPr>
+        <p:spPr>
+          <a:xfrm>
+            <a:off x="4914222" y="1990513"/>
+            <a:ext cx="0" cy="230832"/>
+          </a:xfrm>
+          <a:prstGeom prst="straightConnector1">
+            <a:avLst/>
+          </a:prstGeom>
+          <a:ln>
+            <a:solidFill>
+              <a:srgbClr val="FF0000"/>
+            </a:solidFill>
+            <a:tailEnd type="triangle"/>
+          </a:ln>
+        </p:spPr>
+        <p:style>
+          <a:lnRef idx="2">
+            <a:schemeClr val="accent1"/>
+          </a:lnRef>
+          <a:fillRef idx="0">
+            <a:schemeClr val="accent1"/>
+          </a:fillRef>
+          <a:effectRef idx="1">
+            <a:schemeClr val="accent1"/>
+          </a:effectRef>
+          <a:fontRef idx="minor">
+            <a:schemeClr val="tx1"/>
+          </a:fontRef>
+        </p:style>
+      </p:cxnSp>
+      <p:cxnSp>
+        <p:nvCxnSpPr>
+          <p:cNvPr id="110" name="Straight Arrow Connector 109">
+            <a:extLst>
+              <a:ext uri="{FF2B5EF4-FFF2-40B4-BE49-F238E27FC236}">
+                <a16:creationId xmlns:a16="http://schemas.microsoft.com/office/drawing/2014/main" id="{24CA2D82-8BE4-31B9-200E-D75DD793007C}"/>
+              </a:ext>
+            </a:extLst>
+          </p:cNvPr>
+          <p:cNvCxnSpPr/>
+          <p:nvPr/>
+        </p:nvCxnSpPr>
+        <p:spPr>
+          <a:xfrm>
+            <a:off x="4965890" y="2021516"/>
+            <a:ext cx="0" cy="230832"/>
+          </a:xfrm>
+          <a:prstGeom prst="straightConnector1">
+            <a:avLst/>
+          </a:prstGeom>
+          <a:ln>
+            <a:solidFill>
+              <a:srgbClr val="FF0000"/>
+            </a:solidFill>
+            <a:tailEnd type="triangle"/>
+          </a:ln>
+        </p:spPr>
+        <p:style>
+          <a:lnRef idx="2">
+            <a:schemeClr val="accent1"/>
+          </a:lnRef>
+          <a:fillRef idx="0">
+            <a:schemeClr val="accent1"/>
+          </a:fillRef>
+          <a:effectRef idx="1">
+            <a:schemeClr val="accent1"/>
+          </a:effectRef>
+          <a:fontRef idx="minor">
+            <a:schemeClr val="tx1"/>
+          </a:fontRef>
+        </p:style>
+      </p:cxnSp>
+      <p:cxnSp>
+        <p:nvCxnSpPr>
+          <p:cNvPr id="118" name="Straight Arrow Connector 117">
+            <a:extLst>
+              <a:ext uri="{FF2B5EF4-FFF2-40B4-BE49-F238E27FC236}">
+                <a16:creationId xmlns:a16="http://schemas.microsoft.com/office/drawing/2014/main" id="{F4ED870C-7DDD-18C7-6A4F-0D2CDF59EA50}"/>
+              </a:ext>
+            </a:extLst>
+          </p:cNvPr>
+          <p:cNvCxnSpPr>
+            <a:cxnSpLocks/>
+          </p:cNvCxnSpPr>
+          <p:nvPr/>
+        </p:nvCxnSpPr>
+        <p:spPr>
+          <a:xfrm>
+            <a:off x="4372527" y="2421549"/>
+            <a:ext cx="374301" cy="0"/>
+          </a:xfrm>
+          <a:prstGeom prst="straightConnector1">
+            <a:avLst/>
+          </a:prstGeom>
+          <a:ln>
+            <a:tailEnd type="triangle"/>
+          </a:ln>
+        </p:spPr>
+        <p:style>
+          <a:lnRef idx="2">
+            <a:schemeClr val="accent1"/>
+          </a:lnRef>
+          <a:fillRef idx="0">
+            <a:schemeClr val="accent1"/>
+          </a:fillRef>
+          <a:effectRef idx="1">
+            <a:schemeClr val="accent1"/>
+          </a:effectRef>
+          <a:fontRef idx="minor">
+            <a:schemeClr val="tx1"/>
+          </a:fontRef>
+        </p:style>
+      </p:cxnSp>
+      <p:sp>
+        <p:nvSpPr>
+          <p:cNvPr id="119" name="TextBox 118">
+            <a:extLst>
+              <a:ext uri="{FF2B5EF4-FFF2-40B4-BE49-F238E27FC236}">
+                <a16:creationId xmlns:a16="http://schemas.microsoft.com/office/drawing/2014/main" id="{71CFDDD6-C726-691B-9CA9-125BE7E5CADA}"/>
+              </a:ext>
+            </a:extLst>
+          </p:cNvPr>
+          <p:cNvSpPr txBox="1"/>
+          <p:nvPr/>
+        </p:nvSpPr>
+        <p:spPr>
+          <a:xfrm>
+            <a:off x="3310209" y="1961292"/>
+            <a:ext cx="413896" cy="230832"/>
+          </a:xfrm>
+          <a:prstGeom prst="rect">
+            <a:avLst/>
+          </a:prstGeom>
+          <a:noFill/>
+        </p:spPr>
+        <p:txBody>
+          <a:bodyPr wrap="none" rtlCol="0">
+            <a:spAutoFit/>
+          </a:bodyPr>
+          <a:lstStyle/>
+          <a:p>
+            <a:pPr algn="ctr"/>
+            <a:r>
+              <a:rPr lang="en-US" sz="900" dirty="0"/>
+              <a:t>NPC</a:t>
+            </a:r>
+          </a:p>
+        </p:txBody>
+      </p:sp>
+      <p:sp>
+        <p:nvSpPr>
+          <p:cNvPr id="120" name="TextBox 119">
+            <a:extLst>
+              <a:ext uri="{FF2B5EF4-FFF2-40B4-BE49-F238E27FC236}">
+                <a16:creationId xmlns:a16="http://schemas.microsoft.com/office/drawing/2014/main" id="{B5FAFD36-E7BE-8A22-0C52-FA46F61778F0}"/>
+              </a:ext>
+            </a:extLst>
+          </p:cNvPr>
+          <p:cNvSpPr txBox="1"/>
+          <p:nvPr/>
+        </p:nvSpPr>
+        <p:spPr>
+          <a:xfrm>
+            <a:off x="3313362" y="2376665"/>
+            <a:ext cx="407484" cy="230832"/>
+          </a:xfrm>
+          <a:prstGeom prst="rect">
+            <a:avLst/>
+          </a:prstGeom>
+          <a:noFill/>
+        </p:spPr>
+        <p:txBody>
+          <a:bodyPr wrap="none" rtlCol="0">
+            <a:spAutoFit/>
+          </a:bodyPr>
+          <a:lstStyle/>
+          <a:p>
+            <a:pPr algn="ctr"/>
+            <a:r>
+              <a:rPr lang="en-US" sz="900" dirty="0" err="1"/>
+              <a:t>imm</a:t>
+            </a:r>
+            <a:endParaRPr lang="en-US" sz="900" dirty="0"/>
+          </a:p>
+        </p:txBody>
+      </p:sp>
+      <p:cxnSp>
+        <p:nvCxnSpPr>
+          <p:cNvPr id="121" name="Straight Arrow Connector 120">
+            <a:extLst>
+              <a:ext uri="{FF2B5EF4-FFF2-40B4-BE49-F238E27FC236}">
+                <a16:creationId xmlns:a16="http://schemas.microsoft.com/office/drawing/2014/main" id="{C3290510-9088-6A3E-5DFA-AEBEB6FBD1A1}"/>
+              </a:ext>
+            </a:extLst>
+          </p:cNvPr>
+          <p:cNvCxnSpPr>
+            <a:cxnSpLocks/>
+          </p:cNvCxnSpPr>
+          <p:nvPr/>
+        </p:nvCxnSpPr>
+        <p:spPr>
+          <a:xfrm flipV="1">
+            <a:off x="4656723" y="2579639"/>
+            <a:ext cx="100338" cy="2498"/>
+          </a:xfrm>
+          <a:prstGeom prst="straightConnector1">
+            <a:avLst/>
+          </a:prstGeom>
+          <a:ln>
+            <a:tailEnd type="triangle"/>
+          </a:ln>
+        </p:spPr>
+        <p:style>
+          <a:lnRef idx="2">
+            <a:schemeClr val="accent1"/>
+          </a:lnRef>
+          <a:fillRef idx="0">
+            <a:schemeClr val="accent1"/>
+          </a:fillRef>
+          <a:effectRef idx="1">
+            <a:schemeClr val="accent1"/>
+          </a:effectRef>
+          <a:fontRef idx="minor">
+            <a:schemeClr val="tx1"/>
+          </a:fontRef>
+        </p:style>
+      </p:cxnSp>
+      <p:sp>
+        <p:nvSpPr>
+          <p:cNvPr id="132" name="TextBox 131">
+            <a:extLst>
+              <a:ext uri="{FF2B5EF4-FFF2-40B4-BE49-F238E27FC236}">
+                <a16:creationId xmlns:a16="http://schemas.microsoft.com/office/drawing/2014/main" id="{0D9A6022-1D6D-F3DA-CC84-317FF5FD6666}"/>
+              </a:ext>
+            </a:extLst>
+          </p:cNvPr>
+          <p:cNvSpPr txBox="1"/>
+          <p:nvPr/>
+        </p:nvSpPr>
+        <p:spPr>
+          <a:xfrm>
+            <a:off x="4334630" y="2461304"/>
+            <a:ext cx="413896" cy="230832"/>
+          </a:xfrm>
+          <a:prstGeom prst="rect">
+            <a:avLst/>
+          </a:prstGeom>
+          <a:noFill/>
+        </p:spPr>
+        <p:txBody>
+          <a:bodyPr wrap="none" rtlCol="0">
+            <a:spAutoFit/>
+          </a:bodyPr>
+          <a:lstStyle/>
+          <a:p>
+            <a:pPr algn="ctr"/>
+            <a:r>
+              <a:rPr lang="en-US" sz="900" dirty="0"/>
+              <a:t>NPC</a:t>
+            </a:r>
+          </a:p>
+        </p:txBody>
+      </p:sp>
+      <p:grpSp>
+        <p:nvGrpSpPr>
+          <p:cNvPr id="137" name="Group 136">
+            <a:extLst>
+              <a:ext uri="{FF2B5EF4-FFF2-40B4-BE49-F238E27FC236}">
+                <a16:creationId xmlns:a16="http://schemas.microsoft.com/office/drawing/2014/main" id="{8B5AEF34-ADB3-754B-DE80-ABD4D3F0450B}"/>
+              </a:ext>
+            </a:extLst>
+          </p:cNvPr>
+          <p:cNvGrpSpPr/>
+          <p:nvPr/>
+        </p:nvGrpSpPr>
+        <p:grpSpPr>
+          <a:xfrm>
+            <a:off x="3849394" y="1970747"/>
+            <a:ext cx="292770" cy="637674"/>
+            <a:chOff x="1074820" y="1507958"/>
+            <a:chExt cx="292770" cy="637674"/>
+          </a:xfrm>
+        </p:grpSpPr>
+        <p:cxnSp>
+          <p:nvCxnSpPr>
+            <p:cNvPr id="140" name="Straight Connector 139">
+              <a:extLst>
+                <a:ext uri="{FF2B5EF4-FFF2-40B4-BE49-F238E27FC236}">
+                  <a16:creationId xmlns:a16="http://schemas.microsoft.com/office/drawing/2014/main" id="{1CDC5C6D-A82B-99F5-6FC5-EEDD54CCF190}"/>
+                </a:ext>
+              </a:extLst>
+            </p:cNvPr>
+            <p:cNvCxnSpPr>
+              <a:cxnSpLocks/>
+            </p:cNvCxnSpPr>
+            <p:nvPr/>
+          </p:nvCxnSpPr>
+          <p:spPr>
+            <a:xfrm>
+              <a:off x="1074821" y="1507958"/>
+              <a:ext cx="0" cy="212558"/>
+            </a:xfrm>
+            <a:prstGeom prst="line">
+              <a:avLst/>
+            </a:prstGeom>
+          </p:spPr>
+          <p:style>
+            <a:lnRef idx="2">
+              <a:schemeClr val="accent1"/>
+            </a:lnRef>
+            <a:fillRef idx="0">
+              <a:schemeClr val="accent1"/>
+            </a:fillRef>
+            <a:effectRef idx="1">
+              <a:schemeClr val="accent1"/>
+            </a:effectRef>
+            <a:fontRef idx="minor">
+              <a:schemeClr val="tx1"/>
+            </a:fontRef>
+          </p:style>
+        </p:cxnSp>
+        <p:cxnSp>
+          <p:nvCxnSpPr>
+            <p:cNvPr id="142" name="Straight Connector 141">
+              <a:extLst>
+                <a:ext uri="{FF2B5EF4-FFF2-40B4-BE49-F238E27FC236}">
+                  <a16:creationId xmlns:a16="http://schemas.microsoft.com/office/drawing/2014/main" id="{A4EF0649-3BED-33BA-DD96-FB9FA511E98C}"/>
+                </a:ext>
+              </a:extLst>
+            </p:cNvPr>
+            <p:cNvCxnSpPr>
+              <a:cxnSpLocks/>
+            </p:cNvCxnSpPr>
+            <p:nvPr/>
+          </p:nvCxnSpPr>
+          <p:spPr>
+            <a:xfrm>
+              <a:off x="1367590" y="1720516"/>
+              <a:ext cx="0" cy="212558"/>
+            </a:xfrm>
+            <a:prstGeom prst="line">
+              <a:avLst/>
+            </a:prstGeom>
+          </p:spPr>
+          <p:style>
+            <a:lnRef idx="2">
+              <a:schemeClr val="accent1"/>
+            </a:lnRef>
+            <a:fillRef idx="0">
+              <a:schemeClr val="accent1"/>
+            </a:fillRef>
+            <a:effectRef idx="1">
+              <a:schemeClr val="accent1"/>
+            </a:effectRef>
+            <a:fontRef idx="minor">
+              <a:schemeClr val="tx1"/>
+            </a:fontRef>
+          </p:style>
+        </p:cxnSp>
+        <p:cxnSp>
+          <p:nvCxnSpPr>
+            <p:cNvPr id="143" name="Straight Connector 142">
+              <a:extLst>
+                <a:ext uri="{FF2B5EF4-FFF2-40B4-BE49-F238E27FC236}">
+                  <a16:creationId xmlns:a16="http://schemas.microsoft.com/office/drawing/2014/main" id="{F388C33F-5E4F-4884-089C-DF42CBAA3E4C}"/>
+                </a:ext>
+              </a:extLst>
+            </p:cNvPr>
+            <p:cNvCxnSpPr>
+              <a:cxnSpLocks/>
+            </p:cNvCxnSpPr>
+            <p:nvPr/>
+          </p:nvCxnSpPr>
+          <p:spPr>
+            <a:xfrm>
+              <a:off x="1074821" y="1933074"/>
+              <a:ext cx="0" cy="212558"/>
+            </a:xfrm>
+            <a:prstGeom prst="line">
+              <a:avLst/>
+            </a:prstGeom>
+          </p:spPr>
+          <p:style>
+            <a:lnRef idx="2">
+              <a:schemeClr val="accent1"/>
+            </a:lnRef>
+            <a:fillRef idx="0">
+              <a:schemeClr val="accent1"/>
+            </a:fillRef>
+            <a:effectRef idx="1">
+              <a:schemeClr val="accent1"/>
+            </a:effectRef>
+            <a:fontRef idx="minor">
+              <a:schemeClr val="tx1"/>
+            </a:fontRef>
+          </p:style>
+        </p:cxnSp>
+        <p:cxnSp>
+          <p:nvCxnSpPr>
+            <p:cNvPr id="144" name="Straight Connector 143">
+              <a:extLst>
+                <a:ext uri="{FF2B5EF4-FFF2-40B4-BE49-F238E27FC236}">
+                  <a16:creationId xmlns:a16="http://schemas.microsoft.com/office/drawing/2014/main" id="{735B5BAB-BBDC-4A8E-3A36-97A6349BBE95}"/>
+                </a:ext>
+              </a:extLst>
+            </p:cNvPr>
+            <p:cNvCxnSpPr>
+              <a:cxnSpLocks/>
+            </p:cNvCxnSpPr>
+            <p:nvPr/>
+          </p:nvCxnSpPr>
+          <p:spPr>
+            <a:xfrm flipH="1">
+              <a:off x="1074821" y="1936227"/>
+              <a:ext cx="292769" cy="209405"/>
+            </a:xfrm>
+            <a:prstGeom prst="line">
+              <a:avLst/>
+            </a:prstGeom>
+          </p:spPr>
+          <p:style>
+            <a:lnRef idx="2">
+              <a:schemeClr val="accent1"/>
+            </a:lnRef>
+            <a:fillRef idx="0">
+              <a:schemeClr val="accent1"/>
+            </a:fillRef>
+            <a:effectRef idx="1">
+              <a:schemeClr val="accent1"/>
+            </a:effectRef>
+            <a:fontRef idx="minor">
+              <a:schemeClr val="tx1"/>
+            </a:fontRef>
+          </p:style>
+        </p:cxnSp>
+        <p:cxnSp>
+          <p:nvCxnSpPr>
+            <p:cNvPr id="147" name="Straight Connector 146">
+              <a:extLst>
+                <a:ext uri="{FF2B5EF4-FFF2-40B4-BE49-F238E27FC236}">
+                  <a16:creationId xmlns:a16="http://schemas.microsoft.com/office/drawing/2014/main" id="{45C3381F-390D-C2F3-E51B-5BEF92543EEE}"/>
+                </a:ext>
+              </a:extLst>
+            </p:cNvPr>
+            <p:cNvCxnSpPr>
+              <a:cxnSpLocks/>
+            </p:cNvCxnSpPr>
+            <p:nvPr/>
+          </p:nvCxnSpPr>
+          <p:spPr>
+            <a:xfrm flipH="1" flipV="1">
+              <a:off x="1074821" y="1507958"/>
+              <a:ext cx="292769" cy="215711"/>
+            </a:xfrm>
+            <a:prstGeom prst="line">
+              <a:avLst/>
+            </a:prstGeom>
+          </p:spPr>
+          <p:style>
+            <a:lnRef idx="2">
+              <a:schemeClr val="accent1"/>
+            </a:lnRef>
+            <a:fillRef idx="0">
+              <a:schemeClr val="accent1"/>
+            </a:fillRef>
+            <a:effectRef idx="1">
+              <a:schemeClr val="accent1"/>
+            </a:effectRef>
+            <a:fontRef idx="minor">
+              <a:schemeClr val="tx1"/>
+            </a:fontRef>
+          </p:style>
+        </p:cxnSp>
+        <p:cxnSp>
+          <p:nvCxnSpPr>
+            <p:cNvPr id="159" name="Straight Connector 158">
+              <a:extLst>
+                <a:ext uri="{FF2B5EF4-FFF2-40B4-BE49-F238E27FC236}">
+                  <a16:creationId xmlns:a16="http://schemas.microsoft.com/office/drawing/2014/main" id="{865DD84B-4F29-10E5-2D86-6E2018D0463C}"/>
+                </a:ext>
+              </a:extLst>
+            </p:cNvPr>
+            <p:cNvCxnSpPr>
+              <a:cxnSpLocks/>
+            </p:cNvCxnSpPr>
+            <p:nvPr/>
+          </p:nvCxnSpPr>
+          <p:spPr>
+            <a:xfrm flipV="1">
+              <a:off x="1074821" y="1829948"/>
+              <a:ext cx="140545" cy="103126"/>
+            </a:xfrm>
+            <a:prstGeom prst="line">
+              <a:avLst/>
+            </a:prstGeom>
+          </p:spPr>
+          <p:style>
+            <a:lnRef idx="2">
+              <a:schemeClr val="accent1"/>
+            </a:lnRef>
+            <a:fillRef idx="0">
+              <a:schemeClr val="accent1"/>
+            </a:fillRef>
+            <a:effectRef idx="1">
+              <a:schemeClr val="accent1"/>
+            </a:effectRef>
+            <a:fontRef idx="minor">
+              <a:schemeClr val="tx1"/>
+            </a:fontRef>
+          </p:style>
+        </p:cxnSp>
+        <p:cxnSp>
+          <p:nvCxnSpPr>
+            <p:cNvPr id="171" name="Straight Connector 170">
+              <a:extLst>
+                <a:ext uri="{FF2B5EF4-FFF2-40B4-BE49-F238E27FC236}">
+                  <a16:creationId xmlns:a16="http://schemas.microsoft.com/office/drawing/2014/main" id="{8DAAB301-BA98-4D82-23E6-354878570163}"/>
+                </a:ext>
+              </a:extLst>
+            </p:cNvPr>
+            <p:cNvCxnSpPr>
+              <a:cxnSpLocks/>
+            </p:cNvCxnSpPr>
+            <p:nvPr/>
+          </p:nvCxnSpPr>
+          <p:spPr>
+            <a:xfrm>
+              <a:off x="1074820" y="1716505"/>
+              <a:ext cx="140545" cy="107137"/>
+            </a:xfrm>
+            <a:prstGeom prst="line">
+              <a:avLst/>
+            </a:prstGeom>
+          </p:spPr>
+          <p:style>
+            <a:lnRef idx="2">
+              <a:schemeClr val="accent1"/>
+            </a:lnRef>
+            <a:fillRef idx="0">
+              <a:schemeClr val="accent1"/>
+            </a:fillRef>
+            <a:effectRef idx="1">
+              <a:schemeClr val="accent1"/>
+            </a:effectRef>
+            <a:fontRef idx="minor">
+              <a:schemeClr val="tx1"/>
+            </a:fontRef>
+          </p:style>
+        </p:cxnSp>
+      </p:grpSp>
+      <p:cxnSp>
+        <p:nvCxnSpPr>
+          <p:cNvPr id="173" name="Straight Arrow Connector 172">
+            <a:extLst>
+              <a:ext uri="{FF2B5EF4-FFF2-40B4-BE49-F238E27FC236}">
+                <a16:creationId xmlns:a16="http://schemas.microsoft.com/office/drawing/2014/main" id="{526219D0-7A62-A14B-B0E1-B1C20BB4E6B6}"/>
+              </a:ext>
+            </a:extLst>
+          </p:cNvPr>
+          <p:cNvCxnSpPr>
+            <a:cxnSpLocks/>
+          </p:cNvCxnSpPr>
+          <p:nvPr/>
+        </p:nvCxnSpPr>
+        <p:spPr>
+          <a:xfrm>
+            <a:off x="3675459" y="2502142"/>
+            <a:ext cx="173935" cy="0"/>
+          </a:xfrm>
+          <a:prstGeom prst="straightConnector1">
+            <a:avLst/>
+          </a:prstGeom>
+          <a:ln>
+            <a:tailEnd type="triangle"/>
+          </a:ln>
+        </p:spPr>
+        <p:style>
+          <a:lnRef idx="2">
+            <a:schemeClr val="accent1"/>
+          </a:lnRef>
+          <a:fillRef idx="0">
+            <a:schemeClr val="accent1"/>
+          </a:fillRef>
+          <a:effectRef idx="1">
+            <a:schemeClr val="accent1"/>
+          </a:effectRef>
+          <a:fontRef idx="minor">
+            <a:schemeClr val="tx1"/>
+          </a:fontRef>
+        </p:style>
+      </p:cxnSp>
+      <p:cxnSp>
+        <p:nvCxnSpPr>
+          <p:cNvPr id="174" name="Straight Arrow Connector 173">
+            <a:extLst>
+              <a:ext uri="{FF2B5EF4-FFF2-40B4-BE49-F238E27FC236}">
+                <a16:creationId xmlns:a16="http://schemas.microsoft.com/office/drawing/2014/main" id="{73CA6134-70D5-34FA-00BD-59378BC13DD1}"/>
+              </a:ext>
+            </a:extLst>
+          </p:cNvPr>
+          <p:cNvCxnSpPr/>
+          <p:nvPr/>
+        </p:nvCxnSpPr>
+        <p:spPr>
+          <a:xfrm>
+            <a:off x="3671586" y="2077026"/>
+            <a:ext cx="177808" cy="0"/>
+          </a:xfrm>
+          <a:prstGeom prst="straightConnector1">
+            <a:avLst/>
+          </a:prstGeom>
+          <a:ln>
+            <a:tailEnd type="triangle"/>
+          </a:ln>
+        </p:spPr>
+        <p:style>
+          <a:lnRef idx="2">
+            <a:schemeClr val="accent1"/>
+          </a:lnRef>
+          <a:fillRef idx="0">
+            <a:schemeClr val="accent1"/>
+          </a:fillRef>
+          <a:effectRef idx="1">
+            <a:schemeClr val="accent1"/>
+          </a:effectRef>
+          <a:fontRef idx="minor">
+            <a:schemeClr val="tx1"/>
+          </a:fontRef>
+        </p:style>
+      </p:cxnSp>
+      <p:sp>
+        <p:nvSpPr>
+          <p:cNvPr id="184" name="TextBox 183">
+            <a:extLst>
+              <a:ext uri="{FF2B5EF4-FFF2-40B4-BE49-F238E27FC236}">
+                <a16:creationId xmlns:a16="http://schemas.microsoft.com/office/drawing/2014/main" id="{58EBC1B8-4825-3984-18AF-440ADACF2ABF}"/>
+              </a:ext>
+            </a:extLst>
+          </p:cNvPr>
+          <p:cNvSpPr txBox="1"/>
+          <p:nvPr/>
+        </p:nvSpPr>
+        <p:spPr>
+          <a:xfrm>
+            <a:off x="3884231" y="2175559"/>
+            <a:ext cx="351378" cy="230832"/>
+          </a:xfrm>
+          <a:prstGeom prst="rect">
+            <a:avLst/>
+          </a:prstGeom>
+          <a:noFill/>
+        </p:spPr>
+        <p:txBody>
+          <a:bodyPr wrap="none" rtlCol="0">
+            <a:spAutoFit/>
+          </a:bodyPr>
+          <a:lstStyle/>
+          <a:p>
+            <a:pPr algn="ctr"/>
+            <a:r>
+              <a:rPr lang="en-US" sz="900" dirty="0"/>
+              <a:t>“+”</a:t>
+            </a:r>
+          </a:p>
+        </p:txBody>
+      </p:sp>
+      <p:cxnSp>
+        <p:nvCxnSpPr>
+          <p:cNvPr id="187" name="Straight Arrow Connector 186">
+            <a:extLst>
+              <a:ext uri="{FF2B5EF4-FFF2-40B4-BE49-F238E27FC236}">
+                <a16:creationId xmlns:a16="http://schemas.microsoft.com/office/drawing/2014/main" id="{0D200FF7-E333-ACB1-85A2-D9AC30E6FCDF}"/>
+              </a:ext>
+            </a:extLst>
+          </p:cNvPr>
+          <p:cNvCxnSpPr>
+            <a:cxnSpLocks/>
+          </p:cNvCxnSpPr>
+          <p:nvPr/>
+        </p:nvCxnSpPr>
+        <p:spPr>
+          <a:xfrm flipV="1">
+            <a:off x="4634375" y="2755109"/>
+            <a:ext cx="100338" cy="2498"/>
+          </a:xfrm>
+          <a:prstGeom prst="straightConnector1">
+            <a:avLst/>
+          </a:prstGeom>
+          <a:ln>
+            <a:tailEnd type="triangle"/>
+          </a:ln>
+        </p:spPr>
+        <p:style>
+          <a:lnRef idx="2">
+            <a:schemeClr val="accent1"/>
+          </a:lnRef>
+          <a:fillRef idx="0">
+            <a:schemeClr val="accent1"/>
+          </a:fillRef>
+          <a:effectRef idx="1">
+            <a:schemeClr val="accent1"/>
+          </a:effectRef>
+          <a:fontRef idx="minor">
+            <a:schemeClr val="tx1"/>
+          </a:fontRef>
+        </p:style>
+      </p:cxnSp>
+      <p:sp>
+        <p:nvSpPr>
+          <p:cNvPr id="189" name="TextBox 188">
+            <a:extLst>
+              <a:ext uri="{FF2B5EF4-FFF2-40B4-BE49-F238E27FC236}">
+                <a16:creationId xmlns:a16="http://schemas.microsoft.com/office/drawing/2014/main" id="{0E85AB3B-858D-5BF6-ED0E-B3C0624C86F7}"/>
+              </a:ext>
+            </a:extLst>
+          </p:cNvPr>
+          <p:cNvSpPr txBox="1"/>
+          <p:nvPr/>
+        </p:nvSpPr>
+        <p:spPr>
+          <a:xfrm>
+            <a:off x="4379586" y="2641578"/>
+            <a:ext cx="332142" cy="230832"/>
+          </a:xfrm>
+          <a:prstGeom prst="rect">
+            <a:avLst/>
+          </a:prstGeom>
+          <a:noFill/>
+        </p:spPr>
+        <p:txBody>
+          <a:bodyPr wrap="none" rtlCol="0">
+            <a:spAutoFit/>
+          </a:bodyPr>
+          <a:lstStyle/>
+          <a:p>
+            <a:pPr algn="ctr"/>
+            <a:r>
+              <a:rPr lang="en-US" sz="900" dirty="0"/>
+              <a:t>PC</a:t>
+            </a:r>
+          </a:p>
+        </p:txBody>
+      </p:sp>
+      <p:cxnSp>
+        <p:nvCxnSpPr>
+          <p:cNvPr id="190" name="Straight Arrow Connector 189">
+            <a:extLst>
+              <a:ext uri="{FF2B5EF4-FFF2-40B4-BE49-F238E27FC236}">
+                <a16:creationId xmlns:a16="http://schemas.microsoft.com/office/drawing/2014/main" id="{663EF25C-11FE-91FB-6359-867A30C024D1}"/>
+              </a:ext>
+            </a:extLst>
+          </p:cNvPr>
+          <p:cNvCxnSpPr>
+            <a:cxnSpLocks/>
+          </p:cNvCxnSpPr>
+          <p:nvPr/>
+        </p:nvCxnSpPr>
+        <p:spPr>
+          <a:xfrm>
+            <a:off x="4372527" y="2207613"/>
+            <a:ext cx="374301" cy="0"/>
+          </a:xfrm>
+          <a:prstGeom prst="straightConnector1">
+            <a:avLst/>
+          </a:prstGeom>
+          <a:ln>
+            <a:tailEnd type="triangle"/>
+          </a:ln>
+        </p:spPr>
+        <p:style>
+          <a:lnRef idx="2">
+            <a:schemeClr val="accent1"/>
+          </a:lnRef>
+          <a:fillRef idx="0">
+            <a:schemeClr val="accent1"/>
+          </a:fillRef>
+          <a:effectRef idx="1">
+            <a:schemeClr val="accent1"/>
+          </a:effectRef>
+          <a:fontRef idx="minor">
+            <a:schemeClr val="tx1"/>
+          </a:fontRef>
+        </p:style>
+      </p:cxnSp>
+      <p:cxnSp>
+        <p:nvCxnSpPr>
+          <p:cNvPr id="196" name="Straight Arrow Connector 195">
+            <a:extLst>
+              <a:ext uri="{FF2B5EF4-FFF2-40B4-BE49-F238E27FC236}">
+                <a16:creationId xmlns:a16="http://schemas.microsoft.com/office/drawing/2014/main" id="{C4DF3196-3785-A9E7-1F1B-2A6EE6375854}"/>
+              </a:ext>
+            </a:extLst>
+          </p:cNvPr>
+          <p:cNvCxnSpPr>
+            <a:cxnSpLocks/>
+          </p:cNvCxnSpPr>
+          <p:nvPr/>
+        </p:nvCxnSpPr>
+        <p:spPr>
+          <a:xfrm>
+            <a:off x="4372527" y="2207613"/>
+            <a:ext cx="0" cy="213936"/>
+          </a:xfrm>
+          <a:prstGeom prst="straightConnector1">
+            <a:avLst/>
+          </a:prstGeom>
+          <a:ln>
+            <a:tailEnd type="none"/>
+          </a:ln>
+        </p:spPr>
+        <p:style>
+          <a:lnRef idx="2">
+            <a:schemeClr val="accent1"/>
+          </a:lnRef>
+          <a:fillRef idx="0">
+            <a:schemeClr val="accent1"/>
+          </a:fillRef>
+          <a:effectRef idx="1">
+            <a:schemeClr val="accent1"/>
+          </a:effectRef>
+          <a:fontRef idx="minor">
+            <a:schemeClr val="tx1"/>
+          </a:fontRef>
+        </p:style>
+      </p:cxnSp>
+      <p:cxnSp>
+        <p:nvCxnSpPr>
+          <p:cNvPr id="198" name="Straight Arrow Connector 197">
+            <a:extLst>
+              <a:ext uri="{FF2B5EF4-FFF2-40B4-BE49-F238E27FC236}">
+                <a16:creationId xmlns:a16="http://schemas.microsoft.com/office/drawing/2014/main" id="{E418A0F2-C32C-CA49-AA0F-30FCCCAA2766}"/>
+              </a:ext>
+            </a:extLst>
+          </p:cNvPr>
+          <p:cNvCxnSpPr>
+            <a:cxnSpLocks/>
+          </p:cNvCxnSpPr>
+          <p:nvPr/>
+        </p:nvCxnSpPr>
+        <p:spPr>
+          <a:xfrm>
+            <a:off x="4139842" y="2315754"/>
+            <a:ext cx="232685" cy="0"/>
+          </a:xfrm>
+          <a:prstGeom prst="straightConnector1">
+            <a:avLst/>
+          </a:prstGeom>
+          <a:ln>
+            <a:tailEnd type="none"/>
+          </a:ln>
+        </p:spPr>
+        <p:style>
+          <a:lnRef idx="2">
+            <a:schemeClr val="accent1"/>
+          </a:lnRef>
+          <a:fillRef idx="0">
+            <a:schemeClr val="accent1"/>
+          </a:fillRef>
+          <a:effectRef idx="1">
+            <a:schemeClr val="accent1"/>
+          </a:effectRef>
+          <a:fontRef idx="minor">
+            <a:schemeClr val="tx1"/>
+          </a:fontRef>
+        </p:style>
+      </p:cxnSp>
+      <p:sp>
+        <p:nvSpPr>
+          <p:cNvPr id="199" name="TextBox 198">
+            <a:extLst>
+              <a:ext uri="{FF2B5EF4-FFF2-40B4-BE49-F238E27FC236}">
+                <a16:creationId xmlns:a16="http://schemas.microsoft.com/office/drawing/2014/main" id="{5BBDEEB3-B3C4-1244-0A2C-DEAADDC8E330}"/>
+              </a:ext>
+            </a:extLst>
+          </p:cNvPr>
+          <p:cNvSpPr txBox="1"/>
+          <p:nvPr/>
+        </p:nvSpPr>
+        <p:spPr>
+          <a:xfrm>
+            <a:off x="4065844" y="1310812"/>
+            <a:ext cx="671979" cy="230832"/>
+          </a:xfrm>
+          <a:prstGeom prst="rect">
+            <a:avLst/>
+          </a:prstGeom>
+          <a:noFill/>
+        </p:spPr>
+        <p:txBody>
+          <a:bodyPr wrap="none" rtlCol="0">
+            <a:spAutoFit/>
+          </a:bodyPr>
+          <a:lstStyle/>
+          <a:p>
+            <a:pPr algn="ctr"/>
+            <a:r>
+              <a:rPr lang="en-US" sz="900" dirty="0"/>
+              <a:t>Not equal</a:t>
+            </a:r>
+          </a:p>
+        </p:txBody>
+      </p:sp>
     </p:spTree>
     <p:extLst>
       <p:ext uri="{BB962C8B-B14F-4D97-AF65-F5344CB8AC3E}">

--- a/RISCVstage4.pptx
+++ b/RISCVstage4.pptx
@@ -115,7 +115,7 @@
 <file path=ppt/revisionInfo.xml><?xml version="1.0" encoding="utf-8"?>
 <p1510:revInfo xmlns:a="http://schemas.openxmlformats.org/drawingml/2006/main" xmlns:r="http://schemas.openxmlformats.org/officeDocument/2006/relationships" xmlns:p1510="http://schemas.microsoft.com/office/powerpoint/2015/10/main">
   <p1510:revLst>
-    <p1510:client id="{5550478D-03C3-4A9B-9853-97954EEDE79F}" v="6" dt="2026-03-05T22:38:16.057"/>
+    <p1510:client id="{5550478D-03C3-4A9B-9853-97954EEDE79F}" v="5" dt="2026-03-10T17:12:02.867"/>
   </p1510:revLst>
 </p1510:revInfo>
 </file>
@@ -125,24 +125,16 @@
   <pc:docChgLst>
     <pc:chgData name="York, George W CIV USAF USAFA DF/DFEC" userId="1fb5875a-4594-4db2-80fb-f0db3de11280" providerId="ADAL" clId="{09330963-85FD-4C99-A81B-94D0EE5CFFEB}"/>
     <pc:docChg chg="custSel modSld">
-      <pc:chgData name="York, George W CIV USAF USAFA DF/DFEC" userId="1fb5875a-4594-4db2-80fb-f0db3de11280" providerId="ADAL" clId="{09330963-85FD-4C99-A81B-94D0EE5CFFEB}" dt="2026-03-05T22:38:22.200" v="19" actId="1076"/>
+      <pc:chgData name="York, George W CIV USAF USAFA DF/DFEC" userId="1fb5875a-4594-4db2-80fb-f0db3de11280" providerId="ADAL" clId="{09330963-85FD-4C99-A81B-94D0EE5CFFEB}" dt="2026-03-10T17:13:54.135" v="44" actId="1076"/>
       <pc:docMkLst>
         <pc:docMk/>
       </pc:docMkLst>
       <pc:sldChg chg="addSp delSp modSp mod">
-        <pc:chgData name="York, George W CIV USAF USAFA DF/DFEC" userId="1fb5875a-4594-4db2-80fb-f0db3de11280" providerId="ADAL" clId="{09330963-85FD-4C99-A81B-94D0EE5CFFEB}" dt="2026-03-05T22:38:22.200" v="19" actId="1076"/>
+        <pc:chgData name="York, George W CIV USAF USAFA DF/DFEC" userId="1fb5875a-4594-4db2-80fb-f0db3de11280" providerId="ADAL" clId="{09330963-85FD-4C99-A81B-94D0EE5CFFEB}" dt="2026-03-10T17:13:54.135" v="44" actId="1076"/>
         <pc:sldMkLst>
           <pc:docMk/>
           <pc:sldMk cId="1501170907" sldId="256"/>
         </pc:sldMkLst>
-        <pc:spChg chg="del">
-          <ac:chgData name="York, George W CIV USAF USAFA DF/DFEC" userId="1fb5875a-4594-4db2-80fb-f0db3de11280" providerId="ADAL" clId="{09330963-85FD-4C99-A81B-94D0EE5CFFEB}" dt="2026-03-05T22:36:35.379" v="13" actId="478"/>
-          <ac:spMkLst>
-            <pc:docMk/>
-            <pc:sldMk cId="1501170907" sldId="256"/>
-            <ac:spMk id="37" creationId="{FEBD6354-C348-CAC9-89DB-E3F28A4B9C7A}"/>
-          </ac:spMkLst>
-        </pc:spChg>
         <pc:spChg chg="ord">
           <ac:chgData name="York, George W CIV USAF USAFA DF/DFEC" userId="1fb5875a-4594-4db2-80fb-f0db3de11280" providerId="ADAL" clId="{09330963-85FD-4C99-A81B-94D0EE5CFFEB}" dt="2026-03-05T22:33:00.568" v="3" actId="167"/>
           <ac:spMkLst>
@@ -175,68 +167,36 @@
             <ac:spMk id="132" creationId="{0D9A6022-1D6D-F3DA-CC84-317FF5FD6666}"/>
           </ac:spMkLst>
         </pc:spChg>
-        <pc:spChg chg="del">
-          <ac:chgData name="York, George W CIV USAF USAFA DF/DFEC" userId="1fb5875a-4594-4db2-80fb-f0db3de11280" providerId="ADAL" clId="{09330963-85FD-4C99-A81B-94D0EE5CFFEB}" dt="2026-03-05T22:36:35.379" v="13" actId="478"/>
+        <pc:spChg chg="add mod">
+          <ac:chgData name="York, George W CIV USAF USAFA DF/DFEC" userId="1fb5875a-4594-4db2-80fb-f0db3de11280" providerId="ADAL" clId="{09330963-85FD-4C99-A81B-94D0EE5CFFEB}" dt="2026-03-10T17:10:55.491" v="32" actId="1076"/>
           <ac:spMkLst>
             <pc:docMk/>
             <pc:sldMk cId="1501170907" sldId="256"/>
-            <ac:spMk id="145" creationId="{D48BF948-61BF-AC37-8597-388094170D18}"/>
+            <ac:spMk id="151" creationId="{CD28274F-92E6-F852-6391-A717240DE2DF}"/>
           </ac:spMkLst>
         </pc:spChg>
-        <pc:spChg chg="del">
-          <ac:chgData name="York, George W CIV USAF USAFA DF/DFEC" userId="1fb5875a-4594-4db2-80fb-f0db3de11280" providerId="ADAL" clId="{09330963-85FD-4C99-A81B-94D0EE5CFFEB}" dt="2026-03-05T22:36:35.379" v="13" actId="478"/>
+        <pc:spChg chg="add mod">
+          <ac:chgData name="York, George W CIV USAF USAFA DF/DFEC" userId="1fb5875a-4594-4db2-80fb-f0db3de11280" providerId="ADAL" clId="{09330963-85FD-4C99-A81B-94D0EE5CFFEB}" dt="2026-03-10T17:10:55.491" v="32" actId="1076"/>
           <ac:spMkLst>
             <pc:docMk/>
             <pc:sldMk cId="1501170907" sldId="256"/>
-            <ac:spMk id="146" creationId="{69719632-7E59-F7B2-AEF4-E4C30AA0AEF2}"/>
+            <ac:spMk id="153" creationId="{6C7963B8-EAB3-1251-7B88-E9681119B880}"/>
           </ac:spMkLst>
         </pc:spChg>
-        <pc:spChg chg="del">
-          <ac:chgData name="York, George W CIV USAF USAFA DF/DFEC" userId="1fb5875a-4594-4db2-80fb-f0db3de11280" providerId="ADAL" clId="{09330963-85FD-4C99-A81B-94D0EE5CFFEB}" dt="2026-03-05T22:36:35.379" v="13" actId="478"/>
+        <pc:spChg chg="add mod">
+          <ac:chgData name="York, George W CIV USAF USAFA DF/DFEC" userId="1fb5875a-4594-4db2-80fb-f0db3de11280" providerId="ADAL" clId="{09330963-85FD-4C99-A81B-94D0EE5CFFEB}" dt="2026-03-10T17:10:55.491" v="32" actId="1076"/>
           <ac:spMkLst>
             <pc:docMk/>
             <pc:sldMk cId="1501170907" sldId="256"/>
-            <ac:spMk id="148" creationId="{6432B689-7D1C-F807-6B45-D8272427DA3A}"/>
+            <ac:spMk id="154" creationId="{6E64875F-2B8E-5F20-AD69-75128545C0DD}"/>
           </ac:spMkLst>
         </pc:spChg>
-        <pc:spChg chg="del">
-          <ac:chgData name="York, George W CIV USAF USAFA DF/DFEC" userId="1fb5875a-4594-4db2-80fb-f0db3de11280" providerId="ADAL" clId="{09330963-85FD-4C99-A81B-94D0EE5CFFEB}" dt="2026-03-05T22:36:35.379" v="13" actId="478"/>
+        <pc:spChg chg="add mod">
+          <ac:chgData name="York, George W CIV USAF USAFA DF/DFEC" userId="1fb5875a-4594-4db2-80fb-f0db3de11280" providerId="ADAL" clId="{09330963-85FD-4C99-A81B-94D0EE5CFFEB}" dt="2026-03-10T17:10:55.491" v="32" actId="1076"/>
           <ac:spMkLst>
             <pc:docMk/>
             <pc:sldMk cId="1501170907" sldId="256"/>
-            <ac:spMk id="149" creationId="{831B5896-D57B-4667-02CD-6AAF11DEE5E2}"/>
-          </ac:spMkLst>
-        </pc:spChg>
-        <pc:spChg chg="del">
-          <ac:chgData name="York, George W CIV USAF USAFA DF/DFEC" userId="1fb5875a-4594-4db2-80fb-f0db3de11280" providerId="ADAL" clId="{09330963-85FD-4C99-A81B-94D0EE5CFFEB}" dt="2026-03-05T22:36:35.379" v="13" actId="478"/>
-          <ac:spMkLst>
-            <pc:docMk/>
-            <pc:sldMk cId="1501170907" sldId="256"/>
-            <ac:spMk id="151" creationId="{BC6DDD09-EA41-1470-2429-DBE27164913F}"/>
-          </ac:spMkLst>
-        </pc:spChg>
-        <pc:spChg chg="del">
-          <ac:chgData name="York, George W CIV USAF USAFA DF/DFEC" userId="1fb5875a-4594-4db2-80fb-f0db3de11280" providerId="ADAL" clId="{09330963-85FD-4C99-A81B-94D0EE5CFFEB}" dt="2026-03-05T22:36:35.379" v="13" actId="478"/>
-          <ac:spMkLst>
-            <pc:docMk/>
-            <pc:sldMk cId="1501170907" sldId="256"/>
-            <ac:spMk id="155" creationId="{75FA3F6B-D94A-A494-28FD-7D4F921979A2}"/>
-          </ac:spMkLst>
-        </pc:spChg>
-        <pc:spChg chg="del">
-          <ac:chgData name="York, George W CIV USAF USAFA DF/DFEC" userId="1fb5875a-4594-4db2-80fb-f0db3de11280" providerId="ADAL" clId="{09330963-85FD-4C99-A81B-94D0EE5CFFEB}" dt="2026-03-05T22:37:06.857" v="16" actId="478"/>
-          <ac:spMkLst>
-            <pc:docMk/>
-            <pc:sldMk cId="1501170907" sldId="256"/>
-            <ac:spMk id="160" creationId="{3BF5B236-4D8B-849D-0CDF-2CB1B5EE7284}"/>
-          </ac:spMkLst>
-        </pc:spChg>
-        <pc:spChg chg="del">
-          <ac:chgData name="York, George W CIV USAF USAFA DF/DFEC" userId="1fb5875a-4594-4db2-80fb-f0db3de11280" providerId="ADAL" clId="{09330963-85FD-4C99-A81B-94D0EE5CFFEB}" dt="2026-03-05T22:37:09.590" v="17" actId="478"/>
-          <ac:spMkLst>
-            <pc:docMk/>
-            <pc:sldMk cId="1501170907" sldId="256"/>
-            <ac:spMk id="161" creationId="{0E9784F2-B3AB-C0FA-FDFE-48C83AB9B12E}"/>
+            <ac:spMk id="156" creationId="{2566064C-F469-508F-113D-556CBC75A869}"/>
           </ac:spMkLst>
         </pc:spChg>
         <pc:spChg chg="add mod">
@@ -255,8 +215,8 @@
             <ac:spMk id="189" creationId="{0E85AB3B-858D-5BF6-ED0E-B3C0624C86F7}"/>
           </ac:spMkLst>
         </pc:spChg>
-        <pc:spChg chg="add mod">
-          <ac:chgData name="York, George W CIV USAF USAFA DF/DFEC" userId="1fb5875a-4594-4db2-80fb-f0db3de11280" providerId="ADAL" clId="{09330963-85FD-4C99-A81B-94D0EE5CFFEB}" dt="2026-03-05T22:38:22.200" v="19" actId="1076"/>
+        <pc:spChg chg="add del mod">
+          <ac:chgData name="York, George W CIV USAF USAFA DF/DFEC" userId="1fb5875a-4594-4db2-80fb-f0db3de11280" providerId="ADAL" clId="{09330963-85FD-4C99-A81B-94D0EE5CFFEB}" dt="2026-03-10T17:09:56.363" v="30" actId="478"/>
           <ac:spMkLst>
             <pc:docMk/>
             <pc:sldMk cId="1501170907" sldId="256"/>
@@ -264,15 +224,31 @@
           </ac:spMkLst>
         </pc:spChg>
         <pc:spChg chg="del">
-          <ac:chgData name="York, George W CIV USAF USAFA DF/DFEC" userId="1fb5875a-4594-4db2-80fb-f0db3de11280" providerId="ADAL" clId="{09330963-85FD-4C99-A81B-94D0EE5CFFEB}" dt="2026-03-05T22:36:35.379" v="13" actId="478"/>
+          <ac:chgData name="York, George W CIV USAF USAFA DF/DFEC" userId="1fb5875a-4594-4db2-80fb-f0db3de11280" providerId="ADAL" clId="{09330963-85FD-4C99-A81B-94D0EE5CFFEB}" dt="2026-03-10T17:09:56.363" v="30" actId="478"/>
           <ac:spMkLst>
             <pc:docMk/>
             <pc:sldMk cId="1501170907" sldId="256"/>
-            <ac:spMk id="270" creationId="{E335D321-53C8-872A-430E-7732E67F0A79}"/>
+            <ac:spMk id="264" creationId="{18102C07-F7E1-1AF1-477B-00B68F177F07}"/>
           </ac:spMkLst>
         </pc:spChg>
-        <pc:grpChg chg="add mod">
-          <ac:chgData name="York, George W CIV USAF USAFA DF/DFEC" userId="1fb5875a-4594-4db2-80fb-f0db3de11280" providerId="ADAL" clId="{09330963-85FD-4C99-A81B-94D0EE5CFFEB}" dt="2026-03-05T22:33:38.945" v="6" actId="1076"/>
+        <pc:spChg chg="del">
+          <ac:chgData name="York, George W CIV USAF USAFA DF/DFEC" userId="1fb5875a-4594-4db2-80fb-f0db3de11280" providerId="ADAL" clId="{09330963-85FD-4C99-A81B-94D0EE5CFFEB}" dt="2026-03-10T17:09:56.363" v="30" actId="478"/>
+          <ac:spMkLst>
+            <pc:docMk/>
+            <pc:sldMk cId="1501170907" sldId="256"/>
+            <ac:spMk id="265" creationId="{00A05C49-A5A2-CC74-BAEB-00CF47323BC9}"/>
+          </ac:spMkLst>
+        </pc:spChg>
+        <pc:spChg chg="del">
+          <ac:chgData name="York, George W CIV USAF USAFA DF/DFEC" userId="1fb5875a-4594-4db2-80fb-f0db3de11280" providerId="ADAL" clId="{09330963-85FD-4C99-A81B-94D0EE5CFFEB}" dt="2026-03-10T17:09:56.363" v="30" actId="478"/>
+          <ac:spMkLst>
+            <pc:docMk/>
+            <pc:sldMk cId="1501170907" sldId="256"/>
+            <ac:spMk id="266" creationId="{B178740B-BE6B-31B0-B4FD-0ED1D3EABF36}"/>
+          </ac:spMkLst>
+        </pc:spChg>
+        <pc:grpChg chg="add del mod">
+          <ac:chgData name="York, George W CIV USAF USAFA DF/DFEC" userId="1fb5875a-4594-4db2-80fb-f0db3de11280" providerId="ADAL" clId="{09330963-85FD-4C99-A81B-94D0EE5CFFEB}" dt="2026-03-10T17:11:28.525" v="36" actId="478"/>
           <ac:grpSpMkLst>
             <pc:docMk/>
             <pc:sldMk cId="1501170907" sldId="256"/>
@@ -287,8 +263,16 @@
             <ac:grpSpMk id="137" creationId="{8B5AEF34-ADB3-754B-DE80-ABD4D3F0450B}"/>
           </ac:grpSpMkLst>
         </pc:grpChg>
-        <pc:picChg chg="add mod">
-          <ac:chgData name="York, George W CIV USAF USAFA DF/DFEC" userId="1fb5875a-4594-4db2-80fb-f0db3de11280" providerId="ADAL" clId="{09330963-85FD-4C99-A81B-94D0EE5CFFEB}" dt="2026-03-05T22:32:55.650" v="2" actId="1076"/>
+        <pc:grpChg chg="del">
+          <ac:chgData name="York, George W CIV USAF USAFA DF/DFEC" userId="1fb5875a-4594-4db2-80fb-f0db3de11280" providerId="ADAL" clId="{09330963-85FD-4C99-A81B-94D0EE5CFFEB}" dt="2026-03-10T17:09:56.363" v="30" actId="478"/>
+          <ac:grpSpMkLst>
+            <pc:docMk/>
+            <pc:sldMk cId="1501170907" sldId="256"/>
+            <ac:grpSpMk id="175" creationId="{CF1E05C7-0258-A1DB-5D4E-EA66C6CAA296}"/>
+          </ac:grpSpMkLst>
+        </pc:grpChg>
+        <pc:picChg chg="add del mod">
+          <ac:chgData name="York, George W CIV USAF USAFA DF/DFEC" userId="1fb5875a-4594-4db2-80fb-f0db3de11280" providerId="ADAL" clId="{09330963-85FD-4C99-A81B-94D0EE5CFFEB}" dt="2026-03-10T17:11:32.395" v="37" actId="478"/>
           <ac:picMkLst>
             <pc:docMk/>
             <pc:sldMk cId="1501170907" sldId="256"/>
@@ -303,24 +287,32 @@
             <ac:picMk id="66" creationId="{A404E675-8456-AD52-514C-9920A86819FF}"/>
           </ac:picMkLst>
         </pc:picChg>
-        <pc:cxnChg chg="del">
-          <ac:chgData name="York, George W CIV USAF USAFA DF/DFEC" userId="1fb5875a-4594-4db2-80fb-f0db3de11280" providerId="ADAL" clId="{09330963-85FD-4C99-A81B-94D0EE5CFFEB}" dt="2026-03-05T22:36:35.379" v="13" actId="478"/>
+        <pc:cxnChg chg="add mod">
+          <ac:chgData name="York, George W CIV USAF USAFA DF/DFEC" userId="1fb5875a-4594-4db2-80fb-f0db3de11280" providerId="ADAL" clId="{09330963-85FD-4C99-A81B-94D0EE5CFFEB}" dt="2026-03-10T17:08:30.492" v="22" actId="1076"/>
           <ac:cxnSpMkLst>
             <pc:docMk/>
             <pc:sldMk cId="1501170907" sldId="256"/>
-            <ac:cxnSpMk id="36" creationId="{1EE0AD67-CB2F-1EA8-73F4-A610CE181BCB}"/>
+            <ac:cxnSpMk id="36" creationId="{1BC55C5F-A294-A543-9E3E-E324A93D8CA8}"/>
           </ac:cxnSpMkLst>
         </pc:cxnChg>
         <pc:cxnChg chg="add mod">
-          <ac:chgData name="York, George W CIV USAF USAFA DF/DFEC" userId="1fb5875a-4594-4db2-80fb-f0db3de11280" providerId="ADAL" clId="{09330963-85FD-4C99-A81B-94D0EE5CFFEB}" dt="2026-03-05T22:32:55.650" v="2" actId="1076"/>
+          <ac:chgData name="York, George W CIV USAF USAFA DF/DFEC" userId="1fb5875a-4594-4db2-80fb-f0db3de11280" providerId="ADAL" clId="{09330963-85FD-4C99-A81B-94D0EE5CFFEB}" dt="2026-03-10T17:08:30.492" v="22" actId="1076"/>
+          <ac:cxnSpMkLst>
+            <pc:docMk/>
+            <pc:sldMk cId="1501170907" sldId="256"/>
+            <ac:cxnSpMk id="37" creationId="{ECC19F9B-6EDF-6B64-E3B0-E660B8C52E68}"/>
+          </ac:cxnSpMkLst>
+        </pc:cxnChg>
+        <pc:cxnChg chg="add mod">
+          <ac:chgData name="York, George W CIV USAF USAFA DF/DFEC" userId="1fb5875a-4594-4db2-80fb-f0db3de11280" providerId="ADAL" clId="{09330963-85FD-4C99-A81B-94D0EE5CFFEB}" dt="2026-03-10T17:13:54.135" v="44" actId="1076"/>
           <ac:cxnSpMkLst>
             <pc:docMk/>
             <pc:sldMk cId="1501170907" sldId="256"/>
             <ac:cxnSpMk id="57" creationId="{C6FDD443-491D-B8C9-0359-814E397D9C25}"/>
           </ac:cxnSpMkLst>
         </pc:cxnChg>
-        <pc:cxnChg chg="add mod">
-          <ac:chgData name="York, George W CIV USAF USAFA DF/DFEC" userId="1fb5875a-4594-4db2-80fb-f0db3de11280" providerId="ADAL" clId="{09330963-85FD-4C99-A81B-94D0EE5CFFEB}" dt="2026-03-05T22:32:55.650" v="2" actId="1076"/>
+        <pc:cxnChg chg="add del mod">
+          <ac:chgData name="York, George W CIV USAF USAFA DF/DFEC" userId="1fb5875a-4594-4db2-80fb-f0db3de11280" providerId="ADAL" clId="{09330963-85FD-4C99-A81B-94D0EE5CFFEB}" dt="2026-03-10T17:11:42.928" v="40" actId="478"/>
           <ac:cxnSpMkLst>
             <pc:docMk/>
             <pc:sldMk cId="1501170907" sldId="256"/>
@@ -343,56 +335,56 @@
             <ac:cxnSpMk id="75" creationId="{DD16B353-8132-284E-F417-41F2A2DEDC16}"/>
           </ac:cxnSpMkLst>
         </pc:cxnChg>
-        <pc:cxnChg chg="add mod">
-          <ac:chgData name="York, George W CIV USAF USAFA DF/DFEC" userId="1fb5875a-4594-4db2-80fb-f0db3de11280" providerId="ADAL" clId="{09330963-85FD-4C99-A81B-94D0EE5CFFEB}" dt="2026-03-05T22:34:07.944" v="9" actId="1076"/>
+        <pc:cxnChg chg="add del mod">
+          <ac:chgData name="York, George W CIV USAF USAFA DF/DFEC" userId="1fb5875a-4594-4db2-80fb-f0db3de11280" providerId="ADAL" clId="{09330963-85FD-4C99-A81B-94D0EE5CFFEB}" dt="2026-03-10T17:08:13.744" v="20" actId="478"/>
           <ac:cxnSpMkLst>
             <pc:docMk/>
             <pc:sldMk cId="1501170907" sldId="256"/>
             <ac:cxnSpMk id="78" creationId="{C0897BF0-6C1F-2380-907E-3CFD22113357}"/>
           </ac:cxnSpMkLst>
         </pc:cxnChg>
-        <pc:cxnChg chg="add mod">
-          <ac:chgData name="York, George W CIV USAF USAFA DF/DFEC" userId="1fb5875a-4594-4db2-80fb-f0db3de11280" providerId="ADAL" clId="{09330963-85FD-4C99-A81B-94D0EE5CFFEB}" dt="2026-03-05T22:34:07.944" v="9" actId="1076"/>
+        <pc:cxnChg chg="add del mod">
+          <ac:chgData name="York, George W CIV USAF USAFA DF/DFEC" userId="1fb5875a-4594-4db2-80fb-f0db3de11280" providerId="ADAL" clId="{09330963-85FD-4C99-A81B-94D0EE5CFFEB}" dt="2026-03-10T17:08:13.744" v="20" actId="478"/>
           <ac:cxnSpMkLst>
             <pc:docMk/>
             <pc:sldMk cId="1501170907" sldId="256"/>
             <ac:cxnSpMk id="80" creationId="{3211B8BE-2D5F-DC40-493A-A011203B18F9}"/>
           </ac:cxnSpMkLst>
         </pc:cxnChg>
-        <pc:cxnChg chg="add mod">
-          <ac:chgData name="York, George W CIV USAF USAFA DF/DFEC" userId="1fb5875a-4594-4db2-80fb-f0db3de11280" providerId="ADAL" clId="{09330963-85FD-4C99-A81B-94D0EE5CFFEB}" dt="2026-03-05T22:34:07.944" v="9" actId="1076"/>
+        <pc:cxnChg chg="add del mod">
+          <ac:chgData name="York, George W CIV USAF USAFA DF/DFEC" userId="1fb5875a-4594-4db2-80fb-f0db3de11280" providerId="ADAL" clId="{09330963-85FD-4C99-A81B-94D0EE5CFFEB}" dt="2026-03-10T17:08:13.744" v="20" actId="478"/>
           <ac:cxnSpMkLst>
             <pc:docMk/>
             <pc:sldMk cId="1501170907" sldId="256"/>
             <ac:cxnSpMk id="86" creationId="{2999216A-F5BD-5C3B-C483-7A84E97A2C87}"/>
           </ac:cxnSpMkLst>
         </pc:cxnChg>
-        <pc:cxnChg chg="del">
-          <ac:chgData name="York, George W CIV USAF USAFA DF/DFEC" userId="1fb5875a-4594-4db2-80fb-f0db3de11280" providerId="ADAL" clId="{09330963-85FD-4C99-A81B-94D0EE5CFFEB}" dt="2026-03-05T22:32:49.073" v="0" actId="478"/>
+        <pc:cxnChg chg="add mod">
+          <ac:chgData name="York, George W CIV USAF USAFA DF/DFEC" userId="1fb5875a-4594-4db2-80fb-f0db3de11280" providerId="ADAL" clId="{09330963-85FD-4C99-A81B-94D0EE5CFFEB}" dt="2026-03-10T17:08:49.883" v="25" actId="1076"/>
           <ac:cxnSpMkLst>
             <pc:docMk/>
             <pc:sldMk cId="1501170907" sldId="256"/>
-            <ac:cxnSpMk id="105" creationId="{96194351-1F6F-6ECD-551A-2B077972FE1F}"/>
+            <ac:cxnSpMk id="105" creationId="{D07766FF-137E-CFC5-F36B-18899A589011}"/>
           </ac:cxnSpMkLst>
         </pc:cxnChg>
-        <pc:cxnChg chg="add mod">
-          <ac:chgData name="York, George W CIV USAF USAFA DF/DFEC" userId="1fb5875a-4594-4db2-80fb-f0db3de11280" providerId="ADAL" clId="{09330963-85FD-4C99-A81B-94D0EE5CFFEB}" dt="2026-03-05T22:36:14.760" v="12" actId="1076"/>
+        <pc:cxnChg chg="add del mod">
+          <ac:chgData name="York, George W CIV USAF USAFA DF/DFEC" userId="1fb5875a-4594-4db2-80fb-f0db3de11280" providerId="ADAL" clId="{09330963-85FD-4C99-A81B-94D0EE5CFFEB}" dt="2026-03-10T17:09:41.529" v="28" actId="478"/>
           <ac:cxnSpMkLst>
             <pc:docMk/>
             <pc:sldMk cId="1501170907" sldId="256"/>
             <ac:cxnSpMk id="106" creationId="{CE17DD74-D95F-A684-5F8D-79C75CBE937A}"/>
           </ac:cxnSpMkLst>
         </pc:cxnChg>
-        <pc:cxnChg chg="add mod">
-          <ac:chgData name="York, George W CIV USAF USAFA DF/DFEC" userId="1fb5875a-4594-4db2-80fb-f0db3de11280" providerId="ADAL" clId="{09330963-85FD-4C99-A81B-94D0EE5CFFEB}" dt="2026-03-05T22:36:14.760" v="12" actId="1076"/>
+        <pc:cxnChg chg="add del mod">
+          <ac:chgData name="York, George W CIV USAF USAFA DF/DFEC" userId="1fb5875a-4594-4db2-80fb-f0db3de11280" providerId="ADAL" clId="{09330963-85FD-4C99-A81B-94D0EE5CFFEB}" dt="2026-03-10T17:09:41.529" v="28" actId="478"/>
           <ac:cxnSpMkLst>
             <pc:docMk/>
             <pc:sldMk cId="1501170907" sldId="256"/>
             <ac:cxnSpMk id="109" creationId="{2EE93D9E-E510-40BC-F5F1-AAE75522A320}"/>
           </ac:cxnSpMkLst>
         </pc:cxnChg>
-        <pc:cxnChg chg="add mod">
-          <ac:chgData name="York, George W CIV USAF USAFA DF/DFEC" userId="1fb5875a-4594-4db2-80fb-f0db3de11280" providerId="ADAL" clId="{09330963-85FD-4C99-A81B-94D0EE5CFFEB}" dt="2026-03-05T22:36:14.760" v="12" actId="1076"/>
+        <pc:cxnChg chg="add del mod">
+          <ac:chgData name="York, George W CIV USAF USAFA DF/DFEC" userId="1fb5875a-4594-4db2-80fb-f0db3de11280" providerId="ADAL" clId="{09330963-85FD-4C99-A81B-94D0EE5CFFEB}" dt="2026-03-10T17:09:41.529" v="28" actId="478"/>
           <ac:cxnSpMkLst>
             <pc:docMk/>
             <pc:sldMk cId="1501170907" sldId="256"/>
@@ -405,6 +397,14 @@
             <pc:docMk/>
             <pc:sldMk cId="1501170907" sldId="256"/>
             <ac:cxnSpMk id="121" creationId="{C3290510-9088-6A3E-5DFA-AEBEB6FBD1A1}"/>
+          </ac:cxnSpMkLst>
+        </pc:cxnChg>
+        <pc:cxnChg chg="mod">
+          <ac:chgData name="York, George W CIV USAF USAFA DF/DFEC" userId="1fb5875a-4594-4db2-80fb-f0db3de11280" providerId="ADAL" clId="{09330963-85FD-4C99-A81B-94D0EE5CFFEB}" dt="2026-03-10T17:08:43.891" v="24" actId="14100"/>
+          <ac:cxnSpMkLst>
+            <pc:docMk/>
+            <pc:sldMk cId="1501170907" sldId="256"/>
+            <ac:cxnSpMk id="133" creationId="{37C14550-6462-0A41-3B27-18A6907D7904}"/>
           </ac:cxnSpMkLst>
         </pc:cxnChg>
         <pc:cxnChg chg="mod">
@@ -423,12 +423,44 @@
             <ac:cxnSpMk id="144" creationId="{735B5BAB-BBDC-4A8E-3A36-97A6349BBE95}"/>
           </ac:cxnSpMkLst>
         </pc:cxnChg>
-        <pc:cxnChg chg="del">
-          <ac:chgData name="York, George W CIV USAF USAFA DF/DFEC" userId="1fb5875a-4594-4db2-80fb-f0db3de11280" providerId="ADAL" clId="{09330963-85FD-4C99-A81B-94D0EE5CFFEB}" dt="2026-03-05T22:36:35.379" v="13" actId="478"/>
+        <pc:cxnChg chg="add mod">
+          <ac:chgData name="York, George W CIV USAF USAFA DF/DFEC" userId="1fb5875a-4594-4db2-80fb-f0db3de11280" providerId="ADAL" clId="{09330963-85FD-4C99-A81B-94D0EE5CFFEB}" dt="2026-03-10T17:09:36.836" v="27" actId="1076"/>
           <ac:cxnSpMkLst>
             <pc:docMk/>
             <pc:sldMk cId="1501170907" sldId="256"/>
-            <ac:cxnSpMk id="156" creationId="{4E8E377D-848A-C4CD-E531-28E5114DF352}"/>
+            <ac:cxnSpMk id="146" creationId="{ABE6E774-8C9B-4489-D948-65607F2E188A}"/>
+          </ac:cxnSpMkLst>
+        </pc:cxnChg>
+        <pc:cxnChg chg="add mod">
+          <ac:chgData name="York, George W CIV USAF USAFA DF/DFEC" userId="1fb5875a-4594-4db2-80fb-f0db3de11280" providerId="ADAL" clId="{09330963-85FD-4C99-A81B-94D0EE5CFFEB}" dt="2026-03-10T17:09:36.836" v="27" actId="1076"/>
+          <ac:cxnSpMkLst>
+            <pc:docMk/>
+            <pc:sldMk cId="1501170907" sldId="256"/>
+            <ac:cxnSpMk id="148" creationId="{FE9EFFB0-0DED-2330-8209-FC39718441DD}"/>
+          </ac:cxnSpMkLst>
+        </pc:cxnChg>
+        <pc:cxnChg chg="add mod">
+          <ac:chgData name="York, George W CIV USAF USAFA DF/DFEC" userId="1fb5875a-4594-4db2-80fb-f0db3de11280" providerId="ADAL" clId="{09330963-85FD-4C99-A81B-94D0EE5CFFEB}" dt="2026-03-10T17:10:55.491" v="32" actId="1076"/>
+          <ac:cxnSpMkLst>
+            <pc:docMk/>
+            <pc:sldMk cId="1501170907" sldId="256"/>
+            <ac:cxnSpMk id="149" creationId="{F6ECA4E6-7E3F-9AE7-DC4A-642870838647}"/>
+          </ac:cxnSpMkLst>
+        </pc:cxnChg>
+        <pc:cxnChg chg="add mod">
+          <ac:chgData name="York, George W CIV USAF USAFA DF/DFEC" userId="1fb5875a-4594-4db2-80fb-f0db3de11280" providerId="ADAL" clId="{09330963-85FD-4C99-A81B-94D0EE5CFFEB}" dt="2026-03-10T17:10:55.491" v="32" actId="1076"/>
+          <ac:cxnSpMkLst>
+            <pc:docMk/>
+            <pc:sldMk cId="1501170907" sldId="256"/>
+            <ac:cxnSpMk id="152" creationId="{2FC45EE7-792B-F72E-2C03-735BF8B795D9}"/>
+          </ac:cxnSpMkLst>
+        </pc:cxnChg>
+        <pc:cxnChg chg="add mod">
+          <ac:chgData name="York, George W CIV USAF USAFA DF/DFEC" userId="1fb5875a-4594-4db2-80fb-f0db3de11280" providerId="ADAL" clId="{09330963-85FD-4C99-A81B-94D0EE5CFFEB}" dt="2026-03-10T17:10:55.491" v="32" actId="1076"/>
+          <ac:cxnSpMkLst>
+            <pc:docMk/>
+            <pc:sldMk cId="1501170907" sldId="256"/>
+            <ac:cxnSpMk id="155" creationId="{7427857C-18CF-7E87-7DE9-41875BFC41AB}"/>
           </ac:cxnSpMkLst>
         </pc:cxnChg>
         <pc:cxnChg chg="add mod">
@@ -437,6 +469,22 @@
             <pc:docMk/>
             <pc:sldMk cId="1501170907" sldId="256"/>
             <ac:cxnSpMk id="174" creationId="{73CA6134-70D5-34FA-00BD-59378BC13DD1}"/>
+          </ac:cxnSpMkLst>
+        </pc:cxnChg>
+        <pc:cxnChg chg="del">
+          <ac:chgData name="York, George W CIV USAF USAFA DF/DFEC" userId="1fb5875a-4594-4db2-80fb-f0db3de11280" providerId="ADAL" clId="{09330963-85FD-4C99-A81B-94D0EE5CFFEB}" dt="2026-03-10T17:09:56.363" v="30" actId="478"/>
+          <ac:cxnSpMkLst>
+            <pc:docMk/>
+            <pc:sldMk cId="1501170907" sldId="256"/>
+            <ac:cxnSpMk id="183" creationId="{FD895F0D-4BF5-DC7B-F7F3-413542C80AFB}"/>
+          </ac:cxnSpMkLst>
+        </pc:cxnChg>
+        <pc:cxnChg chg="del">
+          <ac:chgData name="York, George W CIV USAF USAFA DF/DFEC" userId="1fb5875a-4594-4db2-80fb-f0db3de11280" providerId="ADAL" clId="{09330963-85FD-4C99-A81B-94D0EE5CFFEB}" dt="2026-03-10T17:09:56.363" v="30" actId="478"/>
+          <ac:cxnSpMkLst>
+            <pc:docMk/>
+            <pc:sldMk cId="1501170907" sldId="256"/>
+            <ac:cxnSpMk id="185" creationId="{8A322888-ED2A-D52F-5D81-55A9F50D831D}"/>
           </ac:cxnSpMkLst>
         </pc:cxnChg>
         <pc:cxnChg chg="mod">
@@ -455,28 +503,52 @@
             <ac:cxnSpMk id="198" creationId="{E418A0F2-C32C-CA49-AA0F-30FCCCAA2766}"/>
           </ac:cxnSpMkLst>
         </pc:cxnChg>
-        <pc:cxnChg chg="del">
-          <ac:chgData name="York, George W CIV USAF USAFA DF/DFEC" userId="1fb5875a-4594-4db2-80fb-f0db3de11280" providerId="ADAL" clId="{09330963-85FD-4C99-A81B-94D0EE5CFFEB}" dt="2026-03-05T22:33:29.304" v="4" actId="478"/>
+        <pc:cxnChg chg="add mod">
+          <ac:chgData name="York, George W CIV USAF USAFA DF/DFEC" userId="1fb5875a-4594-4db2-80fb-f0db3de11280" providerId="ADAL" clId="{09330963-85FD-4C99-A81B-94D0EE5CFFEB}" dt="2026-03-10T17:12:06.654" v="43" actId="1076"/>
           <ac:cxnSpMkLst>
             <pc:docMk/>
             <pc:sldMk cId="1501170907" sldId="256"/>
-            <ac:cxnSpMk id="245" creationId="{44285445-3673-F463-34B1-B7F351676027}"/>
+            <ac:cxnSpMk id="200" creationId="{D4AC79D0-5B76-D005-1A27-F76F271A152F}"/>
           </ac:cxnSpMkLst>
         </pc:cxnChg>
         <pc:cxnChg chg="del">
-          <ac:chgData name="York, George W CIV USAF USAFA DF/DFEC" userId="1fb5875a-4594-4db2-80fb-f0db3de11280" providerId="ADAL" clId="{09330963-85FD-4C99-A81B-94D0EE5CFFEB}" dt="2026-03-05T22:36:08.988" v="10" actId="478"/>
+          <ac:chgData name="York, George W CIV USAF USAFA DF/DFEC" userId="1fb5875a-4594-4db2-80fb-f0db3de11280" providerId="ADAL" clId="{09330963-85FD-4C99-A81B-94D0EE5CFFEB}" dt="2026-03-10T17:09:50.843" v="29" actId="478"/>
           <ac:cxnSpMkLst>
             <pc:docMk/>
             <pc:sldMk cId="1501170907" sldId="256"/>
-            <ac:cxnSpMk id="275" creationId="{FF5E826E-C5DA-266A-3DEA-9D97594449EE}"/>
+            <ac:cxnSpMk id="276" creationId="{370ACF3C-5A72-31AC-3830-8B43C336935F}"/>
           </ac:cxnSpMkLst>
         </pc:cxnChg>
         <pc:cxnChg chg="del">
-          <ac:chgData name="York, George W CIV USAF USAFA DF/DFEC" userId="1fb5875a-4594-4db2-80fb-f0db3de11280" providerId="ADAL" clId="{09330963-85FD-4C99-A81B-94D0EE5CFFEB}" dt="2026-03-05T22:34:02.253" v="7" actId="478"/>
+          <ac:chgData name="York, George W CIV USAF USAFA DF/DFEC" userId="1fb5875a-4594-4db2-80fb-f0db3de11280" providerId="ADAL" clId="{09330963-85FD-4C99-A81B-94D0EE5CFFEB}" dt="2026-03-10T17:09:56.363" v="30" actId="478"/>
           <ac:cxnSpMkLst>
             <pc:docMk/>
             <pc:sldMk cId="1501170907" sldId="256"/>
-            <ac:cxnSpMk id="315" creationId="{CC2E6CF6-7F9B-DF2E-8401-A11C6FFE7D1D}"/>
+            <ac:cxnSpMk id="280" creationId="{BF12A351-142A-23D7-36BD-9308B9D720AA}"/>
+          </ac:cxnSpMkLst>
+        </pc:cxnChg>
+        <pc:cxnChg chg="mod">
+          <ac:chgData name="York, George W CIV USAF USAFA DF/DFEC" userId="1fb5875a-4594-4db2-80fb-f0db3de11280" providerId="ADAL" clId="{09330963-85FD-4C99-A81B-94D0EE5CFFEB}" dt="2026-03-10T17:11:16.439" v="35" actId="14100"/>
+          <ac:cxnSpMkLst>
+            <pc:docMk/>
+            <pc:sldMk cId="1501170907" sldId="256"/>
+            <ac:cxnSpMk id="286" creationId="{B760AF97-E733-241D-903A-11456E3E2363}"/>
+          </ac:cxnSpMkLst>
+        </pc:cxnChg>
+        <pc:cxnChg chg="mod">
+          <ac:chgData name="York, George W CIV USAF USAFA DF/DFEC" userId="1fb5875a-4594-4db2-80fb-f0db3de11280" providerId="ADAL" clId="{09330963-85FD-4C99-A81B-94D0EE5CFFEB}" dt="2026-03-10T17:11:09.526" v="34" actId="14100"/>
+          <ac:cxnSpMkLst>
+            <pc:docMk/>
+            <pc:sldMk cId="1501170907" sldId="256"/>
+            <ac:cxnSpMk id="290" creationId="{1876BEE7-FDFC-0D31-7B67-CAA4ECA61CC2}"/>
+          </ac:cxnSpMkLst>
+        </pc:cxnChg>
+        <pc:cxnChg chg="mod">
+          <ac:chgData name="York, George W CIV USAF USAFA DF/DFEC" userId="1fb5875a-4594-4db2-80fb-f0db3de11280" providerId="ADAL" clId="{09330963-85FD-4C99-A81B-94D0EE5CFFEB}" dt="2026-03-10T17:11:03.585" v="33" actId="1076"/>
+          <ac:cxnSpMkLst>
+            <pc:docMk/>
+            <pc:sldMk cId="1501170907" sldId="256"/>
+            <ac:cxnSpMk id="292" creationId="{F1B7D252-CFD6-2A20-A0B7-01CB66AF15B1}"/>
           </ac:cxnSpMkLst>
         </pc:cxnChg>
       </pc:sldChg>
@@ -632,7 +704,7 @@
           <a:p>
             <a:fld id="{51AFF834-1BEC-4F95-9622-28B5DCC1FE16}" type="datetimeFigureOut">
               <a:rPr lang="en-US" smtClean="0"/>
-              <a:t>3/5/2026</a:t>
+              <a:t>3/10/2026</a:t>
             </a:fld>
             <a:endParaRPr lang="en-US"/>
           </a:p>
@@ -830,7 +902,7 @@
           <a:p>
             <a:fld id="{51AFF834-1BEC-4F95-9622-28B5DCC1FE16}" type="datetimeFigureOut">
               <a:rPr lang="en-US" smtClean="0"/>
-              <a:t>3/5/2026</a:t>
+              <a:t>3/10/2026</a:t>
             </a:fld>
             <a:endParaRPr lang="en-US"/>
           </a:p>
@@ -1038,7 +1110,7 @@
           <a:p>
             <a:fld id="{51AFF834-1BEC-4F95-9622-28B5DCC1FE16}" type="datetimeFigureOut">
               <a:rPr lang="en-US" smtClean="0"/>
-              <a:t>3/5/2026</a:t>
+              <a:t>3/10/2026</a:t>
             </a:fld>
             <a:endParaRPr lang="en-US"/>
           </a:p>
@@ -1236,7 +1308,7 @@
           <a:p>
             <a:fld id="{51AFF834-1BEC-4F95-9622-28B5DCC1FE16}" type="datetimeFigureOut">
               <a:rPr lang="en-US" smtClean="0"/>
-              <a:t>3/5/2026</a:t>
+              <a:t>3/10/2026</a:t>
             </a:fld>
             <a:endParaRPr lang="en-US"/>
           </a:p>
@@ -1511,7 +1583,7 @@
           <a:p>
             <a:fld id="{51AFF834-1BEC-4F95-9622-28B5DCC1FE16}" type="datetimeFigureOut">
               <a:rPr lang="en-US" smtClean="0"/>
-              <a:t>3/5/2026</a:t>
+              <a:t>3/10/2026</a:t>
             </a:fld>
             <a:endParaRPr lang="en-US"/>
           </a:p>
@@ -1776,7 +1848,7 @@
           <a:p>
             <a:fld id="{51AFF834-1BEC-4F95-9622-28B5DCC1FE16}" type="datetimeFigureOut">
               <a:rPr lang="en-US" smtClean="0"/>
-              <a:t>3/5/2026</a:t>
+              <a:t>3/10/2026</a:t>
             </a:fld>
             <a:endParaRPr lang="en-US"/>
           </a:p>
@@ -2188,7 +2260,7 @@
           <a:p>
             <a:fld id="{51AFF834-1BEC-4F95-9622-28B5DCC1FE16}" type="datetimeFigureOut">
               <a:rPr lang="en-US" smtClean="0"/>
-              <a:t>3/5/2026</a:t>
+              <a:t>3/10/2026</a:t>
             </a:fld>
             <a:endParaRPr lang="en-US"/>
           </a:p>
@@ -2329,7 +2401,7 @@
           <a:p>
             <a:fld id="{51AFF834-1BEC-4F95-9622-28B5DCC1FE16}" type="datetimeFigureOut">
               <a:rPr lang="en-US" smtClean="0"/>
-              <a:t>3/5/2026</a:t>
+              <a:t>3/10/2026</a:t>
             </a:fld>
             <a:endParaRPr lang="en-US"/>
           </a:p>
@@ -2442,7 +2514,7 @@
           <a:p>
             <a:fld id="{51AFF834-1BEC-4F95-9622-28B5DCC1FE16}" type="datetimeFigureOut">
               <a:rPr lang="en-US" smtClean="0"/>
-              <a:t>3/5/2026</a:t>
+              <a:t>3/10/2026</a:t>
             </a:fld>
             <a:endParaRPr lang="en-US"/>
           </a:p>
@@ -2753,7 +2825,7 @@
           <a:p>
             <a:fld id="{51AFF834-1BEC-4F95-9622-28B5DCC1FE16}" type="datetimeFigureOut">
               <a:rPr lang="en-US" smtClean="0"/>
-              <a:t>3/5/2026</a:t>
+              <a:t>3/10/2026</a:t>
             </a:fld>
             <a:endParaRPr lang="en-US"/>
           </a:p>
@@ -3041,7 +3113,7 @@
           <a:p>
             <a:fld id="{51AFF834-1BEC-4F95-9622-28B5DCC1FE16}" type="datetimeFigureOut">
               <a:rPr lang="en-US" smtClean="0"/>
-              <a:t>3/5/2026</a:t>
+              <a:t>3/10/2026</a:t>
             </a:fld>
             <a:endParaRPr lang="en-US"/>
           </a:p>
@@ -3282,7 +3354,7 @@
           <a:p>
             <a:fld id="{51AFF834-1BEC-4F95-9622-28B5DCC1FE16}" type="datetimeFigureOut">
               <a:rPr lang="en-US" smtClean="0"/>
-              <a:t>3/5/2026</a:t>
+              <a:t>3/10/2026</a:t>
             </a:fld>
             <a:endParaRPr lang="en-US"/>
           </a:p>
@@ -7105,373 +7177,6 @@
       </p:cxnSp>
       <p:grpSp>
         <p:nvGrpSpPr>
-          <p:cNvPr id="175" name="Group 174">
-            <a:extLst>
-              <a:ext uri="{FF2B5EF4-FFF2-40B4-BE49-F238E27FC236}">
-                <a16:creationId xmlns:a16="http://schemas.microsoft.com/office/drawing/2014/main" id="{CF1E05C7-0258-A1DB-5D4E-EA66C6CAA296}"/>
-              </a:ext>
-            </a:extLst>
-          </p:cNvPr>
-          <p:cNvGrpSpPr/>
-          <p:nvPr/>
-        </p:nvGrpSpPr>
-        <p:grpSpPr>
-          <a:xfrm>
-            <a:off x="3820912" y="1175824"/>
-            <a:ext cx="292770" cy="637674"/>
-            <a:chOff x="1074820" y="1507958"/>
-            <a:chExt cx="292770" cy="637674"/>
-          </a:xfrm>
-        </p:grpSpPr>
-        <p:cxnSp>
-          <p:nvCxnSpPr>
-            <p:cNvPr id="176" name="Straight Connector 175">
-              <a:extLst>
-                <a:ext uri="{FF2B5EF4-FFF2-40B4-BE49-F238E27FC236}">
-                  <a16:creationId xmlns:a16="http://schemas.microsoft.com/office/drawing/2014/main" id="{9B1C3327-A611-2BA8-B007-9186CF3A0E42}"/>
-                </a:ext>
-              </a:extLst>
-            </p:cNvPr>
-            <p:cNvCxnSpPr>
-              <a:cxnSpLocks/>
-            </p:cNvCxnSpPr>
-            <p:nvPr/>
-          </p:nvCxnSpPr>
-          <p:spPr>
-            <a:xfrm>
-              <a:off x="1074821" y="1507958"/>
-              <a:ext cx="0" cy="212558"/>
-            </a:xfrm>
-            <a:prstGeom prst="line">
-              <a:avLst/>
-            </a:prstGeom>
-          </p:spPr>
-          <p:style>
-            <a:lnRef idx="2">
-              <a:schemeClr val="accent1"/>
-            </a:lnRef>
-            <a:fillRef idx="0">
-              <a:schemeClr val="accent1"/>
-            </a:fillRef>
-            <a:effectRef idx="1">
-              <a:schemeClr val="accent1"/>
-            </a:effectRef>
-            <a:fontRef idx="minor">
-              <a:schemeClr val="tx1"/>
-            </a:fontRef>
-          </p:style>
-        </p:cxnSp>
-        <p:cxnSp>
-          <p:nvCxnSpPr>
-            <p:cNvPr id="177" name="Straight Connector 176">
-              <a:extLst>
-                <a:ext uri="{FF2B5EF4-FFF2-40B4-BE49-F238E27FC236}">
-                  <a16:creationId xmlns:a16="http://schemas.microsoft.com/office/drawing/2014/main" id="{3874B16B-1236-9BD1-3E90-062756FAD0B0}"/>
-                </a:ext>
-              </a:extLst>
-            </p:cNvPr>
-            <p:cNvCxnSpPr>
-              <a:cxnSpLocks/>
-            </p:cNvCxnSpPr>
-            <p:nvPr/>
-          </p:nvCxnSpPr>
-          <p:spPr>
-            <a:xfrm>
-              <a:off x="1367590" y="1720516"/>
-              <a:ext cx="0" cy="212558"/>
-            </a:xfrm>
-            <a:prstGeom prst="line">
-              <a:avLst/>
-            </a:prstGeom>
-          </p:spPr>
-          <p:style>
-            <a:lnRef idx="2">
-              <a:schemeClr val="accent1"/>
-            </a:lnRef>
-            <a:fillRef idx="0">
-              <a:schemeClr val="accent1"/>
-            </a:fillRef>
-            <a:effectRef idx="1">
-              <a:schemeClr val="accent1"/>
-            </a:effectRef>
-            <a:fontRef idx="minor">
-              <a:schemeClr val="tx1"/>
-            </a:fontRef>
-          </p:style>
-        </p:cxnSp>
-        <p:cxnSp>
-          <p:nvCxnSpPr>
-            <p:cNvPr id="178" name="Straight Connector 177">
-              <a:extLst>
-                <a:ext uri="{FF2B5EF4-FFF2-40B4-BE49-F238E27FC236}">
-                  <a16:creationId xmlns:a16="http://schemas.microsoft.com/office/drawing/2014/main" id="{C545D7D5-18F9-460B-16FB-45A5E5B3036A}"/>
-                </a:ext>
-              </a:extLst>
-            </p:cNvPr>
-            <p:cNvCxnSpPr>
-              <a:cxnSpLocks/>
-            </p:cNvCxnSpPr>
-            <p:nvPr/>
-          </p:nvCxnSpPr>
-          <p:spPr>
-            <a:xfrm>
-              <a:off x="1074821" y="1933074"/>
-              <a:ext cx="0" cy="212558"/>
-            </a:xfrm>
-            <a:prstGeom prst="line">
-              <a:avLst/>
-            </a:prstGeom>
-          </p:spPr>
-          <p:style>
-            <a:lnRef idx="2">
-              <a:schemeClr val="accent1"/>
-            </a:lnRef>
-            <a:fillRef idx="0">
-              <a:schemeClr val="accent1"/>
-            </a:fillRef>
-            <a:effectRef idx="1">
-              <a:schemeClr val="accent1"/>
-            </a:effectRef>
-            <a:fontRef idx="minor">
-              <a:schemeClr val="tx1"/>
-            </a:fontRef>
-          </p:style>
-        </p:cxnSp>
-        <p:cxnSp>
-          <p:nvCxnSpPr>
-            <p:cNvPr id="179" name="Straight Connector 178">
-              <a:extLst>
-                <a:ext uri="{FF2B5EF4-FFF2-40B4-BE49-F238E27FC236}">
-                  <a16:creationId xmlns:a16="http://schemas.microsoft.com/office/drawing/2014/main" id="{18D96393-1B92-25C8-CCC7-A10F33059DC8}"/>
-                </a:ext>
-              </a:extLst>
-            </p:cNvPr>
-            <p:cNvCxnSpPr>
-              <a:cxnSpLocks/>
-            </p:cNvCxnSpPr>
-            <p:nvPr/>
-          </p:nvCxnSpPr>
-          <p:spPr>
-            <a:xfrm flipH="1">
-              <a:off x="1074821" y="1936227"/>
-              <a:ext cx="292769" cy="209405"/>
-            </a:xfrm>
-            <a:prstGeom prst="line">
-              <a:avLst/>
-            </a:prstGeom>
-          </p:spPr>
-          <p:style>
-            <a:lnRef idx="2">
-              <a:schemeClr val="accent1"/>
-            </a:lnRef>
-            <a:fillRef idx="0">
-              <a:schemeClr val="accent1"/>
-            </a:fillRef>
-            <a:effectRef idx="1">
-              <a:schemeClr val="accent1"/>
-            </a:effectRef>
-            <a:fontRef idx="minor">
-              <a:schemeClr val="tx1"/>
-            </a:fontRef>
-          </p:style>
-        </p:cxnSp>
-        <p:cxnSp>
-          <p:nvCxnSpPr>
-            <p:cNvPr id="180" name="Straight Connector 179">
-              <a:extLst>
-                <a:ext uri="{FF2B5EF4-FFF2-40B4-BE49-F238E27FC236}">
-                  <a16:creationId xmlns:a16="http://schemas.microsoft.com/office/drawing/2014/main" id="{753456A5-2F22-6878-6368-381F766CB36D}"/>
-                </a:ext>
-              </a:extLst>
-            </p:cNvPr>
-            <p:cNvCxnSpPr>
-              <a:cxnSpLocks/>
-            </p:cNvCxnSpPr>
-            <p:nvPr/>
-          </p:nvCxnSpPr>
-          <p:spPr>
-            <a:xfrm flipH="1" flipV="1">
-              <a:off x="1074821" y="1507958"/>
-              <a:ext cx="292769" cy="215711"/>
-            </a:xfrm>
-            <a:prstGeom prst="line">
-              <a:avLst/>
-            </a:prstGeom>
-          </p:spPr>
-          <p:style>
-            <a:lnRef idx="2">
-              <a:schemeClr val="accent1"/>
-            </a:lnRef>
-            <a:fillRef idx="0">
-              <a:schemeClr val="accent1"/>
-            </a:fillRef>
-            <a:effectRef idx="1">
-              <a:schemeClr val="accent1"/>
-            </a:effectRef>
-            <a:fontRef idx="minor">
-              <a:schemeClr val="tx1"/>
-            </a:fontRef>
-          </p:style>
-        </p:cxnSp>
-        <p:cxnSp>
-          <p:nvCxnSpPr>
-            <p:cNvPr id="181" name="Straight Connector 180">
-              <a:extLst>
-                <a:ext uri="{FF2B5EF4-FFF2-40B4-BE49-F238E27FC236}">
-                  <a16:creationId xmlns:a16="http://schemas.microsoft.com/office/drawing/2014/main" id="{0460A47E-6551-87B8-D148-22BB0E7B222D}"/>
-                </a:ext>
-              </a:extLst>
-            </p:cNvPr>
-            <p:cNvCxnSpPr>
-              <a:cxnSpLocks/>
-            </p:cNvCxnSpPr>
-            <p:nvPr/>
-          </p:nvCxnSpPr>
-          <p:spPr>
-            <a:xfrm flipV="1">
-              <a:off x="1074821" y="1829948"/>
-              <a:ext cx="140545" cy="103126"/>
-            </a:xfrm>
-            <a:prstGeom prst="line">
-              <a:avLst/>
-            </a:prstGeom>
-          </p:spPr>
-          <p:style>
-            <a:lnRef idx="2">
-              <a:schemeClr val="accent1"/>
-            </a:lnRef>
-            <a:fillRef idx="0">
-              <a:schemeClr val="accent1"/>
-            </a:fillRef>
-            <a:effectRef idx="1">
-              <a:schemeClr val="accent1"/>
-            </a:effectRef>
-            <a:fontRef idx="minor">
-              <a:schemeClr val="tx1"/>
-            </a:fontRef>
-          </p:style>
-        </p:cxnSp>
-        <p:cxnSp>
-          <p:nvCxnSpPr>
-            <p:cNvPr id="182" name="Straight Connector 181">
-              <a:extLst>
-                <a:ext uri="{FF2B5EF4-FFF2-40B4-BE49-F238E27FC236}">
-                  <a16:creationId xmlns:a16="http://schemas.microsoft.com/office/drawing/2014/main" id="{5A016AB0-C9E3-96DB-019B-5F43AB8DD8B9}"/>
-                </a:ext>
-              </a:extLst>
-            </p:cNvPr>
-            <p:cNvCxnSpPr>
-              <a:cxnSpLocks/>
-            </p:cNvCxnSpPr>
-            <p:nvPr/>
-          </p:nvCxnSpPr>
-          <p:spPr>
-            <a:xfrm>
-              <a:off x="1074820" y="1716505"/>
-              <a:ext cx="140545" cy="107137"/>
-            </a:xfrm>
-            <a:prstGeom prst="line">
-              <a:avLst/>
-            </a:prstGeom>
-          </p:spPr>
-          <p:style>
-            <a:lnRef idx="2">
-              <a:schemeClr val="accent1"/>
-            </a:lnRef>
-            <a:fillRef idx="0">
-              <a:schemeClr val="accent1"/>
-            </a:fillRef>
-            <a:effectRef idx="1">
-              <a:schemeClr val="accent1"/>
-            </a:effectRef>
-            <a:fontRef idx="minor">
-              <a:schemeClr val="tx1"/>
-            </a:fontRef>
-          </p:style>
-        </p:cxnSp>
-      </p:grpSp>
-      <p:cxnSp>
-        <p:nvCxnSpPr>
-          <p:cNvPr id="183" name="Straight Arrow Connector 182">
-            <a:extLst>
-              <a:ext uri="{FF2B5EF4-FFF2-40B4-BE49-F238E27FC236}">
-                <a16:creationId xmlns:a16="http://schemas.microsoft.com/office/drawing/2014/main" id="{FD895F0D-4BF5-DC7B-F7F3-413542C80AFB}"/>
-              </a:ext>
-            </a:extLst>
-          </p:cNvPr>
-          <p:cNvCxnSpPr>
-            <a:cxnSpLocks/>
-          </p:cNvCxnSpPr>
-          <p:nvPr/>
-        </p:nvCxnSpPr>
-        <p:spPr>
-          <a:xfrm>
-            <a:off x="3646977" y="1707219"/>
-            <a:ext cx="173935" cy="0"/>
-          </a:xfrm>
-          <a:prstGeom prst="straightConnector1">
-            <a:avLst/>
-          </a:prstGeom>
-          <a:ln>
-            <a:tailEnd type="triangle"/>
-          </a:ln>
-        </p:spPr>
-        <p:style>
-          <a:lnRef idx="2">
-            <a:schemeClr val="accent1"/>
-          </a:lnRef>
-          <a:fillRef idx="0">
-            <a:schemeClr val="accent1"/>
-          </a:fillRef>
-          <a:effectRef idx="1">
-            <a:schemeClr val="accent1"/>
-          </a:effectRef>
-          <a:fontRef idx="minor">
-            <a:schemeClr val="tx1"/>
-          </a:fontRef>
-        </p:style>
-      </p:cxnSp>
-      <p:cxnSp>
-        <p:nvCxnSpPr>
-          <p:cNvPr id="185" name="Straight Arrow Connector 184">
-            <a:extLst>
-              <a:ext uri="{FF2B5EF4-FFF2-40B4-BE49-F238E27FC236}">
-                <a16:creationId xmlns:a16="http://schemas.microsoft.com/office/drawing/2014/main" id="{8A322888-ED2A-D52F-5D81-55A9F50D831D}"/>
-              </a:ext>
-            </a:extLst>
-          </p:cNvPr>
-          <p:cNvCxnSpPr/>
-          <p:nvPr/>
-        </p:nvCxnSpPr>
-        <p:spPr>
-          <a:xfrm>
-            <a:off x="3643104" y="1282103"/>
-            <a:ext cx="177808" cy="0"/>
-          </a:xfrm>
-          <a:prstGeom prst="straightConnector1">
-            <a:avLst/>
-          </a:prstGeom>
-          <a:ln>
-            <a:tailEnd type="triangle"/>
-          </a:ln>
-        </p:spPr>
-        <p:style>
-          <a:lnRef idx="2">
-            <a:schemeClr val="accent1"/>
-          </a:lnRef>
-          <a:fillRef idx="0">
-            <a:schemeClr val="accent1"/>
-          </a:fillRef>
-          <a:effectRef idx="1">
-            <a:schemeClr val="accent1"/>
-          </a:effectRef>
-          <a:fontRef idx="minor">
-            <a:schemeClr val="tx1"/>
-          </a:fontRef>
-        </p:style>
-      </p:cxnSp>
-      <p:grpSp>
-        <p:nvGrpSpPr>
           <p:cNvPr id="214" name="Group 213">
             <a:extLst>
               <a:ext uri="{FF2B5EF4-FFF2-40B4-BE49-F238E27FC236}">
@@ -8482,120 +8187,12 @@
           </a:p>
         </p:txBody>
       </p:sp>
-      <p:sp>
-        <p:nvSpPr>
-          <p:cNvPr id="264" name="TextBox 263">
-            <a:extLst>
-              <a:ext uri="{FF2B5EF4-FFF2-40B4-BE49-F238E27FC236}">
-                <a16:creationId xmlns:a16="http://schemas.microsoft.com/office/drawing/2014/main" id="{18102C07-F7E1-1AF1-477B-00B68F177F07}"/>
-              </a:ext>
-            </a:extLst>
-          </p:cNvPr>
-          <p:cNvSpPr txBox="1"/>
-          <p:nvPr/>
-        </p:nvSpPr>
-        <p:spPr>
-          <a:xfrm>
-            <a:off x="3230983" y="1168954"/>
-            <a:ext cx="474810" cy="230832"/>
-          </a:xfrm>
-          <a:prstGeom prst="rect">
-            <a:avLst/>
-          </a:prstGeom>
-          <a:noFill/>
-        </p:spPr>
-        <p:txBody>
-          <a:bodyPr wrap="none" rtlCol="0">
-            <a:spAutoFit/>
-          </a:bodyPr>
-          <a:lstStyle/>
-          <a:p>
-            <a:pPr algn="ctr"/>
-            <a:r>
-              <a:rPr lang="en-US" sz="900" dirty="0"/>
-              <a:t>dout1</a:t>
-            </a:r>
-          </a:p>
-        </p:txBody>
-      </p:sp>
-      <p:sp>
-        <p:nvSpPr>
-          <p:cNvPr id="265" name="TextBox 264">
-            <a:extLst>
-              <a:ext uri="{FF2B5EF4-FFF2-40B4-BE49-F238E27FC236}">
-                <a16:creationId xmlns:a16="http://schemas.microsoft.com/office/drawing/2014/main" id="{00A05C49-A5A2-CC74-BAEB-00CF47323BC9}"/>
-              </a:ext>
-            </a:extLst>
-          </p:cNvPr>
-          <p:cNvSpPr txBox="1"/>
-          <p:nvPr/>
-        </p:nvSpPr>
-        <p:spPr>
-          <a:xfrm>
-            <a:off x="3211913" y="1600087"/>
-            <a:ext cx="474810" cy="230832"/>
-          </a:xfrm>
-          <a:prstGeom prst="rect">
-            <a:avLst/>
-          </a:prstGeom>
-          <a:noFill/>
-        </p:spPr>
-        <p:txBody>
-          <a:bodyPr wrap="none" rtlCol="0">
-            <a:spAutoFit/>
-          </a:bodyPr>
-          <a:lstStyle/>
-          <a:p>
-            <a:pPr algn="ctr"/>
-            <a:r>
-              <a:rPr lang="en-US" sz="900" dirty="0"/>
-              <a:t>dout2</a:t>
-            </a:r>
-          </a:p>
-        </p:txBody>
-      </p:sp>
-      <p:sp>
-        <p:nvSpPr>
-          <p:cNvPr id="266" name="TextBox 265">
-            <a:extLst>
-              <a:ext uri="{FF2B5EF4-FFF2-40B4-BE49-F238E27FC236}">
-                <a16:creationId xmlns:a16="http://schemas.microsoft.com/office/drawing/2014/main" id="{B178740B-BE6B-31B0-B4FD-0ED1D3EABF36}"/>
-              </a:ext>
-            </a:extLst>
-          </p:cNvPr>
-          <p:cNvSpPr txBox="1"/>
-          <p:nvPr/>
-        </p:nvSpPr>
-        <p:spPr>
-          <a:xfrm>
-            <a:off x="3866168" y="1380636"/>
-            <a:ext cx="330540" cy="230832"/>
-          </a:xfrm>
-          <a:prstGeom prst="rect">
-            <a:avLst/>
-          </a:prstGeom>
-          <a:noFill/>
-        </p:spPr>
-        <p:txBody>
-          <a:bodyPr wrap="none" rtlCol="0">
-            <a:spAutoFit/>
-          </a:bodyPr>
-          <a:lstStyle/>
-          <a:p>
-            <a:pPr algn="ctr"/>
-            <a:r>
-              <a:rPr lang="en-US" sz="900" dirty="0"/>
-              <a:t>“-”</a:t>
-            </a:r>
-          </a:p>
-        </p:txBody>
-      </p:sp>
       <p:cxnSp>
         <p:nvCxnSpPr>
-          <p:cNvPr id="276" name="Straight Arrow Connector 275">
-            <a:extLst>
-              <a:ext uri="{FF2B5EF4-FFF2-40B4-BE49-F238E27FC236}">
-                <a16:creationId xmlns:a16="http://schemas.microsoft.com/office/drawing/2014/main" id="{370ACF3C-5A72-31AC-3830-8B43C336935F}"/>
+          <p:cNvPr id="286" name="Straight Connector 285">
+            <a:extLst>
+              <a:ext uri="{FF2B5EF4-FFF2-40B4-BE49-F238E27FC236}">
+                <a16:creationId xmlns:a16="http://schemas.microsoft.com/office/drawing/2014/main" id="{B760AF97-E733-241D-903A-11456E3E2363}"/>
               </a:ext>
             </a:extLst>
           </p:cNvPr>
@@ -8605,96 +8202,9 @@
           <p:nvPr/>
         </p:nvCxnSpPr>
         <p:spPr>
-          <a:xfrm>
-            <a:off x="4825173" y="1497896"/>
-            <a:ext cx="0" cy="650213"/>
-          </a:xfrm>
-          <a:prstGeom prst="straightConnector1">
-            <a:avLst/>
-          </a:prstGeom>
-          <a:ln>
-            <a:solidFill>
-              <a:srgbClr val="FF0000"/>
-            </a:solidFill>
-            <a:tailEnd type="triangle"/>
-          </a:ln>
-        </p:spPr>
-        <p:style>
-          <a:lnRef idx="2">
-            <a:schemeClr val="accent1"/>
-          </a:lnRef>
-          <a:fillRef idx="0">
-            <a:schemeClr val="accent1"/>
-          </a:fillRef>
-          <a:effectRef idx="1">
-            <a:schemeClr val="accent1"/>
-          </a:effectRef>
-          <a:fontRef idx="minor">
-            <a:schemeClr val="tx1"/>
-          </a:fontRef>
-        </p:style>
-      </p:cxnSp>
-      <p:cxnSp>
-        <p:nvCxnSpPr>
-          <p:cNvPr id="280" name="Straight Connector 279">
-            <a:extLst>
-              <a:ext uri="{FF2B5EF4-FFF2-40B4-BE49-F238E27FC236}">
-                <a16:creationId xmlns:a16="http://schemas.microsoft.com/office/drawing/2014/main" id="{BF12A351-142A-23D7-36BD-9308B9D720AA}"/>
-              </a:ext>
-            </a:extLst>
-          </p:cNvPr>
-          <p:cNvCxnSpPr>
-            <a:cxnSpLocks/>
-          </p:cNvCxnSpPr>
-          <p:nvPr/>
-        </p:nvCxnSpPr>
-        <p:spPr>
-          <a:xfrm>
-            <a:off x="4126293" y="1497896"/>
-            <a:ext cx="695569" cy="0"/>
-          </a:xfrm>
-          <a:prstGeom prst="line">
-            <a:avLst/>
-          </a:prstGeom>
-          <a:ln>
-            <a:solidFill>
-              <a:srgbClr val="FF0000"/>
-            </a:solidFill>
-          </a:ln>
-        </p:spPr>
-        <p:style>
-          <a:lnRef idx="2">
-            <a:schemeClr val="accent1"/>
-          </a:lnRef>
-          <a:fillRef idx="0">
-            <a:schemeClr val="accent1"/>
-          </a:fillRef>
-          <a:effectRef idx="1">
-            <a:schemeClr val="accent1"/>
-          </a:effectRef>
-          <a:fontRef idx="minor">
-            <a:schemeClr val="tx1"/>
-          </a:fontRef>
-        </p:style>
-      </p:cxnSp>
-      <p:cxnSp>
-        <p:nvCxnSpPr>
-          <p:cNvPr id="286" name="Straight Connector 285">
-            <a:extLst>
-              <a:ext uri="{FF2B5EF4-FFF2-40B4-BE49-F238E27FC236}">
-                <a16:creationId xmlns:a16="http://schemas.microsoft.com/office/drawing/2014/main" id="{B760AF97-E733-241D-903A-11456E3E2363}"/>
-              </a:ext>
-            </a:extLst>
-          </p:cNvPr>
-          <p:cNvCxnSpPr>
-            <a:cxnSpLocks/>
-          </p:cNvCxnSpPr>
-          <p:nvPr/>
-        </p:nvCxnSpPr>
-        <p:spPr>
-          <a:xfrm flipH="1">
+          <a:xfrm flipH="1" flipV="1">
             <a:off x="354682" y="1069536"/>
-            <a:ext cx="4751392" cy="0"/>
+            <a:ext cx="4909081" cy="15902"/>
           </a:xfrm>
           <a:prstGeom prst="line">
             <a:avLst/>
@@ -8770,7 +8280,7 @@
         <p:spPr>
           <a:xfrm>
             <a:off x="4978419" y="2517961"/>
-            <a:ext cx="136187" cy="0"/>
+            <a:ext cx="301247" cy="0"/>
           </a:xfrm>
           <a:prstGeom prst="line">
             <a:avLst/>
@@ -8807,7 +8317,7 @@
         </p:nvCxnSpPr>
         <p:spPr>
           <a:xfrm>
-            <a:off x="5116027" y="1069536"/>
+            <a:off x="5283005" y="1069536"/>
             <a:ext cx="0" cy="1448425"/>
           </a:xfrm>
           <a:prstGeom prst="line">
@@ -11177,13 +10687,15 @@
               </a:ext>
             </a:extLst>
           </p:cNvPr>
-          <p:cNvCxnSpPr/>
+          <p:cNvCxnSpPr>
+            <a:cxnSpLocks/>
+          </p:cNvCxnSpPr>
           <p:nvPr/>
         </p:nvCxnSpPr>
         <p:spPr>
           <a:xfrm>
-            <a:off x="5947713" y="2696243"/>
-            <a:ext cx="0" cy="230832"/>
+            <a:off x="5947713" y="2194560"/>
+            <a:ext cx="0" cy="732515"/>
           </a:xfrm>
           <a:prstGeom prst="straightConnector1">
             <a:avLst/>
@@ -11591,36 +11103,6 @@
           </a:fontRef>
         </p:style>
       </p:cxnSp>
-      <p:pic>
-        <p:nvPicPr>
-          <p:cNvPr id="52" name="Picture 51">
-            <a:extLst>
-              <a:ext uri="{FF2B5EF4-FFF2-40B4-BE49-F238E27FC236}">
-                <a16:creationId xmlns:a16="http://schemas.microsoft.com/office/drawing/2014/main" id="{6A6C7C57-77EC-C685-E542-B85B64EC2272}"/>
-              </a:ext>
-            </a:extLst>
-          </p:cNvPr>
-          <p:cNvPicPr>
-            <a:picLocks noChangeAspect="1"/>
-          </p:cNvPicPr>
-          <p:nvPr/>
-        </p:nvPicPr>
-        <p:blipFill>
-          <a:blip r:embed="rId2"/>
-          <a:stretch>
-            <a:fillRect/>
-          </a:stretch>
-        </p:blipFill>
-        <p:spPr>
-          <a:xfrm>
-            <a:off x="3033334" y="4128534"/>
-            <a:ext cx="503999" cy="267608"/>
-          </a:xfrm>
-          <a:prstGeom prst="rect">
-            <a:avLst/>
-          </a:prstGeom>
-        </p:spPr>
-      </p:pic>
       <p:cxnSp>
         <p:nvCxnSpPr>
           <p:cNvPr id="57" name="Straight Arrow Connector 56">
@@ -11635,447 +11117,8 @@
         </p:nvCxnSpPr>
         <p:spPr>
           <a:xfrm>
-            <a:off x="3003853" y="4200631"/>
+            <a:off x="3359244" y="4252509"/>
             <a:ext cx="177808" cy="0"/>
-          </a:xfrm>
-          <a:prstGeom prst="straightConnector1">
-            <a:avLst/>
-          </a:prstGeom>
-          <a:ln>
-            <a:solidFill>
-              <a:srgbClr val="FF0000"/>
-            </a:solidFill>
-            <a:tailEnd type="triangle"/>
-          </a:ln>
-        </p:spPr>
-        <p:style>
-          <a:lnRef idx="2">
-            <a:schemeClr val="accent1"/>
-          </a:lnRef>
-          <a:fillRef idx="0">
-            <a:schemeClr val="accent1"/>
-          </a:fillRef>
-          <a:effectRef idx="1">
-            <a:schemeClr val="accent1"/>
-          </a:effectRef>
-          <a:fontRef idx="minor">
-            <a:schemeClr val="tx1"/>
-          </a:fontRef>
-        </p:style>
-      </p:cxnSp>
-      <p:cxnSp>
-        <p:nvCxnSpPr>
-          <p:cNvPr id="58" name="Straight Arrow Connector 57">
-            <a:extLst>
-              <a:ext uri="{FF2B5EF4-FFF2-40B4-BE49-F238E27FC236}">
-                <a16:creationId xmlns:a16="http://schemas.microsoft.com/office/drawing/2014/main" id="{6F75C507-0674-59E5-259C-2F94883C5048}"/>
-              </a:ext>
-            </a:extLst>
-          </p:cNvPr>
-          <p:cNvCxnSpPr/>
-          <p:nvPr/>
-        </p:nvCxnSpPr>
-        <p:spPr>
-          <a:xfrm>
-            <a:off x="3003853" y="4320229"/>
-            <a:ext cx="177808" cy="0"/>
-          </a:xfrm>
-          <a:prstGeom prst="straightConnector1">
-            <a:avLst/>
-          </a:prstGeom>
-          <a:ln>
-            <a:solidFill>
-              <a:srgbClr val="FF0000"/>
-            </a:solidFill>
-            <a:tailEnd type="triangle"/>
-          </a:ln>
-        </p:spPr>
-        <p:style>
-          <a:lnRef idx="2">
-            <a:schemeClr val="accent1"/>
-          </a:lnRef>
-          <a:fillRef idx="0">
-            <a:schemeClr val="accent1"/>
-          </a:fillRef>
-          <a:effectRef idx="1">
-            <a:schemeClr val="accent1"/>
-          </a:effectRef>
-          <a:fontRef idx="minor">
-            <a:schemeClr val="tx1"/>
-          </a:fontRef>
-        </p:style>
-      </p:cxnSp>
-      <p:grpSp>
-        <p:nvGrpSpPr>
-          <p:cNvPr id="59" name="Group 58">
-            <a:extLst>
-              <a:ext uri="{FF2B5EF4-FFF2-40B4-BE49-F238E27FC236}">
-                <a16:creationId xmlns:a16="http://schemas.microsoft.com/office/drawing/2014/main" id="{A7BBB30E-D888-2009-5408-9916614F6B62}"/>
-              </a:ext>
-            </a:extLst>
-          </p:cNvPr>
-          <p:cNvGrpSpPr/>
-          <p:nvPr/>
-        </p:nvGrpSpPr>
-        <p:grpSpPr>
-          <a:xfrm rot="16200000">
-            <a:off x="8652972" y="3384715"/>
-            <a:ext cx="405246" cy="267608"/>
-            <a:chOff x="6169099" y="3766490"/>
-            <a:chExt cx="533480" cy="267608"/>
-          </a:xfrm>
-        </p:grpSpPr>
-        <p:pic>
-          <p:nvPicPr>
-            <p:cNvPr id="66" name="Picture 65">
-              <a:extLst>
-                <a:ext uri="{FF2B5EF4-FFF2-40B4-BE49-F238E27FC236}">
-                  <a16:creationId xmlns:a16="http://schemas.microsoft.com/office/drawing/2014/main" id="{A404E675-8456-AD52-514C-9920A86819FF}"/>
-                </a:ext>
-              </a:extLst>
-            </p:cNvPr>
-            <p:cNvPicPr>
-              <a:picLocks noChangeAspect="1"/>
-            </p:cNvPicPr>
-            <p:nvPr/>
-          </p:nvPicPr>
-          <p:blipFill>
-            <a:blip r:embed="rId2"/>
-            <a:stretch>
-              <a:fillRect/>
-            </a:stretch>
-          </p:blipFill>
-          <p:spPr>
-            <a:xfrm>
-              <a:off x="6198580" y="3766490"/>
-              <a:ext cx="503999" cy="267608"/>
-            </a:xfrm>
-            <a:prstGeom prst="rect">
-              <a:avLst/>
-            </a:prstGeom>
-          </p:spPr>
-        </p:pic>
-        <p:cxnSp>
-          <p:nvCxnSpPr>
-            <p:cNvPr id="67" name="Straight Arrow Connector 66">
-              <a:extLst>
-                <a:ext uri="{FF2B5EF4-FFF2-40B4-BE49-F238E27FC236}">
-                  <a16:creationId xmlns:a16="http://schemas.microsoft.com/office/drawing/2014/main" id="{E2589DE8-97EF-80AF-BA79-119014A37941}"/>
-                </a:ext>
-              </a:extLst>
-            </p:cNvPr>
-            <p:cNvCxnSpPr>
-              <a:cxnSpLocks/>
-            </p:cNvCxnSpPr>
-            <p:nvPr/>
-          </p:nvCxnSpPr>
-          <p:spPr>
-            <a:xfrm>
-              <a:off x="6169099" y="3838587"/>
-              <a:ext cx="177808" cy="0"/>
-            </a:xfrm>
-            <a:prstGeom prst="straightConnector1">
-              <a:avLst/>
-            </a:prstGeom>
-            <a:ln>
-              <a:solidFill>
-                <a:srgbClr val="FF0000"/>
-              </a:solidFill>
-              <a:tailEnd type="triangle"/>
-            </a:ln>
-          </p:spPr>
-          <p:style>
-            <a:lnRef idx="2">
-              <a:schemeClr val="accent1"/>
-            </a:lnRef>
-            <a:fillRef idx="0">
-              <a:schemeClr val="accent1"/>
-            </a:fillRef>
-            <a:effectRef idx="1">
-              <a:schemeClr val="accent1"/>
-            </a:effectRef>
-            <a:fontRef idx="minor">
-              <a:schemeClr val="tx1"/>
-            </a:fontRef>
-          </p:style>
-        </p:cxnSp>
-        <p:cxnSp>
-          <p:nvCxnSpPr>
-            <p:cNvPr id="75" name="Straight Arrow Connector 74">
-              <a:extLst>
-                <a:ext uri="{FF2B5EF4-FFF2-40B4-BE49-F238E27FC236}">
-                  <a16:creationId xmlns:a16="http://schemas.microsoft.com/office/drawing/2014/main" id="{DD16B353-8132-284E-F417-41F2A2DEDC16}"/>
-                </a:ext>
-              </a:extLst>
-            </p:cNvPr>
-            <p:cNvCxnSpPr>
-              <a:cxnSpLocks/>
-            </p:cNvCxnSpPr>
-            <p:nvPr/>
-          </p:nvCxnSpPr>
-          <p:spPr>
-            <a:xfrm>
-              <a:off x="6169099" y="3958185"/>
-              <a:ext cx="177808" cy="0"/>
-            </a:xfrm>
-            <a:prstGeom prst="straightConnector1">
-              <a:avLst/>
-            </a:prstGeom>
-            <a:ln>
-              <a:solidFill>
-                <a:srgbClr val="FF0000"/>
-              </a:solidFill>
-              <a:tailEnd type="triangle"/>
-            </a:ln>
-          </p:spPr>
-          <p:style>
-            <a:lnRef idx="2">
-              <a:schemeClr val="accent1"/>
-            </a:lnRef>
-            <a:fillRef idx="0">
-              <a:schemeClr val="accent1"/>
-            </a:fillRef>
-            <a:effectRef idx="1">
-              <a:schemeClr val="accent1"/>
-            </a:effectRef>
-            <a:fontRef idx="minor">
-              <a:schemeClr val="tx1"/>
-            </a:fontRef>
-          </p:style>
-        </p:cxnSp>
-      </p:grpSp>
-      <p:cxnSp>
-        <p:nvCxnSpPr>
-          <p:cNvPr id="78" name="Straight Arrow Connector 77">
-            <a:extLst>
-              <a:ext uri="{FF2B5EF4-FFF2-40B4-BE49-F238E27FC236}">
-                <a16:creationId xmlns:a16="http://schemas.microsoft.com/office/drawing/2014/main" id="{C0897BF0-6C1F-2380-907E-3CFD22113357}"/>
-              </a:ext>
-            </a:extLst>
-          </p:cNvPr>
-          <p:cNvCxnSpPr>
-            <a:cxnSpLocks/>
-          </p:cNvCxnSpPr>
-          <p:nvPr/>
-        </p:nvCxnSpPr>
-        <p:spPr>
-          <a:xfrm flipV="1">
-            <a:off x="10987639" y="4023062"/>
-            <a:ext cx="0" cy="195214"/>
-          </a:xfrm>
-          <a:prstGeom prst="straightConnector1">
-            <a:avLst/>
-          </a:prstGeom>
-          <a:ln>
-            <a:solidFill>
-              <a:srgbClr val="FF0000"/>
-            </a:solidFill>
-            <a:tailEnd type="triangle"/>
-          </a:ln>
-        </p:spPr>
-        <p:style>
-          <a:lnRef idx="2">
-            <a:schemeClr val="accent1"/>
-          </a:lnRef>
-          <a:fillRef idx="0">
-            <a:schemeClr val="accent1"/>
-          </a:fillRef>
-          <a:effectRef idx="1">
-            <a:schemeClr val="accent1"/>
-          </a:effectRef>
-          <a:fontRef idx="minor">
-            <a:schemeClr val="tx1"/>
-          </a:fontRef>
-        </p:style>
-      </p:cxnSp>
-      <p:cxnSp>
-        <p:nvCxnSpPr>
-          <p:cNvPr id="80" name="Straight Arrow Connector 79">
-            <a:extLst>
-              <a:ext uri="{FF2B5EF4-FFF2-40B4-BE49-F238E27FC236}">
-                <a16:creationId xmlns:a16="http://schemas.microsoft.com/office/drawing/2014/main" id="{3211B8BE-2D5F-DC40-493A-A011203B18F9}"/>
-              </a:ext>
-            </a:extLst>
-          </p:cNvPr>
-          <p:cNvCxnSpPr>
-            <a:cxnSpLocks/>
-          </p:cNvCxnSpPr>
-          <p:nvPr/>
-        </p:nvCxnSpPr>
-        <p:spPr>
-          <a:xfrm flipV="1">
-            <a:off x="11051139" y="3983250"/>
-            <a:ext cx="0" cy="195214"/>
-          </a:xfrm>
-          <a:prstGeom prst="straightConnector1">
-            <a:avLst/>
-          </a:prstGeom>
-          <a:ln>
-            <a:solidFill>
-              <a:srgbClr val="FF0000"/>
-            </a:solidFill>
-            <a:tailEnd type="triangle"/>
-          </a:ln>
-        </p:spPr>
-        <p:style>
-          <a:lnRef idx="2">
-            <a:schemeClr val="accent1"/>
-          </a:lnRef>
-          <a:fillRef idx="0">
-            <a:schemeClr val="accent1"/>
-          </a:fillRef>
-          <a:effectRef idx="1">
-            <a:schemeClr val="accent1"/>
-          </a:effectRef>
-          <a:fontRef idx="minor">
-            <a:schemeClr val="tx1"/>
-          </a:fontRef>
-        </p:style>
-      </p:cxnSp>
-      <p:cxnSp>
-        <p:nvCxnSpPr>
-          <p:cNvPr id="86" name="Straight Arrow Connector 85">
-            <a:extLst>
-              <a:ext uri="{FF2B5EF4-FFF2-40B4-BE49-F238E27FC236}">
-                <a16:creationId xmlns:a16="http://schemas.microsoft.com/office/drawing/2014/main" id="{2999216A-F5BD-5C3B-C483-7A84E97A2C87}"/>
-              </a:ext>
-            </a:extLst>
-          </p:cNvPr>
-          <p:cNvCxnSpPr>
-            <a:cxnSpLocks/>
-          </p:cNvCxnSpPr>
-          <p:nvPr/>
-        </p:nvCxnSpPr>
-        <p:spPr>
-          <a:xfrm flipV="1">
-            <a:off x="10911439" y="4102848"/>
-            <a:ext cx="0" cy="195214"/>
-          </a:xfrm>
-          <a:prstGeom prst="straightConnector1">
-            <a:avLst/>
-          </a:prstGeom>
-          <a:ln>
-            <a:solidFill>
-              <a:srgbClr val="FF0000"/>
-            </a:solidFill>
-            <a:tailEnd type="triangle"/>
-          </a:ln>
-        </p:spPr>
-        <p:style>
-          <a:lnRef idx="2">
-            <a:schemeClr val="accent1"/>
-          </a:lnRef>
-          <a:fillRef idx="0">
-            <a:schemeClr val="accent1"/>
-          </a:fillRef>
-          <a:effectRef idx="1">
-            <a:schemeClr val="accent1"/>
-          </a:effectRef>
-          <a:fontRef idx="minor">
-            <a:schemeClr val="tx1"/>
-          </a:fontRef>
-        </p:style>
-      </p:cxnSp>
-      <p:cxnSp>
-        <p:nvCxnSpPr>
-          <p:cNvPr id="106" name="Straight Arrow Connector 105">
-            <a:extLst>
-              <a:ext uri="{FF2B5EF4-FFF2-40B4-BE49-F238E27FC236}">
-                <a16:creationId xmlns:a16="http://schemas.microsoft.com/office/drawing/2014/main" id="{CE17DD74-D95F-A684-5F8D-79C75CBE937A}"/>
-              </a:ext>
-            </a:extLst>
-          </p:cNvPr>
-          <p:cNvCxnSpPr/>
-          <p:nvPr/>
-        </p:nvCxnSpPr>
-        <p:spPr>
-          <a:xfrm>
-            <a:off x="4876122" y="1953342"/>
-            <a:ext cx="0" cy="230832"/>
-          </a:xfrm>
-          <a:prstGeom prst="straightConnector1">
-            <a:avLst/>
-          </a:prstGeom>
-          <a:ln>
-            <a:solidFill>
-              <a:srgbClr val="FF0000"/>
-            </a:solidFill>
-            <a:tailEnd type="triangle"/>
-          </a:ln>
-        </p:spPr>
-        <p:style>
-          <a:lnRef idx="2">
-            <a:schemeClr val="accent1"/>
-          </a:lnRef>
-          <a:fillRef idx="0">
-            <a:schemeClr val="accent1"/>
-          </a:fillRef>
-          <a:effectRef idx="1">
-            <a:schemeClr val="accent1"/>
-          </a:effectRef>
-          <a:fontRef idx="minor">
-            <a:schemeClr val="tx1"/>
-          </a:fontRef>
-        </p:style>
-      </p:cxnSp>
-      <p:cxnSp>
-        <p:nvCxnSpPr>
-          <p:cNvPr id="109" name="Straight Arrow Connector 108">
-            <a:extLst>
-              <a:ext uri="{FF2B5EF4-FFF2-40B4-BE49-F238E27FC236}">
-                <a16:creationId xmlns:a16="http://schemas.microsoft.com/office/drawing/2014/main" id="{2EE93D9E-E510-40BC-F5F1-AAE75522A320}"/>
-              </a:ext>
-            </a:extLst>
-          </p:cNvPr>
-          <p:cNvCxnSpPr/>
-          <p:nvPr/>
-        </p:nvCxnSpPr>
-        <p:spPr>
-          <a:xfrm>
-            <a:off x="4914222" y="1990513"/>
-            <a:ext cx="0" cy="230832"/>
-          </a:xfrm>
-          <a:prstGeom prst="straightConnector1">
-            <a:avLst/>
-          </a:prstGeom>
-          <a:ln>
-            <a:solidFill>
-              <a:srgbClr val="FF0000"/>
-            </a:solidFill>
-            <a:tailEnd type="triangle"/>
-          </a:ln>
-        </p:spPr>
-        <p:style>
-          <a:lnRef idx="2">
-            <a:schemeClr val="accent1"/>
-          </a:lnRef>
-          <a:fillRef idx="0">
-            <a:schemeClr val="accent1"/>
-          </a:fillRef>
-          <a:effectRef idx="1">
-            <a:schemeClr val="accent1"/>
-          </a:effectRef>
-          <a:fontRef idx="minor">
-            <a:schemeClr val="tx1"/>
-          </a:fontRef>
-        </p:style>
-      </p:cxnSp>
-      <p:cxnSp>
-        <p:nvCxnSpPr>
-          <p:cNvPr id="110" name="Straight Arrow Connector 109">
-            <a:extLst>
-              <a:ext uri="{FF2B5EF4-FFF2-40B4-BE49-F238E27FC236}">
-                <a16:creationId xmlns:a16="http://schemas.microsoft.com/office/drawing/2014/main" id="{24CA2D82-8BE4-31B9-200E-D75DD793007C}"/>
-              </a:ext>
-            </a:extLst>
-          </p:cNvPr>
-          <p:cNvCxnSpPr/>
-          <p:nvPr/>
-        </p:nvCxnSpPr>
-        <p:spPr>
-          <a:xfrm>
-            <a:off x="4965890" y="2021516"/>
-            <a:ext cx="0" cy="230832"/>
           </a:xfrm>
           <a:prstGeom prst="straightConnector1">
             <a:avLst/>
@@ -12896,12 +11939,255 @@
           </a:fontRef>
         </p:style>
       </p:cxnSp>
-      <p:sp>
-        <p:nvSpPr>
-          <p:cNvPr id="199" name="TextBox 198">
-            <a:extLst>
-              <a:ext uri="{FF2B5EF4-FFF2-40B4-BE49-F238E27FC236}">
-                <a16:creationId xmlns:a16="http://schemas.microsoft.com/office/drawing/2014/main" id="{5BBDEEB3-B3C4-1244-0A2C-DEAADDC8E330}"/>
+      <p:cxnSp>
+        <p:nvCxnSpPr>
+          <p:cNvPr id="36" name="Straight Arrow Connector 35">
+            <a:extLst>
+              <a:ext uri="{FF2B5EF4-FFF2-40B4-BE49-F238E27FC236}">
+                <a16:creationId xmlns:a16="http://schemas.microsoft.com/office/drawing/2014/main" id="{1BC55C5F-A294-A543-9E3E-E324A93D8CA8}"/>
+              </a:ext>
+            </a:extLst>
+          </p:cNvPr>
+          <p:cNvCxnSpPr>
+            <a:cxnSpLocks/>
+          </p:cNvCxnSpPr>
+          <p:nvPr/>
+        </p:nvCxnSpPr>
+        <p:spPr>
+          <a:xfrm flipV="1">
+            <a:off x="10997645" y="4034709"/>
+            <a:ext cx="0" cy="616523"/>
+          </a:xfrm>
+          <a:prstGeom prst="straightConnector1">
+            <a:avLst/>
+          </a:prstGeom>
+          <a:ln>
+            <a:solidFill>
+              <a:srgbClr val="FF0000"/>
+            </a:solidFill>
+            <a:tailEnd type="triangle"/>
+          </a:ln>
+        </p:spPr>
+        <p:style>
+          <a:lnRef idx="2">
+            <a:schemeClr val="accent1"/>
+          </a:lnRef>
+          <a:fillRef idx="0">
+            <a:schemeClr val="accent1"/>
+          </a:fillRef>
+          <a:effectRef idx="1">
+            <a:schemeClr val="accent1"/>
+          </a:effectRef>
+          <a:fontRef idx="minor">
+            <a:schemeClr val="tx1"/>
+          </a:fontRef>
+        </p:style>
+      </p:cxnSp>
+      <p:cxnSp>
+        <p:nvCxnSpPr>
+          <p:cNvPr id="37" name="Straight Connector 36">
+            <a:extLst>
+              <a:ext uri="{FF2B5EF4-FFF2-40B4-BE49-F238E27FC236}">
+                <a16:creationId xmlns:a16="http://schemas.microsoft.com/office/drawing/2014/main" id="{ECC19F9B-6EDF-6B64-E3B0-E660B8C52E68}"/>
+              </a:ext>
+            </a:extLst>
+          </p:cNvPr>
+          <p:cNvCxnSpPr>
+            <a:cxnSpLocks/>
+          </p:cNvCxnSpPr>
+          <p:nvPr/>
+        </p:nvCxnSpPr>
+        <p:spPr>
+          <a:xfrm flipH="1">
+            <a:off x="10946889" y="4449728"/>
+            <a:ext cx="107051" cy="69157"/>
+          </a:xfrm>
+          <a:prstGeom prst="line">
+            <a:avLst/>
+          </a:prstGeom>
+        </p:spPr>
+        <p:style>
+          <a:lnRef idx="2">
+            <a:schemeClr val="accent1"/>
+          </a:lnRef>
+          <a:fillRef idx="0">
+            <a:schemeClr val="accent1"/>
+          </a:fillRef>
+          <a:effectRef idx="1">
+            <a:schemeClr val="accent1"/>
+          </a:effectRef>
+          <a:fontRef idx="minor">
+            <a:schemeClr val="tx1"/>
+          </a:fontRef>
+        </p:style>
+      </p:cxnSp>
+      <p:cxnSp>
+        <p:nvCxnSpPr>
+          <p:cNvPr id="105" name="Straight Connector 104">
+            <a:extLst>
+              <a:ext uri="{FF2B5EF4-FFF2-40B4-BE49-F238E27FC236}">
+                <a16:creationId xmlns:a16="http://schemas.microsoft.com/office/drawing/2014/main" id="{D07766FF-137E-CFC5-F36B-18899A589011}"/>
+              </a:ext>
+            </a:extLst>
+          </p:cNvPr>
+          <p:cNvCxnSpPr>
+            <a:cxnSpLocks/>
+          </p:cNvCxnSpPr>
+          <p:nvPr/>
+        </p:nvCxnSpPr>
+        <p:spPr>
+          <a:xfrm flipH="1">
+            <a:off x="5894187" y="2482125"/>
+            <a:ext cx="107051" cy="69157"/>
+          </a:xfrm>
+          <a:prstGeom prst="line">
+            <a:avLst/>
+          </a:prstGeom>
+        </p:spPr>
+        <p:style>
+          <a:lnRef idx="2">
+            <a:schemeClr val="accent1"/>
+          </a:lnRef>
+          <a:fillRef idx="0">
+            <a:schemeClr val="accent1"/>
+          </a:fillRef>
+          <a:effectRef idx="1">
+            <a:schemeClr val="accent1"/>
+          </a:effectRef>
+          <a:fontRef idx="minor">
+            <a:schemeClr val="tx1"/>
+          </a:fontRef>
+        </p:style>
+      </p:cxnSp>
+      <p:cxnSp>
+        <p:nvCxnSpPr>
+          <p:cNvPr id="146" name="Straight Arrow Connector 145">
+            <a:extLst>
+              <a:ext uri="{FF2B5EF4-FFF2-40B4-BE49-F238E27FC236}">
+                <a16:creationId xmlns:a16="http://schemas.microsoft.com/office/drawing/2014/main" id="{ABE6E774-8C9B-4489-D948-65607F2E188A}"/>
+              </a:ext>
+            </a:extLst>
+          </p:cNvPr>
+          <p:cNvCxnSpPr>
+            <a:cxnSpLocks/>
+          </p:cNvCxnSpPr>
+          <p:nvPr/>
+        </p:nvCxnSpPr>
+        <p:spPr>
+          <a:xfrm flipV="1">
+            <a:off x="4871195" y="2834512"/>
+            <a:ext cx="0" cy="318976"/>
+          </a:xfrm>
+          <a:prstGeom prst="straightConnector1">
+            <a:avLst/>
+          </a:prstGeom>
+          <a:ln>
+            <a:solidFill>
+              <a:srgbClr val="FF0000"/>
+            </a:solidFill>
+            <a:tailEnd type="triangle"/>
+          </a:ln>
+        </p:spPr>
+        <p:style>
+          <a:lnRef idx="2">
+            <a:schemeClr val="accent1"/>
+          </a:lnRef>
+          <a:fillRef idx="0">
+            <a:schemeClr val="accent1"/>
+          </a:fillRef>
+          <a:effectRef idx="1">
+            <a:schemeClr val="accent1"/>
+          </a:effectRef>
+          <a:fontRef idx="minor">
+            <a:schemeClr val="tx1"/>
+          </a:fontRef>
+        </p:style>
+      </p:cxnSp>
+      <p:cxnSp>
+        <p:nvCxnSpPr>
+          <p:cNvPr id="148" name="Straight Connector 147">
+            <a:extLst>
+              <a:ext uri="{FF2B5EF4-FFF2-40B4-BE49-F238E27FC236}">
+                <a16:creationId xmlns:a16="http://schemas.microsoft.com/office/drawing/2014/main" id="{FE9EFFB0-0DED-2330-8209-FC39718441DD}"/>
+              </a:ext>
+            </a:extLst>
+          </p:cNvPr>
+          <p:cNvCxnSpPr>
+            <a:cxnSpLocks/>
+          </p:cNvCxnSpPr>
+          <p:nvPr/>
+        </p:nvCxnSpPr>
+        <p:spPr>
+          <a:xfrm flipH="1">
+            <a:off x="4827227" y="3020434"/>
+            <a:ext cx="85431" cy="62194"/>
+          </a:xfrm>
+          <a:prstGeom prst="line">
+            <a:avLst/>
+          </a:prstGeom>
+        </p:spPr>
+        <p:style>
+          <a:lnRef idx="2">
+            <a:schemeClr val="accent1"/>
+          </a:lnRef>
+          <a:fillRef idx="0">
+            <a:schemeClr val="accent1"/>
+          </a:fillRef>
+          <a:effectRef idx="1">
+            <a:schemeClr val="accent1"/>
+          </a:effectRef>
+          <a:fontRef idx="minor">
+            <a:schemeClr val="tx1"/>
+          </a:fontRef>
+        </p:style>
+      </p:cxnSp>
+      <p:cxnSp>
+        <p:nvCxnSpPr>
+          <p:cNvPr id="149" name="Straight Arrow Connector 148">
+            <a:extLst>
+              <a:ext uri="{FF2B5EF4-FFF2-40B4-BE49-F238E27FC236}">
+                <a16:creationId xmlns:a16="http://schemas.microsoft.com/office/drawing/2014/main" id="{F6ECA4E6-7E3F-9AE7-DC4A-642870838647}"/>
+              </a:ext>
+            </a:extLst>
+          </p:cNvPr>
+          <p:cNvCxnSpPr>
+            <a:cxnSpLocks/>
+          </p:cNvCxnSpPr>
+          <p:nvPr/>
+        </p:nvCxnSpPr>
+        <p:spPr>
+          <a:xfrm>
+            <a:off x="4684583" y="1275167"/>
+            <a:ext cx="0" cy="137890"/>
+          </a:xfrm>
+          <a:prstGeom prst="straightConnector1">
+            <a:avLst/>
+          </a:prstGeom>
+          <a:ln>
+            <a:tailEnd type="triangle"/>
+          </a:ln>
+        </p:spPr>
+        <p:style>
+          <a:lnRef idx="2">
+            <a:schemeClr val="accent1"/>
+          </a:lnRef>
+          <a:fillRef idx="0">
+            <a:schemeClr val="accent1"/>
+          </a:fillRef>
+          <a:effectRef idx="1">
+            <a:schemeClr val="accent1"/>
+          </a:effectRef>
+          <a:fontRef idx="minor">
+            <a:schemeClr val="tx1"/>
+          </a:fontRef>
+        </p:style>
+      </p:cxnSp>
+      <p:sp>
+        <p:nvSpPr>
+          <p:cNvPr id="151" name="TextBox 150">
+            <a:extLst>
+              <a:ext uri="{FF2B5EF4-FFF2-40B4-BE49-F238E27FC236}">
+                <a16:creationId xmlns:a16="http://schemas.microsoft.com/office/drawing/2014/main" id="{CD28274F-92E6-F852-6391-A717240DE2DF}"/>
               </a:ext>
             </a:extLst>
           </p:cNvPr>
@@ -12910,8 +12196,8 @@
         </p:nvSpPr>
         <p:spPr>
           <a:xfrm>
-            <a:off x="4065844" y="1310812"/>
-            <a:ext cx="671979" cy="230832"/>
+            <a:off x="4444698" y="1106312"/>
+            <a:ext cx="474810" cy="230832"/>
           </a:xfrm>
           <a:prstGeom prst="rect">
             <a:avLst/>
@@ -12927,11 +12213,262 @@
             <a:pPr algn="ctr"/>
             <a:r>
               <a:rPr lang="en-US" sz="900" dirty="0"/>
+              <a:t>dout1</a:t>
+            </a:r>
+          </a:p>
+        </p:txBody>
+      </p:sp>
+      <p:cxnSp>
+        <p:nvCxnSpPr>
+          <p:cNvPr id="152" name="Straight Arrow Connector 151">
+            <a:extLst>
+              <a:ext uri="{FF2B5EF4-FFF2-40B4-BE49-F238E27FC236}">
+                <a16:creationId xmlns:a16="http://schemas.microsoft.com/office/drawing/2014/main" id="{2FC45EE7-792B-F72E-2C03-735BF8B795D9}"/>
+              </a:ext>
+            </a:extLst>
+          </p:cNvPr>
+          <p:cNvCxnSpPr>
+            <a:cxnSpLocks/>
+          </p:cNvCxnSpPr>
+          <p:nvPr/>
+        </p:nvCxnSpPr>
+        <p:spPr>
+          <a:xfrm>
+            <a:off x="4862151" y="1836978"/>
+            <a:ext cx="0" cy="325106"/>
+          </a:xfrm>
+          <a:prstGeom prst="straightConnector1">
+            <a:avLst/>
+          </a:prstGeom>
+          <a:ln>
+            <a:solidFill>
+              <a:srgbClr val="FF0000"/>
+            </a:solidFill>
+            <a:tailEnd type="triangle"/>
+          </a:ln>
+        </p:spPr>
+        <p:style>
+          <a:lnRef idx="2">
+            <a:schemeClr val="accent1"/>
+          </a:lnRef>
+          <a:fillRef idx="0">
+            <a:schemeClr val="accent1"/>
+          </a:fillRef>
+          <a:effectRef idx="1">
+            <a:schemeClr val="accent1"/>
+          </a:effectRef>
+          <a:fontRef idx="minor">
+            <a:schemeClr val="tx1"/>
+          </a:fontRef>
+        </p:style>
+      </p:cxnSp>
+      <p:sp>
+        <p:nvSpPr>
+          <p:cNvPr id="153" name="TextBox 152">
+            <a:extLst>
+              <a:ext uri="{FF2B5EF4-FFF2-40B4-BE49-F238E27FC236}">
+                <a16:creationId xmlns:a16="http://schemas.microsoft.com/office/drawing/2014/main" id="{6C7963B8-EAB3-1251-7B88-E9681119B880}"/>
+              </a:ext>
+            </a:extLst>
+          </p:cNvPr>
+          <p:cNvSpPr txBox="1"/>
+          <p:nvPr/>
+        </p:nvSpPr>
+        <p:spPr>
+          <a:xfrm>
+            <a:off x="4493604" y="1641448"/>
+            <a:ext cx="671979" cy="230832"/>
+          </a:xfrm>
+          <a:prstGeom prst="rect">
+            <a:avLst/>
+          </a:prstGeom>
+          <a:noFill/>
+        </p:spPr>
+        <p:txBody>
+          <a:bodyPr wrap="none" rtlCol="0">
+            <a:spAutoFit/>
+          </a:bodyPr>
+          <a:lstStyle/>
+          <a:p>
+            <a:pPr algn="ctr"/>
+            <a:r>
+              <a:rPr lang="en-US" sz="900" dirty="0"/>
               <a:t>Not equal</a:t>
             </a:r>
           </a:p>
         </p:txBody>
       </p:sp>
+      <p:sp>
+        <p:nvSpPr>
+          <p:cNvPr id="154" name="Rectangle 153">
+            <a:extLst>
+              <a:ext uri="{FF2B5EF4-FFF2-40B4-BE49-F238E27FC236}">
+                <a16:creationId xmlns:a16="http://schemas.microsoft.com/office/drawing/2014/main" id="{6E64875F-2B8E-5F20-AD69-75128545C0DD}"/>
+              </a:ext>
+            </a:extLst>
+          </p:cNvPr>
+          <p:cNvSpPr/>
+          <p:nvPr/>
+        </p:nvSpPr>
+        <p:spPr>
+          <a:xfrm>
+            <a:off x="4458121" y="1413057"/>
+            <a:ext cx="736311" cy="418585"/>
+          </a:xfrm>
+          <a:prstGeom prst="rect">
+            <a:avLst/>
+          </a:prstGeom>
+          <a:noFill/>
+          <a:ln>
+            <a:solidFill>
+              <a:srgbClr val="0070C0"/>
+            </a:solidFill>
+          </a:ln>
+        </p:spPr>
+        <p:style>
+          <a:lnRef idx="2">
+            <a:schemeClr val="accent1">
+              <a:shade val="15000"/>
+            </a:schemeClr>
+          </a:lnRef>
+          <a:fillRef idx="1">
+            <a:schemeClr val="accent1"/>
+          </a:fillRef>
+          <a:effectRef idx="0">
+            <a:schemeClr val="accent1"/>
+          </a:effectRef>
+          <a:fontRef idx="minor">
+            <a:schemeClr val="lt1"/>
+          </a:fontRef>
+        </p:style>
+        <p:txBody>
+          <a:bodyPr rtlCol="0" anchor="ctr"/>
+          <a:lstStyle/>
+          <a:p>
+            <a:pPr algn="ctr"/>
+            <a:endParaRPr lang="en-US"/>
+          </a:p>
+        </p:txBody>
+      </p:sp>
+      <p:cxnSp>
+        <p:nvCxnSpPr>
+          <p:cNvPr id="155" name="Straight Arrow Connector 154">
+            <a:extLst>
+              <a:ext uri="{FF2B5EF4-FFF2-40B4-BE49-F238E27FC236}">
+                <a16:creationId xmlns:a16="http://schemas.microsoft.com/office/drawing/2014/main" id="{7427857C-18CF-7E87-7DE9-41875BFC41AB}"/>
+              </a:ext>
+            </a:extLst>
+          </p:cNvPr>
+          <p:cNvCxnSpPr>
+            <a:cxnSpLocks/>
+          </p:cNvCxnSpPr>
+          <p:nvPr/>
+        </p:nvCxnSpPr>
+        <p:spPr>
+          <a:xfrm>
+            <a:off x="5032030" y="1275167"/>
+            <a:ext cx="0" cy="137890"/>
+          </a:xfrm>
+          <a:prstGeom prst="straightConnector1">
+            <a:avLst/>
+          </a:prstGeom>
+          <a:ln>
+            <a:tailEnd type="triangle"/>
+          </a:ln>
+        </p:spPr>
+        <p:style>
+          <a:lnRef idx="2">
+            <a:schemeClr val="accent1"/>
+          </a:lnRef>
+          <a:fillRef idx="0">
+            <a:schemeClr val="accent1"/>
+          </a:fillRef>
+          <a:effectRef idx="1">
+            <a:schemeClr val="accent1"/>
+          </a:effectRef>
+          <a:fontRef idx="minor">
+            <a:schemeClr val="tx1"/>
+          </a:fontRef>
+        </p:style>
+      </p:cxnSp>
+      <p:sp>
+        <p:nvSpPr>
+          <p:cNvPr id="156" name="TextBox 155">
+            <a:extLst>
+              <a:ext uri="{FF2B5EF4-FFF2-40B4-BE49-F238E27FC236}">
+                <a16:creationId xmlns:a16="http://schemas.microsoft.com/office/drawing/2014/main" id="{2566064C-F469-508F-113D-556CBC75A869}"/>
+              </a:ext>
+            </a:extLst>
+          </p:cNvPr>
+          <p:cNvSpPr txBox="1"/>
+          <p:nvPr/>
+        </p:nvSpPr>
+        <p:spPr>
+          <a:xfrm>
+            <a:off x="4801135" y="1092519"/>
+            <a:ext cx="474810" cy="230832"/>
+          </a:xfrm>
+          <a:prstGeom prst="rect">
+            <a:avLst/>
+          </a:prstGeom>
+          <a:noFill/>
+        </p:spPr>
+        <p:txBody>
+          <a:bodyPr wrap="none" rtlCol="0">
+            <a:spAutoFit/>
+          </a:bodyPr>
+          <a:lstStyle/>
+          <a:p>
+            <a:pPr algn="ctr"/>
+            <a:r>
+              <a:rPr lang="en-US" sz="900" dirty="0"/>
+              <a:t>dout2</a:t>
+            </a:r>
+          </a:p>
+        </p:txBody>
+      </p:sp>
+      <p:cxnSp>
+        <p:nvCxnSpPr>
+          <p:cNvPr id="200" name="Straight Arrow Connector 199">
+            <a:extLst>
+              <a:ext uri="{FF2B5EF4-FFF2-40B4-BE49-F238E27FC236}">
+                <a16:creationId xmlns:a16="http://schemas.microsoft.com/office/drawing/2014/main" id="{D4AC79D0-5B76-D005-1A27-F76F271A152F}"/>
+              </a:ext>
+            </a:extLst>
+          </p:cNvPr>
+          <p:cNvCxnSpPr/>
+          <p:nvPr/>
+        </p:nvCxnSpPr>
+        <p:spPr>
+          <a:xfrm flipV="1">
+            <a:off x="8862876" y="3303944"/>
+            <a:ext cx="0" cy="167673"/>
+          </a:xfrm>
+          <a:prstGeom prst="straightConnector1">
+            <a:avLst/>
+          </a:prstGeom>
+          <a:ln>
+            <a:solidFill>
+              <a:srgbClr val="FF0000"/>
+            </a:solidFill>
+            <a:tailEnd type="triangle"/>
+          </a:ln>
+        </p:spPr>
+        <p:style>
+          <a:lnRef idx="2">
+            <a:schemeClr val="accent1"/>
+          </a:lnRef>
+          <a:fillRef idx="0">
+            <a:schemeClr val="accent1"/>
+          </a:fillRef>
+          <a:effectRef idx="1">
+            <a:schemeClr val="accent1"/>
+          </a:effectRef>
+          <a:fontRef idx="minor">
+            <a:schemeClr val="tx1"/>
+          </a:fontRef>
+        </p:style>
+      </p:cxnSp>
     </p:spTree>
     <p:extLst>
       <p:ext uri="{BB962C8B-B14F-4D97-AF65-F5344CB8AC3E}">

--- a/RISCVstage4.pptx
+++ b/RISCVstage4.pptx
@@ -115,7 +115,7 @@
 <file path=ppt/revisionInfo.xml><?xml version="1.0" encoding="utf-8"?>
 <p1510:revInfo xmlns:a="http://schemas.openxmlformats.org/drawingml/2006/main" xmlns:r="http://schemas.openxmlformats.org/officeDocument/2006/relationships" xmlns:p1510="http://schemas.microsoft.com/office/powerpoint/2015/10/main">
   <p1510:revLst>
-    <p1510:client id="{5550478D-03C3-4A9B-9853-97954EEDE79F}" v="5" dt="2026-03-10T17:12:02.867"/>
+    <p1510:client id="{F09230DD-206D-486E-A6AF-D29809E02079}" v="5" dt="2026-04-18T20:27:38.873"/>
   </p1510:revLst>
 </p1510:revInfo>
 </file>
@@ -124,431 +124,191 @@
 <pc:chgInfo xmlns:a="http://schemas.openxmlformats.org/drawingml/2006/main" xmlns:r="http://schemas.openxmlformats.org/officeDocument/2006/relationships" xmlns:ac="http://schemas.microsoft.com/office/drawing/2013/main/command" xmlns:pc="http://schemas.microsoft.com/office/powerpoint/2013/main/command">
   <pc:docChgLst>
     <pc:chgData name="York, George W CIV USAF USAFA DF/DFEC" userId="1fb5875a-4594-4db2-80fb-f0db3de11280" providerId="ADAL" clId="{09330963-85FD-4C99-A81B-94D0EE5CFFEB}"/>
-    <pc:docChg chg="custSel modSld">
-      <pc:chgData name="York, George W CIV USAF USAFA DF/DFEC" userId="1fb5875a-4594-4db2-80fb-f0db3de11280" providerId="ADAL" clId="{09330963-85FD-4C99-A81B-94D0EE5CFFEB}" dt="2026-03-10T17:13:54.135" v="44" actId="1076"/>
+    <pc:docChg chg="undo custSel modSld">
+      <pc:chgData name="York, George W CIV USAF USAFA DF/DFEC" userId="1fb5875a-4594-4db2-80fb-f0db3de11280" providerId="ADAL" clId="{09330963-85FD-4C99-A81B-94D0EE5CFFEB}" dt="2026-04-18T20:27:56.696" v="94" actId="14100"/>
       <pc:docMkLst>
         <pc:docMk/>
       </pc:docMkLst>
       <pc:sldChg chg="addSp delSp modSp mod">
-        <pc:chgData name="York, George W CIV USAF USAFA DF/DFEC" userId="1fb5875a-4594-4db2-80fb-f0db3de11280" providerId="ADAL" clId="{09330963-85FD-4C99-A81B-94D0EE5CFFEB}" dt="2026-03-10T17:13:54.135" v="44" actId="1076"/>
+        <pc:chgData name="York, George W CIV USAF USAFA DF/DFEC" userId="1fb5875a-4594-4db2-80fb-f0db3de11280" providerId="ADAL" clId="{09330963-85FD-4C99-A81B-94D0EE5CFFEB}" dt="2026-04-18T20:27:56.696" v="94" actId="14100"/>
         <pc:sldMkLst>
           <pc:docMk/>
           <pc:sldMk cId="1501170907" sldId="256"/>
         </pc:sldMkLst>
-        <pc:spChg chg="ord">
-          <ac:chgData name="York, George W CIV USAF USAFA DF/DFEC" userId="1fb5875a-4594-4db2-80fb-f0db3de11280" providerId="ADAL" clId="{09330963-85FD-4C99-A81B-94D0EE5CFFEB}" dt="2026-03-05T22:33:00.568" v="3" actId="167"/>
+        <pc:spChg chg="mod">
+          <ac:chgData name="York, George W CIV USAF USAFA DF/DFEC" userId="1fb5875a-4594-4db2-80fb-f0db3de11280" providerId="ADAL" clId="{09330963-85FD-4C99-A81B-94D0EE5CFFEB}" dt="2026-04-10T18:20:54.770" v="51" actId="14100"/>
           <ac:spMkLst>
             <pc:docMk/>
             <pc:sldMk cId="1501170907" sldId="256"/>
-            <ac:spMk id="90" creationId="{E5E3C8FC-BB27-8EAD-AA8B-33B131880EBA}"/>
+            <ac:spMk id="2" creationId="{6AB6AF60-D791-21FB-8A86-0D04258DAA85}"/>
           </ac:spMkLst>
         </pc:spChg>
         <pc:spChg chg="add mod">
-          <ac:chgData name="York, George W CIV USAF USAFA DF/DFEC" userId="1fb5875a-4594-4db2-80fb-f0db3de11280" providerId="ADAL" clId="{09330963-85FD-4C99-A81B-94D0EE5CFFEB}" dt="2026-03-05T22:37:02.711" v="15" actId="1076"/>
+          <ac:chgData name="York, George W CIV USAF USAFA DF/DFEC" userId="1fb5875a-4594-4db2-80fb-f0db3de11280" providerId="ADAL" clId="{09330963-85FD-4C99-A81B-94D0EE5CFFEB}" dt="2026-04-18T20:27:56.696" v="94" actId="14100"/>
           <ac:spMkLst>
             <pc:docMk/>
             <pc:sldMk cId="1501170907" sldId="256"/>
-            <ac:spMk id="119" creationId="{71CFDDD6-C726-691B-9CA9-125BE7E5CADA}"/>
+            <ac:spMk id="17" creationId="{DD23CE11-915B-B2E0-552F-137C75A7E9C7}"/>
+          </ac:spMkLst>
+        </pc:spChg>
+        <pc:spChg chg="mod">
+          <ac:chgData name="York, George W CIV USAF USAFA DF/DFEC" userId="1fb5875a-4594-4db2-80fb-f0db3de11280" providerId="ADAL" clId="{09330963-85FD-4C99-A81B-94D0EE5CFFEB}" dt="2026-04-10T18:19:53.616" v="45" actId="1076"/>
+          <ac:spMkLst>
+            <pc:docMk/>
+            <pc:sldMk cId="1501170907" sldId="256"/>
+            <ac:spMk id="38" creationId="{9DC00663-BEA1-F516-A24E-D1358A5FA8D3}"/>
+          </ac:spMkLst>
+        </pc:spChg>
+        <pc:spChg chg="mod">
+          <ac:chgData name="York, George W CIV USAF USAFA DF/DFEC" userId="1fb5875a-4594-4db2-80fb-f0db3de11280" providerId="ADAL" clId="{09330963-85FD-4C99-A81B-94D0EE5CFFEB}" dt="2026-04-10T18:19:53.616" v="45" actId="1076"/>
+          <ac:spMkLst>
+            <pc:docMk/>
+            <pc:sldMk cId="1501170907" sldId="256"/>
+            <ac:spMk id="39" creationId="{6174F677-2B47-463D-4071-9231A2EAA9DF}"/>
           </ac:spMkLst>
         </pc:spChg>
         <pc:spChg chg="add mod">
-          <ac:chgData name="York, George W CIV USAF USAFA DF/DFEC" userId="1fb5875a-4594-4db2-80fb-f0db3de11280" providerId="ADAL" clId="{09330963-85FD-4C99-A81B-94D0EE5CFFEB}" dt="2026-03-05T22:37:02.711" v="15" actId="1076"/>
+          <ac:chgData name="York, George W CIV USAF USAFA DF/DFEC" userId="1fb5875a-4594-4db2-80fb-f0db3de11280" providerId="ADAL" clId="{09330963-85FD-4C99-A81B-94D0EE5CFFEB}" dt="2026-04-10T18:23:52.069" v="71" actId="1076"/>
           <ac:spMkLst>
             <pc:docMk/>
             <pc:sldMk cId="1501170907" sldId="256"/>
-            <ac:spMk id="120" creationId="{B5FAFD36-E7BE-8A22-0C52-FA46F61778F0}"/>
+            <ac:spMk id="209" creationId="{7E4C1978-E959-3B8A-9B69-5A0570C1B433}"/>
           </ac:spMkLst>
         </pc:spChg>
         <pc:spChg chg="add mod">
-          <ac:chgData name="York, George W CIV USAF USAFA DF/DFEC" userId="1fb5875a-4594-4db2-80fb-f0db3de11280" providerId="ADAL" clId="{09330963-85FD-4C99-A81B-94D0EE5CFFEB}" dt="2026-03-05T22:37:02.711" v="15" actId="1076"/>
+          <ac:chgData name="York, George W CIV USAF USAFA DF/DFEC" userId="1fb5875a-4594-4db2-80fb-f0db3de11280" providerId="ADAL" clId="{09330963-85FD-4C99-A81B-94D0EE5CFFEB}" dt="2026-04-10T18:23:52.069" v="71" actId="1076"/>
           <ac:spMkLst>
             <pc:docMk/>
             <pc:sldMk cId="1501170907" sldId="256"/>
-            <ac:spMk id="132" creationId="{0D9A6022-1D6D-F3DA-CC84-317FF5FD6666}"/>
+            <ac:spMk id="210" creationId="{B99D9E74-E1B6-5F46-688D-FBFA65E6AF93}"/>
           </ac:spMkLst>
         </pc:spChg>
         <pc:spChg chg="add mod">
-          <ac:chgData name="York, George W CIV USAF USAFA DF/DFEC" userId="1fb5875a-4594-4db2-80fb-f0db3de11280" providerId="ADAL" clId="{09330963-85FD-4C99-A81B-94D0EE5CFFEB}" dt="2026-03-10T17:10:55.491" v="32" actId="1076"/>
+          <ac:chgData name="York, George W CIV USAF USAFA DF/DFEC" userId="1fb5875a-4594-4db2-80fb-f0db3de11280" providerId="ADAL" clId="{09330963-85FD-4C99-A81B-94D0EE5CFFEB}" dt="2026-04-10T18:23:52.069" v="71" actId="1076"/>
           <ac:spMkLst>
             <pc:docMk/>
             <pc:sldMk cId="1501170907" sldId="256"/>
-            <ac:spMk id="151" creationId="{CD28274F-92E6-F852-6391-A717240DE2DF}"/>
+            <ac:spMk id="212" creationId="{42328FB6-6571-FA3C-8E81-028268A77042}"/>
           </ac:spMkLst>
         </pc:spChg>
         <pc:spChg chg="add mod">
-          <ac:chgData name="York, George W CIV USAF USAFA DF/DFEC" userId="1fb5875a-4594-4db2-80fb-f0db3de11280" providerId="ADAL" clId="{09330963-85FD-4C99-A81B-94D0EE5CFFEB}" dt="2026-03-10T17:10:55.491" v="32" actId="1076"/>
+          <ac:chgData name="York, George W CIV USAF USAFA DF/DFEC" userId="1fb5875a-4594-4db2-80fb-f0db3de11280" providerId="ADAL" clId="{09330963-85FD-4C99-A81B-94D0EE5CFFEB}" dt="2026-04-10T18:23:52.069" v="71" actId="1076"/>
           <ac:spMkLst>
             <pc:docMk/>
             <pc:sldMk cId="1501170907" sldId="256"/>
-            <ac:spMk id="153" creationId="{6C7963B8-EAB3-1251-7B88-E9681119B880}"/>
+            <ac:spMk id="213" creationId="{3468D653-D2DB-10F8-EB42-1EF2F69D462B}"/>
           </ac:spMkLst>
         </pc:spChg>
         <pc:spChg chg="add mod">
-          <ac:chgData name="York, George W CIV USAF USAFA DF/DFEC" userId="1fb5875a-4594-4db2-80fb-f0db3de11280" providerId="ADAL" clId="{09330963-85FD-4C99-A81B-94D0EE5CFFEB}" dt="2026-03-10T17:10:55.491" v="32" actId="1076"/>
+          <ac:chgData name="York, George W CIV USAF USAFA DF/DFEC" userId="1fb5875a-4594-4db2-80fb-f0db3de11280" providerId="ADAL" clId="{09330963-85FD-4C99-A81B-94D0EE5CFFEB}" dt="2026-04-10T18:23:52.069" v="71" actId="1076"/>
           <ac:spMkLst>
             <pc:docMk/>
             <pc:sldMk cId="1501170907" sldId="256"/>
-            <ac:spMk id="154" creationId="{6E64875F-2B8E-5F20-AD69-75128545C0DD}"/>
+            <ac:spMk id="232" creationId="{84B6D813-B5DE-D1FC-AF80-525F92C8F7F8}"/>
           </ac:spMkLst>
         </pc:spChg>
         <pc:spChg chg="add mod">
-          <ac:chgData name="York, George W CIV USAF USAFA DF/DFEC" userId="1fb5875a-4594-4db2-80fb-f0db3de11280" providerId="ADAL" clId="{09330963-85FD-4C99-A81B-94D0EE5CFFEB}" dt="2026-03-10T17:10:55.491" v="32" actId="1076"/>
+          <ac:chgData name="York, George W CIV USAF USAFA DF/DFEC" userId="1fb5875a-4594-4db2-80fb-f0db3de11280" providerId="ADAL" clId="{09330963-85FD-4C99-A81B-94D0EE5CFFEB}" dt="2026-04-10T18:23:52.069" v="71" actId="1076"/>
           <ac:spMkLst>
             <pc:docMk/>
             <pc:sldMk cId="1501170907" sldId="256"/>
-            <ac:spMk id="156" creationId="{2566064C-F469-508F-113D-556CBC75A869}"/>
+            <ac:spMk id="233" creationId="{E46D487D-09B4-2769-C34D-554786351A6B}"/>
           </ac:spMkLst>
         </pc:spChg>
         <pc:spChg chg="add mod">
-          <ac:chgData name="York, George W CIV USAF USAFA DF/DFEC" userId="1fb5875a-4594-4db2-80fb-f0db3de11280" providerId="ADAL" clId="{09330963-85FD-4C99-A81B-94D0EE5CFFEB}" dt="2026-03-05T22:37:02.711" v="15" actId="1076"/>
+          <ac:chgData name="York, George W CIV USAF USAFA DF/DFEC" userId="1fb5875a-4594-4db2-80fb-f0db3de11280" providerId="ADAL" clId="{09330963-85FD-4C99-A81B-94D0EE5CFFEB}" dt="2026-04-10T18:23:52.069" v="71" actId="1076"/>
           <ac:spMkLst>
             <pc:docMk/>
             <pc:sldMk cId="1501170907" sldId="256"/>
-            <ac:spMk id="184" creationId="{58EBC1B8-4825-3984-18AF-440ADACF2ABF}"/>
+            <ac:spMk id="234" creationId="{B03E2FCB-F4FA-D322-14B8-FB5E1F9573B3}"/>
           </ac:spMkLst>
         </pc:spChg>
         <pc:spChg chg="add mod">
-          <ac:chgData name="York, George W CIV USAF USAFA DF/DFEC" userId="1fb5875a-4594-4db2-80fb-f0db3de11280" providerId="ADAL" clId="{09330963-85FD-4C99-A81B-94D0EE5CFFEB}" dt="2026-03-05T22:37:02.711" v="15" actId="1076"/>
+          <ac:chgData name="York, George W CIV USAF USAFA DF/DFEC" userId="1fb5875a-4594-4db2-80fb-f0db3de11280" providerId="ADAL" clId="{09330963-85FD-4C99-A81B-94D0EE5CFFEB}" dt="2026-04-10T18:23:52.069" v="71" actId="1076"/>
           <ac:spMkLst>
             <pc:docMk/>
             <pc:sldMk cId="1501170907" sldId="256"/>
-            <ac:spMk id="189" creationId="{0E85AB3B-858D-5BF6-ED0E-B3C0624C86F7}"/>
+            <ac:spMk id="242" creationId="{5CF4424D-C27A-0FCF-199D-B10372DC54C3}"/>
           </ac:spMkLst>
         </pc:spChg>
-        <pc:spChg chg="add del mod">
-          <ac:chgData name="York, George W CIV USAF USAFA DF/DFEC" userId="1fb5875a-4594-4db2-80fb-f0db3de11280" providerId="ADAL" clId="{09330963-85FD-4C99-A81B-94D0EE5CFFEB}" dt="2026-03-10T17:09:56.363" v="30" actId="478"/>
+        <pc:spChg chg="add mod">
+          <ac:chgData name="York, George W CIV USAF USAFA DF/DFEC" userId="1fb5875a-4594-4db2-80fb-f0db3de11280" providerId="ADAL" clId="{09330963-85FD-4C99-A81B-94D0EE5CFFEB}" dt="2026-04-10T18:23:52.069" v="71" actId="1076"/>
           <ac:spMkLst>
             <pc:docMk/>
             <pc:sldMk cId="1501170907" sldId="256"/>
-            <ac:spMk id="199" creationId="{5BBDEEB3-B3C4-1244-0A2C-DEAADDC8E330}"/>
+            <ac:spMk id="245" creationId="{6F693865-D421-FB3F-F617-69C8DFB74DDA}"/>
           </ac:spMkLst>
         </pc:spChg>
-        <pc:spChg chg="del">
-          <ac:chgData name="York, George W CIV USAF USAFA DF/DFEC" userId="1fb5875a-4594-4db2-80fb-f0db3de11280" providerId="ADAL" clId="{09330963-85FD-4C99-A81B-94D0EE5CFFEB}" dt="2026-03-10T17:09:56.363" v="30" actId="478"/>
+        <pc:spChg chg="add mod">
+          <ac:chgData name="York, George W CIV USAF USAFA DF/DFEC" userId="1fb5875a-4594-4db2-80fb-f0db3de11280" providerId="ADAL" clId="{09330963-85FD-4C99-A81B-94D0EE5CFFEB}" dt="2026-04-10T18:24:09.554" v="74" actId="1076"/>
           <ac:spMkLst>
             <pc:docMk/>
             <pc:sldMk cId="1501170907" sldId="256"/>
-            <ac:spMk id="264" creationId="{18102C07-F7E1-1AF1-477B-00B68F177F07}"/>
+            <ac:spMk id="246" creationId="{3BA26EF9-D46A-45DC-70BA-21364891CB27}"/>
           </ac:spMkLst>
         </pc:spChg>
-        <pc:spChg chg="del">
-          <ac:chgData name="York, George W CIV USAF USAFA DF/DFEC" userId="1fb5875a-4594-4db2-80fb-f0db3de11280" providerId="ADAL" clId="{09330963-85FD-4C99-A81B-94D0EE5CFFEB}" dt="2026-03-10T17:09:56.363" v="30" actId="478"/>
-          <ac:spMkLst>
-            <pc:docMk/>
-            <pc:sldMk cId="1501170907" sldId="256"/>
-            <ac:spMk id="265" creationId="{00A05C49-A5A2-CC74-BAEB-00CF47323BC9}"/>
-          </ac:spMkLst>
-        </pc:spChg>
-        <pc:spChg chg="del">
-          <ac:chgData name="York, George W CIV USAF USAFA DF/DFEC" userId="1fb5875a-4594-4db2-80fb-f0db3de11280" providerId="ADAL" clId="{09330963-85FD-4C99-A81B-94D0EE5CFFEB}" dt="2026-03-10T17:09:56.363" v="30" actId="478"/>
-          <ac:spMkLst>
-            <pc:docMk/>
-            <pc:sldMk cId="1501170907" sldId="256"/>
-            <ac:spMk id="266" creationId="{B178740B-BE6B-31B0-B4FD-0ED1D3EABF36}"/>
-          </ac:spMkLst>
-        </pc:spChg>
-        <pc:grpChg chg="add del mod">
-          <ac:chgData name="York, George W CIV USAF USAFA DF/DFEC" userId="1fb5875a-4594-4db2-80fb-f0db3de11280" providerId="ADAL" clId="{09330963-85FD-4C99-A81B-94D0EE5CFFEB}" dt="2026-03-10T17:11:28.525" v="36" actId="478"/>
-          <ac:grpSpMkLst>
-            <pc:docMk/>
-            <pc:sldMk cId="1501170907" sldId="256"/>
-            <ac:grpSpMk id="59" creationId="{A7BBB30E-D888-2009-5408-9916614F6B62}"/>
-          </ac:grpSpMkLst>
-        </pc:grpChg>
-        <pc:grpChg chg="add mod">
-          <ac:chgData name="York, George W CIV USAF USAFA DF/DFEC" userId="1fb5875a-4594-4db2-80fb-f0db3de11280" providerId="ADAL" clId="{09330963-85FD-4C99-A81B-94D0EE5CFFEB}" dt="2026-03-05T22:37:02.711" v="15" actId="1076"/>
-          <ac:grpSpMkLst>
-            <pc:docMk/>
-            <pc:sldMk cId="1501170907" sldId="256"/>
-            <ac:grpSpMk id="137" creationId="{8B5AEF34-ADB3-754B-DE80-ABD4D3F0450B}"/>
-          </ac:grpSpMkLst>
-        </pc:grpChg>
-        <pc:grpChg chg="del">
-          <ac:chgData name="York, George W CIV USAF USAFA DF/DFEC" userId="1fb5875a-4594-4db2-80fb-f0db3de11280" providerId="ADAL" clId="{09330963-85FD-4C99-A81B-94D0EE5CFFEB}" dt="2026-03-10T17:09:56.363" v="30" actId="478"/>
-          <ac:grpSpMkLst>
-            <pc:docMk/>
-            <pc:sldMk cId="1501170907" sldId="256"/>
-            <ac:grpSpMk id="175" creationId="{CF1E05C7-0258-A1DB-5D4E-EA66C6CAA296}"/>
-          </ac:grpSpMkLst>
-        </pc:grpChg>
-        <pc:picChg chg="add del mod">
-          <ac:chgData name="York, George W CIV USAF USAFA DF/DFEC" userId="1fb5875a-4594-4db2-80fb-f0db3de11280" providerId="ADAL" clId="{09330963-85FD-4C99-A81B-94D0EE5CFFEB}" dt="2026-03-10T17:11:32.395" v="37" actId="478"/>
-          <ac:picMkLst>
-            <pc:docMk/>
-            <pc:sldMk cId="1501170907" sldId="256"/>
-            <ac:picMk id="52" creationId="{6A6C7C57-77EC-C685-E542-B85B64EC2272}"/>
-          </ac:picMkLst>
-        </pc:picChg>
-        <pc:picChg chg="mod">
-          <ac:chgData name="York, George W CIV USAF USAFA DF/DFEC" userId="1fb5875a-4594-4db2-80fb-f0db3de11280" providerId="ADAL" clId="{09330963-85FD-4C99-A81B-94D0EE5CFFEB}" dt="2026-03-05T22:33:30.055" v="5"/>
-          <ac:picMkLst>
-            <pc:docMk/>
-            <pc:sldMk cId="1501170907" sldId="256"/>
-            <ac:picMk id="66" creationId="{A404E675-8456-AD52-514C-9920A86819FF}"/>
-          </ac:picMkLst>
-        </pc:picChg>
         <pc:cxnChg chg="add mod">
-          <ac:chgData name="York, George W CIV USAF USAFA DF/DFEC" userId="1fb5875a-4594-4db2-80fb-f0db3de11280" providerId="ADAL" clId="{09330963-85FD-4C99-A81B-94D0EE5CFFEB}" dt="2026-03-10T17:08:30.492" v="22" actId="1076"/>
+          <ac:chgData name="York, George W CIV USAF USAFA DF/DFEC" userId="1fb5875a-4594-4db2-80fb-f0db3de11280" providerId="ADAL" clId="{09330963-85FD-4C99-A81B-94D0EE5CFFEB}" dt="2026-04-18T20:27:30.523" v="76" actId="1076"/>
           <ac:cxnSpMkLst>
             <pc:docMk/>
             <pc:sldMk cId="1501170907" sldId="256"/>
-            <ac:cxnSpMk id="36" creationId="{1BC55C5F-A294-A543-9E3E-E324A93D8CA8}"/>
+            <ac:cxnSpMk id="12" creationId="{C104EDAA-FD8A-4089-C218-104118D04C57}"/>
           </ac:cxnSpMkLst>
         </pc:cxnChg>
-        <pc:cxnChg chg="add mod">
-          <ac:chgData name="York, George W CIV USAF USAFA DF/DFEC" userId="1fb5875a-4594-4db2-80fb-f0db3de11280" providerId="ADAL" clId="{09330963-85FD-4C99-A81B-94D0EE5CFFEB}" dt="2026-03-10T17:08:30.492" v="22" actId="1076"/>
+        <pc:cxnChg chg="mod">
+          <ac:chgData name="York, George W CIV USAF USAFA DF/DFEC" userId="1fb5875a-4594-4db2-80fb-f0db3de11280" providerId="ADAL" clId="{09330963-85FD-4C99-A81B-94D0EE5CFFEB}" dt="2026-04-10T18:19:53.616" v="45" actId="1076"/>
           <ac:cxnSpMkLst>
             <pc:docMk/>
             <pc:sldMk cId="1501170907" sldId="256"/>
-            <ac:cxnSpMk id="37" creationId="{ECC19F9B-6EDF-6B64-E3B0-E660B8C52E68}"/>
+            <ac:cxnSpMk id="28" creationId="{DBC59A37-4C55-8753-29C9-9D435BAD749A}"/>
           </ac:cxnSpMkLst>
         </pc:cxnChg>
-        <pc:cxnChg chg="add mod">
-          <ac:chgData name="York, George W CIV USAF USAFA DF/DFEC" userId="1fb5875a-4594-4db2-80fb-f0db3de11280" providerId="ADAL" clId="{09330963-85FD-4C99-A81B-94D0EE5CFFEB}" dt="2026-03-10T17:13:54.135" v="44" actId="1076"/>
+        <pc:cxnChg chg="mod">
+          <ac:chgData name="York, George W CIV USAF USAFA DF/DFEC" userId="1fb5875a-4594-4db2-80fb-f0db3de11280" providerId="ADAL" clId="{09330963-85FD-4C99-A81B-94D0EE5CFFEB}" dt="2026-04-10T18:20:48.258" v="50" actId="14100"/>
           <ac:cxnSpMkLst>
             <pc:docMk/>
             <pc:sldMk cId="1501170907" sldId="256"/>
-            <ac:cxnSpMk id="57" creationId="{C6FDD443-491D-B8C9-0359-814E397D9C25}"/>
+            <ac:cxnSpMk id="54" creationId="{03324C20-C3D1-9AAB-5C0D-C6C15BD835FE}"/>
           </ac:cxnSpMkLst>
         </pc:cxnChg>
-        <pc:cxnChg chg="add del mod">
-          <ac:chgData name="York, George W CIV USAF USAFA DF/DFEC" userId="1fb5875a-4594-4db2-80fb-f0db3de11280" providerId="ADAL" clId="{09330963-85FD-4C99-A81B-94D0EE5CFFEB}" dt="2026-03-10T17:11:42.928" v="40" actId="478"/>
+        <pc:cxnChg chg="mod">
+          <ac:chgData name="York, George W CIV USAF USAFA DF/DFEC" userId="1fb5875a-4594-4db2-80fb-f0db3de11280" providerId="ADAL" clId="{09330963-85FD-4C99-A81B-94D0EE5CFFEB}" dt="2026-04-10T18:19:53.616" v="45" actId="1076"/>
           <ac:cxnSpMkLst>
             <pc:docMk/>
             <pc:sldMk cId="1501170907" sldId="256"/>
-            <ac:cxnSpMk id="58" creationId="{6F75C507-0674-59E5-259C-2F94883C5048}"/>
+            <ac:cxnSpMk id="68" creationId="{35DADF49-4B1B-AC71-8C36-C35004BEE094}"/>
           </ac:cxnSpMkLst>
         </pc:cxnChg>
         <pc:cxnChg chg="mod">
-          <ac:chgData name="York, George W CIV USAF USAFA DF/DFEC" userId="1fb5875a-4594-4db2-80fb-f0db3de11280" providerId="ADAL" clId="{09330963-85FD-4C99-A81B-94D0EE5CFFEB}" dt="2026-03-05T22:33:30.055" v="5"/>
+          <ac:chgData name="York, George W CIV USAF USAFA DF/DFEC" userId="1fb5875a-4594-4db2-80fb-f0db3de11280" providerId="ADAL" clId="{09330963-85FD-4C99-A81B-94D0EE5CFFEB}" dt="2026-04-10T18:21:27.466" v="55" actId="14100"/>
           <ac:cxnSpMkLst>
             <pc:docMk/>
             <pc:sldMk cId="1501170907" sldId="256"/>
-            <ac:cxnSpMk id="67" creationId="{E2589DE8-97EF-80AF-BA79-119014A37941}"/>
+            <ac:cxnSpMk id="72" creationId="{3C0FD334-761D-D912-1D21-08670E1D2E8A}"/>
           </ac:cxnSpMkLst>
         </pc:cxnChg>
         <pc:cxnChg chg="mod">
-          <ac:chgData name="York, George W CIV USAF USAFA DF/DFEC" userId="1fb5875a-4594-4db2-80fb-f0db3de11280" providerId="ADAL" clId="{09330963-85FD-4C99-A81B-94D0EE5CFFEB}" dt="2026-03-05T22:33:30.055" v="5"/>
+          <ac:chgData name="York, George W CIV USAF USAFA DF/DFEC" userId="1fb5875a-4594-4db2-80fb-f0db3de11280" providerId="ADAL" clId="{09330963-85FD-4C99-A81B-94D0EE5CFFEB}" dt="2026-04-10T18:22:19.458" v="63" actId="1076"/>
           <ac:cxnSpMkLst>
             <pc:docMk/>
             <pc:sldMk cId="1501170907" sldId="256"/>
-            <ac:cxnSpMk id="75" creationId="{DD16B353-8132-284E-F417-41F2A2DEDC16}"/>
+            <ac:cxnSpMk id="82" creationId="{821208F8-3FE0-AC1B-C80E-FD20D78B59DE}"/>
           </ac:cxnSpMkLst>
         </pc:cxnChg>
-        <pc:cxnChg chg="add del mod">
-          <ac:chgData name="York, George W CIV USAF USAFA DF/DFEC" userId="1fb5875a-4594-4db2-80fb-f0db3de11280" providerId="ADAL" clId="{09330963-85FD-4C99-A81B-94D0EE5CFFEB}" dt="2026-03-10T17:08:13.744" v="20" actId="478"/>
+        <pc:cxnChg chg="mod">
+          <ac:chgData name="York, George W CIV USAF USAFA DF/DFEC" userId="1fb5875a-4594-4db2-80fb-f0db3de11280" providerId="ADAL" clId="{09330963-85FD-4C99-A81B-94D0EE5CFFEB}" dt="2026-04-10T18:22:08.546" v="61" actId="14100"/>
           <ac:cxnSpMkLst>
             <pc:docMk/>
             <pc:sldMk cId="1501170907" sldId="256"/>
-            <ac:cxnSpMk id="78" creationId="{C0897BF0-6C1F-2380-907E-3CFD22113357}"/>
+            <ac:cxnSpMk id="92" creationId="{780D872F-1646-C8B4-3D28-A065AE10E52A}"/>
           </ac:cxnSpMkLst>
         </pc:cxnChg>
-        <pc:cxnChg chg="add del mod">
-          <ac:chgData name="York, George W CIV USAF USAFA DF/DFEC" userId="1fb5875a-4594-4db2-80fb-f0db3de11280" providerId="ADAL" clId="{09330963-85FD-4C99-A81B-94D0EE5CFFEB}" dt="2026-03-10T17:08:13.744" v="20" actId="478"/>
+        <pc:cxnChg chg="mod">
+          <ac:chgData name="York, George W CIV USAF USAFA DF/DFEC" userId="1fb5875a-4594-4db2-80fb-f0db3de11280" providerId="ADAL" clId="{09330963-85FD-4C99-A81B-94D0EE5CFFEB}" dt="2026-04-10T18:23:32.536" v="69" actId="1076"/>
           <ac:cxnSpMkLst>
             <pc:docMk/>
             <pc:sldMk cId="1501170907" sldId="256"/>
-            <ac:cxnSpMk id="80" creationId="{3211B8BE-2D5F-DC40-493A-A011203B18F9}"/>
-          </ac:cxnSpMkLst>
-        </pc:cxnChg>
-        <pc:cxnChg chg="add del mod">
-          <ac:chgData name="York, George W CIV USAF USAFA DF/DFEC" userId="1fb5875a-4594-4db2-80fb-f0db3de11280" providerId="ADAL" clId="{09330963-85FD-4C99-A81B-94D0EE5CFFEB}" dt="2026-03-10T17:08:13.744" v="20" actId="478"/>
-          <ac:cxnSpMkLst>
-            <pc:docMk/>
-            <pc:sldMk cId="1501170907" sldId="256"/>
-            <ac:cxnSpMk id="86" creationId="{2999216A-F5BD-5C3B-C483-7A84E97A2C87}"/>
-          </ac:cxnSpMkLst>
-        </pc:cxnChg>
-        <pc:cxnChg chg="add mod">
-          <ac:chgData name="York, George W CIV USAF USAFA DF/DFEC" userId="1fb5875a-4594-4db2-80fb-f0db3de11280" providerId="ADAL" clId="{09330963-85FD-4C99-A81B-94D0EE5CFFEB}" dt="2026-03-10T17:08:49.883" v="25" actId="1076"/>
-          <ac:cxnSpMkLst>
-            <pc:docMk/>
-            <pc:sldMk cId="1501170907" sldId="256"/>
-            <ac:cxnSpMk id="105" creationId="{D07766FF-137E-CFC5-F36B-18899A589011}"/>
-          </ac:cxnSpMkLst>
-        </pc:cxnChg>
-        <pc:cxnChg chg="add del mod">
-          <ac:chgData name="York, George W CIV USAF USAFA DF/DFEC" userId="1fb5875a-4594-4db2-80fb-f0db3de11280" providerId="ADAL" clId="{09330963-85FD-4C99-A81B-94D0EE5CFFEB}" dt="2026-03-10T17:09:41.529" v="28" actId="478"/>
-          <ac:cxnSpMkLst>
-            <pc:docMk/>
-            <pc:sldMk cId="1501170907" sldId="256"/>
-            <ac:cxnSpMk id="106" creationId="{CE17DD74-D95F-A684-5F8D-79C75CBE937A}"/>
-          </ac:cxnSpMkLst>
-        </pc:cxnChg>
-        <pc:cxnChg chg="add del mod">
-          <ac:chgData name="York, George W CIV USAF USAFA DF/DFEC" userId="1fb5875a-4594-4db2-80fb-f0db3de11280" providerId="ADAL" clId="{09330963-85FD-4C99-A81B-94D0EE5CFFEB}" dt="2026-03-10T17:09:41.529" v="28" actId="478"/>
-          <ac:cxnSpMkLst>
-            <pc:docMk/>
-            <pc:sldMk cId="1501170907" sldId="256"/>
-            <ac:cxnSpMk id="109" creationId="{2EE93D9E-E510-40BC-F5F1-AAE75522A320}"/>
-          </ac:cxnSpMkLst>
-        </pc:cxnChg>
-        <pc:cxnChg chg="add del mod">
-          <ac:chgData name="York, George W CIV USAF USAFA DF/DFEC" userId="1fb5875a-4594-4db2-80fb-f0db3de11280" providerId="ADAL" clId="{09330963-85FD-4C99-A81B-94D0EE5CFFEB}" dt="2026-03-10T17:09:41.529" v="28" actId="478"/>
-          <ac:cxnSpMkLst>
-            <pc:docMk/>
-            <pc:sldMk cId="1501170907" sldId="256"/>
-            <ac:cxnSpMk id="110" creationId="{24CA2D82-8BE4-31B9-200E-D75DD793007C}"/>
-          </ac:cxnSpMkLst>
-        </pc:cxnChg>
-        <pc:cxnChg chg="add mod">
-          <ac:chgData name="York, George W CIV USAF USAFA DF/DFEC" userId="1fb5875a-4594-4db2-80fb-f0db3de11280" providerId="ADAL" clId="{09330963-85FD-4C99-A81B-94D0EE5CFFEB}" dt="2026-03-05T22:37:02.711" v="15" actId="1076"/>
-          <ac:cxnSpMkLst>
-            <pc:docMk/>
-            <pc:sldMk cId="1501170907" sldId="256"/>
-            <ac:cxnSpMk id="121" creationId="{C3290510-9088-6A3E-5DFA-AEBEB6FBD1A1}"/>
-          </ac:cxnSpMkLst>
-        </pc:cxnChg>
-        <pc:cxnChg chg="mod">
-          <ac:chgData name="York, George W CIV USAF USAFA DF/DFEC" userId="1fb5875a-4594-4db2-80fb-f0db3de11280" providerId="ADAL" clId="{09330963-85FD-4C99-A81B-94D0EE5CFFEB}" dt="2026-03-10T17:08:43.891" v="24" actId="14100"/>
-          <ac:cxnSpMkLst>
-            <pc:docMk/>
-            <pc:sldMk cId="1501170907" sldId="256"/>
-            <ac:cxnSpMk id="133" creationId="{37C14550-6462-0A41-3B27-18A6907D7904}"/>
-          </ac:cxnSpMkLst>
-        </pc:cxnChg>
-        <pc:cxnChg chg="mod">
-          <ac:chgData name="York, George W CIV USAF USAFA DF/DFEC" userId="1fb5875a-4594-4db2-80fb-f0db3de11280" providerId="ADAL" clId="{09330963-85FD-4C99-A81B-94D0EE5CFFEB}" dt="2026-03-05T22:36:51.305" v="14"/>
-          <ac:cxnSpMkLst>
-            <pc:docMk/>
-            <pc:sldMk cId="1501170907" sldId="256"/>
-            <ac:cxnSpMk id="140" creationId="{1CDC5C6D-A82B-99F5-6FC5-EEDD54CCF190}"/>
-          </ac:cxnSpMkLst>
-        </pc:cxnChg>
-        <pc:cxnChg chg="mod">
-          <ac:chgData name="York, George W CIV USAF USAFA DF/DFEC" userId="1fb5875a-4594-4db2-80fb-f0db3de11280" providerId="ADAL" clId="{09330963-85FD-4C99-A81B-94D0EE5CFFEB}" dt="2026-03-05T22:36:51.305" v="14"/>
-          <ac:cxnSpMkLst>
-            <pc:docMk/>
-            <pc:sldMk cId="1501170907" sldId="256"/>
-            <ac:cxnSpMk id="144" creationId="{735B5BAB-BBDC-4A8E-3A36-97A6349BBE95}"/>
-          </ac:cxnSpMkLst>
-        </pc:cxnChg>
-        <pc:cxnChg chg="add mod">
-          <ac:chgData name="York, George W CIV USAF USAFA DF/DFEC" userId="1fb5875a-4594-4db2-80fb-f0db3de11280" providerId="ADAL" clId="{09330963-85FD-4C99-A81B-94D0EE5CFFEB}" dt="2026-03-10T17:09:36.836" v="27" actId="1076"/>
-          <ac:cxnSpMkLst>
-            <pc:docMk/>
-            <pc:sldMk cId="1501170907" sldId="256"/>
-            <ac:cxnSpMk id="146" creationId="{ABE6E774-8C9B-4489-D948-65607F2E188A}"/>
-          </ac:cxnSpMkLst>
-        </pc:cxnChg>
-        <pc:cxnChg chg="add mod">
-          <ac:chgData name="York, George W CIV USAF USAFA DF/DFEC" userId="1fb5875a-4594-4db2-80fb-f0db3de11280" providerId="ADAL" clId="{09330963-85FD-4C99-A81B-94D0EE5CFFEB}" dt="2026-03-10T17:09:36.836" v="27" actId="1076"/>
-          <ac:cxnSpMkLst>
-            <pc:docMk/>
-            <pc:sldMk cId="1501170907" sldId="256"/>
-            <ac:cxnSpMk id="148" creationId="{FE9EFFB0-0DED-2330-8209-FC39718441DD}"/>
-          </ac:cxnSpMkLst>
-        </pc:cxnChg>
-        <pc:cxnChg chg="add mod">
-          <ac:chgData name="York, George W CIV USAF USAFA DF/DFEC" userId="1fb5875a-4594-4db2-80fb-f0db3de11280" providerId="ADAL" clId="{09330963-85FD-4C99-A81B-94D0EE5CFFEB}" dt="2026-03-10T17:10:55.491" v="32" actId="1076"/>
-          <ac:cxnSpMkLst>
-            <pc:docMk/>
-            <pc:sldMk cId="1501170907" sldId="256"/>
-            <ac:cxnSpMk id="149" creationId="{F6ECA4E6-7E3F-9AE7-DC4A-642870838647}"/>
-          </ac:cxnSpMkLst>
-        </pc:cxnChg>
-        <pc:cxnChg chg="add mod">
-          <ac:chgData name="York, George W CIV USAF USAFA DF/DFEC" userId="1fb5875a-4594-4db2-80fb-f0db3de11280" providerId="ADAL" clId="{09330963-85FD-4C99-A81B-94D0EE5CFFEB}" dt="2026-03-10T17:10:55.491" v="32" actId="1076"/>
-          <ac:cxnSpMkLst>
-            <pc:docMk/>
-            <pc:sldMk cId="1501170907" sldId="256"/>
-            <ac:cxnSpMk id="152" creationId="{2FC45EE7-792B-F72E-2C03-735BF8B795D9}"/>
-          </ac:cxnSpMkLst>
-        </pc:cxnChg>
-        <pc:cxnChg chg="add mod">
-          <ac:chgData name="York, George W CIV USAF USAFA DF/DFEC" userId="1fb5875a-4594-4db2-80fb-f0db3de11280" providerId="ADAL" clId="{09330963-85FD-4C99-A81B-94D0EE5CFFEB}" dt="2026-03-10T17:10:55.491" v="32" actId="1076"/>
-          <ac:cxnSpMkLst>
-            <pc:docMk/>
-            <pc:sldMk cId="1501170907" sldId="256"/>
-            <ac:cxnSpMk id="155" creationId="{7427857C-18CF-7E87-7DE9-41875BFC41AB}"/>
-          </ac:cxnSpMkLst>
-        </pc:cxnChg>
-        <pc:cxnChg chg="add mod">
-          <ac:chgData name="York, George W CIV USAF USAFA DF/DFEC" userId="1fb5875a-4594-4db2-80fb-f0db3de11280" providerId="ADAL" clId="{09330963-85FD-4C99-A81B-94D0EE5CFFEB}" dt="2026-03-05T22:37:02.711" v="15" actId="1076"/>
-          <ac:cxnSpMkLst>
-            <pc:docMk/>
-            <pc:sldMk cId="1501170907" sldId="256"/>
-            <ac:cxnSpMk id="174" creationId="{73CA6134-70D5-34FA-00BD-59378BC13DD1}"/>
-          </ac:cxnSpMkLst>
-        </pc:cxnChg>
-        <pc:cxnChg chg="del">
-          <ac:chgData name="York, George W CIV USAF USAFA DF/DFEC" userId="1fb5875a-4594-4db2-80fb-f0db3de11280" providerId="ADAL" clId="{09330963-85FD-4C99-A81B-94D0EE5CFFEB}" dt="2026-03-10T17:09:56.363" v="30" actId="478"/>
-          <ac:cxnSpMkLst>
-            <pc:docMk/>
-            <pc:sldMk cId="1501170907" sldId="256"/>
-            <ac:cxnSpMk id="183" creationId="{FD895F0D-4BF5-DC7B-F7F3-413542C80AFB}"/>
-          </ac:cxnSpMkLst>
-        </pc:cxnChg>
-        <pc:cxnChg chg="del">
-          <ac:chgData name="York, George W CIV USAF USAFA DF/DFEC" userId="1fb5875a-4594-4db2-80fb-f0db3de11280" providerId="ADAL" clId="{09330963-85FD-4C99-A81B-94D0EE5CFFEB}" dt="2026-03-10T17:09:56.363" v="30" actId="478"/>
-          <ac:cxnSpMkLst>
-            <pc:docMk/>
-            <pc:sldMk cId="1501170907" sldId="256"/>
-            <ac:cxnSpMk id="185" creationId="{8A322888-ED2A-D52F-5D81-55A9F50D831D}"/>
-          </ac:cxnSpMkLst>
-        </pc:cxnChg>
-        <pc:cxnChg chg="mod">
-          <ac:chgData name="York, George W CIV USAF USAFA DF/DFEC" userId="1fb5875a-4594-4db2-80fb-f0db3de11280" providerId="ADAL" clId="{09330963-85FD-4C99-A81B-94D0EE5CFFEB}" dt="2026-03-05T22:37:02.711" v="15" actId="1076"/>
-          <ac:cxnSpMkLst>
-            <pc:docMk/>
-            <pc:sldMk cId="1501170907" sldId="256"/>
-            <ac:cxnSpMk id="187" creationId="{0D200FF7-E333-ACB1-85A2-D9AC30E6FCDF}"/>
-          </ac:cxnSpMkLst>
-        </pc:cxnChg>
-        <pc:cxnChg chg="mod">
-          <ac:chgData name="York, George W CIV USAF USAFA DF/DFEC" userId="1fb5875a-4594-4db2-80fb-f0db3de11280" providerId="ADAL" clId="{09330963-85FD-4C99-A81B-94D0EE5CFFEB}" dt="2026-03-05T22:37:02.711" v="15" actId="1076"/>
-          <ac:cxnSpMkLst>
-            <pc:docMk/>
-            <pc:sldMk cId="1501170907" sldId="256"/>
-            <ac:cxnSpMk id="198" creationId="{E418A0F2-C32C-CA49-AA0F-30FCCCAA2766}"/>
-          </ac:cxnSpMkLst>
-        </pc:cxnChg>
-        <pc:cxnChg chg="add mod">
-          <ac:chgData name="York, George W CIV USAF USAFA DF/DFEC" userId="1fb5875a-4594-4db2-80fb-f0db3de11280" providerId="ADAL" clId="{09330963-85FD-4C99-A81B-94D0EE5CFFEB}" dt="2026-03-10T17:12:06.654" v="43" actId="1076"/>
-          <ac:cxnSpMkLst>
-            <pc:docMk/>
-            <pc:sldMk cId="1501170907" sldId="256"/>
-            <ac:cxnSpMk id="200" creationId="{D4AC79D0-5B76-D005-1A27-F76F271A152F}"/>
-          </ac:cxnSpMkLst>
-        </pc:cxnChg>
-        <pc:cxnChg chg="del">
-          <ac:chgData name="York, George W CIV USAF USAFA DF/DFEC" userId="1fb5875a-4594-4db2-80fb-f0db3de11280" providerId="ADAL" clId="{09330963-85FD-4C99-A81B-94D0EE5CFFEB}" dt="2026-03-10T17:09:50.843" v="29" actId="478"/>
-          <ac:cxnSpMkLst>
-            <pc:docMk/>
-            <pc:sldMk cId="1501170907" sldId="256"/>
-            <ac:cxnSpMk id="276" creationId="{370ACF3C-5A72-31AC-3830-8B43C336935F}"/>
-          </ac:cxnSpMkLst>
-        </pc:cxnChg>
-        <pc:cxnChg chg="del">
-          <ac:chgData name="York, George W CIV USAF USAFA DF/DFEC" userId="1fb5875a-4594-4db2-80fb-f0db3de11280" providerId="ADAL" clId="{09330963-85FD-4C99-A81B-94D0EE5CFFEB}" dt="2026-03-10T17:09:56.363" v="30" actId="478"/>
-          <ac:cxnSpMkLst>
-            <pc:docMk/>
-            <pc:sldMk cId="1501170907" sldId="256"/>
-            <ac:cxnSpMk id="280" creationId="{BF12A351-142A-23D7-36BD-9308B9D720AA}"/>
-          </ac:cxnSpMkLst>
-        </pc:cxnChg>
-        <pc:cxnChg chg="mod">
-          <ac:chgData name="York, George W CIV USAF USAFA DF/DFEC" userId="1fb5875a-4594-4db2-80fb-f0db3de11280" providerId="ADAL" clId="{09330963-85FD-4C99-A81B-94D0EE5CFFEB}" dt="2026-03-10T17:11:16.439" v="35" actId="14100"/>
-          <ac:cxnSpMkLst>
-            <pc:docMk/>
-            <pc:sldMk cId="1501170907" sldId="256"/>
-            <ac:cxnSpMk id="286" creationId="{B760AF97-E733-241D-903A-11456E3E2363}"/>
-          </ac:cxnSpMkLst>
-        </pc:cxnChg>
-        <pc:cxnChg chg="mod">
-          <ac:chgData name="York, George W CIV USAF USAFA DF/DFEC" userId="1fb5875a-4594-4db2-80fb-f0db3de11280" providerId="ADAL" clId="{09330963-85FD-4C99-A81B-94D0EE5CFFEB}" dt="2026-03-10T17:11:09.526" v="34" actId="14100"/>
-          <ac:cxnSpMkLst>
-            <pc:docMk/>
-            <pc:sldMk cId="1501170907" sldId="256"/>
-            <ac:cxnSpMk id="290" creationId="{1876BEE7-FDFC-0D31-7B67-CAA4ECA61CC2}"/>
-          </ac:cxnSpMkLst>
-        </pc:cxnChg>
-        <pc:cxnChg chg="mod">
-          <ac:chgData name="York, George W CIV USAF USAFA DF/DFEC" userId="1fb5875a-4594-4db2-80fb-f0db3de11280" providerId="ADAL" clId="{09330963-85FD-4C99-A81B-94D0EE5CFFEB}" dt="2026-03-10T17:11:03.585" v="33" actId="1076"/>
-          <ac:cxnSpMkLst>
-            <pc:docMk/>
-            <pc:sldMk cId="1501170907" sldId="256"/>
-            <ac:cxnSpMk id="292" creationId="{F1B7D252-CFD6-2A20-A0B7-01CB66AF15B1}"/>
+            <ac:cxnSpMk id="223" creationId="{320A29EB-ABD9-7A97-166B-5F32289CDE2A}"/>
           </ac:cxnSpMkLst>
         </pc:cxnChg>
       </pc:sldChg>
@@ -704,7 +464,7 @@
           <a:p>
             <a:fld id="{51AFF834-1BEC-4F95-9622-28B5DCC1FE16}" type="datetimeFigureOut">
               <a:rPr lang="en-US" smtClean="0"/>
-              <a:t>3/10/2026</a:t>
+              <a:t>4/18/2026</a:t>
             </a:fld>
             <a:endParaRPr lang="en-US"/>
           </a:p>
@@ -902,7 +662,7 @@
           <a:p>
             <a:fld id="{51AFF834-1BEC-4F95-9622-28B5DCC1FE16}" type="datetimeFigureOut">
               <a:rPr lang="en-US" smtClean="0"/>
-              <a:t>3/10/2026</a:t>
+              <a:t>4/18/2026</a:t>
             </a:fld>
             <a:endParaRPr lang="en-US"/>
           </a:p>
@@ -1110,7 +870,7 @@
           <a:p>
             <a:fld id="{51AFF834-1BEC-4F95-9622-28B5DCC1FE16}" type="datetimeFigureOut">
               <a:rPr lang="en-US" smtClean="0"/>
-              <a:t>3/10/2026</a:t>
+              <a:t>4/18/2026</a:t>
             </a:fld>
             <a:endParaRPr lang="en-US"/>
           </a:p>
@@ -1308,7 +1068,7 @@
           <a:p>
             <a:fld id="{51AFF834-1BEC-4F95-9622-28B5DCC1FE16}" type="datetimeFigureOut">
               <a:rPr lang="en-US" smtClean="0"/>
-              <a:t>3/10/2026</a:t>
+              <a:t>4/18/2026</a:t>
             </a:fld>
             <a:endParaRPr lang="en-US"/>
           </a:p>
@@ -1583,7 +1343,7 @@
           <a:p>
             <a:fld id="{51AFF834-1BEC-4F95-9622-28B5DCC1FE16}" type="datetimeFigureOut">
               <a:rPr lang="en-US" smtClean="0"/>
-              <a:t>3/10/2026</a:t>
+              <a:t>4/18/2026</a:t>
             </a:fld>
             <a:endParaRPr lang="en-US"/>
           </a:p>
@@ -1848,7 +1608,7 @@
           <a:p>
             <a:fld id="{51AFF834-1BEC-4F95-9622-28B5DCC1FE16}" type="datetimeFigureOut">
               <a:rPr lang="en-US" smtClean="0"/>
-              <a:t>3/10/2026</a:t>
+              <a:t>4/18/2026</a:t>
             </a:fld>
             <a:endParaRPr lang="en-US"/>
           </a:p>
@@ -2260,7 +2020,7 @@
           <a:p>
             <a:fld id="{51AFF834-1BEC-4F95-9622-28B5DCC1FE16}" type="datetimeFigureOut">
               <a:rPr lang="en-US" smtClean="0"/>
-              <a:t>3/10/2026</a:t>
+              <a:t>4/18/2026</a:t>
             </a:fld>
             <a:endParaRPr lang="en-US"/>
           </a:p>
@@ -2401,7 +2161,7 @@
           <a:p>
             <a:fld id="{51AFF834-1BEC-4F95-9622-28B5DCC1FE16}" type="datetimeFigureOut">
               <a:rPr lang="en-US" smtClean="0"/>
-              <a:t>3/10/2026</a:t>
+              <a:t>4/18/2026</a:t>
             </a:fld>
             <a:endParaRPr lang="en-US"/>
           </a:p>
@@ -2514,7 +2274,7 @@
           <a:p>
             <a:fld id="{51AFF834-1BEC-4F95-9622-28B5DCC1FE16}" type="datetimeFigureOut">
               <a:rPr lang="en-US" smtClean="0"/>
-              <a:t>3/10/2026</a:t>
+              <a:t>4/18/2026</a:t>
             </a:fld>
             <a:endParaRPr lang="en-US"/>
           </a:p>
@@ -2825,7 +2585,7 @@
           <a:p>
             <a:fld id="{51AFF834-1BEC-4F95-9622-28B5DCC1FE16}" type="datetimeFigureOut">
               <a:rPr lang="en-US" smtClean="0"/>
-              <a:t>3/10/2026</a:t>
+              <a:t>4/18/2026</a:t>
             </a:fld>
             <a:endParaRPr lang="en-US"/>
           </a:p>
@@ -3113,7 +2873,7 @@
           <a:p>
             <a:fld id="{51AFF834-1BEC-4F95-9622-28B5DCC1FE16}" type="datetimeFigureOut">
               <a:rPr lang="en-US" smtClean="0"/>
-              <a:t>3/10/2026</a:t>
+              <a:t>4/18/2026</a:t>
             </a:fld>
             <a:endParaRPr lang="en-US"/>
           </a:p>
@@ -3354,7 +3114,7 @@
           <a:p>
             <a:fld id="{51AFF834-1BEC-4F95-9622-28B5DCC1FE16}" type="datetimeFigureOut">
               <a:rPr lang="en-US" smtClean="0"/>
-              <a:t>3/10/2026</a:t>
+              <a:t>4/18/2026</a:t>
             </a:fld>
             <a:endParaRPr lang="en-US"/>
           </a:p>
@@ -4107,50 +3867,6 @@
       </p:cxnSp>
       <p:cxnSp>
         <p:nvCxnSpPr>
-          <p:cNvPr id="12" name="Straight Connector 11">
-            <a:extLst>
-              <a:ext uri="{FF2B5EF4-FFF2-40B4-BE49-F238E27FC236}">
-                <a16:creationId xmlns:a16="http://schemas.microsoft.com/office/drawing/2014/main" id="{9EC90484-36CB-4907-076A-02E3D3D32D1E}"/>
-              </a:ext>
-            </a:extLst>
-          </p:cNvPr>
-          <p:cNvCxnSpPr/>
-          <p:nvPr/>
-        </p:nvCxnSpPr>
-        <p:spPr>
-          <a:xfrm>
-            <a:off x="5506905" y="1862975"/>
-            <a:ext cx="0" cy="4611757"/>
-          </a:xfrm>
-          <a:prstGeom prst="line">
-            <a:avLst/>
-          </a:prstGeom>
-          <a:ln>
-            <a:solidFill>
-              <a:schemeClr val="bg1">
-                <a:lumMod val="65000"/>
-              </a:schemeClr>
-            </a:solidFill>
-            <a:prstDash val="dash"/>
-          </a:ln>
-        </p:spPr>
-        <p:style>
-          <a:lnRef idx="2">
-            <a:schemeClr val="accent1"/>
-          </a:lnRef>
-          <a:fillRef idx="0">
-            <a:schemeClr val="accent1"/>
-          </a:fillRef>
-          <a:effectRef idx="1">
-            <a:schemeClr val="accent1"/>
-          </a:effectRef>
-          <a:fontRef idx="minor">
-            <a:schemeClr val="tx1"/>
-          </a:fontRef>
-        </p:style>
-      </p:cxnSp>
-      <p:cxnSp>
-        <p:nvCxnSpPr>
           <p:cNvPr id="13" name="Straight Connector 12">
             <a:extLst>
               <a:ext uri="{FF2B5EF4-FFF2-40B4-BE49-F238E27FC236}">
@@ -9099,7 +8815,7 @@
         <p:spPr>
           <a:xfrm>
             <a:off x="5446395" y="1862975"/>
-            <a:ext cx="124516" cy="4611756"/>
+            <a:ext cx="107644" cy="3460347"/>
           </a:xfrm>
           <a:prstGeom prst="rect">
             <a:avLst/>
@@ -9460,12 +9176,56 @@
           </a:p>
         </p:txBody>
       </p:sp>
-      <p:sp>
-        <p:nvSpPr>
-          <p:cNvPr id="17" name="Rectangle 16">
-            <a:extLst>
-              <a:ext uri="{FF2B5EF4-FFF2-40B4-BE49-F238E27FC236}">
-                <a16:creationId xmlns:a16="http://schemas.microsoft.com/office/drawing/2014/main" id="{4480F685-AE09-0D32-5539-8E4975E6DF53}"/>
+      <p:cxnSp>
+        <p:nvCxnSpPr>
+          <p:cNvPr id="28" name="Straight Arrow Connector 27">
+            <a:extLst>
+              <a:ext uri="{FF2B5EF4-FFF2-40B4-BE49-F238E27FC236}">
+                <a16:creationId xmlns:a16="http://schemas.microsoft.com/office/drawing/2014/main" id="{DBC59A37-4C55-8753-29C9-9D435BAD749A}"/>
+              </a:ext>
+            </a:extLst>
+          </p:cNvPr>
+          <p:cNvCxnSpPr>
+            <a:cxnSpLocks/>
+          </p:cNvCxnSpPr>
+          <p:nvPr/>
+        </p:nvCxnSpPr>
+        <p:spPr>
+          <a:xfrm>
+            <a:off x="6907069" y="5094338"/>
+            <a:ext cx="229874" cy="0"/>
+          </a:xfrm>
+          <a:prstGeom prst="straightConnector1">
+            <a:avLst/>
+          </a:prstGeom>
+          <a:ln>
+            <a:solidFill>
+              <a:srgbClr val="FF0000"/>
+            </a:solidFill>
+            <a:tailEnd type="triangle"/>
+          </a:ln>
+        </p:spPr>
+        <p:style>
+          <a:lnRef idx="2">
+            <a:schemeClr val="accent1"/>
+          </a:lnRef>
+          <a:fillRef idx="0">
+            <a:schemeClr val="accent1"/>
+          </a:fillRef>
+          <a:effectRef idx="1">
+            <a:schemeClr val="accent1"/>
+          </a:effectRef>
+          <a:fontRef idx="minor">
+            <a:schemeClr val="tx1"/>
+          </a:fontRef>
+        </p:style>
+      </p:cxnSp>
+      <p:sp>
+        <p:nvSpPr>
+          <p:cNvPr id="38" name="Rectangle 37">
+            <a:extLst>
+              <a:ext uri="{FF2B5EF4-FFF2-40B4-BE49-F238E27FC236}">
+                <a16:creationId xmlns:a16="http://schemas.microsoft.com/office/drawing/2014/main" id="{9DC00663-BEA1-F516-A24E-D1358A5FA8D3}"/>
               </a:ext>
             </a:extLst>
           </p:cNvPr>
@@ -9474,8 +9234,8 @@
         </p:nvSpPr>
         <p:spPr>
           <a:xfrm>
-            <a:off x="4275096" y="5560170"/>
-            <a:ext cx="663423" cy="460640"/>
+            <a:off x="6228280" y="4957339"/>
+            <a:ext cx="678789" cy="484706"/>
           </a:xfrm>
           <a:prstGeom prst="rect">
             <a:avLst/>
@@ -9514,10 +9274,10 @@
       </p:sp>
       <p:sp>
         <p:nvSpPr>
-          <p:cNvPr id="26" name="TextBox 25">
-            <a:extLst>
-              <a:ext uri="{FF2B5EF4-FFF2-40B4-BE49-F238E27FC236}">
-                <a16:creationId xmlns:a16="http://schemas.microsoft.com/office/drawing/2014/main" id="{2AE4C0B7-D9E3-3907-9505-138DB1D14F87}"/>
+          <p:cNvPr id="39" name="TextBox 38">
+            <a:extLst>
+              <a:ext uri="{FF2B5EF4-FFF2-40B4-BE49-F238E27FC236}">
+                <a16:creationId xmlns:a16="http://schemas.microsoft.com/office/drawing/2014/main" id="{6174F677-2B47-463D-4071-9231A2EAA9DF}"/>
               </a:ext>
             </a:extLst>
           </p:cNvPr>
@@ -9526,8 +9286,8 @@
         </p:nvSpPr>
         <p:spPr>
           <a:xfrm>
-            <a:off x="4334004" y="5598624"/>
-            <a:ext cx="574196" cy="384721"/>
+            <a:off x="6236908" y="4977226"/>
+            <a:ext cx="643125" cy="400110"/>
           </a:xfrm>
           <a:prstGeom prst="rect">
             <a:avLst/>
@@ -9543,24 +9303,24 @@
             <a:pPr algn="ctr"/>
             <a:r>
               <a:rPr lang="en-US" sz="1000" dirty="0"/>
-              <a:t>Stall</a:t>
+              <a:t>Forward</a:t>
             </a:r>
           </a:p>
           <a:p>
             <a:pPr algn="ctr"/>
             <a:r>
-              <a:rPr lang="en-US" sz="900" dirty="0"/>
-              <a:t>counter</a:t>
+              <a:rPr lang="en-US" sz="1000" dirty="0"/>
+              <a:t>Unit</a:t>
             </a:r>
           </a:p>
         </p:txBody>
       </p:sp>
       <p:cxnSp>
         <p:nvCxnSpPr>
-          <p:cNvPr id="30" name="Straight Arrow Connector 29">
-            <a:extLst>
-              <a:ext uri="{FF2B5EF4-FFF2-40B4-BE49-F238E27FC236}">
-                <a16:creationId xmlns:a16="http://schemas.microsoft.com/office/drawing/2014/main" id="{0FCEB13D-6178-8B05-6BF7-AA34265C10ED}"/>
+          <p:cNvPr id="54" name="Straight Arrow Connector 53">
+            <a:extLst>
+              <a:ext uri="{FF2B5EF4-FFF2-40B4-BE49-F238E27FC236}">
+                <a16:creationId xmlns:a16="http://schemas.microsoft.com/office/drawing/2014/main" id="{03324C20-C3D1-9AAB-5C0D-C6C15BD835FE}"/>
               </a:ext>
             </a:extLst>
           </p:cNvPr>
@@ -9571,646 +9331,8 @@
         </p:nvCxnSpPr>
         <p:spPr>
           <a:xfrm>
-            <a:off x="4045223" y="5697383"/>
-            <a:ext cx="229874" cy="0"/>
-          </a:xfrm>
-          <a:prstGeom prst="straightConnector1">
-            <a:avLst/>
-          </a:prstGeom>
-          <a:ln>
-            <a:solidFill>
-              <a:srgbClr val="FF0000"/>
-            </a:solidFill>
-            <a:tailEnd type="triangle"/>
-          </a:ln>
-        </p:spPr>
-        <p:style>
-          <a:lnRef idx="2">
-            <a:schemeClr val="accent1"/>
-          </a:lnRef>
-          <a:fillRef idx="0">
-            <a:schemeClr val="accent1"/>
-          </a:fillRef>
-          <a:effectRef idx="1">
-            <a:schemeClr val="accent1"/>
-          </a:effectRef>
-          <a:fontRef idx="minor">
-            <a:schemeClr val="tx1"/>
-          </a:fontRef>
-        </p:style>
-      </p:cxnSp>
-      <p:sp>
-        <p:nvSpPr>
-          <p:cNvPr id="32" name="Rectangle 31">
-            <a:extLst>
-              <a:ext uri="{FF2B5EF4-FFF2-40B4-BE49-F238E27FC236}">
-                <a16:creationId xmlns:a16="http://schemas.microsoft.com/office/drawing/2014/main" id="{5964E24E-8C81-EFE0-AB26-0F6BAD08C8E1}"/>
-              </a:ext>
-            </a:extLst>
-          </p:cNvPr>
-          <p:cNvSpPr/>
-          <p:nvPr/>
-        </p:nvSpPr>
-        <p:spPr>
-          <a:xfrm>
-            <a:off x="3366434" y="5560384"/>
-            <a:ext cx="678789" cy="484706"/>
-          </a:xfrm>
-          <a:prstGeom prst="rect">
-            <a:avLst/>
-          </a:prstGeom>
-          <a:solidFill>
-            <a:schemeClr val="bg1"/>
-          </a:solidFill>
-        </p:spPr>
-        <p:style>
-          <a:lnRef idx="2">
-            <a:schemeClr val="accent1">
-              <a:shade val="15000"/>
-            </a:schemeClr>
-          </a:lnRef>
-          <a:fillRef idx="1">
-            <a:schemeClr val="accent1"/>
-          </a:fillRef>
-          <a:effectRef idx="0">
-            <a:schemeClr val="accent1"/>
-          </a:effectRef>
-          <a:fontRef idx="minor">
-            <a:schemeClr val="lt1"/>
-          </a:fontRef>
-        </p:style>
-        <p:txBody>
-          <a:bodyPr rtlCol="0" anchor="ctr"/>
-          <a:lstStyle/>
-          <a:p>
-            <a:pPr algn="ctr"/>
-            <a:r>
-              <a:rPr lang="en-US" dirty="0"/>
-              <a:t>PC</a:t>
-            </a:r>
-          </a:p>
-        </p:txBody>
-      </p:sp>
-      <p:sp>
-        <p:nvSpPr>
-          <p:cNvPr id="34" name="TextBox 33">
-            <a:extLst>
-              <a:ext uri="{FF2B5EF4-FFF2-40B4-BE49-F238E27FC236}">
-                <a16:creationId xmlns:a16="http://schemas.microsoft.com/office/drawing/2014/main" id="{AAF8D060-B516-028F-A160-DDD58A9B4A1C}"/>
-              </a:ext>
-            </a:extLst>
-          </p:cNvPr>
-          <p:cNvSpPr txBox="1"/>
-          <p:nvPr/>
-        </p:nvSpPr>
-        <p:spPr>
-          <a:xfrm>
-            <a:off x="3331780" y="5580271"/>
-            <a:ext cx="729687" cy="400110"/>
-          </a:xfrm>
-          <a:prstGeom prst="rect">
-            <a:avLst/>
-          </a:prstGeom>
-          <a:noFill/>
-        </p:spPr>
-        <p:txBody>
-          <a:bodyPr wrap="none" rtlCol="0">
-            <a:spAutoFit/>
-          </a:bodyPr>
-          <a:lstStyle/>
-          <a:p>
-            <a:pPr algn="ctr"/>
-            <a:r>
-              <a:rPr lang="en-US" sz="1000" dirty="0"/>
-              <a:t>Hazard</a:t>
-            </a:r>
-          </a:p>
-          <a:p>
-            <a:pPr algn="ctr"/>
-            <a:r>
-              <a:rPr lang="en-US" sz="1000" dirty="0"/>
-              <a:t>Detection</a:t>
-            </a:r>
-          </a:p>
-        </p:txBody>
-      </p:sp>
-      <p:cxnSp>
-        <p:nvCxnSpPr>
-          <p:cNvPr id="35" name="Straight Arrow Connector 34">
-            <a:extLst>
-              <a:ext uri="{FF2B5EF4-FFF2-40B4-BE49-F238E27FC236}">
-                <a16:creationId xmlns:a16="http://schemas.microsoft.com/office/drawing/2014/main" id="{41C7F50D-F709-CA85-5675-DD0636890A76}"/>
-              </a:ext>
-            </a:extLst>
-          </p:cNvPr>
-          <p:cNvCxnSpPr>
-            <a:cxnSpLocks/>
-          </p:cNvCxnSpPr>
-          <p:nvPr/>
-        </p:nvCxnSpPr>
-        <p:spPr>
-          <a:xfrm>
-            <a:off x="2906114" y="5750885"/>
-            <a:ext cx="442253" cy="0"/>
-          </a:xfrm>
-          <a:prstGeom prst="straightConnector1">
-            <a:avLst/>
-          </a:prstGeom>
-          <a:ln>
-            <a:tailEnd type="triangle"/>
-          </a:ln>
-        </p:spPr>
-        <p:style>
-          <a:lnRef idx="2">
-            <a:schemeClr val="accent1"/>
-          </a:lnRef>
-          <a:fillRef idx="0">
-            <a:schemeClr val="accent1"/>
-          </a:fillRef>
-          <a:effectRef idx="1">
-            <a:schemeClr val="accent1"/>
-          </a:effectRef>
-          <a:fontRef idx="minor">
-            <a:schemeClr val="tx1"/>
-          </a:fontRef>
-        </p:style>
-      </p:cxnSp>
-      <p:cxnSp>
-        <p:nvCxnSpPr>
-          <p:cNvPr id="61" name="Straight Arrow Connector 60">
-            <a:extLst>
-              <a:ext uri="{FF2B5EF4-FFF2-40B4-BE49-F238E27FC236}">
-                <a16:creationId xmlns:a16="http://schemas.microsoft.com/office/drawing/2014/main" id="{628AAA9C-DA03-CA34-B011-035AEF93D851}"/>
-              </a:ext>
-            </a:extLst>
-          </p:cNvPr>
-          <p:cNvCxnSpPr>
-            <a:cxnSpLocks/>
-          </p:cNvCxnSpPr>
-          <p:nvPr/>
-        </p:nvCxnSpPr>
-        <p:spPr>
-          <a:xfrm flipH="1">
-            <a:off x="4051068" y="5951193"/>
-            <a:ext cx="205614" cy="0"/>
-          </a:xfrm>
-          <a:prstGeom prst="straightConnector1">
-            <a:avLst/>
-          </a:prstGeom>
-          <a:ln>
-            <a:solidFill>
-              <a:srgbClr val="FF0000"/>
-            </a:solidFill>
-            <a:tailEnd type="triangle"/>
-          </a:ln>
-        </p:spPr>
-        <p:style>
-          <a:lnRef idx="2">
-            <a:schemeClr val="accent1"/>
-          </a:lnRef>
-          <a:fillRef idx="0">
-            <a:schemeClr val="accent1"/>
-          </a:fillRef>
-          <a:effectRef idx="1">
-            <a:schemeClr val="accent1"/>
-          </a:effectRef>
-          <a:fontRef idx="minor">
-            <a:schemeClr val="tx1"/>
-          </a:fontRef>
-        </p:style>
-      </p:cxnSp>
-      <p:cxnSp>
-        <p:nvCxnSpPr>
-          <p:cNvPr id="77" name="Straight Connector 76">
-            <a:extLst>
-              <a:ext uri="{FF2B5EF4-FFF2-40B4-BE49-F238E27FC236}">
-                <a16:creationId xmlns:a16="http://schemas.microsoft.com/office/drawing/2014/main" id="{318283A9-1322-8DD9-D5D3-E250A298DF07}"/>
-              </a:ext>
-            </a:extLst>
-          </p:cNvPr>
-          <p:cNvCxnSpPr>
-            <a:cxnSpLocks/>
-          </p:cNvCxnSpPr>
-          <p:nvPr/>
-        </p:nvCxnSpPr>
-        <p:spPr>
-          <a:xfrm>
-            <a:off x="2906112" y="5388092"/>
-            <a:ext cx="0" cy="376470"/>
-          </a:xfrm>
-          <a:prstGeom prst="line">
-            <a:avLst/>
-          </a:prstGeom>
-        </p:spPr>
-        <p:style>
-          <a:lnRef idx="2">
-            <a:schemeClr val="accent1"/>
-          </a:lnRef>
-          <a:fillRef idx="0">
-            <a:schemeClr val="accent1"/>
-          </a:fillRef>
-          <a:effectRef idx="1">
-            <a:schemeClr val="accent1"/>
-          </a:effectRef>
-          <a:fontRef idx="minor">
-            <a:schemeClr val="tx1"/>
-          </a:fontRef>
-        </p:style>
-      </p:cxnSp>
-      <p:cxnSp>
-        <p:nvCxnSpPr>
-          <p:cNvPr id="79" name="Straight Arrow Connector 78">
-            <a:extLst>
-              <a:ext uri="{FF2B5EF4-FFF2-40B4-BE49-F238E27FC236}">
-                <a16:creationId xmlns:a16="http://schemas.microsoft.com/office/drawing/2014/main" id="{A9A8F4E2-BF11-CC7D-3DDC-10009DD0232B}"/>
-              </a:ext>
-            </a:extLst>
-          </p:cNvPr>
-          <p:cNvCxnSpPr>
-            <a:cxnSpLocks/>
-          </p:cNvCxnSpPr>
-          <p:nvPr/>
-        </p:nvCxnSpPr>
-        <p:spPr>
-          <a:xfrm>
-            <a:off x="3143796" y="5633773"/>
-            <a:ext cx="211703" cy="0"/>
-          </a:xfrm>
-          <a:prstGeom prst="straightConnector1">
-            <a:avLst/>
-          </a:prstGeom>
-          <a:ln>
-            <a:tailEnd type="triangle"/>
-          </a:ln>
-        </p:spPr>
-        <p:style>
-          <a:lnRef idx="2">
-            <a:schemeClr val="accent1"/>
-          </a:lnRef>
-          <a:fillRef idx="0">
-            <a:schemeClr val="accent1"/>
-          </a:fillRef>
-          <a:effectRef idx="1">
-            <a:schemeClr val="accent1"/>
-          </a:effectRef>
-          <a:fontRef idx="minor">
-            <a:schemeClr val="tx1"/>
-          </a:fontRef>
-        </p:style>
-      </p:cxnSp>
-      <p:cxnSp>
-        <p:nvCxnSpPr>
-          <p:cNvPr id="84" name="Straight Connector 83">
-            <a:extLst>
-              <a:ext uri="{FF2B5EF4-FFF2-40B4-BE49-F238E27FC236}">
-                <a16:creationId xmlns:a16="http://schemas.microsoft.com/office/drawing/2014/main" id="{1A52A5D1-1BB7-3403-A1A5-86E132AA172B}"/>
-              </a:ext>
-            </a:extLst>
-          </p:cNvPr>
-          <p:cNvCxnSpPr/>
-          <p:nvPr/>
-        </p:nvCxnSpPr>
-        <p:spPr>
-          <a:xfrm flipH="1" flipV="1">
-            <a:off x="2745398" y="5368626"/>
-            <a:ext cx="164123" cy="7703"/>
-          </a:xfrm>
-          <a:prstGeom prst="line">
-            <a:avLst/>
-          </a:prstGeom>
-        </p:spPr>
-        <p:style>
-          <a:lnRef idx="2">
-            <a:schemeClr val="accent1"/>
-          </a:lnRef>
-          <a:fillRef idx="0">
-            <a:schemeClr val="accent1"/>
-          </a:fillRef>
-          <a:effectRef idx="1">
-            <a:schemeClr val="accent1"/>
-          </a:effectRef>
-          <a:fontRef idx="minor">
-            <a:schemeClr val="tx1"/>
-          </a:fontRef>
-        </p:style>
-      </p:cxnSp>
-      <p:cxnSp>
-        <p:nvCxnSpPr>
-          <p:cNvPr id="88" name="Straight Connector 87">
-            <a:extLst>
-              <a:ext uri="{FF2B5EF4-FFF2-40B4-BE49-F238E27FC236}">
-                <a16:creationId xmlns:a16="http://schemas.microsoft.com/office/drawing/2014/main" id="{5F7582C7-10E1-623E-4E17-302DFD08C2CB}"/>
-              </a:ext>
-            </a:extLst>
-          </p:cNvPr>
-          <p:cNvCxnSpPr>
-            <a:cxnSpLocks/>
-          </p:cNvCxnSpPr>
-          <p:nvPr/>
-        </p:nvCxnSpPr>
-        <p:spPr>
-          <a:xfrm>
-            <a:off x="3151612" y="5385036"/>
-            <a:ext cx="0" cy="971316"/>
-          </a:xfrm>
-          <a:prstGeom prst="line">
-            <a:avLst/>
-          </a:prstGeom>
-        </p:spPr>
-        <p:style>
-          <a:lnRef idx="2">
-            <a:schemeClr val="accent1"/>
-          </a:lnRef>
-          <a:fillRef idx="0">
-            <a:schemeClr val="accent1"/>
-          </a:fillRef>
-          <a:effectRef idx="1">
-            <a:schemeClr val="accent1"/>
-          </a:effectRef>
-          <a:fontRef idx="minor">
-            <a:schemeClr val="tx1"/>
-          </a:fontRef>
-        </p:style>
-      </p:cxnSp>
-      <p:cxnSp>
-        <p:nvCxnSpPr>
-          <p:cNvPr id="107" name="Straight Connector 106">
-            <a:extLst>
-              <a:ext uri="{FF2B5EF4-FFF2-40B4-BE49-F238E27FC236}">
-                <a16:creationId xmlns:a16="http://schemas.microsoft.com/office/drawing/2014/main" id="{E6A87E40-A761-8DD0-48F4-7E93FADB35F9}"/>
-              </a:ext>
-            </a:extLst>
-          </p:cNvPr>
-          <p:cNvCxnSpPr/>
-          <p:nvPr/>
-        </p:nvCxnSpPr>
-        <p:spPr>
-          <a:xfrm>
-            <a:off x="3147704" y="5385036"/>
-            <a:ext cx="2313354" cy="0"/>
-          </a:xfrm>
-          <a:prstGeom prst="line">
-            <a:avLst/>
-          </a:prstGeom>
-        </p:spPr>
-        <p:style>
-          <a:lnRef idx="2">
-            <a:schemeClr val="accent1"/>
-          </a:lnRef>
-          <a:fillRef idx="0">
-            <a:schemeClr val="accent1"/>
-          </a:fillRef>
-          <a:effectRef idx="1">
-            <a:schemeClr val="accent1"/>
-          </a:effectRef>
-          <a:fontRef idx="minor">
-            <a:schemeClr val="tx1"/>
-          </a:fontRef>
-        </p:style>
-      </p:cxnSp>
-      <p:cxnSp>
-        <p:nvCxnSpPr>
-          <p:cNvPr id="47" name="Straight Arrow Connector 46">
-            <a:extLst>
-              <a:ext uri="{FF2B5EF4-FFF2-40B4-BE49-F238E27FC236}">
-                <a16:creationId xmlns:a16="http://schemas.microsoft.com/office/drawing/2014/main" id="{4C88B74C-2825-380E-71DB-7071BFAD6C6D}"/>
-              </a:ext>
-            </a:extLst>
-          </p:cNvPr>
-          <p:cNvCxnSpPr/>
-          <p:nvPr/>
-        </p:nvCxnSpPr>
-        <p:spPr>
-          <a:xfrm flipV="1">
-            <a:off x="4139889" y="5469023"/>
-            <a:ext cx="0" cy="225402"/>
-          </a:xfrm>
-          <a:prstGeom prst="straightConnector1">
-            <a:avLst/>
-          </a:prstGeom>
-          <a:ln>
-            <a:solidFill>
-              <a:srgbClr val="FF0000"/>
-            </a:solidFill>
-            <a:tailEnd type="triangle"/>
-          </a:ln>
-        </p:spPr>
-        <p:style>
-          <a:lnRef idx="2">
-            <a:schemeClr val="accent1"/>
-          </a:lnRef>
-          <a:fillRef idx="0">
-            <a:schemeClr val="accent1"/>
-          </a:fillRef>
-          <a:effectRef idx="1">
-            <a:schemeClr val="accent1"/>
-          </a:effectRef>
-          <a:fontRef idx="minor">
-            <a:schemeClr val="tx1"/>
-          </a:fontRef>
-        </p:style>
-      </p:cxnSp>
-      <p:cxnSp>
-        <p:nvCxnSpPr>
-          <p:cNvPr id="53" name="Straight Arrow Connector 52">
-            <a:extLst>
-              <a:ext uri="{FF2B5EF4-FFF2-40B4-BE49-F238E27FC236}">
-                <a16:creationId xmlns:a16="http://schemas.microsoft.com/office/drawing/2014/main" id="{FBA8FA93-D7D6-E677-D331-61BDAA4D72AD}"/>
-              </a:ext>
-            </a:extLst>
-          </p:cNvPr>
-          <p:cNvCxnSpPr>
-            <a:cxnSpLocks/>
-          </p:cNvCxnSpPr>
-          <p:nvPr/>
-        </p:nvCxnSpPr>
-        <p:spPr>
-          <a:xfrm>
-            <a:off x="4181855" y="5960304"/>
-            <a:ext cx="0" cy="163588"/>
-          </a:xfrm>
-          <a:prstGeom prst="straightConnector1">
-            <a:avLst/>
-          </a:prstGeom>
-          <a:ln>
-            <a:solidFill>
-              <a:srgbClr val="FF0000"/>
-            </a:solidFill>
-            <a:tailEnd type="triangle"/>
-          </a:ln>
-        </p:spPr>
-        <p:style>
-          <a:lnRef idx="2">
-            <a:schemeClr val="accent1"/>
-          </a:lnRef>
-          <a:fillRef idx="0">
-            <a:schemeClr val="accent1"/>
-          </a:fillRef>
-          <a:effectRef idx="1">
-            <a:schemeClr val="accent1"/>
-          </a:effectRef>
-          <a:fontRef idx="minor">
-            <a:schemeClr val="tx1"/>
-          </a:fontRef>
-        </p:style>
-      </p:cxnSp>
-      <p:cxnSp>
-        <p:nvCxnSpPr>
-          <p:cNvPr id="28" name="Straight Arrow Connector 27">
-            <a:extLst>
-              <a:ext uri="{FF2B5EF4-FFF2-40B4-BE49-F238E27FC236}">
-                <a16:creationId xmlns:a16="http://schemas.microsoft.com/office/drawing/2014/main" id="{DBC59A37-4C55-8753-29C9-9D435BAD749A}"/>
-              </a:ext>
-            </a:extLst>
-          </p:cNvPr>
-          <p:cNvCxnSpPr>
-            <a:cxnSpLocks/>
-          </p:cNvCxnSpPr>
-          <p:nvPr/>
-        </p:nvCxnSpPr>
-        <p:spPr>
-          <a:xfrm>
-            <a:off x="4029405" y="6407275"/>
-            <a:ext cx="229874" cy="0"/>
-          </a:xfrm>
-          <a:prstGeom prst="straightConnector1">
-            <a:avLst/>
-          </a:prstGeom>
-          <a:ln>
-            <a:solidFill>
-              <a:srgbClr val="FF0000"/>
-            </a:solidFill>
-            <a:tailEnd type="triangle"/>
-          </a:ln>
-        </p:spPr>
-        <p:style>
-          <a:lnRef idx="2">
-            <a:schemeClr val="accent1"/>
-          </a:lnRef>
-          <a:fillRef idx="0">
-            <a:schemeClr val="accent1"/>
-          </a:fillRef>
-          <a:effectRef idx="1">
-            <a:schemeClr val="accent1"/>
-          </a:effectRef>
-          <a:fontRef idx="minor">
-            <a:schemeClr val="tx1"/>
-          </a:fontRef>
-        </p:style>
-      </p:cxnSp>
-      <p:sp>
-        <p:nvSpPr>
-          <p:cNvPr id="38" name="Rectangle 37">
-            <a:extLst>
-              <a:ext uri="{FF2B5EF4-FFF2-40B4-BE49-F238E27FC236}">
-                <a16:creationId xmlns:a16="http://schemas.microsoft.com/office/drawing/2014/main" id="{9DC00663-BEA1-F516-A24E-D1358A5FA8D3}"/>
-              </a:ext>
-            </a:extLst>
-          </p:cNvPr>
-          <p:cNvSpPr/>
-          <p:nvPr/>
-        </p:nvSpPr>
-        <p:spPr>
-          <a:xfrm>
-            <a:off x="3350616" y="6270276"/>
-            <a:ext cx="678789" cy="484706"/>
-          </a:xfrm>
-          <a:prstGeom prst="rect">
-            <a:avLst/>
-          </a:prstGeom>
-          <a:solidFill>
-            <a:schemeClr val="bg1"/>
-          </a:solidFill>
-        </p:spPr>
-        <p:style>
-          <a:lnRef idx="2">
-            <a:schemeClr val="accent1">
-              <a:shade val="15000"/>
-            </a:schemeClr>
-          </a:lnRef>
-          <a:fillRef idx="1">
-            <a:schemeClr val="accent1"/>
-          </a:fillRef>
-          <a:effectRef idx="0">
-            <a:schemeClr val="accent1"/>
-          </a:effectRef>
-          <a:fontRef idx="minor">
-            <a:schemeClr val="lt1"/>
-          </a:fontRef>
-        </p:style>
-        <p:txBody>
-          <a:bodyPr rtlCol="0" anchor="ctr"/>
-          <a:lstStyle/>
-          <a:p>
-            <a:pPr algn="ctr"/>
-            <a:r>
-              <a:rPr lang="en-US" dirty="0"/>
-              <a:t>PC</a:t>
-            </a:r>
-          </a:p>
-        </p:txBody>
-      </p:sp>
-      <p:sp>
-        <p:nvSpPr>
-          <p:cNvPr id="39" name="TextBox 38">
-            <a:extLst>
-              <a:ext uri="{FF2B5EF4-FFF2-40B4-BE49-F238E27FC236}">
-                <a16:creationId xmlns:a16="http://schemas.microsoft.com/office/drawing/2014/main" id="{6174F677-2B47-463D-4071-9231A2EAA9DF}"/>
-              </a:ext>
-            </a:extLst>
-          </p:cNvPr>
-          <p:cNvSpPr txBox="1"/>
-          <p:nvPr/>
-        </p:nvSpPr>
-        <p:spPr>
-          <a:xfrm>
-            <a:off x="3359244" y="6290163"/>
-            <a:ext cx="643125" cy="400110"/>
-          </a:xfrm>
-          <a:prstGeom prst="rect">
-            <a:avLst/>
-          </a:prstGeom>
-          <a:noFill/>
-        </p:spPr>
-        <p:txBody>
-          <a:bodyPr wrap="none" rtlCol="0">
-            <a:spAutoFit/>
-          </a:bodyPr>
-          <a:lstStyle/>
-          <a:p>
-            <a:pPr algn="ctr"/>
-            <a:r>
-              <a:rPr lang="en-US" sz="1000" dirty="0"/>
-              <a:t>Forward</a:t>
-            </a:r>
-          </a:p>
-          <a:p>
-            <a:pPr algn="ctr"/>
-            <a:r>
-              <a:rPr lang="en-US" sz="1000" dirty="0"/>
-              <a:t>Unit</a:t>
-            </a:r>
-          </a:p>
-        </p:txBody>
-      </p:sp>
-      <p:cxnSp>
-        <p:nvCxnSpPr>
-          <p:cNvPr id="54" name="Straight Arrow Connector 53">
-            <a:extLst>
-              <a:ext uri="{FF2B5EF4-FFF2-40B4-BE49-F238E27FC236}">
-                <a16:creationId xmlns:a16="http://schemas.microsoft.com/office/drawing/2014/main" id="{03324C20-C3D1-9AAB-5C0D-C6C15BD835FE}"/>
-              </a:ext>
-            </a:extLst>
-          </p:cNvPr>
-          <p:cNvCxnSpPr>
-            <a:cxnSpLocks/>
-          </p:cNvCxnSpPr>
-          <p:nvPr/>
-        </p:nvCxnSpPr>
-        <p:spPr>
-          <a:xfrm>
-            <a:off x="3147541" y="6340912"/>
-            <a:ext cx="211703" cy="0"/>
+            <a:off x="5567516" y="5027975"/>
+            <a:ext cx="669392" cy="0"/>
           </a:xfrm>
           <a:prstGeom prst="straightConnector1">
             <a:avLst/>
@@ -10250,7 +9372,7 @@
         </p:nvCxnSpPr>
         <p:spPr>
           <a:xfrm>
-            <a:off x="3024168" y="6506733"/>
+            <a:off x="5901832" y="5193796"/>
             <a:ext cx="335076" cy="0"/>
           </a:xfrm>
           <a:prstGeom prst="straightConnector1">
@@ -10291,8 +9413,8 @@
         </p:nvCxnSpPr>
         <p:spPr>
           <a:xfrm>
-            <a:off x="2904736" y="6673121"/>
-            <a:ext cx="454508" cy="0"/>
+            <a:off x="2752997" y="5350205"/>
+            <a:ext cx="3481215" cy="0"/>
           </a:xfrm>
           <a:prstGeom prst="straightConnector1">
             <a:avLst/>
@@ -10300,44 +9422,6 @@
           <a:ln>
             <a:tailEnd type="triangle"/>
           </a:ln>
-        </p:spPr>
-        <p:style>
-          <a:lnRef idx="2">
-            <a:schemeClr val="accent1"/>
-          </a:lnRef>
-          <a:fillRef idx="0">
-            <a:schemeClr val="accent1"/>
-          </a:fillRef>
-          <a:effectRef idx="1">
-            <a:schemeClr val="accent1"/>
-          </a:effectRef>
-          <a:fontRef idx="minor">
-            <a:schemeClr val="tx1"/>
-          </a:fontRef>
-        </p:style>
-      </p:cxnSp>
-      <p:cxnSp>
-        <p:nvCxnSpPr>
-          <p:cNvPr id="76" name="Straight Connector 75">
-            <a:extLst>
-              <a:ext uri="{FF2B5EF4-FFF2-40B4-BE49-F238E27FC236}">
-                <a16:creationId xmlns:a16="http://schemas.microsoft.com/office/drawing/2014/main" id="{FF005C8D-5E76-1B8B-2214-62019E9B1040}"/>
-              </a:ext>
-            </a:extLst>
-          </p:cNvPr>
-          <p:cNvCxnSpPr>
-            <a:cxnSpLocks/>
-          </p:cNvCxnSpPr>
-          <p:nvPr/>
-        </p:nvCxnSpPr>
-        <p:spPr>
-          <a:xfrm>
-            <a:off x="2886075" y="6123892"/>
-            <a:ext cx="4596882" cy="0"/>
-          </a:xfrm>
-          <a:prstGeom prst="line">
-            <a:avLst/>
-          </a:prstGeom>
         </p:spPr>
         <p:style>
           <a:lnRef idx="2">
@@ -10363,13 +9447,15 @@
               </a:ext>
             </a:extLst>
           </p:cNvPr>
-          <p:cNvCxnSpPr/>
+          <p:cNvCxnSpPr>
+            <a:cxnSpLocks/>
+          </p:cNvCxnSpPr>
           <p:nvPr/>
         </p:nvCxnSpPr>
         <p:spPr>
           <a:xfrm>
-            <a:off x="3026461" y="6205099"/>
-            <a:ext cx="6973078" cy="0"/>
+            <a:off x="5885190" y="4761566"/>
+            <a:ext cx="4121765" cy="0"/>
           </a:xfrm>
           <a:prstGeom prst="line">
             <a:avLst/>
@@ -10406,44 +9492,8 @@
         </p:nvCxnSpPr>
         <p:spPr>
           <a:xfrm>
-            <a:off x="3020436" y="6209904"/>
-            <a:ext cx="0" cy="313509"/>
-          </a:xfrm>
-          <a:prstGeom prst="line">
-            <a:avLst/>
-          </a:prstGeom>
-        </p:spPr>
-        <p:style>
-          <a:lnRef idx="2">
-            <a:schemeClr val="accent1"/>
-          </a:lnRef>
-          <a:fillRef idx="0">
-            <a:schemeClr val="accent1"/>
-          </a:fillRef>
-          <a:effectRef idx="1">
-            <a:schemeClr val="accent1"/>
-          </a:effectRef>
-          <a:fontRef idx="minor">
-            <a:schemeClr val="tx1"/>
-          </a:fontRef>
-        </p:style>
-      </p:cxnSp>
-      <p:cxnSp>
-        <p:nvCxnSpPr>
-          <p:cNvPr id="108" name="Straight Connector 107">
-            <a:extLst>
-              <a:ext uri="{FF2B5EF4-FFF2-40B4-BE49-F238E27FC236}">
-                <a16:creationId xmlns:a16="http://schemas.microsoft.com/office/drawing/2014/main" id="{8B94ED6B-AB9B-EEDC-7DEC-3E3578D3DFCF}"/>
-              </a:ext>
-            </a:extLst>
-          </p:cNvPr>
-          <p:cNvCxnSpPr/>
-          <p:nvPr/>
-        </p:nvCxnSpPr>
-        <p:spPr>
-          <a:xfrm>
-            <a:off x="2893539" y="6123892"/>
-            <a:ext cx="0" cy="575603"/>
+            <a:off x="5902908" y="4762568"/>
+            <a:ext cx="0" cy="437124"/>
           </a:xfrm>
           <a:prstGeom prst="line">
             <a:avLst/>
@@ -12469,6 +11519,1108 @@
           </a:fontRef>
         </p:style>
       </p:cxnSp>
+      <p:sp>
+        <p:nvSpPr>
+          <p:cNvPr id="209" name="Rectangle 208">
+            <a:extLst>
+              <a:ext uri="{FF2B5EF4-FFF2-40B4-BE49-F238E27FC236}">
+                <a16:creationId xmlns:a16="http://schemas.microsoft.com/office/drawing/2014/main" id="{7E4C1978-E959-3B8A-9B69-5A0570C1B433}"/>
+              </a:ext>
+            </a:extLst>
+          </p:cNvPr>
+          <p:cNvSpPr/>
+          <p:nvPr/>
+        </p:nvSpPr>
+        <p:spPr>
+          <a:xfrm>
+            <a:off x="4259968" y="5572927"/>
+            <a:ext cx="663423" cy="460640"/>
+          </a:xfrm>
+          <a:prstGeom prst="rect">
+            <a:avLst/>
+          </a:prstGeom>
+          <a:solidFill>
+            <a:schemeClr val="bg1"/>
+          </a:solidFill>
+        </p:spPr>
+        <p:style>
+          <a:lnRef idx="2">
+            <a:schemeClr val="accent1">
+              <a:shade val="15000"/>
+            </a:schemeClr>
+          </a:lnRef>
+          <a:fillRef idx="1">
+            <a:schemeClr val="accent1"/>
+          </a:fillRef>
+          <a:effectRef idx="0">
+            <a:schemeClr val="accent1"/>
+          </a:effectRef>
+          <a:fontRef idx="minor">
+            <a:schemeClr val="lt1"/>
+          </a:fontRef>
+        </p:style>
+        <p:txBody>
+          <a:bodyPr rtlCol="0" anchor="ctr"/>
+          <a:lstStyle/>
+          <a:p>
+            <a:pPr algn="ctr"/>
+            <a:r>
+              <a:rPr lang="en-US" dirty="0"/>
+              <a:t>PC</a:t>
+            </a:r>
+          </a:p>
+        </p:txBody>
+      </p:sp>
+      <p:sp>
+        <p:nvSpPr>
+          <p:cNvPr id="210" name="TextBox 209">
+            <a:extLst>
+              <a:ext uri="{FF2B5EF4-FFF2-40B4-BE49-F238E27FC236}">
+                <a16:creationId xmlns:a16="http://schemas.microsoft.com/office/drawing/2014/main" id="{B99D9E74-E1B6-5F46-688D-FBFA65E6AF93}"/>
+              </a:ext>
+            </a:extLst>
+          </p:cNvPr>
+          <p:cNvSpPr txBox="1"/>
+          <p:nvPr/>
+        </p:nvSpPr>
+        <p:spPr>
+          <a:xfrm>
+            <a:off x="4318876" y="5611381"/>
+            <a:ext cx="574196" cy="384721"/>
+          </a:xfrm>
+          <a:prstGeom prst="rect">
+            <a:avLst/>
+          </a:prstGeom>
+          <a:noFill/>
+        </p:spPr>
+        <p:txBody>
+          <a:bodyPr wrap="square" rtlCol="0">
+            <a:spAutoFit/>
+          </a:bodyPr>
+          <a:lstStyle/>
+          <a:p>
+            <a:pPr algn="ctr"/>
+            <a:r>
+              <a:rPr lang="en-US" sz="1000" dirty="0"/>
+              <a:t>Stall</a:t>
+            </a:r>
+          </a:p>
+          <a:p>
+            <a:pPr algn="ctr"/>
+            <a:r>
+              <a:rPr lang="en-US" sz="900" dirty="0"/>
+              <a:t>counter</a:t>
+            </a:r>
+          </a:p>
+        </p:txBody>
+      </p:sp>
+      <p:cxnSp>
+        <p:nvCxnSpPr>
+          <p:cNvPr id="211" name="Straight Arrow Connector 210">
+            <a:extLst>
+              <a:ext uri="{FF2B5EF4-FFF2-40B4-BE49-F238E27FC236}">
+                <a16:creationId xmlns:a16="http://schemas.microsoft.com/office/drawing/2014/main" id="{35A73827-A0E8-19ED-1B3D-EEA836E5E5D2}"/>
+              </a:ext>
+            </a:extLst>
+          </p:cNvPr>
+          <p:cNvCxnSpPr>
+            <a:cxnSpLocks/>
+          </p:cNvCxnSpPr>
+          <p:nvPr/>
+        </p:nvCxnSpPr>
+        <p:spPr>
+          <a:xfrm>
+            <a:off x="4030095" y="5710140"/>
+            <a:ext cx="229874" cy="0"/>
+          </a:xfrm>
+          <a:prstGeom prst="straightConnector1">
+            <a:avLst/>
+          </a:prstGeom>
+          <a:ln>
+            <a:solidFill>
+              <a:srgbClr val="FF0000"/>
+            </a:solidFill>
+            <a:tailEnd type="triangle"/>
+          </a:ln>
+        </p:spPr>
+        <p:style>
+          <a:lnRef idx="2">
+            <a:schemeClr val="accent1"/>
+          </a:lnRef>
+          <a:fillRef idx="0">
+            <a:schemeClr val="accent1"/>
+          </a:fillRef>
+          <a:effectRef idx="1">
+            <a:schemeClr val="accent1"/>
+          </a:effectRef>
+          <a:fontRef idx="minor">
+            <a:schemeClr val="tx1"/>
+          </a:fontRef>
+        </p:style>
+      </p:cxnSp>
+      <p:sp>
+        <p:nvSpPr>
+          <p:cNvPr id="212" name="Rectangle 211">
+            <a:extLst>
+              <a:ext uri="{FF2B5EF4-FFF2-40B4-BE49-F238E27FC236}">
+                <a16:creationId xmlns:a16="http://schemas.microsoft.com/office/drawing/2014/main" id="{42328FB6-6571-FA3C-8E81-028268A77042}"/>
+              </a:ext>
+            </a:extLst>
+          </p:cNvPr>
+          <p:cNvSpPr/>
+          <p:nvPr/>
+        </p:nvSpPr>
+        <p:spPr>
+          <a:xfrm>
+            <a:off x="3351306" y="5573141"/>
+            <a:ext cx="678789" cy="484706"/>
+          </a:xfrm>
+          <a:prstGeom prst="rect">
+            <a:avLst/>
+          </a:prstGeom>
+          <a:solidFill>
+            <a:schemeClr val="bg1"/>
+          </a:solidFill>
+        </p:spPr>
+        <p:style>
+          <a:lnRef idx="2">
+            <a:schemeClr val="accent1">
+              <a:shade val="15000"/>
+            </a:schemeClr>
+          </a:lnRef>
+          <a:fillRef idx="1">
+            <a:schemeClr val="accent1"/>
+          </a:fillRef>
+          <a:effectRef idx="0">
+            <a:schemeClr val="accent1"/>
+          </a:effectRef>
+          <a:fontRef idx="minor">
+            <a:schemeClr val="lt1"/>
+          </a:fontRef>
+        </p:style>
+        <p:txBody>
+          <a:bodyPr rtlCol="0" anchor="ctr"/>
+          <a:lstStyle/>
+          <a:p>
+            <a:pPr algn="ctr"/>
+            <a:r>
+              <a:rPr lang="en-US" dirty="0"/>
+              <a:t>PC</a:t>
+            </a:r>
+          </a:p>
+        </p:txBody>
+      </p:sp>
+      <p:sp>
+        <p:nvSpPr>
+          <p:cNvPr id="213" name="TextBox 212">
+            <a:extLst>
+              <a:ext uri="{FF2B5EF4-FFF2-40B4-BE49-F238E27FC236}">
+                <a16:creationId xmlns:a16="http://schemas.microsoft.com/office/drawing/2014/main" id="{3468D653-D2DB-10F8-EB42-1EF2F69D462B}"/>
+              </a:ext>
+            </a:extLst>
+          </p:cNvPr>
+          <p:cNvSpPr txBox="1"/>
+          <p:nvPr/>
+        </p:nvSpPr>
+        <p:spPr>
+          <a:xfrm>
+            <a:off x="3316652" y="5593028"/>
+            <a:ext cx="729687" cy="400110"/>
+          </a:xfrm>
+          <a:prstGeom prst="rect">
+            <a:avLst/>
+          </a:prstGeom>
+          <a:noFill/>
+        </p:spPr>
+        <p:txBody>
+          <a:bodyPr wrap="square" rtlCol="0">
+            <a:spAutoFit/>
+          </a:bodyPr>
+          <a:lstStyle/>
+          <a:p>
+            <a:pPr algn="ctr"/>
+            <a:r>
+              <a:rPr lang="en-US" sz="1000" dirty="0"/>
+              <a:t>Hazard</a:t>
+            </a:r>
+          </a:p>
+          <a:p>
+            <a:pPr algn="ctr"/>
+            <a:r>
+              <a:rPr lang="en-US" sz="1000" dirty="0"/>
+              <a:t>Detection</a:t>
+            </a:r>
+          </a:p>
+        </p:txBody>
+      </p:sp>
+      <p:cxnSp>
+        <p:nvCxnSpPr>
+          <p:cNvPr id="215" name="Straight Arrow Connector 214">
+            <a:extLst>
+              <a:ext uri="{FF2B5EF4-FFF2-40B4-BE49-F238E27FC236}">
+                <a16:creationId xmlns:a16="http://schemas.microsoft.com/office/drawing/2014/main" id="{2F2A33F8-388E-3212-42F2-F316A4DCC9A2}"/>
+              </a:ext>
+            </a:extLst>
+          </p:cNvPr>
+          <p:cNvCxnSpPr>
+            <a:cxnSpLocks/>
+          </p:cNvCxnSpPr>
+          <p:nvPr/>
+        </p:nvCxnSpPr>
+        <p:spPr>
+          <a:xfrm>
+            <a:off x="2909696" y="5929325"/>
+            <a:ext cx="442253" cy="0"/>
+          </a:xfrm>
+          <a:prstGeom prst="straightConnector1">
+            <a:avLst/>
+          </a:prstGeom>
+          <a:ln>
+            <a:solidFill>
+              <a:srgbClr val="FF0000"/>
+            </a:solidFill>
+            <a:tailEnd type="triangle"/>
+          </a:ln>
+        </p:spPr>
+        <p:style>
+          <a:lnRef idx="2">
+            <a:schemeClr val="accent1"/>
+          </a:lnRef>
+          <a:fillRef idx="0">
+            <a:schemeClr val="accent1"/>
+          </a:fillRef>
+          <a:effectRef idx="1">
+            <a:schemeClr val="accent1"/>
+          </a:effectRef>
+          <a:fontRef idx="minor">
+            <a:schemeClr val="tx1"/>
+          </a:fontRef>
+        </p:style>
+      </p:cxnSp>
+      <p:cxnSp>
+        <p:nvCxnSpPr>
+          <p:cNvPr id="217" name="Straight Arrow Connector 216">
+            <a:extLst>
+              <a:ext uri="{FF2B5EF4-FFF2-40B4-BE49-F238E27FC236}">
+                <a16:creationId xmlns:a16="http://schemas.microsoft.com/office/drawing/2014/main" id="{0C1B9568-C8CF-C3E1-D013-4AB3BA49E0A6}"/>
+              </a:ext>
+            </a:extLst>
+          </p:cNvPr>
+          <p:cNvCxnSpPr>
+            <a:cxnSpLocks/>
+          </p:cNvCxnSpPr>
+          <p:nvPr/>
+        </p:nvCxnSpPr>
+        <p:spPr>
+          <a:xfrm flipH="1">
+            <a:off x="4040822" y="5917227"/>
+            <a:ext cx="205614" cy="0"/>
+          </a:xfrm>
+          <a:prstGeom prst="straightConnector1">
+            <a:avLst/>
+          </a:prstGeom>
+          <a:ln>
+            <a:solidFill>
+              <a:srgbClr val="FF0000"/>
+            </a:solidFill>
+            <a:tailEnd type="triangle"/>
+          </a:ln>
+        </p:spPr>
+        <p:style>
+          <a:lnRef idx="2">
+            <a:schemeClr val="accent1"/>
+          </a:lnRef>
+          <a:fillRef idx="0">
+            <a:schemeClr val="accent1"/>
+          </a:fillRef>
+          <a:effectRef idx="1">
+            <a:schemeClr val="accent1"/>
+          </a:effectRef>
+          <a:fontRef idx="minor">
+            <a:schemeClr val="tx1"/>
+          </a:fontRef>
+        </p:style>
+      </p:cxnSp>
+      <p:cxnSp>
+        <p:nvCxnSpPr>
+          <p:cNvPr id="218" name="Straight Connector 217">
+            <a:extLst>
+              <a:ext uri="{FF2B5EF4-FFF2-40B4-BE49-F238E27FC236}">
+                <a16:creationId xmlns:a16="http://schemas.microsoft.com/office/drawing/2014/main" id="{E49846C5-8569-392B-D7EC-3272F6F2B440}"/>
+              </a:ext>
+            </a:extLst>
+          </p:cNvPr>
+          <p:cNvCxnSpPr>
+            <a:cxnSpLocks/>
+          </p:cNvCxnSpPr>
+          <p:nvPr/>
+        </p:nvCxnSpPr>
+        <p:spPr>
+          <a:xfrm>
+            <a:off x="2920808" y="5560181"/>
+            <a:ext cx="0" cy="367608"/>
+          </a:xfrm>
+          <a:prstGeom prst="line">
+            <a:avLst/>
+          </a:prstGeom>
+          <a:ln>
+            <a:solidFill>
+              <a:srgbClr val="FF0000"/>
+            </a:solidFill>
+          </a:ln>
+        </p:spPr>
+        <p:style>
+          <a:lnRef idx="2">
+            <a:schemeClr val="accent1"/>
+          </a:lnRef>
+          <a:fillRef idx="0">
+            <a:schemeClr val="accent1"/>
+          </a:fillRef>
+          <a:effectRef idx="1">
+            <a:schemeClr val="accent1"/>
+          </a:effectRef>
+          <a:fontRef idx="minor">
+            <a:schemeClr val="tx1"/>
+          </a:fontRef>
+        </p:style>
+      </p:cxnSp>
+      <p:cxnSp>
+        <p:nvCxnSpPr>
+          <p:cNvPr id="220" name="Straight Arrow Connector 219">
+            <a:extLst>
+              <a:ext uri="{FF2B5EF4-FFF2-40B4-BE49-F238E27FC236}">
+                <a16:creationId xmlns:a16="http://schemas.microsoft.com/office/drawing/2014/main" id="{BC2F36C1-D9E2-5F94-A594-FBFAAC53E660}"/>
+              </a:ext>
+            </a:extLst>
+          </p:cNvPr>
+          <p:cNvCxnSpPr>
+            <a:cxnSpLocks/>
+          </p:cNvCxnSpPr>
+          <p:nvPr/>
+        </p:nvCxnSpPr>
+        <p:spPr>
+          <a:xfrm>
+            <a:off x="3145244" y="5712432"/>
+            <a:ext cx="211703" cy="0"/>
+          </a:xfrm>
+          <a:prstGeom prst="straightConnector1">
+            <a:avLst/>
+          </a:prstGeom>
+          <a:ln>
+            <a:solidFill>
+              <a:srgbClr val="FF0000"/>
+            </a:solidFill>
+            <a:tailEnd type="triangle"/>
+          </a:ln>
+        </p:spPr>
+        <p:style>
+          <a:lnRef idx="2">
+            <a:schemeClr val="accent1"/>
+          </a:lnRef>
+          <a:fillRef idx="0">
+            <a:schemeClr val="accent1"/>
+          </a:fillRef>
+          <a:effectRef idx="1">
+            <a:schemeClr val="accent1"/>
+          </a:effectRef>
+          <a:fontRef idx="minor">
+            <a:schemeClr val="tx1"/>
+          </a:fontRef>
+        </p:style>
+      </p:cxnSp>
+      <p:cxnSp>
+        <p:nvCxnSpPr>
+          <p:cNvPr id="221" name="Straight Connector 220">
+            <a:extLst>
+              <a:ext uri="{FF2B5EF4-FFF2-40B4-BE49-F238E27FC236}">
+                <a16:creationId xmlns:a16="http://schemas.microsoft.com/office/drawing/2014/main" id="{6FB6D13F-84F6-B220-EF66-A111BDCAEC0A}"/>
+              </a:ext>
+            </a:extLst>
+          </p:cNvPr>
+          <p:cNvCxnSpPr>
+            <a:cxnSpLocks/>
+          </p:cNvCxnSpPr>
+          <p:nvPr/>
+        </p:nvCxnSpPr>
+        <p:spPr>
+          <a:xfrm flipH="1">
+            <a:off x="2511119" y="5576977"/>
+            <a:ext cx="398618" cy="0"/>
+          </a:xfrm>
+          <a:prstGeom prst="line">
+            <a:avLst/>
+          </a:prstGeom>
+          <a:ln>
+            <a:solidFill>
+              <a:srgbClr val="FF0000"/>
+            </a:solidFill>
+          </a:ln>
+        </p:spPr>
+        <p:style>
+          <a:lnRef idx="2">
+            <a:schemeClr val="accent1"/>
+          </a:lnRef>
+          <a:fillRef idx="0">
+            <a:schemeClr val="accent1"/>
+          </a:fillRef>
+          <a:effectRef idx="1">
+            <a:schemeClr val="accent1"/>
+          </a:effectRef>
+          <a:fontRef idx="minor">
+            <a:schemeClr val="tx1"/>
+          </a:fontRef>
+        </p:style>
+      </p:cxnSp>
+      <p:cxnSp>
+        <p:nvCxnSpPr>
+          <p:cNvPr id="222" name="Straight Connector 221">
+            <a:extLst>
+              <a:ext uri="{FF2B5EF4-FFF2-40B4-BE49-F238E27FC236}">
+                <a16:creationId xmlns:a16="http://schemas.microsoft.com/office/drawing/2014/main" id="{93DC441A-8F48-0B1E-E235-4F3A44A86932}"/>
+              </a:ext>
+            </a:extLst>
+          </p:cNvPr>
+          <p:cNvCxnSpPr>
+            <a:cxnSpLocks/>
+          </p:cNvCxnSpPr>
+          <p:nvPr/>
+        </p:nvCxnSpPr>
+        <p:spPr>
+          <a:xfrm>
+            <a:off x="3136484" y="5250897"/>
+            <a:ext cx="0" cy="470946"/>
+          </a:xfrm>
+          <a:prstGeom prst="line">
+            <a:avLst/>
+          </a:prstGeom>
+          <a:ln>
+            <a:solidFill>
+              <a:srgbClr val="FF0000"/>
+            </a:solidFill>
+          </a:ln>
+        </p:spPr>
+        <p:style>
+          <a:lnRef idx="2">
+            <a:schemeClr val="accent1"/>
+          </a:lnRef>
+          <a:fillRef idx="0">
+            <a:schemeClr val="accent1"/>
+          </a:fillRef>
+          <a:effectRef idx="1">
+            <a:schemeClr val="accent1"/>
+          </a:effectRef>
+          <a:fontRef idx="minor">
+            <a:schemeClr val="tx1"/>
+          </a:fontRef>
+        </p:style>
+      </p:cxnSp>
+      <p:cxnSp>
+        <p:nvCxnSpPr>
+          <p:cNvPr id="224" name="Straight Connector 223">
+            <a:extLst>
+              <a:ext uri="{FF2B5EF4-FFF2-40B4-BE49-F238E27FC236}">
+                <a16:creationId xmlns:a16="http://schemas.microsoft.com/office/drawing/2014/main" id="{A611D7C8-EA59-07B6-6DE0-08A00908356E}"/>
+              </a:ext>
+            </a:extLst>
+          </p:cNvPr>
+          <p:cNvCxnSpPr>
+            <a:cxnSpLocks/>
+          </p:cNvCxnSpPr>
+          <p:nvPr/>
+        </p:nvCxnSpPr>
+        <p:spPr>
+          <a:xfrm>
+            <a:off x="2759850" y="5241548"/>
+            <a:ext cx="383938" cy="0"/>
+          </a:xfrm>
+          <a:prstGeom prst="line">
+            <a:avLst/>
+          </a:prstGeom>
+          <a:ln>
+            <a:solidFill>
+              <a:srgbClr val="FF0000"/>
+            </a:solidFill>
+          </a:ln>
+        </p:spPr>
+        <p:style>
+          <a:lnRef idx="2">
+            <a:schemeClr val="accent1"/>
+          </a:lnRef>
+          <a:fillRef idx="0">
+            <a:schemeClr val="accent1"/>
+          </a:fillRef>
+          <a:effectRef idx="1">
+            <a:schemeClr val="accent1"/>
+          </a:effectRef>
+          <a:fontRef idx="minor">
+            <a:schemeClr val="tx1"/>
+          </a:fontRef>
+        </p:style>
+      </p:cxnSp>
+      <p:cxnSp>
+        <p:nvCxnSpPr>
+          <p:cNvPr id="225" name="Straight Arrow Connector 224">
+            <a:extLst>
+              <a:ext uri="{FF2B5EF4-FFF2-40B4-BE49-F238E27FC236}">
+                <a16:creationId xmlns:a16="http://schemas.microsoft.com/office/drawing/2014/main" id="{4FA97CD2-A4F3-8569-BF3A-77C3076814AA}"/>
+              </a:ext>
+            </a:extLst>
+          </p:cNvPr>
+          <p:cNvCxnSpPr>
+            <a:cxnSpLocks/>
+          </p:cNvCxnSpPr>
+          <p:nvPr/>
+        </p:nvCxnSpPr>
+        <p:spPr>
+          <a:xfrm flipV="1">
+            <a:off x="4124761" y="5481780"/>
+            <a:ext cx="0" cy="225402"/>
+          </a:xfrm>
+          <a:prstGeom prst="straightConnector1">
+            <a:avLst/>
+          </a:prstGeom>
+          <a:ln>
+            <a:solidFill>
+              <a:srgbClr val="FF0000"/>
+            </a:solidFill>
+            <a:tailEnd type="triangle"/>
+          </a:ln>
+        </p:spPr>
+        <p:style>
+          <a:lnRef idx="2">
+            <a:schemeClr val="accent1"/>
+          </a:lnRef>
+          <a:fillRef idx="0">
+            <a:schemeClr val="accent1"/>
+          </a:fillRef>
+          <a:effectRef idx="1">
+            <a:schemeClr val="accent1"/>
+          </a:effectRef>
+          <a:fontRef idx="minor">
+            <a:schemeClr val="tx1"/>
+          </a:fontRef>
+        </p:style>
+      </p:cxnSp>
+      <p:cxnSp>
+        <p:nvCxnSpPr>
+          <p:cNvPr id="226" name="Straight Arrow Connector 225">
+            <a:extLst>
+              <a:ext uri="{FF2B5EF4-FFF2-40B4-BE49-F238E27FC236}">
+                <a16:creationId xmlns:a16="http://schemas.microsoft.com/office/drawing/2014/main" id="{13244B44-D83A-17F1-89B4-8EB805ADF839}"/>
+              </a:ext>
+            </a:extLst>
+          </p:cNvPr>
+          <p:cNvCxnSpPr>
+            <a:cxnSpLocks/>
+          </p:cNvCxnSpPr>
+          <p:nvPr/>
+        </p:nvCxnSpPr>
+        <p:spPr>
+          <a:xfrm>
+            <a:off x="4172823" y="5931908"/>
+            <a:ext cx="0" cy="402752"/>
+          </a:xfrm>
+          <a:prstGeom prst="straightConnector1">
+            <a:avLst/>
+          </a:prstGeom>
+          <a:ln>
+            <a:solidFill>
+              <a:srgbClr val="FF0000"/>
+            </a:solidFill>
+            <a:tailEnd type="triangle"/>
+          </a:ln>
+        </p:spPr>
+        <p:style>
+          <a:lnRef idx="2">
+            <a:schemeClr val="accent1"/>
+          </a:lnRef>
+          <a:fillRef idx="0">
+            <a:schemeClr val="accent1"/>
+          </a:fillRef>
+          <a:effectRef idx="1">
+            <a:schemeClr val="accent1"/>
+          </a:effectRef>
+          <a:fontRef idx="minor">
+            <a:schemeClr val="tx1"/>
+          </a:fontRef>
+        </p:style>
+      </p:cxnSp>
+      <p:cxnSp>
+        <p:nvCxnSpPr>
+          <p:cNvPr id="228" name="Straight Connector 227">
+            <a:extLst>
+              <a:ext uri="{FF2B5EF4-FFF2-40B4-BE49-F238E27FC236}">
+                <a16:creationId xmlns:a16="http://schemas.microsoft.com/office/drawing/2014/main" id="{2FA12D39-0FA2-ABBD-EACC-E063F56B5583}"/>
+              </a:ext>
+            </a:extLst>
+          </p:cNvPr>
+          <p:cNvCxnSpPr/>
+          <p:nvPr/>
+        </p:nvCxnSpPr>
+        <p:spPr>
+          <a:xfrm flipH="1">
+            <a:off x="2952806" y="5177183"/>
+            <a:ext cx="77899" cy="129540"/>
+          </a:xfrm>
+          <a:prstGeom prst="line">
+            <a:avLst/>
+          </a:prstGeom>
+        </p:spPr>
+        <p:style>
+          <a:lnRef idx="2">
+            <a:schemeClr val="accent1"/>
+          </a:lnRef>
+          <a:fillRef idx="0">
+            <a:schemeClr val="accent1"/>
+          </a:fillRef>
+          <a:effectRef idx="1">
+            <a:schemeClr val="accent1"/>
+          </a:effectRef>
+          <a:fontRef idx="minor">
+            <a:schemeClr val="tx1"/>
+          </a:fontRef>
+        </p:style>
+      </p:cxnSp>
+      <p:sp>
+        <p:nvSpPr>
+          <p:cNvPr id="232" name="TextBox 231">
+            <a:extLst>
+              <a:ext uri="{FF2B5EF4-FFF2-40B4-BE49-F238E27FC236}">
+                <a16:creationId xmlns:a16="http://schemas.microsoft.com/office/drawing/2014/main" id="{84B6D813-B5DE-D1FC-AF80-525F92C8F7F8}"/>
+              </a:ext>
+            </a:extLst>
+          </p:cNvPr>
+          <p:cNvSpPr txBox="1"/>
+          <p:nvPr/>
+        </p:nvSpPr>
+        <p:spPr>
+          <a:xfrm>
+            <a:off x="2834608" y="5072614"/>
+            <a:ext cx="245580" cy="230832"/>
+          </a:xfrm>
+          <a:prstGeom prst="rect">
+            <a:avLst/>
+          </a:prstGeom>
+          <a:noFill/>
+        </p:spPr>
+        <p:txBody>
+          <a:bodyPr wrap="none" rtlCol="0">
+            <a:spAutoFit/>
+          </a:bodyPr>
+          <a:lstStyle/>
+          <a:p>
+            <a:pPr algn="ctr"/>
+            <a:r>
+              <a:rPr lang="en-US" sz="900" dirty="0"/>
+              <a:t>4</a:t>
+            </a:r>
+          </a:p>
+        </p:txBody>
+      </p:sp>
+      <p:sp>
+        <p:nvSpPr>
+          <p:cNvPr id="233" name="Rectangle 232">
+            <a:extLst>
+              <a:ext uri="{FF2B5EF4-FFF2-40B4-BE49-F238E27FC236}">
+                <a16:creationId xmlns:a16="http://schemas.microsoft.com/office/drawing/2014/main" id="{E46D487D-09B4-2769-C34D-554786351A6B}"/>
+              </a:ext>
+            </a:extLst>
+          </p:cNvPr>
+          <p:cNvSpPr/>
+          <p:nvPr/>
+        </p:nvSpPr>
+        <p:spPr>
+          <a:xfrm>
+            <a:off x="4027858" y="6344690"/>
+            <a:ext cx="663423" cy="460640"/>
+          </a:xfrm>
+          <a:prstGeom prst="rect">
+            <a:avLst/>
+          </a:prstGeom>
+          <a:solidFill>
+            <a:schemeClr val="bg1"/>
+          </a:solidFill>
+        </p:spPr>
+        <p:style>
+          <a:lnRef idx="2">
+            <a:schemeClr val="accent1">
+              <a:shade val="15000"/>
+            </a:schemeClr>
+          </a:lnRef>
+          <a:fillRef idx="1">
+            <a:schemeClr val="accent1"/>
+          </a:fillRef>
+          <a:effectRef idx="0">
+            <a:schemeClr val="accent1"/>
+          </a:effectRef>
+          <a:fontRef idx="minor">
+            <a:schemeClr val="lt1"/>
+          </a:fontRef>
+        </p:style>
+        <p:txBody>
+          <a:bodyPr rtlCol="0" anchor="ctr"/>
+          <a:lstStyle/>
+          <a:p>
+            <a:pPr algn="ctr"/>
+            <a:r>
+              <a:rPr lang="en-US" dirty="0"/>
+              <a:t>PC</a:t>
+            </a:r>
+          </a:p>
+        </p:txBody>
+      </p:sp>
+      <p:sp>
+        <p:nvSpPr>
+          <p:cNvPr id="234" name="TextBox 233">
+            <a:extLst>
+              <a:ext uri="{FF2B5EF4-FFF2-40B4-BE49-F238E27FC236}">
+                <a16:creationId xmlns:a16="http://schemas.microsoft.com/office/drawing/2014/main" id="{B03E2FCB-F4FA-D322-14B8-FB5E1F9573B3}"/>
+              </a:ext>
+            </a:extLst>
+          </p:cNvPr>
+          <p:cNvSpPr txBox="1"/>
+          <p:nvPr/>
+        </p:nvSpPr>
+        <p:spPr>
+          <a:xfrm>
+            <a:off x="4505477" y="6442196"/>
+            <a:ext cx="194710" cy="246221"/>
+          </a:xfrm>
+          <a:prstGeom prst="rect">
+            <a:avLst/>
+          </a:prstGeom>
+          <a:noFill/>
+        </p:spPr>
+        <p:txBody>
+          <a:bodyPr wrap="square" rtlCol="0">
+            <a:spAutoFit/>
+          </a:bodyPr>
+          <a:lstStyle/>
+          <a:p>
+            <a:pPr algn="ctr"/>
+            <a:r>
+              <a:rPr lang="en-US" sz="1000" dirty="0"/>
+              <a:t>&gt;</a:t>
+            </a:r>
+            <a:endParaRPr lang="en-US" sz="900" dirty="0"/>
+          </a:p>
+        </p:txBody>
+      </p:sp>
+      <p:cxnSp>
+        <p:nvCxnSpPr>
+          <p:cNvPr id="237" name="Straight Arrow Connector 236">
+            <a:extLst>
+              <a:ext uri="{FF2B5EF4-FFF2-40B4-BE49-F238E27FC236}">
+                <a16:creationId xmlns:a16="http://schemas.microsoft.com/office/drawing/2014/main" id="{657E1736-86D8-4C89-8125-43EFDE81B0A7}"/>
+              </a:ext>
+            </a:extLst>
+          </p:cNvPr>
+          <p:cNvCxnSpPr>
+            <a:cxnSpLocks/>
+          </p:cNvCxnSpPr>
+          <p:nvPr/>
+        </p:nvCxnSpPr>
+        <p:spPr>
+          <a:xfrm>
+            <a:off x="4696548" y="6575010"/>
+            <a:ext cx="229874" cy="0"/>
+          </a:xfrm>
+          <a:prstGeom prst="straightConnector1">
+            <a:avLst/>
+          </a:prstGeom>
+          <a:ln>
+            <a:solidFill>
+              <a:srgbClr val="FF0000"/>
+            </a:solidFill>
+            <a:tailEnd type="triangle"/>
+          </a:ln>
+        </p:spPr>
+        <p:style>
+          <a:lnRef idx="2">
+            <a:schemeClr val="accent1"/>
+          </a:lnRef>
+          <a:fillRef idx="0">
+            <a:schemeClr val="accent1"/>
+          </a:fillRef>
+          <a:effectRef idx="1">
+            <a:schemeClr val="accent1"/>
+          </a:effectRef>
+          <a:fontRef idx="minor">
+            <a:schemeClr val="tx1"/>
+          </a:fontRef>
+        </p:style>
+      </p:cxnSp>
+      <p:cxnSp>
+        <p:nvCxnSpPr>
+          <p:cNvPr id="241" name="Straight Arrow Connector 240">
+            <a:extLst>
+              <a:ext uri="{FF2B5EF4-FFF2-40B4-BE49-F238E27FC236}">
+                <a16:creationId xmlns:a16="http://schemas.microsoft.com/office/drawing/2014/main" id="{CFF1441C-A871-C028-33DF-68E89133CAC3}"/>
+              </a:ext>
+            </a:extLst>
+          </p:cNvPr>
+          <p:cNvCxnSpPr>
+            <a:cxnSpLocks/>
+          </p:cNvCxnSpPr>
+          <p:nvPr/>
+        </p:nvCxnSpPr>
+        <p:spPr>
+          <a:xfrm>
+            <a:off x="4566636" y="6234492"/>
+            <a:ext cx="0" cy="100168"/>
+          </a:xfrm>
+          <a:prstGeom prst="straightConnector1">
+            <a:avLst/>
+          </a:prstGeom>
+          <a:ln>
+            <a:solidFill>
+              <a:srgbClr val="FF0000"/>
+            </a:solidFill>
+            <a:tailEnd type="triangle"/>
+          </a:ln>
+        </p:spPr>
+        <p:style>
+          <a:lnRef idx="2">
+            <a:schemeClr val="accent1"/>
+          </a:lnRef>
+          <a:fillRef idx="0">
+            <a:schemeClr val="accent1"/>
+          </a:fillRef>
+          <a:effectRef idx="1">
+            <a:schemeClr val="accent1"/>
+          </a:effectRef>
+          <a:fontRef idx="minor">
+            <a:schemeClr val="tx1"/>
+          </a:fontRef>
+        </p:style>
+      </p:cxnSp>
+      <p:sp>
+        <p:nvSpPr>
+          <p:cNvPr id="242" name="TextBox 241">
+            <a:extLst>
+              <a:ext uri="{FF2B5EF4-FFF2-40B4-BE49-F238E27FC236}">
+                <a16:creationId xmlns:a16="http://schemas.microsoft.com/office/drawing/2014/main" id="{5CF4424D-C27A-0FCF-199D-B10372DC54C3}"/>
+              </a:ext>
+            </a:extLst>
+          </p:cNvPr>
+          <p:cNvSpPr txBox="1"/>
+          <p:nvPr/>
+        </p:nvSpPr>
+        <p:spPr>
+          <a:xfrm>
+            <a:off x="4443371" y="6038820"/>
+            <a:ext cx="245580" cy="230832"/>
+          </a:xfrm>
+          <a:prstGeom prst="rect">
+            <a:avLst/>
+          </a:prstGeom>
+          <a:noFill/>
+        </p:spPr>
+        <p:txBody>
+          <a:bodyPr wrap="none" rtlCol="0">
+            <a:spAutoFit/>
+          </a:bodyPr>
+          <a:lstStyle/>
+          <a:p>
+            <a:pPr algn="ctr"/>
+            <a:r>
+              <a:rPr lang="en-US" sz="900" dirty="0"/>
+              <a:t>0</a:t>
+            </a:r>
+          </a:p>
+        </p:txBody>
+      </p:sp>
+      <p:sp>
+        <p:nvSpPr>
+          <p:cNvPr id="244" name="TextBox 243">
+            <a:extLst>
+              <a:ext uri="{FF2B5EF4-FFF2-40B4-BE49-F238E27FC236}">
+                <a16:creationId xmlns:a16="http://schemas.microsoft.com/office/drawing/2014/main" id="{7F7540FB-45AD-3BC3-48E6-D125DD8550E7}"/>
+              </a:ext>
+            </a:extLst>
+          </p:cNvPr>
+          <p:cNvSpPr txBox="1"/>
+          <p:nvPr/>
+        </p:nvSpPr>
+        <p:spPr>
+          <a:xfrm>
+            <a:off x="4802612" y="6461559"/>
+            <a:ext cx="574196" cy="246221"/>
+          </a:xfrm>
+          <a:prstGeom prst="rect">
+            <a:avLst/>
+          </a:prstGeom>
+          <a:noFill/>
+        </p:spPr>
+        <p:txBody>
+          <a:bodyPr wrap="square" rtlCol="0">
+            <a:spAutoFit/>
+          </a:bodyPr>
+          <a:lstStyle/>
+          <a:p>
+            <a:pPr algn="ctr"/>
+            <a:r>
+              <a:rPr lang="en-US" sz="1000" dirty="0"/>
+              <a:t>Stall</a:t>
+            </a:r>
+          </a:p>
+        </p:txBody>
+      </p:sp>
+      <p:sp>
+        <p:nvSpPr>
+          <p:cNvPr id="245" name="TextBox 244">
+            <a:extLst>
+              <a:ext uri="{FF2B5EF4-FFF2-40B4-BE49-F238E27FC236}">
+                <a16:creationId xmlns:a16="http://schemas.microsoft.com/office/drawing/2014/main" id="{6F693865-D421-FB3F-F617-69C8DFB74DDA}"/>
+              </a:ext>
+            </a:extLst>
+          </p:cNvPr>
+          <p:cNvSpPr txBox="1"/>
+          <p:nvPr/>
+        </p:nvSpPr>
+        <p:spPr>
+          <a:xfrm>
+            <a:off x="3408450" y="6047112"/>
+            <a:ext cx="861489" cy="246221"/>
+          </a:xfrm>
+          <a:prstGeom prst="rect">
+            <a:avLst/>
+          </a:prstGeom>
+          <a:noFill/>
+        </p:spPr>
+        <p:txBody>
+          <a:bodyPr wrap="square" rtlCol="0">
+            <a:spAutoFit/>
+          </a:bodyPr>
+          <a:lstStyle/>
+          <a:p>
+            <a:pPr algn="ctr"/>
+            <a:r>
+              <a:rPr lang="en-US" sz="1000" dirty="0" err="1"/>
+              <a:t>stall_count</a:t>
+            </a:r>
+            <a:endParaRPr lang="en-US" sz="1000" dirty="0"/>
+          </a:p>
+        </p:txBody>
+      </p:sp>
+      <p:sp>
+        <p:nvSpPr>
+          <p:cNvPr id="246" name="TextBox 245">
+            <a:extLst>
+              <a:ext uri="{FF2B5EF4-FFF2-40B4-BE49-F238E27FC236}">
+                <a16:creationId xmlns:a16="http://schemas.microsoft.com/office/drawing/2014/main" id="{3BA26EF9-D46A-45DC-70BA-21364891CB27}"/>
+              </a:ext>
+            </a:extLst>
+          </p:cNvPr>
+          <p:cNvSpPr txBox="1"/>
+          <p:nvPr/>
+        </p:nvSpPr>
+        <p:spPr>
+          <a:xfrm>
+            <a:off x="3685159" y="5311002"/>
+            <a:ext cx="861489" cy="246221"/>
+          </a:xfrm>
+          <a:prstGeom prst="rect">
+            <a:avLst/>
+          </a:prstGeom>
+          <a:noFill/>
+        </p:spPr>
+        <p:txBody>
+          <a:bodyPr wrap="square" rtlCol="0">
+            <a:spAutoFit/>
+          </a:bodyPr>
+          <a:lstStyle/>
+          <a:p>
+            <a:pPr algn="ctr"/>
+            <a:r>
+              <a:rPr lang="en-US" sz="1000" dirty="0" err="1"/>
+              <a:t>start_stall</a:t>
+            </a:r>
+            <a:endParaRPr lang="en-US" sz="1000" dirty="0"/>
+          </a:p>
+        </p:txBody>
+      </p:sp>
+      <p:cxnSp>
+        <p:nvCxnSpPr>
+          <p:cNvPr id="12" name="Straight Arrow Connector 11">
+            <a:extLst>
+              <a:ext uri="{FF2B5EF4-FFF2-40B4-BE49-F238E27FC236}">
+                <a16:creationId xmlns:a16="http://schemas.microsoft.com/office/drawing/2014/main" id="{C104EDAA-FD8A-4089-C218-104118D04C57}"/>
+              </a:ext>
+            </a:extLst>
+          </p:cNvPr>
+          <p:cNvCxnSpPr>
+            <a:cxnSpLocks/>
+          </p:cNvCxnSpPr>
+          <p:nvPr/>
+        </p:nvCxnSpPr>
+        <p:spPr>
+          <a:xfrm>
+            <a:off x="3472911" y="6051625"/>
+            <a:ext cx="0" cy="402752"/>
+          </a:xfrm>
+          <a:prstGeom prst="straightConnector1">
+            <a:avLst/>
+          </a:prstGeom>
+          <a:ln>
+            <a:solidFill>
+              <a:srgbClr val="FF0000"/>
+            </a:solidFill>
+            <a:tailEnd type="triangle"/>
+          </a:ln>
+        </p:spPr>
+        <p:style>
+          <a:lnRef idx="2">
+            <a:schemeClr val="accent1"/>
+          </a:lnRef>
+          <a:fillRef idx="0">
+            <a:schemeClr val="accent1"/>
+          </a:fillRef>
+          <a:effectRef idx="1">
+            <a:schemeClr val="accent1"/>
+          </a:effectRef>
+          <a:fontRef idx="minor">
+            <a:schemeClr val="tx1"/>
+          </a:fontRef>
+        </p:style>
+      </p:cxnSp>
+      <p:sp>
+        <p:nvSpPr>
+          <p:cNvPr id="17" name="TextBox 16">
+            <a:extLst>
+              <a:ext uri="{FF2B5EF4-FFF2-40B4-BE49-F238E27FC236}">
+                <a16:creationId xmlns:a16="http://schemas.microsoft.com/office/drawing/2014/main" id="{DD23CE11-915B-B2E0-552F-137C75A7E9C7}"/>
+              </a:ext>
+            </a:extLst>
+          </p:cNvPr>
+          <p:cNvSpPr txBox="1"/>
+          <p:nvPr/>
+        </p:nvSpPr>
+        <p:spPr>
+          <a:xfrm>
+            <a:off x="2990194" y="6420855"/>
+            <a:ext cx="935914" cy="246221"/>
+          </a:xfrm>
+          <a:prstGeom prst="rect">
+            <a:avLst/>
+          </a:prstGeom>
+          <a:noFill/>
+        </p:spPr>
+        <p:txBody>
+          <a:bodyPr wrap="square" rtlCol="0">
+            <a:spAutoFit/>
+          </a:bodyPr>
+          <a:lstStyle/>
+          <a:p>
+            <a:pPr algn="ctr"/>
+            <a:r>
+              <a:rPr lang="en-US" sz="1000" dirty="0" err="1"/>
+              <a:t>double_stall</a:t>
+            </a:r>
+            <a:endParaRPr lang="en-US" sz="1000" dirty="0"/>
+          </a:p>
+        </p:txBody>
+      </p:sp>
     </p:spTree>
     <p:extLst>
       <p:ext uri="{BB962C8B-B14F-4D97-AF65-F5344CB8AC3E}">
@@ -12795,4 +12947,10 @@
     </a:ext>
   </a:extLst>
 </a:theme>
+</file>
+
+<file path=docMetadata/LabelInfo.xml><?xml version="1.0" encoding="utf-8"?>
+<clbl:labelList xmlns:clbl="http://schemas.microsoft.com/office/2020/mipLabelMetadata">
+  <clbl:label id="{7ab80a06-f029-45c0-84d1-7dad19ce3c61}" enabled="0" method="" siteId="{7ab80a06-f029-45c0-84d1-7dad19ce3c61}" removed="1"/>
+</clbl:labelList>
 </file>
--- a/RISCVstage4.pptx
+++ b/RISCVstage4.pptx
@@ -115,7 +115,7 @@
 <file path=ppt/revisionInfo.xml><?xml version="1.0" encoding="utf-8"?>
 <p1510:revInfo xmlns:a="http://schemas.openxmlformats.org/drawingml/2006/main" xmlns:r="http://schemas.openxmlformats.org/officeDocument/2006/relationships" xmlns:p1510="http://schemas.microsoft.com/office/powerpoint/2015/10/main">
   <p1510:revLst>
-    <p1510:client id="{F09230DD-206D-486E-A6AF-D29809E02079}" v="5" dt="2026-04-18T20:27:38.873"/>
+    <p1510:client id="{712416A8-775E-4105-82CF-FFB8B1BFA3D7}" v="3" dt="2026-05-08T17:34:09.711"/>
   </p1510:revLst>
 </p1510:revInfo>
 </file>
@@ -125,12 +125,12 @@
   <pc:docChgLst>
     <pc:chgData name="York, George W CIV USAF USAFA DF/DFEC" userId="1fb5875a-4594-4db2-80fb-f0db3de11280" providerId="ADAL" clId="{09330963-85FD-4C99-A81B-94D0EE5CFFEB}"/>
     <pc:docChg chg="undo custSel modSld">
-      <pc:chgData name="York, George W CIV USAF USAFA DF/DFEC" userId="1fb5875a-4594-4db2-80fb-f0db3de11280" providerId="ADAL" clId="{09330963-85FD-4C99-A81B-94D0EE5CFFEB}" dt="2026-04-18T20:27:56.696" v="94" actId="14100"/>
+      <pc:chgData name="York, George W CIV USAF USAFA DF/DFEC" userId="1fb5875a-4594-4db2-80fb-f0db3de11280" providerId="ADAL" clId="{09330963-85FD-4C99-A81B-94D0EE5CFFEB}" dt="2026-05-08T17:39:28.055" v="138" actId="208"/>
       <pc:docMkLst>
         <pc:docMk/>
       </pc:docMkLst>
       <pc:sldChg chg="addSp delSp modSp mod">
-        <pc:chgData name="York, George W CIV USAF USAFA DF/DFEC" userId="1fb5875a-4594-4db2-80fb-f0db3de11280" providerId="ADAL" clId="{09330963-85FD-4C99-A81B-94D0EE5CFFEB}" dt="2026-04-18T20:27:56.696" v="94" actId="14100"/>
+        <pc:chgData name="York, George W CIV USAF USAFA DF/DFEC" userId="1fb5875a-4594-4db2-80fb-f0db3de11280" providerId="ADAL" clId="{09330963-85FD-4C99-A81B-94D0EE5CFFEB}" dt="2026-05-08T17:39:28.055" v="138" actId="208"/>
         <pc:sldMkLst>
           <pc:docMk/>
           <pc:sldMk cId="1501170907" sldId="256"/>
@@ -143,12 +143,44 @@
             <ac:spMk id="2" creationId="{6AB6AF60-D791-21FB-8A86-0D04258DAA85}"/>
           </ac:spMkLst>
         </pc:spChg>
+        <pc:spChg chg="mod">
+          <ac:chgData name="York, George W CIV USAF USAFA DF/DFEC" userId="1fb5875a-4594-4db2-80fb-f0db3de11280" providerId="ADAL" clId="{09330963-85FD-4C99-A81B-94D0EE5CFFEB}" dt="2026-05-08T17:38:01.631" v="131" actId="1076"/>
+          <ac:spMkLst>
+            <pc:docMk/>
+            <pc:sldMk cId="1501170907" sldId="256"/>
+            <ac:spMk id="5" creationId="{DB224797-49E0-B67E-FC03-3154A41834EF}"/>
+          </ac:spMkLst>
+        </pc:spChg>
         <pc:spChg chg="add mod">
           <ac:chgData name="York, George W CIV USAF USAFA DF/DFEC" userId="1fb5875a-4594-4db2-80fb-f0db3de11280" providerId="ADAL" clId="{09330963-85FD-4C99-A81B-94D0EE5CFFEB}" dt="2026-04-18T20:27:56.696" v="94" actId="14100"/>
           <ac:spMkLst>
             <pc:docMk/>
             <pc:sldMk cId="1501170907" sldId="256"/>
             <ac:spMk id="17" creationId="{DD23CE11-915B-B2E0-552F-137C75A7E9C7}"/>
+          </ac:spMkLst>
+        </pc:spChg>
+        <pc:spChg chg="add mod">
+          <ac:chgData name="York, George W CIV USAF USAFA DF/DFEC" userId="1fb5875a-4594-4db2-80fb-f0db3de11280" providerId="ADAL" clId="{09330963-85FD-4C99-A81B-94D0EE5CFFEB}" dt="2026-05-08T17:32:39.522" v="100" actId="1076"/>
+          <ac:spMkLst>
+            <pc:docMk/>
+            <pc:sldMk cId="1501170907" sldId="256"/>
+            <ac:spMk id="32" creationId="{2143C07A-7BD3-285F-779B-EA5E4E2370C1}"/>
+          </ac:spMkLst>
+        </pc:spChg>
+        <pc:spChg chg="add mod">
+          <ac:chgData name="York, George W CIV USAF USAFA DF/DFEC" userId="1fb5875a-4594-4db2-80fb-f0db3de11280" providerId="ADAL" clId="{09330963-85FD-4C99-A81B-94D0EE5CFFEB}" dt="2026-05-08T17:32:39.522" v="100" actId="1076"/>
+          <ac:spMkLst>
+            <pc:docMk/>
+            <pc:sldMk cId="1501170907" sldId="256"/>
+            <ac:spMk id="34" creationId="{B6011141-02A1-8CC5-681B-B9793C2C8CE0}"/>
+          </ac:spMkLst>
+        </pc:spChg>
+        <pc:spChg chg="add mod">
+          <ac:chgData name="York, George W CIV USAF USAFA DF/DFEC" userId="1fb5875a-4594-4db2-80fb-f0db3de11280" providerId="ADAL" clId="{09330963-85FD-4C99-A81B-94D0EE5CFFEB}" dt="2026-05-08T17:32:39.522" v="100" actId="1076"/>
+          <ac:spMkLst>
+            <pc:docMk/>
+            <pc:sldMk cId="1501170907" sldId="256"/>
+            <ac:spMk id="35" creationId="{B00F8394-6420-6E0A-2BDA-EFD3CDF8A0E0}"/>
           </ac:spMkLst>
         </pc:spChg>
         <pc:spChg chg="mod">
@@ -165,6 +197,158 @@
             <pc:docMk/>
             <pc:sldMk cId="1501170907" sldId="256"/>
             <ac:spMk id="39" creationId="{6174F677-2B47-463D-4071-9231A2EAA9DF}"/>
+          </ac:spMkLst>
+        </pc:spChg>
+        <pc:spChg chg="add mod">
+          <ac:chgData name="York, George W CIV USAF USAFA DF/DFEC" userId="1fb5875a-4594-4db2-80fb-f0db3de11280" providerId="ADAL" clId="{09330963-85FD-4C99-A81B-94D0EE5CFFEB}" dt="2026-05-08T17:32:39.522" v="100" actId="1076"/>
+          <ac:spMkLst>
+            <pc:docMk/>
+            <pc:sldMk cId="1501170907" sldId="256"/>
+            <ac:spMk id="53" creationId="{54DB48A0-8679-7515-A495-8900C2A20FCD}"/>
+          </ac:spMkLst>
+        </pc:spChg>
+        <pc:spChg chg="add mod">
+          <ac:chgData name="York, George W CIV USAF USAFA DF/DFEC" userId="1fb5875a-4594-4db2-80fb-f0db3de11280" providerId="ADAL" clId="{09330963-85FD-4C99-A81B-94D0EE5CFFEB}" dt="2026-05-08T17:36:14.685" v="114" actId="1076"/>
+          <ac:spMkLst>
+            <pc:docMk/>
+            <pc:sldMk cId="1501170907" sldId="256"/>
+            <ac:spMk id="84" creationId="{8F69FFC4-D90F-87A3-72AA-E53AD00637DE}"/>
+          </ac:spMkLst>
+        </pc:spChg>
+        <pc:spChg chg="add mod">
+          <ac:chgData name="York, George W CIV USAF USAFA DF/DFEC" userId="1fb5875a-4594-4db2-80fb-f0db3de11280" providerId="ADAL" clId="{09330963-85FD-4C99-A81B-94D0EE5CFFEB}" dt="2026-05-08T17:36:14.685" v="114" actId="1076"/>
+          <ac:spMkLst>
+            <pc:docMk/>
+            <pc:sldMk cId="1501170907" sldId="256"/>
+            <ac:spMk id="86" creationId="{D66AEAD3-1629-21A3-A829-EE39F53D4206}"/>
+          </ac:spMkLst>
+        </pc:spChg>
+        <pc:spChg chg="add mod">
+          <ac:chgData name="York, George W CIV USAF USAFA DF/DFEC" userId="1fb5875a-4594-4db2-80fb-f0db3de11280" providerId="ADAL" clId="{09330963-85FD-4C99-A81B-94D0EE5CFFEB}" dt="2026-05-08T17:36:14.685" v="114" actId="1076"/>
+          <ac:spMkLst>
+            <pc:docMk/>
+            <pc:sldMk cId="1501170907" sldId="256"/>
+            <ac:spMk id="106" creationId="{A046F096-97E2-8456-2195-55E7CAB154C6}"/>
+          </ac:spMkLst>
+        </pc:spChg>
+        <pc:spChg chg="del mod">
+          <ac:chgData name="York, George W CIV USAF USAFA DF/DFEC" userId="1fb5875a-4594-4db2-80fb-f0db3de11280" providerId="ADAL" clId="{09330963-85FD-4C99-A81B-94D0EE5CFFEB}" dt="2026-05-08T17:35:11.611" v="111" actId="478"/>
+          <ac:spMkLst>
+            <pc:docMk/>
+            <pc:sldMk cId="1501170907" sldId="256"/>
+            <ac:spMk id="119" creationId="{71CFDDD6-C726-691B-9CA9-125BE7E5CADA}"/>
+          </ac:spMkLst>
+        </pc:spChg>
+        <pc:spChg chg="del">
+          <ac:chgData name="York, George W CIV USAF USAFA DF/DFEC" userId="1fb5875a-4594-4db2-80fb-f0db3de11280" providerId="ADAL" clId="{09330963-85FD-4C99-A81B-94D0EE5CFFEB}" dt="2026-05-08T17:35:13.222" v="112" actId="478"/>
+          <ac:spMkLst>
+            <pc:docMk/>
+            <pc:sldMk cId="1501170907" sldId="256"/>
+            <ac:spMk id="120" creationId="{B5FAFD36-E7BE-8A22-0C52-FA46F61778F0}"/>
+          </ac:spMkLst>
+        </pc:spChg>
+        <pc:spChg chg="del">
+          <ac:chgData name="York, George W CIV USAF USAFA DF/DFEC" userId="1fb5875a-4594-4db2-80fb-f0db3de11280" providerId="ADAL" clId="{09330963-85FD-4C99-A81B-94D0EE5CFFEB}" dt="2026-05-08T17:35:05.116" v="108" actId="478"/>
+          <ac:spMkLst>
+            <pc:docMk/>
+            <pc:sldMk cId="1501170907" sldId="256"/>
+            <ac:spMk id="132" creationId="{0D9A6022-1D6D-F3DA-CC84-317FF5FD6666}"/>
+          </ac:spMkLst>
+        </pc:spChg>
+        <pc:spChg chg="del">
+          <ac:chgData name="York, George W CIV USAF USAFA DF/DFEC" userId="1fb5875a-4594-4db2-80fb-f0db3de11280" providerId="ADAL" clId="{09330963-85FD-4C99-A81B-94D0EE5CFFEB}" dt="2026-05-08T17:35:05.116" v="108" actId="478"/>
+          <ac:spMkLst>
+            <pc:docMk/>
+            <pc:sldMk cId="1501170907" sldId="256"/>
+            <ac:spMk id="151" creationId="{CD28274F-92E6-F852-6391-A717240DE2DF}"/>
+          </ac:spMkLst>
+        </pc:spChg>
+        <pc:spChg chg="del">
+          <ac:chgData name="York, George W CIV USAF USAFA DF/DFEC" userId="1fb5875a-4594-4db2-80fb-f0db3de11280" providerId="ADAL" clId="{09330963-85FD-4C99-A81B-94D0EE5CFFEB}" dt="2026-05-08T17:35:05.116" v="108" actId="478"/>
+          <ac:spMkLst>
+            <pc:docMk/>
+            <pc:sldMk cId="1501170907" sldId="256"/>
+            <ac:spMk id="153" creationId="{6C7963B8-EAB3-1251-7B88-E9681119B880}"/>
+          </ac:spMkLst>
+        </pc:spChg>
+        <pc:spChg chg="del">
+          <ac:chgData name="York, George W CIV USAF USAFA DF/DFEC" userId="1fb5875a-4594-4db2-80fb-f0db3de11280" providerId="ADAL" clId="{09330963-85FD-4C99-A81B-94D0EE5CFFEB}" dt="2026-05-08T17:35:05.116" v="108" actId="478"/>
+          <ac:spMkLst>
+            <pc:docMk/>
+            <pc:sldMk cId="1501170907" sldId="256"/>
+            <ac:spMk id="154" creationId="{6E64875F-2B8E-5F20-AD69-75128545C0DD}"/>
+          </ac:spMkLst>
+        </pc:spChg>
+        <pc:spChg chg="del">
+          <ac:chgData name="York, George W CIV USAF USAFA DF/DFEC" userId="1fb5875a-4594-4db2-80fb-f0db3de11280" providerId="ADAL" clId="{09330963-85FD-4C99-A81B-94D0EE5CFFEB}" dt="2026-05-08T17:35:05.116" v="108" actId="478"/>
+          <ac:spMkLst>
+            <pc:docMk/>
+            <pc:sldMk cId="1501170907" sldId="256"/>
+            <ac:spMk id="156" creationId="{2566064C-F469-508F-113D-556CBC75A869}"/>
+          </ac:spMkLst>
+        </pc:spChg>
+        <pc:spChg chg="add mod">
+          <ac:chgData name="York, George W CIV USAF USAFA DF/DFEC" userId="1fb5875a-4594-4db2-80fb-f0db3de11280" providerId="ADAL" clId="{09330963-85FD-4C99-A81B-94D0EE5CFFEB}" dt="2026-05-08T17:36:14.685" v="114" actId="1076"/>
+          <ac:spMkLst>
+            <pc:docMk/>
+            <pc:sldMk cId="1501170907" sldId="256"/>
+            <ac:spMk id="178" creationId="{09386CA0-1138-305E-7209-5A63253C8BFC}"/>
+          </ac:spMkLst>
+        </pc:spChg>
+        <pc:spChg chg="add mod">
+          <ac:chgData name="York, George W CIV USAF USAFA DF/DFEC" userId="1fb5875a-4594-4db2-80fb-f0db3de11280" providerId="ADAL" clId="{09330963-85FD-4C99-A81B-94D0EE5CFFEB}" dt="2026-05-08T17:36:14.685" v="114" actId="1076"/>
+          <ac:spMkLst>
+            <pc:docMk/>
+            <pc:sldMk cId="1501170907" sldId="256"/>
+            <ac:spMk id="180" creationId="{FCD657EC-8588-B810-69DD-64CE3E661EA1}"/>
+          </ac:spMkLst>
+        </pc:spChg>
+        <pc:spChg chg="del">
+          <ac:chgData name="York, George W CIV USAF USAFA DF/DFEC" userId="1fb5875a-4594-4db2-80fb-f0db3de11280" providerId="ADAL" clId="{09330963-85FD-4C99-A81B-94D0EE5CFFEB}" dt="2026-05-08T17:35:05.116" v="108" actId="478"/>
+          <ac:spMkLst>
+            <pc:docMk/>
+            <pc:sldMk cId="1501170907" sldId="256"/>
+            <ac:spMk id="184" creationId="{58EBC1B8-4825-3984-18AF-440ADACF2ABF}"/>
+          </ac:spMkLst>
+        </pc:spChg>
+        <pc:spChg chg="del">
+          <ac:chgData name="York, George W CIV USAF USAFA DF/DFEC" userId="1fb5875a-4594-4db2-80fb-f0db3de11280" providerId="ADAL" clId="{09330963-85FD-4C99-A81B-94D0EE5CFFEB}" dt="2026-05-08T17:35:05.116" v="108" actId="478"/>
+          <ac:spMkLst>
+            <pc:docMk/>
+            <pc:sldMk cId="1501170907" sldId="256"/>
+            <ac:spMk id="189" creationId="{0E85AB3B-858D-5BF6-ED0E-B3C0624C86F7}"/>
+          </ac:spMkLst>
+        </pc:spChg>
+        <pc:spChg chg="add mod">
+          <ac:chgData name="York, George W CIV USAF USAFA DF/DFEC" userId="1fb5875a-4594-4db2-80fb-f0db3de11280" providerId="ADAL" clId="{09330963-85FD-4C99-A81B-94D0EE5CFFEB}" dt="2026-05-08T17:35:39.347" v="113" actId="1076"/>
+          <ac:spMkLst>
+            <pc:docMk/>
+            <pc:sldMk cId="1501170907" sldId="256"/>
+            <ac:spMk id="202" creationId="{C5E4C3D1-E848-B046-B8D8-FF2644B018B9}"/>
+          </ac:spMkLst>
+        </pc:spChg>
+        <pc:spChg chg="add mod">
+          <ac:chgData name="York, George W CIV USAF USAFA DF/DFEC" userId="1fb5875a-4594-4db2-80fb-f0db3de11280" providerId="ADAL" clId="{09330963-85FD-4C99-A81B-94D0EE5CFFEB}" dt="2026-05-08T17:35:39.347" v="113" actId="1076"/>
+          <ac:spMkLst>
+            <pc:docMk/>
+            <pc:sldMk cId="1501170907" sldId="256"/>
+            <ac:spMk id="204" creationId="{64F90C90-E069-CC61-165E-6A1EEB7E1194}"/>
+          </ac:spMkLst>
+        </pc:spChg>
+        <pc:spChg chg="add mod">
+          <ac:chgData name="York, George W CIV USAF USAFA DF/DFEC" userId="1fb5875a-4594-4db2-80fb-f0db3de11280" providerId="ADAL" clId="{09330963-85FD-4C99-A81B-94D0EE5CFFEB}" dt="2026-05-08T17:35:39.347" v="113" actId="1076"/>
+          <ac:spMkLst>
+            <pc:docMk/>
+            <pc:sldMk cId="1501170907" sldId="256"/>
+            <ac:spMk id="205" creationId="{64D9F53B-87E9-E6A7-973D-AEF42ADBB14F}"/>
+          </ac:spMkLst>
+        </pc:spChg>
+        <pc:spChg chg="add mod">
+          <ac:chgData name="York, George W CIV USAF USAFA DF/DFEC" userId="1fb5875a-4594-4db2-80fb-f0db3de11280" providerId="ADAL" clId="{09330963-85FD-4C99-A81B-94D0EE5CFFEB}" dt="2026-05-08T17:38:09.815" v="132" actId="1076"/>
+          <ac:spMkLst>
+            <pc:docMk/>
+            <pc:sldMk cId="1501170907" sldId="256"/>
+            <ac:spMk id="207" creationId="{324ACC2E-58E8-851E-7F2C-5A0A160ADD22}"/>
           </ac:spMkLst>
         </pc:spChg>
         <pc:spChg chg="add mod">
@@ -247,6 +431,38 @@
             <ac:spMk id="246" creationId="{3BA26EF9-D46A-45DC-70BA-21364891CB27}"/>
           </ac:spMkLst>
         </pc:spChg>
+        <pc:grpChg chg="add mod">
+          <ac:chgData name="York, George W CIV USAF USAFA DF/DFEC" userId="1fb5875a-4594-4db2-80fb-f0db3de11280" providerId="ADAL" clId="{09330963-85FD-4C99-A81B-94D0EE5CFFEB}" dt="2026-05-08T17:36:14.685" v="114" actId="1076"/>
+          <ac:grpSpMkLst>
+            <pc:docMk/>
+            <pc:sldMk cId="1501170907" sldId="256"/>
+            <ac:grpSpMk id="66" creationId="{1043A246-575E-278D-E538-E3ACE7F6C7ED}"/>
+          </ac:grpSpMkLst>
+        </pc:grpChg>
+        <pc:grpChg chg="mod">
+          <ac:chgData name="York, George W CIV USAF USAFA DF/DFEC" userId="1fb5875a-4594-4db2-80fb-f0db3de11280" providerId="ADAL" clId="{09330963-85FD-4C99-A81B-94D0EE5CFFEB}" dt="2026-05-08T17:36:14.685" v="114" actId="1076"/>
+          <ac:grpSpMkLst>
+            <pc:docMk/>
+            <pc:sldMk cId="1501170907" sldId="256"/>
+            <ac:grpSpMk id="107" creationId="{B773C7A5-7ABC-0594-7851-14CF77797137}"/>
+          </ac:grpSpMkLst>
+        </pc:grpChg>
+        <pc:grpChg chg="del">
+          <ac:chgData name="York, George W CIV USAF USAFA DF/DFEC" userId="1fb5875a-4594-4db2-80fb-f0db3de11280" providerId="ADAL" clId="{09330963-85FD-4C99-A81B-94D0EE5CFFEB}" dt="2026-05-08T17:35:05.116" v="108" actId="478"/>
+          <ac:grpSpMkLst>
+            <pc:docMk/>
+            <pc:sldMk cId="1501170907" sldId="256"/>
+            <ac:grpSpMk id="137" creationId="{8B5AEF34-ADB3-754B-DE80-ABD4D3F0450B}"/>
+          </ac:grpSpMkLst>
+        </pc:grpChg>
+        <pc:grpChg chg="del">
+          <ac:chgData name="York, George W CIV USAF USAFA DF/DFEC" userId="1fb5875a-4594-4db2-80fb-f0db3de11280" providerId="ADAL" clId="{09330963-85FD-4C99-A81B-94D0EE5CFFEB}" dt="2026-05-08T17:35:08.156" v="109" actId="478"/>
+          <ac:grpSpMkLst>
+            <pc:docMk/>
+            <pc:sldMk cId="1501170907" sldId="256"/>
+            <ac:grpSpMk id="247" creationId="{C53FABC7-DD90-8352-C66A-7DFA23EE2633}"/>
+          </ac:grpSpMkLst>
+        </pc:grpChg>
         <pc:cxnChg chg="add mod">
           <ac:chgData name="York, George W CIV USAF USAFA DF/DFEC" userId="1fb5875a-4594-4db2-80fb-f0db3de11280" providerId="ADAL" clId="{09330963-85FD-4C99-A81B-94D0EE5CFFEB}" dt="2026-04-18T20:27:30.523" v="76" actId="1076"/>
           <ac:cxnSpMkLst>
@@ -263,12 +479,52 @@
             <ac:cxnSpMk id="28" creationId="{DBC59A37-4C55-8753-29C9-9D435BAD749A}"/>
           </ac:cxnSpMkLst>
         </pc:cxnChg>
+        <pc:cxnChg chg="add mod">
+          <ac:chgData name="York, George W CIV USAF USAFA DF/DFEC" userId="1fb5875a-4594-4db2-80fb-f0db3de11280" providerId="ADAL" clId="{09330963-85FD-4C99-A81B-94D0EE5CFFEB}" dt="2026-05-08T17:32:50.202" v="101" actId="14100"/>
+          <ac:cxnSpMkLst>
+            <pc:docMk/>
+            <pc:sldMk cId="1501170907" sldId="256"/>
+            <ac:cxnSpMk id="47" creationId="{3AE93C80-3013-DEAA-0C8C-8059FBC73417}"/>
+          </ac:cxnSpMkLst>
+        </pc:cxnChg>
+        <pc:cxnChg chg="mod">
+          <ac:chgData name="York, George W CIV USAF USAFA DF/DFEC" userId="1fb5875a-4594-4db2-80fb-f0db3de11280" providerId="ADAL" clId="{09330963-85FD-4C99-A81B-94D0EE5CFFEB}" dt="2026-05-08T17:38:27.504" v="135" actId="14100"/>
+          <ac:cxnSpMkLst>
+            <pc:docMk/>
+            <pc:sldMk cId="1501170907" sldId="256"/>
+            <ac:cxnSpMk id="50" creationId="{50DC1730-2DC8-EE14-BF4C-B0BDADDC0FF1}"/>
+          </ac:cxnSpMkLst>
+        </pc:cxnChg>
+        <pc:cxnChg chg="add del mod">
+          <ac:chgData name="York, George W CIV USAF USAFA DF/DFEC" userId="1fb5875a-4594-4db2-80fb-f0db3de11280" providerId="ADAL" clId="{09330963-85FD-4C99-A81B-94D0EE5CFFEB}" dt="2026-05-08T17:32:59.605" v="102" actId="478"/>
+          <ac:cxnSpMkLst>
+            <pc:docMk/>
+            <pc:sldMk cId="1501170907" sldId="256"/>
+            <ac:cxnSpMk id="52" creationId="{5E06D8EE-1F91-FC75-99F3-5517B19A6252}"/>
+          </ac:cxnSpMkLst>
+        </pc:cxnChg>
         <pc:cxnChg chg="mod">
           <ac:chgData name="York, George W CIV USAF USAFA DF/DFEC" userId="1fb5875a-4594-4db2-80fb-f0db3de11280" providerId="ADAL" clId="{09330963-85FD-4C99-A81B-94D0EE5CFFEB}" dt="2026-04-10T18:20:48.258" v="50" actId="14100"/>
           <ac:cxnSpMkLst>
             <pc:docMk/>
             <pc:sldMk cId="1501170907" sldId="256"/>
             <ac:cxnSpMk id="54" creationId="{03324C20-C3D1-9AAB-5C0D-C6C15BD835FE}"/>
+          </ac:cxnSpMkLst>
+        </pc:cxnChg>
+        <pc:cxnChg chg="add mod">
+          <ac:chgData name="York, George W CIV USAF USAFA DF/DFEC" userId="1fb5875a-4594-4db2-80fb-f0db3de11280" providerId="ADAL" clId="{09330963-85FD-4C99-A81B-94D0EE5CFFEB}" dt="2026-05-08T17:33:06.537" v="105" actId="14100"/>
+          <ac:cxnSpMkLst>
+            <pc:docMk/>
+            <pc:sldMk cId="1501170907" sldId="256"/>
+            <ac:cxnSpMk id="59" creationId="{F5DC23A1-E3C9-66CD-B3A5-E308601A02A9}"/>
+          </ac:cxnSpMkLst>
+        </pc:cxnChg>
+        <pc:cxnChg chg="del">
+          <ac:chgData name="York, George W CIV USAF USAFA DF/DFEC" userId="1fb5875a-4594-4db2-80fb-f0db3de11280" providerId="ADAL" clId="{09330963-85FD-4C99-A81B-94D0EE5CFFEB}" dt="2026-05-08T17:38:23.484" v="134" actId="478"/>
+          <ac:cxnSpMkLst>
+            <pc:docMk/>
+            <pc:sldMk cId="1501170907" sldId="256"/>
+            <ac:cxnSpMk id="62" creationId="{88974812-60ED-4172-D124-4A8113D87693}"/>
           </ac:cxnSpMkLst>
         </pc:cxnChg>
         <pc:cxnChg chg="mod">
@@ -288,11 +544,43 @@
           </ac:cxnSpMkLst>
         </pc:cxnChg>
         <pc:cxnChg chg="mod">
+          <ac:chgData name="York, George W CIV USAF USAFA DF/DFEC" userId="1fb5875a-4594-4db2-80fb-f0db3de11280" providerId="ADAL" clId="{09330963-85FD-4C99-A81B-94D0EE5CFFEB}" dt="2026-05-08T17:38:37.456" v="136" actId="14100"/>
+          <ac:cxnSpMkLst>
+            <pc:docMk/>
+            <pc:sldMk cId="1501170907" sldId="256"/>
+            <ac:cxnSpMk id="79" creationId="{85985002-8499-9138-27D1-683C5A5ED252}"/>
+          </ac:cxnSpMkLst>
+        </pc:cxnChg>
+        <pc:cxnChg chg="mod">
           <ac:chgData name="York, George W CIV USAF USAFA DF/DFEC" userId="1fb5875a-4594-4db2-80fb-f0db3de11280" providerId="ADAL" clId="{09330963-85FD-4C99-A81B-94D0EE5CFFEB}" dt="2026-04-10T18:22:19.458" v="63" actId="1076"/>
           <ac:cxnSpMkLst>
             <pc:docMk/>
             <pc:sldMk cId="1501170907" sldId="256"/>
             <ac:cxnSpMk id="82" creationId="{821208F8-3FE0-AC1B-C80E-FD20D78B59DE}"/>
+          </ac:cxnSpMkLst>
+        </pc:cxnChg>
+        <pc:cxnChg chg="mod">
+          <ac:chgData name="York, George W CIV USAF USAFA DF/DFEC" userId="1fb5875a-4594-4db2-80fb-f0db3de11280" providerId="ADAL" clId="{09330963-85FD-4C99-A81B-94D0EE5CFFEB}" dt="2026-05-08T17:32:00.418" v="97" actId="14100"/>
+          <ac:cxnSpMkLst>
+            <pc:docMk/>
+            <pc:sldMk cId="1501170907" sldId="256"/>
+            <ac:cxnSpMk id="83" creationId="{857589EA-2600-0EE7-5D7E-FFA354A03D39}"/>
+          </ac:cxnSpMkLst>
+        </pc:cxnChg>
+        <pc:cxnChg chg="mod">
+          <ac:chgData name="York, George W CIV USAF USAFA DF/DFEC" userId="1fb5875a-4594-4db2-80fb-f0db3de11280" providerId="ADAL" clId="{09330963-85FD-4C99-A81B-94D0EE5CFFEB}" dt="2026-05-08T17:31:43.137" v="95" actId="1076"/>
+          <ac:cxnSpMkLst>
+            <pc:docMk/>
+            <pc:sldMk cId="1501170907" sldId="256"/>
+            <ac:cxnSpMk id="85" creationId="{95633958-DAF6-D732-2373-3901093A51FA}"/>
+          </ac:cxnSpMkLst>
+        </pc:cxnChg>
+        <pc:cxnChg chg="mod">
+          <ac:chgData name="York, George W CIV USAF USAFA DF/DFEC" userId="1fb5875a-4594-4db2-80fb-f0db3de11280" providerId="ADAL" clId="{09330963-85FD-4C99-A81B-94D0EE5CFFEB}" dt="2026-05-08T17:31:54.056" v="96" actId="14100"/>
+          <ac:cxnSpMkLst>
+            <pc:docMk/>
+            <pc:sldMk cId="1501170907" sldId="256"/>
+            <ac:cxnSpMk id="87" creationId="{4B6F7810-982D-2B77-AC93-0E1947AF6544}"/>
           </ac:cxnSpMkLst>
         </pc:cxnChg>
         <pc:cxnChg chg="mod">
@@ -303,12 +591,108 @@
             <ac:cxnSpMk id="92" creationId="{780D872F-1646-C8B4-3D28-A065AE10E52A}"/>
           </ac:cxnSpMkLst>
         </pc:cxnChg>
+        <pc:cxnChg chg="del">
+          <ac:chgData name="York, George W CIV USAF USAFA DF/DFEC" userId="1fb5875a-4594-4db2-80fb-f0db3de11280" providerId="ADAL" clId="{09330963-85FD-4C99-A81B-94D0EE5CFFEB}" dt="2026-05-08T17:35:08.156" v="109" actId="478"/>
+          <ac:cxnSpMkLst>
+            <pc:docMk/>
+            <pc:sldMk cId="1501170907" sldId="256"/>
+            <ac:cxnSpMk id="146" creationId="{ABE6E774-8C9B-4489-D948-65607F2E188A}"/>
+          </ac:cxnSpMkLst>
+        </pc:cxnChg>
+        <pc:cxnChg chg="del">
+          <ac:chgData name="York, George W CIV USAF USAFA DF/DFEC" userId="1fb5875a-4594-4db2-80fb-f0db3de11280" providerId="ADAL" clId="{09330963-85FD-4C99-A81B-94D0EE5CFFEB}" dt="2026-05-08T17:35:08.156" v="109" actId="478"/>
+          <ac:cxnSpMkLst>
+            <pc:docMk/>
+            <pc:sldMk cId="1501170907" sldId="256"/>
+            <ac:cxnSpMk id="148" creationId="{FE9EFFB0-0DED-2330-8209-FC39718441DD}"/>
+          </ac:cxnSpMkLst>
+        </pc:cxnChg>
+        <pc:cxnChg chg="del">
+          <ac:chgData name="York, George W CIV USAF USAFA DF/DFEC" userId="1fb5875a-4594-4db2-80fb-f0db3de11280" providerId="ADAL" clId="{09330963-85FD-4C99-A81B-94D0EE5CFFEB}" dt="2026-05-08T17:35:05.116" v="108" actId="478"/>
+          <ac:cxnSpMkLst>
+            <pc:docMk/>
+            <pc:sldMk cId="1501170907" sldId="256"/>
+            <ac:cxnSpMk id="149" creationId="{F6ECA4E6-7E3F-9AE7-DC4A-642870838647}"/>
+          </ac:cxnSpMkLst>
+        </pc:cxnChg>
+        <pc:cxnChg chg="mod">
+          <ac:chgData name="York, George W CIV USAF USAFA DF/DFEC" userId="1fb5875a-4594-4db2-80fb-f0db3de11280" providerId="ADAL" clId="{09330963-85FD-4C99-A81B-94D0EE5CFFEB}" dt="2026-05-08T17:36:14.685" v="114" actId="1076"/>
+          <ac:cxnSpMkLst>
+            <pc:docMk/>
+            <pc:sldMk cId="1501170907" sldId="256"/>
+            <ac:cxnSpMk id="176" creationId="{83721058-E86C-EB18-A1F1-24BD0BF2686D}"/>
+          </ac:cxnSpMkLst>
+        </pc:cxnChg>
+        <pc:cxnChg chg="mod">
+          <ac:chgData name="York, George W CIV USAF USAFA DF/DFEC" userId="1fb5875a-4594-4db2-80fb-f0db3de11280" providerId="ADAL" clId="{09330963-85FD-4C99-A81B-94D0EE5CFFEB}" dt="2026-05-08T17:36:14.685" v="114" actId="1076"/>
+          <ac:cxnSpMkLst>
+            <pc:docMk/>
+            <pc:sldMk cId="1501170907" sldId="256"/>
+            <ac:cxnSpMk id="185" creationId="{45DDE841-DDA8-50C0-DF84-DFEAD66D212E}"/>
+          </ac:cxnSpMkLst>
+        </pc:cxnChg>
+        <pc:cxnChg chg="del">
+          <ac:chgData name="York, George W CIV USAF USAFA DF/DFEC" userId="1fb5875a-4594-4db2-80fb-f0db3de11280" providerId="ADAL" clId="{09330963-85FD-4C99-A81B-94D0EE5CFFEB}" dt="2026-05-08T17:35:05.116" v="108" actId="478"/>
+          <ac:cxnSpMkLst>
+            <pc:docMk/>
+            <pc:sldMk cId="1501170907" sldId="256"/>
+            <ac:cxnSpMk id="196" creationId="{C4DF3196-3785-A9E7-1F1B-2A6EE6375854}"/>
+          </ac:cxnSpMkLst>
+        </pc:cxnChg>
+        <pc:cxnChg chg="mod">
+          <ac:chgData name="York, George W CIV USAF USAFA DF/DFEC" userId="1fb5875a-4594-4db2-80fb-f0db3de11280" providerId="ADAL" clId="{09330963-85FD-4C99-A81B-94D0EE5CFFEB}" dt="2026-05-08T17:36:14.685" v="114" actId="1076"/>
+          <ac:cxnSpMkLst>
+            <pc:docMk/>
+            <pc:sldMk cId="1501170907" sldId="256"/>
+            <ac:cxnSpMk id="199" creationId="{DD9CD45F-603E-9C8E-1E43-C8A5BE41D6EE}"/>
+          </ac:cxnSpMkLst>
+        </pc:cxnChg>
+        <pc:cxnChg chg="mod">
+          <ac:chgData name="York, George W CIV USAF USAFA DF/DFEC" userId="1fb5875a-4594-4db2-80fb-f0db3de11280" providerId="ADAL" clId="{09330963-85FD-4C99-A81B-94D0EE5CFFEB}" dt="2026-05-08T17:39:22.939" v="137" actId="208"/>
+          <ac:cxnSpMkLst>
+            <pc:docMk/>
+            <pc:sldMk cId="1501170907" sldId="256"/>
+            <ac:cxnSpMk id="201" creationId="{83A0DF4B-DC05-17D1-759D-39EFC1DE02DF}"/>
+          </ac:cxnSpMkLst>
+        </pc:cxnChg>
+        <pc:cxnChg chg="mod">
+          <ac:chgData name="York, George W CIV USAF USAFA DF/DFEC" userId="1fb5875a-4594-4db2-80fb-f0db3de11280" providerId="ADAL" clId="{09330963-85FD-4C99-A81B-94D0EE5CFFEB}" dt="2026-05-08T17:36:39.023" v="117" actId="208"/>
+          <ac:cxnSpMkLst>
+            <pc:docMk/>
+            <pc:sldMk cId="1501170907" sldId="256"/>
+            <ac:cxnSpMk id="203" creationId="{EE0A7450-E98D-2100-D475-3D6DDD92F800}"/>
+          </ac:cxnSpMkLst>
+        </pc:cxnChg>
+        <pc:cxnChg chg="mod">
+          <ac:chgData name="York, George W CIV USAF USAFA DF/DFEC" userId="1fb5875a-4594-4db2-80fb-f0db3de11280" providerId="ADAL" clId="{09330963-85FD-4C99-A81B-94D0EE5CFFEB}" dt="2026-05-08T17:39:28.055" v="138" actId="208"/>
+          <ac:cxnSpMkLst>
+            <pc:docMk/>
+            <pc:sldMk cId="1501170907" sldId="256"/>
+            <ac:cxnSpMk id="206" creationId="{21A460EE-EB70-C945-9EB0-A42BA9B94C3F}"/>
+          </ac:cxnSpMkLst>
+        </pc:cxnChg>
         <pc:cxnChg chg="mod">
           <ac:chgData name="York, George W CIV USAF USAFA DF/DFEC" userId="1fb5875a-4594-4db2-80fb-f0db3de11280" providerId="ADAL" clId="{09330963-85FD-4C99-A81B-94D0EE5CFFEB}" dt="2026-04-10T18:23:32.536" v="69" actId="1076"/>
           <ac:cxnSpMkLst>
             <pc:docMk/>
             <pc:sldMk cId="1501170907" sldId="256"/>
             <ac:cxnSpMk id="223" creationId="{320A29EB-ABD9-7A97-166B-5F32289CDE2A}"/>
+          </ac:cxnSpMkLst>
+        </pc:cxnChg>
+        <pc:cxnChg chg="mod">
+          <ac:chgData name="York, George W CIV USAF USAFA DF/DFEC" userId="1fb5875a-4594-4db2-80fb-f0db3de11280" providerId="ADAL" clId="{09330963-85FD-4C99-A81B-94D0EE5CFFEB}" dt="2026-05-08T17:37:15.120" v="123" actId="1076"/>
+          <ac:cxnSpMkLst>
+            <pc:docMk/>
+            <pc:sldMk cId="1501170907" sldId="256"/>
+            <ac:cxnSpMk id="286" creationId="{B760AF97-E733-241D-903A-11456E3E2363}"/>
+          </ac:cxnSpMkLst>
+        </pc:cxnChg>
+        <pc:cxnChg chg="mod">
+          <ac:chgData name="York, George W CIV USAF USAFA DF/DFEC" userId="1fb5875a-4594-4db2-80fb-f0db3de11280" providerId="ADAL" clId="{09330963-85FD-4C99-A81B-94D0EE5CFFEB}" dt="2026-05-08T17:37:53.271" v="130" actId="14100"/>
+          <ac:cxnSpMkLst>
+            <pc:docMk/>
+            <pc:sldMk cId="1501170907" sldId="256"/>
+            <ac:cxnSpMk id="288" creationId="{FBC20363-C806-EF5C-EF5B-FA8F14D0B2F9}"/>
           </ac:cxnSpMkLst>
         </pc:cxnChg>
       </pc:sldChg>
@@ -464,7 +848,7 @@
           <a:p>
             <a:fld id="{51AFF834-1BEC-4F95-9622-28B5DCC1FE16}" type="datetimeFigureOut">
               <a:rPr lang="en-US" smtClean="0"/>
-              <a:t>4/18/2026</a:t>
+              <a:t>5/8/2026</a:t>
             </a:fld>
             <a:endParaRPr lang="en-US"/>
           </a:p>
@@ -662,7 +1046,7 @@
           <a:p>
             <a:fld id="{51AFF834-1BEC-4F95-9622-28B5DCC1FE16}" type="datetimeFigureOut">
               <a:rPr lang="en-US" smtClean="0"/>
-              <a:t>4/18/2026</a:t>
+              <a:t>5/8/2026</a:t>
             </a:fld>
             <a:endParaRPr lang="en-US"/>
           </a:p>
@@ -870,7 +1254,7 @@
           <a:p>
             <a:fld id="{51AFF834-1BEC-4F95-9622-28B5DCC1FE16}" type="datetimeFigureOut">
               <a:rPr lang="en-US" smtClean="0"/>
-              <a:t>4/18/2026</a:t>
+              <a:t>5/8/2026</a:t>
             </a:fld>
             <a:endParaRPr lang="en-US"/>
           </a:p>
@@ -1068,7 +1452,7 @@
           <a:p>
             <a:fld id="{51AFF834-1BEC-4F95-9622-28B5DCC1FE16}" type="datetimeFigureOut">
               <a:rPr lang="en-US" smtClean="0"/>
-              <a:t>4/18/2026</a:t>
+              <a:t>5/8/2026</a:t>
             </a:fld>
             <a:endParaRPr lang="en-US"/>
           </a:p>
@@ -1343,7 +1727,7 @@
           <a:p>
             <a:fld id="{51AFF834-1BEC-4F95-9622-28B5DCC1FE16}" type="datetimeFigureOut">
               <a:rPr lang="en-US" smtClean="0"/>
-              <a:t>4/18/2026</a:t>
+              <a:t>5/8/2026</a:t>
             </a:fld>
             <a:endParaRPr lang="en-US"/>
           </a:p>
@@ -1608,7 +1992,7 @@
           <a:p>
             <a:fld id="{51AFF834-1BEC-4F95-9622-28B5DCC1FE16}" type="datetimeFigureOut">
               <a:rPr lang="en-US" smtClean="0"/>
-              <a:t>4/18/2026</a:t>
+              <a:t>5/8/2026</a:t>
             </a:fld>
             <a:endParaRPr lang="en-US"/>
           </a:p>
@@ -2020,7 +2404,7 @@
           <a:p>
             <a:fld id="{51AFF834-1BEC-4F95-9622-28B5DCC1FE16}" type="datetimeFigureOut">
               <a:rPr lang="en-US" smtClean="0"/>
-              <a:t>4/18/2026</a:t>
+              <a:t>5/8/2026</a:t>
             </a:fld>
             <a:endParaRPr lang="en-US"/>
           </a:p>
@@ -2161,7 +2545,7 @@
           <a:p>
             <a:fld id="{51AFF834-1BEC-4F95-9622-28B5DCC1FE16}" type="datetimeFigureOut">
               <a:rPr lang="en-US" smtClean="0"/>
-              <a:t>4/18/2026</a:t>
+              <a:t>5/8/2026</a:t>
             </a:fld>
             <a:endParaRPr lang="en-US"/>
           </a:p>
@@ -2274,7 +2658,7 @@
           <a:p>
             <a:fld id="{51AFF834-1BEC-4F95-9622-28B5DCC1FE16}" type="datetimeFigureOut">
               <a:rPr lang="en-US" smtClean="0"/>
-              <a:t>4/18/2026</a:t>
+              <a:t>5/8/2026</a:t>
             </a:fld>
             <a:endParaRPr lang="en-US"/>
           </a:p>
@@ -2585,7 +2969,7 @@
           <a:p>
             <a:fld id="{51AFF834-1BEC-4F95-9622-28B5DCC1FE16}" type="datetimeFigureOut">
               <a:rPr lang="en-US" smtClean="0"/>
-              <a:t>4/18/2026</a:t>
+              <a:t>5/8/2026</a:t>
             </a:fld>
             <a:endParaRPr lang="en-US"/>
           </a:p>
@@ -2873,7 +3257,7 @@
           <a:p>
             <a:fld id="{51AFF834-1BEC-4F95-9622-28B5DCC1FE16}" type="datetimeFigureOut">
               <a:rPr lang="en-US" smtClean="0"/>
-              <a:t>4/18/2026</a:t>
+              <a:t>5/8/2026</a:t>
             </a:fld>
             <a:endParaRPr lang="en-US"/>
           </a:p>
@@ -3114,7 +3498,7 @@
           <a:p>
             <a:fld id="{51AFF834-1BEC-4F95-9622-28B5DCC1FE16}" type="datetimeFigureOut">
               <a:rPr lang="en-US" smtClean="0"/>
-              <a:t>4/18/2026</a:t>
+              <a:t>5/8/2026</a:t>
             </a:fld>
             <a:endParaRPr lang="en-US"/>
           </a:p>
@@ -3640,7 +4024,7 @@
         </p:nvSpPr>
         <p:spPr>
           <a:xfrm>
-            <a:off x="389615" y="591970"/>
+            <a:off x="526679" y="566943"/>
             <a:ext cx="1556452" cy="276999"/>
           </a:xfrm>
           <a:prstGeom prst="rect">
@@ -4679,13 +5063,15 @@
               </a:ext>
             </a:extLst>
           </p:cNvPr>
-          <p:cNvCxnSpPr/>
+          <p:cNvCxnSpPr>
+            <a:cxnSpLocks/>
+          </p:cNvCxnSpPr>
           <p:nvPr/>
         </p:nvCxnSpPr>
         <p:spPr>
           <a:xfrm>
-            <a:off x="1181601" y="2568884"/>
-            <a:ext cx="177808" cy="0"/>
+            <a:off x="934575" y="2568516"/>
+            <a:ext cx="424834" cy="0"/>
           </a:xfrm>
           <a:prstGeom prst="straightConnector1">
             <a:avLst/>
@@ -4869,42 +5255,6 @@
       </p:cxnSp>
       <p:cxnSp>
         <p:nvCxnSpPr>
-          <p:cNvPr id="62" name="Straight Connector 61">
-            <a:extLst>
-              <a:ext uri="{FF2B5EF4-FFF2-40B4-BE49-F238E27FC236}">
-                <a16:creationId xmlns:a16="http://schemas.microsoft.com/office/drawing/2014/main" id="{88974812-60ED-4172-D124-4A8113D87693}"/>
-              </a:ext>
-            </a:extLst>
-          </p:cNvPr>
-          <p:cNvCxnSpPr/>
-          <p:nvPr/>
-        </p:nvCxnSpPr>
-        <p:spPr>
-          <a:xfrm flipH="1">
-            <a:off x="932949" y="2568884"/>
-            <a:ext cx="248652" cy="0"/>
-          </a:xfrm>
-          <a:prstGeom prst="line">
-            <a:avLst/>
-          </a:prstGeom>
-        </p:spPr>
-        <p:style>
-          <a:lnRef idx="2">
-            <a:schemeClr val="accent1"/>
-          </a:lnRef>
-          <a:fillRef idx="0">
-            <a:schemeClr val="accent1"/>
-          </a:fillRef>
-          <a:effectRef idx="1">
-            <a:schemeClr val="accent1"/>
-          </a:effectRef>
-          <a:fontRef idx="minor">
-            <a:schemeClr val="tx1"/>
-          </a:fontRef>
-        </p:style>
-      </p:cxnSp>
-      <p:cxnSp>
-        <p:nvCxnSpPr>
           <p:cNvPr id="63" name="Straight Arrow Connector 62">
             <a:extLst>
               <a:ext uri="{FF2B5EF4-FFF2-40B4-BE49-F238E27FC236}">
@@ -5308,8 +5658,8 @@
         </p:nvCxnSpPr>
         <p:spPr>
           <a:xfrm>
-            <a:off x="905315" y="4554736"/>
-            <a:ext cx="0" cy="2067724"/>
+            <a:off x="905315" y="4205407"/>
+            <a:ext cx="0" cy="2417053"/>
           </a:xfrm>
           <a:prstGeom prst="line">
             <a:avLst/>
@@ -5347,7 +5697,7 @@
         </p:nvCxnSpPr>
         <p:spPr>
           <a:xfrm>
-            <a:off x="905315" y="4546715"/>
+            <a:off x="909468" y="4225602"/>
             <a:ext cx="1523560" cy="8021"/>
           </a:xfrm>
           <a:prstGeom prst="line">
@@ -5387,7 +5737,7 @@
         <p:spPr>
           <a:xfrm>
             <a:off x="2428875" y="3314775"/>
-            <a:ext cx="0" cy="1239961"/>
+            <a:ext cx="0" cy="918848"/>
           </a:xfrm>
           <a:prstGeom prst="line">
             <a:avLst/>
@@ -7583,179 +7933,6 @@
           </a:fontRef>
         </p:style>
       </p:cxnSp>
-      <p:grpSp>
-        <p:nvGrpSpPr>
-          <p:cNvPr id="247" name="Group 246">
-            <a:extLst>
-              <a:ext uri="{FF2B5EF4-FFF2-40B4-BE49-F238E27FC236}">
-                <a16:creationId xmlns:a16="http://schemas.microsoft.com/office/drawing/2014/main" id="{C53FABC7-DD90-8352-C66A-7DFA23EE2633}"/>
-              </a:ext>
-            </a:extLst>
-          </p:cNvPr>
-          <p:cNvGrpSpPr/>
-          <p:nvPr/>
-        </p:nvGrpSpPr>
-        <p:grpSpPr>
-          <a:xfrm>
-            <a:off x="4742886" y="2070125"/>
-            <a:ext cx="234557" cy="870633"/>
-            <a:chOff x="6175096" y="3854324"/>
-            <a:chExt cx="144932" cy="375881"/>
-          </a:xfrm>
-        </p:grpSpPr>
-        <p:cxnSp>
-          <p:nvCxnSpPr>
-            <p:cNvPr id="248" name="Straight Connector 247">
-              <a:extLst>
-                <a:ext uri="{FF2B5EF4-FFF2-40B4-BE49-F238E27FC236}">
-                  <a16:creationId xmlns:a16="http://schemas.microsoft.com/office/drawing/2014/main" id="{D64F4C90-ABA8-4DDC-5808-F9A278B4E6FD}"/>
-                </a:ext>
-              </a:extLst>
-            </p:cNvPr>
-            <p:cNvCxnSpPr>
-              <a:cxnSpLocks/>
-            </p:cNvCxnSpPr>
-            <p:nvPr/>
-          </p:nvCxnSpPr>
-          <p:spPr>
-            <a:xfrm>
-              <a:off x="6180266" y="3861114"/>
-              <a:ext cx="0" cy="369091"/>
-            </a:xfrm>
-            <a:prstGeom prst="line">
-              <a:avLst/>
-            </a:prstGeom>
-          </p:spPr>
-          <p:style>
-            <a:lnRef idx="2">
-              <a:schemeClr val="accent1"/>
-            </a:lnRef>
-            <a:fillRef idx="0">
-              <a:schemeClr val="accent1"/>
-            </a:fillRef>
-            <a:effectRef idx="1">
-              <a:schemeClr val="accent1"/>
-            </a:effectRef>
-            <a:fontRef idx="minor">
-              <a:schemeClr val="tx1"/>
-            </a:fontRef>
-          </p:style>
-        </p:cxnSp>
-        <p:cxnSp>
-          <p:nvCxnSpPr>
-            <p:cNvPr id="249" name="Straight Connector 248">
-              <a:extLst>
-                <a:ext uri="{FF2B5EF4-FFF2-40B4-BE49-F238E27FC236}">
-                  <a16:creationId xmlns:a16="http://schemas.microsoft.com/office/drawing/2014/main" id="{6FC64163-8C45-5848-AF36-721E2025DF54}"/>
-                </a:ext>
-              </a:extLst>
-            </p:cNvPr>
-            <p:cNvCxnSpPr>
-              <a:cxnSpLocks/>
-            </p:cNvCxnSpPr>
-            <p:nvPr/>
-          </p:nvCxnSpPr>
-          <p:spPr>
-            <a:xfrm>
-              <a:off x="6320028" y="3936909"/>
-              <a:ext cx="0" cy="212558"/>
-            </a:xfrm>
-            <a:prstGeom prst="line">
-              <a:avLst/>
-            </a:prstGeom>
-          </p:spPr>
-          <p:style>
-            <a:lnRef idx="2">
-              <a:schemeClr val="accent1"/>
-            </a:lnRef>
-            <a:fillRef idx="0">
-              <a:schemeClr val="accent1"/>
-            </a:fillRef>
-            <a:effectRef idx="1">
-              <a:schemeClr val="accent1"/>
-            </a:effectRef>
-            <a:fontRef idx="minor">
-              <a:schemeClr val="tx1"/>
-            </a:fontRef>
-          </p:style>
-        </p:cxnSp>
-        <p:cxnSp>
-          <p:nvCxnSpPr>
-            <p:cNvPr id="250" name="Straight Connector 249">
-              <a:extLst>
-                <a:ext uri="{FF2B5EF4-FFF2-40B4-BE49-F238E27FC236}">
-                  <a16:creationId xmlns:a16="http://schemas.microsoft.com/office/drawing/2014/main" id="{3B09081B-A704-2107-897F-12A59ADE3922}"/>
-                </a:ext>
-              </a:extLst>
-            </p:cNvPr>
-            <p:cNvCxnSpPr>
-              <a:cxnSpLocks/>
-            </p:cNvCxnSpPr>
-            <p:nvPr/>
-          </p:nvCxnSpPr>
-          <p:spPr>
-            <a:xfrm flipH="1">
-              <a:off x="6175096" y="4152620"/>
-              <a:ext cx="144932" cy="77585"/>
-            </a:xfrm>
-            <a:prstGeom prst="line">
-              <a:avLst/>
-            </a:prstGeom>
-          </p:spPr>
-          <p:style>
-            <a:lnRef idx="2">
-              <a:schemeClr val="accent1"/>
-            </a:lnRef>
-            <a:fillRef idx="0">
-              <a:schemeClr val="accent1"/>
-            </a:fillRef>
-            <a:effectRef idx="1">
-              <a:schemeClr val="accent1"/>
-            </a:effectRef>
-            <a:fontRef idx="minor">
-              <a:schemeClr val="tx1"/>
-            </a:fontRef>
-          </p:style>
-        </p:cxnSp>
-        <p:cxnSp>
-          <p:nvCxnSpPr>
-            <p:cNvPr id="251" name="Straight Connector 250">
-              <a:extLst>
-                <a:ext uri="{FF2B5EF4-FFF2-40B4-BE49-F238E27FC236}">
-                  <a16:creationId xmlns:a16="http://schemas.microsoft.com/office/drawing/2014/main" id="{465FB0D5-90F0-B240-13F3-D73E3B74C106}"/>
-                </a:ext>
-              </a:extLst>
-            </p:cNvPr>
-            <p:cNvCxnSpPr>
-              <a:cxnSpLocks/>
-            </p:cNvCxnSpPr>
-            <p:nvPr/>
-          </p:nvCxnSpPr>
-          <p:spPr>
-            <a:xfrm flipH="1" flipV="1">
-              <a:off x="6175096" y="3854324"/>
-              <a:ext cx="144932" cy="85738"/>
-            </a:xfrm>
-            <a:prstGeom prst="line">
-              <a:avLst/>
-            </a:prstGeom>
-          </p:spPr>
-          <p:style>
-            <a:lnRef idx="2">
-              <a:schemeClr val="accent1"/>
-            </a:lnRef>
-            <a:fillRef idx="0">
-              <a:schemeClr val="accent1"/>
-            </a:fillRef>
-            <a:effectRef idx="1">
-              <a:schemeClr val="accent1"/>
-            </a:effectRef>
-            <a:fontRef idx="minor">
-              <a:schemeClr val="tx1"/>
-            </a:fontRef>
-          </p:style>
-        </p:cxnSp>
-      </p:grpSp>
       <p:cxnSp>
         <p:nvCxnSpPr>
           <p:cNvPr id="257" name="Straight Connector 256">
@@ -7918,9 +8095,9 @@
           <p:nvPr/>
         </p:nvCxnSpPr>
         <p:spPr>
-          <a:xfrm flipH="1" flipV="1">
-            <a:off x="354682" y="1069536"/>
-            <a:ext cx="4909081" cy="15902"/>
+          <a:xfrm flipH="1">
+            <a:off x="369634" y="832083"/>
+            <a:ext cx="1884980" cy="0"/>
           </a:xfrm>
           <a:prstGeom prst="line">
             <a:avLst/>
@@ -7957,84 +8134,8 @@
         </p:nvCxnSpPr>
         <p:spPr>
           <a:xfrm flipV="1">
-            <a:off x="354682" y="1069536"/>
-            <a:ext cx="0" cy="2501570"/>
-          </a:xfrm>
-          <a:prstGeom prst="line">
-            <a:avLst/>
-          </a:prstGeom>
-        </p:spPr>
-        <p:style>
-          <a:lnRef idx="2">
-            <a:schemeClr val="accent1"/>
-          </a:lnRef>
-          <a:fillRef idx="0">
-            <a:schemeClr val="accent1"/>
-          </a:fillRef>
-          <a:effectRef idx="1">
-            <a:schemeClr val="accent1"/>
-          </a:effectRef>
-          <a:fontRef idx="minor">
-            <a:schemeClr val="tx1"/>
-          </a:fontRef>
-        </p:style>
-      </p:cxnSp>
-      <p:cxnSp>
-        <p:nvCxnSpPr>
-          <p:cNvPr id="290" name="Straight Connector 289">
-            <a:extLst>
-              <a:ext uri="{FF2B5EF4-FFF2-40B4-BE49-F238E27FC236}">
-                <a16:creationId xmlns:a16="http://schemas.microsoft.com/office/drawing/2014/main" id="{1876BEE7-FDFC-0D31-7B67-CAA4ECA61CC2}"/>
-              </a:ext>
-            </a:extLst>
-          </p:cNvPr>
-          <p:cNvCxnSpPr>
-            <a:cxnSpLocks/>
-          </p:cNvCxnSpPr>
-          <p:nvPr/>
-        </p:nvCxnSpPr>
-        <p:spPr>
-          <a:xfrm>
-            <a:off x="4978419" y="2517961"/>
-            <a:ext cx="301247" cy="0"/>
-          </a:xfrm>
-          <a:prstGeom prst="line">
-            <a:avLst/>
-          </a:prstGeom>
-        </p:spPr>
-        <p:style>
-          <a:lnRef idx="2">
-            <a:schemeClr val="accent1"/>
-          </a:lnRef>
-          <a:fillRef idx="0">
-            <a:schemeClr val="accent1"/>
-          </a:fillRef>
-          <a:effectRef idx="1">
-            <a:schemeClr val="accent1"/>
-          </a:effectRef>
-          <a:fontRef idx="minor">
-            <a:schemeClr val="tx1"/>
-          </a:fontRef>
-        </p:style>
-      </p:cxnSp>
-      <p:cxnSp>
-        <p:nvCxnSpPr>
-          <p:cNvPr id="292" name="Straight Connector 291">
-            <a:extLst>
-              <a:ext uri="{FF2B5EF4-FFF2-40B4-BE49-F238E27FC236}">
-                <a16:creationId xmlns:a16="http://schemas.microsoft.com/office/drawing/2014/main" id="{F1B7D252-CFD6-2A20-A0B7-01CB66AF15B1}"/>
-              </a:ext>
-            </a:extLst>
-          </p:cNvPr>
-          <p:cNvCxnSpPr>
-            <a:cxnSpLocks/>
-          </p:cNvCxnSpPr>
-          <p:nvPr/>
-        </p:nvCxnSpPr>
-        <p:spPr>
-          <a:xfrm>
-            <a:off x="5283005" y="1069536"/>
-            <a:ext cx="0" cy="1448425"/>
+            <a:off x="354682" y="838703"/>
+            <a:ext cx="0" cy="2732403"/>
           </a:xfrm>
           <a:prstGeom prst="line">
             <a:avLst/>
@@ -10197,10 +10298,10 @@
       </p:cxnSp>
       <p:cxnSp>
         <p:nvCxnSpPr>
-          <p:cNvPr id="118" name="Straight Arrow Connector 117">
-            <a:extLst>
-              <a:ext uri="{FF2B5EF4-FFF2-40B4-BE49-F238E27FC236}">
-                <a16:creationId xmlns:a16="http://schemas.microsoft.com/office/drawing/2014/main" id="{F4ED870C-7DDD-18C7-6A4F-0D2CDF59EA50}"/>
+          <p:cNvPr id="36" name="Straight Arrow Connector 35">
+            <a:extLst>
+              <a:ext uri="{FF2B5EF4-FFF2-40B4-BE49-F238E27FC236}">
+                <a16:creationId xmlns:a16="http://schemas.microsoft.com/office/drawing/2014/main" id="{1BC55C5F-A294-A543-9E3E-E324A93D8CA8}"/>
               </a:ext>
             </a:extLst>
           </p:cNvPr>
@@ -10210,14 +10311,17 @@
           <p:nvPr/>
         </p:nvCxnSpPr>
         <p:spPr>
-          <a:xfrm>
-            <a:off x="4372527" y="2421549"/>
-            <a:ext cx="374301" cy="0"/>
+          <a:xfrm flipV="1">
+            <a:off x="10997645" y="4034709"/>
+            <a:ext cx="0" cy="616523"/>
           </a:xfrm>
           <a:prstGeom prst="straightConnector1">
             <a:avLst/>
           </a:prstGeom>
           <a:ln>
+            <a:solidFill>
+              <a:srgbClr val="FF0000"/>
+            </a:solidFill>
             <a:tailEnd type="triangle"/>
           </a:ln>
         </p:spPr>
@@ -10236,85 +10340,12 @@
           </a:fontRef>
         </p:style>
       </p:cxnSp>
-      <p:sp>
-        <p:nvSpPr>
-          <p:cNvPr id="119" name="TextBox 118">
-            <a:extLst>
-              <a:ext uri="{FF2B5EF4-FFF2-40B4-BE49-F238E27FC236}">
-                <a16:creationId xmlns:a16="http://schemas.microsoft.com/office/drawing/2014/main" id="{71CFDDD6-C726-691B-9CA9-125BE7E5CADA}"/>
-              </a:ext>
-            </a:extLst>
-          </p:cNvPr>
-          <p:cNvSpPr txBox="1"/>
-          <p:nvPr/>
-        </p:nvSpPr>
-        <p:spPr>
-          <a:xfrm>
-            <a:off x="3310209" y="1961292"/>
-            <a:ext cx="413896" cy="230832"/>
-          </a:xfrm>
-          <a:prstGeom prst="rect">
-            <a:avLst/>
-          </a:prstGeom>
-          <a:noFill/>
-        </p:spPr>
-        <p:txBody>
-          <a:bodyPr wrap="none" rtlCol="0">
-            <a:spAutoFit/>
-          </a:bodyPr>
-          <a:lstStyle/>
-          <a:p>
-            <a:pPr algn="ctr"/>
-            <a:r>
-              <a:rPr lang="en-US" sz="900" dirty="0"/>
-              <a:t>NPC</a:t>
-            </a:r>
-          </a:p>
-        </p:txBody>
-      </p:sp>
-      <p:sp>
-        <p:nvSpPr>
-          <p:cNvPr id="120" name="TextBox 119">
-            <a:extLst>
-              <a:ext uri="{FF2B5EF4-FFF2-40B4-BE49-F238E27FC236}">
-                <a16:creationId xmlns:a16="http://schemas.microsoft.com/office/drawing/2014/main" id="{B5FAFD36-E7BE-8A22-0C52-FA46F61778F0}"/>
-              </a:ext>
-            </a:extLst>
-          </p:cNvPr>
-          <p:cNvSpPr txBox="1"/>
-          <p:nvPr/>
-        </p:nvSpPr>
-        <p:spPr>
-          <a:xfrm>
-            <a:off x="3313362" y="2376665"/>
-            <a:ext cx="407484" cy="230832"/>
-          </a:xfrm>
-          <a:prstGeom prst="rect">
-            <a:avLst/>
-          </a:prstGeom>
-          <a:noFill/>
-        </p:spPr>
-        <p:txBody>
-          <a:bodyPr wrap="none" rtlCol="0">
-            <a:spAutoFit/>
-          </a:bodyPr>
-          <a:lstStyle/>
-          <a:p>
-            <a:pPr algn="ctr"/>
-            <a:r>
-              <a:rPr lang="en-US" sz="900" dirty="0" err="1"/>
-              <a:t>imm</a:t>
-            </a:r>
-            <a:endParaRPr lang="en-US" sz="900" dirty="0"/>
-          </a:p>
-        </p:txBody>
-      </p:sp>
       <p:cxnSp>
         <p:nvCxnSpPr>
-          <p:cNvPr id="121" name="Straight Arrow Connector 120">
-            <a:extLst>
-              <a:ext uri="{FF2B5EF4-FFF2-40B4-BE49-F238E27FC236}">
-                <a16:creationId xmlns:a16="http://schemas.microsoft.com/office/drawing/2014/main" id="{C3290510-9088-6A3E-5DFA-AEBEB6FBD1A1}"/>
+          <p:cNvPr id="37" name="Straight Connector 36">
+            <a:extLst>
+              <a:ext uri="{FF2B5EF4-FFF2-40B4-BE49-F238E27FC236}">
+                <a16:creationId xmlns:a16="http://schemas.microsoft.com/office/drawing/2014/main" id="{ECC19F9B-6EDF-6B64-E3B0-E660B8C52E68}"/>
               </a:ext>
             </a:extLst>
           </p:cNvPr>
@@ -10324,16 +10355,13 @@
           <p:nvPr/>
         </p:nvCxnSpPr>
         <p:spPr>
-          <a:xfrm flipV="1">
-            <a:off x="4656723" y="2579639"/>
-            <a:ext cx="100338" cy="2498"/>
-          </a:xfrm>
-          <a:prstGeom prst="straightConnector1">
-            <a:avLst/>
-          </a:prstGeom>
-          <a:ln>
-            <a:tailEnd type="triangle"/>
-          </a:ln>
+          <a:xfrm flipH="1">
+            <a:off x="10946889" y="4449728"/>
+            <a:ext cx="107051" cy="69157"/>
+          </a:xfrm>
+          <a:prstGeom prst="line">
+            <a:avLst/>
+          </a:prstGeom>
         </p:spPr>
         <p:style>
           <a:lnRef idx="2">
@@ -10350,12 +10378,144 @@
           </a:fontRef>
         </p:style>
       </p:cxnSp>
-      <p:sp>
-        <p:nvSpPr>
-          <p:cNvPr id="132" name="TextBox 131">
-            <a:extLst>
-              <a:ext uri="{FF2B5EF4-FFF2-40B4-BE49-F238E27FC236}">
-                <a16:creationId xmlns:a16="http://schemas.microsoft.com/office/drawing/2014/main" id="{0D9A6022-1D6D-F3DA-CC84-317FF5FD6666}"/>
+      <p:cxnSp>
+        <p:nvCxnSpPr>
+          <p:cNvPr id="105" name="Straight Connector 104">
+            <a:extLst>
+              <a:ext uri="{FF2B5EF4-FFF2-40B4-BE49-F238E27FC236}">
+                <a16:creationId xmlns:a16="http://schemas.microsoft.com/office/drawing/2014/main" id="{D07766FF-137E-CFC5-F36B-18899A589011}"/>
+              </a:ext>
+            </a:extLst>
+          </p:cNvPr>
+          <p:cNvCxnSpPr>
+            <a:cxnSpLocks/>
+          </p:cNvCxnSpPr>
+          <p:nvPr/>
+        </p:nvCxnSpPr>
+        <p:spPr>
+          <a:xfrm flipH="1">
+            <a:off x="5894187" y="2482125"/>
+            <a:ext cx="107051" cy="69157"/>
+          </a:xfrm>
+          <a:prstGeom prst="line">
+            <a:avLst/>
+          </a:prstGeom>
+        </p:spPr>
+        <p:style>
+          <a:lnRef idx="2">
+            <a:schemeClr val="accent1"/>
+          </a:lnRef>
+          <a:fillRef idx="0">
+            <a:schemeClr val="accent1"/>
+          </a:fillRef>
+          <a:effectRef idx="1">
+            <a:schemeClr val="accent1"/>
+          </a:effectRef>
+          <a:fontRef idx="minor">
+            <a:schemeClr val="tx1"/>
+          </a:fontRef>
+        </p:style>
+      </p:cxnSp>
+      <p:cxnSp>
+        <p:nvCxnSpPr>
+          <p:cNvPr id="200" name="Straight Arrow Connector 199">
+            <a:extLst>
+              <a:ext uri="{FF2B5EF4-FFF2-40B4-BE49-F238E27FC236}">
+                <a16:creationId xmlns:a16="http://schemas.microsoft.com/office/drawing/2014/main" id="{D4AC79D0-5B76-D005-1A27-F76F271A152F}"/>
+              </a:ext>
+            </a:extLst>
+          </p:cNvPr>
+          <p:cNvCxnSpPr/>
+          <p:nvPr/>
+        </p:nvCxnSpPr>
+        <p:spPr>
+          <a:xfrm flipV="1">
+            <a:off x="8862876" y="3303944"/>
+            <a:ext cx="0" cy="167673"/>
+          </a:xfrm>
+          <a:prstGeom prst="straightConnector1">
+            <a:avLst/>
+          </a:prstGeom>
+          <a:ln>
+            <a:solidFill>
+              <a:srgbClr val="FF0000"/>
+            </a:solidFill>
+            <a:tailEnd type="triangle"/>
+          </a:ln>
+        </p:spPr>
+        <p:style>
+          <a:lnRef idx="2">
+            <a:schemeClr val="accent1"/>
+          </a:lnRef>
+          <a:fillRef idx="0">
+            <a:schemeClr val="accent1"/>
+          </a:fillRef>
+          <a:effectRef idx="1">
+            <a:schemeClr val="accent1"/>
+          </a:effectRef>
+          <a:fontRef idx="minor">
+            <a:schemeClr val="tx1"/>
+          </a:fontRef>
+        </p:style>
+      </p:cxnSp>
+      <p:sp>
+        <p:nvSpPr>
+          <p:cNvPr id="209" name="Rectangle 208">
+            <a:extLst>
+              <a:ext uri="{FF2B5EF4-FFF2-40B4-BE49-F238E27FC236}">
+                <a16:creationId xmlns:a16="http://schemas.microsoft.com/office/drawing/2014/main" id="{7E4C1978-E959-3B8A-9B69-5A0570C1B433}"/>
+              </a:ext>
+            </a:extLst>
+          </p:cNvPr>
+          <p:cNvSpPr/>
+          <p:nvPr/>
+        </p:nvSpPr>
+        <p:spPr>
+          <a:xfrm>
+            <a:off x="4259968" y="5572927"/>
+            <a:ext cx="663423" cy="460640"/>
+          </a:xfrm>
+          <a:prstGeom prst="rect">
+            <a:avLst/>
+          </a:prstGeom>
+          <a:solidFill>
+            <a:schemeClr val="bg1"/>
+          </a:solidFill>
+        </p:spPr>
+        <p:style>
+          <a:lnRef idx="2">
+            <a:schemeClr val="accent1">
+              <a:shade val="15000"/>
+            </a:schemeClr>
+          </a:lnRef>
+          <a:fillRef idx="1">
+            <a:schemeClr val="accent1"/>
+          </a:fillRef>
+          <a:effectRef idx="0">
+            <a:schemeClr val="accent1"/>
+          </a:effectRef>
+          <a:fontRef idx="minor">
+            <a:schemeClr val="lt1"/>
+          </a:fontRef>
+        </p:style>
+        <p:txBody>
+          <a:bodyPr rtlCol="0" anchor="ctr"/>
+          <a:lstStyle/>
+          <a:p>
+            <a:pPr algn="ctr"/>
+            <a:r>
+              <a:rPr lang="en-US" dirty="0"/>
+              <a:t>PC</a:t>
+            </a:r>
+          </a:p>
+        </p:txBody>
+      </p:sp>
+      <p:sp>
+        <p:nvSpPr>
+          <p:cNvPr id="210" name="TextBox 209">
+            <a:extLst>
+              <a:ext uri="{FF2B5EF4-FFF2-40B4-BE49-F238E27FC236}">
+                <a16:creationId xmlns:a16="http://schemas.microsoft.com/office/drawing/2014/main" id="{B99D9E74-E1B6-5F46-688D-FBFA65E6AF93}"/>
               </a:ext>
             </a:extLst>
           </p:cNvPr>
@@ -10364,8 +10524,618 @@
         </p:nvSpPr>
         <p:spPr>
           <a:xfrm>
-            <a:off x="4334630" y="2461304"/>
-            <a:ext cx="413896" cy="230832"/>
+            <a:off x="4318876" y="5611381"/>
+            <a:ext cx="574196" cy="384721"/>
+          </a:xfrm>
+          <a:prstGeom prst="rect">
+            <a:avLst/>
+          </a:prstGeom>
+          <a:noFill/>
+        </p:spPr>
+        <p:txBody>
+          <a:bodyPr wrap="square" rtlCol="0">
+            <a:spAutoFit/>
+          </a:bodyPr>
+          <a:lstStyle/>
+          <a:p>
+            <a:pPr algn="ctr"/>
+            <a:r>
+              <a:rPr lang="en-US" sz="1000" dirty="0"/>
+              <a:t>Stall</a:t>
+            </a:r>
+          </a:p>
+          <a:p>
+            <a:pPr algn="ctr"/>
+            <a:r>
+              <a:rPr lang="en-US" sz="900" dirty="0"/>
+              <a:t>counter</a:t>
+            </a:r>
+          </a:p>
+        </p:txBody>
+      </p:sp>
+      <p:cxnSp>
+        <p:nvCxnSpPr>
+          <p:cNvPr id="211" name="Straight Arrow Connector 210">
+            <a:extLst>
+              <a:ext uri="{FF2B5EF4-FFF2-40B4-BE49-F238E27FC236}">
+                <a16:creationId xmlns:a16="http://schemas.microsoft.com/office/drawing/2014/main" id="{35A73827-A0E8-19ED-1B3D-EEA836E5E5D2}"/>
+              </a:ext>
+            </a:extLst>
+          </p:cNvPr>
+          <p:cNvCxnSpPr>
+            <a:cxnSpLocks/>
+          </p:cNvCxnSpPr>
+          <p:nvPr/>
+        </p:nvCxnSpPr>
+        <p:spPr>
+          <a:xfrm>
+            <a:off x="4030095" y="5710140"/>
+            <a:ext cx="229874" cy="0"/>
+          </a:xfrm>
+          <a:prstGeom prst="straightConnector1">
+            <a:avLst/>
+          </a:prstGeom>
+          <a:ln>
+            <a:solidFill>
+              <a:srgbClr val="FF0000"/>
+            </a:solidFill>
+            <a:tailEnd type="triangle"/>
+          </a:ln>
+        </p:spPr>
+        <p:style>
+          <a:lnRef idx="2">
+            <a:schemeClr val="accent1"/>
+          </a:lnRef>
+          <a:fillRef idx="0">
+            <a:schemeClr val="accent1"/>
+          </a:fillRef>
+          <a:effectRef idx="1">
+            <a:schemeClr val="accent1"/>
+          </a:effectRef>
+          <a:fontRef idx="minor">
+            <a:schemeClr val="tx1"/>
+          </a:fontRef>
+        </p:style>
+      </p:cxnSp>
+      <p:sp>
+        <p:nvSpPr>
+          <p:cNvPr id="212" name="Rectangle 211">
+            <a:extLst>
+              <a:ext uri="{FF2B5EF4-FFF2-40B4-BE49-F238E27FC236}">
+                <a16:creationId xmlns:a16="http://schemas.microsoft.com/office/drawing/2014/main" id="{42328FB6-6571-FA3C-8E81-028268A77042}"/>
+              </a:ext>
+            </a:extLst>
+          </p:cNvPr>
+          <p:cNvSpPr/>
+          <p:nvPr/>
+        </p:nvSpPr>
+        <p:spPr>
+          <a:xfrm>
+            <a:off x="3351306" y="5573141"/>
+            <a:ext cx="678789" cy="484706"/>
+          </a:xfrm>
+          <a:prstGeom prst="rect">
+            <a:avLst/>
+          </a:prstGeom>
+          <a:solidFill>
+            <a:schemeClr val="bg1"/>
+          </a:solidFill>
+        </p:spPr>
+        <p:style>
+          <a:lnRef idx="2">
+            <a:schemeClr val="accent1">
+              <a:shade val="15000"/>
+            </a:schemeClr>
+          </a:lnRef>
+          <a:fillRef idx="1">
+            <a:schemeClr val="accent1"/>
+          </a:fillRef>
+          <a:effectRef idx="0">
+            <a:schemeClr val="accent1"/>
+          </a:effectRef>
+          <a:fontRef idx="minor">
+            <a:schemeClr val="lt1"/>
+          </a:fontRef>
+        </p:style>
+        <p:txBody>
+          <a:bodyPr rtlCol="0" anchor="ctr"/>
+          <a:lstStyle/>
+          <a:p>
+            <a:pPr algn="ctr"/>
+            <a:r>
+              <a:rPr lang="en-US" dirty="0"/>
+              <a:t>PC</a:t>
+            </a:r>
+          </a:p>
+        </p:txBody>
+      </p:sp>
+      <p:sp>
+        <p:nvSpPr>
+          <p:cNvPr id="213" name="TextBox 212">
+            <a:extLst>
+              <a:ext uri="{FF2B5EF4-FFF2-40B4-BE49-F238E27FC236}">
+                <a16:creationId xmlns:a16="http://schemas.microsoft.com/office/drawing/2014/main" id="{3468D653-D2DB-10F8-EB42-1EF2F69D462B}"/>
+              </a:ext>
+            </a:extLst>
+          </p:cNvPr>
+          <p:cNvSpPr txBox="1"/>
+          <p:nvPr/>
+        </p:nvSpPr>
+        <p:spPr>
+          <a:xfrm>
+            <a:off x="3316652" y="5593028"/>
+            <a:ext cx="729687" cy="400110"/>
+          </a:xfrm>
+          <a:prstGeom prst="rect">
+            <a:avLst/>
+          </a:prstGeom>
+          <a:noFill/>
+        </p:spPr>
+        <p:txBody>
+          <a:bodyPr wrap="square" rtlCol="0">
+            <a:spAutoFit/>
+          </a:bodyPr>
+          <a:lstStyle/>
+          <a:p>
+            <a:pPr algn="ctr"/>
+            <a:r>
+              <a:rPr lang="en-US" sz="1000" dirty="0"/>
+              <a:t>Hazard</a:t>
+            </a:r>
+          </a:p>
+          <a:p>
+            <a:pPr algn="ctr"/>
+            <a:r>
+              <a:rPr lang="en-US" sz="1000" dirty="0"/>
+              <a:t>Detection</a:t>
+            </a:r>
+          </a:p>
+        </p:txBody>
+      </p:sp>
+      <p:cxnSp>
+        <p:nvCxnSpPr>
+          <p:cNvPr id="215" name="Straight Arrow Connector 214">
+            <a:extLst>
+              <a:ext uri="{FF2B5EF4-FFF2-40B4-BE49-F238E27FC236}">
+                <a16:creationId xmlns:a16="http://schemas.microsoft.com/office/drawing/2014/main" id="{2F2A33F8-388E-3212-42F2-F316A4DCC9A2}"/>
+              </a:ext>
+            </a:extLst>
+          </p:cNvPr>
+          <p:cNvCxnSpPr>
+            <a:cxnSpLocks/>
+          </p:cNvCxnSpPr>
+          <p:nvPr/>
+        </p:nvCxnSpPr>
+        <p:spPr>
+          <a:xfrm>
+            <a:off x="2909696" y="5929325"/>
+            <a:ext cx="442253" cy="0"/>
+          </a:xfrm>
+          <a:prstGeom prst="straightConnector1">
+            <a:avLst/>
+          </a:prstGeom>
+          <a:ln>
+            <a:solidFill>
+              <a:srgbClr val="FF0000"/>
+            </a:solidFill>
+            <a:tailEnd type="triangle"/>
+          </a:ln>
+        </p:spPr>
+        <p:style>
+          <a:lnRef idx="2">
+            <a:schemeClr val="accent1"/>
+          </a:lnRef>
+          <a:fillRef idx="0">
+            <a:schemeClr val="accent1"/>
+          </a:fillRef>
+          <a:effectRef idx="1">
+            <a:schemeClr val="accent1"/>
+          </a:effectRef>
+          <a:fontRef idx="minor">
+            <a:schemeClr val="tx1"/>
+          </a:fontRef>
+        </p:style>
+      </p:cxnSp>
+      <p:cxnSp>
+        <p:nvCxnSpPr>
+          <p:cNvPr id="217" name="Straight Arrow Connector 216">
+            <a:extLst>
+              <a:ext uri="{FF2B5EF4-FFF2-40B4-BE49-F238E27FC236}">
+                <a16:creationId xmlns:a16="http://schemas.microsoft.com/office/drawing/2014/main" id="{0C1B9568-C8CF-C3E1-D013-4AB3BA49E0A6}"/>
+              </a:ext>
+            </a:extLst>
+          </p:cNvPr>
+          <p:cNvCxnSpPr>
+            <a:cxnSpLocks/>
+          </p:cNvCxnSpPr>
+          <p:nvPr/>
+        </p:nvCxnSpPr>
+        <p:spPr>
+          <a:xfrm flipH="1">
+            <a:off x="4040822" y="5917227"/>
+            <a:ext cx="205614" cy="0"/>
+          </a:xfrm>
+          <a:prstGeom prst="straightConnector1">
+            <a:avLst/>
+          </a:prstGeom>
+          <a:ln>
+            <a:solidFill>
+              <a:srgbClr val="FF0000"/>
+            </a:solidFill>
+            <a:tailEnd type="triangle"/>
+          </a:ln>
+        </p:spPr>
+        <p:style>
+          <a:lnRef idx="2">
+            <a:schemeClr val="accent1"/>
+          </a:lnRef>
+          <a:fillRef idx="0">
+            <a:schemeClr val="accent1"/>
+          </a:fillRef>
+          <a:effectRef idx="1">
+            <a:schemeClr val="accent1"/>
+          </a:effectRef>
+          <a:fontRef idx="minor">
+            <a:schemeClr val="tx1"/>
+          </a:fontRef>
+        </p:style>
+      </p:cxnSp>
+      <p:cxnSp>
+        <p:nvCxnSpPr>
+          <p:cNvPr id="218" name="Straight Connector 217">
+            <a:extLst>
+              <a:ext uri="{FF2B5EF4-FFF2-40B4-BE49-F238E27FC236}">
+                <a16:creationId xmlns:a16="http://schemas.microsoft.com/office/drawing/2014/main" id="{E49846C5-8569-392B-D7EC-3272F6F2B440}"/>
+              </a:ext>
+            </a:extLst>
+          </p:cNvPr>
+          <p:cNvCxnSpPr>
+            <a:cxnSpLocks/>
+          </p:cNvCxnSpPr>
+          <p:nvPr/>
+        </p:nvCxnSpPr>
+        <p:spPr>
+          <a:xfrm>
+            <a:off x="2920808" y="5560181"/>
+            <a:ext cx="0" cy="367608"/>
+          </a:xfrm>
+          <a:prstGeom prst="line">
+            <a:avLst/>
+          </a:prstGeom>
+          <a:ln>
+            <a:solidFill>
+              <a:srgbClr val="FF0000"/>
+            </a:solidFill>
+          </a:ln>
+        </p:spPr>
+        <p:style>
+          <a:lnRef idx="2">
+            <a:schemeClr val="accent1"/>
+          </a:lnRef>
+          <a:fillRef idx="0">
+            <a:schemeClr val="accent1"/>
+          </a:fillRef>
+          <a:effectRef idx="1">
+            <a:schemeClr val="accent1"/>
+          </a:effectRef>
+          <a:fontRef idx="minor">
+            <a:schemeClr val="tx1"/>
+          </a:fontRef>
+        </p:style>
+      </p:cxnSp>
+      <p:cxnSp>
+        <p:nvCxnSpPr>
+          <p:cNvPr id="220" name="Straight Arrow Connector 219">
+            <a:extLst>
+              <a:ext uri="{FF2B5EF4-FFF2-40B4-BE49-F238E27FC236}">
+                <a16:creationId xmlns:a16="http://schemas.microsoft.com/office/drawing/2014/main" id="{BC2F36C1-D9E2-5F94-A594-FBFAAC53E660}"/>
+              </a:ext>
+            </a:extLst>
+          </p:cNvPr>
+          <p:cNvCxnSpPr>
+            <a:cxnSpLocks/>
+          </p:cNvCxnSpPr>
+          <p:nvPr/>
+        </p:nvCxnSpPr>
+        <p:spPr>
+          <a:xfrm>
+            <a:off x="3145244" y="5712432"/>
+            <a:ext cx="211703" cy="0"/>
+          </a:xfrm>
+          <a:prstGeom prst="straightConnector1">
+            <a:avLst/>
+          </a:prstGeom>
+          <a:ln>
+            <a:solidFill>
+              <a:srgbClr val="FF0000"/>
+            </a:solidFill>
+            <a:tailEnd type="triangle"/>
+          </a:ln>
+        </p:spPr>
+        <p:style>
+          <a:lnRef idx="2">
+            <a:schemeClr val="accent1"/>
+          </a:lnRef>
+          <a:fillRef idx="0">
+            <a:schemeClr val="accent1"/>
+          </a:fillRef>
+          <a:effectRef idx="1">
+            <a:schemeClr val="accent1"/>
+          </a:effectRef>
+          <a:fontRef idx="minor">
+            <a:schemeClr val="tx1"/>
+          </a:fontRef>
+        </p:style>
+      </p:cxnSp>
+      <p:cxnSp>
+        <p:nvCxnSpPr>
+          <p:cNvPr id="221" name="Straight Connector 220">
+            <a:extLst>
+              <a:ext uri="{FF2B5EF4-FFF2-40B4-BE49-F238E27FC236}">
+                <a16:creationId xmlns:a16="http://schemas.microsoft.com/office/drawing/2014/main" id="{6FB6D13F-84F6-B220-EF66-A111BDCAEC0A}"/>
+              </a:ext>
+            </a:extLst>
+          </p:cNvPr>
+          <p:cNvCxnSpPr>
+            <a:cxnSpLocks/>
+          </p:cNvCxnSpPr>
+          <p:nvPr/>
+        </p:nvCxnSpPr>
+        <p:spPr>
+          <a:xfrm flipH="1">
+            <a:off x="2511119" y="5576977"/>
+            <a:ext cx="398618" cy="0"/>
+          </a:xfrm>
+          <a:prstGeom prst="line">
+            <a:avLst/>
+          </a:prstGeom>
+          <a:ln>
+            <a:solidFill>
+              <a:srgbClr val="FF0000"/>
+            </a:solidFill>
+          </a:ln>
+        </p:spPr>
+        <p:style>
+          <a:lnRef idx="2">
+            <a:schemeClr val="accent1"/>
+          </a:lnRef>
+          <a:fillRef idx="0">
+            <a:schemeClr val="accent1"/>
+          </a:fillRef>
+          <a:effectRef idx="1">
+            <a:schemeClr val="accent1"/>
+          </a:effectRef>
+          <a:fontRef idx="minor">
+            <a:schemeClr val="tx1"/>
+          </a:fontRef>
+        </p:style>
+      </p:cxnSp>
+      <p:cxnSp>
+        <p:nvCxnSpPr>
+          <p:cNvPr id="222" name="Straight Connector 221">
+            <a:extLst>
+              <a:ext uri="{FF2B5EF4-FFF2-40B4-BE49-F238E27FC236}">
+                <a16:creationId xmlns:a16="http://schemas.microsoft.com/office/drawing/2014/main" id="{93DC441A-8F48-0B1E-E235-4F3A44A86932}"/>
+              </a:ext>
+            </a:extLst>
+          </p:cNvPr>
+          <p:cNvCxnSpPr>
+            <a:cxnSpLocks/>
+          </p:cNvCxnSpPr>
+          <p:nvPr/>
+        </p:nvCxnSpPr>
+        <p:spPr>
+          <a:xfrm>
+            <a:off x="3136484" y="5250897"/>
+            <a:ext cx="0" cy="470946"/>
+          </a:xfrm>
+          <a:prstGeom prst="line">
+            <a:avLst/>
+          </a:prstGeom>
+          <a:ln>
+            <a:solidFill>
+              <a:srgbClr val="FF0000"/>
+            </a:solidFill>
+          </a:ln>
+        </p:spPr>
+        <p:style>
+          <a:lnRef idx="2">
+            <a:schemeClr val="accent1"/>
+          </a:lnRef>
+          <a:fillRef idx="0">
+            <a:schemeClr val="accent1"/>
+          </a:fillRef>
+          <a:effectRef idx="1">
+            <a:schemeClr val="accent1"/>
+          </a:effectRef>
+          <a:fontRef idx="minor">
+            <a:schemeClr val="tx1"/>
+          </a:fontRef>
+        </p:style>
+      </p:cxnSp>
+      <p:cxnSp>
+        <p:nvCxnSpPr>
+          <p:cNvPr id="224" name="Straight Connector 223">
+            <a:extLst>
+              <a:ext uri="{FF2B5EF4-FFF2-40B4-BE49-F238E27FC236}">
+                <a16:creationId xmlns:a16="http://schemas.microsoft.com/office/drawing/2014/main" id="{A611D7C8-EA59-07B6-6DE0-08A00908356E}"/>
+              </a:ext>
+            </a:extLst>
+          </p:cNvPr>
+          <p:cNvCxnSpPr>
+            <a:cxnSpLocks/>
+          </p:cNvCxnSpPr>
+          <p:nvPr/>
+        </p:nvCxnSpPr>
+        <p:spPr>
+          <a:xfrm>
+            <a:off x="2759850" y="5241548"/>
+            <a:ext cx="383938" cy="0"/>
+          </a:xfrm>
+          <a:prstGeom prst="line">
+            <a:avLst/>
+          </a:prstGeom>
+          <a:ln>
+            <a:solidFill>
+              <a:srgbClr val="FF0000"/>
+            </a:solidFill>
+          </a:ln>
+        </p:spPr>
+        <p:style>
+          <a:lnRef idx="2">
+            <a:schemeClr val="accent1"/>
+          </a:lnRef>
+          <a:fillRef idx="0">
+            <a:schemeClr val="accent1"/>
+          </a:fillRef>
+          <a:effectRef idx="1">
+            <a:schemeClr val="accent1"/>
+          </a:effectRef>
+          <a:fontRef idx="minor">
+            <a:schemeClr val="tx1"/>
+          </a:fontRef>
+        </p:style>
+      </p:cxnSp>
+      <p:cxnSp>
+        <p:nvCxnSpPr>
+          <p:cNvPr id="225" name="Straight Arrow Connector 224">
+            <a:extLst>
+              <a:ext uri="{FF2B5EF4-FFF2-40B4-BE49-F238E27FC236}">
+                <a16:creationId xmlns:a16="http://schemas.microsoft.com/office/drawing/2014/main" id="{4FA97CD2-A4F3-8569-BF3A-77C3076814AA}"/>
+              </a:ext>
+            </a:extLst>
+          </p:cNvPr>
+          <p:cNvCxnSpPr>
+            <a:cxnSpLocks/>
+          </p:cNvCxnSpPr>
+          <p:nvPr/>
+        </p:nvCxnSpPr>
+        <p:spPr>
+          <a:xfrm flipV="1">
+            <a:off x="4124761" y="5481780"/>
+            <a:ext cx="0" cy="225402"/>
+          </a:xfrm>
+          <a:prstGeom prst="straightConnector1">
+            <a:avLst/>
+          </a:prstGeom>
+          <a:ln>
+            <a:solidFill>
+              <a:srgbClr val="FF0000"/>
+            </a:solidFill>
+            <a:tailEnd type="triangle"/>
+          </a:ln>
+        </p:spPr>
+        <p:style>
+          <a:lnRef idx="2">
+            <a:schemeClr val="accent1"/>
+          </a:lnRef>
+          <a:fillRef idx="0">
+            <a:schemeClr val="accent1"/>
+          </a:fillRef>
+          <a:effectRef idx="1">
+            <a:schemeClr val="accent1"/>
+          </a:effectRef>
+          <a:fontRef idx="minor">
+            <a:schemeClr val="tx1"/>
+          </a:fontRef>
+        </p:style>
+      </p:cxnSp>
+      <p:cxnSp>
+        <p:nvCxnSpPr>
+          <p:cNvPr id="226" name="Straight Arrow Connector 225">
+            <a:extLst>
+              <a:ext uri="{FF2B5EF4-FFF2-40B4-BE49-F238E27FC236}">
+                <a16:creationId xmlns:a16="http://schemas.microsoft.com/office/drawing/2014/main" id="{13244B44-D83A-17F1-89B4-8EB805ADF839}"/>
+              </a:ext>
+            </a:extLst>
+          </p:cNvPr>
+          <p:cNvCxnSpPr>
+            <a:cxnSpLocks/>
+          </p:cNvCxnSpPr>
+          <p:nvPr/>
+        </p:nvCxnSpPr>
+        <p:spPr>
+          <a:xfrm>
+            <a:off x="4172823" y="5931908"/>
+            <a:ext cx="0" cy="402752"/>
+          </a:xfrm>
+          <a:prstGeom prst="straightConnector1">
+            <a:avLst/>
+          </a:prstGeom>
+          <a:ln>
+            <a:solidFill>
+              <a:srgbClr val="FF0000"/>
+            </a:solidFill>
+            <a:tailEnd type="triangle"/>
+          </a:ln>
+        </p:spPr>
+        <p:style>
+          <a:lnRef idx="2">
+            <a:schemeClr val="accent1"/>
+          </a:lnRef>
+          <a:fillRef idx="0">
+            <a:schemeClr val="accent1"/>
+          </a:fillRef>
+          <a:effectRef idx="1">
+            <a:schemeClr val="accent1"/>
+          </a:effectRef>
+          <a:fontRef idx="minor">
+            <a:schemeClr val="tx1"/>
+          </a:fontRef>
+        </p:style>
+      </p:cxnSp>
+      <p:cxnSp>
+        <p:nvCxnSpPr>
+          <p:cNvPr id="228" name="Straight Connector 227">
+            <a:extLst>
+              <a:ext uri="{FF2B5EF4-FFF2-40B4-BE49-F238E27FC236}">
+                <a16:creationId xmlns:a16="http://schemas.microsoft.com/office/drawing/2014/main" id="{2FA12D39-0FA2-ABBD-EACC-E063F56B5583}"/>
+              </a:ext>
+            </a:extLst>
+          </p:cNvPr>
+          <p:cNvCxnSpPr/>
+          <p:nvPr/>
+        </p:nvCxnSpPr>
+        <p:spPr>
+          <a:xfrm flipH="1">
+            <a:off x="2952806" y="5177183"/>
+            <a:ext cx="77899" cy="129540"/>
+          </a:xfrm>
+          <a:prstGeom prst="line">
+            <a:avLst/>
+          </a:prstGeom>
+        </p:spPr>
+        <p:style>
+          <a:lnRef idx="2">
+            <a:schemeClr val="accent1"/>
+          </a:lnRef>
+          <a:fillRef idx="0">
+            <a:schemeClr val="accent1"/>
+          </a:fillRef>
+          <a:effectRef idx="1">
+            <a:schemeClr val="accent1"/>
+          </a:effectRef>
+          <a:fontRef idx="minor">
+            <a:schemeClr val="tx1"/>
+          </a:fontRef>
+        </p:style>
+      </p:cxnSp>
+      <p:sp>
+        <p:nvSpPr>
+          <p:cNvPr id="232" name="TextBox 231">
+            <a:extLst>
+              <a:ext uri="{FF2B5EF4-FFF2-40B4-BE49-F238E27FC236}">
+                <a16:creationId xmlns:a16="http://schemas.microsoft.com/office/drawing/2014/main" id="{84B6D813-B5DE-D1FC-AF80-525F92C8F7F8}"/>
+              </a:ext>
+            </a:extLst>
+          </p:cNvPr>
+          <p:cNvSpPr txBox="1"/>
+          <p:nvPr/>
+        </p:nvSpPr>
+        <p:spPr>
+          <a:xfrm>
+            <a:off x="2834608" y="5072614"/>
+            <a:ext cx="245580" cy="230832"/>
           </a:xfrm>
           <a:prstGeom prst="rect">
             <a:avLst/>
@@ -10381,17 +11151,672 @@
             <a:pPr algn="ctr"/>
             <a:r>
               <a:rPr lang="en-US" sz="900" dirty="0"/>
-              <a:t>NPC</a:t>
-            </a:r>
-          </a:p>
-        </p:txBody>
-      </p:sp>
+              <a:t>4</a:t>
+            </a:r>
+          </a:p>
+        </p:txBody>
+      </p:sp>
+      <p:sp>
+        <p:nvSpPr>
+          <p:cNvPr id="233" name="Rectangle 232">
+            <a:extLst>
+              <a:ext uri="{FF2B5EF4-FFF2-40B4-BE49-F238E27FC236}">
+                <a16:creationId xmlns:a16="http://schemas.microsoft.com/office/drawing/2014/main" id="{E46D487D-09B4-2769-C34D-554786351A6B}"/>
+              </a:ext>
+            </a:extLst>
+          </p:cNvPr>
+          <p:cNvSpPr/>
+          <p:nvPr/>
+        </p:nvSpPr>
+        <p:spPr>
+          <a:xfrm>
+            <a:off x="4027858" y="6344690"/>
+            <a:ext cx="663423" cy="460640"/>
+          </a:xfrm>
+          <a:prstGeom prst="rect">
+            <a:avLst/>
+          </a:prstGeom>
+          <a:solidFill>
+            <a:schemeClr val="bg1"/>
+          </a:solidFill>
+        </p:spPr>
+        <p:style>
+          <a:lnRef idx="2">
+            <a:schemeClr val="accent1">
+              <a:shade val="15000"/>
+            </a:schemeClr>
+          </a:lnRef>
+          <a:fillRef idx="1">
+            <a:schemeClr val="accent1"/>
+          </a:fillRef>
+          <a:effectRef idx="0">
+            <a:schemeClr val="accent1"/>
+          </a:effectRef>
+          <a:fontRef idx="minor">
+            <a:schemeClr val="lt1"/>
+          </a:fontRef>
+        </p:style>
+        <p:txBody>
+          <a:bodyPr rtlCol="0" anchor="ctr"/>
+          <a:lstStyle/>
+          <a:p>
+            <a:pPr algn="ctr"/>
+            <a:r>
+              <a:rPr lang="en-US" dirty="0"/>
+              <a:t>PC</a:t>
+            </a:r>
+          </a:p>
+        </p:txBody>
+      </p:sp>
+      <p:sp>
+        <p:nvSpPr>
+          <p:cNvPr id="234" name="TextBox 233">
+            <a:extLst>
+              <a:ext uri="{FF2B5EF4-FFF2-40B4-BE49-F238E27FC236}">
+                <a16:creationId xmlns:a16="http://schemas.microsoft.com/office/drawing/2014/main" id="{B03E2FCB-F4FA-D322-14B8-FB5E1F9573B3}"/>
+              </a:ext>
+            </a:extLst>
+          </p:cNvPr>
+          <p:cNvSpPr txBox="1"/>
+          <p:nvPr/>
+        </p:nvSpPr>
+        <p:spPr>
+          <a:xfrm>
+            <a:off x="4505477" y="6442196"/>
+            <a:ext cx="194710" cy="246221"/>
+          </a:xfrm>
+          <a:prstGeom prst="rect">
+            <a:avLst/>
+          </a:prstGeom>
+          <a:noFill/>
+        </p:spPr>
+        <p:txBody>
+          <a:bodyPr wrap="square" rtlCol="0">
+            <a:spAutoFit/>
+          </a:bodyPr>
+          <a:lstStyle/>
+          <a:p>
+            <a:pPr algn="ctr"/>
+            <a:r>
+              <a:rPr lang="en-US" sz="1000" dirty="0"/>
+              <a:t>&gt;</a:t>
+            </a:r>
+            <a:endParaRPr lang="en-US" sz="900" dirty="0"/>
+          </a:p>
+        </p:txBody>
+      </p:sp>
+      <p:cxnSp>
+        <p:nvCxnSpPr>
+          <p:cNvPr id="237" name="Straight Arrow Connector 236">
+            <a:extLst>
+              <a:ext uri="{FF2B5EF4-FFF2-40B4-BE49-F238E27FC236}">
+                <a16:creationId xmlns:a16="http://schemas.microsoft.com/office/drawing/2014/main" id="{657E1736-86D8-4C89-8125-43EFDE81B0A7}"/>
+              </a:ext>
+            </a:extLst>
+          </p:cNvPr>
+          <p:cNvCxnSpPr>
+            <a:cxnSpLocks/>
+          </p:cNvCxnSpPr>
+          <p:nvPr/>
+        </p:nvCxnSpPr>
+        <p:spPr>
+          <a:xfrm>
+            <a:off x="4696548" y="6575010"/>
+            <a:ext cx="229874" cy="0"/>
+          </a:xfrm>
+          <a:prstGeom prst="straightConnector1">
+            <a:avLst/>
+          </a:prstGeom>
+          <a:ln>
+            <a:solidFill>
+              <a:srgbClr val="FF0000"/>
+            </a:solidFill>
+            <a:tailEnd type="triangle"/>
+          </a:ln>
+        </p:spPr>
+        <p:style>
+          <a:lnRef idx="2">
+            <a:schemeClr val="accent1"/>
+          </a:lnRef>
+          <a:fillRef idx="0">
+            <a:schemeClr val="accent1"/>
+          </a:fillRef>
+          <a:effectRef idx="1">
+            <a:schemeClr val="accent1"/>
+          </a:effectRef>
+          <a:fontRef idx="minor">
+            <a:schemeClr val="tx1"/>
+          </a:fontRef>
+        </p:style>
+      </p:cxnSp>
+      <p:cxnSp>
+        <p:nvCxnSpPr>
+          <p:cNvPr id="241" name="Straight Arrow Connector 240">
+            <a:extLst>
+              <a:ext uri="{FF2B5EF4-FFF2-40B4-BE49-F238E27FC236}">
+                <a16:creationId xmlns:a16="http://schemas.microsoft.com/office/drawing/2014/main" id="{CFF1441C-A871-C028-33DF-68E89133CAC3}"/>
+              </a:ext>
+            </a:extLst>
+          </p:cNvPr>
+          <p:cNvCxnSpPr>
+            <a:cxnSpLocks/>
+          </p:cNvCxnSpPr>
+          <p:nvPr/>
+        </p:nvCxnSpPr>
+        <p:spPr>
+          <a:xfrm>
+            <a:off x="4566636" y="6234492"/>
+            <a:ext cx="0" cy="100168"/>
+          </a:xfrm>
+          <a:prstGeom prst="straightConnector1">
+            <a:avLst/>
+          </a:prstGeom>
+          <a:ln>
+            <a:solidFill>
+              <a:srgbClr val="FF0000"/>
+            </a:solidFill>
+            <a:tailEnd type="triangle"/>
+          </a:ln>
+        </p:spPr>
+        <p:style>
+          <a:lnRef idx="2">
+            <a:schemeClr val="accent1"/>
+          </a:lnRef>
+          <a:fillRef idx="0">
+            <a:schemeClr val="accent1"/>
+          </a:fillRef>
+          <a:effectRef idx="1">
+            <a:schemeClr val="accent1"/>
+          </a:effectRef>
+          <a:fontRef idx="minor">
+            <a:schemeClr val="tx1"/>
+          </a:fontRef>
+        </p:style>
+      </p:cxnSp>
+      <p:sp>
+        <p:nvSpPr>
+          <p:cNvPr id="242" name="TextBox 241">
+            <a:extLst>
+              <a:ext uri="{FF2B5EF4-FFF2-40B4-BE49-F238E27FC236}">
+                <a16:creationId xmlns:a16="http://schemas.microsoft.com/office/drawing/2014/main" id="{5CF4424D-C27A-0FCF-199D-B10372DC54C3}"/>
+              </a:ext>
+            </a:extLst>
+          </p:cNvPr>
+          <p:cNvSpPr txBox="1"/>
+          <p:nvPr/>
+        </p:nvSpPr>
+        <p:spPr>
+          <a:xfrm>
+            <a:off x="4443371" y="6038820"/>
+            <a:ext cx="245580" cy="230832"/>
+          </a:xfrm>
+          <a:prstGeom prst="rect">
+            <a:avLst/>
+          </a:prstGeom>
+          <a:noFill/>
+        </p:spPr>
+        <p:txBody>
+          <a:bodyPr wrap="none" rtlCol="0">
+            <a:spAutoFit/>
+          </a:bodyPr>
+          <a:lstStyle/>
+          <a:p>
+            <a:pPr algn="ctr"/>
+            <a:r>
+              <a:rPr lang="en-US" sz="900" dirty="0"/>
+              <a:t>0</a:t>
+            </a:r>
+          </a:p>
+        </p:txBody>
+      </p:sp>
+      <p:sp>
+        <p:nvSpPr>
+          <p:cNvPr id="244" name="TextBox 243">
+            <a:extLst>
+              <a:ext uri="{FF2B5EF4-FFF2-40B4-BE49-F238E27FC236}">
+                <a16:creationId xmlns:a16="http://schemas.microsoft.com/office/drawing/2014/main" id="{7F7540FB-45AD-3BC3-48E6-D125DD8550E7}"/>
+              </a:ext>
+            </a:extLst>
+          </p:cNvPr>
+          <p:cNvSpPr txBox="1"/>
+          <p:nvPr/>
+        </p:nvSpPr>
+        <p:spPr>
+          <a:xfrm>
+            <a:off x="4802612" y="6461559"/>
+            <a:ext cx="574196" cy="246221"/>
+          </a:xfrm>
+          <a:prstGeom prst="rect">
+            <a:avLst/>
+          </a:prstGeom>
+          <a:noFill/>
+        </p:spPr>
+        <p:txBody>
+          <a:bodyPr wrap="square" rtlCol="0">
+            <a:spAutoFit/>
+          </a:bodyPr>
+          <a:lstStyle/>
+          <a:p>
+            <a:pPr algn="ctr"/>
+            <a:r>
+              <a:rPr lang="en-US" sz="1000" dirty="0"/>
+              <a:t>Stall</a:t>
+            </a:r>
+          </a:p>
+        </p:txBody>
+      </p:sp>
+      <p:sp>
+        <p:nvSpPr>
+          <p:cNvPr id="245" name="TextBox 244">
+            <a:extLst>
+              <a:ext uri="{FF2B5EF4-FFF2-40B4-BE49-F238E27FC236}">
+                <a16:creationId xmlns:a16="http://schemas.microsoft.com/office/drawing/2014/main" id="{6F693865-D421-FB3F-F617-69C8DFB74DDA}"/>
+              </a:ext>
+            </a:extLst>
+          </p:cNvPr>
+          <p:cNvSpPr txBox="1"/>
+          <p:nvPr/>
+        </p:nvSpPr>
+        <p:spPr>
+          <a:xfrm>
+            <a:off x="3408450" y="6047112"/>
+            <a:ext cx="861489" cy="246221"/>
+          </a:xfrm>
+          <a:prstGeom prst="rect">
+            <a:avLst/>
+          </a:prstGeom>
+          <a:noFill/>
+        </p:spPr>
+        <p:txBody>
+          <a:bodyPr wrap="square" rtlCol="0">
+            <a:spAutoFit/>
+          </a:bodyPr>
+          <a:lstStyle/>
+          <a:p>
+            <a:pPr algn="ctr"/>
+            <a:r>
+              <a:rPr lang="en-US" sz="1000" dirty="0" err="1"/>
+              <a:t>stall_count</a:t>
+            </a:r>
+            <a:endParaRPr lang="en-US" sz="1000" dirty="0"/>
+          </a:p>
+        </p:txBody>
+      </p:sp>
+      <p:sp>
+        <p:nvSpPr>
+          <p:cNvPr id="246" name="TextBox 245">
+            <a:extLst>
+              <a:ext uri="{FF2B5EF4-FFF2-40B4-BE49-F238E27FC236}">
+                <a16:creationId xmlns:a16="http://schemas.microsoft.com/office/drawing/2014/main" id="{3BA26EF9-D46A-45DC-70BA-21364891CB27}"/>
+              </a:ext>
+            </a:extLst>
+          </p:cNvPr>
+          <p:cNvSpPr txBox="1"/>
+          <p:nvPr/>
+        </p:nvSpPr>
+        <p:spPr>
+          <a:xfrm>
+            <a:off x="3685159" y="5311002"/>
+            <a:ext cx="861489" cy="246221"/>
+          </a:xfrm>
+          <a:prstGeom prst="rect">
+            <a:avLst/>
+          </a:prstGeom>
+          <a:noFill/>
+        </p:spPr>
+        <p:txBody>
+          <a:bodyPr wrap="square" rtlCol="0">
+            <a:spAutoFit/>
+          </a:bodyPr>
+          <a:lstStyle/>
+          <a:p>
+            <a:pPr algn="ctr"/>
+            <a:r>
+              <a:rPr lang="en-US" sz="1000" dirty="0" err="1"/>
+              <a:t>start_stall</a:t>
+            </a:r>
+            <a:endParaRPr lang="en-US" sz="1000" dirty="0"/>
+          </a:p>
+        </p:txBody>
+      </p:sp>
+      <p:cxnSp>
+        <p:nvCxnSpPr>
+          <p:cNvPr id="12" name="Straight Arrow Connector 11">
+            <a:extLst>
+              <a:ext uri="{FF2B5EF4-FFF2-40B4-BE49-F238E27FC236}">
+                <a16:creationId xmlns:a16="http://schemas.microsoft.com/office/drawing/2014/main" id="{C104EDAA-FD8A-4089-C218-104118D04C57}"/>
+              </a:ext>
+            </a:extLst>
+          </p:cNvPr>
+          <p:cNvCxnSpPr>
+            <a:cxnSpLocks/>
+          </p:cNvCxnSpPr>
+          <p:nvPr/>
+        </p:nvCxnSpPr>
+        <p:spPr>
+          <a:xfrm>
+            <a:off x="3472911" y="6051625"/>
+            <a:ext cx="0" cy="402752"/>
+          </a:xfrm>
+          <a:prstGeom prst="straightConnector1">
+            <a:avLst/>
+          </a:prstGeom>
+          <a:ln>
+            <a:solidFill>
+              <a:srgbClr val="FF0000"/>
+            </a:solidFill>
+            <a:tailEnd type="triangle"/>
+          </a:ln>
+        </p:spPr>
+        <p:style>
+          <a:lnRef idx="2">
+            <a:schemeClr val="accent1"/>
+          </a:lnRef>
+          <a:fillRef idx="0">
+            <a:schemeClr val="accent1"/>
+          </a:fillRef>
+          <a:effectRef idx="1">
+            <a:schemeClr val="accent1"/>
+          </a:effectRef>
+          <a:fontRef idx="minor">
+            <a:schemeClr val="tx1"/>
+          </a:fontRef>
+        </p:style>
+      </p:cxnSp>
+      <p:sp>
+        <p:nvSpPr>
+          <p:cNvPr id="17" name="TextBox 16">
+            <a:extLst>
+              <a:ext uri="{FF2B5EF4-FFF2-40B4-BE49-F238E27FC236}">
+                <a16:creationId xmlns:a16="http://schemas.microsoft.com/office/drawing/2014/main" id="{DD23CE11-915B-B2E0-552F-137C75A7E9C7}"/>
+              </a:ext>
+            </a:extLst>
+          </p:cNvPr>
+          <p:cNvSpPr txBox="1"/>
+          <p:nvPr/>
+        </p:nvSpPr>
+        <p:spPr>
+          <a:xfrm>
+            <a:off x="2990194" y="6420855"/>
+            <a:ext cx="935914" cy="246221"/>
+          </a:xfrm>
+          <a:prstGeom prst="rect">
+            <a:avLst/>
+          </a:prstGeom>
+          <a:noFill/>
+        </p:spPr>
+        <p:txBody>
+          <a:bodyPr wrap="square" rtlCol="0">
+            <a:spAutoFit/>
+          </a:bodyPr>
+          <a:lstStyle/>
+          <a:p>
+            <a:pPr algn="ctr"/>
+            <a:r>
+              <a:rPr lang="en-US" sz="1000" dirty="0" err="1"/>
+              <a:t>double_stall</a:t>
+            </a:r>
+            <a:endParaRPr lang="en-US" sz="1000" dirty="0"/>
+          </a:p>
+        </p:txBody>
+      </p:sp>
+      <p:sp>
+        <p:nvSpPr>
+          <p:cNvPr id="32" name="Rectangle 31">
+            <a:extLst>
+              <a:ext uri="{FF2B5EF4-FFF2-40B4-BE49-F238E27FC236}">
+                <a16:creationId xmlns:a16="http://schemas.microsoft.com/office/drawing/2014/main" id="{2143C07A-7BD3-285F-779B-EA5E4E2370C1}"/>
+              </a:ext>
+            </a:extLst>
+          </p:cNvPr>
+          <p:cNvSpPr/>
+          <p:nvPr/>
+        </p:nvSpPr>
+        <p:spPr>
+          <a:xfrm>
+            <a:off x="1076734" y="4385870"/>
+            <a:ext cx="865785" cy="460641"/>
+          </a:xfrm>
+          <a:prstGeom prst="rect">
+            <a:avLst/>
+          </a:prstGeom>
+          <a:solidFill>
+            <a:schemeClr val="bg1"/>
+          </a:solidFill>
+        </p:spPr>
+        <p:style>
+          <a:lnRef idx="2">
+            <a:schemeClr val="accent1">
+              <a:shade val="15000"/>
+            </a:schemeClr>
+          </a:lnRef>
+          <a:fillRef idx="1">
+            <a:schemeClr val="accent1"/>
+          </a:fillRef>
+          <a:effectRef idx="0">
+            <a:schemeClr val="accent1"/>
+          </a:effectRef>
+          <a:fontRef idx="minor">
+            <a:schemeClr val="lt1"/>
+          </a:fontRef>
+        </p:style>
+        <p:txBody>
+          <a:bodyPr rtlCol="0" anchor="ctr"/>
+          <a:lstStyle/>
+          <a:p>
+            <a:pPr algn="ctr"/>
+            <a:r>
+              <a:rPr lang="en-US" dirty="0"/>
+              <a:t>PC</a:t>
+            </a:r>
+          </a:p>
+        </p:txBody>
+      </p:sp>
+      <p:sp>
+        <p:nvSpPr>
+          <p:cNvPr id="34" name="TextBox 33">
+            <a:extLst>
+              <a:ext uri="{FF2B5EF4-FFF2-40B4-BE49-F238E27FC236}">
+                <a16:creationId xmlns:a16="http://schemas.microsoft.com/office/drawing/2014/main" id="{B6011141-02A1-8CC5-681B-B9793C2C8CE0}"/>
+              </a:ext>
+            </a:extLst>
+          </p:cNvPr>
+          <p:cNvSpPr txBox="1"/>
+          <p:nvPr/>
+        </p:nvSpPr>
+        <p:spPr>
+          <a:xfrm>
+            <a:off x="1025974" y="4354867"/>
+            <a:ext cx="986167" cy="400110"/>
+          </a:xfrm>
+          <a:prstGeom prst="rect">
+            <a:avLst/>
+          </a:prstGeom>
+          <a:noFill/>
+        </p:spPr>
+        <p:txBody>
+          <a:bodyPr wrap="none" rtlCol="0">
+            <a:spAutoFit/>
+          </a:bodyPr>
+          <a:lstStyle/>
+          <a:p>
+            <a:pPr algn="ctr"/>
+            <a:r>
+              <a:rPr lang="en-US" sz="1000" dirty="0"/>
+              <a:t>Sign Extension</a:t>
+            </a:r>
+          </a:p>
+          <a:p>
+            <a:pPr algn="ctr"/>
+            <a:endParaRPr lang="en-US" sz="1000" dirty="0"/>
+          </a:p>
+        </p:txBody>
+      </p:sp>
+      <p:sp>
+        <p:nvSpPr>
+          <p:cNvPr id="35" name="TextBox 34">
+            <a:extLst>
+              <a:ext uri="{FF2B5EF4-FFF2-40B4-BE49-F238E27FC236}">
+                <a16:creationId xmlns:a16="http://schemas.microsoft.com/office/drawing/2014/main" id="{B00F8394-6420-6E0A-2BDA-EFD3CDF8A0E0}"/>
+              </a:ext>
+            </a:extLst>
+          </p:cNvPr>
+          <p:cNvSpPr txBox="1"/>
+          <p:nvPr/>
+        </p:nvSpPr>
+        <p:spPr>
+          <a:xfrm>
+            <a:off x="1581773" y="4562161"/>
+            <a:ext cx="407484" cy="230832"/>
+          </a:xfrm>
+          <a:prstGeom prst="rect">
+            <a:avLst/>
+          </a:prstGeom>
+          <a:noFill/>
+        </p:spPr>
+        <p:txBody>
+          <a:bodyPr wrap="none" rtlCol="0">
+            <a:spAutoFit/>
+          </a:bodyPr>
+          <a:lstStyle/>
+          <a:p>
+            <a:pPr algn="ctr"/>
+            <a:r>
+              <a:rPr lang="en-US" sz="900" dirty="0" err="1"/>
+              <a:t>imm</a:t>
+            </a:r>
+            <a:endParaRPr lang="en-US" sz="900" dirty="0"/>
+          </a:p>
+        </p:txBody>
+      </p:sp>
+      <p:cxnSp>
+        <p:nvCxnSpPr>
+          <p:cNvPr id="47" name="Straight Arrow Connector 46">
+            <a:extLst>
+              <a:ext uri="{FF2B5EF4-FFF2-40B4-BE49-F238E27FC236}">
+                <a16:creationId xmlns:a16="http://schemas.microsoft.com/office/drawing/2014/main" id="{3AE93C80-3013-DEAA-0C8C-8059FBC73417}"/>
+              </a:ext>
+            </a:extLst>
+          </p:cNvPr>
+          <p:cNvCxnSpPr>
+            <a:cxnSpLocks/>
+          </p:cNvCxnSpPr>
+          <p:nvPr/>
+        </p:nvCxnSpPr>
+        <p:spPr>
+          <a:xfrm>
+            <a:off x="905315" y="4716303"/>
+            <a:ext cx="171419" cy="0"/>
+          </a:xfrm>
+          <a:prstGeom prst="straightConnector1">
+            <a:avLst/>
+          </a:prstGeom>
+          <a:ln>
+            <a:tailEnd type="triangle"/>
+          </a:ln>
+        </p:spPr>
+        <p:style>
+          <a:lnRef idx="2">
+            <a:schemeClr val="accent1"/>
+          </a:lnRef>
+          <a:fillRef idx="0">
+            <a:schemeClr val="accent1"/>
+          </a:fillRef>
+          <a:effectRef idx="1">
+            <a:schemeClr val="accent1"/>
+          </a:effectRef>
+          <a:fontRef idx="minor">
+            <a:schemeClr val="tx1"/>
+          </a:fontRef>
+        </p:style>
+      </p:cxnSp>
+      <p:sp>
+        <p:nvSpPr>
+          <p:cNvPr id="53" name="TextBox 52">
+            <a:extLst>
+              <a:ext uri="{FF2B5EF4-FFF2-40B4-BE49-F238E27FC236}">
+                <a16:creationId xmlns:a16="http://schemas.microsoft.com/office/drawing/2014/main" id="{54DB48A0-8679-7515-A495-8900C2A20FCD}"/>
+              </a:ext>
+            </a:extLst>
+          </p:cNvPr>
+          <p:cNvSpPr txBox="1"/>
+          <p:nvPr/>
+        </p:nvSpPr>
+        <p:spPr>
+          <a:xfrm>
+            <a:off x="1019434" y="4600887"/>
+            <a:ext cx="407484" cy="230832"/>
+          </a:xfrm>
+          <a:prstGeom prst="rect">
+            <a:avLst/>
+          </a:prstGeom>
+          <a:noFill/>
+        </p:spPr>
+        <p:txBody>
+          <a:bodyPr wrap="none" rtlCol="0">
+            <a:spAutoFit/>
+          </a:bodyPr>
+          <a:lstStyle/>
+          <a:p>
+            <a:pPr algn="ctr"/>
+            <a:r>
+              <a:rPr lang="en-US" sz="900" dirty="0" err="1"/>
+              <a:t>instr</a:t>
+            </a:r>
+            <a:endParaRPr lang="en-US" sz="900" dirty="0"/>
+          </a:p>
+        </p:txBody>
+      </p:sp>
+      <p:cxnSp>
+        <p:nvCxnSpPr>
+          <p:cNvPr id="59" name="Straight Arrow Connector 58">
+            <a:extLst>
+              <a:ext uri="{FF2B5EF4-FFF2-40B4-BE49-F238E27FC236}">
+                <a16:creationId xmlns:a16="http://schemas.microsoft.com/office/drawing/2014/main" id="{F5DC23A1-E3C9-66CD-B3A5-E308601A02A9}"/>
+              </a:ext>
+            </a:extLst>
+          </p:cNvPr>
+          <p:cNvCxnSpPr>
+            <a:cxnSpLocks/>
+          </p:cNvCxnSpPr>
+          <p:nvPr/>
+        </p:nvCxnSpPr>
+        <p:spPr>
+          <a:xfrm>
+            <a:off x="1953050" y="4696912"/>
+            <a:ext cx="377733" cy="0"/>
+          </a:xfrm>
+          <a:prstGeom prst="straightConnector1">
+            <a:avLst/>
+          </a:prstGeom>
+          <a:ln>
+            <a:solidFill>
+              <a:srgbClr val="FF0000"/>
+            </a:solidFill>
+            <a:tailEnd type="triangle"/>
+          </a:ln>
+        </p:spPr>
+        <p:style>
+          <a:lnRef idx="2">
+            <a:schemeClr val="accent1"/>
+          </a:lnRef>
+          <a:fillRef idx="0">
+            <a:schemeClr val="accent1"/>
+          </a:fillRef>
+          <a:effectRef idx="1">
+            <a:schemeClr val="accent1"/>
+          </a:effectRef>
+          <a:fontRef idx="minor">
+            <a:schemeClr val="tx1"/>
+          </a:fontRef>
+        </p:style>
+      </p:cxnSp>
       <p:grpSp>
         <p:nvGrpSpPr>
-          <p:cNvPr id="137" name="Group 136">
-            <a:extLst>
-              <a:ext uri="{FF2B5EF4-FFF2-40B4-BE49-F238E27FC236}">
-                <a16:creationId xmlns:a16="http://schemas.microsoft.com/office/drawing/2014/main" id="{8B5AEF34-ADB3-754B-DE80-ABD4D3F0450B}"/>
+          <p:cNvPr id="66" name="Group 65">
+            <a:extLst>
+              <a:ext uri="{FF2B5EF4-FFF2-40B4-BE49-F238E27FC236}">
+                <a16:creationId xmlns:a16="http://schemas.microsoft.com/office/drawing/2014/main" id="{1043A246-575E-278D-E538-E3ACE7F6C7ED}"/>
               </a:ext>
             </a:extLst>
           </p:cNvPr>
@@ -10400,7 +11825,447 @@
         </p:nvGrpSpPr>
         <p:grpSpPr>
           <a:xfrm>
-            <a:off x="3849394" y="1970747"/>
+            <a:off x="1721311" y="1581032"/>
+            <a:ext cx="234557" cy="870633"/>
+            <a:chOff x="6175096" y="3854324"/>
+            <a:chExt cx="144932" cy="375881"/>
+          </a:xfrm>
+        </p:grpSpPr>
+        <p:cxnSp>
+          <p:nvCxnSpPr>
+            <p:cNvPr id="67" name="Straight Connector 66">
+              <a:extLst>
+                <a:ext uri="{FF2B5EF4-FFF2-40B4-BE49-F238E27FC236}">
+                  <a16:creationId xmlns:a16="http://schemas.microsoft.com/office/drawing/2014/main" id="{2A85262C-2A8B-7F76-B3E9-6E12094B4BB8}"/>
+                </a:ext>
+              </a:extLst>
+            </p:cNvPr>
+            <p:cNvCxnSpPr>
+              <a:cxnSpLocks/>
+            </p:cNvCxnSpPr>
+            <p:nvPr/>
+          </p:nvCxnSpPr>
+          <p:spPr>
+            <a:xfrm>
+              <a:off x="6180266" y="3861114"/>
+              <a:ext cx="0" cy="369091"/>
+            </a:xfrm>
+            <a:prstGeom prst="line">
+              <a:avLst/>
+            </a:prstGeom>
+          </p:spPr>
+          <p:style>
+            <a:lnRef idx="2">
+              <a:schemeClr val="accent1"/>
+            </a:lnRef>
+            <a:fillRef idx="0">
+              <a:schemeClr val="accent1"/>
+            </a:fillRef>
+            <a:effectRef idx="1">
+              <a:schemeClr val="accent1"/>
+            </a:effectRef>
+            <a:fontRef idx="minor">
+              <a:schemeClr val="tx1"/>
+            </a:fontRef>
+          </p:style>
+        </p:cxnSp>
+        <p:cxnSp>
+          <p:nvCxnSpPr>
+            <p:cNvPr id="75" name="Straight Connector 74">
+              <a:extLst>
+                <a:ext uri="{FF2B5EF4-FFF2-40B4-BE49-F238E27FC236}">
+                  <a16:creationId xmlns:a16="http://schemas.microsoft.com/office/drawing/2014/main" id="{D2FFBFEA-3D6D-7E02-E9CC-F2B56CBCAF6C}"/>
+                </a:ext>
+              </a:extLst>
+            </p:cNvPr>
+            <p:cNvCxnSpPr>
+              <a:cxnSpLocks/>
+            </p:cNvCxnSpPr>
+            <p:nvPr/>
+          </p:nvCxnSpPr>
+          <p:spPr>
+            <a:xfrm>
+              <a:off x="6320028" y="3936909"/>
+              <a:ext cx="0" cy="212558"/>
+            </a:xfrm>
+            <a:prstGeom prst="line">
+              <a:avLst/>
+            </a:prstGeom>
+          </p:spPr>
+          <p:style>
+            <a:lnRef idx="2">
+              <a:schemeClr val="accent1"/>
+            </a:lnRef>
+            <a:fillRef idx="0">
+              <a:schemeClr val="accent1"/>
+            </a:fillRef>
+            <a:effectRef idx="1">
+              <a:schemeClr val="accent1"/>
+            </a:effectRef>
+            <a:fontRef idx="minor">
+              <a:schemeClr val="tx1"/>
+            </a:fontRef>
+          </p:style>
+        </p:cxnSp>
+        <p:cxnSp>
+          <p:nvCxnSpPr>
+            <p:cNvPr id="76" name="Straight Connector 75">
+              <a:extLst>
+                <a:ext uri="{FF2B5EF4-FFF2-40B4-BE49-F238E27FC236}">
+                  <a16:creationId xmlns:a16="http://schemas.microsoft.com/office/drawing/2014/main" id="{4391D130-D329-A973-7C7C-351FDC1DB19B}"/>
+                </a:ext>
+              </a:extLst>
+            </p:cNvPr>
+            <p:cNvCxnSpPr>
+              <a:cxnSpLocks/>
+            </p:cNvCxnSpPr>
+            <p:nvPr/>
+          </p:nvCxnSpPr>
+          <p:spPr>
+            <a:xfrm flipH="1">
+              <a:off x="6175096" y="4152620"/>
+              <a:ext cx="144932" cy="77585"/>
+            </a:xfrm>
+            <a:prstGeom prst="line">
+              <a:avLst/>
+            </a:prstGeom>
+          </p:spPr>
+          <p:style>
+            <a:lnRef idx="2">
+              <a:schemeClr val="accent1"/>
+            </a:lnRef>
+            <a:fillRef idx="0">
+              <a:schemeClr val="accent1"/>
+            </a:fillRef>
+            <a:effectRef idx="1">
+              <a:schemeClr val="accent1"/>
+            </a:effectRef>
+            <a:fontRef idx="minor">
+              <a:schemeClr val="tx1"/>
+            </a:fontRef>
+          </p:style>
+        </p:cxnSp>
+        <p:cxnSp>
+          <p:nvCxnSpPr>
+            <p:cNvPr id="77" name="Straight Connector 76">
+              <a:extLst>
+                <a:ext uri="{FF2B5EF4-FFF2-40B4-BE49-F238E27FC236}">
+                  <a16:creationId xmlns:a16="http://schemas.microsoft.com/office/drawing/2014/main" id="{35B1BBA6-27CC-E2BA-CFC7-3DBD977056F2}"/>
+                </a:ext>
+              </a:extLst>
+            </p:cNvPr>
+            <p:cNvCxnSpPr>
+              <a:cxnSpLocks/>
+            </p:cNvCxnSpPr>
+            <p:nvPr/>
+          </p:nvCxnSpPr>
+          <p:spPr>
+            <a:xfrm flipH="1" flipV="1">
+              <a:off x="6175096" y="3854324"/>
+              <a:ext cx="144932" cy="85738"/>
+            </a:xfrm>
+            <a:prstGeom prst="line">
+              <a:avLst/>
+            </a:prstGeom>
+          </p:spPr>
+          <p:style>
+            <a:lnRef idx="2">
+              <a:schemeClr val="accent1"/>
+            </a:lnRef>
+            <a:fillRef idx="0">
+              <a:schemeClr val="accent1"/>
+            </a:fillRef>
+            <a:effectRef idx="1">
+              <a:schemeClr val="accent1"/>
+            </a:effectRef>
+            <a:fontRef idx="minor">
+              <a:schemeClr val="tx1"/>
+            </a:fontRef>
+          </p:style>
+        </p:cxnSp>
+      </p:grpSp>
+      <p:cxnSp>
+        <p:nvCxnSpPr>
+          <p:cNvPr id="78" name="Straight Connector 77">
+            <a:extLst>
+              <a:ext uri="{FF2B5EF4-FFF2-40B4-BE49-F238E27FC236}">
+                <a16:creationId xmlns:a16="http://schemas.microsoft.com/office/drawing/2014/main" id="{2D1CB698-C310-35E9-96F7-FB8DB191A463}"/>
+              </a:ext>
+            </a:extLst>
+          </p:cNvPr>
+          <p:cNvCxnSpPr>
+            <a:cxnSpLocks/>
+          </p:cNvCxnSpPr>
+          <p:nvPr/>
+        </p:nvCxnSpPr>
+        <p:spPr>
+          <a:xfrm>
+            <a:off x="1956844" y="2028868"/>
+            <a:ext cx="301247" cy="0"/>
+          </a:xfrm>
+          <a:prstGeom prst="line">
+            <a:avLst/>
+          </a:prstGeom>
+        </p:spPr>
+        <p:style>
+          <a:lnRef idx="2">
+            <a:schemeClr val="accent1"/>
+          </a:lnRef>
+          <a:fillRef idx="0">
+            <a:schemeClr val="accent1"/>
+          </a:fillRef>
+          <a:effectRef idx="1">
+            <a:schemeClr val="accent1"/>
+          </a:effectRef>
+          <a:fontRef idx="minor">
+            <a:schemeClr val="tx1"/>
+          </a:fontRef>
+        </p:style>
+      </p:cxnSp>
+      <p:cxnSp>
+        <p:nvCxnSpPr>
+          <p:cNvPr id="79" name="Straight Connector 78">
+            <a:extLst>
+              <a:ext uri="{FF2B5EF4-FFF2-40B4-BE49-F238E27FC236}">
+                <a16:creationId xmlns:a16="http://schemas.microsoft.com/office/drawing/2014/main" id="{85985002-8499-9138-27D1-683C5A5ED252}"/>
+              </a:ext>
+            </a:extLst>
+          </p:cNvPr>
+          <p:cNvCxnSpPr>
+            <a:cxnSpLocks/>
+          </p:cNvCxnSpPr>
+          <p:nvPr/>
+        </p:nvCxnSpPr>
+        <p:spPr>
+          <a:xfrm>
+            <a:off x="2258572" y="838703"/>
+            <a:ext cx="0" cy="1198389"/>
+          </a:xfrm>
+          <a:prstGeom prst="line">
+            <a:avLst/>
+          </a:prstGeom>
+        </p:spPr>
+        <p:style>
+          <a:lnRef idx="2">
+            <a:schemeClr val="accent1"/>
+          </a:lnRef>
+          <a:fillRef idx="0">
+            <a:schemeClr val="accent1"/>
+          </a:fillRef>
+          <a:effectRef idx="1">
+            <a:schemeClr val="accent1"/>
+          </a:effectRef>
+          <a:fontRef idx="minor">
+            <a:schemeClr val="tx1"/>
+          </a:fontRef>
+        </p:style>
+      </p:cxnSp>
+      <p:cxnSp>
+        <p:nvCxnSpPr>
+          <p:cNvPr id="80" name="Straight Arrow Connector 79">
+            <a:extLst>
+              <a:ext uri="{FF2B5EF4-FFF2-40B4-BE49-F238E27FC236}">
+                <a16:creationId xmlns:a16="http://schemas.microsoft.com/office/drawing/2014/main" id="{FB0CE3A1-6952-8856-AAEC-8A125B2DDFE8}"/>
+              </a:ext>
+            </a:extLst>
+          </p:cNvPr>
+          <p:cNvCxnSpPr>
+            <a:cxnSpLocks/>
+          </p:cNvCxnSpPr>
+          <p:nvPr/>
+        </p:nvCxnSpPr>
+        <p:spPr>
+          <a:xfrm>
+            <a:off x="1350952" y="1932456"/>
+            <a:ext cx="374301" cy="0"/>
+          </a:xfrm>
+          <a:prstGeom prst="straightConnector1">
+            <a:avLst/>
+          </a:prstGeom>
+          <a:ln>
+            <a:tailEnd type="triangle"/>
+          </a:ln>
+        </p:spPr>
+        <p:style>
+          <a:lnRef idx="2">
+            <a:schemeClr val="accent1"/>
+          </a:lnRef>
+          <a:fillRef idx="0">
+            <a:schemeClr val="accent1"/>
+          </a:fillRef>
+          <a:effectRef idx="1">
+            <a:schemeClr val="accent1"/>
+          </a:effectRef>
+          <a:fontRef idx="minor">
+            <a:schemeClr val="tx1"/>
+          </a:fontRef>
+        </p:style>
+      </p:cxnSp>
+      <p:sp>
+        <p:nvSpPr>
+          <p:cNvPr id="84" name="TextBox 83">
+            <a:extLst>
+              <a:ext uri="{FF2B5EF4-FFF2-40B4-BE49-F238E27FC236}">
+                <a16:creationId xmlns:a16="http://schemas.microsoft.com/office/drawing/2014/main" id="{8F69FFC4-D90F-87A3-72AA-E53AD00637DE}"/>
+              </a:ext>
+            </a:extLst>
+          </p:cNvPr>
+          <p:cNvSpPr txBox="1"/>
+          <p:nvPr/>
+        </p:nvSpPr>
+        <p:spPr>
+          <a:xfrm>
+            <a:off x="288634" y="1472199"/>
+            <a:ext cx="413896" cy="230832"/>
+          </a:xfrm>
+          <a:prstGeom prst="rect">
+            <a:avLst/>
+          </a:prstGeom>
+          <a:noFill/>
+        </p:spPr>
+        <p:txBody>
+          <a:bodyPr wrap="none" rtlCol="0">
+            <a:spAutoFit/>
+          </a:bodyPr>
+          <a:lstStyle/>
+          <a:p>
+            <a:pPr algn="ctr"/>
+            <a:r>
+              <a:rPr lang="en-US" sz="900" dirty="0"/>
+              <a:t>NPC</a:t>
+            </a:r>
+          </a:p>
+        </p:txBody>
+      </p:sp>
+      <p:sp>
+        <p:nvSpPr>
+          <p:cNvPr id="86" name="TextBox 85">
+            <a:extLst>
+              <a:ext uri="{FF2B5EF4-FFF2-40B4-BE49-F238E27FC236}">
+                <a16:creationId xmlns:a16="http://schemas.microsoft.com/office/drawing/2014/main" id="{D66AEAD3-1629-21A3-A829-EE39F53D4206}"/>
+              </a:ext>
+            </a:extLst>
+          </p:cNvPr>
+          <p:cNvSpPr txBox="1"/>
+          <p:nvPr/>
+        </p:nvSpPr>
+        <p:spPr>
+          <a:xfrm>
+            <a:off x="291787" y="1887572"/>
+            <a:ext cx="407484" cy="230832"/>
+          </a:xfrm>
+          <a:prstGeom prst="rect">
+            <a:avLst/>
+          </a:prstGeom>
+          <a:noFill/>
+        </p:spPr>
+        <p:txBody>
+          <a:bodyPr wrap="none" rtlCol="0">
+            <a:spAutoFit/>
+          </a:bodyPr>
+          <a:lstStyle/>
+          <a:p>
+            <a:pPr algn="ctr"/>
+            <a:r>
+              <a:rPr lang="en-US" sz="900" dirty="0" err="1"/>
+              <a:t>imm</a:t>
+            </a:r>
+            <a:endParaRPr lang="en-US" sz="900" dirty="0"/>
+          </a:p>
+        </p:txBody>
+      </p:sp>
+      <p:cxnSp>
+        <p:nvCxnSpPr>
+          <p:cNvPr id="88" name="Straight Arrow Connector 87">
+            <a:extLst>
+              <a:ext uri="{FF2B5EF4-FFF2-40B4-BE49-F238E27FC236}">
+                <a16:creationId xmlns:a16="http://schemas.microsoft.com/office/drawing/2014/main" id="{0CB8EB19-84A3-9607-CCD6-ED9DECBD1C71}"/>
+              </a:ext>
+            </a:extLst>
+          </p:cNvPr>
+          <p:cNvCxnSpPr>
+            <a:cxnSpLocks/>
+          </p:cNvCxnSpPr>
+          <p:nvPr/>
+        </p:nvCxnSpPr>
+        <p:spPr>
+          <a:xfrm flipV="1">
+            <a:off x="1635148" y="2090546"/>
+            <a:ext cx="100338" cy="2498"/>
+          </a:xfrm>
+          <a:prstGeom prst="straightConnector1">
+            <a:avLst/>
+          </a:prstGeom>
+          <a:ln>
+            <a:tailEnd type="triangle"/>
+          </a:ln>
+        </p:spPr>
+        <p:style>
+          <a:lnRef idx="2">
+            <a:schemeClr val="accent1"/>
+          </a:lnRef>
+          <a:fillRef idx="0">
+            <a:schemeClr val="accent1"/>
+          </a:fillRef>
+          <a:effectRef idx="1">
+            <a:schemeClr val="accent1"/>
+          </a:effectRef>
+          <a:fontRef idx="minor">
+            <a:schemeClr val="tx1"/>
+          </a:fontRef>
+        </p:style>
+      </p:cxnSp>
+      <p:sp>
+        <p:nvSpPr>
+          <p:cNvPr id="106" name="TextBox 105">
+            <a:extLst>
+              <a:ext uri="{FF2B5EF4-FFF2-40B4-BE49-F238E27FC236}">
+                <a16:creationId xmlns:a16="http://schemas.microsoft.com/office/drawing/2014/main" id="{A046F096-97E2-8456-2195-55E7CAB154C6}"/>
+              </a:ext>
+            </a:extLst>
+          </p:cNvPr>
+          <p:cNvSpPr txBox="1"/>
+          <p:nvPr/>
+        </p:nvSpPr>
+        <p:spPr>
+          <a:xfrm>
+            <a:off x="1313055" y="1972211"/>
+            <a:ext cx="413896" cy="230832"/>
+          </a:xfrm>
+          <a:prstGeom prst="rect">
+            <a:avLst/>
+          </a:prstGeom>
+          <a:noFill/>
+        </p:spPr>
+        <p:txBody>
+          <a:bodyPr wrap="none" rtlCol="0">
+            <a:spAutoFit/>
+          </a:bodyPr>
+          <a:lstStyle/>
+          <a:p>
+            <a:pPr algn="ctr"/>
+            <a:r>
+              <a:rPr lang="en-US" sz="900" dirty="0"/>
+              <a:t>NPC</a:t>
+            </a:r>
+          </a:p>
+        </p:txBody>
+      </p:sp>
+      <p:grpSp>
+        <p:nvGrpSpPr>
+          <p:cNvPr id="107" name="Group 106">
+            <a:extLst>
+              <a:ext uri="{FF2B5EF4-FFF2-40B4-BE49-F238E27FC236}">
+                <a16:creationId xmlns:a16="http://schemas.microsoft.com/office/drawing/2014/main" id="{B773C7A5-7ABC-0594-7851-14CF77797137}"/>
+              </a:ext>
+            </a:extLst>
+          </p:cNvPr>
+          <p:cNvGrpSpPr/>
+          <p:nvPr/>
+        </p:nvGrpSpPr>
+        <p:grpSpPr>
+          <a:xfrm>
+            <a:off x="827819" y="1481654"/>
             <a:ext cx="292770" cy="637674"/>
             <a:chOff x="1074820" y="1507958"/>
             <a:chExt cx="292770" cy="637674"/>
@@ -10408,10 +12273,10 @@
         </p:grpSpPr>
         <p:cxnSp>
           <p:nvCxnSpPr>
-            <p:cNvPr id="140" name="Straight Connector 139">
+            <p:cNvPr id="108" name="Straight Connector 107">
               <a:extLst>
                 <a:ext uri="{FF2B5EF4-FFF2-40B4-BE49-F238E27FC236}">
-                  <a16:creationId xmlns:a16="http://schemas.microsoft.com/office/drawing/2014/main" id="{1CDC5C6D-A82B-99F5-6FC5-EEDD54CCF190}"/>
+                  <a16:creationId xmlns:a16="http://schemas.microsoft.com/office/drawing/2014/main" id="{6C512B38-9D33-9802-2822-CD1CA18AE903}"/>
                 </a:ext>
               </a:extLst>
             </p:cNvPr>
@@ -10446,10 +12311,10 @@
         </p:cxnSp>
         <p:cxnSp>
           <p:nvCxnSpPr>
-            <p:cNvPr id="142" name="Straight Connector 141">
+            <p:cNvPr id="109" name="Straight Connector 108">
               <a:extLst>
                 <a:ext uri="{FF2B5EF4-FFF2-40B4-BE49-F238E27FC236}">
-                  <a16:creationId xmlns:a16="http://schemas.microsoft.com/office/drawing/2014/main" id="{A4EF0649-3BED-33BA-DD96-FB9FA511E98C}"/>
+                  <a16:creationId xmlns:a16="http://schemas.microsoft.com/office/drawing/2014/main" id="{2C1E6082-325E-1C19-F1D4-A1EA70AAB1E2}"/>
                 </a:ext>
               </a:extLst>
             </p:cNvPr>
@@ -10484,10 +12349,10 @@
         </p:cxnSp>
         <p:cxnSp>
           <p:nvCxnSpPr>
-            <p:cNvPr id="143" name="Straight Connector 142">
+            <p:cNvPr id="110" name="Straight Connector 109">
               <a:extLst>
                 <a:ext uri="{FF2B5EF4-FFF2-40B4-BE49-F238E27FC236}">
-                  <a16:creationId xmlns:a16="http://schemas.microsoft.com/office/drawing/2014/main" id="{F388C33F-5E4F-4884-089C-DF42CBAA3E4C}"/>
+                  <a16:creationId xmlns:a16="http://schemas.microsoft.com/office/drawing/2014/main" id="{EF5A8EBA-3D52-5193-CF08-8C312B914CA4}"/>
                 </a:ext>
               </a:extLst>
             </p:cNvPr>
@@ -10522,10 +12387,10 @@
         </p:cxnSp>
         <p:cxnSp>
           <p:nvCxnSpPr>
-            <p:cNvPr id="144" name="Straight Connector 143">
+            <p:cNvPr id="145" name="Straight Connector 144">
               <a:extLst>
                 <a:ext uri="{FF2B5EF4-FFF2-40B4-BE49-F238E27FC236}">
-                  <a16:creationId xmlns:a16="http://schemas.microsoft.com/office/drawing/2014/main" id="{735B5BAB-BBDC-4A8E-3A36-97A6349BBE95}"/>
+                  <a16:creationId xmlns:a16="http://schemas.microsoft.com/office/drawing/2014/main" id="{5EDBAB12-11C0-1144-0AFF-2BADC04AFE6A}"/>
                 </a:ext>
               </a:extLst>
             </p:cNvPr>
@@ -10560,10 +12425,10 @@
         </p:cxnSp>
         <p:cxnSp>
           <p:nvCxnSpPr>
-            <p:cNvPr id="147" name="Straight Connector 146">
+            <p:cNvPr id="160" name="Straight Connector 159">
               <a:extLst>
                 <a:ext uri="{FF2B5EF4-FFF2-40B4-BE49-F238E27FC236}">
-                  <a16:creationId xmlns:a16="http://schemas.microsoft.com/office/drawing/2014/main" id="{45C3381F-390D-C2F3-E51B-5BEF92543EEE}"/>
+                  <a16:creationId xmlns:a16="http://schemas.microsoft.com/office/drawing/2014/main" id="{DDEFFE58-6F0A-18D2-7CE9-1E2C4606A338}"/>
                 </a:ext>
               </a:extLst>
             </p:cNvPr>
@@ -10598,10 +12463,10 @@
         </p:cxnSp>
         <p:cxnSp>
           <p:nvCxnSpPr>
-            <p:cNvPr id="159" name="Straight Connector 158">
+            <p:cNvPr id="161" name="Straight Connector 160">
               <a:extLst>
                 <a:ext uri="{FF2B5EF4-FFF2-40B4-BE49-F238E27FC236}">
-                  <a16:creationId xmlns:a16="http://schemas.microsoft.com/office/drawing/2014/main" id="{865DD84B-4F29-10E5-2D86-6E2018D0463C}"/>
+                  <a16:creationId xmlns:a16="http://schemas.microsoft.com/office/drawing/2014/main" id="{97F24868-95BD-8279-7EDC-F00F0AECBC7C}"/>
                 </a:ext>
               </a:extLst>
             </p:cNvPr>
@@ -10636,10 +12501,10 @@
         </p:cxnSp>
         <p:cxnSp>
           <p:nvCxnSpPr>
-            <p:cNvPr id="171" name="Straight Connector 170">
+            <p:cNvPr id="175" name="Straight Connector 174">
               <a:extLst>
                 <a:ext uri="{FF2B5EF4-FFF2-40B4-BE49-F238E27FC236}">
-                  <a16:creationId xmlns:a16="http://schemas.microsoft.com/office/drawing/2014/main" id="{8DAAB301-BA98-4D82-23E6-354878570163}"/>
+                  <a16:creationId xmlns:a16="http://schemas.microsoft.com/office/drawing/2014/main" id="{03CF6495-3B91-BA26-4338-8F6006BE8C29}"/>
                 </a:ext>
               </a:extLst>
             </p:cNvPr>
@@ -10675,10 +12540,10 @@
       </p:grpSp>
       <p:cxnSp>
         <p:nvCxnSpPr>
-          <p:cNvPr id="173" name="Straight Arrow Connector 172">
-            <a:extLst>
-              <a:ext uri="{FF2B5EF4-FFF2-40B4-BE49-F238E27FC236}">
-                <a16:creationId xmlns:a16="http://schemas.microsoft.com/office/drawing/2014/main" id="{526219D0-7A62-A14B-B0E1-B1C20BB4E6B6}"/>
+          <p:cNvPr id="176" name="Straight Arrow Connector 175">
+            <a:extLst>
+              <a:ext uri="{FF2B5EF4-FFF2-40B4-BE49-F238E27FC236}">
+                <a16:creationId xmlns:a16="http://schemas.microsoft.com/office/drawing/2014/main" id="{83721058-E86C-EB18-A1F1-24BD0BF2686D}"/>
               </a:ext>
             </a:extLst>
           </p:cNvPr>
@@ -10689,7 +12554,7 @@
         </p:nvCxnSpPr>
         <p:spPr>
           <a:xfrm>
-            <a:off x="3675459" y="2502142"/>
+            <a:off x="653884" y="2013049"/>
             <a:ext cx="173935" cy="0"/>
           </a:xfrm>
           <a:prstGeom prst="straightConnector1">
@@ -10716,10 +12581,10 @@
       </p:cxnSp>
       <p:cxnSp>
         <p:nvCxnSpPr>
-          <p:cNvPr id="174" name="Straight Arrow Connector 173">
-            <a:extLst>
-              <a:ext uri="{FF2B5EF4-FFF2-40B4-BE49-F238E27FC236}">
-                <a16:creationId xmlns:a16="http://schemas.microsoft.com/office/drawing/2014/main" id="{73CA6134-70D5-34FA-00BD-59378BC13DD1}"/>
+          <p:cNvPr id="177" name="Straight Arrow Connector 176">
+            <a:extLst>
+              <a:ext uri="{FF2B5EF4-FFF2-40B4-BE49-F238E27FC236}">
+                <a16:creationId xmlns:a16="http://schemas.microsoft.com/office/drawing/2014/main" id="{954FA614-589E-5FD9-2BE1-A854DE9D07B9}"/>
               </a:ext>
             </a:extLst>
           </p:cNvPr>
@@ -10728,7 +12593,7 @@
         </p:nvCxnSpPr>
         <p:spPr>
           <a:xfrm>
-            <a:off x="3671586" y="2077026"/>
+            <a:off x="650011" y="1587933"/>
             <a:ext cx="177808" cy="0"/>
           </a:xfrm>
           <a:prstGeom prst="straightConnector1">
@@ -10755,10 +12620,10 @@
       </p:cxnSp>
       <p:sp>
         <p:nvSpPr>
-          <p:cNvPr id="184" name="TextBox 183">
-            <a:extLst>
-              <a:ext uri="{FF2B5EF4-FFF2-40B4-BE49-F238E27FC236}">
-                <a16:creationId xmlns:a16="http://schemas.microsoft.com/office/drawing/2014/main" id="{58EBC1B8-4825-3984-18AF-440ADACF2ABF}"/>
+          <p:cNvPr id="178" name="TextBox 177">
+            <a:extLst>
+              <a:ext uri="{FF2B5EF4-FFF2-40B4-BE49-F238E27FC236}">
+                <a16:creationId xmlns:a16="http://schemas.microsoft.com/office/drawing/2014/main" id="{09386CA0-1138-305E-7209-5A63253C8BFC}"/>
               </a:ext>
             </a:extLst>
           </p:cNvPr>
@@ -10767,7 +12632,7 @@
         </p:nvSpPr>
         <p:spPr>
           <a:xfrm>
-            <a:off x="3884231" y="2175559"/>
+            <a:off x="862656" y="1686466"/>
             <a:ext cx="351378" cy="230832"/>
           </a:xfrm>
           <a:prstGeom prst="rect">
@@ -10791,10 +12656,10 @@
       </p:sp>
       <p:cxnSp>
         <p:nvCxnSpPr>
-          <p:cNvPr id="187" name="Straight Arrow Connector 186">
-            <a:extLst>
-              <a:ext uri="{FF2B5EF4-FFF2-40B4-BE49-F238E27FC236}">
-                <a16:creationId xmlns:a16="http://schemas.microsoft.com/office/drawing/2014/main" id="{0D200FF7-E333-ACB1-85A2-D9AC30E6FCDF}"/>
+          <p:cNvPr id="179" name="Straight Arrow Connector 178">
+            <a:extLst>
+              <a:ext uri="{FF2B5EF4-FFF2-40B4-BE49-F238E27FC236}">
+                <a16:creationId xmlns:a16="http://schemas.microsoft.com/office/drawing/2014/main" id="{DE93D071-D6EC-229F-FE75-1042BD0190A0}"/>
               </a:ext>
             </a:extLst>
           </p:cNvPr>
@@ -10805,7 +12670,7 @@
         </p:nvCxnSpPr>
         <p:spPr>
           <a:xfrm flipV="1">
-            <a:off x="4634375" y="2755109"/>
+            <a:off x="1612800" y="2266016"/>
             <a:ext cx="100338" cy="2498"/>
           </a:xfrm>
           <a:prstGeom prst="straightConnector1">
@@ -10832,10 +12697,10 @@
       </p:cxnSp>
       <p:sp>
         <p:nvSpPr>
-          <p:cNvPr id="189" name="TextBox 188">
-            <a:extLst>
-              <a:ext uri="{FF2B5EF4-FFF2-40B4-BE49-F238E27FC236}">
-                <a16:creationId xmlns:a16="http://schemas.microsoft.com/office/drawing/2014/main" id="{0E85AB3B-858D-5BF6-ED0E-B3C0624C86F7}"/>
+          <p:cNvPr id="180" name="TextBox 179">
+            <a:extLst>
+              <a:ext uri="{FF2B5EF4-FFF2-40B4-BE49-F238E27FC236}">
+                <a16:creationId xmlns:a16="http://schemas.microsoft.com/office/drawing/2014/main" id="{FCD657EC-8588-B810-69DD-64CE3E661EA1}"/>
               </a:ext>
             </a:extLst>
           </p:cNvPr>
@@ -10844,7 +12709,7 @@
         </p:nvSpPr>
         <p:spPr>
           <a:xfrm>
-            <a:off x="4379586" y="2641578"/>
+            <a:off x="1358011" y="2152485"/>
             <a:ext cx="332142" cy="230832"/>
           </a:xfrm>
           <a:prstGeom prst="rect">
@@ -10868,10 +12733,10 @@
       </p:sp>
       <p:cxnSp>
         <p:nvCxnSpPr>
-          <p:cNvPr id="190" name="Straight Arrow Connector 189">
-            <a:extLst>
-              <a:ext uri="{FF2B5EF4-FFF2-40B4-BE49-F238E27FC236}">
-                <a16:creationId xmlns:a16="http://schemas.microsoft.com/office/drawing/2014/main" id="{663EF25C-11FE-91FB-6359-867A30C024D1}"/>
+          <p:cNvPr id="181" name="Straight Arrow Connector 180">
+            <a:extLst>
+              <a:ext uri="{FF2B5EF4-FFF2-40B4-BE49-F238E27FC236}">
+                <a16:creationId xmlns:a16="http://schemas.microsoft.com/office/drawing/2014/main" id="{03417F81-FD6A-5C30-1E76-BBE7D416900A}"/>
               </a:ext>
             </a:extLst>
           </p:cNvPr>
@@ -10882,7 +12747,7 @@
         </p:nvCxnSpPr>
         <p:spPr>
           <a:xfrm>
-            <a:off x="4372527" y="2207613"/>
+            <a:off x="1350952" y="1718520"/>
             <a:ext cx="374301" cy="0"/>
           </a:xfrm>
           <a:prstGeom prst="straightConnector1">
@@ -10909,10 +12774,10 @@
       </p:cxnSp>
       <p:cxnSp>
         <p:nvCxnSpPr>
-          <p:cNvPr id="196" name="Straight Arrow Connector 195">
-            <a:extLst>
-              <a:ext uri="{FF2B5EF4-FFF2-40B4-BE49-F238E27FC236}">
-                <a16:creationId xmlns:a16="http://schemas.microsoft.com/office/drawing/2014/main" id="{C4DF3196-3785-A9E7-1F1B-2A6EE6375854}"/>
+          <p:cNvPr id="182" name="Straight Arrow Connector 181">
+            <a:extLst>
+              <a:ext uri="{FF2B5EF4-FFF2-40B4-BE49-F238E27FC236}">
+                <a16:creationId xmlns:a16="http://schemas.microsoft.com/office/drawing/2014/main" id="{E2D49F1C-FA17-5F1D-9F29-E692C68C8BDA}"/>
               </a:ext>
             </a:extLst>
           </p:cNvPr>
@@ -10923,7 +12788,7 @@
         </p:nvCxnSpPr>
         <p:spPr>
           <a:xfrm>
-            <a:off x="4372527" y="2207613"/>
+            <a:off x="1350952" y="1718520"/>
             <a:ext cx="0" cy="213936"/>
           </a:xfrm>
           <a:prstGeom prst="straightConnector1">
@@ -10950,10 +12815,10 @@
       </p:cxnSp>
       <p:cxnSp>
         <p:nvCxnSpPr>
-          <p:cNvPr id="198" name="Straight Arrow Connector 197">
-            <a:extLst>
-              <a:ext uri="{FF2B5EF4-FFF2-40B4-BE49-F238E27FC236}">
-                <a16:creationId xmlns:a16="http://schemas.microsoft.com/office/drawing/2014/main" id="{E418A0F2-C32C-CA49-AA0F-30FCCCAA2766}"/>
+          <p:cNvPr id="183" name="Straight Arrow Connector 182">
+            <a:extLst>
+              <a:ext uri="{FF2B5EF4-FFF2-40B4-BE49-F238E27FC236}">
+                <a16:creationId xmlns:a16="http://schemas.microsoft.com/office/drawing/2014/main" id="{F62569E9-9ADB-25E0-5AA7-D7C609B03633}"/>
               </a:ext>
             </a:extLst>
           </p:cNvPr>
@@ -10964,7 +12829,7 @@
         </p:nvCxnSpPr>
         <p:spPr>
           <a:xfrm>
-            <a:off x="4139842" y="2315754"/>
+            <a:off x="1118267" y="1826661"/>
             <a:ext cx="232685" cy="0"/>
           </a:xfrm>
           <a:prstGeom prst="straightConnector1">
@@ -10991,10 +12856,10 @@
       </p:cxnSp>
       <p:cxnSp>
         <p:nvCxnSpPr>
-          <p:cNvPr id="36" name="Straight Arrow Connector 35">
-            <a:extLst>
-              <a:ext uri="{FF2B5EF4-FFF2-40B4-BE49-F238E27FC236}">
-                <a16:creationId xmlns:a16="http://schemas.microsoft.com/office/drawing/2014/main" id="{1BC55C5F-A294-A543-9E3E-E324A93D8CA8}"/>
+          <p:cNvPr id="185" name="Straight Arrow Connector 184">
+            <a:extLst>
+              <a:ext uri="{FF2B5EF4-FFF2-40B4-BE49-F238E27FC236}">
+                <a16:creationId xmlns:a16="http://schemas.microsoft.com/office/drawing/2014/main" id="{45DDE841-DDA8-50C0-DF84-DFEAD66D212E}"/>
               </a:ext>
             </a:extLst>
           </p:cNvPr>
@@ -11005,8 +12870,8 @@
         </p:nvCxnSpPr>
         <p:spPr>
           <a:xfrm flipV="1">
-            <a:off x="10997645" y="4034709"/>
-            <a:ext cx="0" cy="616523"/>
+            <a:off x="1849620" y="2345419"/>
+            <a:ext cx="0" cy="318976"/>
           </a:xfrm>
           <a:prstGeom prst="straightConnector1">
             <a:avLst/>
@@ -11035,10 +12900,10 @@
       </p:cxnSp>
       <p:cxnSp>
         <p:nvCxnSpPr>
-          <p:cNvPr id="37" name="Straight Connector 36">
-            <a:extLst>
-              <a:ext uri="{FF2B5EF4-FFF2-40B4-BE49-F238E27FC236}">
-                <a16:creationId xmlns:a16="http://schemas.microsoft.com/office/drawing/2014/main" id="{ECC19F9B-6EDF-6B64-E3B0-E660B8C52E68}"/>
+          <p:cNvPr id="199" name="Straight Connector 198">
+            <a:extLst>
+              <a:ext uri="{FF2B5EF4-FFF2-40B4-BE49-F238E27FC236}">
+                <a16:creationId xmlns:a16="http://schemas.microsoft.com/office/drawing/2014/main" id="{DD9CD45F-603E-9C8E-1E43-C8A5BE41D6EE}"/>
               </a:ext>
             </a:extLst>
           </p:cNvPr>
@@ -11049,8 +12914,8 @@
         </p:nvCxnSpPr>
         <p:spPr>
           <a:xfrm flipH="1">
-            <a:off x="10946889" y="4449728"/>
-            <a:ext cx="107051" cy="69157"/>
+            <a:off x="1805652" y="2531341"/>
+            <a:ext cx="85431" cy="62194"/>
           </a:xfrm>
           <a:prstGeom prst="line">
             <a:avLst/>
@@ -11073,10 +12938,10 @@
       </p:cxnSp>
       <p:cxnSp>
         <p:nvCxnSpPr>
-          <p:cNvPr id="105" name="Straight Connector 104">
-            <a:extLst>
-              <a:ext uri="{FF2B5EF4-FFF2-40B4-BE49-F238E27FC236}">
-                <a16:creationId xmlns:a16="http://schemas.microsoft.com/office/drawing/2014/main" id="{D07766FF-137E-CFC5-F36B-18899A589011}"/>
+          <p:cNvPr id="201" name="Straight Arrow Connector 200">
+            <a:extLst>
+              <a:ext uri="{FF2B5EF4-FFF2-40B4-BE49-F238E27FC236}">
+                <a16:creationId xmlns:a16="http://schemas.microsoft.com/office/drawing/2014/main" id="{83A0DF4B-DC05-17D1-759D-39EFC1DE02DF}"/>
               </a:ext>
             </a:extLst>
           </p:cNvPr>
@@ -11086,13 +12951,19 @@
           <p:nvPr/>
         </p:nvCxnSpPr>
         <p:spPr>
-          <a:xfrm flipH="1">
-            <a:off x="5894187" y="2482125"/>
-            <a:ext cx="107051" cy="69157"/>
-          </a:xfrm>
-          <a:prstGeom prst="line">
-            <a:avLst/>
-          </a:prstGeom>
+          <a:xfrm>
+            <a:off x="1660150" y="976492"/>
+            <a:ext cx="0" cy="137890"/>
+          </a:xfrm>
+          <a:prstGeom prst="straightConnector1">
+            <a:avLst/>
+          </a:prstGeom>
+          <a:ln>
+            <a:solidFill>
+              <a:srgbClr val="FF0000"/>
+            </a:solidFill>
+            <a:tailEnd type="triangle"/>
+          </a:ln>
         </p:spPr>
         <p:style>
           <a:lnRef idx="2">
@@ -11109,12 +12980,48 @@
           </a:fontRef>
         </p:style>
       </p:cxnSp>
+      <p:sp>
+        <p:nvSpPr>
+          <p:cNvPr id="202" name="TextBox 201">
+            <a:extLst>
+              <a:ext uri="{FF2B5EF4-FFF2-40B4-BE49-F238E27FC236}">
+                <a16:creationId xmlns:a16="http://schemas.microsoft.com/office/drawing/2014/main" id="{C5E4C3D1-E848-B046-B8D8-FF2644B018B9}"/>
+              </a:ext>
+            </a:extLst>
+          </p:cNvPr>
+          <p:cNvSpPr txBox="1"/>
+          <p:nvPr/>
+        </p:nvSpPr>
+        <p:spPr>
+          <a:xfrm>
+            <a:off x="1420265" y="807637"/>
+            <a:ext cx="474810" cy="230832"/>
+          </a:xfrm>
+          <a:prstGeom prst="rect">
+            <a:avLst/>
+          </a:prstGeom>
+          <a:noFill/>
+        </p:spPr>
+        <p:txBody>
+          <a:bodyPr wrap="none" rtlCol="0">
+            <a:spAutoFit/>
+          </a:bodyPr>
+          <a:lstStyle/>
+          <a:p>
+            <a:pPr algn="ctr"/>
+            <a:r>
+              <a:rPr lang="en-US" sz="900" dirty="0"/>
+              <a:t>dout1</a:t>
+            </a:r>
+          </a:p>
+        </p:txBody>
+      </p:sp>
       <p:cxnSp>
         <p:nvCxnSpPr>
-          <p:cNvPr id="146" name="Straight Arrow Connector 145">
-            <a:extLst>
-              <a:ext uri="{FF2B5EF4-FFF2-40B4-BE49-F238E27FC236}">
-                <a16:creationId xmlns:a16="http://schemas.microsoft.com/office/drawing/2014/main" id="{ABE6E774-8C9B-4489-D948-65607F2E188A}"/>
+          <p:cNvPr id="203" name="Straight Arrow Connector 202">
+            <a:extLst>
+              <a:ext uri="{FF2B5EF4-FFF2-40B4-BE49-F238E27FC236}">
+                <a16:creationId xmlns:a16="http://schemas.microsoft.com/office/drawing/2014/main" id="{EE0A7450-E98D-2100-D475-3D6DDD92F800}"/>
               </a:ext>
             </a:extLst>
           </p:cNvPr>
@@ -11124,16 +13031,19 @@
           <p:nvPr/>
         </p:nvCxnSpPr>
         <p:spPr>
-          <a:xfrm flipV="1">
-            <a:off x="4871195" y="2834512"/>
-            <a:ext cx="0" cy="318976"/>
+          <a:xfrm>
+            <a:off x="1887618" y="1525805"/>
+            <a:ext cx="0" cy="219678"/>
           </a:xfrm>
           <a:prstGeom prst="straightConnector1">
             <a:avLst/>
           </a:prstGeom>
           <a:ln>
             <a:solidFill>
-              <a:srgbClr val="FF0000"/>
+              <a:schemeClr val="tx2">
+                <a:lumMod val="75000"/>
+                <a:lumOff val="25000"/>
+              </a:schemeClr>
             </a:solidFill>
             <a:tailEnd type="triangle"/>
           </a:ln>
@@ -11153,91 +13063,12 @@
           </a:fontRef>
         </p:style>
       </p:cxnSp>
-      <p:cxnSp>
-        <p:nvCxnSpPr>
-          <p:cNvPr id="148" name="Straight Connector 147">
-            <a:extLst>
-              <a:ext uri="{FF2B5EF4-FFF2-40B4-BE49-F238E27FC236}">
-                <a16:creationId xmlns:a16="http://schemas.microsoft.com/office/drawing/2014/main" id="{FE9EFFB0-0DED-2330-8209-FC39718441DD}"/>
-              </a:ext>
-            </a:extLst>
-          </p:cNvPr>
-          <p:cNvCxnSpPr>
-            <a:cxnSpLocks/>
-          </p:cNvCxnSpPr>
-          <p:nvPr/>
-        </p:nvCxnSpPr>
-        <p:spPr>
-          <a:xfrm flipH="1">
-            <a:off x="4827227" y="3020434"/>
-            <a:ext cx="85431" cy="62194"/>
-          </a:xfrm>
-          <a:prstGeom prst="line">
-            <a:avLst/>
-          </a:prstGeom>
-        </p:spPr>
-        <p:style>
-          <a:lnRef idx="2">
-            <a:schemeClr val="accent1"/>
-          </a:lnRef>
-          <a:fillRef idx="0">
-            <a:schemeClr val="accent1"/>
-          </a:fillRef>
-          <a:effectRef idx="1">
-            <a:schemeClr val="accent1"/>
-          </a:effectRef>
-          <a:fontRef idx="minor">
-            <a:schemeClr val="tx1"/>
-          </a:fontRef>
-        </p:style>
-      </p:cxnSp>
-      <p:cxnSp>
-        <p:nvCxnSpPr>
-          <p:cNvPr id="149" name="Straight Arrow Connector 148">
-            <a:extLst>
-              <a:ext uri="{FF2B5EF4-FFF2-40B4-BE49-F238E27FC236}">
-                <a16:creationId xmlns:a16="http://schemas.microsoft.com/office/drawing/2014/main" id="{F6ECA4E6-7E3F-9AE7-DC4A-642870838647}"/>
-              </a:ext>
-            </a:extLst>
-          </p:cNvPr>
-          <p:cNvCxnSpPr>
-            <a:cxnSpLocks/>
-          </p:cNvCxnSpPr>
-          <p:nvPr/>
-        </p:nvCxnSpPr>
-        <p:spPr>
-          <a:xfrm>
-            <a:off x="4684583" y="1275167"/>
-            <a:ext cx="0" cy="137890"/>
-          </a:xfrm>
-          <a:prstGeom prst="straightConnector1">
-            <a:avLst/>
-          </a:prstGeom>
-          <a:ln>
-            <a:tailEnd type="triangle"/>
-          </a:ln>
-        </p:spPr>
-        <p:style>
-          <a:lnRef idx="2">
-            <a:schemeClr val="accent1"/>
-          </a:lnRef>
-          <a:fillRef idx="0">
-            <a:schemeClr val="accent1"/>
-          </a:fillRef>
-          <a:effectRef idx="1">
-            <a:schemeClr val="accent1"/>
-          </a:effectRef>
-          <a:fontRef idx="minor">
-            <a:schemeClr val="tx1"/>
-          </a:fontRef>
-        </p:style>
-      </p:cxnSp>
-      <p:sp>
-        <p:nvSpPr>
-          <p:cNvPr id="151" name="TextBox 150">
-            <a:extLst>
-              <a:ext uri="{FF2B5EF4-FFF2-40B4-BE49-F238E27FC236}">
-                <a16:creationId xmlns:a16="http://schemas.microsoft.com/office/drawing/2014/main" id="{CD28274F-92E6-F852-6391-A717240DE2DF}"/>
+      <p:sp>
+        <p:nvSpPr>
+          <p:cNvPr id="204" name="TextBox 203">
+            <a:extLst>
+              <a:ext uri="{FF2B5EF4-FFF2-40B4-BE49-F238E27FC236}">
+                <a16:creationId xmlns:a16="http://schemas.microsoft.com/office/drawing/2014/main" id="{64F90C90-E069-CC61-165E-6A1EEB7E1194}"/>
               </a:ext>
             </a:extLst>
           </p:cNvPr>
@@ -11246,8 +13077,8 @@
         </p:nvSpPr>
         <p:spPr>
           <a:xfrm>
-            <a:off x="4444698" y="1106312"/>
-            <a:ext cx="474810" cy="230832"/>
+            <a:off x="1469171" y="1342773"/>
+            <a:ext cx="671979" cy="230832"/>
           </a:xfrm>
           <a:prstGeom prst="rect">
             <a:avLst/>
@@ -11263,86 +13094,6 @@
             <a:pPr algn="ctr"/>
             <a:r>
               <a:rPr lang="en-US" sz="900" dirty="0"/>
-              <a:t>dout1</a:t>
-            </a:r>
-          </a:p>
-        </p:txBody>
-      </p:sp>
-      <p:cxnSp>
-        <p:nvCxnSpPr>
-          <p:cNvPr id="152" name="Straight Arrow Connector 151">
-            <a:extLst>
-              <a:ext uri="{FF2B5EF4-FFF2-40B4-BE49-F238E27FC236}">
-                <a16:creationId xmlns:a16="http://schemas.microsoft.com/office/drawing/2014/main" id="{2FC45EE7-792B-F72E-2C03-735BF8B795D9}"/>
-              </a:ext>
-            </a:extLst>
-          </p:cNvPr>
-          <p:cNvCxnSpPr>
-            <a:cxnSpLocks/>
-          </p:cNvCxnSpPr>
-          <p:nvPr/>
-        </p:nvCxnSpPr>
-        <p:spPr>
-          <a:xfrm>
-            <a:off x="4862151" y="1836978"/>
-            <a:ext cx="0" cy="325106"/>
-          </a:xfrm>
-          <a:prstGeom prst="straightConnector1">
-            <a:avLst/>
-          </a:prstGeom>
-          <a:ln>
-            <a:solidFill>
-              <a:srgbClr val="FF0000"/>
-            </a:solidFill>
-            <a:tailEnd type="triangle"/>
-          </a:ln>
-        </p:spPr>
-        <p:style>
-          <a:lnRef idx="2">
-            <a:schemeClr val="accent1"/>
-          </a:lnRef>
-          <a:fillRef idx="0">
-            <a:schemeClr val="accent1"/>
-          </a:fillRef>
-          <a:effectRef idx="1">
-            <a:schemeClr val="accent1"/>
-          </a:effectRef>
-          <a:fontRef idx="minor">
-            <a:schemeClr val="tx1"/>
-          </a:fontRef>
-        </p:style>
-      </p:cxnSp>
-      <p:sp>
-        <p:nvSpPr>
-          <p:cNvPr id="153" name="TextBox 152">
-            <a:extLst>
-              <a:ext uri="{FF2B5EF4-FFF2-40B4-BE49-F238E27FC236}">
-                <a16:creationId xmlns:a16="http://schemas.microsoft.com/office/drawing/2014/main" id="{6C7963B8-EAB3-1251-7B88-E9681119B880}"/>
-              </a:ext>
-            </a:extLst>
-          </p:cNvPr>
-          <p:cNvSpPr txBox="1"/>
-          <p:nvPr/>
-        </p:nvSpPr>
-        <p:spPr>
-          <a:xfrm>
-            <a:off x="4493604" y="1641448"/>
-            <a:ext cx="671979" cy="230832"/>
-          </a:xfrm>
-          <a:prstGeom prst="rect">
-            <a:avLst/>
-          </a:prstGeom>
-          <a:noFill/>
-        </p:spPr>
-        <p:txBody>
-          <a:bodyPr wrap="none" rtlCol="0">
-            <a:spAutoFit/>
-          </a:bodyPr>
-          <a:lstStyle/>
-          <a:p>
-            <a:pPr algn="ctr"/>
-            <a:r>
-              <a:rPr lang="en-US" sz="900" dirty="0"/>
               <a:t>Not equal</a:t>
             </a:r>
           </a:p>
@@ -11350,10 +13101,10 @@
       </p:sp>
       <p:sp>
         <p:nvSpPr>
-          <p:cNvPr id="154" name="Rectangle 153">
-            <a:extLst>
-              <a:ext uri="{FF2B5EF4-FFF2-40B4-BE49-F238E27FC236}">
-                <a16:creationId xmlns:a16="http://schemas.microsoft.com/office/drawing/2014/main" id="{6E64875F-2B8E-5F20-AD69-75128545C0DD}"/>
+          <p:cNvPr id="205" name="Rectangle 204">
+            <a:extLst>
+              <a:ext uri="{FF2B5EF4-FFF2-40B4-BE49-F238E27FC236}">
+                <a16:creationId xmlns:a16="http://schemas.microsoft.com/office/drawing/2014/main" id="{64D9F53B-87E9-E6A7-973D-AEF42ADBB14F}"/>
               </a:ext>
             </a:extLst>
           </p:cNvPr>
@@ -11362,7 +13113,7 @@
         </p:nvSpPr>
         <p:spPr>
           <a:xfrm>
-            <a:off x="4458121" y="1413057"/>
+            <a:off x="1433688" y="1114382"/>
             <a:ext cx="736311" cy="418585"/>
           </a:xfrm>
           <a:prstGeom prst="rect">
@@ -11402,10 +13153,10 @@
       </p:sp>
       <p:cxnSp>
         <p:nvCxnSpPr>
-          <p:cNvPr id="155" name="Straight Arrow Connector 154">
-            <a:extLst>
-              <a:ext uri="{FF2B5EF4-FFF2-40B4-BE49-F238E27FC236}">
-                <a16:creationId xmlns:a16="http://schemas.microsoft.com/office/drawing/2014/main" id="{7427857C-18CF-7E87-7DE9-41875BFC41AB}"/>
+          <p:cNvPr id="206" name="Straight Arrow Connector 205">
+            <a:extLst>
+              <a:ext uri="{FF2B5EF4-FFF2-40B4-BE49-F238E27FC236}">
+                <a16:creationId xmlns:a16="http://schemas.microsoft.com/office/drawing/2014/main" id="{21A460EE-EB70-C945-9EB0-A42BA9B94C3F}"/>
               </a:ext>
             </a:extLst>
           </p:cNvPr>
@@ -11416,13 +13167,16 @@
         </p:nvCxnSpPr>
         <p:spPr>
           <a:xfrm>
-            <a:off x="5032030" y="1275167"/>
+            <a:off x="2007597" y="976492"/>
             <a:ext cx="0" cy="137890"/>
           </a:xfrm>
           <a:prstGeom prst="straightConnector1">
             <a:avLst/>
           </a:prstGeom>
           <a:ln>
+            <a:solidFill>
+              <a:srgbClr val="FF0000"/>
+            </a:solidFill>
             <a:tailEnd type="triangle"/>
           </a:ln>
         </p:spPr>
@@ -11443,10 +13197,10 @@
       </p:cxnSp>
       <p:sp>
         <p:nvSpPr>
-          <p:cNvPr id="156" name="TextBox 155">
-            <a:extLst>
-              <a:ext uri="{FF2B5EF4-FFF2-40B4-BE49-F238E27FC236}">
-                <a16:creationId xmlns:a16="http://schemas.microsoft.com/office/drawing/2014/main" id="{2566064C-F469-508F-113D-556CBC75A869}"/>
+          <p:cNvPr id="207" name="TextBox 206">
+            <a:extLst>
+              <a:ext uri="{FF2B5EF4-FFF2-40B4-BE49-F238E27FC236}">
+                <a16:creationId xmlns:a16="http://schemas.microsoft.com/office/drawing/2014/main" id="{324ACC2E-58E8-851E-7F2C-5A0A160ADD22}"/>
               </a:ext>
             </a:extLst>
           </p:cNvPr>
@@ -11455,7 +13209,7 @@
         </p:nvSpPr>
         <p:spPr>
           <a:xfrm>
-            <a:off x="4801135" y="1092519"/>
+            <a:off x="1764344" y="803972"/>
             <a:ext cx="474810" cy="230832"/>
           </a:xfrm>
           <a:prstGeom prst="rect">
@@ -11474,1150 +13228,6 @@
               <a:rPr lang="en-US" sz="900" dirty="0"/>
               <a:t>dout2</a:t>
             </a:r>
-          </a:p>
-        </p:txBody>
-      </p:sp>
-      <p:cxnSp>
-        <p:nvCxnSpPr>
-          <p:cNvPr id="200" name="Straight Arrow Connector 199">
-            <a:extLst>
-              <a:ext uri="{FF2B5EF4-FFF2-40B4-BE49-F238E27FC236}">
-                <a16:creationId xmlns:a16="http://schemas.microsoft.com/office/drawing/2014/main" id="{D4AC79D0-5B76-D005-1A27-F76F271A152F}"/>
-              </a:ext>
-            </a:extLst>
-          </p:cNvPr>
-          <p:cNvCxnSpPr/>
-          <p:nvPr/>
-        </p:nvCxnSpPr>
-        <p:spPr>
-          <a:xfrm flipV="1">
-            <a:off x="8862876" y="3303944"/>
-            <a:ext cx="0" cy="167673"/>
-          </a:xfrm>
-          <a:prstGeom prst="straightConnector1">
-            <a:avLst/>
-          </a:prstGeom>
-          <a:ln>
-            <a:solidFill>
-              <a:srgbClr val="FF0000"/>
-            </a:solidFill>
-            <a:tailEnd type="triangle"/>
-          </a:ln>
-        </p:spPr>
-        <p:style>
-          <a:lnRef idx="2">
-            <a:schemeClr val="accent1"/>
-          </a:lnRef>
-          <a:fillRef idx="0">
-            <a:schemeClr val="accent1"/>
-          </a:fillRef>
-          <a:effectRef idx="1">
-            <a:schemeClr val="accent1"/>
-          </a:effectRef>
-          <a:fontRef idx="minor">
-            <a:schemeClr val="tx1"/>
-          </a:fontRef>
-        </p:style>
-      </p:cxnSp>
-      <p:sp>
-        <p:nvSpPr>
-          <p:cNvPr id="209" name="Rectangle 208">
-            <a:extLst>
-              <a:ext uri="{FF2B5EF4-FFF2-40B4-BE49-F238E27FC236}">
-                <a16:creationId xmlns:a16="http://schemas.microsoft.com/office/drawing/2014/main" id="{7E4C1978-E959-3B8A-9B69-5A0570C1B433}"/>
-              </a:ext>
-            </a:extLst>
-          </p:cNvPr>
-          <p:cNvSpPr/>
-          <p:nvPr/>
-        </p:nvSpPr>
-        <p:spPr>
-          <a:xfrm>
-            <a:off x="4259968" y="5572927"/>
-            <a:ext cx="663423" cy="460640"/>
-          </a:xfrm>
-          <a:prstGeom prst="rect">
-            <a:avLst/>
-          </a:prstGeom>
-          <a:solidFill>
-            <a:schemeClr val="bg1"/>
-          </a:solidFill>
-        </p:spPr>
-        <p:style>
-          <a:lnRef idx="2">
-            <a:schemeClr val="accent1">
-              <a:shade val="15000"/>
-            </a:schemeClr>
-          </a:lnRef>
-          <a:fillRef idx="1">
-            <a:schemeClr val="accent1"/>
-          </a:fillRef>
-          <a:effectRef idx="0">
-            <a:schemeClr val="accent1"/>
-          </a:effectRef>
-          <a:fontRef idx="minor">
-            <a:schemeClr val="lt1"/>
-          </a:fontRef>
-        </p:style>
-        <p:txBody>
-          <a:bodyPr rtlCol="0" anchor="ctr"/>
-          <a:lstStyle/>
-          <a:p>
-            <a:pPr algn="ctr"/>
-            <a:r>
-              <a:rPr lang="en-US" dirty="0"/>
-              <a:t>PC</a:t>
-            </a:r>
-          </a:p>
-        </p:txBody>
-      </p:sp>
-      <p:sp>
-        <p:nvSpPr>
-          <p:cNvPr id="210" name="TextBox 209">
-            <a:extLst>
-              <a:ext uri="{FF2B5EF4-FFF2-40B4-BE49-F238E27FC236}">
-                <a16:creationId xmlns:a16="http://schemas.microsoft.com/office/drawing/2014/main" id="{B99D9E74-E1B6-5F46-688D-FBFA65E6AF93}"/>
-              </a:ext>
-            </a:extLst>
-          </p:cNvPr>
-          <p:cNvSpPr txBox="1"/>
-          <p:nvPr/>
-        </p:nvSpPr>
-        <p:spPr>
-          <a:xfrm>
-            <a:off x="4318876" y="5611381"/>
-            <a:ext cx="574196" cy="384721"/>
-          </a:xfrm>
-          <a:prstGeom prst="rect">
-            <a:avLst/>
-          </a:prstGeom>
-          <a:noFill/>
-        </p:spPr>
-        <p:txBody>
-          <a:bodyPr wrap="square" rtlCol="0">
-            <a:spAutoFit/>
-          </a:bodyPr>
-          <a:lstStyle/>
-          <a:p>
-            <a:pPr algn="ctr"/>
-            <a:r>
-              <a:rPr lang="en-US" sz="1000" dirty="0"/>
-              <a:t>Stall</a:t>
-            </a:r>
-          </a:p>
-          <a:p>
-            <a:pPr algn="ctr"/>
-            <a:r>
-              <a:rPr lang="en-US" sz="900" dirty="0"/>
-              <a:t>counter</a:t>
-            </a:r>
-          </a:p>
-        </p:txBody>
-      </p:sp>
-      <p:cxnSp>
-        <p:nvCxnSpPr>
-          <p:cNvPr id="211" name="Straight Arrow Connector 210">
-            <a:extLst>
-              <a:ext uri="{FF2B5EF4-FFF2-40B4-BE49-F238E27FC236}">
-                <a16:creationId xmlns:a16="http://schemas.microsoft.com/office/drawing/2014/main" id="{35A73827-A0E8-19ED-1B3D-EEA836E5E5D2}"/>
-              </a:ext>
-            </a:extLst>
-          </p:cNvPr>
-          <p:cNvCxnSpPr>
-            <a:cxnSpLocks/>
-          </p:cNvCxnSpPr>
-          <p:nvPr/>
-        </p:nvCxnSpPr>
-        <p:spPr>
-          <a:xfrm>
-            <a:off x="4030095" y="5710140"/>
-            <a:ext cx="229874" cy="0"/>
-          </a:xfrm>
-          <a:prstGeom prst="straightConnector1">
-            <a:avLst/>
-          </a:prstGeom>
-          <a:ln>
-            <a:solidFill>
-              <a:srgbClr val="FF0000"/>
-            </a:solidFill>
-            <a:tailEnd type="triangle"/>
-          </a:ln>
-        </p:spPr>
-        <p:style>
-          <a:lnRef idx="2">
-            <a:schemeClr val="accent1"/>
-          </a:lnRef>
-          <a:fillRef idx="0">
-            <a:schemeClr val="accent1"/>
-          </a:fillRef>
-          <a:effectRef idx="1">
-            <a:schemeClr val="accent1"/>
-          </a:effectRef>
-          <a:fontRef idx="minor">
-            <a:schemeClr val="tx1"/>
-          </a:fontRef>
-        </p:style>
-      </p:cxnSp>
-      <p:sp>
-        <p:nvSpPr>
-          <p:cNvPr id="212" name="Rectangle 211">
-            <a:extLst>
-              <a:ext uri="{FF2B5EF4-FFF2-40B4-BE49-F238E27FC236}">
-                <a16:creationId xmlns:a16="http://schemas.microsoft.com/office/drawing/2014/main" id="{42328FB6-6571-FA3C-8E81-028268A77042}"/>
-              </a:ext>
-            </a:extLst>
-          </p:cNvPr>
-          <p:cNvSpPr/>
-          <p:nvPr/>
-        </p:nvSpPr>
-        <p:spPr>
-          <a:xfrm>
-            <a:off x="3351306" y="5573141"/>
-            <a:ext cx="678789" cy="484706"/>
-          </a:xfrm>
-          <a:prstGeom prst="rect">
-            <a:avLst/>
-          </a:prstGeom>
-          <a:solidFill>
-            <a:schemeClr val="bg1"/>
-          </a:solidFill>
-        </p:spPr>
-        <p:style>
-          <a:lnRef idx="2">
-            <a:schemeClr val="accent1">
-              <a:shade val="15000"/>
-            </a:schemeClr>
-          </a:lnRef>
-          <a:fillRef idx="1">
-            <a:schemeClr val="accent1"/>
-          </a:fillRef>
-          <a:effectRef idx="0">
-            <a:schemeClr val="accent1"/>
-          </a:effectRef>
-          <a:fontRef idx="minor">
-            <a:schemeClr val="lt1"/>
-          </a:fontRef>
-        </p:style>
-        <p:txBody>
-          <a:bodyPr rtlCol="0" anchor="ctr"/>
-          <a:lstStyle/>
-          <a:p>
-            <a:pPr algn="ctr"/>
-            <a:r>
-              <a:rPr lang="en-US" dirty="0"/>
-              <a:t>PC</a:t>
-            </a:r>
-          </a:p>
-        </p:txBody>
-      </p:sp>
-      <p:sp>
-        <p:nvSpPr>
-          <p:cNvPr id="213" name="TextBox 212">
-            <a:extLst>
-              <a:ext uri="{FF2B5EF4-FFF2-40B4-BE49-F238E27FC236}">
-                <a16:creationId xmlns:a16="http://schemas.microsoft.com/office/drawing/2014/main" id="{3468D653-D2DB-10F8-EB42-1EF2F69D462B}"/>
-              </a:ext>
-            </a:extLst>
-          </p:cNvPr>
-          <p:cNvSpPr txBox="1"/>
-          <p:nvPr/>
-        </p:nvSpPr>
-        <p:spPr>
-          <a:xfrm>
-            <a:off x="3316652" y="5593028"/>
-            <a:ext cx="729687" cy="400110"/>
-          </a:xfrm>
-          <a:prstGeom prst="rect">
-            <a:avLst/>
-          </a:prstGeom>
-          <a:noFill/>
-        </p:spPr>
-        <p:txBody>
-          <a:bodyPr wrap="square" rtlCol="0">
-            <a:spAutoFit/>
-          </a:bodyPr>
-          <a:lstStyle/>
-          <a:p>
-            <a:pPr algn="ctr"/>
-            <a:r>
-              <a:rPr lang="en-US" sz="1000" dirty="0"/>
-              <a:t>Hazard</a:t>
-            </a:r>
-          </a:p>
-          <a:p>
-            <a:pPr algn="ctr"/>
-            <a:r>
-              <a:rPr lang="en-US" sz="1000" dirty="0"/>
-              <a:t>Detection</a:t>
-            </a:r>
-          </a:p>
-        </p:txBody>
-      </p:sp>
-      <p:cxnSp>
-        <p:nvCxnSpPr>
-          <p:cNvPr id="215" name="Straight Arrow Connector 214">
-            <a:extLst>
-              <a:ext uri="{FF2B5EF4-FFF2-40B4-BE49-F238E27FC236}">
-                <a16:creationId xmlns:a16="http://schemas.microsoft.com/office/drawing/2014/main" id="{2F2A33F8-388E-3212-42F2-F316A4DCC9A2}"/>
-              </a:ext>
-            </a:extLst>
-          </p:cNvPr>
-          <p:cNvCxnSpPr>
-            <a:cxnSpLocks/>
-          </p:cNvCxnSpPr>
-          <p:nvPr/>
-        </p:nvCxnSpPr>
-        <p:spPr>
-          <a:xfrm>
-            <a:off x="2909696" y="5929325"/>
-            <a:ext cx="442253" cy="0"/>
-          </a:xfrm>
-          <a:prstGeom prst="straightConnector1">
-            <a:avLst/>
-          </a:prstGeom>
-          <a:ln>
-            <a:solidFill>
-              <a:srgbClr val="FF0000"/>
-            </a:solidFill>
-            <a:tailEnd type="triangle"/>
-          </a:ln>
-        </p:spPr>
-        <p:style>
-          <a:lnRef idx="2">
-            <a:schemeClr val="accent1"/>
-          </a:lnRef>
-          <a:fillRef idx="0">
-            <a:schemeClr val="accent1"/>
-          </a:fillRef>
-          <a:effectRef idx="1">
-            <a:schemeClr val="accent1"/>
-          </a:effectRef>
-          <a:fontRef idx="minor">
-            <a:schemeClr val="tx1"/>
-          </a:fontRef>
-        </p:style>
-      </p:cxnSp>
-      <p:cxnSp>
-        <p:nvCxnSpPr>
-          <p:cNvPr id="217" name="Straight Arrow Connector 216">
-            <a:extLst>
-              <a:ext uri="{FF2B5EF4-FFF2-40B4-BE49-F238E27FC236}">
-                <a16:creationId xmlns:a16="http://schemas.microsoft.com/office/drawing/2014/main" id="{0C1B9568-C8CF-C3E1-D013-4AB3BA49E0A6}"/>
-              </a:ext>
-            </a:extLst>
-          </p:cNvPr>
-          <p:cNvCxnSpPr>
-            <a:cxnSpLocks/>
-          </p:cNvCxnSpPr>
-          <p:nvPr/>
-        </p:nvCxnSpPr>
-        <p:spPr>
-          <a:xfrm flipH="1">
-            <a:off x="4040822" y="5917227"/>
-            <a:ext cx="205614" cy="0"/>
-          </a:xfrm>
-          <a:prstGeom prst="straightConnector1">
-            <a:avLst/>
-          </a:prstGeom>
-          <a:ln>
-            <a:solidFill>
-              <a:srgbClr val="FF0000"/>
-            </a:solidFill>
-            <a:tailEnd type="triangle"/>
-          </a:ln>
-        </p:spPr>
-        <p:style>
-          <a:lnRef idx="2">
-            <a:schemeClr val="accent1"/>
-          </a:lnRef>
-          <a:fillRef idx="0">
-            <a:schemeClr val="accent1"/>
-          </a:fillRef>
-          <a:effectRef idx="1">
-            <a:schemeClr val="accent1"/>
-          </a:effectRef>
-          <a:fontRef idx="minor">
-            <a:schemeClr val="tx1"/>
-          </a:fontRef>
-        </p:style>
-      </p:cxnSp>
-      <p:cxnSp>
-        <p:nvCxnSpPr>
-          <p:cNvPr id="218" name="Straight Connector 217">
-            <a:extLst>
-              <a:ext uri="{FF2B5EF4-FFF2-40B4-BE49-F238E27FC236}">
-                <a16:creationId xmlns:a16="http://schemas.microsoft.com/office/drawing/2014/main" id="{E49846C5-8569-392B-D7EC-3272F6F2B440}"/>
-              </a:ext>
-            </a:extLst>
-          </p:cNvPr>
-          <p:cNvCxnSpPr>
-            <a:cxnSpLocks/>
-          </p:cNvCxnSpPr>
-          <p:nvPr/>
-        </p:nvCxnSpPr>
-        <p:spPr>
-          <a:xfrm>
-            <a:off x="2920808" y="5560181"/>
-            <a:ext cx="0" cy="367608"/>
-          </a:xfrm>
-          <a:prstGeom prst="line">
-            <a:avLst/>
-          </a:prstGeom>
-          <a:ln>
-            <a:solidFill>
-              <a:srgbClr val="FF0000"/>
-            </a:solidFill>
-          </a:ln>
-        </p:spPr>
-        <p:style>
-          <a:lnRef idx="2">
-            <a:schemeClr val="accent1"/>
-          </a:lnRef>
-          <a:fillRef idx="0">
-            <a:schemeClr val="accent1"/>
-          </a:fillRef>
-          <a:effectRef idx="1">
-            <a:schemeClr val="accent1"/>
-          </a:effectRef>
-          <a:fontRef idx="minor">
-            <a:schemeClr val="tx1"/>
-          </a:fontRef>
-        </p:style>
-      </p:cxnSp>
-      <p:cxnSp>
-        <p:nvCxnSpPr>
-          <p:cNvPr id="220" name="Straight Arrow Connector 219">
-            <a:extLst>
-              <a:ext uri="{FF2B5EF4-FFF2-40B4-BE49-F238E27FC236}">
-                <a16:creationId xmlns:a16="http://schemas.microsoft.com/office/drawing/2014/main" id="{BC2F36C1-D9E2-5F94-A594-FBFAAC53E660}"/>
-              </a:ext>
-            </a:extLst>
-          </p:cNvPr>
-          <p:cNvCxnSpPr>
-            <a:cxnSpLocks/>
-          </p:cNvCxnSpPr>
-          <p:nvPr/>
-        </p:nvCxnSpPr>
-        <p:spPr>
-          <a:xfrm>
-            <a:off x="3145244" y="5712432"/>
-            <a:ext cx="211703" cy="0"/>
-          </a:xfrm>
-          <a:prstGeom prst="straightConnector1">
-            <a:avLst/>
-          </a:prstGeom>
-          <a:ln>
-            <a:solidFill>
-              <a:srgbClr val="FF0000"/>
-            </a:solidFill>
-            <a:tailEnd type="triangle"/>
-          </a:ln>
-        </p:spPr>
-        <p:style>
-          <a:lnRef idx="2">
-            <a:schemeClr val="accent1"/>
-          </a:lnRef>
-          <a:fillRef idx="0">
-            <a:schemeClr val="accent1"/>
-          </a:fillRef>
-          <a:effectRef idx="1">
-            <a:schemeClr val="accent1"/>
-          </a:effectRef>
-          <a:fontRef idx="minor">
-            <a:schemeClr val="tx1"/>
-          </a:fontRef>
-        </p:style>
-      </p:cxnSp>
-      <p:cxnSp>
-        <p:nvCxnSpPr>
-          <p:cNvPr id="221" name="Straight Connector 220">
-            <a:extLst>
-              <a:ext uri="{FF2B5EF4-FFF2-40B4-BE49-F238E27FC236}">
-                <a16:creationId xmlns:a16="http://schemas.microsoft.com/office/drawing/2014/main" id="{6FB6D13F-84F6-B220-EF66-A111BDCAEC0A}"/>
-              </a:ext>
-            </a:extLst>
-          </p:cNvPr>
-          <p:cNvCxnSpPr>
-            <a:cxnSpLocks/>
-          </p:cNvCxnSpPr>
-          <p:nvPr/>
-        </p:nvCxnSpPr>
-        <p:spPr>
-          <a:xfrm flipH="1">
-            <a:off x="2511119" y="5576977"/>
-            <a:ext cx="398618" cy="0"/>
-          </a:xfrm>
-          <a:prstGeom prst="line">
-            <a:avLst/>
-          </a:prstGeom>
-          <a:ln>
-            <a:solidFill>
-              <a:srgbClr val="FF0000"/>
-            </a:solidFill>
-          </a:ln>
-        </p:spPr>
-        <p:style>
-          <a:lnRef idx="2">
-            <a:schemeClr val="accent1"/>
-          </a:lnRef>
-          <a:fillRef idx="0">
-            <a:schemeClr val="accent1"/>
-          </a:fillRef>
-          <a:effectRef idx="1">
-            <a:schemeClr val="accent1"/>
-          </a:effectRef>
-          <a:fontRef idx="minor">
-            <a:schemeClr val="tx1"/>
-          </a:fontRef>
-        </p:style>
-      </p:cxnSp>
-      <p:cxnSp>
-        <p:nvCxnSpPr>
-          <p:cNvPr id="222" name="Straight Connector 221">
-            <a:extLst>
-              <a:ext uri="{FF2B5EF4-FFF2-40B4-BE49-F238E27FC236}">
-                <a16:creationId xmlns:a16="http://schemas.microsoft.com/office/drawing/2014/main" id="{93DC441A-8F48-0B1E-E235-4F3A44A86932}"/>
-              </a:ext>
-            </a:extLst>
-          </p:cNvPr>
-          <p:cNvCxnSpPr>
-            <a:cxnSpLocks/>
-          </p:cNvCxnSpPr>
-          <p:nvPr/>
-        </p:nvCxnSpPr>
-        <p:spPr>
-          <a:xfrm>
-            <a:off x="3136484" y="5250897"/>
-            <a:ext cx="0" cy="470946"/>
-          </a:xfrm>
-          <a:prstGeom prst="line">
-            <a:avLst/>
-          </a:prstGeom>
-          <a:ln>
-            <a:solidFill>
-              <a:srgbClr val="FF0000"/>
-            </a:solidFill>
-          </a:ln>
-        </p:spPr>
-        <p:style>
-          <a:lnRef idx="2">
-            <a:schemeClr val="accent1"/>
-          </a:lnRef>
-          <a:fillRef idx="0">
-            <a:schemeClr val="accent1"/>
-          </a:fillRef>
-          <a:effectRef idx="1">
-            <a:schemeClr val="accent1"/>
-          </a:effectRef>
-          <a:fontRef idx="minor">
-            <a:schemeClr val="tx1"/>
-          </a:fontRef>
-        </p:style>
-      </p:cxnSp>
-      <p:cxnSp>
-        <p:nvCxnSpPr>
-          <p:cNvPr id="224" name="Straight Connector 223">
-            <a:extLst>
-              <a:ext uri="{FF2B5EF4-FFF2-40B4-BE49-F238E27FC236}">
-                <a16:creationId xmlns:a16="http://schemas.microsoft.com/office/drawing/2014/main" id="{A611D7C8-EA59-07B6-6DE0-08A00908356E}"/>
-              </a:ext>
-            </a:extLst>
-          </p:cNvPr>
-          <p:cNvCxnSpPr>
-            <a:cxnSpLocks/>
-          </p:cNvCxnSpPr>
-          <p:nvPr/>
-        </p:nvCxnSpPr>
-        <p:spPr>
-          <a:xfrm>
-            <a:off x="2759850" y="5241548"/>
-            <a:ext cx="383938" cy="0"/>
-          </a:xfrm>
-          <a:prstGeom prst="line">
-            <a:avLst/>
-          </a:prstGeom>
-          <a:ln>
-            <a:solidFill>
-              <a:srgbClr val="FF0000"/>
-            </a:solidFill>
-          </a:ln>
-        </p:spPr>
-        <p:style>
-          <a:lnRef idx="2">
-            <a:schemeClr val="accent1"/>
-          </a:lnRef>
-          <a:fillRef idx="0">
-            <a:schemeClr val="accent1"/>
-          </a:fillRef>
-          <a:effectRef idx="1">
-            <a:schemeClr val="accent1"/>
-          </a:effectRef>
-          <a:fontRef idx="minor">
-            <a:schemeClr val="tx1"/>
-          </a:fontRef>
-        </p:style>
-      </p:cxnSp>
-      <p:cxnSp>
-        <p:nvCxnSpPr>
-          <p:cNvPr id="225" name="Straight Arrow Connector 224">
-            <a:extLst>
-              <a:ext uri="{FF2B5EF4-FFF2-40B4-BE49-F238E27FC236}">
-                <a16:creationId xmlns:a16="http://schemas.microsoft.com/office/drawing/2014/main" id="{4FA97CD2-A4F3-8569-BF3A-77C3076814AA}"/>
-              </a:ext>
-            </a:extLst>
-          </p:cNvPr>
-          <p:cNvCxnSpPr>
-            <a:cxnSpLocks/>
-          </p:cNvCxnSpPr>
-          <p:nvPr/>
-        </p:nvCxnSpPr>
-        <p:spPr>
-          <a:xfrm flipV="1">
-            <a:off x="4124761" y="5481780"/>
-            <a:ext cx="0" cy="225402"/>
-          </a:xfrm>
-          <a:prstGeom prst="straightConnector1">
-            <a:avLst/>
-          </a:prstGeom>
-          <a:ln>
-            <a:solidFill>
-              <a:srgbClr val="FF0000"/>
-            </a:solidFill>
-            <a:tailEnd type="triangle"/>
-          </a:ln>
-        </p:spPr>
-        <p:style>
-          <a:lnRef idx="2">
-            <a:schemeClr val="accent1"/>
-          </a:lnRef>
-          <a:fillRef idx="0">
-            <a:schemeClr val="accent1"/>
-          </a:fillRef>
-          <a:effectRef idx="1">
-            <a:schemeClr val="accent1"/>
-          </a:effectRef>
-          <a:fontRef idx="minor">
-            <a:schemeClr val="tx1"/>
-          </a:fontRef>
-        </p:style>
-      </p:cxnSp>
-      <p:cxnSp>
-        <p:nvCxnSpPr>
-          <p:cNvPr id="226" name="Straight Arrow Connector 225">
-            <a:extLst>
-              <a:ext uri="{FF2B5EF4-FFF2-40B4-BE49-F238E27FC236}">
-                <a16:creationId xmlns:a16="http://schemas.microsoft.com/office/drawing/2014/main" id="{13244B44-D83A-17F1-89B4-8EB805ADF839}"/>
-              </a:ext>
-            </a:extLst>
-          </p:cNvPr>
-          <p:cNvCxnSpPr>
-            <a:cxnSpLocks/>
-          </p:cNvCxnSpPr>
-          <p:nvPr/>
-        </p:nvCxnSpPr>
-        <p:spPr>
-          <a:xfrm>
-            <a:off x="4172823" y="5931908"/>
-            <a:ext cx="0" cy="402752"/>
-          </a:xfrm>
-          <a:prstGeom prst="straightConnector1">
-            <a:avLst/>
-          </a:prstGeom>
-          <a:ln>
-            <a:solidFill>
-              <a:srgbClr val="FF0000"/>
-            </a:solidFill>
-            <a:tailEnd type="triangle"/>
-          </a:ln>
-        </p:spPr>
-        <p:style>
-          <a:lnRef idx="2">
-            <a:schemeClr val="accent1"/>
-          </a:lnRef>
-          <a:fillRef idx="0">
-            <a:schemeClr val="accent1"/>
-          </a:fillRef>
-          <a:effectRef idx="1">
-            <a:schemeClr val="accent1"/>
-          </a:effectRef>
-          <a:fontRef idx="minor">
-            <a:schemeClr val="tx1"/>
-          </a:fontRef>
-        </p:style>
-      </p:cxnSp>
-      <p:cxnSp>
-        <p:nvCxnSpPr>
-          <p:cNvPr id="228" name="Straight Connector 227">
-            <a:extLst>
-              <a:ext uri="{FF2B5EF4-FFF2-40B4-BE49-F238E27FC236}">
-                <a16:creationId xmlns:a16="http://schemas.microsoft.com/office/drawing/2014/main" id="{2FA12D39-0FA2-ABBD-EACC-E063F56B5583}"/>
-              </a:ext>
-            </a:extLst>
-          </p:cNvPr>
-          <p:cNvCxnSpPr/>
-          <p:nvPr/>
-        </p:nvCxnSpPr>
-        <p:spPr>
-          <a:xfrm flipH="1">
-            <a:off x="2952806" y="5177183"/>
-            <a:ext cx="77899" cy="129540"/>
-          </a:xfrm>
-          <a:prstGeom prst="line">
-            <a:avLst/>
-          </a:prstGeom>
-        </p:spPr>
-        <p:style>
-          <a:lnRef idx="2">
-            <a:schemeClr val="accent1"/>
-          </a:lnRef>
-          <a:fillRef idx="0">
-            <a:schemeClr val="accent1"/>
-          </a:fillRef>
-          <a:effectRef idx="1">
-            <a:schemeClr val="accent1"/>
-          </a:effectRef>
-          <a:fontRef idx="minor">
-            <a:schemeClr val="tx1"/>
-          </a:fontRef>
-        </p:style>
-      </p:cxnSp>
-      <p:sp>
-        <p:nvSpPr>
-          <p:cNvPr id="232" name="TextBox 231">
-            <a:extLst>
-              <a:ext uri="{FF2B5EF4-FFF2-40B4-BE49-F238E27FC236}">
-                <a16:creationId xmlns:a16="http://schemas.microsoft.com/office/drawing/2014/main" id="{84B6D813-B5DE-D1FC-AF80-525F92C8F7F8}"/>
-              </a:ext>
-            </a:extLst>
-          </p:cNvPr>
-          <p:cNvSpPr txBox="1"/>
-          <p:nvPr/>
-        </p:nvSpPr>
-        <p:spPr>
-          <a:xfrm>
-            <a:off x="2834608" y="5072614"/>
-            <a:ext cx="245580" cy="230832"/>
-          </a:xfrm>
-          <a:prstGeom prst="rect">
-            <a:avLst/>
-          </a:prstGeom>
-          <a:noFill/>
-        </p:spPr>
-        <p:txBody>
-          <a:bodyPr wrap="none" rtlCol="0">
-            <a:spAutoFit/>
-          </a:bodyPr>
-          <a:lstStyle/>
-          <a:p>
-            <a:pPr algn="ctr"/>
-            <a:r>
-              <a:rPr lang="en-US" sz="900" dirty="0"/>
-              <a:t>4</a:t>
-            </a:r>
-          </a:p>
-        </p:txBody>
-      </p:sp>
-      <p:sp>
-        <p:nvSpPr>
-          <p:cNvPr id="233" name="Rectangle 232">
-            <a:extLst>
-              <a:ext uri="{FF2B5EF4-FFF2-40B4-BE49-F238E27FC236}">
-                <a16:creationId xmlns:a16="http://schemas.microsoft.com/office/drawing/2014/main" id="{E46D487D-09B4-2769-C34D-554786351A6B}"/>
-              </a:ext>
-            </a:extLst>
-          </p:cNvPr>
-          <p:cNvSpPr/>
-          <p:nvPr/>
-        </p:nvSpPr>
-        <p:spPr>
-          <a:xfrm>
-            <a:off x="4027858" y="6344690"/>
-            <a:ext cx="663423" cy="460640"/>
-          </a:xfrm>
-          <a:prstGeom prst="rect">
-            <a:avLst/>
-          </a:prstGeom>
-          <a:solidFill>
-            <a:schemeClr val="bg1"/>
-          </a:solidFill>
-        </p:spPr>
-        <p:style>
-          <a:lnRef idx="2">
-            <a:schemeClr val="accent1">
-              <a:shade val="15000"/>
-            </a:schemeClr>
-          </a:lnRef>
-          <a:fillRef idx="1">
-            <a:schemeClr val="accent1"/>
-          </a:fillRef>
-          <a:effectRef idx="0">
-            <a:schemeClr val="accent1"/>
-          </a:effectRef>
-          <a:fontRef idx="minor">
-            <a:schemeClr val="lt1"/>
-          </a:fontRef>
-        </p:style>
-        <p:txBody>
-          <a:bodyPr rtlCol="0" anchor="ctr"/>
-          <a:lstStyle/>
-          <a:p>
-            <a:pPr algn="ctr"/>
-            <a:r>
-              <a:rPr lang="en-US" dirty="0"/>
-              <a:t>PC</a:t>
-            </a:r>
-          </a:p>
-        </p:txBody>
-      </p:sp>
-      <p:sp>
-        <p:nvSpPr>
-          <p:cNvPr id="234" name="TextBox 233">
-            <a:extLst>
-              <a:ext uri="{FF2B5EF4-FFF2-40B4-BE49-F238E27FC236}">
-                <a16:creationId xmlns:a16="http://schemas.microsoft.com/office/drawing/2014/main" id="{B03E2FCB-F4FA-D322-14B8-FB5E1F9573B3}"/>
-              </a:ext>
-            </a:extLst>
-          </p:cNvPr>
-          <p:cNvSpPr txBox="1"/>
-          <p:nvPr/>
-        </p:nvSpPr>
-        <p:spPr>
-          <a:xfrm>
-            <a:off x="4505477" y="6442196"/>
-            <a:ext cx="194710" cy="246221"/>
-          </a:xfrm>
-          <a:prstGeom prst="rect">
-            <a:avLst/>
-          </a:prstGeom>
-          <a:noFill/>
-        </p:spPr>
-        <p:txBody>
-          <a:bodyPr wrap="square" rtlCol="0">
-            <a:spAutoFit/>
-          </a:bodyPr>
-          <a:lstStyle/>
-          <a:p>
-            <a:pPr algn="ctr"/>
-            <a:r>
-              <a:rPr lang="en-US" sz="1000" dirty="0"/>
-              <a:t>&gt;</a:t>
-            </a:r>
-            <a:endParaRPr lang="en-US" sz="900" dirty="0"/>
-          </a:p>
-        </p:txBody>
-      </p:sp>
-      <p:cxnSp>
-        <p:nvCxnSpPr>
-          <p:cNvPr id="237" name="Straight Arrow Connector 236">
-            <a:extLst>
-              <a:ext uri="{FF2B5EF4-FFF2-40B4-BE49-F238E27FC236}">
-                <a16:creationId xmlns:a16="http://schemas.microsoft.com/office/drawing/2014/main" id="{657E1736-86D8-4C89-8125-43EFDE81B0A7}"/>
-              </a:ext>
-            </a:extLst>
-          </p:cNvPr>
-          <p:cNvCxnSpPr>
-            <a:cxnSpLocks/>
-          </p:cNvCxnSpPr>
-          <p:nvPr/>
-        </p:nvCxnSpPr>
-        <p:spPr>
-          <a:xfrm>
-            <a:off x="4696548" y="6575010"/>
-            <a:ext cx="229874" cy="0"/>
-          </a:xfrm>
-          <a:prstGeom prst="straightConnector1">
-            <a:avLst/>
-          </a:prstGeom>
-          <a:ln>
-            <a:solidFill>
-              <a:srgbClr val="FF0000"/>
-            </a:solidFill>
-            <a:tailEnd type="triangle"/>
-          </a:ln>
-        </p:spPr>
-        <p:style>
-          <a:lnRef idx="2">
-            <a:schemeClr val="accent1"/>
-          </a:lnRef>
-          <a:fillRef idx="0">
-            <a:schemeClr val="accent1"/>
-          </a:fillRef>
-          <a:effectRef idx="1">
-            <a:schemeClr val="accent1"/>
-          </a:effectRef>
-          <a:fontRef idx="minor">
-            <a:schemeClr val="tx1"/>
-          </a:fontRef>
-        </p:style>
-      </p:cxnSp>
-      <p:cxnSp>
-        <p:nvCxnSpPr>
-          <p:cNvPr id="241" name="Straight Arrow Connector 240">
-            <a:extLst>
-              <a:ext uri="{FF2B5EF4-FFF2-40B4-BE49-F238E27FC236}">
-                <a16:creationId xmlns:a16="http://schemas.microsoft.com/office/drawing/2014/main" id="{CFF1441C-A871-C028-33DF-68E89133CAC3}"/>
-              </a:ext>
-            </a:extLst>
-          </p:cNvPr>
-          <p:cNvCxnSpPr>
-            <a:cxnSpLocks/>
-          </p:cNvCxnSpPr>
-          <p:nvPr/>
-        </p:nvCxnSpPr>
-        <p:spPr>
-          <a:xfrm>
-            <a:off x="4566636" y="6234492"/>
-            <a:ext cx="0" cy="100168"/>
-          </a:xfrm>
-          <a:prstGeom prst="straightConnector1">
-            <a:avLst/>
-          </a:prstGeom>
-          <a:ln>
-            <a:solidFill>
-              <a:srgbClr val="FF0000"/>
-            </a:solidFill>
-            <a:tailEnd type="triangle"/>
-          </a:ln>
-        </p:spPr>
-        <p:style>
-          <a:lnRef idx="2">
-            <a:schemeClr val="accent1"/>
-          </a:lnRef>
-          <a:fillRef idx="0">
-            <a:schemeClr val="accent1"/>
-          </a:fillRef>
-          <a:effectRef idx="1">
-            <a:schemeClr val="accent1"/>
-          </a:effectRef>
-          <a:fontRef idx="minor">
-            <a:schemeClr val="tx1"/>
-          </a:fontRef>
-        </p:style>
-      </p:cxnSp>
-      <p:sp>
-        <p:nvSpPr>
-          <p:cNvPr id="242" name="TextBox 241">
-            <a:extLst>
-              <a:ext uri="{FF2B5EF4-FFF2-40B4-BE49-F238E27FC236}">
-                <a16:creationId xmlns:a16="http://schemas.microsoft.com/office/drawing/2014/main" id="{5CF4424D-C27A-0FCF-199D-B10372DC54C3}"/>
-              </a:ext>
-            </a:extLst>
-          </p:cNvPr>
-          <p:cNvSpPr txBox="1"/>
-          <p:nvPr/>
-        </p:nvSpPr>
-        <p:spPr>
-          <a:xfrm>
-            <a:off x="4443371" y="6038820"/>
-            <a:ext cx="245580" cy="230832"/>
-          </a:xfrm>
-          <a:prstGeom prst="rect">
-            <a:avLst/>
-          </a:prstGeom>
-          <a:noFill/>
-        </p:spPr>
-        <p:txBody>
-          <a:bodyPr wrap="none" rtlCol="0">
-            <a:spAutoFit/>
-          </a:bodyPr>
-          <a:lstStyle/>
-          <a:p>
-            <a:pPr algn="ctr"/>
-            <a:r>
-              <a:rPr lang="en-US" sz="900" dirty="0"/>
-              <a:t>0</a:t>
-            </a:r>
-          </a:p>
-        </p:txBody>
-      </p:sp>
-      <p:sp>
-        <p:nvSpPr>
-          <p:cNvPr id="244" name="TextBox 243">
-            <a:extLst>
-              <a:ext uri="{FF2B5EF4-FFF2-40B4-BE49-F238E27FC236}">
-                <a16:creationId xmlns:a16="http://schemas.microsoft.com/office/drawing/2014/main" id="{7F7540FB-45AD-3BC3-48E6-D125DD8550E7}"/>
-              </a:ext>
-            </a:extLst>
-          </p:cNvPr>
-          <p:cNvSpPr txBox="1"/>
-          <p:nvPr/>
-        </p:nvSpPr>
-        <p:spPr>
-          <a:xfrm>
-            <a:off x="4802612" y="6461559"/>
-            <a:ext cx="574196" cy="246221"/>
-          </a:xfrm>
-          <a:prstGeom prst="rect">
-            <a:avLst/>
-          </a:prstGeom>
-          <a:noFill/>
-        </p:spPr>
-        <p:txBody>
-          <a:bodyPr wrap="square" rtlCol="0">
-            <a:spAutoFit/>
-          </a:bodyPr>
-          <a:lstStyle/>
-          <a:p>
-            <a:pPr algn="ctr"/>
-            <a:r>
-              <a:rPr lang="en-US" sz="1000" dirty="0"/>
-              <a:t>Stall</a:t>
-            </a:r>
-          </a:p>
-        </p:txBody>
-      </p:sp>
-      <p:sp>
-        <p:nvSpPr>
-          <p:cNvPr id="245" name="TextBox 244">
-            <a:extLst>
-              <a:ext uri="{FF2B5EF4-FFF2-40B4-BE49-F238E27FC236}">
-                <a16:creationId xmlns:a16="http://schemas.microsoft.com/office/drawing/2014/main" id="{6F693865-D421-FB3F-F617-69C8DFB74DDA}"/>
-              </a:ext>
-            </a:extLst>
-          </p:cNvPr>
-          <p:cNvSpPr txBox="1"/>
-          <p:nvPr/>
-        </p:nvSpPr>
-        <p:spPr>
-          <a:xfrm>
-            <a:off x="3408450" y="6047112"/>
-            <a:ext cx="861489" cy="246221"/>
-          </a:xfrm>
-          <a:prstGeom prst="rect">
-            <a:avLst/>
-          </a:prstGeom>
-          <a:noFill/>
-        </p:spPr>
-        <p:txBody>
-          <a:bodyPr wrap="square" rtlCol="0">
-            <a:spAutoFit/>
-          </a:bodyPr>
-          <a:lstStyle/>
-          <a:p>
-            <a:pPr algn="ctr"/>
-            <a:r>
-              <a:rPr lang="en-US" sz="1000" dirty="0" err="1"/>
-              <a:t>stall_count</a:t>
-            </a:r>
-            <a:endParaRPr lang="en-US" sz="1000" dirty="0"/>
-          </a:p>
-        </p:txBody>
-      </p:sp>
-      <p:sp>
-        <p:nvSpPr>
-          <p:cNvPr id="246" name="TextBox 245">
-            <a:extLst>
-              <a:ext uri="{FF2B5EF4-FFF2-40B4-BE49-F238E27FC236}">
-                <a16:creationId xmlns:a16="http://schemas.microsoft.com/office/drawing/2014/main" id="{3BA26EF9-D46A-45DC-70BA-21364891CB27}"/>
-              </a:ext>
-            </a:extLst>
-          </p:cNvPr>
-          <p:cNvSpPr txBox="1"/>
-          <p:nvPr/>
-        </p:nvSpPr>
-        <p:spPr>
-          <a:xfrm>
-            <a:off x="3685159" y="5311002"/>
-            <a:ext cx="861489" cy="246221"/>
-          </a:xfrm>
-          <a:prstGeom prst="rect">
-            <a:avLst/>
-          </a:prstGeom>
-          <a:noFill/>
-        </p:spPr>
-        <p:txBody>
-          <a:bodyPr wrap="square" rtlCol="0">
-            <a:spAutoFit/>
-          </a:bodyPr>
-          <a:lstStyle/>
-          <a:p>
-            <a:pPr algn="ctr"/>
-            <a:r>
-              <a:rPr lang="en-US" sz="1000" dirty="0" err="1"/>
-              <a:t>start_stall</a:t>
-            </a:r>
-            <a:endParaRPr lang="en-US" sz="1000" dirty="0"/>
-          </a:p>
-        </p:txBody>
-      </p:sp>
-      <p:cxnSp>
-        <p:nvCxnSpPr>
-          <p:cNvPr id="12" name="Straight Arrow Connector 11">
-            <a:extLst>
-              <a:ext uri="{FF2B5EF4-FFF2-40B4-BE49-F238E27FC236}">
-                <a16:creationId xmlns:a16="http://schemas.microsoft.com/office/drawing/2014/main" id="{C104EDAA-FD8A-4089-C218-104118D04C57}"/>
-              </a:ext>
-            </a:extLst>
-          </p:cNvPr>
-          <p:cNvCxnSpPr>
-            <a:cxnSpLocks/>
-          </p:cNvCxnSpPr>
-          <p:nvPr/>
-        </p:nvCxnSpPr>
-        <p:spPr>
-          <a:xfrm>
-            <a:off x="3472911" y="6051625"/>
-            <a:ext cx="0" cy="402752"/>
-          </a:xfrm>
-          <a:prstGeom prst="straightConnector1">
-            <a:avLst/>
-          </a:prstGeom>
-          <a:ln>
-            <a:solidFill>
-              <a:srgbClr val="FF0000"/>
-            </a:solidFill>
-            <a:tailEnd type="triangle"/>
-          </a:ln>
-        </p:spPr>
-        <p:style>
-          <a:lnRef idx="2">
-            <a:schemeClr val="accent1"/>
-          </a:lnRef>
-          <a:fillRef idx="0">
-            <a:schemeClr val="accent1"/>
-          </a:fillRef>
-          <a:effectRef idx="1">
-            <a:schemeClr val="accent1"/>
-          </a:effectRef>
-          <a:fontRef idx="minor">
-            <a:schemeClr val="tx1"/>
-          </a:fontRef>
-        </p:style>
-      </p:cxnSp>
-      <p:sp>
-        <p:nvSpPr>
-          <p:cNvPr id="17" name="TextBox 16">
-            <a:extLst>
-              <a:ext uri="{FF2B5EF4-FFF2-40B4-BE49-F238E27FC236}">
-                <a16:creationId xmlns:a16="http://schemas.microsoft.com/office/drawing/2014/main" id="{DD23CE11-915B-B2E0-552F-137C75A7E9C7}"/>
-              </a:ext>
-            </a:extLst>
-          </p:cNvPr>
-          <p:cNvSpPr txBox="1"/>
-          <p:nvPr/>
-        </p:nvSpPr>
-        <p:spPr>
-          <a:xfrm>
-            <a:off x="2990194" y="6420855"/>
-            <a:ext cx="935914" cy="246221"/>
-          </a:xfrm>
-          <a:prstGeom prst="rect">
-            <a:avLst/>
-          </a:prstGeom>
-          <a:noFill/>
-        </p:spPr>
-        <p:txBody>
-          <a:bodyPr wrap="square" rtlCol="0">
-            <a:spAutoFit/>
-          </a:bodyPr>
-          <a:lstStyle/>
-          <a:p>
-            <a:pPr algn="ctr"/>
-            <a:r>
-              <a:rPr lang="en-US" sz="1000" dirty="0" err="1"/>
-              <a:t>double_stall</a:t>
-            </a:r>
-            <a:endParaRPr lang="en-US" sz="1000" dirty="0"/>
           </a:p>
         </p:txBody>
       </p:sp>

--- a/RISCVstage4.pptx
+++ b/RISCVstage4.pptx
@@ -115,7 +115,7 @@
 <file path=ppt/revisionInfo.xml><?xml version="1.0" encoding="utf-8"?>
 <p1510:revInfo xmlns:a="http://schemas.openxmlformats.org/drawingml/2006/main" xmlns:r="http://schemas.openxmlformats.org/officeDocument/2006/relationships" xmlns:p1510="http://schemas.microsoft.com/office/powerpoint/2015/10/main">
   <p1510:revLst>
-    <p1510:client id="{712416A8-775E-4105-82CF-FFB8B1BFA3D7}" v="3" dt="2026-05-08T17:34:09.711"/>
+    <p1510:client id="{712416A8-775E-4105-82CF-FFB8B1BFA3D7}" v="8" dt="2026-05-08T20:03:13.362"/>
   </p1510:revLst>
 </p1510:revInfo>
 </file>
@@ -125,12 +125,12 @@
   <pc:docChgLst>
     <pc:chgData name="York, George W CIV USAF USAFA DF/DFEC" userId="1fb5875a-4594-4db2-80fb-f0db3de11280" providerId="ADAL" clId="{09330963-85FD-4C99-A81B-94D0EE5CFFEB}"/>
     <pc:docChg chg="undo custSel modSld">
-      <pc:chgData name="York, George W CIV USAF USAFA DF/DFEC" userId="1fb5875a-4594-4db2-80fb-f0db3de11280" providerId="ADAL" clId="{09330963-85FD-4C99-A81B-94D0EE5CFFEB}" dt="2026-05-08T17:39:28.055" v="138" actId="208"/>
+      <pc:chgData name="York, George W CIV USAF USAFA DF/DFEC" userId="1fb5875a-4594-4db2-80fb-f0db3de11280" providerId="ADAL" clId="{09330963-85FD-4C99-A81B-94D0EE5CFFEB}" dt="2026-05-08T20:04:08.974" v="163" actId="14100"/>
       <pc:docMkLst>
         <pc:docMk/>
       </pc:docMkLst>
       <pc:sldChg chg="addSp delSp modSp mod">
-        <pc:chgData name="York, George W CIV USAF USAFA DF/DFEC" userId="1fb5875a-4594-4db2-80fb-f0db3de11280" providerId="ADAL" clId="{09330963-85FD-4C99-A81B-94D0EE5CFFEB}" dt="2026-05-08T17:39:28.055" v="138" actId="208"/>
+        <pc:chgData name="York, George W CIV USAF USAFA DF/DFEC" userId="1fb5875a-4594-4db2-80fb-f0db3de11280" providerId="ADAL" clId="{09330963-85FD-4C99-A81B-94D0EE5CFFEB}" dt="2026-05-08T20:04:08.974" v="163" actId="14100"/>
         <pc:sldMkLst>
           <pc:docMk/>
           <pc:sldMk cId="1501170907" sldId="256"/>
@@ -504,7 +504,7 @@
           </ac:cxnSpMkLst>
         </pc:cxnChg>
         <pc:cxnChg chg="mod">
-          <ac:chgData name="York, George W CIV USAF USAFA DF/DFEC" userId="1fb5875a-4594-4db2-80fb-f0db3de11280" providerId="ADAL" clId="{09330963-85FD-4C99-A81B-94D0EE5CFFEB}" dt="2026-04-10T18:20:48.258" v="50" actId="14100"/>
+          <ac:chgData name="York, George W CIV USAF USAFA DF/DFEC" userId="1fb5875a-4594-4db2-80fb-f0db3de11280" providerId="ADAL" clId="{09330963-85FD-4C99-A81B-94D0EE5CFFEB}" dt="2026-05-08T20:00:25.610" v="145" actId="14100"/>
           <ac:cxnSpMkLst>
             <pc:docMk/>
             <pc:sldMk cId="1501170907" sldId="256"/>
@@ -517,6 +517,22 @@
             <pc:docMk/>
             <pc:sldMk cId="1501170907" sldId="256"/>
             <ac:cxnSpMk id="59" creationId="{F5DC23A1-E3C9-66CD-B3A5-E308601A02A9}"/>
+          </ac:cxnSpMkLst>
+        </pc:cxnChg>
+        <pc:cxnChg chg="add mod">
+          <ac:chgData name="York, George W CIV USAF USAFA DF/DFEC" userId="1fb5875a-4594-4db2-80fb-f0db3de11280" providerId="ADAL" clId="{09330963-85FD-4C99-A81B-94D0EE5CFFEB}" dt="2026-05-08T20:00:33.838" v="147" actId="1076"/>
+          <ac:cxnSpMkLst>
+            <pc:docMk/>
+            <pc:sldMk cId="1501170907" sldId="256"/>
+            <ac:cxnSpMk id="61" creationId="{A9B710D8-FF0B-7DFA-9850-657A2D4BD13E}"/>
+          </ac:cxnSpMkLst>
+        </pc:cxnChg>
+        <pc:cxnChg chg="add mod">
+          <ac:chgData name="York, George W CIV USAF USAFA DF/DFEC" userId="1fb5875a-4594-4db2-80fb-f0db3de11280" providerId="ADAL" clId="{09330963-85FD-4C99-A81B-94D0EE5CFFEB}" dt="2026-05-08T20:00:50.744" v="150" actId="14100"/>
+          <ac:cxnSpMkLst>
+            <pc:docMk/>
+            <pc:sldMk cId="1501170907" sldId="256"/>
+            <ac:cxnSpMk id="62" creationId="{0E39A71A-1D4A-92AA-4D7B-F3F79DDDDC6F}"/>
           </ac:cxnSpMkLst>
         </pc:cxnChg>
         <pc:cxnChg chg="del">
@@ -536,7 +552,7 @@
           </ac:cxnSpMkLst>
         </pc:cxnChg>
         <pc:cxnChg chg="mod">
-          <ac:chgData name="York, George W CIV USAF USAFA DF/DFEC" userId="1fb5875a-4594-4db2-80fb-f0db3de11280" providerId="ADAL" clId="{09330963-85FD-4C99-A81B-94D0EE5CFFEB}" dt="2026-04-10T18:21:27.466" v="55" actId="14100"/>
+          <ac:chgData name="York, George W CIV USAF USAFA DF/DFEC" userId="1fb5875a-4594-4db2-80fb-f0db3de11280" providerId="ADAL" clId="{09330963-85FD-4C99-A81B-94D0EE5CFFEB}" dt="2026-05-08T20:00:08.342" v="144" actId="1076"/>
           <ac:cxnSpMkLst>
             <pc:docMk/>
             <pc:sldMk cId="1501170907" sldId="256"/>
@@ -591,6 +607,30 @@
             <ac:cxnSpMk id="92" creationId="{780D872F-1646-C8B4-3D28-A065AE10E52A}"/>
           </ac:cxnSpMkLst>
         </pc:cxnChg>
+        <pc:cxnChg chg="add mod">
+          <ac:chgData name="York, George W CIV USAF USAFA DF/DFEC" userId="1fb5875a-4594-4db2-80fb-f0db3de11280" providerId="ADAL" clId="{09330963-85FD-4C99-A81B-94D0EE5CFFEB}" dt="2026-05-08T20:02:00.350" v="152"/>
+          <ac:cxnSpMkLst>
+            <pc:docMk/>
+            <pc:sldMk cId="1501170907" sldId="256"/>
+            <ac:cxnSpMk id="120" creationId="{48B8A1BE-B80B-E5F0-935A-CF4034959F43}"/>
+          </ac:cxnSpMkLst>
+        </pc:cxnChg>
+        <pc:cxnChg chg="mod">
+          <ac:chgData name="York, George W CIV USAF USAFA DF/DFEC" userId="1fb5875a-4594-4db2-80fb-f0db3de11280" providerId="ADAL" clId="{09330963-85FD-4C99-A81B-94D0EE5CFFEB}" dt="2026-05-08T20:04:08.974" v="163" actId="14100"/>
+          <ac:cxnSpMkLst>
+            <pc:docMk/>
+            <pc:sldMk cId="1501170907" sldId="256"/>
+            <ac:cxnSpMk id="131" creationId="{B4CB413E-FC95-91DD-71A9-E415E9DA0C6F}"/>
+          </ac:cxnSpMkLst>
+        </pc:cxnChg>
+        <pc:cxnChg chg="add mod">
+          <ac:chgData name="York, George W CIV USAF USAFA DF/DFEC" userId="1fb5875a-4594-4db2-80fb-f0db3de11280" providerId="ADAL" clId="{09330963-85FD-4C99-A81B-94D0EE5CFFEB}" dt="2026-05-08T20:03:34.237" v="159" actId="14100"/>
+          <ac:cxnSpMkLst>
+            <pc:docMk/>
+            <pc:sldMk cId="1501170907" sldId="256"/>
+            <ac:cxnSpMk id="132" creationId="{C7306C74-0136-403C-8535-66A5F08DF440}"/>
+          </ac:cxnSpMkLst>
+        </pc:cxnChg>
         <pc:cxnChg chg="del">
           <ac:chgData name="York, George W CIV USAF USAFA DF/DFEC" userId="1fb5875a-4594-4db2-80fb-f0db3de11280" providerId="ADAL" clId="{09330963-85FD-4C99-A81B-94D0EE5CFFEB}" dt="2026-05-08T17:35:08.156" v="109" actId="478"/>
           <ac:cxnSpMkLst>
@@ -629,6 +669,14 @@
             <pc:docMk/>
             <pc:sldMk cId="1501170907" sldId="256"/>
             <ac:cxnSpMk id="185" creationId="{45DDE841-DDA8-50C0-DF84-DFEAD66D212E}"/>
+          </ac:cxnSpMkLst>
+        </pc:cxnChg>
+        <pc:cxnChg chg="mod">
+          <ac:chgData name="York, George W CIV USAF USAFA DF/DFEC" userId="1fb5875a-4594-4db2-80fb-f0db3de11280" providerId="ADAL" clId="{09330963-85FD-4C99-A81B-94D0EE5CFFEB}" dt="2026-05-08T20:03:58.453" v="162" actId="14100"/>
+          <ac:cxnSpMkLst>
+            <pc:docMk/>
+            <pc:sldMk cId="1501170907" sldId="256"/>
+            <ac:cxnSpMk id="186" creationId="{1BF847ED-3744-0969-7E11-0755B86A5CDF}"/>
           </ac:cxnSpMkLst>
         </pc:cxnChg>
         <pc:cxnChg chg="del">
@@ -680,6 +728,14 @@
           </ac:cxnSpMkLst>
         </pc:cxnChg>
         <pc:cxnChg chg="mod">
+          <ac:chgData name="York, George W CIV USAF USAFA DF/DFEC" userId="1fb5875a-4594-4db2-80fb-f0db3de11280" providerId="ADAL" clId="{09330963-85FD-4C99-A81B-94D0EE5CFFEB}" dt="2026-05-08T20:03:45.373" v="160" actId="14100"/>
+          <ac:cxnSpMkLst>
+            <pc:docMk/>
+            <pc:sldMk cId="1501170907" sldId="256"/>
+            <ac:cxnSpMk id="240" creationId="{32C8C4D0-BC6B-C139-3FF5-F9792E04E4A1}"/>
+          </ac:cxnSpMkLst>
+        </pc:cxnChg>
+        <pc:cxnChg chg="mod">
           <ac:chgData name="York, George W CIV USAF USAFA DF/DFEC" userId="1fb5875a-4594-4db2-80fb-f0db3de11280" providerId="ADAL" clId="{09330963-85FD-4C99-A81B-94D0EE5CFFEB}" dt="2026-05-08T17:37:15.120" v="123" actId="1076"/>
           <ac:cxnSpMkLst>
             <pc:docMk/>
@@ -693,6 +749,14 @@
             <pc:docMk/>
             <pc:sldMk cId="1501170907" sldId="256"/>
             <ac:cxnSpMk id="288" creationId="{FBC20363-C806-EF5C-EF5B-FA8F14D0B2F9}"/>
+          </ac:cxnSpMkLst>
+        </pc:cxnChg>
+        <pc:cxnChg chg="mod">
+          <ac:chgData name="York, George W CIV USAF USAFA DF/DFEC" userId="1fb5875a-4594-4db2-80fb-f0db3de11280" providerId="ADAL" clId="{09330963-85FD-4C99-A81B-94D0EE5CFFEB}" dt="2026-05-08T20:03:50.588" v="161" actId="14100"/>
+          <ac:cxnSpMkLst>
+            <pc:docMk/>
+            <pc:sldMk cId="1501170907" sldId="256"/>
+            <ac:cxnSpMk id="303" creationId="{CFAE5DC6-8CF9-2673-71C9-AFA4E7997F1B}"/>
           </ac:cxnSpMkLst>
         </pc:cxnChg>
       </pc:sldChg>
@@ -7866,8 +7930,8 @@
         </p:nvCxnSpPr>
         <p:spPr>
           <a:xfrm>
-            <a:off x="6794616" y="3040681"/>
-            <a:ext cx="1474945" cy="0"/>
+            <a:off x="7851393" y="3040681"/>
+            <a:ext cx="418168" cy="0"/>
           </a:xfrm>
           <a:prstGeom prst="straightConnector1">
             <a:avLst/>
@@ -8246,8 +8310,8 @@
         </p:nvCxnSpPr>
         <p:spPr>
           <a:xfrm flipV="1">
-            <a:off x="6794616" y="2616997"/>
-            <a:ext cx="0" cy="1223958"/>
+            <a:off x="7854489" y="2618727"/>
+            <a:ext cx="0" cy="1222228"/>
           </a:xfrm>
           <a:prstGeom prst="line">
             <a:avLst/>
@@ -9432,8 +9496,8 @@
         </p:nvCxnSpPr>
         <p:spPr>
           <a:xfrm>
-            <a:off x="5567516" y="5027975"/>
-            <a:ext cx="669392" cy="0"/>
+            <a:off x="5765920" y="5027975"/>
+            <a:ext cx="470988" cy="0"/>
           </a:xfrm>
           <a:prstGeom prst="straightConnector1">
             <a:avLst/>
@@ -9514,8 +9578,8 @@
         </p:nvCxnSpPr>
         <p:spPr>
           <a:xfrm>
-            <a:off x="2752997" y="5350205"/>
-            <a:ext cx="3481215" cy="0"/>
+            <a:off x="5538404" y="5298202"/>
+            <a:ext cx="683932" cy="0"/>
           </a:xfrm>
           <a:prstGeom prst="straightConnector1">
             <a:avLst/>
@@ -9804,8 +9868,8 @@
         </p:nvCxnSpPr>
         <p:spPr>
           <a:xfrm>
-            <a:off x="5621061" y="3189385"/>
-            <a:ext cx="207247" cy="0"/>
+            <a:off x="5641992" y="3189385"/>
+            <a:ext cx="186316" cy="0"/>
           </a:xfrm>
           <a:prstGeom prst="straightConnector1">
             <a:avLst/>
@@ -10117,13 +10181,15 @@
               </a:ext>
             </a:extLst>
           </p:cNvPr>
-          <p:cNvCxnSpPr/>
+          <p:cNvCxnSpPr>
+            <a:cxnSpLocks/>
+          </p:cNvCxnSpPr>
           <p:nvPr/>
         </p:nvCxnSpPr>
         <p:spPr>
           <a:xfrm flipH="1">
             <a:off x="5736066" y="2617769"/>
-            <a:ext cx="1057901" cy="0"/>
+            <a:ext cx="2120114" cy="0"/>
           </a:xfrm>
           <a:prstGeom prst="line">
             <a:avLst/>
@@ -13231,6 +13297,120 @@
           </a:p>
         </p:txBody>
       </p:sp>
+      <p:cxnSp>
+        <p:nvCxnSpPr>
+          <p:cNvPr id="61" name="Straight Connector 60">
+            <a:extLst>
+              <a:ext uri="{FF2B5EF4-FFF2-40B4-BE49-F238E27FC236}">
+                <a16:creationId xmlns:a16="http://schemas.microsoft.com/office/drawing/2014/main" id="{A9B710D8-FF0B-7DFA-9850-657A2D4BD13E}"/>
+              </a:ext>
+            </a:extLst>
+          </p:cNvPr>
+          <p:cNvCxnSpPr>
+            <a:cxnSpLocks/>
+          </p:cNvCxnSpPr>
+          <p:nvPr/>
+        </p:nvCxnSpPr>
+        <p:spPr>
+          <a:xfrm>
+            <a:off x="5773621" y="4593163"/>
+            <a:ext cx="0" cy="437124"/>
+          </a:xfrm>
+          <a:prstGeom prst="line">
+            <a:avLst/>
+          </a:prstGeom>
+        </p:spPr>
+        <p:style>
+          <a:lnRef idx="2">
+            <a:schemeClr val="accent1"/>
+          </a:lnRef>
+          <a:fillRef idx="0">
+            <a:schemeClr val="accent1"/>
+          </a:fillRef>
+          <a:effectRef idx="1">
+            <a:schemeClr val="accent1"/>
+          </a:effectRef>
+          <a:fontRef idx="minor">
+            <a:schemeClr val="tx1"/>
+          </a:fontRef>
+        </p:style>
+      </p:cxnSp>
+      <p:cxnSp>
+        <p:nvCxnSpPr>
+          <p:cNvPr id="62" name="Straight Connector 61">
+            <a:extLst>
+              <a:ext uri="{FF2B5EF4-FFF2-40B4-BE49-F238E27FC236}">
+                <a16:creationId xmlns:a16="http://schemas.microsoft.com/office/drawing/2014/main" id="{0E39A71A-1D4A-92AA-4D7B-F3F79DDDDC6F}"/>
+              </a:ext>
+            </a:extLst>
+          </p:cNvPr>
+          <p:cNvCxnSpPr>
+            <a:cxnSpLocks/>
+          </p:cNvCxnSpPr>
+          <p:nvPr/>
+        </p:nvCxnSpPr>
+        <p:spPr>
+          <a:xfrm>
+            <a:off x="5773237" y="4606277"/>
+            <a:ext cx="1700141" cy="0"/>
+          </a:xfrm>
+          <a:prstGeom prst="line">
+            <a:avLst/>
+          </a:prstGeom>
+        </p:spPr>
+        <p:style>
+          <a:lnRef idx="2">
+            <a:schemeClr val="accent1"/>
+          </a:lnRef>
+          <a:fillRef idx="0">
+            <a:schemeClr val="accent1"/>
+          </a:fillRef>
+          <a:effectRef idx="1">
+            <a:schemeClr val="accent1"/>
+          </a:effectRef>
+          <a:fontRef idx="minor">
+            <a:schemeClr val="tx1"/>
+          </a:fontRef>
+        </p:style>
+      </p:cxnSp>
+      <p:cxnSp>
+        <p:nvCxnSpPr>
+          <p:cNvPr id="132" name="Straight Connector 131">
+            <a:extLst>
+              <a:ext uri="{FF2B5EF4-FFF2-40B4-BE49-F238E27FC236}">
+                <a16:creationId xmlns:a16="http://schemas.microsoft.com/office/drawing/2014/main" id="{C7306C74-0136-403C-8535-66A5F08DF440}"/>
+              </a:ext>
+            </a:extLst>
+          </p:cNvPr>
+          <p:cNvCxnSpPr>
+            <a:cxnSpLocks/>
+          </p:cNvCxnSpPr>
+          <p:nvPr/>
+        </p:nvCxnSpPr>
+        <p:spPr>
+          <a:xfrm flipV="1">
+            <a:off x="6784918" y="3767711"/>
+            <a:ext cx="0" cy="73244"/>
+          </a:xfrm>
+          <a:prstGeom prst="line">
+            <a:avLst/>
+          </a:prstGeom>
+        </p:spPr>
+        <p:style>
+          <a:lnRef idx="2">
+            <a:schemeClr val="accent1"/>
+          </a:lnRef>
+          <a:fillRef idx="0">
+            <a:schemeClr val="accent1"/>
+          </a:fillRef>
+          <a:effectRef idx="1">
+            <a:schemeClr val="accent1"/>
+          </a:effectRef>
+          <a:fontRef idx="minor">
+            <a:schemeClr val="tx1"/>
+          </a:fontRef>
+        </p:style>
+      </p:cxnSp>
     </p:spTree>
     <p:extLst>
       <p:ext uri="{BB962C8B-B14F-4D97-AF65-F5344CB8AC3E}">

--- a/RISCVstage4.pptx
+++ b/RISCVstage4.pptx
@@ -115,7 +115,7 @@
 <file path=ppt/revisionInfo.xml><?xml version="1.0" encoding="utf-8"?>
 <p1510:revInfo xmlns:a="http://schemas.openxmlformats.org/drawingml/2006/main" xmlns:r="http://schemas.openxmlformats.org/officeDocument/2006/relationships" xmlns:p1510="http://schemas.microsoft.com/office/powerpoint/2015/10/main">
   <p1510:revLst>
-    <p1510:client id="{712416A8-775E-4105-82CF-FFB8B1BFA3D7}" v="8" dt="2026-05-08T20:03:13.362"/>
+    <p1510:client id="{5CB8C5CB-D7E0-4725-8147-4C8E1FC0E192}" v="26" dt="2026-05-15T18:23:51.707"/>
   </p1510:revLst>
 </p1510:revInfo>
 </file>
@@ -125,18 +125,18 @@
   <pc:docChgLst>
     <pc:chgData name="York, George W CIV USAF USAFA DF/DFEC" userId="1fb5875a-4594-4db2-80fb-f0db3de11280" providerId="ADAL" clId="{09330963-85FD-4C99-A81B-94D0EE5CFFEB}"/>
     <pc:docChg chg="undo custSel modSld">
-      <pc:chgData name="York, George W CIV USAF USAFA DF/DFEC" userId="1fb5875a-4594-4db2-80fb-f0db3de11280" providerId="ADAL" clId="{09330963-85FD-4C99-A81B-94D0EE5CFFEB}" dt="2026-05-08T20:04:08.974" v="163" actId="14100"/>
+      <pc:chgData name="York, George W CIV USAF USAFA DF/DFEC" userId="1fb5875a-4594-4db2-80fb-f0db3de11280" providerId="ADAL" clId="{09330963-85FD-4C99-A81B-94D0EE5CFFEB}" dt="2026-05-15T18:24:09.257" v="224" actId="20577"/>
       <pc:docMkLst>
         <pc:docMk/>
       </pc:docMkLst>
       <pc:sldChg chg="addSp delSp modSp mod">
-        <pc:chgData name="York, George W CIV USAF USAFA DF/DFEC" userId="1fb5875a-4594-4db2-80fb-f0db3de11280" providerId="ADAL" clId="{09330963-85FD-4C99-A81B-94D0EE5CFFEB}" dt="2026-05-08T20:04:08.974" v="163" actId="14100"/>
+        <pc:chgData name="York, George W CIV USAF USAFA DF/DFEC" userId="1fb5875a-4594-4db2-80fb-f0db3de11280" providerId="ADAL" clId="{09330963-85FD-4C99-A81B-94D0EE5CFFEB}" dt="2026-05-15T18:24:09.257" v="224" actId="20577"/>
         <pc:sldMkLst>
           <pc:docMk/>
           <pc:sldMk cId="1501170907" sldId="256"/>
         </pc:sldMkLst>
         <pc:spChg chg="mod">
-          <ac:chgData name="York, George W CIV USAF USAFA DF/DFEC" userId="1fb5875a-4594-4db2-80fb-f0db3de11280" providerId="ADAL" clId="{09330963-85FD-4C99-A81B-94D0EE5CFFEB}" dt="2026-04-10T18:20:54.770" v="51" actId="14100"/>
+          <ac:chgData name="York, George W CIV USAF USAFA DF/DFEC" userId="1fb5875a-4594-4db2-80fb-f0db3de11280" providerId="ADAL" clId="{09330963-85FD-4C99-A81B-94D0EE5CFFEB}" dt="2026-05-15T17:16:38.513" v="56" actId="14100"/>
           <ac:spMkLst>
             <pc:docMk/>
             <pc:sldMk cId="1501170907" sldId="256"/>
@@ -144,55 +144,103 @@
           </ac:spMkLst>
         </pc:spChg>
         <pc:spChg chg="mod">
-          <ac:chgData name="York, George W CIV USAF USAFA DF/DFEC" userId="1fb5875a-4594-4db2-80fb-f0db3de11280" providerId="ADAL" clId="{09330963-85FD-4C99-A81B-94D0EE5CFFEB}" dt="2026-05-08T17:38:01.631" v="131" actId="1076"/>
+          <ac:chgData name="York, George W CIV USAF USAFA DF/DFEC" userId="1fb5875a-4594-4db2-80fb-f0db3de11280" providerId="ADAL" clId="{09330963-85FD-4C99-A81B-94D0EE5CFFEB}" dt="2026-05-15T18:03:38.858" v="169" actId="14100"/>
           <ac:spMkLst>
             <pc:docMk/>
             <pc:sldMk cId="1501170907" sldId="256"/>
-            <ac:spMk id="5" creationId="{DB224797-49E0-B67E-FC03-3154A41834EF}"/>
+            <ac:spMk id="3" creationId="{13EB474B-DE86-EFAF-1F7B-17DC4F663F21}"/>
           </ac:spMkLst>
         </pc:spChg>
-        <pc:spChg chg="add mod">
-          <ac:chgData name="York, George W CIV USAF USAFA DF/DFEC" userId="1fb5875a-4594-4db2-80fb-f0db3de11280" providerId="ADAL" clId="{09330963-85FD-4C99-A81B-94D0EE5CFFEB}" dt="2026-04-18T20:27:56.696" v="94" actId="14100"/>
+        <pc:spChg chg="mod">
+          <ac:chgData name="York, George W CIV USAF USAFA DF/DFEC" userId="1fb5875a-4594-4db2-80fb-f0db3de11280" providerId="ADAL" clId="{09330963-85FD-4C99-A81B-94D0EE5CFFEB}" dt="2026-05-15T17:41:01.787" v="87" actId="1076"/>
           <ac:spMkLst>
             <pc:docMk/>
             <pc:sldMk cId="1501170907" sldId="256"/>
-            <ac:spMk id="17" creationId="{DD23CE11-915B-B2E0-552F-137C75A7E9C7}"/>
+            <ac:spMk id="6" creationId="{FF02132D-A974-B4EB-7900-F8BED8A09AB0}"/>
           </ac:spMkLst>
         </pc:spChg>
-        <pc:spChg chg="add mod">
-          <ac:chgData name="York, George W CIV USAF USAFA DF/DFEC" userId="1fb5875a-4594-4db2-80fb-f0db3de11280" providerId="ADAL" clId="{09330963-85FD-4C99-A81B-94D0EE5CFFEB}" dt="2026-05-08T17:32:39.522" v="100" actId="1076"/>
+        <pc:spChg chg="mod">
+          <ac:chgData name="York, George W CIV USAF USAFA DF/DFEC" userId="1fb5875a-4594-4db2-80fb-f0db3de11280" providerId="ADAL" clId="{09330963-85FD-4C99-A81B-94D0EE5CFFEB}" dt="2026-05-15T17:41:01.787" v="87" actId="1076"/>
           <ac:spMkLst>
             <pc:docMk/>
             <pc:sldMk cId="1501170907" sldId="256"/>
-            <ac:spMk id="32" creationId="{2143C07A-7BD3-285F-779B-EA5E4E2370C1}"/>
+            <ac:spMk id="7" creationId="{E9E2FF47-5A2B-0305-FCBA-6E39C9831663}"/>
           </ac:spMkLst>
         </pc:spChg>
-        <pc:spChg chg="add mod">
-          <ac:chgData name="York, George W CIV USAF USAFA DF/DFEC" userId="1fb5875a-4594-4db2-80fb-f0db3de11280" providerId="ADAL" clId="{09330963-85FD-4C99-A81B-94D0EE5CFFEB}" dt="2026-05-08T17:32:39.522" v="100" actId="1076"/>
+        <pc:spChg chg="mod">
+          <ac:chgData name="York, George W CIV USAF USAFA DF/DFEC" userId="1fb5875a-4594-4db2-80fb-f0db3de11280" providerId="ADAL" clId="{09330963-85FD-4C99-A81B-94D0EE5CFFEB}" dt="2026-05-15T17:41:01.787" v="87" actId="1076"/>
           <ac:spMkLst>
             <pc:docMk/>
             <pc:sldMk cId="1501170907" sldId="256"/>
-            <ac:spMk id="34" creationId="{B6011141-02A1-8CC5-681B-B9793C2C8CE0}"/>
+            <ac:spMk id="8" creationId="{F0A752A1-6D5B-3A06-E499-B8A91491317E}"/>
           </ac:spMkLst>
         </pc:spChg>
-        <pc:spChg chg="add mod">
-          <ac:chgData name="York, George W CIV USAF USAFA DF/DFEC" userId="1fb5875a-4594-4db2-80fb-f0db3de11280" providerId="ADAL" clId="{09330963-85FD-4C99-A81B-94D0EE5CFFEB}" dt="2026-05-08T17:32:39.522" v="100" actId="1076"/>
+        <pc:spChg chg="mod">
+          <ac:chgData name="York, George W CIV USAF USAFA DF/DFEC" userId="1fb5875a-4594-4db2-80fb-f0db3de11280" providerId="ADAL" clId="{09330963-85FD-4C99-A81B-94D0EE5CFFEB}" dt="2026-05-15T17:41:01.787" v="87" actId="1076"/>
           <ac:spMkLst>
             <pc:docMk/>
             <pc:sldMk cId="1501170907" sldId="256"/>
-            <ac:spMk id="35" creationId="{B00F8394-6420-6E0A-2BDA-EFD3CDF8A0E0}"/>
+            <ac:spMk id="9" creationId="{A280E26C-B122-EBF8-1BAE-F14C52F6765D}"/>
           </ac:spMkLst>
         </pc:spChg>
         <pc:spChg chg="mod">
-          <ac:chgData name="York, George W CIV USAF USAFA DF/DFEC" userId="1fb5875a-4594-4db2-80fb-f0db3de11280" providerId="ADAL" clId="{09330963-85FD-4C99-A81B-94D0EE5CFFEB}" dt="2026-04-10T18:19:53.616" v="45" actId="1076"/>
+          <ac:chgData name="York, George W CIV USAF USAFA DF/DFEC" userId="1fb5875a-4594-4db2-80fb-f0db3de11280" providerId="ADAL" clId="{09330963-85FD-4C99-A81B-94D0EE5CFFEB}" dt="2026-05-15T18:03:48.996" v="171" actId="14100"/>
+          <ac:spMkLst>
+            <pc:docMk/>
+            <pc:sldMk cId="1501170907" sldId="256"/>
+            <ac:spMk id="10" creationId="{B7ADE79B-19DD-529A-5879-5E22D4125189}"/>
+          </ac:spMkLst>
+        </pc:spChg>
+        <pc:spChg chg="del">
+          <ac:chgData name="York, George W CIV USAF USAFA DF/DFEC" userId="1fb5875a-4594-4db2-80fb-f0db3de11280" providerId="ADAL" clId="{09330963-85FD-4C99-A81B-94D0EE5CFFEB}" dt="2026-05-15T17:14:18.919" v="45" actId="478"/>
+          <ac:spMkLst>
+            <pc:docMk/>
+            <pc:sldMk cId="1501170907" sldId="256"/>
+            <ac:spMk id="17" creationId="{4480F685-AE09-0D32-5539-8E4975E6DF53}"/>
+          </ac:spMkLst>
+        </pc:spChg>
+        <pc:spChg chg="mod">
+          <ac:chgData name="York, George W CIV USAF USAFA DF/DFEC" userId="1fb5875a-4594-4db2-80fb-f0db3de11280" providerId="ADAL" clId="{09330963-85FD-4C99-A81B-94D0EE5CFFEB}" dt="2026-05-15T17:56:55.804" v="146" actId="1076"/>
+          <ac:spMkLst>
+            <pc:docMk/>
+            <pc:sldMk cId="1501170907" sldId="256"/>
+            <ac:spMk id="18" creationId="{71A85F51-CDCF-DFC4-A78B-5B79381B7901}"/>
+          </ac:spMkLst>
+        </pc:spChg>
+        <pc:spChg chg="del">
+          <ac:chgData name="York, George W CIV USAF USAFA DF/DFEC" userId="1fb5875a-4594-4db2-80fb-f0db3de11280" providerId="ADAL" clId="{09330963-85FD-4C99-A81B-94D0EE5CFFEB}" dt="2026-05-15T17:14:21.051" v="46" actId="478"/>
+          <ac:spMkLst>
+            <pc:docMk/>
+            <pc:sldMk cId="1501170907" sldId="256"/>
+            <ac:spMk id="26" creationId="{2AE4C0B7-D9E3-3907-9505-138DB1D14F87}"/>
+          </ac:spMkLst>
+        </pc:spChg>
+        <pc:spChg chg="mod">
+          <ac:chgData name="York, George W CIV USAF USAFA DF/DFEC" userId="1fb5875a-4594-4db2-80fb-f0db3de11280" providerId="ADAL" clId="{09330963-85FD-4C99-A81B-94D0EE5CFFEB}" dt="2026-05-15T17:55:14.310" v="132" actId="1076"/>
+          <ac:spMkLst>
+            <pc:docMk/>
+            <pc:sldMk cId="1501170907" sldId="256"/>
+            <ac:spMk id="32" creationId="{5964E24E-8C81-EFE0-AB26-0F6BAD08C8E1}"/>
+          </ac:spMkLst>
+        </pc:spChg>
+        <pc:spChg chg="mod">
+          <ac:chgData name="York, George W CIV USAF USAFA DF/DFEC" userId="1fb5875a-4594-4db2-80fb-f0db3de11280" providerId="ADAL" clId="{09330963-85FD-4C99-A81B-94D0EE5CFFEB}" dt="2026-05-15T17:55:14.310" v="132" actId="1076"/>
+          <ac:spMkLst>
+            <pc:docMk/>
+            <pc:sldMk cId="1501170907" sldId="256"/>
+            <ac:spMk id="34" creationId="{AAF8D060-B516-028F-A160-DDD58A9B4A1C}"/>
+          </ac:spMkLst>
+        </pc:spChg>
+        <pc:spChg chg="del">
+          <ac:chgData name="York, George W CIV USAF USAFA DF/DFEC" userId="1fb5875a-4594-4db2-80fb-f0db3de11280" providerId="ADAL" clId="{09330963-85FD-4C99-A81B-94D0EE5CFFEB}" dt="2026-05-15T17:16:47.486" v="57" actId="478"/>
           <ac:spMkLst>
             <pc:docMk/>
             <pc:sldMk cId="1501170907" sldId="256"/>
             <ac:spMk id="38" creationId="{9DC00663-BEA1-F516-A24E-D1358A5FA8D3}"/>
           </ac:spMkLst>
         </pc:spChg>
-        <pc:spChg chg="mod">
-          <ac:chgData name="York, George W CIV USAF USAFA DF/DFEC" userId="1fb5875a-4594-4db2-80fb-f0db3de11280" providerId="ADAL" clId="{09330963-85FD-4C99-A81B-94D0EE5CFFEB}" dt="2026-04-10T18:19:53.616" v="45" actId="1076"/>
+        <pc:spChg chg="del">
+          <ac:chgData name="York, George W CIV USAF USAFA DF/DFEC" userId="1fb5875a-4594-4db2-80fb-f0db3de11280" providerId="ADAL" clId="{09330963-85FD-4C99-A81B-94D0EE5CFFEB}" dt="2026-05-15T17:16:47.486" v="57" actId="478"/>
           <ac:spMkLst>
             <pc:docMk/>
             <pc:sldMk cId="1501170907" sldId="256"/>
@@ -200,87 +248,31 @@
           </ac:spMkLst>
         </pc:spChg>
         <pc:spChg chg="add mod">
-          <ac:chgData name="York, George W CIV USAF USAFA DF/DFEC" userId="1fb5875a-4594-4db2-80fb-f0db3de11280" providerId="ADAL" clId="{09330963-85FD-4C99-A81B-94D0EE5CFFEB}" dt="2026-05-08T17:32:39.522" v="100" actId="1076"/>
+          <ac:chgData name="York, George W CIV USAF USAFA DF/DFEC" userId="1fb5875a-4594-4db2-80fb-f0db3de11280" providerId="ADAL" clId="{09330963-85FD-4C99-A81B-94D0EE5CFFEB}" dt="2026-05-15T17:54:06.375" v="130" actId="14100"/>
           <ac:spMkLst>
             <pc:docMk/>
             <pc:sldMk cId="1501170907" sldId="256"/>
-            <ac:spMk id="53" creationId="{54DB48A0-8679-7515-A495-8900C2A20FCD}"/>
+            <ac:spMk id="59" creationId="{3D2EB1C4-2755-0DE5-C940-8A0D147C2810}"/>
           </ac:spMkLst>
         </pc:spChg>
         <pc:spChg chg="add mod">
-          <ac:chgData name="York, George W CIV USAF USAFA DF/DFEC" userId="1fb5875a-4594-4db2-80fb-f0db3de11280" providerId="ADAL" clId="{09330963-85FD-4C99-A81B-94D0EE5CFFEB}" dt="2026-05-08T17:36:14.685" v="114" actId="1076"/>
+          <ac:chgData name="York, George W CIV USAF USAFA DF/DFEC" userId="1fb5875a-4594-4db2-80fb-f0db3de11280" providerId="ADAL" clId="{09330963-85FD-4C99-A81B-94D0EE5CFFEB}" dt="2026-05-15T17:54:15.215" v="131" actId="1076"/>
           <ac:spMkLst>
             <pc:docMk/>
             <pc:sldMk cId="1501170907" sldId="256"/>
-            <ac:spMk id="84" creationId="{8F69FFC4-D90F-87A3-72AA-E53AD00637DE}"/>
-          </ac:spMkLst>
-        </pc:spChg>
-        <pc:spChg chg="add mod">
-          <ac:chgData name="York, George W CIV USAF USAFA DF/DFEC" userId="1fb5875a-4594-4db2-80fb-f0db3de11280" providerId="ADAL" clId="{09330963-85FD-4C99-A81B-94D0EE5CFFEB}" dt="2026-05-08T17:36:14.685" v="114" actId="1076"/>
-          <ac:spMkLst>
-            <pc:docMk/>
-            <pc:sldMk cId="1501170907" sldId="256"/>
-            <ac:spMk id="86" creationId="{D66AEAD3-1629-21A3-A829-EE39F53D4206}"/>
-          </ac:spMkLst>
-        </pc:spChg>
-        <pc:spChg chg="add mod">
-          <ac:chgData name="York, George W CIV USAF USAFA DF/DFEC" userId="1fb5875a-4594-4db2-80fb-f0db3de11280" providerId="ADAL" clId="{09330963-85FD-4C99-A81B-94D0EE5CFFEB}" dt="2026-05-08T17:36:14.685" v="114" actId="1076"/>
-          <ac:spMkLst>
-            <pc:docMk/>
-            <pc:sldMk cId="1501170907" sldId="256"/>
-            <ac:spMk id="106" creationId="{A046F096-97E2-8456-2195-55E7CAB154C6}"/>
+            <ac:spMk id="66" creationId="{0BD10473-3570-2913-7509-96632D327051}"/>
           </ac:spMkLst>
         </pc:spChg>
         <pc:spChg chg="del mod">
-          <ac:chgData name="York, George W CIV USAF USAFA DF/DFEC" userId="1fb5875a-4594-4db2-80fb-f0db3de11280" providerId="ADAL" clId="{09330963-85FD-4C99-A81B-94D0EE5CFFEB}" dt="2026-05-08T17:35:11.611" v="111" actId="478"/>
-          <ac:spMkLst>
-            <pc:docMk/>
-            <pc:sldMk cId="1501170907" sldId="256"/>
-            <ac:spMk id="119" creationId="{71CFDDD6-C726-691B-9CA9-125BE7E5CADA}"/>
-          </ac:spMkLst>
-        </pc:spChg>
-        <pc:spChg chg="del">
-          <ac:chgData name="York, George W CIV USAF USAFA DF/DFEC" userId="1fb5875a-4594-4db2-80fb-f0db3de11280" providerId="ADAL" clId="{09330963-85FD-4C99-A81B-94D0EE5CFFEB}" dt="2026-05-08T17:35:13.222" v="112" actId="478"/>
-          <ac:spMkLst>
-            <pc:docMk/>
-            <pc:sldMk cId="1501170907" sldId="256"/>
-            <ac:spMk id="120" creationId="{B5FAFD36-E7BE-8A22-0C52-FA46F61778F0}"/>
-          </ac:spMkLst>
-        </pc:spChg>
-        <pc:spChg chg="del">
-          <ac:chgData name="York, George W CIV USAF USAFA DF/DFEC" userId="1fb5875a-4594-4db2-80fb-f0db3de11280" providerId="ADAL" clId="{09330963-85FD-4C99-A81B-94D0EE5CFFEB}" dt="2026-05-08T17:35:05.116" v="108" actId="478"/>
-          <ac:spMkLst>
-            <pc:docMk/>
-            <pc:sldMk cId="1501170907" sldId="256"/>
-            <ac:spMk id="132" creationId="{0D9A6022-1D6D-F3DA-CC84-317FF5FD6666}"/>
-          </ac:spMkLst>
-        </pc:spChg>
-        <pc:spChg chg="del">
-          <ac:chgData name="York, George W CIV USAF USAFA DF/DFEC" userId="1fb5875a-4594-4db2-80fb-f0db3de11280" providerId="ADAL" clId="{09330963-85FD-4C99-A81B-94D0EE5CFFEB}" dt="2026-05-08T17:35:05.116" v="108" actId="478"/>
+          <ac:chgData name="York, George W CIV USAF USAFA DF/DFEC" userId="1fb5875a-4594-4db2-80fb-f0db3de11280" providerId="ADAL" clId="{09330963-85FD-4C99-A81B-94D0EE5CFFEB}" dt="2026-05-15T17:57:05.617" v="148" actId="21"/>
           <ac:spMkLst>
             <pc:docMk/>
             <pc:sldMk cId="1501170907" sldId="256"/>
             <ac:spMk id="151" creationId="{CD28274F-92E6-F852-6391-A717240DE2DF}"/>
           </ac:spMkLst>
         </pc:spChg>
-        <pc:spChg chg="del">
-          <ac:chgData name="York, George W CIV USAF USAFA DF/DFEC" userId="1fb5875a-4594-4db2-80fb-f0db3de11280" providerId="ADAL" clId="{09330963-85FD-4C99-A81B-94D0EE5CFFEB}" dt="2026-05-08T17:35:05.116" v="108" actId="478"/>
-          <ac:spMkLst>
-            <pc:docMk/>
-            <pc:sldMk cId="1501170907" sldId="256"/>
-            <ac:spMk id="153" creationId="{6C7963B8-EAB3-1251-7B88-E9681119B880}"/>
-          </ac:spMkLst>
-        </pc:spChg>
-        <pc:spChg chg="del">
-          <ac:chgData name="York, George W CIV USAF USAFA DF/DFEC" userId="1fb5875a-4594-4db2-80fb-f0db3de11280" providerId="ADAL" clId="{09330963-85FD-4C99-A81B-94D0EE5CFFEB}" dt="2026-05-08T17:35:05.116" v="108" actId="478"/>
-          <ac:spMkLst>
-            <pc:docMk/>
-            <pc:sldMk cId="1501170907" sldId="256"/>
-            <ac:spMk id="154" creationId="{6E64875F-2B8E-5F20-AD69-75128545C0DD}"/>
-          </ac:spMkLst>
-        </pc:spChg>
-        <pc:spChg chg="del">
-          <ac:chgData name="York, George W CIV USAF USAFA DF/DFEC" userId="1fb5875a-4594-4db2-80fb-f0db3de11280" providerId="ADAL" clId="{09330963-85FD-4C99-A81B-94D0EE5CFFEB}" dt="2026-05-08T17:35:05.116" v="108" actId="478"/>
+        <pc:spChg chg="mod">
+          <ac:chgData name="York, George W CIV USAF USAFA DF/DFEC" userId="1fb5875a-4594-4db2-80fb-f0db3de11280" providerId="ADAL" clId="{09330963-85FD-4C99-A81B-94D0EE5CFFEB}" dt="2026-05-15T17:39:51.608" v="85" actId="1076"/>
           <ac:spMkLst>
             <pc:docMk/>
             <pc:sldMk cId="1501170907" sldId="256"/>
@@ -288,319 +280,255 @@
           </ac:spMkLst>
         </pc:spChg>
         <pc:spChg chg="add mod">
-          <ac:chgData name="York, George W CIV USAF USAFA DF/DFEC" userId="1fb5875a-4594-4db2-80fb-f0db3de11280" providerId="ADAL" clId="{09330963-85FD-4C99-A81B-94D0EE5CFFEB}" dt="2026-05-08T17:36:14.685" v="114" actId="1076"/>
+          <ac:chgData name="York, George W CIV USAF USAFA DF/DFEC" userId="1fb5875a-4594-4db2-80fb-f0db3de11280" providerId="ADAL" clId="{09330963-85FD-4C99-A81B-94D0EE5CFFEB}" dt="2026-05-15T17:17:29.574" v="59"/>
           <ac:spMkLst>
             <pc:docMk/>
             <pc:sldMk cId="1501170907" sldId="256"/>
-            <ac:spMk id="178" creationId="{09386CA0-1138-305E-7209-5A63253C8BFC}"/>
+            <ac:spMk id="181" creationId="{FBB6A677-BE42-45AD-A7A2-3879C2126822}"/>
           </ac:spMkLst>
         </pc:spChg>
         <pc:spChg chg="add mod">
-          <ac:chgData name="York, George W CIV USAF USAFA DF/DFEC" userId="1fb5875a-4594-4db2-80fb-f0db3de11280" providerId="ADAL" clId="{09330963-85FD-4C99-A81B-94D0EE5CFFEB}" dt="2026-05-08T17:36:14.685" v="114" actId="1076"/>
+          <ac:chgData name="York, George W CIV USAF USAFA DF/DFEC" userId="1fb5875a-4594-4db2-80fb-f0db3de11280" providerId="ADAL" clId="{09330963-85FD-4C99-A81B-94D0EE5CFFEB}" dt="2026-05-15T17:55:14.310" v="132" actId="1076"/>
           <ac:spMkLst>
             <pc:docMk/>
             <pc:sldMk cId="1501170907" sldId="256"/>
-            <ac:spMk id="180" creationId="{FCD657EC-8588-B810-69DD-64CE3E661EA1}"/>
+            <ac:spMk id="183" creationId="{3A847D55-8D2B-A033-F3EB-74FED50FA3DC}"/>
           </ac:spMkLst>
         </pc:spChg>
-        <pc:spChg chg="del">
-          <ac:chgData name="York, George W CIV USAF USAFA DF/DFEC" userId="1fb5875a-4594-4db2-80fb-f0db3de11280" providerId="ADAL" clId="{09330963-85FD-4C99-A81B-94D0EE5CFFEB}" dt="2026-05-08T17:35:05.116" v="108" actId="478"/>
+        <pc:spChg chg="add del mod">
+          <ac:chgData name="York, George W CIV USAF USAFA DF/DFEC" userId="1fb5875a-4594-4db2-80fb-f0db3de11280" providerId="ADAL" clId="{09330963-85FD-4C99-A81B-94D0EE5CFFEB}" dt="2026-05-15T17:56:59.016" v="147" actId="478"/>
           <ac:spMkLst>
             <pc:docMk/>
             <pc:sldMk cId="1501170907" sldId="256"/>
-            <ac:spMk id="184" creationId="{58EBC1B8-4825-3984-18AF-440ADACF2ABF}"/>
+            <ac:spMk id="271" creationId="{47B8F740-B736-FC8F-541E-D20D9F39952C}"/>
           </ac:spMkLst>
         </pc:spChg>
-        <pc:spChg chg="del">
-          <ac:chgData name="York, George W CIV USAF USAFA DF/DFEC" userId="1fb5875a-4594-4db2-80fb-f0db3de11280" providerId="ADAL" clId="{09330963-85FD-4C99-A81B-94D0EE5CFFEB}" dt="2026-05-08T17:35:05.116" v="108" actId="478"/>
+        <pc:spChg chg="add mod">
+          <ac:chgData name="York, George W CIV USAF USAFA DF/DFEC" userId="1fb5875a-4594-4db2-80fb-f0db3de11280" providerId="ADAL" clId="{09330963-85FD-4C99-A81B-94D0EE5CFFEB}" dt="2026-05-15T17:55:39.596" v="136" actId="1076"/>
           <ac:spMkLst>
             <pc:docMk/>
             <pc:sldMk cId="1501170907" sldId="256"/>
-            <ac:spMk id="189" creationId="{0E85AB3B-858D-5BF6-ED0E-B3C0624C86F7}"/>
+            <ac:spMk id="276" creationId="{387AC282-397C-B121-8B8D-9AE3B9B0358A}"/>
           </ac:spMkLst>
         </pc:spChg>
         <pc:spChg chg="add mod">
-          <ac:chgData name="York, George W CIV USAF USAFA DF/DFEC" userId="1fb5875a-4594-4db2-80fb-f0db3de11280" providerId="ADAL" clId="{09330963-85FD-4C99-A81B-94D0EE5CFFEB}" dt="2026-05-08T17:35:39.347" v="113" actId="1076"/>
+          <ac:chgData name="York, George W CIV USAF USAFA DF/DFEC" userId="1fb5875a-4594-4db2-80fb-f0db3de11280" providerId="ADAL" clId="{09330963-85FD-4C99-A81B-94D0EE5CFFEB}" dt="2026-05-15T17:55:47.471" v="142" actId="20577"/>
           <ac:spMkLst>
             <pc:docMk/>
             <pc:sldMk cId="1501170907" sldId="256"/>
-            <ac:spMk id="202" creationId="{C5E4C3D1-E848-B046-B8D8-FF2644B018B9}"/>
+            <ac:spMk id="277" creationId="{677060F7-EAC3-60D7-2A3C-1EFCAF50AD4D}"/>
           </ac:spMkLst>
         </pc:spChg>
         <pc:spChg chg="add mod">
-          <ac:chgData name="York, George W CIV USAF USAFA DF/DFEC" userId="1fb5875a-4594-4db2-80fb-f0db3de11280" providerId="ADAL" clId="{09330963-85FD-4C99-A81B-94D0EE5CFFEB}" dt="2026-05-08T17:35:39.347" v="113" actId="1076"/>
+          <ac:chgData name="York, George W CIV USAF USAFA DF/DFEC" userId="1fb5875a-4594-4db2-80fb-f0db3de11280" providerId="ADAL" clId="{09330963-85FD-4C99-A81B-94D0EE5CFFEB}" dt="2026-05-15T17:57:57.132" v="159" actId="1076"/>
           <ac:spMkLst>
             <pc:docMk/>
             <pc:sldMk cId="1501170907" sldId="256"/>
-            <ac:spMk id="204" creationId="{64F90C90-E069-CC61-165E-6A1EEB7E1194}"/>
+            <ac:spMk id="287" creationId="{CD28274F-92E6-F852-6391-A717240DE2DF}"/>
           </ac:spMkLst>
         </pc:spChg>
         <pc:spChg chg="add mod">
-          <ac:chgData name="York, George W CIV USAF USAFA DF/DFEC" userId="1fb5875a-4594-4db2-80fb-f0db3de11280" providerId="ADAL" clId="{09330963-85FD-4C99-A81B-94D0EE5CFFEB}" dt="2026-05-08T17:35:39.347" v="113" actId="1076"/>
+          <ac:chgData name="York, George W CIV USAF USAFA DF/DFEC" userId="1fb5875a-4594-4db2-80fb-f0db3de11280" providerId="ADAL" clId="{09330963-85FD-4C99-A81B-94D0EE5CFFEB}" dt="2026-05-15T18:24:09.257" v="224" actId="20577"/>
           <ac:spMkLst>
             <pc:docMk/>
             <pc:sldMk cId="1501170907" sldId="256"/>
-            <ac:spMk id="205" creationId="{64D9F53B-87E9-E6A7-973D-AEF42ADBB14F}"/>
+            <ac:spMk id="335" creationId="{7445925B-CC01-40BD-8B87-8F2069BEAA85}"/>
           </ac:spMkLst>
         </pc:spChg>
-        <pc:spChg chg="add mod">
-          <ac:chgData name="York, George W CIV USAF USAFA DF/DFEC" userId="1fb5875a-4594-4db2-80fb-f0db3de11280" providerId="ADAL" clId="{09330963-85FD-4C99-A81B-94D0EE5CFFEB}" dt="2026-05-08T17:38:09.815" v="132" actId="1076"/>
-          <ac:spMkLst>
-            <pc:docMk/>
-            <pc:sldMk cId="1501170907" sldId="256"/>
-            <ac:spMk id="207" creationId="{324ACC2E-58E8-851E-7F2C-5A0A160ADD22}"/>
-          </ac:spMkLst>
-        </pc:spChg>
-        <pc:spChg chg="add mod">
-          <ac:chgData name="York, George W CIV USAF USAFA DF/DFEC" userId="1fb5875a-4594-4db2-80fb-f0db3de11280" providerId="ADAL" clId="{09330963-85FD-4C99-A81B-94D0EE5CFFEB}" dt="2026-04-10T18:23:52.069" v="71" actId="1076"/>
-          <ac:spMkLst>
-            <pc:docMk/>
-            <pc:sldMk cId="1501170907" sldId="256"/>
-            <ac:spMk id="209" creationId="{7E4C1978-E959-3B8A-9B69-5A0570C1B433}"/>
-          </ac:spMkLst>
-        </pc:spChg>
-        <pc:spChg chg="add mod">
-          <ac:chgData name="York, George W CIV USAF USAFA DF/DFEC" userId="1fb5875a-4594-4db2-80fb-f0db3de11280" providerId="ADAL" clId="{09330963-85FD-4C99-A81B-94D0EE5CFFEB}" dt="2026-04-10T18:23:52.069" v="71" actId="1076"/>
-          <ac:spMkLst>
-            <pc:docMk/>
-            <pc:sldMk cId="1501170907" sldId="256"/>
-            <ac:spMk id="210" creationId="{B99D9E74-E1B6-5F46-688D-FBFA65E6AF93}"/>
-          </ac:spMkLst>
-        </pc:spChg>
-        <pc:spChg chg="add mod">
-          <ac:chgData name="York, George W CIV USAF USAFA DF/DFEC" userId="1fb5875a-4594-4db2-80fb-f0db3de11280" providerId="ADAL" clId="{09330963-85FD-4C99-A81B-94D0EE5CFFEB}" dt="2026-04-10T18:23:52.069" v="71" actId="1076"/>
-          <ac:spMkLst>
-            <pc:docMk/>
-            <pc:sldMk cId="1501170907" sldId="256"/>
-            <ac:spMk id="212" creationId="{42328FB6-6571-FA3C-8E81-028268A77042}"/>
-          </ac:spMkLst>
-        </pc:spChg>
-        <pc:spChg chg="add mod">
-          <ac:chgData name="York, George W CIV USAF USAFA DF/DFEC" userId="1fb5875a-4594-4db2-80fb-f0db3de11280" providerId="ADAL" clId="{09330963-85FD-4C99-A81B-94D0EE5CFFEB}" dt="2026-04-10T18:23:52.069" v="71" actId="1076"/>
-          <ac:spMkLst>
-            <pc:docMk/>
-            <pc:sldMk cId="1501170907" sldId="256"/>
-            <ac:spMk id="213" creationId="{3468D653-D2DB-10F8-EB42-1EF2F69D462B}"/>
-          </ac:spMkLst>
-        </pc:spChg>
-        <pc:spChg chg="add mod">
-          <ac:chgData name="York, George W CIV USAF USAFA DF/DFEC" userId="1fb5875a-4594-4db2-80fb-f0db3de11280" providerId="ADAL" clId="{09330963-85FD-4C99-A81B-94D0EE5CFFEB}" dt="2026-04-10T18:23:52.069" v="71" actId="1076"/>
-          <ac:spMkLst>
-            <pc:docMk/>
-            <pc:sldMk cId="1501170907" sldId="256"/>
-            <ac:spMk id="232" creationId="{84B6D813-B5DE-D1FC-AF80-525F92C8F7F8}"/>
-          </ac:spMkLst>
-        </pc:spChg>
-        <pc:spChg chg="add mod">
-          <ac:chgData name="York, George W CIV USAF USAFA DF/DFEC" userId="1fb5875a-4594-4db2-80fb-f0db3de11280" providerId="ADAL" clId="{09330963-85FD-4C99-A81B-94D0EE5CFFEB}" dt="2026-04-10T18:23:52.069" v="71" actId="1076"/>
-          <ac:spMkLst>
-            <pc:docMk/>
-            <pc:sldMk cId="1501170907" sldId="256"/>
-            <ac:spMk id="233" creationId="{E46D487D-09B4-2769-C34D-554786351A6B}"/>
-          </ac:spMkLst>
-        </pc:spChg>
-        <pc:spChg chg="add mod">
-          <ac:chgData name="York, George W CIV USAF USAFA DF/DFEC" userId="1fb5875a-4594-4db2-80fb-f0db3de11280" providerId="ADAL" clId="{09330963-85FD-4C99-A81B-94D0EE5CFFEB}" dt="2026-04-10T18:23:52.069" v="71" actId="1076"/>
-          <ac:spMkLst>
-            <pc:docMk/>
-            <pc:sldMk cId="1501170907" sldId="256"/>
-            <ac:spMk id="234" creationId="{B03E2FCB-F4FA-D322-14B8-FB5E1F9573B3}"/>
-          </ac:spMkLst>
-        </pc:spChg>
-        <pc:spChg chg="add mod">
-          <ac:chgData name="York, George W CIV USAF USAFA DF/DFEC" userId="1fb5875a-4594-4db2-80fb-f0db3de11280" providerId="ADAL" clId="{09330963-85FD-4C99-A81B-94D0EE5CFFEB}" dt="2026-04-10T18:23:52.069" v="71" actId="1076"/>
-          <ac:spMkLst>
-            <pc:docMk/>
-            <pc:sldMk cId="1501170907" sldId="256"/>
-            <ac:spMk id="242" creationId="{5CF4424D-C27A-0FCF-199D-B10372DC54C3}"/>
-          </ac:spMkLst>
-        </pc:spChg>
-        <pc:spChg chg="add mod">
-          <ac:chgData name="York, George W CIV USAF USAFA DF/DFEC" userId="1fb5875a-4594-4db2-80fb-f0db3de11280" providerId="ADAL" clId="{09330963-85FD-4C99-A81B-94D0EE5CFFEB}" dt="2026-04-10T18:23:52.069" v="71" actId="1076"/>
-          <ac:spMkLst>
-            <pc:docMk/>
-            <pc:sldMk cId="1501170907" sldId="256"/>
-            <ac:spMk id="245" creationId="{6F693865-D421-FB3F-F617-69C8DFB74DDA}"/>
-          </ac:spMkLst>
-        </pc:spChg>
-        <pc:spChg chg="add mod">
-          <ac:chgData name="York, George W CIV USAF USAFA DF/DFEC" userId="1fb5875a-4594-4db2-80fb-f0db3de11280" providerId="ADAL" clId="{09330963-85FD-4C99-A81B-94D0EE5CFFEB}" dt="2026-04-10T18:24:09.554" v="74" actId="1076"/>
-          <ac:spMkLst>
-            <pc:docMk/>
-            <pc:sldMk cId="1501170907" sldId="256"/>
-            <ac:spMk id="246" creationId="{3BA26EF9-D46A-45DC-70BA-21364891CB27}"/>
-          </ac:spMkLst>
-        </pc:spChg>
-        <pc:grpChg chg="add mod">
-          <ac:chgData name="York, George W CIV USAF USAFA DF/DFEC" userId="1fb5875a-4594-4db2-80fb-f0db3de11280" providerId="ADAL" clId="{09330963-85FD-4C99-A81B-94D0EE5CFFEB}" dt="2026-05-08T17:36:14.685" v="114" actId="1076"/>
+        <pc:grpChg chg="add del mod">
+          <ac:chgData name="York, George W CIV USAF USAFA DF/DFEC" userId="1fb5875a-4594-4db2-80fb-f0db3de11280" providerId="ADAL" clId="{09330963-85FD-4C99-A81B-94D0EE5CFFEB}" dt="2026-05-15T18:07:40.163" v="189" actId="478"/>
           <ac:grpSpMkLst>
             <pc:docMk/>
             <pc:sldMk cId="1501170907" sldId="256"/>
-            <ac:grpSpMk id="66" creationId="{1043A246-575E-278D-E538-E3ACE7F6C7ED}"/>
+            <ac:grpSpMk id="201" creationId="{5B56A124-7A24-9C0F-3345-EF1CBBEA2B0F}"/>
           </ac:grpSpMkLst>
         </pc:grpChg>
-        <pc:grpChg chg="mod">
-          <ac:chgData name="York, George W CIV USAF USAFA DF/DFEC" userId="1fb5875a-4594-4db2-80fb-f0db3de11280" providerId="ADAL" clId="{09330963-85FD-4C99-A81B-94D0EE5CFFEB}" dt="2026-05-08T17:36:14.685" v="114" actId="1076"/>
+        <pc:grpChg chg="add mod">
+          <ac:chgData name="York, George W CIV USAF USAFA DF/DFEC" userId="1fb5875a-4594-4db2-80fb-f0db3de11280" providerId="ADAL" clId="{09330963-85FD-4C99-A81B-94D0EE5CFFEB}" dt="2026-05-15T17:38:19.752" v="73"/>
           <ac:grpSpMkLst>
             <pc:docMk/>
             <pc:sldMk cId="1501170907" sldId="256"/>
-            <ac:grpSpMk id="107" creationId="{B773C7A5-7ABC-0594-7851-14CF77797137}"/>
+            <ac:grpSpMk id="210" creationId="{31A73DB1-F725-B3D0-7D3E-E0CCEA52259C}"/>
           </ac:grpSpMkLst>
         </pc:grpChg>
-        <pc:grpChg chg="del">
-          <ac:chgData name="York, George W CIV USAF USAFA DF/DFEC" userId="1fb5875a-4594-4db2-80fb-f0db3de11280" providerId="ADAL" clId="{09330963-85FD-4C99-A81B-94D0EE5CFFEB}" dt="2026-05-08T17:35:05.116" v="108" actId="478"/>
-          <ac:grpSpMkLst>
-            <pc:docMk/>
-            <pc:sldMk cId="1501170907" sldId="256"/>
-            <ac:grpSpMk id="137" creationId="{8B5AEF34-ADB3-754B-DE80-ABD4D3F0450B}"/>
-          </ac:grpSpMkLst>
-        </pc:grpChg>
-        <pc:grpChg chg="del">
-          <ac:chgData name="York, George W CIV USAF USAFA DF/DFEC" userId="1fb5875a-4594-4db2-80fb-f0db3de11280" providerId="ADAL" clId="{09330963-85FD-4C99-A81B-94D0EE5CFFEB}" dt="2026-05-08T17:35:08.156" v="109" actId="478"/>
-          <ac:grpSpMkLst>
-            <pc:docMk/>
-            <pc:sldMk cId="1501170907" sldId="256"/>
-            <ac:grpSpMk id="247" creationId="{C53FABC7-DD90-8352-C66A-7DFA23EE2633}"/>
-          </ac:grpSpMkLst>
-        </pc:grpChg>
-        <pc:cxnChg chg="add mod">
-          <ac:chgData name="York, George W CIV USAF USAFA DF/DFEC" userId="1fb5875a-4594-4db2-80fb-f0db3de11280" providerId="ADAL" clId="{09330963-85FD-4C99-A81B-94D0EE5CFFEB}" dt="2026-04-18T20:27:30.523" v="76" actId="1076"/>
+        <pc:cxnChg chg="mod">
+          <ac:chgData name="York, George W CIV USAF USAFA DF/DFEC" userId="1fb5875a-4594-4db2-80fb-f0db3de11280" providerId="ADAL" clId="{09330963-85FD-4C99-A81B-94D0EE5CFFEB}" dt="2026-05-15T17:16:38.513" v="56" actId="14100"/>
           <ac:cxnSpMkLst>
             <pc:docMk/>
             <pc:sldMk cId="1501170907" sldId="256"/>
-            <ac:cxnSpMk id="12" creationId="{C104EDAA-FD8A-4089-C218-104118D04C57}"/>
+            <ac:cxnSpMk id="12" creationId="{9EC90484-36CB-4907-076A-02E3D3D32D1E}"/>
           </ac:cxnSpMkLst>
         </pc:cxnChg>
         <pc:cxnChg chg="mod">
-          <ac:chgData name="York, George W CIV USAF USAFA DF/DFEC" userId="1fb5875a-4594-4db2-80fb-f0db3de11280" providerId="ADAL" clId="{09330963-85FD-4C99-A81B-94D0EE5CFFEB}" dt="2026-04-10T18:19:53.616" v="45" actId="1076"/>
+          <ac:chgData name="York, George W CIV USAF USAFA DF/DFEC" userId="1fb5875a-4594-4db2-80fb-f0db3de11280" providerId="ADAL" clId="{09330963-85FD-4C99-A81B-94D0EE5CFFEB}" dt="2026-05-15T18:03:42.476" v="170" actId="14100"/>
+          <ac:cxnSpMkLst>
+            <pc:docMk/>
+            <pc:sldMk cId="1501170907" sldId="256"/>
+            <ac:cxnSpMk id="13" creationId="{C260DFE6-5315-9AC9-190B-7C588133F608}"/>
+          </ac:cxnSpMkLst>
+        </pc:cxnChg>
+        <pc:cxnChg chg="mod">
+          <ac:chgData name="York, George W CIV USAF USAFA DF/DFEC" userId="1fb5875a-4594-4db2-80fb-f0db3de11280" providerId="ADAL" clId="{09330963-85FD-4C99-A81B-94D0EE5CFFEB}" dt="2026-05-15T18:03:55.131" v="172" actId="14100"/>
+          <ac:cxnSpMkLst>
+            <pc:docMk/>
+            <pc:sldMk cId="1501170907" sldId="256"/>
+            <ac:cxnSpMk id="14" creationId="{15519404-0CCB-B1DC-032D-7F61334BD5A1}"/>
+          </ac:cxnSpMkLst>
+        </pc:cxnChg>
+        <pc:cxnChg chg="del">
+          <ac:chgData name="York, George W CIV USAF USAFA DF/DFEC" userId="1fb5875a-4594-4db2-80fb-f0db3de11280" providerId="ADAL" clId="{09330963-85FD-4C99-A81B-94D0EE5CFFEB}" dt="2026-05-15T17:16:47.486" v="57" actId="478"/>
           <ac:cxnSpMkLst>
             <pc:docMk/>
             <pc:sldMk cId="1501170907" sldId="256"/>
             <ac:cxnSpMk id="28" creationId="{DBC59A37-4C55-8753-29C9-9D435BAD749A}"/>
           </ac:cxnSpMkLst>
         </pc:cxnChg>
-        <pc:cxnChg chg="add mod">
-          <ac:chgData name="York, George W CIV USAF USAFA DF/DFEC" userId="1fb5875a-4594-4db2-80fb-f0db3de11280" providerId="ADAL" clId="{09330963-85FD-4C99-A81B-94D0EE5CFFEB}" dt="2026-05-08T17:32:50.202" v="101" actId="14100"/>
+        <pc:cxnChg chg="mod">
+          <ac:chgData name="York, George W CIV USAF USAFA DF/DFEC" userId="1fb5875a-4594-4db2-80fb-f0db3de11280" providerId="ADAL" clId="{09330963-85FD-4C99-A81B-94D0EE5CFFEB}" dt="2026-05-15T17:55:14.310" v="132" actId="1076"/>
           <ac:cxnSpMkLst>
             <pc:docMk/>
             <pc:sldMk cId="1501170907" sldId="256"/>
-            <ac:cxnSpMk id="47" creationId="{3AE93C80-3013-DEAA-0C8C-8059FBC73417}"/>
+            <ac:cxnSpMk id="30" creationId="{0FCEB13D-6178-8B05-6BF7-AA34265C10ED}"/>
           </ac:cxnSpMkLst>
         </pc:cxnChg>
-        <pc:cxnChg chg="mod">
-          <ac:chgData name="York, George W CIV USAF USAFA DF/DFEC" userId="1fb5875a-4594-4db2-80fb-f0db3de11280" providerId="ADAL" clId="{09330963-85FD-4C99-A81B-94D0EE5CFFEB}" dt="2026-05-08T17:38:27.504" v="135" actId="14100"/>
+        <pc:cxnChg chg="del">
+          <ac:chgData name="York, George W CIV USAF USAFA DF/DFEC" userId="1fb5875a-4594-4db2-80fb-f0db3de11280" providerId="ADAL" clId="{09330963-85FD-4C99-A81B-94D0EE5CFFEB}" dt="2026-05-15T17:17:00.326" v="58" actId="478"/>
           <ac:cxnSpMkLst>
             <pc:docMk/>
             <pc:sldMk cId="1501170907" sldId="256"/>
-            <ac:cxnSpMk id="50" creationId="{50DC1730-2DC8-EE14-BF4C-B0BDADDC0FF1}"/>
+            <ac:cxnSpMk id="35" creationId="{41C7F50D-F709-CA85-5675-DD0636890A76}"/>
           </ac:cxnSpMkLst>
         </pc:cxnChg>
-        <pc:cxnChg chg="add del mod">
-          <ac:chgData name="York, George W CIV USAF USAFA DF/DFEC" userId="1fb5875a-4594-4db2-80fb-f0db3de11280" providerId="ADAL" clId="{09330963-85FD-4C99-A81B-94D0EE5CFFEB}" dt="2026-05-08T17:32:59.605" v="102" actId="478"/>
+        <pc:cxnChg chg="del">
+          <ac:chgData name="York, George W CIV USAF USAFA DF/DFEC" userId="1fb5875a-4594-4db2-80fb-f0db3de11280" providerId="ADAL" clId="{09330963-85FD-4C99-A81B-94D0EE5CFFEB}" dt="2026-05-15T17:14:23.188" v="47" actId="478"/>
           <ac:cxnSpMkLst>
             <pc:docMk/>
             <pc:sldMk cId="1501170907" sldId="256"/>
-            <ac:cxnSpMk id="52" creationId="{5E06D8EE-1F91-FC75-99F3-5517B19A6252}"/>
+            <ac:cxnSpMk id="47" creationId="{4C88B74C-2825-380E-71DB-7071BFAD6C6D}"/>
           </ac:cxnSpMkLst>
         </pc:cxnChg>
-        <pc:cxnChg chg="mod">
-          <ac:chgData name="York, George W CIV USAF USAFA DF/DFEC" userId="1fb5875a-4594-4db2-80fb-f0db3de11280" providerId="ADAL" clId="{09330963-85FD-4C99-A81B-94D0EE5CFFEB}" dt="2026-05-08T20:00:25.610" v="145" actId="14100"/>
+        <pc:cxnChg chg="del">
+          <ac:chgData name="York, George W CIV USAF USAFA DF/DFEC" userId="1fb5875a-4594-4db2-80fb-f0db3de11280" providerId="ADAL" clId="{09330963-85FD-4C99-A81B-94D0EE5CFFEB}" dt="2026-05-15T17:14:27.233" v="49" actId="478"/>
+          <ac:cxnSpMkLst>
+            <pc:docMk/>
+            <pc:sldMk cId="1501170907" sldId="256"/>
+            <ac:cxnSpMk id="53" creationId="{FBA8FA93-D7D6-E677-D331-61BDAA4D72AD}"/>
+          </ac:cxnSpMkLst>
+        </pc:cxnChg>
+        <pc:cxnChg chg="del">
+          <ac:chgData name="York, George W CIV USAF USAFA DF/DFEC" userId="1fb5875a-4594-4db2-80fb-f0db3de11280" providerId="ADAL" clId="{09330963-85FD-4C99-A81B-94D0EE5CFFEB}" dt="2026-05-15T17:16:47.486" v="57" actId="478"/>
           <ac:cxnSpMkLst>
             <pc:docMk/>
             <pc:sldMk cId="1501170907" sldId="256"/>
             <ac:cxnSpMk id="54" creationId="{03324C20-C3D1-9AAB-5C0D-C6C15BD835FE}"/>
           </ac:cxnSpMkLst>
         </pc:cxnChg>
-        <pc:cxnChg chg="add mod">
-          <ac:chgData name="York, George W CIV USAF USAFA DF/DFEC" userId="1fb5875a-4594-4db2-80fb-f0db3de11280" providerId="ADAL" clId="{09330963-85FD-4C99-A81B-94D0EE5CFFEB}" dt="2026-05-08T17:33:06.537" v="105" actId="14100"/>
+        <pc:cxnChg chg="del">
+          <ac:chgData name="York, George W CIV USAF USAFA DF/DFEC" userId="1fb5875a-4594-4db2-80fb-f0db3de11280" providerId="ADAL" clId="{09330963-85FD-4C99-A81B-94D0EE5CFFEB}" dt="2026-05-15T17:14:26.194" v="48" actId="478"/>
           <ac:cxnSpMkLst>
             <pc:docMk/>
             <pc:sldMk cId="1501170907" sldId="256"/>
-            <ac:cxnSpMk id="59" creationId="{F5DC23A1-E3C9-66CD-B3A5-E308601A02A9}"/>
-          </ac:cxnSpMkLst>
-        </pc:cxnChg>
-        <pc:cxnChg chg="add mod">
-          <ac:chgData name="York, George W CIV USAF USAFA DF/DFEC" userId="1fb5875a-4594-4db2-80fb-f0db3de11280" providerId="ADAL" clId="{09330963-85FD-4C99-A81B-94D0EE5CFFEB}" dt="2026-05-08T20:00:33.838" v="147" actId="1076"/>
-          <ac:cxnSpMkLst>
-            <pc:docMk/>
-            <pc:sldMk cId="1501170907" sldId="256"/>
-            <ac:cxnSpMk id="61" creationId="{A9B710D8-FF0B-7DFA-9850-657A2D4BD13E}"/>
-          </ac:cxnSpMkLst>
-        </pc:cxnChg>
-        <pc:cxnChg chg="add mod">
-          <ac:chgData name="York, George W CIV USAF USAFA DF/DFEC" userId="1fb5875a-4594-4db2-80fb-f0db3de11280" providerId="ADAL" clId="{09330963-85FD-4C99-A81B-94D0EE5CFFEB}" dt="2026-05-08T20:00:50.744" v="150" actId="14100"/>
-          <ac:cxnSpMkLst>
-            <pc:docMk/>
-            <pc:sldMk cId="1501170907" sldId="256"/>
-            <ac:cxnSpMk id="62" creationId="{0E39A71A-1D4A-92AA-4D7B-F3F79DDDDC6F}"/>
+            <ac:cxnSpMk id="61" creationId="{628AAA9C-DA03-CA34-B011-035AEF93D851}"/>
           </ac:cxnSpMkLst>
         </pc:cxnChg>
         <pc:cxnChg chg="del">
-          <ac:chgData name="York, George W CIV USAF USAFA DF/DFEC" userId="1fb5875a-4594-4db2-80fb-f0db3de11280" providerId="ADAL" clId="{09330963-85FD-4C99-A81B-94D0EE5CFFEB}" dt="2026-05-08T17:38:23.484" v="134" actId="478"/>
-          <ac:cxnSpMkLst>
-            <pc:docMk/>
-            <pc:sldMk cId="1501170907" sldId="256"/>
-            <ac:cxnSpMk id="62" creationId="{88974812-60ED-4172-D124-4A8113D87693}"/>
-          </ac:cxnSpMkLst>
-        </pc:cxnChg>
-        <pc:cxnChg chg="mod">
-          <ac:chgData name="York, George W CIV USAF USAFA DF/DFEC" userId="1fb5875a-4594-4db2-80fb-f0db3de11280" providerId="ADAL" clId="{09330963-85FD-4C99-A81B-94D0EE5CFFEB}" dt="2026-04-10T18:19:53.616" v="45" actId="1076"/>
+          <ac:chgData name="York, George W CIV USAF USAFA DF/DFEC" userId="1fb5875a-4594-4db2-80fb-f0db3de11280" providerId="ADAL" clId="{09330963-85FD-4C99-A81B-94D0EE5CFFEB}" dt="2026-05-15T17:16:47.486" v="57" actId="478"/>
           <ac:cxnSpMkLst>
             <pc:docMk/>
             <pc:sldMk cId="1501170907" sldId="256"/>
             <ac:cxnSpMk id="68" creationId="{35DADF49-4B1B-AC71-8C36-C35004BEE094}"/>
           </ac:cxnSpMkLst>
         </pc:cxnChg>
-        <pc:cxnChg chg="mod">
-          <ac:chgData name="York, George W CIV USAF USAFA DF/DFEC" userId="1fb5875a-4594-4db2-80fb-f0db3de11280" providerId="ADAL" clId="{09330963-85FD-4C99-A81B-94D0EE5CFFEB}" dt="2026-05-08T20:00:08.342" v="144" actId="1076"/>
+        <pc:cxnChg chg="del">
+          <ac:chgData name="York, George W CIV USAF USAFA DF/DFEC" userId="1fb5875a-4594-4db2-80fb-f0db3de11280" providerId="ADAL" clId="{09330963-85FD-4C99-A81B-94D0EE5CFFEB}" dt="2026-05-15T17:16:47.486" v="57" actId="478"/>
           <ac:cxnSpMkLst>
             <pc:docMk/>
             <pc:sldMk cId="1501170907" sldId="256"/>
             <ac:cxnSpMk id="72" creationId="{3C0FD334-761D-D912-1D21-08670E1D2E8A}"/>
           </ac:cxnSpMkLst>
         </pc:cxnChg>
-        <pc:cxnChg chg="mod">
-          <ac:chgData name="York, George W CIV USAF USAFA DF/DFEC" userId="1fb5875a-4594-4db2-80fb-f0db3de11280" providerId="ADAL" clId="{09330963-85FD-4C99-A81B-94D0EE5CFFEB}" dt="2026-05-08T17:38:37.456" v="136" actId="14100"/>
+        <pc:cxnChg chg="add mod">
+          <ac:chgData name="York, George W CIV USAF USAFA DF/DFEC" userId="1fb5875a-4594-4db2-80fb-f0db3de11280" providerId="ADAL" clId="{09330963-85FD-4C99-A81B-94D0EE5CFFEB}" dt="2026-05-15T17:16:28.837" v="55"/>
           <ac:cxnSpMkLst>
             <pc:docMk/>
             <pc:sldMk cId="1501170907" sldId="256"/>
-            <ac:cxnSpMk id="79" creationId="{85985002-8499-9138-27D1-683C5A5ED252}"/>
+            <ac:cxnSpMk id="75" creationId="{3FEF4D69-29A5-1207-9833-621D95AFAD33}"/>
           </ac:cxnSpMkLst>
         </pc:cxnChg>
-        <pc:cxnChg chg="mod">
-          <ac:chgData name="York, George W CIV USAF USAFA DF/DFEC" userId="1fb5875a-4594-4db2-80fb-f0db3de11280" providerId="ADAL" clId="{09330963-85FD-4C99-A81B-94D0EE5CFFEB}" dt="2026-04-10T18:22:19.458" v="63" actId="1076"/>
+        <pc:cxnChg chg="del">
+          <ac:chgData name="York, George W CIV USAF USAFA DF/DFEC" userId="1fb5875a-4594-4db2-80fb-f0db3de11280" providerId="ADAL" clId="{09330963-85FD-4C99-A81B-94D0EE5CFFEB}" dt="2026-05-15T17:15:29.292" v="51" actId="478"/>
+          <ac:cxnSpMkLst>
+            <pc:docMk/>
+            <pc:sldMk cId="1501170907" sldId="256"/>
+            <ac:cxnSpMk id="76" creationId="{FF005C8D-5E76-1B8B-2214-62019E9B1040}"/>
+          </ac:cxnSpMkLst>
+        </pc:cxnChg>
+        <pc:cxnChg chg="del">
+          <ac:chgData name="York, George W CIV USAF USAFA DF/DFEC" userId="1fb5875a-4594-4db2-80fb-f0db3de11280" providerId="ADAL" clId="{09330963-85FD-4C99-A81B-94D0EE5CFFEB}" dt="2026-05-15T17:17:00.326" v="58" actId="478"/>
+          <ac:cxnSpMkLst>
+            <pc:docMk/>
+            <pc:sldMk cId="1501170907" sldId="256"/>
+            <ac:cxnSpMk id="77" creationId="{318283A9-1322-8DD9-D5D3-E250A298DF07}"/>
+          </ac:cxnSpMkLst>
+        </pc:cxnChg>
+        <pc:cxnChg chg="add mod">
+          <ac:chgData name="York, George W CIV USAF USAFA DF/DFEC" userId="1fb5875a-4594-4db2-80fb-f0db3de11280" providerId="ADAL" clId="{09330963-85FD-4C99-A81B-94D0EE5CFFEB}" dt="2026-05-15T17:16:28.837" v="55"/>
+          <ac:cxnSpMkLst>
+            <pc:docMk/>
+            <pc:sldMk cId="1501170907" sldId="256"/>
+            <ac:cxnSpMk id="78" creationId="{723D0E84-7FA0-BDD6-FDF0-A9AB9722FE67}"/>
+          </ac:cxnSpMkLst>
+        </pc:cxnChg>
+        <pc:cxnChg chg="del">
+          <ac:chgData name="York, George W CIV USAF USAFA DF/DFEC" userId="1fb5875a-4594-4db2-80fb-f0db3de11280" providerId="ADAL" clId="{09330963-85FD-4C99-A81B-94D0EE5CFFEB}" dt="2026-05-15T17:17:00.326" v="58" actId="478"/>
+          <ac:cxnSpMkLst>
+            <pc:docMk/>
+            <pc:sldMk cId="1501170907" sldId="256"/>
+            <ac:cxnSpMk id="79" creationId="{A9A8F4E2-BF11-CC7D-3DDC-10009DD0232B}"/>
+          </ac:cxnSpMkLst>
+        </pc:cxnChg>
+        <pc:cxnChg chg="add mod">
+          <ac:chgData name="York, George W CIV USAF USAFA DF/DFEC" userId="1fb5875a-4594-4db2-80fb-f0db3de11280" providerId="ADAL" clId="{09330963-85FD-4C99-A81B-94D0EE5CFFEB}" dt="2026-05-15T17:16:28.837" v="55"/>
+          <ac:cxnSpMkLst>
+            <pc:docMk/>
+            <pc:sldMk cId="1501170907" sldId="256"/>
+            <ac:cxnSpMk id="80" creationId="{ECA286BA-FE44-E380-0BBD-B76E3B15005B}"/>
+          </ac:cxnSpMkLst>
+        </pc:cxnChg>
+        <pc:cxnChg chg="del">
+          <ac:chgData name="York, George W CIV USAF USAFA DF/DFEC" userId="1fb5875a-4594-4db2-80fb-f0db3de11280" providerId="ADAL" clId="{09330963-85FD-4C99-A81B-94D0EE5CFFEB}" dt="2026-05-15T17:15:28.203" v="50" actId="478"/>
           <ac:cxnSpMkLst>
             <pc:docMk/>
             <pc:sldMk cId="1501170907" sldId="256"/>
             <ac:cxnSpMk id="82" creationId="{821208F8-3FE0-AC1B-C80E-FD20D78B59DE}"/>
           </ac:cxnSpMkLst>
         </pc:cxnChg>
-        <pc:cxnChg chg="mod">
-          <ac:chgData name="York, George W CIV USAF USAFA DF/DFEC" userId="1fb5875a-4594-4db2-80fb-f0db3de11280" providerId="ADAL" clId="{09330963-85FD-4C99-A81B-94D0EE5CFFEB}" dt="2026-05-08T17:32:00.418" v="97" actId="14100"/>
+        <pc:cxnChg chg="del">
+          <ac:chgData name="York, George W CIV USAF USAFA DF/DFEC" userId="1fb5875a-4594-4db2-80fb-f0db3de11280" providerId="ADAL" clId="{09330963-85FD-4C99-A81B-94D0EE5CFFEB}" dt="2026-05-15T17:17:00.326" v="58" actId="478"/>
           <ac:cxnSpMkLst>
             <pc:docMk/>
             <pc:sldMk cId="1501170907" sldId="256"/>
-            <ac:cxnSpMk id="83" creationId="{857589EA-2600-0EE7-5D7E-FFA354A03D39}"/>
+            <ac:cxnSpMk id="84" creationId="{1A52A5D1-1BB7-3403-A1A5-86E132AA172B}"/>
           </ac:cxnSpMkLst>
         </pc:cxnChg>
-        <pc:cxnChg chg="mod">
-          <ac:chgData name="York, George W CIV USAF USAFA DF/DFEC" userId="1fb5875a-4594-4db2-80fb-f0db3de11280" providerId="ADAL" clId="{09330963-85FD-4C99-A81B-94D0EE5CFFEB}" dt="2026-05-08T17:31:43.137" v="95" actId="1076"/>
+        <pc:cxnChg chg="add mod">
+          <ac:chgData name="York, George W CIV USAF USAFA DF/DFEC" userId="1fb5875a-4594-4db2-80fb-f0db3de11280" providerId="ADAL" clId="{09330963-85FD-4C99-A81B-94D0EE5CFFEB}" dt="2026-05-15T17:16:28.837" v="55"/>
           <ac:cxnSpMkLst>
             <pc:docMk/>
             <pc:sldMk cId="1501170907" sldId="256"/>
-            <ac:cxnSpMk id="85" creationId="{95633958-DAF6-D732-2373-3901093A51FA}"/>
+            <ac:cxnSpMk id="86" creationId="{97725506-B5BD-226C-7AD1-C09790F81C94}"/>
           </ac:cxnSpMkLst>
         </pc:cxnChg>
-        <pc:cxnChg chg="mod">
-          <ac:chgData name="York, George W CIV USAF USAFA DF/DFEC" userId="1fb5875a-4594-4db2-80fb-f0db3de11280" providerId="ADAL" clId="{09330963-85FD-4C99-A81B-94D0EE5CFFEB}" dt="2026-05-08T17:31:54.056" v="96" actId="14100"/>
+        <pc:cxnChg chg="del">
+          <ac:chgData name="York, George W CIV USAF USAFA DF/DFEC" userId="1fb5875a-4594-4db2-80fb-f0db3de11280" providerId="ADAL" clId="{09330963-85FD-4C99-A81B-94D0EE5CFFEB}" dt="2026-05-15T17:17:00.326" v="58" actId="478"/>
           <ac:cxnSpMkLst>
             <pc:docMk/>
             <pc:sldMk cId="1501170907" sldId="256"/>
-            <ac:cxnSpMk id="87" creationId="{4B6F7810-982D-2B77-AC93-0E1947AF6544}"/>
+            <ac:cxnSpMk id="88" creationId="{5F7582C7-10E1-623E-4E17-302DFD08C2CB}"/>
           </ac:cxnSpMkLst>
         </pc:cxnChg>
-        <pc:cxnChg chg="mod">
-          <ac:chgData name="York, George W CIV USAF USAFA DF/DFEC" userId="1fb5875a-4594-4db2-80fb-f0db3de11280" providerId="ADAL" clId="{09330963-85FD-4C99-A81B-94D0EE5CFFEB}" dt="2026-04-10T18:22:08.546" v="61" actId="14100"/>
+        <pc:cxnChg chg="del">
+          <ac:chgData name="York, George W CIV USAF USAFA DF/DFEC" userId="1fb5875a-4594-4db2-80fb-f0db3de11280" providerId="ADAL" clId="{09330963-85FD-4C99-A81B-94D0EE5CFFEB}" dt="2026-05-15T17:16:47.486" v="57" actId="478"/>
           <ac:cxnSpMkLst>
             <pc:docMk/>
             <pc:sldMk cId="1501170907" sldId="256"/>
@@ -608,155 +536,443 @@
           </ac:cxnSpMkLst>
         </pc:cxnChg>
         <pc:cxnChg chg="add mod">
-          <ac:chgData name="York, George W CIV USAF USAFA DF/DFEC" userId="1fb5875a-4594-4db2-80fb-f0db3de11280" providerId="ADAL" clId="{09330963-85FD-4C99-A81B-94D0EE5CFFEB}" dt="2026-05-08T20:02:00.350" v="152"/>
+          <ac:chgData name="York, George W CIV USAF USAFA DF/DFEC" userId="1fb5875a-4594-4db2-80fb-f0db3de11280" providerId="ADAL" clId="{09330963-85FD-4C99-A81B-94D0EE5CFFEB}" dt="2026-05-15T17:16:28.837" v="55"/>
           <ac:cxnSpMkLst>
             <pc:docMk/>
             <pc:sldMk cId="1501170907" sldId="256"/>
-            <ac:cxnSpMk id="120" creationId="{48B8A1BE-B80B-E5F0-935A-CF4034959F43}"/>
+            <ac:cxnSpMk id="106" creationId="{71CD65D9-0819-F3FB-BBC6-E6EC0D590B41}"/>
           </ac:cxnSpMkLst>
         </pc:cxnChg>
-        <pc:cxnChg chg="mod">
-          <ac:chgData name="York, George W CIV USAF USAFA DF/DFEC" userId="1fb5875a-4594-4db2-80fb-f0db3de11280" providerId="ADAL" clId="{09330963-85FD-4C99-A81B-94D0EE5CFFEB}" dt="2026-05-08T20:04:08.974" v="163" actId="14100"/>
+        <pc:cxnChg chg="del">
+          <ac:chgData name="York, George W CIV USAF USAFA DF/DFEC" userId="1fb5875a-4594-4db2-80fb-f0db3de11280" providerId="ADAL" clId="{09330963-85FD-4C99-A81B-94D0EE5CFFEB}" dt="2026-05-15T17:16:00.941" v="54" actId="478"/>
           <ac:cxnSpMkLst>
             <pc:docMk/>
             <pc:sldMk cId="1501170907" sldId="256"/>
-            <ac:cxnSpMk id="131" creationId="{B4CB413E-FC95-91DD-71A9-E415E9DA0C6F}"/>
+            <ac:cxnSpMk id="107" creationId="{E6A87E40-A761-8DD0-48F4-7E93FADB35F9}"/>
+          </ac:cxnSpMkLst>
+        </pc:cxnChg>
+        <pc:cxnChg chg="del">
+          <ac:chgData name="York, George W CIV USAF USAFA DF/DFEC" userId="1fb5875a-4594-4db2-80fb-f0db3de11280" providerId="ADAL" clId="{09330963-85FD-4C99-A81B-94D0EE5CFFEB}" dt="2026-05-15T17:16:47.486" v="57" actId="478"/>
+          <ac:cxnSpMkLst>
+            <pc:docMk/>
+            <pc:sldMk cId="1501170907" sldId="256"/>
+            <ac:cxnSpMk id="108" creationId="{8B94ED6B-AB9B-EEDC-7DEC-3E3578D3DFCF}"/>
           </ac:cxnSpMkLst>
         </pc:cxnChg>
         <pc:cxnChg chg="add mod">
-          <ac:chgData name="York, George W CIV USAF USAFA DF/DFEC" userId="1fb5875a-4594-4db2-80fb-f0db3de11280" providerId="ADAL" clId="{09330963-85FD-4C99-A81B-94D0EE5CFFEB}" dt="2026-05-08T20:03:34.237" v="159" actId="14100"/>
+          <ac:chgData name="York, George W CIV USAF USAFA DF/DFEC" userId="1fb5875a-4594-4db2-80fb-f0db3de11280" providerId="ADAL" clId="{09330963-85FD-4C99-A81B-94D0EE5CFFEB}" dt="2026-05-15T17:16:28.837" v="55"/>
           <ac:cxnSpMkLst>
             <pc:docMk/>
             <pc:sldMk cId="1501170907" sldId="256"/>
-            <ac:cxnSpMk id="132" creationId="{C7306C74-0136-403C-8535-66A5F08DF440}"/>
+            <ac:cxnSpMk id="109" creationId="{8AC26B0D-B0A5-2DA8-842F-D10BD7A35D69}"/>
+          </ac:cxnSpMkLst>
+        </pc:cxnChg>
+        <pc:cxnChg chg="add mod">
+          <ac:chgData name="York, George W CIV USAF USAFA DF/DFEC" userId="1fb5875a-4594-4db2-80fb-f0db3de11280" providerId="ADAL" clId="{09330963-85FD-4C99-A81B-94D0EE5CFFEB}" dt="2026-05-15T17:53:52.622" v="128" actId="14100"/>
+          <ac:cxnSpMkLst>
+            <pc:docMk/>
+            <pc:sldMk cId="1501170907" sldId="256"/>
+            <ac:cxnSpMk id="110" creationId="{DC5F1F91-6CC7-C60C-BCEE-6643813C9FFE}"/>
+          </ac:cxnSpMkLst>
+        </pc:cxnChg>
+        <pc:cxnChg chg="add mod">
+          <ac:chgData name="York, George W CIV USAF USAFA DF/DFEC" userId="1fb5875a-4594-4db2-80fb-f0db3de11280" providerId="ADAL" clId="{09330963-85FD-4C99-A81B-94D0EE5CFFEB}" dt="2026-05-15T17:16:28.837" v="55"/>
+          <ac:cxnSpMkLst>
+            <pc:docMk/>
+            <pc:sldMk cId="1501170907" sldId="256"/>
+            <ac:cxnSpMk id="145" creationId="{2822CE25-798B-8464-116B-0C053CE44114}"/>
           </ac:cxnSpMkLst>
         </pc:cxnChg>
         <pc:cxnChg chg="del">
-          <ac:chgData name="York, George W CIV USAF USAFA DF/DFEC" userId="1fb5875a-4594-4db2-80fb-f0db3de11280" providerId="ADAL" clId="{09330963-85FD-4C99-A81B-94D0EE5CFFEB}" dt="2026-05-08T17:35:08.156" v="109" actId="478"/>
-          <ac:cxnSpMkLst>
-            <pc:docMk/>
-            <pc:sldMk cId="1501170907" sldId="256"/>
-            <ac:cxnSpMk id="146" creationId="{ABE6E774-8C9B-4489-D948-65607F2E188A}"/>
-          </ac:cxnSpMkLst>
-        </pc:cxnChg>
-        <pc:cxnChg chg="del">
-          <ac:chgData name="York, George W CIV USAF USAFA DF/DFEC" userId="1fb5875a-4594-4db2-80fb-f0db3de11280" providerId="ADAL" clId="{09330963-85FD-4C99-A81B-94D0EE5CFFEB}" dt="2026-05-08T17:35:08.156" v="109" actId="478"/>
-          <ac:cxnSpMkLst>
-            <pc:docMk/>
-            <pc:sldMk cId="1501170907" sldId="256"/>
-            <ac:cxnSpMk id="148" creationId="{FE9EFFB0-0DED-2330-8209-FC39718441DD}"/>
-          </ac:cxnSpMkLst>
-        </pc:cxnChg>
-        <pc:cxnChg chg="del">
-          <ac:chgData name="York, George W CIV USAF USAFA DF/DFEC" userId="1fb5875a-4594-4db2-80fb-f0db3de11280" providerId="ADAL" clId="{09330963-85FD-4C99-A81B-94D0EE5CFFEB}" dt="2026-05-08T17:35:05.116" v="108" actId="478"/>
+          <ac:chgData name="York, George W CIV USAF USAFA DF/DFEC" userId="1fb5875a-4594-4db2-80fb-f0db3de11280" providerId="ADAL" clId="{09330963-85FD-4C99-A81B-94D0EE5CFFEB}" dt="2026-05-15T18:07:45.345" v="191" actId="478"/>
           <ac:cxnSpMkLst>
             <pc:docMk/>
             <pc:sldMk cId="1501170907" sldId="256"/>
             <ac:cxnSpMk id="149" creationId="{F6ECA4E6-7E3F-9AE7-DC4A-642870838647}"/>
           </ac:cxnSpMkLst>
         </pc:cxnChg>
-        <pc:cxnChg chg="mod">
-          <ac:chgData name="York, George W CIV USAF USAFA DF/DFEC" userId="1fb5875a-4594-4db2-80fb-f0db3de11280" providerId="ADAL" clId="{09330963-85FD-4C99-A81B-94D0EE5CFFEB}" dt="2026-05-08T17:36:14.685" v="114" actId="1076"/>
+        <pc:cxnChg chg="add mod">
+          <ac:chgData name="York, George W CIV USAF USAFA DF/DFEC" userId="1fb5875a-4594-4db2-80fb-f0db3de11280" providerId="ADAL" clId="{09330963-85FD-4C99-A81B-94D0EE5CFFEB}" dt="2026-05-15T17:55:14.310" v="132" actId="1076"/>
           <ac:cxnSpMkLst>
             <pc:docMk/>
             <pc:sldMk cId="1501170907" sldId="256"/>
-            <ac:cxnSpMk id="176" creationId="{83721058-E86C-EB18-A1F1-24BD0BF2686D}"/>
+            <ac:cxnSpMk id="161" creationId="{E2A0AABA-ADB3-2849-6246-E1410E1EB0A7}"/>
+          </ac:cxnSpMkLst>
+        </pc:cxnChg>
+        <pc:cxnChg chg="add mod">
+          <ac:chgData name="York, George W CIV USAF USAFA DF/DFEC" userId="1fb5875a-4594-4db2-80fb-f0db3de11280" providerId="ADAL" clId="{09330963-85FD-4C99-A81B-94D0EE5CFFEB}" dt="2026-05-15T17:55:23.126" v="134" actId="14100"/>
+          <ac:cxnSpMkLst>
+            <pc:docMk/>
+            <pc:sldMk cId="1501170907" sldId="256"/>
+            <ac:cxnSpMk id="175" creationId="{521D3994-D4BE-156E-DB2D-ABB3E732B793}"/>
+          </ac:cxnSpMkLst>
+        </pc:cxnChg>
+        <pc:cxnChg chg="add mod">
+          <ac:chgData name="York, George W CIV USAF USAFA DF/DFEC" userId="1fb5875a-4594-4db2-80fb-f0db3de11280" providerId="ADAL" clId="{09330963-85FD-4C99-A81B-94D0EE5CFFEB}" dt="2026-05-15T17:55:14.310" v="132" actId="1076"/>
+          <ac:cxnSpMkLst>
+            <pc:docMk/>
+            <pc:sldMk cId="1501170907" sldId="256"/>
+            <ac:cxnSpMk id="176" creationId="{6E6A93EA-E883-B3A1-2E7C-B387381983D1}"/>
+          </ac:cxnSpMkLst>
+        </pc:cxnChg>
+        <pc:cxnChg chg="add mod">
+          <ac:chgData name="York, George W CIV USAF USAFA DF/DFEC" userId="1fb5875a-4594-4db2-80fb-f0db3de11280" providerId="ADAL" clId="{09330963-85FD-4C99-A81B-94D0EE5CFFEB}" dt="2026-05-15T17:17:29.574" v="59"/>
+          <ac:cxnSpMkLst>
+            <pc:docMk/>
+            <pc:sldMk cId="1501170907" sldId="256"/>
+            <ac:cxnSpMk id="177" creationId="{D3EDA99A-30A4-F982-B715-474CFCA4CF10}"/>
+          </ac:cxnSpMkLst>
+        </pc:cxnChg>
+        <pc:cxnChg chg="add mod">
+          <ac:chgData name="York, George W CIV USAF USAFA DF/DFEC" userId="1fb5875a-4594-4db2-80fb-f0db3de11280" providerId="ADAL" clId="{09330963-85FD-4C99-A81B-94D0EE5CFFEB}" dt="2026-05-15T17:55:18.206" v="133" actId="14100"/>
+          <ac:cxnSpMkLst>
+            <pc:docMk/>
+            <pc:sldMk cId="1501170907" sldId="256"/>
+            <ac:cxnSpMk id="178" creationId="{3C226CA3-1732-8170-4B80-9A913F784713}"/>
+          </ac:cxnSpMkLst>
+        </pc:cxnChg>
+        <pc:cxnChg chg="add mod">
+          <ac:chgData name="York, George W CIV USAF USAFA DF/DFEC" userId="1fb5875a-4594-4db2-80fb-f0db3de11280" providerId="ADAL" clId="{09330963-85FD-4C99-A81B-94D0EE5CFFEB}" dt="2026-05-15T17:17:29.574" v="59"/>
+          <ac:cxnSpMkLst>
+            <pc:docMk/>
+            <pc:sldMk cId="1501170907" sldId="256"/>
+            <ac:cxnSpMk id="179" creationId="{4F4AF458-FF60-7841-5DF7-351701BBE355}"/>
+          </ac:cxnSpMkLst>
+        </pc:cxnChg>
+        <pc:cxnChg chg="add mod">
+          <ac:chgData name="York, George W CIV USAF USAFA DF/DFEC" userId="1fb5875a-4594-4db2-80fb-f0db3de11280" providerId="ADAL" clId="{09330963-85FD-4C99-A81B-94D0EE5CFFEB}" dt="2026-05-15T17:17:29.574" v="59"/>
+          <ac:cxnSpMkLst>
+            <pc:docMk/>
+            <pc:sldMk cId="1501170907" sldId="256"/>
+            <ac:cxnSpMk id="180" creationId="{2DFAFABE-FCDA-D3BB-29F9-62EB431D04BC}"/>
+          </ac:cxnSpMkLst>
+        </pc:cxnChg>
+        <pc:cxnChg chg="add del mod">
+          <ac:chgData name="York, George W CIV USAF USAFA DF/DFEC" userId="1fb5875a-4594-4db2-80fb-f0db3de11280" providerId="ADAL" clId="{09330963-85FD-4C99-A81B-94D0EE5CFFEB}" dt="2026-05-15T17:17:38.980" v="60" actId="478"/>
+          <ac:cxnSpMkLst>
+            <pc:docMk/>
+            <pc:sldMk cId="1501170907" sldId="256"/>
+            <ac:cxnSpMk id="182" creationId="{B8E60B07-86F6-BB1B-9108-ABAEDC387887}"/>
+          </ac:cxnSpMkLst>
+        </pc:cxnChg>
+        <pc:cxnChg chg="add del mod">
+          <ac:chgData name="York, George W CIV USAF USAFA DF/DFEC" userId="1fb5875a-4594-4db2-80fb-f0db3de11280" providerId="ADAL" clId="{09330963-85FD-4C99-A81B-94D0EE5CFFEB}" dt="2026-05-15T18:07:43.978" v="190" actId="478"/>
+          <ac:cxnSpMkLst>
+            <pc:docMk/>
+            <pc:sldMk cId="1501170907" sldId="256"/>
+            <ac:cxnSpMk id="185" creationId="{9C488BC6-D3BE-6987-0CF1-0207822F048E}"/>
           </ac:cxnSpMkLst>
         </pc:cxnChg>
         <pc:cxnChg chg="mod">
-          <ac:chgData name="York, George W CIV USAF USAFA DF/DFEC" userId="1fb5875a-4594-4db2-80fb-f0db3de11280" providerId="ADAL" clId="{09330963-85FD-4C99-A81B-94D0EE5CFFEB}" dt="2026-05-08T17:36:14.685" v="114" actId="1076"/>
+          <ac:chgData name="York, George W CIV USAF USAFA DF/DFEC" userId="1fb5875a-4594-4db2-80fb-f0db3de11280" providerId="ADAL" clId="{09330963-85FD-4C99-A81B-94D0EE5CFFEB}" dt="2026-05-15T17:38:03.548" v="68"/>
           <ac:cxnSpMkLst>
             <pc:docMk/>
             <pc:sldMk cId="1501170907" sldId="256"/>
-            <ac:cxnSpMk id="185" creationId="{45DDE841-DDA8-50C0-DF84-DFEAD66D212E}"/>
+            <ac:cxnSpMk id="202" creationId="{6068E695-E0BB-E28B-EF87-87ABC5139559}"/>
           </ac:cxnSpMkLst>
         </pc:cxnChg>
         <pc:cxnChg chg="mod">
-          <ac:chgData name="York, George W CIV USAF USAFA DF/DFEC" userId="1fb5875a-4594-4db2-80fb-f0db3de11280" providerId="ADAL" clId="{09330963-85FD-4C99-A81B-94D0EE5CFFEB}" dt="2026-05-08T20:03:58.453" v="162" actId="14100"/>
+          <ac:chgData name="York, George W CIV USAF USAFA DF/DFEC" userId="1fb5875a-4594-4db2-80fb-f0db3de11280" providerId="ADAL" clId="{09330963-85FD-4C99-A81B-94D0EE5CFFEB}" dt="2026-05-15T17:38:03.548" v="68"/>
           <ac:cxnSpMkLst>
             <pc:docMk/>
             <pc:sldMk cId="1501170907" sldId="256"/>
-            <ac:cxnSpMk id="186" creationId="{1BF847ED-3744-0969-7E11-0755B86A5CDF}"/>
+            <ac:cxnSpMk id="203" creationId="{CD0FC662-7CD4-7DE8-354A-3E3D18B08578}"/>
           </ac:cxnSpMkLst>
         </pc:cxnChg>
-        <pc:cxnChg chg="del">
-          <ac:chgData name="York, George W CIV USAF USAFA DF/DFEC" userId="1fb5875a-4594-4db2-80fb-f0db3de11280" providerId="ADAL" clId="{09330963-85FD-4C99-A81B-94D0EE5CFFEB}" dt="2026-05-08T17:35:05.116" v="108" actId="478"/>
+        <pc:cxnChg chg="mod">
+          <ac:chgData name="York, George W CIV USAF USAFA DF/DFEC" userId="1fb5875a-4594-4db2-80fb-f0db3de11280" providerId="ADAL" clId="{09330963-85FD-4C99-A81B-94D0EE5CFFEB}" dt="2026-05-15T17:38:03.548" v="68"/>
           <ac:cxnSpMkLst>
             <pc:docMk/>
             <pc:sldMk cId="1501170907" sldId="256"/>
-            <ac:cxnSpMk id="196" creationId="{C4DF3196-3785-A9E7-1F1B-2A6EE6375854}"/>
+            <ac:cxnSpMk id="204" creationId="{0CBDD2D2-67F4-0F2D-E3FD-44A8CCE8F997}"/>
           </ac:cxnSpMkLst>
         </pc:cxnChg>
         <pc:cxnChg chg="mod">
-          <ac:chgData name="York, George W CIV USAF USAFA DF/DFEC" userId="1fb5875a-4594-4db2-80fb-f0db3de11280" providerId="ADAL" clId="{09330963-85FD-4C99-A81B-94D0EE5CFFEB}" dt="2026-05-08T17:36:14.685" v="114" actId="1076"/>
+          <ac:chgData name="York, George W CIV USAF USAFA DF/DFEC" userId="1fb5875a-4594-4db2-80fb-f0db3de11280" providerId="ADAL" clId="{09330963-85FD-4C99-A81B-94D0EE5CFFEB}" dt="2026-05-15T17:38:03.548" v="68"/>
           <ac:cxnSpMkLst>
             <pc:docMk/>
             <pc:sldMk cId="1501170907" sldId="256"/>
-            <ac:cxnSpMk id="199" creationId="{DD9CD45F-603E-9C8E-1E43-C8A5BE41D6EE}"/>
+            <ac:cxnSpMk id="205" creationId="{509D907A-99A8-6011-FBD7-5B45EE2CA8F0}"/>
+          </ac:cxnSpMkLst>
+        </pc:cxnChg>
+        <pc:cxnChg chg="add del mod">
+          <ac:chgData name="York, George W CIV USAF USAFA DF/DFEC" userId="1fb5875a-4594-4db2-80fb-f0db3de11280" providerId="ADAL" clId="{09330963-85FD-4C99-A81B-94D0EE5CFFEB}" dt="2026-05-15T18:14:24.734" v="210" actId="478"/>
+          <ac:cxnSpMkLst>
+            <pc:docMk/>
+            <pc:sldMk cId="1501170907" sldId="256"/>
+            <ac:cxnSpMk id="206" creationId="{FCE80188-819F-A95A-5F23-0B32D1A0D6FF}"/>
+          </ac:cxnSpMkLst>
+        </pc:cxnChg>
+        <pc:cxnChg chg="add del mod">
+          <ac:chgData name="York, George W CIV USAF USAFA DF/DFEC" userId="1fb5875a-4594-4db2-80fb-f0db3de11280" providerId="ADAL" clId="{09330963-85FD-4C99-A81B-94D0EE5CFFEB}" dt="2026-05-15T18:14:24.734" v="210" actId="478"/>
+          <ac:cxnSpMkLst>
+            <pc:docMk/>
+            <pc:sldMk cId="1501170907" sldId="256"/>
+            <ac:cxnSpMk id="207" creationId="{20B40552-429B-E71C-10AC-F9080C8B7EAA}"/>
           </ac:cxnSpMkLst>
         </pc:cxnChg>
         <pc:cxnChg chg="mod">
-          <ac:chgData name="York, George W CIV USAF USAFA DF/DFEC" userId="1fb5875a-4594-4db2-80fb-f0db3de11280" providerId="ADAL" clId="{09330963-85FD-4C99-A81B-94D0EE5CFFEB}" dt="2026-05-08T17:39:22.939" v="137" actId="208"/>
+          <ac:chgData name="York, George W CIV USAF USAFA DF/DFEC" userId="1fb5875a-4594-4db2-80fb-f0db3de11280" providerId="ADAL" clId="{09330963-85FD-4C99-A81B-94D0EE5CFFEB}" dt="2026-05-15T17:38:19.752" v="73"/>
           <ac:cxnSpMkLst>
             <pc:docMk/>
             <pc:sldMk cId="1501170907" sldId="256"/>
-            <ac:cxnSpMk id="201" creationId="{83A0DF4B-DC05-17D1-759D-39EFC1DE02DF}"/>
+            <ac:cxnSpMk id="211" creationId="{B01C7FCC-764B-4BFE-266A-625D91862153}"/>
           </ac:cxnSpMkLst>
         </pc:cxnChg>
         <pc:cxnChg chg="mod">
-          <ac:chgData name="York, George W CIV USAF USAFA DF/DFEC" userId="1fb5875a-4594-4db2-80fb-f0db3de11280" providerId="ADAL" clId="{09330963-85FD-4C99-A81B-94D0EE5CFFEB}" dt="2026-05-08T17:36:39.023" v="117" actId="208"/>
+          <ac:chgData name="York, George W CIV USAF USAFA DF/DFEC" userId="1fb5875a-4594-4db2-80fb-f0db3de11280" providerId="ADAL" clId="{09330963-85FD-4C99-A81B-94D0EE5CFFEB}" dt="2026-05-15T17:38:19.752" v="73"/>
           <ac:cxnSpMkLst>
             <pc:docMk/>
             <pc:sldMk cId="1501170907" sldId="256"/>
-            <ac:cxnSpMk id="203" creationId="{EE0A7450-E98D-2100-D475-3D6DDD92F800}"/>
+            <ac:cxnSpMk id="212" creationId="{251BDE4E-9609-F1D4-E3AE-1E9A3CA7333E}"/>
           </ac:cxnSpMkLst>
         </pc:cxnChg>
         <pc:cxnChg chg="mod">
-          <ac:chgData name="York, George W CIV USAF USAFA DF/DFEC" userId="1fb5875a-4594-4db2-80fb-f0db3de11280" providerId="ADAL" clId="{09330963-85FD-4C99-A81B-94D0EE5CFFEB}" dt="2026-05-08T17:39:28.055" v="138" actId="208"/>
+          <ac:chgData name="York, George W CIV USAF USAFA DF/DFEC" userId="1fb5875a-4594-4db2-80fb-f0db3de11280" providerId="ADAL" clId="{09330963-85FD-4C99-A81B-94D0EE5CFFEB}" dt="2026-05-15T17:38:19.752" v="73"/>
           <ac:cxnSpMkLst>
             <pc:docMk/>
             <pc:sldMk cId="1501170907" sldId="256"/>
-            <ac:cxnSpMk id="206" creationId="{21A460EE-EB70-C945-9EB0-A42BA9B94C3F}"/>
+            <ac:cxnSpMk id="213" creationId="{B4679140-8BC6-28A2-658C-FE950630BBCC}"/>
           </ac:cxnSpMkLst>
         </pc:cxnChg>
         <pc:cxnChg chg="mod">
-          <ac:chgData name="York, George W CIV USAF USAFA DF/DFEC" userId="1fb5875a-4594-4db2-80fb-f0db3de11280" providerId="ADAL" clId="{09330963-85FD-4C99-A81B-94D0EE5CFFEB}" dt="2026-04-10T18:23:32.536" v="69" actId="1076"/>
+          <ac:chgData name="York, George W CIV USAF USAFA DF/DFEC" userId="1fb5875a-4594-4db2-80fb-f0db3de11280" providerId="ADAL" clId="{09330963-85FD-4C99-A81B-94D0EE5CFFEB}" dt="2026-05-15T17:38:19.752" v="73"/>
           <ac:cxnSpMkLst>
             <pc:docMk/>
             <pc:sldMk cId="1501170907" sldId="256"/>
-            <ac:cxnSpMk id="223" creationId="{320A29EB-ABD9-7A97-166B-5F32289CDE2A}"/>
+            <ac:cxnSpMk id="215" creationId="{BD71E220-2C5B-A748-07B8-42C7C9DF0E37}"/>
+          </ac:cxnSpMkLst>
+        </pc:cxnChg>
+        <pc:cxnChg chg="add mod">
+          <ac:chgData name="York, George W CIV USAF USAFA DF/DFEC" userId="1fb5875a-4594-4db2-80fb-f0db3de11280" providerId="ADAL" clId="{09330963-85FD-4C99-A81B-94D0EE5CFFEB}" dt="2026-05-15T17:38:19.752" v="73"/>
+          <ac:cxnSpMkLst>
+            <pc:docMk/>
+            <pc:sldMk cId="1501170907" sldId="256"/>
+            <ac:cxnSpMk id="217" creationId="{F5E041C4-DA7F-61B4-615C-DEA85E2192FF}"/>
+          </ac:cxnSpMkLst>
+        </pc:cxnChg>
+        <pc:cxnChg chg="add mod">
+          <ac:chgData name="York, George W CIV USAF USAFA DF/DFEC" userId="1fb5875a-4594-4db2-80fb-f0db3de11280" providerId="ADAL" clId="{09330963-85FD-4C99-A81B-94D0EE5CFFEB}" dt="2026-05-15T17:38:19.752" v="73"/>
+          <ac:cxnSpMkLst>
+            <pc:docMk/>
+            <pc:sldMk cId="1501170907" sldId="256"/>
+            <ac:cxnSpMk id="218" creationId="{2DE3D67D-03DB-1C90-FDA6-10C723DC1031}"/>
+          </ac:cxnSpMkLst>
+        </pc:cxnChg>
+        <pc:cxnChg chg="add del mod">
+          <ac:chgData name="York, George W CIV USAF USAFA DF/DFEC" userId="1fb5875a-4594-4db2-80fb-f0db3de11280" providerId="ADAL" clId="{09330963-85FD-4C99-A81B-94D0EE5CFFEB}" dt="2026-05-15T17:57:05.617" v="148" actId="21"/>
+          <ac:cxnSpMkLst>
+            <pc:docMk/>
+            <pc:sldMk cId="1501170907" sldId="256"/>
+            <ac:cxnSpMk id="220" creationId="{B5D2A21B-C882-4B66-E567-0F64E21350DC}"/>
+          </ac:cxnSpMkLst>
+        </pc:cxnChg>
+        <pc:cxnChg chg="add del mod">
+          <ac:chgData name="York, George W CIV USAF USAFA DF/DFEC" userId="1fb5875a-4594-4db2-80fb-f0db3de11280" providerId="ADAL" clId="{09330963-85FD-4C99-A81B-94D0EE5CFFEB}" dt="2026-05-15T18:07:47.867" v="193" actId="478"/>
+          <ac:cxnSpMkLst>
+            <pc:docMk/>
+            <pc:sldMk cId="1501170907" sldId="256"/>
+            <ac:cxnSpMk id="224" creationId="{AF74107D-B166-C48E-799A-A8B307649AFE}"/>
+          </ac:cxnSpMkLst>
+        </pc:cxnChg>
+        <pc:cxnChg chg="add del mod">
+          <ac:chgData name="York, George W CIV USAF USAFA DF/DFEC" userId="1fb5875a-4594-4db2-80fb-f0db3de11280" providerId="ADAL" clId="{09330963-85FD-4C99-A81B-94D0EE5CFFEB}" dt="2026-05-15T18:07:47.098" v="192" actId="478"/>
+          <ac:cxnSpMkLst>
+            <pc:docMk/>
+            <pc:sldMk cId="1501170907" sldId="256"/>
+            <ac:cxnSpMk id="226" creationId="{1336573F-9C61-7461-A883-EB4902A6AEDD}"/>
+          </ac:cxnSpMkLst>
+        </pc:cxnChg>
+        <pc:cxnChg chg="add del mod">
+          <ac:chgData name="York, George W CIV USAF USAFA DF/DFEC" userId="1fb5875a-4594-4db2-80fb-f0db3de11280" providerId="ADAL" clId="{09330963-85FD-4C99-A81B-94D0EE5CFFEB}" dt="2026-05-15T18:07:38.176" v="188" actId="478"/>
+          <ac:cxnSpMkLst>
+            <pc:docMk/>
+            <pc:sldMk cId="1501170907" sldId="256"/>
+            <ac:cxnSpMk id="233" creationId="{64281CED-BA5F-BF89-C48A-403EF07E9E49}"/>
+          </ac:cxnSpMkLst>
+        </pc:cxnChg>
+        <pc:cxnChg chg="add mod">
+          <ac:chgData name="York, George W CIV USAF USAFA DF/DFEC" userId="1fb5875a-4594-4db2-80fb-f0db3de11280" providerId="ADAL" clId="{09330963-85FD-4C99-A81B-94D0EE5CFFEB}" dt="2026-05-15T18:14:06.290" v="206" actId="14100"/>
+          <ac:cxnSpMkLst>
+            <pc:docMk/>
+            <pc:sldMk cId="1501170907" sldId="256"/>
+            <ac:cxnSpMk id="237" creationId="{3C56AE84-4241-3D64-52E3-630A1A95C92D}"/>
+          </ac:cxnSpMkLst>
+        </pc:cxnChg>
+        <pc:cxnChg chg="add mod">
+          <ac:chgData name="York, George W CIV USAF USAFA DF/DFEC" userId="1fb5875a-4594-4db2-80fb-f0db3de11280" providerId="ADAL" clId="{09330963-85FD-4C99-A81B-94D0EE5CFFEB}" dt="2026-05-15T18:13:33.849" v="200" actId="14100"/>
+          <ac:cxnSpMkLst>
+            <pc:docMk/>
+            <pc:sldMk cId="1501170907" sldId="256"/>
+            <ac:cxnSpMk id="245" creationId="{845DB4F8-12AC-939D-C612-4647A063D1B8}"/>
+          </ac:cxnSpMkLst>
+        </pc:cxnChg>
+        <pc:cxnChg chg="add mod">
+          <ac:chgData name="York, George W CIV USAF USAFA DF/DFEC" userId="1fb5875a-4594-4db2-80fb-f0db3de11280" providerId="ADAL" clId="{09330963-85FD-4C99-A81B-94D0EE5CFFEB}" dt="2026-05-15T18:03:28.147" v="168" actId="1076"/>
+          <ac:cxnSpMkLst>
+            <pc:docMk/>
+            <pc:sldMk cId="1501170907" sldId="256"/>
+            <ac:cxnSpMk id="253" creationId="{8DE2A8EF-93C3-8D69-D4D5-8D0F0A1AEAB4}"/>
+          </ac:cxnSpMkLst>
+        </pc:cxnChg>
+        <pc:cxnChg chg="add del mod">
+          <ac:chgData name="York, George W CIV USAF USAFA DF/DFEC" userId="1fb5875a-4594-4db2-80fb-f0db3de11280" providerId="ADAL" clId="{09330963-85FD-4C99-A81B-94D0EE5CFFEB}" dt="2026-05-15T18:07:36.598" v="187" actId="478"/>
+          <ac:cxnSpMkLst>
+            <pc:docMk/>
+            <pc:sldMk cId="1501170907" sldId="256"/>
+            <ac:cxnSpMk id="267" creationId="{9D6D2354-CCB6-A2FE-DCAB-D85E72F28FAC}"/>
+          </ac:cxnSpMkLst>
+        </pc:cxnChg>
+        <pc:cxnChg chg="add del mod">
+          <ac:chgData name="York, George W CIV USAF USAFA DF/DFEC" userId="1fb5875a-4594-4db2-80fb-f0db3de11280" providerId="ADAL" clId="{09330963-85FD-4C99-A81B-94D0EE5CFFEB}" dt="2026-05-15T18:07:59.715" v="195" actId="478"/>
+          <ac:cxnSpMkLst>
+            <pc:docMk/>
+            <pc:sldMk cId="1501170907" sldId="256"/>
+            <ac:cxnSpMk id="268" creationId="{BDEEC4FE-63B9-DED6-BCBC-1E1EFE380E80}"/>
+          </ac:cxnSpMkLst>
+        </pc:cxnChg>
+        <pc:cxnChg chg="add del mod">
+          <ac:chgData name="York, George W CIV USAF USAFA DF/DFEC" userId="1fb5875a-4594-4db2-80fb-f0db3de11280" providerId="ADAL" clId="{09330963-85FD-4C99-A81B-94D0EE5CFFEB}" dt="2026-05-15T18:07:59.715" v="195" actId="478"/>
+          <ac:cxnSpMkLst>
+            <pc:docMk/>
+            <pc:sldMk cId="1501170907" sldId="256"/>
+            <ac:cxnSpMk id="269" creationId="{E4FE0727-9705-D6E9-80B5-EDBB060A36BB}"/>
+          </ac:cxnSpMkLst>
+        </pc:cxnChg>
+        <pc:cxnChg chg="add mod">
+          <ac:chgData name="York, George W CIV USAF USAFA DF/DFEC" userId="1fb5875a-4594-4db2-80fb-f0db3de11280" providerId="ADAL" clId="{09330963-85FD-4C99-A81B-94D0EE5CFFEB}" dt="2026-05-15T17:55:39.596" v="136" actId="1076"/>
+          <ac:cxnSpMkLst>
+            <pc:docMk/>
+            <pc:sldMk cId="1501170907" sldId="256"/>
+            <ac:cxnSpMk id="275" creationId="{C8E68A82-E671-20D8-C7E8-C451319C17B6}"/>
+          </ac:cxnSpMkLst>
+        </pc:cxnChg>
+        <pc:cxnChg chg="add mod">
+          <ac:chgData name="York, George W CIV USAF USAFA DF/DFEC" userId="1fb5875a-4594-4db2-80fb-f0db3de11280" providerId="ADAL" clId="{09330963-85FD-4C99-A81B-94D0EE5CFFEB}" dt="2026-05-15T18:02:19.203" v="162" actId="14100"/>
+          <ac:cxnSpMkLst>
+            <pc:docMk/>
+            <pc:sldMk cId="1501170907" sldId="256"/>
+            <ac:cxnSpMk id="278" creationId="{8A86DDC6-7EF2-A55E-86AB-B039F1025AA6}"/>
+          </ac:cxnSpMkLst>
+        </pc:cxnChg>
+        <pc:cxnChg chg="add mod">
+          <ac:chgData name="York, George W CIV USAF USAFA DF/DFEC" userId="1fb5875a-4594-4db2-80fb-f0db3de11280" providerId="ADAL" clId="{09330963-85FD-4C99-A81B-94D0EE5CFFEB}" dt="2026-05-15T18:02:11.980" v="160" actId="14100"/>
+          <ac:cxnSpMkLst>
+            <pc:docMk/>
+            <pc:sldMk cId="1501170907" sldId="256"/>
+            <ac:cxnSpMk id="279" creationId="{38160B21-10CC-284C-A2F1-5C49CB784B92}"/>
+          </ac:cxnSpMkLst>
+        </pc:cxnChg>
+        <pc:cxnChg chg="add mod">
+          <ac:chgData name="York, George W CIV USAF USAFA DF/DFEC" userId="1fb5875a-4594-4db2-80fb-f0db3de11280" providerId="ADAL" clId="{09330963-85FD-4C99-A81B-94D0EE5CFFEB}" dt="2026-05-15T18:02:14.244" v="161" actId="1076"/>
+          <ac:cxnSpMkLst>
+            <pc:docMk/>
+            <pc:sldMk cId="1501170907" sldId="256"/>
+            <ac:cxnSpMk id="280" creationId="{D21F7DE8-8DE2-3F34-AA30-18DFD0771516}"/>
+          </ac:cxnSpMkLst>
+        </pc:cxnChg>
+        <pc:cxnChg chg="add del mod">
+          <ac:chgData name="York, George W CIV USAF USAFA DF/DFEC" userId="1fb5875a-4594-4db2-80fb-f0db3de11280" providerId="ADAL" clId="{09330963-85FD-4C99-A81B-94D0EE5CFFEB}" dt="2026-05-15T18:02:46.155" v="166" actId="478"/>
+          <ac:cxnSpMkLst>
+            <pc:docMk/>
+            <pc:sldMk cId="1501170907" sldId="256"/>
+            <ac:cxnSpMk id="281" creationId="{BAA28F89-5397-7FDB-DB5D-09ACAC9864DD}"/>
+          </ac:cxnSpMkLst>
+        </pc:cxnChg>
+        <pc:cxnChg chg="add mod">
+          <ac:chgData name="York, George W CIV USAF USAFA DF/DFEC" userId="1fb5875a-4594-4db2-80fb-f0db3de11280" providerId="ADAL" clId="{09330963-85FD-4C99-A81B-94D0EE5CFFEB}" dt="2026-05-15T18:05:09.803" v="185" actId="14100"/>
+          <ac:cxnSpMkLst>
+            <pc:docMk/>
+            <pc:sldMk cId="1501170907" sldId="256"/>
+            <ac:cxnSpMk id="282" creationId="{E1949B8D-D95F-E3DB-3679-7809008035CE}"/>
+          </ac:cxnSpMkLst>
+        </pc:cxnChg>
+        <pc:cxnChg chg="add mod">
+          <ac:chgData name="York, George W CIV USAF USAFA DF/DFEC" userId="1fb5875a-4594-4db2-80fb-f0db3de11280" providerId="ADAL" clId="{09330963-85FD-4C99-A81B-94D0EE5CFFEB}" dt="2026-05-15T17:56:01.710" v="144" actId="14100"/>
+          <ac:cxnSpMkLst>
+            <pc:docMk/>
+            <pc:sldMk cId="1501170907" sldId="256"/>
+            <ac:cxnSpMk id="283" creationId="{827174C5-C75B-B7CE-F88C-681B3E175F52}"/>
+          </ac:cxnSpMkLst>
+        </pc:cxnChg>
+        <pc:cxnChg chg="add mod">
+          <ac:chgData name="York, George W CIV USAF USAFA DF/DFEC" userId="1fb5875a-4594-4db2-80fb-f0db3de11280" providerId="ADAL" clId="{09330963-85FD-4C99-A81B-94D0EE5CFFEB}" dt="2026-05-15T17:55:58.460" v="143" actId="1076"/>
+          <ac:cxnSpMkLst>
+            <pc:docMk/>
+            <pc:sldMk cId="1501170907" sldId="256"/>
+            <ac:cxnSpMk id="284" creationId="{00D33967-F281-4A62-4121-E5FA3DAFA269}"/>
           </ac:cxnSpMkLst>
         </pc:cxnChg>
         <pc:cxnChg chg="mod">
-          <ac:chgData name="York, George W CIV USAF USAFA DF/DFEC" userId="1fb5875a-4594-4db2-80fb-f0db3de11280" providerId="ADAL" clId="{09330963-85FD-4C99-A81B-94D0EE5CFFEB}" dt="2026-05-08T20:03:45.373" v="160" actId="14100"/>
-          <ac:cxnSpMkLst>
-            <pc:docMk/>
-            <pc:sldMk cId="1501170907" sldId="256"/>
-            <ac:cxnSpMk id="240" creationId="{32C8C4D0-BC6B-C139-3FF5-F9792E04E4A1}"/>
-          </ac:cxnSpMkLst>
-        </pc:cxnChg>
-        <pc:cxnChg chg="mod">
-          <ac:chgData name="York, George W CIV USAF USAFA DF/DFEC" userId="1fb5875a-4594-4db2-80fb-f0db3de11280" providerId="ADAL" clId="{09330963-85FD-4C99-A81B-94D0EE5CFFEB}" dt="2026-05-08T17:37:15.120" v="123" actId="1076"/>
+          <ac:chgData name="York, George W CIV USAF USAFA DF/DFEC" userId="1fb5875a-4594-4db2-80fb-f0db3de11280" providerId="ADAL" clId="{09330963-85FD-4C99-A81B-94D0EE5CFFEB}" dt="2026-05-15T17:45:00.657" v="111" actId="14100"/>
           <ac:cxnSpMkLst>
             <pc:docMk/>
             <pc:sldMk cId="1501170907" sldId="256"/>
             <ac:cxnSpMk id="286" creationId="{B760AF97-E733-241D-903A-11456E3E2363}"/>
           </ac:cxnSpMkLst>
         </pc:cxnChg>
-        <pc:cxnChg chg="mod">
-          <ac:chgData name="York, George W CIV USAF USAFA DF/DFEC" userId="1fb5875a-4594-4db2-80fb-f0db3de11280" providerId="ADAL" clId="{09330963-85FD-4C99-A81B-94D0EE5CFFEB}" dt="2026-05-08T17:37:53.271" v="130" actId="14100"/>
+        <pc:cxnChg chg="add mod">
+          <ac:chgData name="York, George W CIV USAF USAFA DF/DFEC" userId="1fb5875a-4594-4db2-80fb-f0db3de11280" providerId="ADAL" clId="{09330963-85FD-4C99-A81B-94D0EE5CFFEB}" dt="2026-05-15T17:57:53.444" v="158" actId="1076"/>
           <ac:cxnSpMkLst>
             <pc:docMk/>
             <pc:sldMk cId="1501170907" sldId="256"/>
-            <ac:cxnSpMk id="288" creationId="{FBC20363-C806-EF5C-EF5B-FA8F14D0B2F9}"/>
+            <ac:cxnSpMk id="289" creationId="{B5D2A21B-C882-4B66-E567-0F64E21350DC}"/>
+          </ac:cxnSpMkLst>
+        </pc:cxnChg>
+        <pc:cxnChg chg="add mod">
+          <ac:chgData name="York, George W CIV USAF USAFA DF/DFEC" userId="1fb5875a-4594-4db2-80fb-f0db3de11280" providerId="ADAL" clId="{09330963-85FD-4C99-A81B-94D0EE5CFFEB}" dt="2026-05-15T18:02:40.245" v="165" actId="14100"/>
+          <ac:cxnSpMkLst>
+            <pc:docMk/>
+            <pc:sldMk cId="1501170907" sldId="256"/>
+            <ac:cxnSpMk id="298" creationId="{70483936-966F-CBD5-A492-4864BA70A64C}"/>
+          </ac:cxnSpMkLst>
+        </pc:cxnChg>
+        <pc:cxnChg chg="add mod">
+          <ac:chgData name="York, George W CIV USAF USAFA DF/DFEC" userId="1fb5875a-4594-4db2-80fb-f0db3de11280" providerId="ADAL" clId="{09330963-85FD-4C99-A81B-94D0EE5CFFEB}" dt="2026-05-15T18:05:03.794" v="184" actId="14100"/>
+          <ac:cxnSpMkLst>
+            <pc:docMk/>
+            <pc:sldMk cId="1501170907" sldId="256"/>
+            <ac:cxnSpMk id="305" creationId="{1BF4F819-5D45-397F-4F03-C345534984AB}"/>
+          </ac:cxnSpMkLst>
+        </pc:cxnChg>
+        <pc:cxnChg chg="add mod">
+          <ac:chgData name="York, George W CIV USAF USAFA DF/DFEC" userId="1fb5875a-4594-4db2-80fb-f0db3de11280" providerId="ADAL" clId="{09330963-85FD-4C99-A81B-94D0EE5CFFEB}" dt="2026-05-15T18:04:48.716" v="181" actId="1076"/>
+          <ac:cxnSpMkLst>
+            <pc:docMk/>
+            <pc:sldMk cId="1501170907" sldId="256"/>
+            <ac:cxnSpMk id="315" creationId="{811CAF9B-8464-18B3-80C0-E239A4B4AE56}"/>
           </ac:cxnSpMkLst>
         </pc:cxnChg>
         <pc:cxnChg chg="mod">
-          <ac:chgData name="York, George W CIV USAF USAFA DF/DFEC" userId="1fb5875a-4594-4db2-80fb-f0db3de11280" providerId="ADAL" clId="{09330963-85FD-4C99-A81B-94D0EE5CFFEB}" dt="2026-05-08T20:03:50.588" v="161" actId="14100"/>
+          <ac:chgData name="York, George W CIV USAF USAFA DF/DFEC" userId="1fb5875a-4594-4db2-80fb-f0db3de11280" providerId="ADAL" clId="{09330963-85FD-4C99-A81B-94D0EE5CFFEB}" dt="2026-05-15T18:06:03.699" v="186" actId="14100"/>
           <ac:cxnSpMkLst>
             <pc:docMk/>
             <pc:sldMk cId="1501170907" sldId="256"/>
-            <ac:cxnSpMk id="303" creationId="{CFAE5DC6-8CF9-2673-71C9-AFA4E7997F1B}"/>
+            <ac:cxnSpMk id="322" creationId="{F580A49F-8130-DF36-2C61-65CEF9F171E8}"/>
+          </ac:cxnSpMkLst>
+        </pc:cxnChg>
+        <pc:cxnChg chg="add mod">
+          <ac:chgData name="York, George W CIV USAF USAFA DF/DFEC" userId="1fb5875a-4594-4db2-80fb-f0db3de11280" providerId="ADAL" clId="{09330963-85FD-4C99-A81B-94D0EE5CFFEB}" dt="2026-05-15T18:08:12.923" v="198" actId="1076"/>
+          <ac:cxnSpMkLst>
+            <pc:docMk/>
+            <pc:sldMk cId="1501170907" sldId="256"/>
+            <ac:cxnSpMk id="323" creationId="{E1345829-1330-B15F-1690-B34F82C9E175}"/>
+          </ac:cxnSpMkLst>
+        </pc:cxnChg>
+        <pc:cxnChg chg="add mod">
+          <ac:chgData name="York, George W CIV USAF USAFA DF/DFEC" userId="1fb5875a-4594-4db2-80fb-f0db3de11280" providerId="ADAL" clId="{09330963-85FD-4C99-A81B-94D0EE5CFFEB}" dt="2026-05-15T18:13:57.177" v="204" actId="14100"/>
+          <ac:cxnSpMkLst>
+            <pc:docMk/>
+            <pc:sldMk cId="1501170907" sldId="256"/>
+            <ac:cxnSpMk id="327" creationId="{CBA50DB1-68B5-3972-ACFE-BC8B4F1AC08C}"/>
+          </ac:cxnSpMkLst>
+        </pc:cxnChg>
+        <pc:cxnChg chg="add mod">
+          <ac:chgData name="York, George W CIV USAF USAFA DF/DFEC" userId="1fb5875a-4594-4db2-80fb-f0db3de11280" providerId="ADAL" clId="{09330963-85FD-4C99-A81B-94D0EE5CFFEB}" dt="2026-05-15T18:14:21.137" v="209" actId="14100"/>
+          <ac:cxnSpMkLst>
+            <pc:docMk/>
+            <pc:sldMk cId="1501170907" sldId="256"/>
+            <ac:cxnSpMk id="333" creationId="{691D3FA7-C286-87B3-AA1E-062BB45C1EAA}"/>
           </ac:cxnSpMkLst>
         </pc:cxnChg>
       </pc:sldChg>
@@ -912,7 +1128,7 @@
           <a:p>
             <a:fld id="{51AFF834-1BEC-4F95-9622-28B5DCC1FE16}" type="datetimeFigureOut">
               <a:rPr lang="en-US" smtClean="0"/>
-              <a:t>5/8/2026</a:t>
+              <a:t>5/15/2026</a:t>
             </a:fld>
             <a:endParaRPr lang="en-US"/>
           </a:p>
@@ -1110,7 +1326,7 @@
           <a:p>
             <a:fld id="{51AFF834-1BEC-4F95-9622-28B5DCC1FE16}" type="datetimeFigureOut">
               <a:rPr lang="en-US" smtClean="0"/>
-              <a:t>5/8/2026</a:t>
+              <a:t>5/15/2026</a:t>
             </a:fld>
             <a:endParaRPr lang="en-US"/>
           </a:p>
@@ -1318,7 +1534,7 @@
           <a:p>
             <a:fld id="{51AFF834-1BEC-4F95-9622-28B5DCC1FE16}" type="datetimeFigureOut">
               <a:rPr lang="en-US" smtClean="0"/>
-              <a:t>5/8/2026</a:t>
+              <a:t>5/15/2026</a:t>
             </a:fld>
             <a:endParaRPr lang="en-US"/>
           </a:p>
@@ -1516,7 +1732,7 @@
           <a:p>
             <a:fld id="{51AFF834-1BEC-4F95-9622-28B5DCC1FE16}" type="datetimeFigureOut">
               <a:rPr lang="en-US" smtClean="0"/>
-              <a:t>5/8/2026</a:t>
+              <a:t>5/15/2026</a:t>
             </a:fld>
             <a:endParaRPr lang="en-US"/>
           </a:p>
@@ -1791,7 +2007,7 @@
           <a:p>
             <a:fld id="{51AFF834-1BEC-4F95-9622-28B5DCC1FE16}" type="datetimeFigureOut">
               <a:rPr lang="en-US" smtClean="0"/>
-              <a:t>5/8/2026</a:t>
+              <a:t>5/15/2026</a:t>
             </a:fld>
             <a:endParaRPr lang="en-US"/>
           </a:p>
@@ -2056,7 +2272,7 @@
           <a:p>
             <a:fld id="{51AFF834-1BEC-4F95-9622-28B5DCC1FE16}" type="datetimeFigureOut">
               <a:rPr lang="en-US" smtClean="0"/>
-              <a:t>5/8/2026</a:t>
+              <a:t>5/15/2026</a:t>
             </a:fld>
             <a:endParaRPr lang="en-US"/>
           </a:p>
@@ -2468,7 +2684,7 @@
           <a:p>
             <a:fld id="{51AFF834-1BEC-4F95-9622-28B5DCC1FE16}" type="datetimeFigureOut">
               <a:rPr lang="en-US" smtClean="0"/>
-              <a:t>5/8/2026</a:t>
+              <a:t>5/15/2026</a:t>
             </a:fld>
             <a:endParaRPr lang="en-US"/>
           </a:p>
@@ -2609,7 +2825,7 @@
           <a:p>
             <a:fld id="{51AFF834-1BEC-4F95-9622-28B5DCC1FE16}" type="datetimeFigureOut">
               <a:rPr lang="en-US" smtClean="0"/>
-              <a:t>5/8/2026</a:t>
+              <a:t>5/15/2026</a:t>
             </a:fld>
             <a:endParaRPr lang="en-US"/>
           </a:p>
@@ -2722,7 +2938,7 @@
           <a:p>
             <a:fld id="{51AFF834-1BEC-4F95-9622-28B5DCC1FE16}" type="datetimeFigureOut">
               <a:rPr lang="en-US" smtClean="0"/>
-              <a:t>5/8/2026</a:t>
+              <a:t>5/15/2026</a:t>
             </a:fld>
             <a:endParaRPr lang="en-US"/>
           </a:p>
@@ -3033,7 +3249,7 @@
           <a:p>
             <a:fld id="{51AFF834-1BEC-4F95-9622-28B5DCC1FE16}" type="datetimeFigureOut">
               <a:rPr lang="en-US" smtClean="0"/>
-              <a:t>5/8/2026</a:t>
+              <a:t>5/15/2026</a:t>
             </a:fld>
             <a:endParaRPr lang="en-US"/>
           </a:p>
@@ -3321,7 +3537,7 @@
           <a:p>
             <a:fld id="{51AFF834-1BEC-4F95-9622-28B5DCC1FE16}" type="datetimeFigureOut">
               <a:rPr lang="en-US" smtClean="0"/>
-              <a:t>5/8/2026</a:t>
+              <a:t>5/15/2026</a:t>
             </a:fld>
             <a:endParaRPr lang="en-US"/>
           </a:p>
@@ -3562,7 +3778,7 @@
           <a:p>
             <a:fld id="{51AFF834-1BEC-4F95-9622-28B5DCC1FE16}" type="datetimeFigureOut">
               <a:rPr lang="en-US" smtClean="0"/>
-              <a:t>5/8/2026</a:t>
+              <a:t>5/15/2026</a:t>
             </a:fld>
             <a:endParaRPr lang="en-US"/>
           </a:p>
@@ -4088,7 +4304,7 @@
         </p:nvSpPr>
         <p:spPr>
           <a:xfrm>
-            <a:off x="526679" y="566943"/>
+            <a:off x="389615" y="591970"/>
             <a:ext cx="1556452" cy="276999"/>
           </a:xfrm>
           <a:prstGeom prst="rect">
@@ -4123,7 +4339,7 @@
         </p:nvSpPr>
         <p:spPr>
           <a:xfrm>
-            <a:off x="3072930" y="623773"/>
+            <a:off x="3072930" y="498888"/>
             <a:ext cx="1814023" cy="461665"/>
           </a:xfrm>
           <a:prstGeom prst="rect">
@@ -4166,7 +4382,7 @@
         </p:nvSpPr>
         <p:spPr>
           <a:xfrm>
-            <a:off x="5804838" y="607871"/>
+            <a:off x="5804838" y="482986"/>
             <a:ext cx="1090298" cy="461665"/>
           </a:xfrm>
           <a:prstGeom prst="rect">
@@ -4209,7 +4425,7 @@
         </p:nvSpPr>
         <p:spPr>
           <a:xfrm>
-            <a:off x="7813021" y="591969"/>
+            <a:off x="7813021" y="467084"/>
             <a:ext cx="1693797" cy="276999"/>
           </a:xfrm>
           <a:prstGeom prst="rect">
@@ -4245,7 +4461,7 @@
         </p:nvSpPr>
         <p:spPr>
           <a:xfrm>
-            <a:off x="10341685" y="591969"/>
+            <a:off x="10341685" y="467084"/>
             <a:ext cx="1255408" cy="276999"/>
           </a:xfrm>
           <a:prstGeom prst="rect">
@@ -4285,6 +4501,53 @@
           <a:xfrm flipH="1">
             <a:off x="2638258" y="1862975"/>
             <a:ext cx="1327" cy="3053200"/>
+          </a:xfrm>
+          <a:prstGeom prst="line">
+            <a:avLst/>
+          </a:prstGeom>
+          <a:ln>
+            <a:solidFill>
+              <a:schemeClr val="bg1">
+                <a:lumMod val="65000"/>
+              </a:schemeClr>
+            </a:solidFill>
+            <a:prstDash val="dash"/>
+          </a:ln>
+        </p:spPr>
+        <p:style>
+          <a:lnRef idx="2">
+            <a:schemeClr val="accent1"/>
+          </a:lnRef>
+          <a:fillRef idx="0">
+            <a:schemeClr val="accent1"/>
+          </a:fillRef>
+          <a:effectRef idx="1">
+            <a:schemeClr val="accent1"/>
+          </a:effectRef>
+          <a:fontRef idx="minor">
+            <a:schemeClr val="tx1"/>
+          </a:fontRef>
+        </p:style>
+      </p:cxnSp>
+      <p:cxnSp>
+        <p:nvCxnSpPr>
+          <p:cNvPr id="12" name="Straight Connector 11">
+            <a:extLst>
+              <a:ext uri="{FF2B5EF4-FFF2-40B4-BE49-F238E27FC236}">
+                <a16:creationId xmlns:a16="http://schemas.microsoft.com/office/drawing/2014/main" id="{9EC90484-36CB-4907-076A-02E3D3D32D1E}"/>
+              </a:ext>
+            </a:extLst>
+          </p:cNvPr>
+          <p:cNvCxnSpPr>
+            <a:cxnSpLocks/>
+            <a:endCxn id="2" idx="2"/>
+          </p:cNvCxnSpPr>
+          <p:nvPr/>
+        </p:nvCxnSpPr>
+        <p:spPr>
+          <a:xfrm flipH="1">
+            <a:off x="5484942" y="1862975"/>
+            <a:ext cx="21963" cy="3460345"/>
           </a:xfrm>
           <a:prstGeom prst="line">
             <a:avLst/>
@@ -4322,13 +4585,16 @@
               </a:ext>
             </a:extLst>
           </p:cNvPr>
-          <p:cNvCxnSpPr/>
+          <p:cNvCxnSpPr>
+            <a:cxnSpLocks/>
+            <a:endCxn id="3" idx="2"/>
+          </p:cNvCxnSpPr>
           <p:nvPr/>
         </p:nvCxnSpPr>
         <p:spPr>
-          <a:xfrm>
-            <a:off x="7561948" y="1862975"/>
-            <a:ext cx="0" cy="4611757"/>
+          <a:xfrm flipH="1">
+            <a:off x="7556952" y="1862975"/>
+            <a:ext cx="4996" cy="3744877"/>
           </a:xfrm>
           <a:prstGeom prst="line">
             <a:avLst/>
@@ -4366,13 +4632,16 @@
               </a:ext>
             </a:extLst>
           </p:cNvPr>
-          <p:cNvCxnSpPr/>
+          <p:cNvCxnSpPr>
+            <a:cxnSpLocks/>
+            <a:endCxn id="10" idx="2"/>
+          </p:cNvCxnSpPr>
           <p:nvPr/>
         </p:nvCxnSpPr>
         <p:spPr>
-          <a:xfrm>
-            <a:off x="10069478" y="1862975"/>
-            <a:ext cx="0" cy="4611757"/>
+          <a:xfrm flipH="1">
+            <a:off x="10059643" y="1862975"/>
+            <a:ext cx="9835" cy="3744877"/>
           </a:xfrm>
           <a:prstGeom prst="line">
             <a:avLst/>
@@ -5127,15 +5396,13 @@
               </a:ext>
             </a:extLst>
           </p:cNvPr>
-          <p:cNvCxnSpPr>
-            <a:cxnSpLocks/>
-          </p:cNvCxnSpPr>
+          <p:cNvCxnSpPr/>
           <p:nvPr/>
         </p:nvCxnSpPr>
         <p:spPr>
           <a:xfrm>
-            <a:off x="934575" y="2568516"/>
-            <a:ext cx="424834" cy="0"/>
+            <a:off x="1181601" y="2568884"/>
+            <a:ext cx="177808" cy="0"/>
           </a:xfrm>
           <a:prstGeom prst="straightConnector1">
             <a:avLst/>
@@ -5319,6 +5586,42 @@
       </p:cxnSp>
       <p:cxnSp>
         <p:nvCxnSpPr>
+          <p:cNvPr id="62" name="Straight Connector 61">
+            <a:extLst>
+              <a:ext uri="{FF2B5EF4-FFF2-40B4-BE49-F238E27FC236}">
+                <a16:creationId xmlns:a16="http://schemas.microsoft.com/office/drawing/2014/main" id="{88974812-60ED-4172-D124-4A8113D87693}"/>
+              </a:ext>
+            </a:extLst>
+          </p:cNvPr>
+          <p:cNvCxnSpPr/>
+          <p:nvPr/>
+        </p:nvCxnSpPr>
+        <p:spPr>
+          <a:xfrm flipH="1">
+            <a:off x="932949" y="2568884"/>
+            <a:ext cx="248652" cy="0"/>
+          </a:xfrm>
+          <a:prstGeom prst="line">
+            <a:avLst/>
+          </a:prstGeom>
+        </p:spPr>
+        <p:style>
+          <a:lnRef idx="2">
+            <a:schemeClr val="accent1"/>
+          </a:lnRef>
+          <a:fillRef idx="0">
+            <a:schemeClr val="accent1"/>
+          </a:fillRef>
+          <a:effectRef idx="1">
+            <a:schemeClr val="accent1"/>
+          </a:effectRef>
+          <a:fontRef idx="minor">
+            <a:schemeClr val="tx1"/>
+          </a:fontRef>
+        </p:style>
+      </p:cxnSp>
+      <p:cxnSp>
+        <p:nvCxnSpPr>
           <p:cNvPr id="63" name="Straight Arrow Connector 62">
             <a:extLst>
               <a:ext uri="{FF2B5EF4-FFF2-40B4-BE49-F238E27FC236}">
@@ -5722,8 +6025,8 @@
         </p:nvCxnSpPr>
         <p:spPr>
           <a:xfrm>
-            <a:off x="905315" y="4205407"/>
-            <a:ext cx="0" cy="2417053"/>
+            <a:off x="905315" y="4554736"/>
+            <a:ext cx="0" cy="2067724"/>
           </a:xfrm>
           <a:prstGeom prst="line">
             <a:avLst/>
@@ -5761,7 +6064,7 @@
         </p:nvCxnSpPr>
         <p:spPr>
           <a:xfrm>
-            <a:off x="909468" y="4225602"/>
+            <a:off x="905315" y="4546715"/>
             <a:ext cx="1523560" cy="8021"/>
           </a:xfrm>
           <a:prstGeom prst="line">
@@ -5801,7 +6104,7 @@
         <p:spPr>
           <a:xfrm>
             <a:off x="2428875" y="3314775"/>
-            <a:ext cx="0" cy="918848"/>
+            <a:ext cx="0" cy="1239961"/>
           </a:xfrm>
           <a:prstGeom prst="line">
             <a:avLst/>
@@ -7930,8 +8233,8 @@
         </p:nvCxnSpPr>
         <p:spPr>
           <a:xfrm>
-            <a:off x="7851393" y="3040681"/>
-            <a:ext cx="418168" cy="0"/>
+            <a:off x="6794616" y="3040681"/>
+            <a:ext cx="1474945" cy="0"/>
           </a:xfrm>
           <a:prstGeom prst="straightConnector1">
             <a:avLst/>
@@ -7997,6 +8300,179 @@
           </a:fontRef>
         </p:style>
       </p:cxnSp>
+      <p:grpSp>
+        <p:nvGrpSpPr>
+          <p:cNvPr id="247" name="Group 246">
+            <a:extLst>
+              <a:ext uri="{FF2B5EF4-FFF2-40B4-BE49-F238E27FC236}">
+                <a16:creationId xmlns:a16="http://schemas.microsoft.com/office/drawing/2014/main" id="{C53FABC7-DD90-8352-C66A-7DFA23EE2633}"/>
+              </a:ext>
+            </a:extLst>
+          </p:cNvPr>
+          <p:cNvGrpSpPr/>
+          <p:nvPr/>
+        </p:nvGrpSpPr>
+        <p:grpSpPr>
+          <a:xfrm>
+            <a:off x="4742886" y="2070125"/>
+            <a:ext cx="234557" cy="870633"/>
+            <a:chOff x="6175096" y="3854324"/>
+            <a:chExt cx="144932" cy="375881"/>
+          </a:xfrm>
+        </p:grpSpPr>
+        <p:cxnSp>
+          <p:nvCxnSpPr>
+            <p:cNvPr id="248" name="Straight Connector 247">
+              <a:extLst>
+                <a:ext uri="{FF2B5EF4-FFF2-40B4-BE49-F238E27FC236}">
+                  <a16:creationId xmlns:a16="http://schemas.microsoft.com/office/drawing/2014/main" id="{D64F4C90-ABA8-4DDC-5808-F9A278B4E6FD}"/>
+                </a:ext>
+              </a:extLst>
+            </p:cNvPr>
+            <p:cNvCxnSpPr>
+              <a:cxnSpLocks/>
+            </p:cNvCxnSpPr>
+            <p:nvPr/>
+          </p:nvCxnSpPr>
+          <p:spPr>
+            <a:xfrm>
+              <a:off x="6180266" y="3861114"/>
+              <a:ext cx="0" cy="369091"/>
+            </a:xfrm>
+            <a:prstGeom prst="line">
+              <a:avLst/>
+            </a:prstGeom>
+          </p:spPr>
+          <p:style>
+            <a:lnRef idx="2">
+              <a:schemeClr val="accent1"/>
+            </a:lnRef>
+            <a:fillRef idx="0">
+              <a:schemeClr val="accent1"/>
+            </a:fillRef>
+            <a:effectRef idx="1">
+              <a:schemeClr val="accent1"/>
+            </a:effectRef>
+            <a:fontRef idx="minor">
+              <a:schemeClr val="tx1"/>
+            </a:fontRef>
+          </p:style>
+        </p:cxnSp>
+        <p:cxnSp>
+          <p:nvCxnSpPr>
+            <p:cNvPr id="249" name="Straight Connector 248">
+              <a:extLst>
+                <a:ext uri="{FF2B5EF4-FFF2-40B4-BE49-F238E27FC236}">
+                  <a16:creationId xmlns:a16="http://schemas.microsoft.com/office/drawing/2014/main" id="{6FC64163-8C45-5848-AF36-721E2025DF54}"/>
+                </a:ext>
+              </a:extLst>
+            </p:cNvPr>
+            <p:cNvCxnSpPr>
+              <a:cxnSpLocks/>
+            </p:cNvCxnSpPr>
+            <p:nvPr/>
+          </p:nvCxnSpPr>
+          <p:spPr>
+            <a:xfrm>
+              <a:off x="6320028" y="3936909"/>
+              <a:ext cx="0" cy="212558"/>
+            </a:xfrm>
+            <a:prstGeom prst="line">
+              <a:avLst/>
+            </a:prstGeom>
+          </p:spPr>
+          <p:style>
+            <a:lnRef idx="2">
+              <a:schemeClr val="accent1"/>
+            </a:lnRef>
+            <a:fillRef idx="0">
+              <a:schemeClr val="accent1"/>
+            </a:fillRef>
+            <a:effectRef idx="1">
+              <a:schemeClr val="accent1"/>
+            </a:effectRef>
+            <a:fontRef idx="minor">
+              <a:schemeClr val="tx1"/>
+            </a:fontRef>
+          </p:style>
+        </p:cxnSp>
+        <p:cxnSp>
+          <p:nvCxnSpPr>
+            <p:cNvPr id="250" name="Straight Connector 249">
+              <a:extLst>
+                <a:ext uri="{FF2B5EF4-FFF2-40B4-BE49-F238E27FC236}">
+                  <a16:creationId xmlns:a16="http://schemas.microsoft.com/office/drawing/2014/main" id="{3B09081B-A704-2107-897F-12A59ADE3922}"/>
+                </a:ext>
+              </a:extLst>
+            </p:cNvPr>
+            <p:cNvCxnSpPr>
+              <a:cxnSpLocks/>
+            </p:cNvCxnSpPr>
+            <p:nvPr/>
+          </p:nvCxnSpPr>
+          <p:spPr>
+            <a:xfrm flipH="1">
+              <a:off x="6175096" y="4152620"/>
+              <a:ext cx="144932" cy="77585"/>
+            </a:xfrm>
+            <a:prstGeom prst="line">
+              <a:avLst/>
+            </a:prstGeom>
+          </p:spPr>
+          <p:style>
+            <a:lnRef idx="2">
+              <a:schemeClr val="accent1"/>
+            </a:lnRef>
+            <a:fillRef idx="0">
+              <a:schemeClr val="accent1"/>
+            </a:fillRef>
+            <a:effectRef idx="1">
+              <a:schemeClr val="accent1"/>
+            </a:effectRef>
+            <a:fontRef idx="minor">
+              <a:schemeClr val="tx1"/>
+            </a:fontRef>
+          </p:style>
+        </p:cxnSp>
+        <p:cxnSp>
+          <p:nvCxnSpPr>
+            <p:cNvPr id="251" name="Straight Connector 250">
+              <a:extLst>
+                <a:ext uri="{FF2B5EF4-FFF2-40B4-BE49-F238E27FC236}">
+                  <a16:creationId xmlns:a16="http://schemas.microsoft.com/office/drawing/2014/main" id="{465FB0D5-90F0-B240-13F3-D73E3B74C106}"/>
+                </a:ext>
+              </a:extLst>
+            </p:cNvPr>
+            <p:cNvCxnSpPr>
+              <a:cxnSpLocks/>
+            </p:cNvCxnSpPr>
+            <p:nvPr/>
+          </p:nvCxnSpPr>
+          <p:spPr>
+            <a:xfrm flipH="1" flipV="1">
+              <a:off x="6175096" y="3854324"/>
+              <a:ext cx="144932" cy="85738"/>
+            </a:xfrm>
+            <a:prstGeom prst="line">
+              <a:avLst/>
+            </a:prstGeom>
+          </p:spPr>
+          <p:style>
+            <a:lnRef idx="2">
+              <a:schemeClr val="accent1"/>
+            </a:lnRef>
+            <a:fillRef idx="0">
+              <a:schemeClr val="accent1"/>
+            </a:fillRef>
+            <a:effectRef idx="1">
+              <a:schemeClr val="accent1"/>
+            </a:effectRef>
+            <a:fontRef idx="minor">
+              <a:schemeClr val="tx1"/>
+            </a:fontRef>
+          </p:style>
+        </p:cxnSp>
+      </p:grpSp>
       <p:cxnSp>
         <p:nvCxnSpPr>
           <p:cNvPr id="257" name="Straight Connector 256">
@@ -8159,9 +8635,9 @@
           <p:nvPr/>
         </p:nvCxnSpPr>
         <p:spPr>
-          <a:xfrm flipH="1">
-            <a:off x="369634" y="832083"/>
-            <a:ext cx="1884980" cy="0"/>
+          <a:xfrm flipH="1" flipV="1">
+            <a:off x="354682" y="1069536"/>
+            <a:ext cx="4919160" cy="18554"/>
           </a:xfrm>
           <a:prstGeom prst="line">
             <a:avLst/>
@@ -8198,8 +8674,84 @@
         </p:nvCxnSpPr>
         <p:spPr>
           <a:xfrm flipV="1">
-            <a:off x="354682" y="838703"/>
-            <a:ext cx="0" cy="2732403"/>
+            <a:off x="354682" y="1069536"/>
+            <a:ext cx="0" cy="2501570"/>
+          </a:xfrm>
+          <a:prstGeom prst="line">
+            <a:avLst/>
+          </a:prstGeom>
+        </p:spPr>
+        <p:style>
+          <a:lnRef idx="2">
+            <a:schemeClr val="accent1"/>
+          </a:lnRef>
+          <a:fillRef idx="0">
+            <a:schemeClr val="accent1"/>
+          </a:fillRef>
+          <a:effectRef idx="1">
+            <a:schemeClr val="accent1"/>
+          </a:effectRef>
+          <a:fontRef idx="minor">
+            <a:schemeClr val="tx1"/>
+          </a:fontRef>
+        </p:style>
+      </p:cxnSp>
+      <p:cxnSp>
+        <p:nvCxnSpPr>
+          <p:cNvPr id="290" name="Straight Connector 289">
+            <a:extLst>
+              <a:ext uri="{FF2B5EF4-FFF2-40B4-BE49-F238E27FC236}">
+                <a16:creationId xmlns:a16="http://schemas.microsoft.com/office/drawing/2014/main" id="{1876BEE7-FDFC-0D31-7B67-CAA4ECA61CC2}"/>
+              </a:ext>
+            </a:extLst>
+          </p:cNvPr>
+          <p:cNvCxnSpPr>
+            <a:cxnSpLocks/>
+          </p:cNvCxnSpPr>
+          <p:nvPr/>
+        </p:nvCxnSpPr>
+        <p:spPr>
+          <a:xfrm>
+            <a:off x="4978419" y="2517961"/>
+            <a:ext cx="301247" cy="0"/>
+          </a:xfrm>
+          <a:prstGeom prst="line">
+            <a:avLst/>
+          </a:prstGeom>
+        </p:spPr>
+        <p:style>
+          <a:lnRef idx="2">
+            <a:schemeClr val="accent1"/>
+          </a:lnRef>
+          <a:fillRef idx="0">
+            <a:schemeClr val="accent1"/>
+          </a:fillRef>
+          <a:effectRef idx="1">
+            <a:schemeClr val="accent1"/>
+          </a:effectRef>
+          <a:fontRef idx="minor">
+            <a:schemeClr val="tx1"/>
+          </a:fontRef>
+        </p:style>
+      </p:cxnSp>
+      <p:cxnSp>
+        <p:nvCxnSpPr>
+          <p:cNvPr id="292" name="Straight Connector 291">
+            <a:extLst>
+              <a:ext uri="{FF2B5EF4-FFF2-40B4-BE49-F238E27FC236}">
+                <a16:creationId xmlns:a16="http://schemas.microsoft.com/office/drawing/2014/main" id="{F1B7D252-CFD6-2A20-A0B7-01CB66AF15B1}"/>
+              </a:ext>
+            </a:extLst>
+          </p:cNvPr>
+          <p:cNvCxnSpPr>
+            <a:cxnSpLocks/>
+          </p:cNvCxnSpPr>
+          <p:nvPr/>
+        </p:nvCxnSpPr>
+        <p:spPr>
+          <a:xfrm>
+            <a:off x="5283005" y="1069536"/>
+            <a:ext cx="0" cy="1448425"/>
           </a:xfrm>
           <a:prstGeom prst="line">
             <a:avLst/>
@@ -8310,8 +8862,8 @@
         </p:nvCxnSpPr>
         <p:spPr>
           <a:xfrm flipV="1">
-            <a:off x="7854489" y="2618727"/>
-            <a:ext cx="0" cy="1222228"/>
+            <a:off x="6794616" y="2616997"/>
+            <a:ext cx="0" cy="1223958"/>
           </a:xfrm>
           <a:prstGeom prst="line">
             <a:avLst/>
@@ -8718,8 +9270,8 @@
         </p:nvCxnSpPr>
         <p:spPr>
           <a:xfrm flipV="1">
-            <a:off x="9345163" y="2405503"/>
-            <a:ext cx="0" cy="1207784"/>
+            <a:off x="9345163" y="2345834"/>
+            <a:ext cx="0" cy="1267453"/>
           </a:xfrm>
           <a:prstGeom prst="line">
             <a:avLst/>
@@ -8979,8 +9531,8 @@
         </p:nvSpPr>
         <p:spPr>
           <a:xfrm>
-            <a:off x="5446395" y="1862975"/>
-            <a:ext cx="107644" cy="3460347"/>
+            <a:off x="5446396" y="1862975"/>
+            <a:ext cx="77092" cy="3460345"/>
           </a:xfrm>
           <a:prstGeom prst="rect">
             <a:avLst/>
@@ -9038,8 +9590,8 @@
         </p:nvSpPr>
         <p:spPr>
           <a:xfrm>
-            <a:off x="7475099" y="1862975"/>
-            <a:ext cx="124516" cy="4611756"/>
+            <a:off x="7475098" y="1862975"/>
+            <a:ext cx="163707" cy="3744877"/>
           </a:xfrm>
           <a:prstGeom prst="rect">
             <a:avLst/>
@@ -9098,7 +9650,7 @@
         <p:spPr>
           <a:xfrm>
             <a:off x="10007220" y="1862975"/>
-            <a:ext cx="124516" cy="4611756"/>
+            <a:ext cx="104845" cy="3744877"/>
           </a:xfrm>
           <a:prstGeom prst="rect">
             <a:avLst/>
@@ -9343,10 +9895,10 @@
       </p:sp>
       <p:cxnSp>
         <p:nvCxnSpPr>
-          <p:cNvPr id="28" name="Straight Arrow Connector 27">
-            <a:extLst>
-              <a:ext uri="{FF2B5EF4-FFF2-40B4-BE49-F238E27FC236}">
-                <a16:creationId xmlns:a16="http://schemas.microsoft.com/office/drawing/2014/main" id="{DBC59A37-4C55-8753-29C9-9D435BAD749A}"/>
+          <p:cNvPr id="30" name="Straight Arrow Connector 29">
+            <a:extLst>
+              <a:ext uri="{FF2B5EF4-FFF2-40B4-BE49-F238E27FC236}">
+                <a16:creationId xmlns:a16="http://schemas.microsoft.com/office/drawing/2014/main" id="{0FCEB13D-6178-8B05-6BF7-AA34265C10ED}"/>
               </a:ext>
             </a:extLst>
           </p:cNvPr>
@@ -9357,7 +9909,7 @@
         </p:nvCxnSpPr>
         <p:spPr>
           <a:xfrm>
-            <a:off x="6907069" y="5094338"/>
+            <a:off x="4037829" y="5515103"/>
             <a:ext cx="229874" cy="0"/>
           </a:xfrm>
           <a:prstGeom prst="straightConnector1">
@@ -9387,10 +9939,10 @@
       </p:cxnSp>
       <p:sp>
         <p:nvSpPr>
-          <p:cNvPr id="38" name="Rectangle 37">
-            <a:extLst>
-              <a:ext uri="{FF2B5EF4-FFF2-40B4-BE49-F238E27FC236}">
-                <a16:creationId xmlns:a16="http://schemas.microsoft.com/office/drawing/2014/main" id="{9DC00663-BEA1-F516-A24E-D1358A5FA8D3}"/>
+          <p:cNvPr id="32" name="Rectangle 31">
+            <a:extLst>
+              <a:ext uri="{FF2B5EF4-FFF2-40B4-BE49-F238E27FC236}">
+                <a16:creationId xmlns:a16="http://schemas.microsoft.com/office/drawing/2014/main" id="{5964E24E-8C81-EFE0-AB26-0F6BAD08C8E1}"/>
               </a:ext>
             </a:extLst>
           </p:cNvPr>
@@ -9399,7 +9951,7 @@
         </p:nvSpPr>
         <p:spPr>
           <a:xfrm>
-            <a:off x="6228280" y="4957339"/>
+            <a:off x="3359040" y="5378104"/>
             <a:ext cx="678789" cy="484706"/>
           </a:xfrm>
           <a:prstGeom prst="rect">
@@ -9439,10 +9991,10 @@
       </p:sp>
       <p:sp>
         <p:nvSpPr>
-          <p:cNvPr id="39" name="TextBox 38">
-            <a:extLst>
-              <a:ext uri="{FF2B5EF4-FFF2-40B4-BE49-F238E27FC236}">
-                <a16:creationId xmlns:a16="http://schemas.microsoft.com/office/drawing/2014/main" id="{6174F677-2B47-463D-4071-9231A2EAA9DF}"/>
+          <p:cNvPr id="34" name="TextBox 33">
+            <a:extLst>
+              <a:ext uri="{FF2B5EF4-FFF2-40B4-BE49-F238E27FC236}">
+                <a16:creationId xmlns:a16="http://schemas.microsoft.com/office/drawing/2014/main" id="{AAF8D060-B516-028F-A160-DDD58A9B4A1C}"/>
               </a:ext>
             </a:extLst>
           </p:cNvPr>
@@ -9451,8 +10003,8 @@
         </p:nvSpPr>
         <p:spPr>
           <a:xfrm>
-            <a:off x="6236908" y="4977226"/>
-            <a:ext cx="643125" cy="400110"/>
+            <a:off x="3324386" y="5397991"/>
+            <a:ext cx="729687" cy="400110"/>
           </a:xfrm>
           <a:prstGeom prst="rect">
             <a:avLst/>
@@ -9468,217 +10020,18 @@
             <a:pPr algn="ctr"/>
             <a:r>
               <a:rPr lang="en-US" sz="1000" dirty="0"/>
-              <a:t>Forward</a:t>
+              <a:t>Hazard</a:t>
             </a:r>
           </a:p>
           <a:p>
             <a:pPr algn="ctr"/>
             <a:r>
               <a:rPr lang="en-US" sz="1000" dirty="0"/>
-              <a:t>Unit</a:t>
+              <a:t>Detection</a:t>
             </a:r>
           </a:p>
         </p:txBody>
       </p:sp>
-      <p:cxnSp>
-        <p:nvCxnSpPr>
-          <p:cNvPr id="54" name="Straight Arrow Connector 53">
-            <a:extLst>
-              <a:ext uri="{FF2B5EF4-FFF2-40B4-BE49-F238E27FC236}">
-                <a16:creationId xmlns:a16="http://schemas.microsoft.com/office/drawing/2014/main" id="{03324C20-C3D1-9AAB-5C0D-C6C15BD835FE}"/>
-              </a:ext>
-            </a:extLst>
-          </p:cNvPr>
-          <p:cNvCxnSpPr>
-            <a:cxnSpLocks/>
-          </p:cNvCxnSpPr>
-          <p:nvPr/>
-        </p:nvCxnSpPr>
-        <p:spPr>
-          <a:xfrm>
-            <a:off x="5765920" y="5027975"/>
-            <a:ext cx="470988" cy="0"/>
-          </a:xfrm>
-          <a:prstGeom prst="straightConnector1">
-            <a:avLst/>
-          </a:prstGeom>
-          <a:ln>
-            <a:tailEnd type="triangle"/>
-          </a:ln>
-        </p:spPr>
-        <p:style>
-          <a:lnRef idx="2">
-            <a:schemeClr val="accent1"/>
-          </a:lnRef>
-          <a:fillRef idx="0">
-            <a:schemeClr val="accent1"/>
-          </a:fillRef>
-          <a:effectRef idx="1">
-            <a:schemeClr val="accent1"/>
-          </a:effectRef>
-          <a:fontRef idx="minor">
-            <a:schemeClr val="tx1"/>
-          </a:fontRef>
-        </p:style>
-      </p:cxnSp>
-      <p:cxnSp>
-        <p:nvCxnSpPr>
-          <p:cNvPr id="68" name="Straight Arrow Connector 67">
-            <a:extLst>
-              <a:ext uri="{FF2B5EF4-FFF2-40B4-BE49-F238E27FC236}">
-                <a16:creationId xmlns:a16="http://schemas.microsoft.com/office/drawing/2014/main" id="{35DADF49-4B1B-AC71-8C36-C35004BEE094}"/>
-              </a:ext>
-            </a:extLst>
-          </p:cNvPr>
-          <p:cNvCxnSpPr>
-            <a:cxnSpLocks/>
-          </p:cNvCxnSpPr>
-          <p:nvPr/>
-        </p:nvCxnSpPr>
-        <p:spPr>
-          <a:xfrm>
-            <a:off x="5901832" y="5193796"/>
-            <a:ext cx="335076" cy="0"/>
-          </a:xfrm>
-          <a:prstGeom prst="straightConnector1">
-            <a:avLst/>
-          </a:prstGeom>
-          <a:ln>
-            <a:tailEnd type="triangle"/>
-          </a:ln>
-        </p:spPr>
-        <p:style>
-          <a:lnRef idx="2">
-            <a:schemeClr val="accent1"/>
-          </a:lnRef>
-          <a:fillRef idx="0">
-            <a:schemeClr val="accent1"/>
-          </a:fillRef>
-          <a:effectRef idx="1">
-            <a:schemeClr val="accent1"/>
-          </a:effectRef>
-          <a:fontRef idx="minor">
-            <a:schemeClr val="tx1"/>
-          </a:fontRef>
-        </p:style>
-      </p:cxnSp>
-      <p:cxnSp>
-        <p:nvCxnSpPr>
-          <p:cNvPr id="72" name="Straight Arrow Connector 71">
-            <a:extLst>
-              <a:ext uri="{FF2B5EF4-FFF2-40B4-BE49-F238E27FC236}">
-                <a16:creationId xmlns:a16="http://schemas.microsoft.com/office/drawing/2014/main" id="{3C0FD334-761D-D912-1D21-08670E1D2E8A}"/>
-              </a:ext>
-            </a:extLst>
-          </p:cNvPr>
-          <p:cNvCxnSpPr>
-            <a:cxnSpLocks/>
-          </p:cNvCxnSpPr>
-          <p:nvPr/>
-        </p:nvCxnSpPr>
-        <p:spPr>
-          <a:xfrm>
-            <a:off x="5538404" y="5298202"/>
-            <a:ext cx="683932" cy="0"/>
-          </a:xfrm>
-          <a:prstGeom prst="straightConnector1">
-            <a:avLst/>
-          </a:prstGeom>
-          <a:ln>
-            <a:tailEnd type="triangle"/>
-          </a:ln>
-        </p:spPr>
-        <p:style>
-          <a:lnRef idx="2">
-            <a:schemeClr val="accent1"/>
-          </a:lnRef>
-          <a:fillRef idx="0">
-            <a:schemeClr val="accent1"/>
-          </a:fillRef>
-          <a:effectRef idx="1">
-            <a:schemeClr val="accent1"/>
-          </a:effectRef>
-          <a:fontRef idx="minor">
-            <a:schemeClr val="tx1"/>
-          </a:fontRef>
-        </p:style>
-      </p:cxnSp>
-      <p:cxnSp>
-        <p:nvCxnSpPr>
-          <p:cNvPr id="82" name="Straight Connector 81">
-            <a:extLst>
-              <a:ext uri="{FF2B5EF4-FFF2-40B4-BE49-F238E27FC236}">
-                <a16:creationId xmlns:a16="http://schemas.microsoft.com/office/drawing/2014/main" id="{821208F8-3FE0-AC1B-C80E-FD20D78B59DE}"/>
-              </a:ext>
-            </a:extLst>
-          </p:cNvPr>
-          <p:cNvCxnSpPr>
-            <a:cxnSpLocks/>
-          </p:cNvCxnSpPr>
-          <p:nvPr/>
-        </p:nvCxnSpPr>
-        <p:spPr>
-          <a:xfrm>
-            <a:off x="5885190" y="4761566"/>
-            <a:ext cx="4121765" cy="0"/>
-          </a:xfrm>
-          <a:prstGeom prst="line">
-            <a:avLst/>
-          </a:prstGeom>
-        </p:spPr>
-        <p:style>
-          <a:lnRef idx="2">
-            <a:schemeClr val="accent1"/>
-          </a:lnRef>
-          <a:fillRef idx="0">
-            <a:schemeClr val="accent1"/>
-          </a:fillRef>
-          <a:effectRef idx="1">
-            <a:schemeClr val="accent1"/>
-          </a:effectRef>
-          <a:fontRef idx="minor">
-            <a:schemeClr val="tx1"/>
-          </a:fontRef>
-        </p:style>
-      </p:cxnSp>
-      <p:cxnSp>
-        <p:nvCxnSpPr>
-          <p:cNvPr id="92" name="Straight Connector 91">
-            <a:extLst>
-              <a:ext uri="{FF2B5EF4-FFF2-40B4-BE49-F238E27FC236}">
-                <a16:creationId xmlns:a16="http://schemas.microsoft.com/office/drawing/2014/main" id="{780D872F-1646-C8B4-3D28-A065AE10E52A}"/>
-              </a:ext>
-            </a:extLst>
-          </p:cNvPr>
-          <p:cNvCxnSpPr>
-            <a:cxnSpLocks/>
-          </p:cNvCxnSpPr>
-          <p:nvPr/>
-        </p:nvCxnSpPr>
-        <p:spPr>
-          <a:xfrm>
-            <a:off x="5902908" y="4762568"/>
-            <a:ext cx="0" cy="437124"/>
-          </a:xfrm>
-          <a:prstGeom prst="line">
-            <a:avLst/>
-          </a:prstGeom>
-        </p:spPr>
-        <p:style>
-          <a:lnRef idx="2">
-            <a:schemeClr val="accent1"/>
-          </a:lnRef>
-          <a:fillRef idx="0">
-            <a:schemeClr val="accent1"/>
-          </a:fillRef>
-          <a:effectRef idx="1">
-            <a:schemeClr val="accent1"/>
-          </a:effectRef>
-          <a:fontRef idx="minor">
-            <a:schemeClr val="tx1"/>
-          </a:fontRef>
-        </p:style>
-      </p:cxnSp>
       <p:grpSp>
         <p:nvGrpSpPr>
           <p:cNvPr id="122" name="Group 121">
@@ -9868,8 +10221,8 @@
         </p:nvCxnSpPr>
         <p:spPr>
           <a:xfrm>
-            <a:off x="5641992" y="3189385"/>
-            <a:ext cx="186316" cy="0"/>
+            <a:off x="5621061" y="3189385"/>
+            <a:ext cx="207247" cy="0"/>
           </a:xfrm>
           <a:prstGeom prst="straightConnector1">
             <a:avLst/>
@@ -10181,15 +10534,13 @@
               </a:ext>
             </a:extLst>
           </p:cNvPr>
-          <p:cNvCxnSpPr>
-            <a:cxnSpLocks/>
-          </p:cNvCxnSpPr>
+          <p:cNvCxnSpPr/>
           <p:nvPr/>
         </p:nvCxnSpPr>
         <p:spPr>
           <a:xfrm flipH="1">
             <a:off x="5736066" y="2617769"/>
-            <a:ext cx="2120114" cy="0"/>
+            <a:ext cx="1057901" cy="0"/>
           </a:xfrm>
           <a:prstGeom prst="line">
             <a:avLst/>
@@ -10364,10 +10715,10 @@
       </p:cxnSp>
       <p:cxnSp>
         <p:nvCxnSpPr>
-          <p:cNvPr id="36" name="Straight Arrow Connector 35">
-            <a:extLst>
-              <a:ext uri="{FF2B5EF4-FFF2-40B4-BE49-F238E27FC236}">
-                <a16:creationId xmlns:a16="http://schemas.microsoft.com/office/drawing/2014/main" id="{1BC55C5F-A294-A543-9E3E-E324A93D8CA8}"/>
+          <p:cNvPr id="118" name="Straight Arrow Connector 117">
+            <a:extLst>
+              <a:ext uri="{FF2B5EF4-FFF2-40B4-BE49-F238E27FC236}">
+                <a16:creationId xmlns:a16="http://schemas.microsoft.com/office/drawing/2014/main" id="{F4ED870C-7DDD-18C7-6A4F-0D2CDF59EA50}"/>
               </a:ext>
             </a:extLst>
           </p:cNvPr>
@@ -10377,135 +10728,14 @@
           <p:nvPr/>
         </p:nvCxnSpPr>
         <p:spPr>
-          <a:xfrm flipV="1">
-            <a:off x="10997645" y="4034709"/>
-            <a:ext cx="0" cy="616523"/>
+          <a:xfrm>
+            <a:off x="4372527" y="2421549"/>
+            <a:ext cx="374301" cy="0"/>
           </a:xfrm>
           <a:prstGeom prst="straightConnector1">
             <a:avLst/>
           </a:prstGeom>
           <a:ln>
-            <a:solidFill>
-              <a:srgbClr val="FF0000"/>
-            </a:solidFill>
-            <a:tailEnd type="triangle"/>
-          </a:ln>
-        </p:spPr>
-        <p:style>
-          <a:lnRef idx="2">
-            <a:schemeClr val="accent1"/>
-          </a:lnRef>
-          <a:fillRef idx="0">
-            <a:schemeClr val="accent1"/>
-          </a:fillRef>
-          <a:effectRef idx="1">
-            <a:schemeClr val="accent1"/>
-          </a:effectRef>
-          <a:fontRef idx="minor">
-            <a:schemeClr val="tx1"/>
-          </a:fontRef>
-        </p:style>
-      </p:cxnSp>
-      <p:cxnSp>
-        <p:nvCxnSpPr>
-          <p:cNvPr id="37" name="Straight Connector 36">
-            <a:extLst>
-              <a:ext uri="{FF2B5EF4-FFF2-40B4-BE49-F238E27FC236}">
-                <a16:creationId xmlns:a16="http://schemas.microsoft.com/office/drawing/2014/main" id="{ECC19F9B-6EDF-6B64-E3B0-E660B8C52E68}"/>
-              </a:ext>
-            </a:extLst>
-          </p:cNvPr>
-          <p:cNvCxnSpPr>
-            <a:cxnSpLocks/>
-          </p:cNvCxnSpPr>
-          <p:nvPr/>
-        </p:nvCxnSpPr>
-        <p:spPr>
-          <a:xfrm flipH="1">
-            <a:off x="10946889" y="4449728"/>
-            <a:ext cx="107051" cy="69157"/>
-          </a:xfrm>
-          <a:prstGeom prst="line">
-            <a:avLst/>
-          </a:prstGeom>
-        </p:spPr>
-        <p:style>
-          <a:lnRef idx="2">
-            <a:schemeClr val="accent1"/>
-          </a:lnRef>
-          <a:fillRef idx="0">
-            <a:schemeClr val="accent1"/>
-          </a:fillRef>
-          <a:effectRef idx="1">
-            <a:schemeClr val="accent1"/>
-          </a:effectRef>
-          <a:fontRef idx="minor">
-            <a:schemeClr val="tx1"/>
-          </a:fontRef>
-        </p:style>
-      </p:cxnSp>
-      <p:cxnSp>
-        <p:nvCxnSpPr>
-          <p:cNvPr id="105" name="Straight Connector 104">
-            <a:extLst>
-              <a:ext uri="{FF2B5EF4-FFF2-40B4-BE49-F238E27FC236}">
-                <a16:creationId xmlns:a16="http://schemas.microsoft.com/office/drawing/2014/main" id="{D07766FF-137E-CFC5-F36B-18899A589011}"/>
-              </a:ext>
-            </a:extLst>
-          </p:cNvPr>
-          <p:cNvCxnSpPr>
-            <a:cxnSpLocks/>
-          </p:cNvCxnSpPr>
-          <p:nvPr/>
-        </p:nvCxnSpPr>
-        <p:spPr>
-          <a:xfrm flipH="1">
-            <a:off x="5894187" y="2482125"/>
-            <a:ext cx="107051" cy="69157"/>
-          </a:xfrm>
-          <a:prstGeom prst="line">
-            <a:avLst/>
-          </a:prstGeom>
-        </p:spPr>
-        <p:style>
-          <a:lnRef idx="2">
-            <a:schemeClr val="accent1"/>
-          </a:lnRef>
-          <a:fillRef idx="0">
-            <a:schemeClr val="accent1"/>
-          </a:fillRef>
-          <a:effectRef idx="1">
-            <a:schemeClr val="accent1"/>
-          </a:effectRef>
-          <a:fontRef idx="minor">
-            <a:schemeClr val="tx1"/>
-          </a:fontRef>
-        </p:style>
-      </p:cxnSp>
-      <p:cxnSp>
-        <p:nvCxnSpPr>
-          <p:cNvPr id="200" name="Straight Arrow Connector 199">
-            <a:extLst>
-              <a:ext uri="{FF2B5EF4-FFF2-40B4-BE49-F238E27FC236}">
-                <a16:creationId xmlns:a16="http://schemas.microsoft.com/office/drawing/2014/main" id="{D4AC79D0-5B76-D005-1A27-F76F271A152F}"/>
-              </a:ext>
-            </a:extLst>
-          </p:cNvPr>
-          <p:cNvCxnSpPr/>
-          <p:nvPr/>
-        </p:nvCxnSpPr>
-        <p:spPr>
-          <a:xfrm flipV="1">
-            <a:off x="8862876" y="3303944"/>
-            <a:ext cx="0" cy="167673"/>
-          </a:xfrm>
-          <a:prstGeom prst="straightConnector1">
-            <a:avLst/>
-          </a:prstGeom>
-          <a:ln>
-            <a:solidFill>
-              <a:srgbClr val="FF0000"/>
-            </a:solidFill>
             <a:tailEnd type="triangle"/>
           </a:ln>
         </p:spPr>
@@ -10526,62 +10756,46 @@
       </p:cxnSp>
       <p:sp>
         <p:nvSpPr>
-          <p:cNvPr id="209" name="Rectangle 208">
-            <a:extLst>
-              <a:ext uri="{FF2B5EF4-FFF2-40B4-BE49-F238E27FC236}">
-                <a16:creationId xmlns:a16="http://schemas.microsoft.com/office/drawing/2014/main" id="{7E4C1978-E959-3B8A-9B69-5A0570C1B433}"/>
-              </a:ext>
-            </a:extLst>
-          </p:cNvPr>
-          <p:cNvSpPr/>
+          <p:cNvPr id="119" name="TextBox 118">
+            <a:extLst>
+              <a:ext uri="{FF2B5EF4-FFF2-40B4-BE49-F238E27FC236}">
+                <a16:creationId xmlns:a16="http://schemas.microsoft.com/office/drawing/2014/main" id="{71CFDDD6-C726-691B-9CA9-125BE7E5CADA}"/>
+              </a:ext>
+            </a:extLst>
+          </p:cNvPr>
+          <p:cNvSpPr txBox="1"/>
           <p:nvPr/>
         </p:nvSpPr>
         <p:spPr>
           <a:xfrm>
-            <a:off x="4259968" y="5572927"/>
-            <a:ext cx="663423" cy="460640"/>
+            <a:off x="3310209" y="1961292"/>
+            <a:ext cx="413896" cy="230832"/>
           </a:xfrm>
           <a:prstGeom prst="rect">
             <a:avLst/>
           </a:prstGeom>
-          <a:solidFill>
-            <a:schemeClr val="bg1"/>
-          </a:solidFill>
-        </p:spPr>
-        <p:style>
-          <a:lnRef idx="2">
-            <a:schemeClr val="accent1">
-              <a:shade val="15000"/>
-            </a:schemeClr>
-          </a:lnRef>
-          <a:fillRef idx="1">
-            <a:schemeClr val="accent1"/>
-          </a:fillRef>
-          <a:effectRef idx="0">
-            <a:schemeClr val="accent1"/>
-          </a:effectRef>
-          <a:fontRef idx="minor">
-            <a:schemeClr val="lt1"/>
-          </a:fontRef>
-        </p:style>
+          <a:noFill/>
+        </p:spPr>
         <p:txBody>
-          <a:bodyPr rtlCol="0" anchor="ctr"/>
+          <a:bodyPr wrap="none" rtlCol="0">
+            <a:spAutoFit/>
+          </a:bodyPr>
           <a:lstStyle/>
           <a:p>
             <a:pPr algn="ctr"/>
             <a:r>
-              <a:rPr lang="en-US" dirty="0"/>
-              <a:t>PC</a:t>
+              <a:rPr lang="en-US" sz="900" dirty="0"/>
+              <a:t>NPC</a:t>
             </a:r>
           </a:p>
         </p:txBody>
       </p:sp>
       <p:sp>
         <p:nvSpPr>
-          <p:cNvPr id="210" name="TextBox 209">
-            <a:extLst>
-              <a:ext uri="{FF2B5EF4-FFF2-40B4-BE49-F238E27FC236}">
-                <a16:creationId xmlns:a16="http://schemas.microsoft.com/office/drawing/2014/main" id="{B99D9E74-E1B6-5F46-688D-FBFA65E6AF93}"/>
+          <p:cNvPr id="120" name="TextBox 119">
+            <a:extLst>
+              <a:ext uri="{FF2B5EF4-FFF2-40B4-BE49-F238E27FC236}">
+                <a16:creationId xmlns:a16="http://schemas.microsoft.com/office/drawing/2014/main" id="{B5FAFD36-E7BE-8A22-0C52-FA46F61778F0}"/>
               </a:ext>
             </a:extLst>
           </p:cNvPr>
@@ -10590,8 +10804,8 @@
         </p:nvSpPr>
         <p:spPr>
           <a:xfrm>
-            <a:off x="4318876" y="5611381"/>
-            <a:ext cx="574196" cy="384721"/>
+            <a:off x="3313362" y="2376665"/>
+            <a:ext cx="407484" cy="230832"/>
           </a:xfrm>
           <a:prstGeom prst="rect">
             <a:avLst/>
@@ -10599,32 +10813,26 @@
           <a:noFill/>
         </p:spPr>
         <p:txBody>
-          <a:bodyPr wrap="square" rtlCol="0">
+          <a:bodyPr wrap="none" rtlCol="0">
             <a:spAutoFit/>
           </a:bodyPr>
           <a:lstStyle/>
           <a:p>
             <a:pPr algn="ctr"/>
             <a:r>
-              <a:rPr lang="en-US" sz="1000" dirty="0"/>
-              <a:t>Stall</a:t>
+              <a:rPr lang="en-US" sz="900" dirty="0" err="1"/>
+              <a:t>imm</a:t>
             </a:r>
-          </a:p>
-          <a:p>
-            <a:pPr algn="ctr"/>
-            <a:r>
-              <a:rPr lang="en-US" sz="900" dirty="0"/>
-              <a:t>counter</a:t>
-            </a:r>
+            <a:endParaRPr lang="en-US" sz="900" dirty="0"/>
           </a:p>
         </p:txBody>
       </p:sp>
       <p:cxnSp>
         <p:nvCxnSpPr>
-          <p:cNvPr id="211" name="Straight Arrow Connector 210">
-            <a:extLst>
-              <a:ext uri="{FF2B5EF4-FFF2-40B4-BE49-F238E27FC236}">
-                <a16:creationId xmlns:a16="http://schemas.microsoft.com/office/drawing/2014/main" id="{35A73827-A0E8-19ED-1B3D-EEA836E5E5D2}"/>
+          <p:cNvPr id="121" name="Straight Arrow Connector 120">
+            <a:extLst>
+              <a:ext uri="{FF2B5EF4-FFF2-40B4-BE49-F238E27FC236}">
+                <a16:creationId xmlns:a16="http://schemas.microsoft.com/office/drawing/2014/main" id="{C3290510-9088-6A3E-5DFA-AEBEB6FBD1A1}"/>
               </a:ext>
             </a:extLst>
           </p:cNvPr>
@@ -10634,17 +10842,14 @@
           <p:nvPr/>
         </p:nvCxnSpPr>
         <p:spPr>
-          <a:xfrm>
-            <a:off x="4030095" y="5710140"/>
-            <a:ext cx="229874" cy="0"/>
+          <a:xfrm flipV="1">
+            <a:off x="4656723" y="2579639"/>
+            <a:ext cx="100338" cy="2498"/>
           </a:xfrm>
           <a:prstGeom prst="straightConnector1">
             <a:avLst/>
           </a:prstGeom>
           <a:ln>
-            <a:solidFill>
-              <a:srgbClr val="FF0000"/>
-            </a:solidFill>
             <a:tailEnd type="triangle"/>
           </a:ln>
         </p:spPr>
@@ -10665,543 +10870,20 @@
       </p:cxnSp>
       <p:sp>
         <p:nvSpPr>
-          <p:cNvPr id="212" name="Rectangle 211">
-            <a:extLst>
-              <a:ext uri="{FF2B5EF4-FFF2-40B4-BE49-F238E27FC236}">
-                <a16:creationId xmlns:a16="http://schemas.microsoft.com/office/drawing/2014/main" id="{42328FB6-6571-FA3C-8E81-028268A77042}"/>
-              </a:ext>
-            </a:extLst>
-          </p:cNvPr>
-          <p:cNvSpPr/>
+          <p:cNvPr id="132" name="TextBox 131">
+            <a:extLst>
+              <a:ext uri="{FF2B5EF4-FFF2-40B4-BE49-F238E27FC236}">
+                <a16:creationId xmlns:a16="http://schemas.microsoft.com/office/drawing/2014/main" id="{0D9A6022-1D6D-F3DA-CC84-317FF5FD6666}"/>
+              </a:ext>
+            </a:extLst>
+          </p:cNvPr>
+          <p:cNvSpPr txBox="1"/>
           <p:nvPr/>
         </p:nvSpPr>
         <p:spPr>
           <a:xfrm>
-            <a:off x="3351306" y="5573141"/>
-            <a:ext cx="678789" cy="484706"/>
-          </a:xfrm>
-          <a:prstGeom prst="rect">
-            <a:avLst/>
-          </a:prstGeom>
-          <a:solidFill>
-            <a:schemeClr val="bg1"/>
-          </a:solidFill>
-        </p:spPr>
-        <p:style>
-          <a:lnRef idx="2">
-            <a:schemeClr val="accent1">
-              <a:shade val="15000"/>
-            </a:schemeClr>
-          </a:lnRef>
-          <a:fillRef idx="1">
-            <a:schemeClr val="accent1"/>
-          </a:fillRef>
-          <a:effectRef idx="0">
-            <a:schemeClr val="accent1"/>
-          </a:effectRef>
-          <a:fontRef idx="minor">
-            <a:schemeClr val="lt1"/>
-          </a:fontRef>
-        </p:style>
-        <p:txBody>
-          <a:bodyPr rtlCol="0" anchor="ctr"/>
-          <a:lstStyle/>
-          <a:p>
-            <a:pPr algn="ctr"/>
-            <a:r>
-              <a:rPr lang="en-US" dirty="0"/>
-              <a:t>PC</a:t>
-            </a:r>
-          </a:p>
-        </p:txBody>
-      </p:sp>
-      <p:sp>
-        <p:nvSpPr>
-          <p:cNvPr id="213" name="TextBox 212">
-            <a:extLst>
-              <a:ext uri="{FF2B5EF4-FFF2-40B4-BE49-F238E27FC236}">
-                <a16:creationId xmlns:a16="http://schemas.microsoft.com/office/drawing/2014/main" id="{3468D653-D2DB-10F8-EB42-1EF2F69D462B}"/>
-              </a:ext>
-            </a:extLst>
-          </p:cNvPr>
-          <p:cNvSpPr txBox="1"/>
-          <p:nvPr/>
-        </p:nvSpPr>
-        <p:spPr>
-          <a:xfrm>
-            <a:off x="3316652" y="5593028"/>
-            <a:ext cx="729687" cy="400110"/>
-          </a:xfrm>
-          <a:prstGeom prst="rect">
-            <a:avLst/>
-          </a:prstGeom>
-          <a:noFill/>
-        </p:spPr>
-        <p:txBody>
-          <a:bodyPr wrap="square" rtlCol="0">
-            <a:spAutoFit/>
-          </a:bodyPr>
-          <a:lstStyle/>
-          <a:p>
-            <a:pPr algn="ctr"/>
-            <a:r>
-              <a:rPr lang="en-US" sz="1000" dirty="0"/>
-              <a:t>Hazard</a:t>
-            </a:r>
-          </a:p>
-          <a:p>
-            <a:pPr algn="ctr"/>
-            <a:r>
-              <a:rPr lang="en-US" sz="1000" dirty="0"/>
-              <a:t>Detection</a:t>
-            </a:r>
-          </a:p>
-        </p:txBody>
-      </p:sp>
-      <p:cxnSp>
-        <p:nvCxnSpPr>
-          <p:cNvPr id="215" name="Straight Arrow Connector 214">
-            <a:extLst>
-              <a:ext uri="{FF2B5EF4-FFF2-40B4-BE49-F238E27FC236}">
-                <a16:creationId xmlns:a16="http://schemas.microsoft.com/office/drawing/2014/main" id="{2F2A33F8-388E-3212-42F2-F316A4DCC9A2}"/>
-              </a:ext>
-            </a:extLst>
-          </p:cNvPr>
-          <p:cNvCxnSpPr>
-            <a:cxnSpLocks/>
-          </p:cNvCxnSpPr>
-          <p:nvPr/>
-        </p:nvCxnSpPr>
-        <p:spPr>
-          <a:xfrm>
-            <a:off x="2909696" y="5929325"/>
-            <a:ext cx="442253" cy="0"/>
-          </a:xfrm>
-          <a:prstGeom prst="straightConnector1">
-            <a:avLst/>
-          </a:prstGeom>
-          <a:ln>
-            <a:solidFill>
-              <a:srgbClr val="FF0000"/>
-            </a:solidFill>
-            <a:tailEnd type="triangle"/>
-          </a:ln>
-        </p:spPr>
-        <p:style>
-          <a:lnRef idx="2">
-            <a:schemeClr val="accent1"/>
-          </a:lnRef>
-          <a:fillRef idx="0">
-            <a:schemeClr val="accent1"/>
-          </a:fillRef>
-          <a:effectRef idx="1">
-            <a:schemeClr val="accent1"/>
-          </a:effectRef>
-          <a:fontRef idx="minor">
-            <a:schemeClr val="tx1"/>
-          </a:fontRef>
-        </p:style>
-      </p:cxnSp>
-      <p:cxnSp>
-        <p:nvCxnSpPr>
-          <p:cNvPr id="217" name="Straight Arrow Connector 216">
-            <a:extLst>
-              <a:ext uri="{FF2B5EF4-FFF2-40B4-BE49-F238E27FC236}">
-                <a16:creationId xmlns:a16="http://schemas.microsoft.com/office/drawing/2014/main" id="{0C1B9568-C8CF-C3E1-D013-4AB3BA49E0A6}"/>
-              </a:ext>
-            </a:extLst>
-          </p:cNvPr>
-          <p:cNvCxnSpPr>
-            <a:cxnSpLocks/>
-          </p:cNvCxnSpPr>
-          <p:nvPr/>
-        </p:nvCxnSpPr>
-        <p:spPr>
-          <a:xfrm flipH="1">
-            <a:off x="4040822" y="5917227"/>
-            <a:ext cx="205614" cy="0"/>
-          </a:xfrm>
-          <a:prstGeom prst="straightConnector1">
-            <a:avLst/>
-          </a:prstGeom>
-          <a:ln>
-            <a:solidFill>
-              <a:srgbClr val="FF0000"/>
-            </a:solidFill>
-            <a:tailEnd type="triangle"/>
-          </a:ln>
-        </p:spPr>
-        <p:style>
-          <a:lnRef idx="2">
-            <a:schemeClr val="accent1"/>
-          </a:lnRef>
-          <a:fillRef idx="0">
-            <a:schemeClr val="accent1"/>
-          </a:fillRef>
-          <a:effectRef idx="1">
-            <a:schemeClr val="accent1"/>
-          </a:effectRef>
-          <a:fontRef idx="minor">
-            <a:schemeClr val="tx1"/>
-          </a:fontRef>
-        </p:style>
-      </p:cxnSp>
-      <p:cxnSp>
-        <p:nvCxnSpPr>
-          <p:cNvPr id="218" name="Straight Connector 217">
-            <a:extLst>
-              <a:ext uri="{FF2B5EF4-FFF2-40B4-BE49-F238E27FC236}">
-                <a16:creationId xmlns:a16="http://schemas.microsoft.com/office/drawing/2014/main" id="{E49846C5-8569-392B-D7EC-3272F6F2B440}"/>
-              </a:ext>
-            </a:extLst>
-          </p:cNvPr>
-          <p:cNvCxnSpPr>
-            <a:cxnSpLocks/>
-          </p:cNvCxnSpPr>
-          <p:nvPr/>
-        </p:nvCxnSpPr>
-        <p:spPr>
-          <a:xfrm>
-            <a:off x="2920808" y="5560181"/>
-            <a:ext cx="0" cy="367608"/>
-          </a:xfrm>
-          <a:prstGeom prst="line">
-            <a:avLst/>
-          </a:prstGeom>
-          <a:ln>
-            <a:solidFill>
-              <a:srgbClr val="FF0000"/>
-            </a:solidFill>
-          </a:ln>
-        </p:spPr>
-        <p:style>
-          <a:lnRef idx="2">
-            <a:schemeClr val="accent1"/>
-          </a:lnRef>
-          <a:fillRef idx="0">
-            <a:schemeClr val="accent1"/>
-          </a:fillRef>
-          <a:effectRef idx="1">
-            <a:schemeClr val="accent1"/>
-          </a:effectRef>
-          <a:fontRef idx="minor">
-            <a:schemeClr val="tx1"/>
-          </a:fontRef>
-        </p:style>
-      </p:cxnSp>
-      <p:cxnSp>
-        <p:nvCxnSpPr>
-          <p:cNvPr id="220" name="Straight Arrow Connector 219">
-            <a:extLst>
-              <a:ext uri="{FF2B5EF4-FFF2-40B4-BE49-F238E27FC236}">
-                <a16:creationId xmlns:a16="http://schemas.microsoft.com/office/drawing/2014/main" id="{BC2F36C1-D9E2-5F94-A594-FBFAAC53E660}"/>
-              </a:ext>
-            </a:extLst>
-          </p:cNvPr>
-          <p:cNvCxnSpPr>
-            <a:cxnSpLocks/>
-          </p:cNvCxnSpPr>
-          <p:nvPr/>
-        </p:nvCxnSpPr>
-        <p:spPr>
-          <a:xfrm>
-            <a:off x="3145244" y="5712432"/>
-            <a:ext cx="211703" cy="0"/>
-          </a:xfrm>
-          <a:prstGeom prst="straightConnector1">
-            <a:avLst/>
-          </a:prstGeom>
-          <a:ln>
-            <a:solidFill>
-              <a:srgbClr val="FF0000"/>
-            </a:solidFill>
-            <a:tailEnd type="triangle"/>
-          </a:ln>
-        </p:spPr>
-        <p:style>
-          <a:lnRef idx="2">
-            <a:schemeClr val="accent1"/>
-          </a:lnRef>
-          <a:fillRef idx="0">
-            <a:schemeClr val="accent1"/>
-          </a:fillRef>
-          <a:effectRef idx="1">
-            <a:schemeClr val="accent1"/>
-          </a:effectRef>
-          <a:fontRef idx="minor">
-            <a:schemeClr val="tx1"/>
-          </a:fontRef>
-        </p:style>
-      </p:cxnSp>
-      <p:cxnSp>
-        <p:nvCxnSpPr>
-          <p:cNvPr id="221" name="Straight Connector 220">
-            <a:extLst>
-              <a:ext uri="{FF2B5EF4-FFF2-40B4-BE49-F238E27FC236}">
-                <a16:creationId xmlns:a16="http://schemas.microsoft.com/office/drawing/2014/main" id="{6FB6D13F-84F6-B220-EF66-A111BDCAEC0A}"/>
-              </a:ext>
-            </a:extLst>
-          </p:cNvPr>
-          <p:cNvCxnSpPr>
-            <a:cxnSpLocks/>
-          </p:cNvCxnSpPr>
-          <p:nvPr/>
-        </p:nvCxnSpPr>
-        <p:spPr>
-          <a:xfrm flipH="1">
-            <a:off x="2511119" y="5576977"/>
-            <a:ext cx="398618" cy="0"/>
-          </a:xfrm>
-          <a:prstGeom prst="line">
-            <a:avLst/>
-          </a:prstGeom>
-          <a:ln>
-            <a:solidFill>
-              <a:srgbClr val="FF0000"/>
-            </a:solidFill>
-          </a:ln>
-        </p:spPr>
-        <p:style>
-          <a:lnRef idx="2">
-            <a:schemeClr val="accent1"/>
-          </a:lnRef>
-          <a:fillRef idx="0">
-            <a:schemeClr val="accent1"/>
-          </a:fillRef>
-          <a:effectRef idx="1">
-            <a:schemeClr val="accent1"/>
-          </a:effectRef>
-          <a:fontRef idx="minor">
-            <a:schemeClr val="tx1"/>
-          </a:fontRef>
-        </p:style>
-      </p:cxnSp>
-      <p:cxnSp>
-        <p:nvCxnSpPr>
-          <p:cNvPr id="222" name="Straight Connector 221">
-            <a:extLst>
-              <a:ext uri="{FF2B5EF4-FFF2-40B4-BE49-F238E27FC236}">
-                <a16:creationId xmlns:a16="http://schemas.microsoft.com/office/drawing/2014/main" id="{93DC441A-8F48-0B1E-E235-4F3A44A86932}"/>
-              </a:ext>
-            </a:extLst>
-          </p:cNvPr>
-          <p:cNvCxnSpPr>
-            <a:cxnSpLocks/>
-          </p:cNvCxnSpPr>
-          <p:nvPr/>
-        </p:nvCxnSpPr>
-        <p:spPr>
-          <a:xfrm>
-            <a:off x="3136484" y="5250897"/>
-            <a:ext cx="0" cy="470946"/>
-          </a:xfrm>
-          <a:prstGeom prst="line">
-            <a:avLst/>
-          </a:prstGeom>
-          <a:ln>
-            <a:solidFill>
-              <a:srgbClr val="FF0000"/>
-            </a:solidFill>
-          </a:ln>
-        </p:spPr>
-        <p:style>
-          <a:lnRef idx="2">
-            <a:schemeClr val="accent1"/>
-          </a:lnRef>
-          <a:fillRef idx="0">
-            <a:schemeClr val="accent1"/>
-          </a:fillRef>
-          <a:effectRef idx="1">
-            <a:schemeClr val="accent1"/>
-          </a:effectRef>
-          <a:fontRef idx="minor">
-            <a:schemeClr val="tx1"/>
-          </a:fontRef>
-        </p:style>
-      </p:cxnSp>
-      <p:cxnSp>
-        <p:nvCxnSpPr>
-          <p:cNvPr id="224" name="Straight Connector 223">
-            <a:extLst>
-              <a:ext uri="{FF2B5EF4-FFF2-40B4-BE49-F238E27FC236}">
-                <a16:creationId xmlns:a16="http://schemas.microsoft.com/office/drawing/2014/main" id="{A611D7C8-EA59-07B6-6DE0-08A00908356E}"/>
-              </a:ext>
-            </a:extLst>
-          </p:cNvPr>
-          <p:cNvCxnSpPr>
-            <a:cxnSpLocks/>
-          </p:cNvCxnSpPr>
-          <p:nvPr/>
-        </p:nvCxnSpPr>
-        <p:spPr>
-          <a:xfrm>
-            <a:off x="2759850" y="5241548"/>
-            <a:ext cx="383938" cy="0"/>
-          </a:xfrm>
-          <a:prstGeom prst="line">
-            <a:avLst/>
-          </a:prstGeom>
-          <a:ln>
-            <a:solidFill>
-              <a:srgbClr val="FF0000"/>
-            </a:solidFill>
-          </a:ln>
-        </p:spPr>
-        <p:style>
-          <a:lnRef idx="2">
-            <a:schemeClr val="accent1"/>
-          </a:lnRef>
-          <a:fillRef idx="0">
-            <a:schemeClr val="accent1"/>
-          </a:fillRef>
-          <a:effectRef idx="1">
-            <a:schemeClr val="accent1"/>
-          </a:effectRef>
-          <a:fontRef idx="minor">
-            <a:schemeClr val="tx1"/>
-          </a:fontRef>
-        </p:style>
-      </p:cxnSp>
-      <p:cxnSp>
-        <p:nvCxnSpPr>
-          <p:cNvPr id="225" name="Straight Arrow Connector 224">
-            <a:extLst>
-              <a:ext uri="{FF2B5EF4-FFF2-40B4-BE49-F238E27FC236}">
-                <a16:creationId xmlns:a16="http://schemas.microsoft.com/office/drawing/2014/main" id="{4FA97CD2-A4F3-8569-BF3A-77C3076814AA}"/>
-              </a:ext>
-            </a:extLst>
-          </p:cNvPr>
-          <p:cNvCxnSpPr>
-            <a:cxnSpLocks/>
-          </p:cNvCxnSpPr>
-          <p:nvPr/>
-        </p:nvCxnSpPr>
-        <p:spPr>
-          <a:xfrm flipV="1">
-            <a:off x="4124761" y="5481780"/>
-            <a:ext cx="0" cy="225402"/>
-          </a:xfrm>
-          <a:prstGeom prst="straightConnector1">
-            <a:avLst/>
-          </a:prstGeom>
-          <a:ln>
-            <a:solidFill>
-              <a:srgbClr val="FF0000"/>
-            </a:solidFill>
-            <a:tailEnd type="triangle"/>
-          </a:ln>
-        </p:spPr>
-        <p:style>
-          <a:lnRef idx="2">
-            <a:schemeClr val="accent1"/>
-          </a:lnRef>
-          <a:fillRef idx="0">
-            <a:schemeClr val="accent1"/>
-          </a:fillRef>
-          <a:effectRef idx="1">
-            <a:schemeClr val="accent1"/>
-          </a:effectRef>
-          <a:fontRef idx="minor">
-            <a:schemeClr val="tx1"/>
-          </a:fontRef>
-        </p:style>
-      </p:cxnSp>
-      <p:cxnSp>
-        <p:nvCxnSpPr>
-          <p:cNvPr id="226" name="Straight Arrow Connector 225">
-            <a:extLst>
-              <a:ext uri="{FF2B5EF4-FFF2-40B4-BE49-F238E27FC236}">
-                <a16:creationId xmlns:a16="http://schemas.microsoft.com/office/drawing/2014/main" id="{13244B44-D83A-17F1-89B4-8EB805ADF839}"/>
-              </a:ext>
-            </a:extLst>
-          </p:cNvPr>
-          <p:cNvCxnSpPr>
-            <a:cxnSpLocks/>
-          </p:cNvCxnSpPr>
-          <p:nvPr/>
-        </p:nvCxnSpPr>
-        <p:spPr>
-          <a:xfrm>
-            <a:off x="4172823" y="5931908"/>
-            <a:ext cx="0" cy="402752"/>
-          </a:xfrm>
-          <a:prstGeom prst="straightConnector1">
-            <a:avLst/>
-          </a:prstGeom>
-          <a:ln>
-            <a:solidFill>
-              <a:srgbClr val="FF0000"/>
-            </a:solidFill>
-            <a:tailEnd type="triangle"/>
-          </a:ln>
-        </p:spPr>
-        <p:style>
-          <a:lnRef idx="2">
-            <a:schemeClr val="accent1"/>
-          </a:lnRef>
-          <a:fillRef idx="0">
-            <a:schemeClr val="accent1"/>
-          </a:fillRef>
-          <a:effectRef idx="1">
-            <a:schemeClr val="accent1"/>
-          </a:effectRef>
-          <a:fontRef idx="minor">
-            <a:schemeClr val="tx1"/>
-          </a:fontRef>
-        </p:style>
-      </p:cxnSp>
-      <p:cxnSp>
-        <p:nvCxnSpPr>
-          <p:cNvPr id="228" name="Straight Connector 227">
-            <a:extLst>
-              <a:ext uri="{FF2B5EF4-FFF2-40B4-BE49-F238E27FC236}">
-                <a16:creationId xmlns:a16="http://schemas.microsoft.com/office/drawing/2014/main" id="{2FA12D39-0FA2-ABBD-EACC-E063F56B5583}"/>
-              </a:ext>
-            </a:extLst>
-          </p:cNvPr>
-          <p:cNvCxnSpPr/>
-          <p:nvPr/>
-        </p:nvCxnSpPr>
-        <p:spPr>
-          <a:xfrm flipH="1">
-            <a:off x="2952806" y="5177183"/>
-            <a:ext cx="77899" cy="129540"/>
-          </a:xfrm>
-          <a:prstGeom prst="line">
-            <a:avLst/>
-          </a:prstGeom>
-        </p:spPr>
-        <p:style>
-          <a:lnRef idx="2">
-            <a:schemeClr val="accent1"/>
-          </a:lnRef>
-          <a:fillRef idx="0">
-            <a:schemeClr val="accent1"/>
-          </a:fillRef>
-          <a:effectRef idx="1">
-            <a:schemeClr val="accent1"/>
-          </a:effectRef>
-          <a:fontRef idx="minor">
-            <a:schemeClr val="tx1"/>
-          </a:fontRef>
-        </p:style>
-      </p:cxnSp>
-      <p:sp>
-        <p:nvSpPr>
-          <p:cNvPr id="232" name="TextBox 231">
-            <a:extLst>
-              <a:ext uri="{FF2B5EF4-FFF2-40B4-BE49-F238E27FC236}">
-                <a16:creationId xmlns:a16="http://schemas.microsoft.com/office/drawing/2014/main" id="{84B6D813-B5DE-D1FC-AF80-525F92C8F7F8}"/>
-              </a:ext>
-            </a:extLst>
-          </p:cNvPr>
-          <p:cNvSpPr txBox="1"/>
-          <p:nvPr/>
-        </p:nvSpPr>
-        <p:spPr>
-          <a:xfrm>
-            <a:off x="2834608" y="5072614"/>
-            <a:ext cx="245580" cy="230832"/>
+            <a:off x="4334630" y="2461304"/>
+            <a:ext cx="413896" cy="230832"/>
           </a:xfrm>
           <a:prstGeom prst="rect">
             <a:avLst/>
@@ -11217,1101 +10899,6 @@
             <a:pPr algn="ctr"/>
             <a:r>
               <a:rPr lang="en-US" sz="900" dirty="0"/>
-              <a:t>4</a:t>
-            </a:r>
-          </a:p>
-        </p:txBody>
-      </p:sp>
-      <p:sp>
-        <p:nvSpPr>
-          <p:cNvPr id="233" name="Rectangle 232">
-            <a:extLst>
-              <a:ext uri="{FF2B5EF4-FFF2-40B4-BE49-F238E27FC236}">
-                <a16:creationId xmlns:a16="http://schemas.microsoft.com/office/drawing/2014/main" id="{E46D487D-09B4-2769-C34D-554786351A6B}"/>
-              </a:ext>
-            </a:extLst>
-          </p:cNvPr>
-          <p:cNvSpPr/>
-          <p:nvPr/>
-        </p:nvSpPr>
-        <p:spPr>
-          <a:xfrm>
-            <a:off x="4027858" y="6344690"/>
-            <a:ext cx="663423" cy="460640"/>
-          </a:xfrm>
-          <a:prstGeom prst="rect">
-            <a:avLst/>
-          </a:prstGeom>
-          <a:solidFill>
-            <a:schemeClr val="bg1"/>
-          </a:solidFill>
-        </p:spPr>
-        <p:style>
-          <a:lnRef idx="2">
-            <a:schemeClr val="accent1">
-              <a:shade val="15000"/>
-            </a:schemeClr>
-          </a:lnRef>
-          <a:fillRef idx="1">
-            <a:schemeClr val="accent1"/>
-          </a:fillRef>
-          <a:effectRef idx="0">
-            <a:schemeClr val="accent1"/>
-          </a:effectRef>
-          <a:fontRef idx="minor">
-            <a:schemeClr val="lt1"/>
-          </a:fontRef>
-        </p:style>
-        <p:txBody>
-          <a:bodyPr rtlCol="0" anchor="ctr"/>
-          <a:lstStyle/>
-          <a:p>
-            <a:pPr algn="ctr"/>
-            <a:r>
-              <a:rPr lang="en-US" dirty="0"/>
-              <a:t>PC</a:t>
-            </a:r>
-          </a:p>
-        </p:txBody>
-      </p:sp>
-      <p:sp>
-        <p:nvSpPr>
-          <p:cNvPr id="234" name="TextBox 233">
-            <a:extLst>
-              <a:ext uri="{FF2B5EF4-FFF2-40B4-BE49-F238E27FC236}">
-                <a16:creationId xmlns:a16="http://schemas.microsoft.com/office/drawing/2014/main" id="{B03E2FCB-F4FA-D322-14B8-FB5E1F9573B3}"/>
-              </a:ext>
-            </a:extLst>
-          </p:cNvPr>
-          <p:cNvSpPr txBox="1"/>
-          <p:nvPr/>
-        </p:nvSpPr>
-        <p:spPr>
-          <a:xfrm>
-            <a:off x="4505477" y="6442196"/>
-            <a:ext cx="194710" cy="246221"/>
-          </a:xfrm>
-          <a:prstGeom prst="rect">
-            <a:avLst/>
-          </a:prstGeom>
-          <a:noFill/>
-        </p:spPr>
-        <p:txBody>
-          <a:bodyPr wrap="square" rtlCol="0">
-            <a:spAutoFit/>
-          </a:bodyPr>
-          <a:lstStyle/>
-          <a:p>
-            <a:pPr algn="ctr"/>
-            <a:r>
-              <a:rPr lang="en-US" sz="1000" dirty="0"/>
-              <a:t>&gt;</a:t>
-            </a:r>
-            <a:endParaRPr lang="en-US" sz="900" dirty="0"/>
-          </a:p>
-        </p:txBody>
-      </p:sp>
-      <p:cxnSp>
-        <p:nvCxnSpPr>
-          <p:cNvPr id="237" name="Straight Arrow Connector 236">
-            <a:extLst>
-              <a:ext uri="{FF2B5EF4-FFF2-40B4-BE49-F238E27FC236}">
-                <a16:creationId xmlns:a16="http://schemas.microsoft.com/office/drawing/2014/main" id="{657E1736-86D8-4C89-8125-43EFDE81B0A7}"/>
-              </a:ext>
-            </a:extLst>
-          </p:cNvPr>
-          <p:cNvCxnSpPr>
-            <a:cxnSpLocks/>
-          </p:cNvCxnSpPr>
-          <p:nvPr/>
-        </p:nvCxnSpPr>
-        <p:spPr>
-          <a:xfrm>
-            <a:off x="4696548" y="6575010"/>
-            <a:ext cx="229874" cy="0"/>
-          </a:xfrm>
-          <a:prstGeom prst="straightConnector1">
-            <a:avLst/>
-          </a:prstGeom>
-          <a:ln>
-            <a:solidFill>
-              <a:srgbClr val="FF0000"/>
-            </a:solidFill>
-            <a:tailEnd type="triangle"/>
-          </a:ln>
-        </p:spPr>
-        <p:style>
-          <a:lnRef idx="2">
-            <a:schemeClr val="accent1"/>
-          </a:lnRef>
-          <a:fillRef idx="0">
-            <a:schemeClr val="accent1"/>
-          </a:fillRef>
-          <a:effectRef idx="1">
-            <a:schemeClr val="accent1"/>
-          </a:effectRef>
-          <a:fontRef idx="minor">
-            <a:schemeClr val="tx1"/>
-          </a:fontRef>
-        </p:style>
-      </p:cxnSp>
-      <p:cxnSp>
-        <p:nvCxnSpPr>
-          <p:cNvPr id="241" name="Straight Arrow Connector 240">
-            <a:extLst>
-              <a:ext uri="{FF2B5EF4-FFF2-40B4-BE49-F238E27FC236}">
-                <a16:creationId xmlns:a16="http://schemas.microsoft.com/office/drawing/2014/main" id="{CFF1441C-A871-C028-33DF-68E89133CAC3}"/>
-              </a:ext>
-            </a:extLst>
-          </p:cNvPr>
-          <p:cNvCxnSpPr>
-            <a:cxnSpLocks/>
-          </p:cNvCxnSpPr>
-          <p:nvPr/>
-        </p:nvCxnSpPr>
-        <p:spPr>
-          <a:xfrm>
-            <a:off x="4566636" y="6234492"/>
-            <a:ext cx="0" cy="100168"/>
-          </a:xfrm>
-          <a:prstGeom prst="straightConnector1">
-            <a:avLst/>
-          </a:prstGeom>
-          <a:ln>
-            <a:solidFill>
-              <a:srgbClr val="FF0000"/>
-            </a:solidFill>
-            <a:tailEnd type="triangle"/>
-          </a:ln>
-        </p:spPr>
-        <p:style>
-          <a:lnRef idx="2">
-            <a:schemeClr val="accent1"/>
-          </a:lnRef>
-          <a:fillRef idx="0">
-            <a:schemeClr val="accent1"/>
-          </a:fillRef>
-          <a:effectRef idx="1">
-            <a:schemeClr val="accent1"/>
-          </a:effectRef>
-          <a:fontRef idx="minor">
-            <a:schemeClr val="tx1"/>
-          </a:fontRef>
-        </p:style>
-      </p:cxnSp>
-      <p:sp>
-        <p:nvSpPr>
-          <p:cNvPr id="242" name="TextBox 241">
-            <a:extLst>
-              <a:ext uri="{FF2B5EF4-FFF2-40B4-BE49-F238E27FC236}">
-                <a16:creationId xmlns:a16="http://schemas.microsoft.com/office/drawing/2014/main" id="{5CF4424D-C27A-0FCF-199D-B10372DC54C3}"/>
-              </a:ext>
-            </a:extLst>
-          </p:cNvPr>
-          <p:cNvSpPr txBox="1"/>
-          <p:nvPr/>
-        </p:nvSpPr>
-        <p:spPr>
-          <a:xfrm>
-            <a:off x="4443371" y="6038820"/>
-            <a:ext cx="245580" cy="230832"/>
-          </a:xfrm>
-          <a:prstGeom prst="rect">
-            <a:avLst/>
-          </a:prstGeom>
-          <a:noFill/>
-        </p:spPr>
-        <p:txBody>
-          <a:bodyPr wrap="none" rtlCol="0">
-            <a:spAutoFit/>
-          </a:bodyPr>
-          <a:lstStyle/>
-          <a:p>
-            <a:pPr algn="ctr"/>
-            <a:r>
-              <a:rPr lang="en-US" sz="900" dirty="0"/>
-              <a:t>0</a:t>
-            </a:r>
-          </a:p>
-        </p:txBody>
-      </p:sp>
-      <p:sp>
-        <p:nvSpPr>
-          <p:cNvPr id="244" name="TextBox 243">
-            <a:extLst>
-              <a:ext uri="{FF2B5EF4-FFF2-40B4-BE49-F238E27FC236}">
-                <a16:creationId xmlns:a16="http://schemas.microsoft.com/office/drawing/2014/main" id="{7F7540FB-45AD-3BC3-48E6-D125DD8550E7}"/>
-              </a:ext>
-            </a:extLst>
-          </p:cNvPr>
-          <p:cNvSpPr txBox="1"/>
-          <p:nvPr/>
-        </p:nvSpPr>
-        <p:spPr>
-          <a:xfrm>
-            <a:off x="4802612" y="6461559"/>
-            <a:ext cx="574196" cy="246221"/>
-          </a:xfrm>
-          <a:prstGeom prst="rect">
-            <a:avLst/>
-          </a:prstGeom>
-          <a:noFill/>
-        </p:spPr>
-        <p:txBody>
-          <a:bodyPr wrap="square" rtlCol="0">
-            <a:spAutoFit/>
-          </a:bodyPr>
-          <a:lstStyle/>
-          <a:p>
-            <a:pPr algn="ctr"/>
-            <a:r>
-              <a:rPr lang="en-US" sz="1000" dirty="0"/>
-              <a:t>Stall</a:t>
-            </a:r>
-          </a:p>
-        </p:txBody>
-      </p:sp>
-      <p:sp>
-        <p:nvSpPr>
-          <p:cNvPr id="245" name="TextBox 244">
-            <a:extLst>
-              <a:ext uri="{FF2B5EF4-FFF2-40B4-BE49-F238E27FC236}">
-                <a16:creationId xmlns:a16="http://schemas.microsoft.com/office/drawing/2014/main" id="{6F693865-D421-FB3F-F617-69C8DFB74DDA}"/>
-              </a:ext>
-            </a:extLst>
-          </p:cNvPr>
-          <p:cNvSpPr txBox="1"/>
-          <p:nvPr/>
-        </p:nvSpPr>
-        <p:spPr>
-          <a:xfrm>
-            <a:off x="3408450" y="6047112"/>
-            <a:ext cx="861489" cy="246221"/>
-          </a:xfrm>
-          <a:prstGeom prst="rect">
-            <a:avLst/>
-          </a:prstGeom>
-          <a:noFill/>
-        </p:spPr>
-        <p:txBody>
-          <a:bodyPr wrap="square" rtlCol="0">
-            <a:spAutoFit/>
-          </a:bodyPr>
-          <a:lstStyle/>
-          <a:p>
-            <a:pPr algn="ctr"/>
-            <a:r>
-              <a:rPr lang="en-US" sz="1000" dirty="0" err="1"/>
-              <a:t>stall_count</a:t>
-            </a:r>
-            <a:endParaRPr lang="en-US" sz="1000" dirty="0"/>
-          </a:p>
-        </p:txBody>
-      </p:sp>
-      <p:sp>
-        <p:nvSpPr>
-          <p:cNvPr id="246" name="TextBox 245">
-            <a:extLst>
-              <a:ext uri="{FF2B5EF4-FFF2-40B4-BE49-F238E27FC236}">
-                <a16:creationId xmlns:a16="http://schemas.microsoft.com/office/drawing/2014/main" id="{3BA26EF9-D46A-45DC-70BA-21364891CB27}"/>
-              </a:ext>
-            </a:extLst>
-          </p:cNvPr>
-          <p:cNvSpPr txBox="1"/>
-          <p:nvPr/>
-        </p:nvSpPr>
-        <p:spPr>
-          <a:xfrm>
-            <a:off x="3685159" y="5311002"/>
-            <a:ext cx="861489" cy="246221"/>
-          </a:xfrm>
-          <a:prstGeom prst="rect">
-            <a:avLst/>
-          </a:prstGeom>
-          <a:noFill/>
-        </p:spPr>
-        <p:txBody>
-          <a:bodyPr wrap="square" rtlCol="0">
-            <a:spAutoFit/>
-          </a:bodyPr>
-          <a:lstStyle/>
-          <a:p>
-            <a:pPr algn="ctr"/>
-            <a:r>
-              <a:rPr lang="en-US" sz="1000" dirty="0" err="1"/>
-              <a:t>start_stall</a:t>
-            </a:r>
-            <a:endParaRPr lang="en-US" sz="1000" dirty="0"/>
-          </a:p>
-        </p:txBody>
-      </p:sp>
-      <p:cxnSp>
-        <p:nvCxnSpPr>
-          <p:cNvPr id="12" name="Straight Arrow Connector 11">
-            <a:extLst>
-              <a:ext uri="{FF2B5EF4-FFF2-40B4-BE49-F238E27FC236}">
-                <a16:creationId xmlns:a16="http://schemas.microsoft.com/office/drawing/2014/main" id="{C104EDAA-FD8A-4089-C218-104118D04C57}"/>
-              </a:ext>
-            </a:extLst>
-          </p:cNvPr>
-          <p:cNvCxnSpPr>
-            <a:cxnSpLocks/>
-          </p:cNvCxnSpPr>
-          <p:nvPr/>
-        </p:nvCxnSpPr>
-        <p:spPr>
-          <a:xfrm>
-            <a:off x="3472911" y="6051625"/>
-            <a:ext cx="0" cy="402752"/>
-          </a:xfrm>
-          <a:prstGeom prst="straightConnector1">
-            <a:avLst/>
-          </a:prstGeom>
-          <a:ln>
-            <a:solidFill>
-              <a:srgbClr val="FF0000"/>
-            </a:solidFill>
-            <a:tailEnd type="triangle"/>
-          </a:ln>
-        </p:spPr>
-        <p:style>
-          <a:lnRef idx="2">
-            <a:schemeClr val="accent1"/>
-          </a:lnRef>
-          <a:fillRef idx="0">
-            <a:schemeClr val="accent1"/>
-          </a:fillRef>
-          <a:effectRef idx="1">
-            <a:schemeClr val="accent1"/>
-          </a:effectRef>
-          <a:fontRef idx="minor">
-            <a:schemeClr val="tx1"/>
-          </a:fontRef>
-        </p:style>
-      </p:cxnSp>
-      <p:sp>
-        <p:nvSpPr>
-          <p:cNvPr id="17" name="TextBox 16">
-            <a:extLst>
-              <a:ext uri="{FF2B5EF4-FFF2-40B4-BE49-F238E27FC236}">
-                <a16:creationId xmlns:a16="http://schemas.microsoft.com/office/drawing/2014/main" id="{DD23CE11-915B-B2E0-552F-137C75A7E9C7}"/>
-              </a:ext>
-            </a:extLst>
-          </p:cNvPr>
-          <p:cNvSpPr txBox="1"/>
-          <p:nvPr/>
-        </p:nvSpPr>
-        <p:spPr>
-          <a:xfrm>
-            <a:off x="2990194" y="6420855"/>
-            <a:ext cx="935914" cy="246221"/>
-          </a:xfrm>
-          <a:prstGeom prst="rect">
-            <a:avLst/>
-          </a:prstGeom>
-          <a:noFill/>
-        </p:spPr>
-        <p:txBody>
-          <a:bodyPr wrap="square" rtlCol="0">
-            <a:spAutoFit/>
-          </a:bodyPr>
-          <a:lstStyle/>
-          <a:p>
-            <a:pPr algn="ctr"/>
-            <a:r>
-              <a:rPr lang="en-US" sz="1000" dirty="0" err="1"/>
-              <a:t>double_stall</a:t>
-            </a:r>
-            <a:endParaRPr lang="en-US" sz="1000" dirty="0"/>
-          </a:p>
-        </p:txBody>
-      </p:sp>
-      <p:sp>
-        <p:nvSpPr>
-          <p:cNvPr id="32" name="Rectangle 31">
-            <a:extLst>
-              <a:ext uri="{FF2B5EF4-FFF2-40B4-BE49-F238E27FC236}">
-                <a16:creationId xmlns:a16="http://schemas.microsoft.com/office/drawing/2014/main" id="{2143C07A-7BD3-285F-779B-EA5E4E2370C1}"/>
-              </a:ext>
-            </a:extLst>
-          </p:cNvPr>
-          <p:cNvSpPr/>
-          <p:nvPr/>
-        </p:nvSpPr>
-        <p:spPr>
-          <a:xfrm>
-            <a:off x="1076734" y="4385870"/>
-            <a:ext cx="865785" cy="460641"/>
-          </a:xfrm>
-          <a:prstGeom prst="rect">
-            <a:avLst/>
-          </a:prstGeom>
-          <a:solidFill>
-            <a:schemeClr val="bg1"/>
-          </a:solidFill>
-        </p:spPr>
-        <p:style>
-          <a:lnRef idx="2">
-            <a:schemeClr val="accent1">
-              <a:shade val="15000"/>
-            </a:schemeClr>
-          </a:lnRef>
-          <a:fillRef idx="1">
-            <a:schemeClr val="accent1"/>
-          </a:fillRef>
-          <a:effectRef idx="0">
-            <a:schemeClr val="accent1"/>
-          </a:effectRef>
-          <a:fontRef idx="minor">
-            <a:schemeClr val="lt1"/>
-          </a:fontRef>
-        </p:style>
-        <p:txBody>
-          <a:bodyPr rtlCol="0" anchor="ctr"/>
-          <a:lstStyle/>
-          <a:p>
-            <a:pPr algn="ctr"/>
-            <a:r>
-              <a:rPr lang="en-US" dirty="0"/>
-              <a:t>PC</a:t>
-            </a:r>
-          </a:p>
-        </p:txBody>
-      </p:sp>
-      <p:sp>
-        <p:nvSpPr>
-          <p:cNvPr id="34" name="TextBox 33">
-            <a:extLst>
-              <a:ext uri="{FF2B5EF4-FFF2-40B4-BE49-F238E27FC236}">
-                <a16:creationId xmlns:a16="http://schemas.microsoft.com/office/drawing/2014/main" id="{B6011141-02A1-8CC5-681B-B9793C2C8CE0}"/>
-              </a:ext>
-            </a:extLst>
-          </p:cNvPr>
-          <p:cNvSpPr txBox="1"/>
-          <p:nvPr/>
-        </p:nvSpPr>
-        <p:spPr>
-          <a:xfrm>
-            <a:off x="1025974" y="4354867"/>
-            <a:ext cx="986167" cy="400110"/>
-          </a:xfrm>
-          <a:prstGeom prst="rect">
-            <a:avLst/>
-          </a:prstGeom>
-          <a:noFill/>
-        </p:spPr>
-        <p:txBody>
-          <a:bodyPr wrap="none" rtlCol="0">
-            <a:spAutoFit/>
-          </a:bodyPr>
-          <a:lstStyle/>
-          <a:p>
-            <a:pPr algn="ctr"/>
-            <a:r>
-              <a:rPr lang="en-US" sz="1000" dirty="0"/>
-              <a:t>Sign Extension</a:t>
-            </a:r>
-          </a:p>
-          <a:p>
-            <a:pPr algn="ctr"/>
-            <a:endParaRPr lang="en-US" sz="1000" dirty="0"/>
-          </a:p>
-        </p:txBody>
-      </p:sp>
-      <p:sp>
-        <p:nvSpPr>
-          <p:cNvPr id="35" name="TextBox 34">
-            <a:extLst>
-              <a:ext uri="{FF2B5EF4-FFF2-40B4-BE49-F238E27FC236}">
-                <a16:creationId xmlns:a16="http://schemas.microsoft.com/office/drawing/2014/main" id="{B00F8394-6420-6E0A-2BDA-EFD3CDF8A0E0}"/>
-              </a:ext>
-            </a:extLst>
-          </p:cNvPr>
-          <p:cNvSpPr txBox="1"/>
-          <p:nvPr/>
-        </p:nvSpPr>
-        <p:spPr>
-          <a:xfrm>
-            <a:off x="1581773" y="4562161"/>
-            <a:ext cx="407484" cy="230832"/>
-          </a:xfrm>
-          <a:prstGeom prst="rect">
-            <a:avLst/>
-          </a:prstGeom>
-          <a:noFill/>
-        </p:spPr>
-        <p:txBody>
-          <a:bodyPr wrap="none" rtlCol="0">
-            <a:spAutoFit/>
-          </a:bodyPr>
-          <a:lstStyle/>
-          <a:p>
-            <a:pPr algn="ctr"/>
-            <a:r>
-              <a:rPr lang="en-US" sz="900" dirty="0" err="1"/>
-              <a:t>imm</a:t>
-            </a:r>
-            <a:endParaRPr lang="en-US" sz="900" dirty="0"/>
-          </a:p>
-        </p:txBody>
-      </p:sp>
-      <p:cxnSp>
-        <p:nvCxnSpPr>
-          <p:cNvPr id="47" name="Straight Arrow Connector 46">
-            <a:extLst>
-              <a:ext uri="{FF2B5EF4-FFF2-40B4-BE49-F238E27FC236}">
-                <a16:creationId xmlns:a16="http://schemas.microsoft.com/office/drawing/2014/main" id="{3AE93C80-3013-DEAA-0C8C-8059FBC73417}"/>
-              </a:ext>
-            </a:extLst>
-          </p:cNvPr>
-          <p:cNvCxnSpPr>
-            <a:cxnSpLocks/>
-          </p:cNvCxnSpPr>
-          <p:nvPr/>
-        </p:nvCxnSpPr>
-        <p:spPr>
-          <a:xfrm>
-            <a:off x="905315" y="4716303"/>
-            <a:ext cx="171419" cy="0"/>
-          </a:xfrm>
-          <a:prstGeom prst="straightConnector1">
-            <a:avLst/>
-          </a:prstGeom>
-          <a:ln>
-            <a:tailEnd type="triangle"/>
-          </a:ln>
-        </p:spPr>
-        <p:style>
-          <a:lnRef idx="2">
-            <a:schemeClr val="accent1"/>
-          </a:lnRef>
-          <a:fillRef idx="0">
-            <a:schemeClr val="accent1"/>
-          </a:fillRef>
-          <a:effectRef idx="1">
-            <a:schemeClr val="accent1"/>
-          </a:effectRef>
-          <a:fontRef idx="minor">
-            <a:schemeClr val="tx1"/>
-          </a:fontRef>
-        </p:style>
-      </p:cxnSp>
-      <p:sp>
-        <p:nvSpPr>
-          <p:cNvPr id="53" name="TextBox 52">
-            <a:extLst>
-              <a:ext uri="{FF2B5EF4-FFF2-40B4-BE49-F238E27FC236}">
-                <a16:creationId xmlns:a16="http://schemas.microsoft.com/office/drawing/2014/main" id="{54DB48A0-8679-7515-A495-8900C2A20FCD}"/>
-              </a:ext>
-            </a:extLst>
-          </p:cNvPr>
-          <p:cNvSpPr txBox="1"/>
-          <p:nvPr/>
-        </p:nvSpPr>
-        <p:spPr>
-          <a:xfrm>
-            <a:off x="1019434" y="4600887"/>
-            <a:ext cx="407484" cy="230832"/>
-          </a:xfrm>
-          <a:prstGeom prst="rect">
-            <a:avLst/>
-          </a:prstGeom>
-          <a:noFill/>
-        </p:spPr>
-        <p:txBody>
-          <a:bodyPr wrap="none" rtlCol="0">
-            <a:spAutoFit/>
-          </a:bodyPr>
-          <a:lstStyle/>
-          <a:p>
-            <a:pPr algn="ctr"/>
-            <a:r>
-              <a:rPr lang="en-US" sz="900" dirty="0" err="1"/>
-              <a:t>instr</a:t>
-            </a:r>
-            <a:endParaRPr lang="en-US" sz="900" dirty="0"/>
-          </a:p>
-        </p:txBody>
-      </p:sp>
-      <p:cxnSp>
-        <p:nvCxnSpPr>
-          <p:cNvPr id="59" name="Straight Arrow Connector 58">
-            <a:extLst>
-              <a:ext uri="{FF2B5EF4-FFF2-40B4-BE49-F238E27FC236}">
-                <a16:creationId xmlns:a16="http://schemas.microsoft.com/office/drawing/2014/main" id="{F5DC23A1-E3C9-66CD-B3A5-E308601A02A9}"/>
-              </a:ext>
-            </a:extLst>
-          </p:cNvPr>
-          <p:cNvCxnSpPr>
-            <a:cxnSpLocks/>
-          </p:cNvCxnSpPr>
-          <p:nvPr/>
-        </p:nvCxnSpPr>
-        <p:spPr>
-          <a:xfrm>
-            <a:off x="1953050" y="4696912"/>
-            <a:ext cx="377733" cy="0"/>
-          </a:xfrm>
-          <a:prstGeom prst="straightConnector1">
-            <a:avLst/>
-          </a:prstGeom>
-          <a:ln>
-            <a:solidFill>
-              <a:srgbClr val="FF0000"/>
-            </a:solidFill>
-            <a:tailEnd type="triangle"/>
-          </a:ln>
-        </p:spPr>
-        <p:style>
-          <a:lnRef idx="2">
-            <a:schemeClr val="accent1"/>
-          </a:lnRef>
-          <a:fillRef idx="0">
-            <a:schemeClr val="accent1"/>
-          </a:fillRef>
-          <a:effectRef idx="1">
-            <a:schemeClr val="accent1"/>
-          </a:effectRef>
-          <a:fontRef idx="minor">
-            <a:schemeClr val="tx1"/>
-          </a:fontRef>
-        </p:style>
-      </p:cxnSp>
-      <p:grpSp>
-        <p:nvGrpSpPr>
-          <p:cNvPr id="66" name="Group 65">
-            <a:extLst>
-              <a:ext uri="{FF2B5EF4-FFF2-40B4-BE49-F238E27FC236}">
-                <a16:creationId xmlns:a16="http://schemas.microsoft.com/office/drawing/2014/main" id="{1043A246-575E-278D-E538-E3ACE7F6C7ED}"/>
-              </a:ext>
-            </a:extLst>
-          </p:cNvPr>
-          <p:cNvGrpSpPr/>
-          <p:nvPr/>
-        </p:nvGrpSpPr>
-        <p:grpSpPr>
-          <a:xfrm>
-            <a:off x="1721311" y="1581032"/>
-            <a:ext cx="234557" cy="870633"/>
-            <a:chOff x="6175096" y="3854324"/>
-            <a:chExt cx="144932" cy="375881"/>
-          </a:xfrm>
-        </p:grpSpPr>
-        <p:cxnSp>
-          <p:nvCxnSpPr>
-            <p:cNvPr id="67" name="Straight Connector 66">
-              <a:extLst>
-                <a:ext uri="{FF2B5EF4-FFF2-40B4-BE49-F238E27FC236}">
-                  <a16:creationId xmlns:a16="http://schemas.microsoft.com/office/drawing/2014/main" id="{2A85262C-2A8B-7F76-B3E9-6E12094B4BB8}"/>
-                </a:ext>
-              </a:extLst>
-            </p:cNvPr>
-            <p:cNvCxnSpPr>
-              <a:cxnSpLocks/>
-            </p:cNvCxnSpPr>
-            <p:nvPr/>
-          </p:nvCxnSpPr>
-          <p:spPr>
-            <a:xfrm>
-              <a:off x="6180266" y="3861114"/>
-              <a:ext cx="0" cy="369091"/>
-            </a:xfrm>
-            <a:prstGeom prst="line">
-              <a:avLst/>
-            </a:prstGeom>
-          </p:spPr>
-          <p:style>
-            <a:lnRef idx="2">
-              <a:schemeClr val="accent1"/>
-            </a:lnRef>
-            <a:fillRef idx="0">
-              <a:schemeClr val="accent1"/>
-            </a:fillRef>
-            <a:effectRef idx="1">
-              <a:schemeClr val="accent1"/>
-            </a:effectRef>
-            <a:fontRef idx="minor">
-              <a:schemeClr val="tx1"/>
-            </a:fontRef>
-          </p:style>
-        </p:cxnSp>
-        <p:cxnSp>
-          <p:nvCxnSpPr>
-            <p:cNvPr id="75" name="Straight Connector 74">
-              <a:extLst>
-                <a:ext uri="{FF2B5EF4-FFF2-40B4-BE49-F238E27FC236}">
-                  <a16:creationId xmlns:a16="http://schemas.microsoft.com/office/drawing/2014/main" id="{D2FFBFEA-3D6D-7E02-E9CC-F2B56CBCAF6C}"/>
-                </a:ext>
-              </a:extLst>
-            </p:cNvPr>
-            <p:cNvCxnSpPr>
-              <a:cxnSpLocks/>
-            </p:cNvCxnSpPr>
-            <p:nvPr/>
-          </p:nvCxnSpPr>
-          <p:spPr>
-            <a:xfrm>
-              <a:off x="6320028" y="3936909"/>
-              <a:ext cx="0" cy="212558"/>
-            </a:xfrm>
-            <a:prstGeom prst="line">
-              <a:avLst/>
-            </a:prstGeom>
-          </p:spPr>
-          <p:style>
-            <a:lnRef idx="2">
-              <a:schemeClr val="accent1"/>
-            </a:lnRef>
-            <a:fillRef idx="0">
-              <a:schemeClr val="accent1"/>
-            </a:fillRef>
-            <a:effectRef idx="1">
-              <a:schemeClr val="accent1"/>
-            </a:effectRef>
-            <a:fontRef idx="minor">
-              <a:schemeClr val="tx1"/>
-            </a:fontRef>
-          </p:style>
-        </p:cxnSp>
-        <p:cxnSp>
-          <p:nvCxnSpPr>
-            <p:cNvPr id="76" name="Straight Connector 75">
-              <a:extLst>
-                <a:ext uri="{FF2B5EF4-FFF2-40B4-BE49-F238E27FC236}">
-                  <a16:creationId xmlns:a16="http://schemas.microsoft.com/office/drawing/2014/main" id="{4391D130-D329-A973-7C7C-351FDC1DB19B}"/>
-                </a:ext>
-              </a:extLst>
-            </p:cNvPr>
-            <p:cNvCxnSpPr>
-              <a:cxnSpLocks/>
-            </p:cNvCxnSpPr>
-            <p:nvPr/>
-          </p:nvCxnSpPr>
-          <p:spPr>
-            <a:xfrm flipH="1">
-              <a:off x="6175096" y="4152620"/>
-              <a:ext cx="144932" cy="77585"/>
-            </a:xfrm>
-            <a:prstGeom prst="line">
-              <a:avLst/>
-            </a:prstGeom>
-          </p:spPr>
-          <p:style>
-            <a:lnRef idx="2">
-              <a:schemeClr val="accent1"/>
-            </a:lnRef>
-            <a:fillRef idx="0">
-              <a:schemeClr val="accent1"/>
-            </a:fillRef>
-            <a:effectRef idx="1">
-              <a:schemeClr val="accent1"/>
-            </a:effectRef>
-            <a:fontRef idx="minor">
-              <a:schemeClr val="tx1"/>
-            </a:fontRef>
-          </p:style>
-        </p:cxnSp>
-        <p:cxnSp>
-          <p:nvCxnSpPr>
-            <p:cNvPr id="77" name="Straight Connector 76">
-              <a:extLst>
-                <a:ext uri="{FF2B5EF4-FFF2-40B4-BE49-F238E27FC236}">
-                  <a16:creationId xmlns:a16="http://schemas.microsoft.com/office/drawing/2014/main" id="{35B1BBA6-27CC-E2BA-CFC7-3DBD977056F2}"/>
-                </a:ext>
-              </a:extLst>
-            </p:cNvPr>
-            <p:cNvCxnSpPr>
-              <a:cxnSpLocks/>
-            </p:cNvCxnSpPr>
-            <p:nvPr/>
-          </p:nvCxnSpPr>
-          <p:spPr>
-            <a:xfrm flipH="1" flipV="1">
-              <a:off x="6175096" y="3854324"/>
-              <a:ext cx="144932" cy="85738"/>
-            </a:xfrm>
-            <a:prstGeom prst="line">
-              <a:avLst/>
-            </a:prstGeom>
-          </p:spPr>
-          <p:style>
-            <a:lnRef idx="2">
-              <a:schemeClr val="accent1"/>
-            </a:lnRef>
-            <a:fillRef idx="0">
-              <a:schemeClr val="accent1"/>
-            </a:fillRef>
-            <a:effectRef idx="1">
-              <a:schemeClr val="accent1"/>
-            </a:effectRef>
-            <a:fontRef idx="minor">
-              <a:schemeClr val="tx1"/>
-            </a:fontRef>
-          </p:style>
-        </p:cxnSp>
-      </p:grpSp>
-      <p:cxnSp>
-        <p:nvCxnSpPr>
-          <p:cNvPr id="78" name="Straight Connector 77">
-            <a:extLst>
-              <a:ext uri="{FF2B5EF4-FFF2-40B4-BE49-F238E27FC236}">
-                <a16:creationId xmlns:a16="http://schemas.microsoft.com/office/drawing/2014/main" id="{2D1CB698-C310-35E9-96F7-FB8DB191A463}"/>
-              </a:ext>
-            </a:extLst>
-          </p:cNvPr>
-          <p:cNvCxnSpPr>
-            <a:cxnSpLocks/>
-          </p:cNvCxnSpPr>
-          <p:nvPr/>
-        </p:nvCxnSpPr>
-        <p:spPr>
-          <a:xfrm>
-            <a:off x="1956844" y="2028868"/>
-            <a:ext cx="301247" cy="0"/>
-          </a:xfrm>
-          <a:prstGeom prst="line">
-            <a:avLst/>
-          </a:prstGeom>
-        </p:spPr>
-        <p:style>
-          <a:lnRef idx="2">
-            <a:schemeClr val="accent1"/>
-          </a:lnRef>
-          <a:fillRef idx="0">
-            <a:schemeClr val="accent1"/>
-          </a:fillRef>
-          <a:effectRef idx="1">
-            <a:schemeClr val="accent1"/>
-          </a:effectRef>
-          <a:fontRef idx="minor">
-            <a:schemeClr val="tx1"/>
-          </a:fontRef>
-        </p:style>
-      </p:cxnSp>
-      <p:cxnSp>
-        <p:nvCxnSpPr>
-          <p:cNvPr id="79" name="Straight Connector 78">
-            <a:extLst>
-              <a:ext uri="{FF2B5EF4-FFF2-40B4-BE49-F238E27FC236}">
-                <a16:creationId xmlns:a16="http://schemas.microsoft.com/office/drawing/2014/main" id="{85985002-8499-9138-27D1-683C5A5ED252}"/>
-              </a:ext>
-            </a:extLst>
-          </p:cNvPr>
-          <p:cNvCxnSpPr>
-            <a:cxnSpLocks/>
-          </p:cNvCxnSpPr>
-          <p:nvPr/>
-        </p:nvCxnSpPr>
-        <p:spPr>
-          <a:xfrm>
-            <a:off x="2258572" y="838703"/>
-            <a:ext cx="0" cy="1198389"/>
-          </a:xfrm>
-          <a:prstGeom prst="line">
-            <a:avLst/>
-          </a:prstGeom>
-        </p:spPr>
-        <p:style>
-          <a:lnRef idx="2">
-            <a:schemeClr val="accent1"/>
-          </a:lnRef>
-          <a:fillRef idx="0">
-            <a:schemeClr val="accent1"/>
-          </a:fillRef>
-          <a:effectRef idx="1">
-            <a:schemeClr val="accent1"/>
-          </a:effectRef>
-          <a:fontRef idx="minor">
-            <a:schemeClr val="tx1"/>
-          </a:fontRef>
-        </p:style>
-      </p:cxnSp>
-      <p:cxnSp>
-        <p:nvCxnSpPr>
-          <p:cNvPr id="80" name="Straight Arrow Connector 79">
-            <a:extLst>
-              <a:ext uri="{FF2B5EF4-FFF2-40B4-BE49-F238E27FC236}">
-                <a16:creationId xmlns:a16="http://schemas.microsoft.com/office/drawing/2014/main" id="{FB0CE3A1-6952-8856-AAEC-8A125B2DDFE8}"/>
-              </a:ext>
-            </a:extLst>
-          </p:cNvPr>
-          <p:cNvCxnSpPr>
-            <a:cxnSpLocks/>
-          </p:cNvCxnSpPr>
-          <p:nvPr/>
-        </p:nvCxnSpPr>
-        <p:spPr>
-          <a:xfrm>
-            <a:off x="1350952" y="1932456"/>
-            <a:ext cx="374301" cy="0"/>
-          </a:xfrm>
-          <a:prstGeom prst="straightConnector1">
-            <a:avLst/>
-          </a:prstGeom>
-          <a:ln>
-            <a:tailEnd type="triangle"/>
-          </a:ln>
-        </p:spPr>
-        <p:style>
-          <a:lnRef idx="2">
-            <a:schemeClr val="accent1"/>
-          </a:lnRef>
-          <a:fillRef idx="0">
-            <a:schemeClr val="accent1"/>
-          </a:fillRef>
-          <a:effectRef idx="1">
-            <a:schemeClr val="accent1"/>
-          </a:effectRef>
-          <a:fontRef idx="minor">
-            <a:schemeClr val="tx1"/>
-          </a:fontRef>
-        </p:style>
-      </p:cxnSp>
-      <p:sp>
-        <p:nvSpPr>
-          <p:cNvPr id="84" name="TextBox 83">
-            <a:extLst>
-              <a:ext uri="{FF2B5EF4-FFF2-40B4-BE49-F238E27FC236}">
-                <a16:creationId xmlns:a16="http://schemas.microsoft.com/office/drawing/2014/main" id="{8F69FFC4-D90F-87A3-72AA-E53AD00637DE}"/>
-              </a:ext>
-            </a:extLst>
-          </p:cNvPr>
-          <p:cNvSpPr txBox="1"/>
-          <p:nvPr/>
-        </p:nvSpPr>
-        <p:spPr>
-          <a:xfrm>
-            <a:off x="288634" y="1472199"/>
-            <a:ext cx="413896" cy="230832"/>
-          </a:xfrm>
-          <a:prstGeom prst="rect">
-            <a:avLst/>
-          </a:prstGeom>
-          <a:noFill/>
-        </p:spPr>
-        <p:txBody>
-          <a:bodyPr wrap="none" rtlCol="0">
-            <a:spAutoFit/>
-          </a:bodyPr>
-          <a:lstStyle/>
-          <a:p>
-            <a:pPr algn="ctr"/>
-            <a:r>
-              <a:rPr lang="en-US" sz="900" dirty="0"/>
-              <a:t>NPC</a:t>
-            </a:r>
-          </a:p>
-        </p:txBody>
-      </p:sp>
-      <p:sp>
-        <p:nvSpPr>
-          <p:cNvPr id="86" name="TextBox 85">
-            <a:extLst>
-              <a:ext uri="{FF2B5EF4-FFF2-40B4-BE49-F238E27FC236}">
-                <a16:creationId xmlns:a16="http://schemas.microsoft.com/office/drawing/2014/main" id="{D66AEAD3-1629-21A3-A829-EE39F53D4206}"/>
-              </a:ext>
-            </a:extLst>
-          </p:cNvPr>
-          <p:cNvSpPr txBox="1"/>
-          <p:nvPr/>
-        </p:nvSpPr>
-        <p:spPr>
-          <a:xfrm>
-            <a:off x="291787" y="1887572"/>
-            <a:ext cx="407484" cy="230832"/>
-          </a:xfrm>
-          <a:prstGeom prst="rect">
-            <a:avLst/>
-          </a:prstGeom>
-          <a:noFill/>
-        </p:spPr>
-        <p:txBody>
-          <a:bodyPr wrap="none" rtlCol="0">
-            <a:spAutoFit/>
-          </a:bodyPr>
-          <a:lstStyle/>
-          <a:p>
-            <a:pPr algn="ctr"/>
-            <a:r>
-              <a:rPr lang="en-US" sz="900" dirty="0" err="1"/>
-              <a:t>imm</a:t>
-            </a:r>
-            <a:endParaRPr lang="en-US" sz="900" dirty="0"/>
-          </a:p>
-        </p:txBody>
-      </p:sp>
-      <p:cxnSp>
-        <p:nvCxnSpPr>
-          <p:cNvPr id="88" name="Straight Arrow Connector 87">
-            <a:extLst>
-              <a:ext uri="{FF2B5EF4-FFF2-40B4-BE49-F238E27FC236}">
-                <a16:creationId xmlns:a16="http://schemas.microsoft.com/office/drawing/2014/main" id="{0CB8EB19-84A3-9607-CCD6-ED9DECBD1C71}"/>
-              </a:ext>
-            </a:extLst>
-          </p:cNvPr>
-          <p:cNvCxnSpPr>
-            <a:cxnSpLocks/>
-          </p:cNvCxnSpPr>
-          <p:nvPr/>
-        </p:nvCxnSpPr>
-        <p:spPr>
-          <a:xfrm flipV="1">
-            <a:off x="1635148" y="2090546"/>
-            <a:ext cx="100338" cy="2498"/>
-          </a:xfrm>
-          <a:prstGeom prst="straightConnector1">
-            <a:avLst/>
-          </a:prstGeom>
-          <a:ln>
-            <a:tailEnd type="triangle"/>
-          </a:ln>
-        </p:spPr>
-        <p:style>
-          <a:lnRef idx="2">
-            <a:schemeClr val="accent1"/>
-          </a:lnRef>
-          <a:fillRef idx="0">
-            <a:schemeClr val="accent1"/>
-          </a:fillRef>
-          <a:effectRef idx="1">
-            <a:schemeClr val="accent1"/>
-          </a:effectRef>
-          <a:fontRef idx="minor">
-            <a:schemeClr val="tx1"/>
-          </a:fontRef>
-        </p:style>
-      </p:cxnSp>
-      <p:sp>
-        <p:nvSpPr>
-          <p:cNvPr id="106" name="TextBox 105">
-            <a:extLst>
-              <a:ext uri="{FF2B5EF4-FFF2-40B4-BE49-F238E27FC236}">
-                <a16:creationId xmlns:a16="http://schemas.microsoft.com/office/drawing/2014/main" id="{A046F096-97E2-8456-2195-55E7CAB154C6}"/>
-              </a:ext>
-            </a:extLst>
-          </p:cNvPr>
-          <p:cNvSpPr txBox="1"/>
-          <p:nvPr/>
-        </p:nvSpPr>
-        <p:spPr>
-          <a:xfrm>
-            <a:off x="1313055" y="1972211"/>
-            <a:ext cx="413896" cy="230832"/>
-          </a:xfrm>
-          <a:prstGeom prst="rect">
-            <a:avLst/>
-          </a:prstGeom>
-          <a:noFill/>
-        </p:spPr>
-        <p:txBody>
-          <a:bodyPr wrap="none" rtlCol="0">
-            <a:spAutoFit/>
-          </a:bodyPr>
-          <a:lstStyle/>
-          <a:p>
-            <a:pPr algn="ctr"/>
-            <a:r>
-              <a:rPr lang="en-US" sz="900" dirty="0"/>
               <a:t>NPC</a:t>
             </a:r>
           </a:p>
@@ -12319,10 +10906,10 @@
       </p:sp>
       <p:grpSp>
         <p:nvGrpSpPr>
-          <p:cNvPr id="107" name="Group 106">
-            <a:extLst>
-              <a:ext uri="{FF2B5EF4-FFF2-40B4-BE49-F238E27FC236}">
-                <a16:creationId xmlns:a16="http://schemas.microsoft.com/office/drawing/2014/main" id="{B773C7A5-7ABC-0594-7851-14CF77797137}"/>
+          <p:cNvPr id="137" name="Group 136">
+            <a:extLst>
+              <a:ext uri="{FF2B5EF4-FFF2-40B4-BE49-F238E27FC236}">
+                <a16:creationId xmlns:a16="http://schemas.microsoft.com/office/drawing/2014/main" id="{8B5AEF34-ADB3-754B-DE80-ABD4D3F0450B}"/>
               </a:ext>
             </a:extLst>
           </p:cNvPr>
@@ -12331,7 +10918,7 @@
         </p:nvGrpSpPr>
         <p:grpSpPr>
           <a:xfrm>
-            <a:off x="827819" y="1481654"/>
+            <a:off x="3849394" y="1970747"/>
             <a:ext cx="292770" cy="637674"/>
             <a:chOff x="1074820" y="1507958"/>
             <a:chExt cx="292770" cy="637674"/>
@@ -12339,10 +10926,10 @@
         </p:grpSpPr>
         <p:cxnSp>
           <p:nvCxnSpPr>
-            <p:cNvPr id="108" name="Straight Connector 107">
+            <p:cNvPr id="140" name="Straight Connector 139">
               <a:extLst>
                 <a:ext uri="{FF2B5EF4-FFF2-40B4-BE49-F238E27FC236}">
-                  <a16:creationId xmlns:a16="http://schemas.microsoft.com/office/drawing/2014/main" id="{6C512B38-9D33-9802-2822-CD1CA18AE903}"/>
+                  <a16:creationId xmlns:a16="http://schemas.microsoft.com/office/drawing/2014/main" id="{1CDC5C6D-A82B-99F5-6FC5-EEDD54CCF190}"/>
                 </a:ext>
               </a:extLst>
             </p:cNvPr>
@@ -12377,10 +10964,10 @@
         </p:cxnSp>
         <p:cxnSp>
           <p:nvCxnSpPr>
-            <p:cNvPr id="109" name="Straight Connector 108">
+            <p:cNvPr id="142" name="Straight Connector 141">
               <a:extLst>
                 <a:ext uri="{FF2B5EF4-FFF2-40B4-BE49-F238E27FC236}">
-                  <a16:creationId xmlns:a16="http://schemas.microsoft.com/office/drawing/2014/main" id="{2C1E6082-325E-1C19-F1D4-A1EA70AAB1E2}"/>
+                  <a16:creationId xmlns:a16="http://schemas.microsoft.com/office/drawing/2014/main" id="{A4EF0649-3BED-33BA-DD96-FB9FA511E98C}"/>
                 </a:ext>
               </a:extLst>
             </p:cNvPr>
@@ -12415,10 +11002,10 @@
         </p:cxnSp>
         <p:cxnSp>
           <p:nvCxnSpPr>
-            <p:cNvPr id="110" name="Straight Connector 109">
+            <p:cNvPr id="143" name="Straight Connector 142">
               <a:extLst>
                 <a:ext uri="{FF2B5EF4-FFF2-40B4-BE49-F238E27FC236}">
-                  <a16:creationId xmlns:a16="http://schemas.microsoft.com/office/drawing/2014/main" id="{EF5A8EBA-3D52-5193-CF08-8C312B914CA4}"/>
+                  <a16:creationId xmlns:a16="http://schemas.microsoft.com/office/drawing/2014/main" id="{F388C33F-5E4F-4884-089C-DF42CBAA3E4C}"/>
                 </a:ext>
               </a:extLst>
             </p:cNvPr>
@@ -12453,10 +11040,10 @@
         </p:cxnSp>
         <p:cxnSp>
           <p:nvCxnSpPr>
-            <p:cNvPr id="145" name="Straight Connector 144">
+            <p:cNvPr id="144" name="Straight Connector 143">
               <a:extLst>
                 <a:ext uri="{FF2B5EF4-FFF2-40B4-BE49-F238E27FC236}">
-                  <a16:creationId xmlns:a16="http://schemas.microsoft.com/office/drawing/2014/main" id="{5EDBAB12-11C0-1144-0AFF-2BADC04AFE6A}"/>
+                  <a16:creationId xmlns:a16="http://schemas.microsoft.com/office/drawing/2014/main" id="{735B5BAB-BBDC-4A8E-3A36-97A6349BBE95}"/>
                 </a:ext>
               </a:extLst>
             </p:cNvPr>
@@ -12491,10 +11078,10 @@
         </p:cxnSp>
         <p:cxnSp>
           <p:nvCxnSpPr>
-            <p:cNvPr id="160" name="Straight Connector 159">
+            <p:cNvPr id="147" name="Straight Connector 146">
               <a:extLst>
                 <a:ext uri="{FF2B5EF4-FFF2-40B4-BE49-F238E27FC236}">
-                  <a16:creationId xmlns:a16="http://schemas.microsoft.com/office/drawing/2014/main" id="{DDEFFE58-6F0A-18D2-7CE9-1E2C4606A338}"/>
+                  <a16:creationId xmlns:a16="http://schemas.microsoft.com/office/drawing/2014/main" id="{45C3381F-390D-C2F3-E51B-5BEF92543EEE}"/>
                 </a:ext>
               </a:extLst>
             </p:cNvPr>
@@ -12529,10 +11116,10 @@
         </p:cxnSp>
         <p:cxnSp>
           <p:nvCxnSpPr>
-            <p:cNvPr id="161" name="Straight Connector 160">
+            <p:cNvPr id="159" name="Straight Connector 158">
               <a:extLst>
                 <a:ext uri="{FF2B5EF4-FFF2-40B4-BE49-F238E27FC236}">
-                  <a16:creationId xmlns:a16="http://schemas.microsoft.com/office/drawing/2014/main" id="{97F24868-95BD-8279-7EDC-F00F0AECBC7C}"/>
+                  <a16:creationId xmlns:a16="http://schemas.microsoft.com/office/drawing/2014/main" id="{865DD84B-4F29-10E5-2D86-6E2018D0463C}"/>
                 </a:ext>
               </a:extLst>
             </p:cNvPr>
@@ -12567,10 +11154,10 @@
         </p:cxnSp>
         <p:cxnSp>
           <p:nvCxnSpPr>
-            <p:cNvPr id="175" name="Straight Connector 174">
+            <p:cNvPr id="171" name="Straight Connector 170">
               <a:extLst>
                 <a:ext uri="{FF2B5EF4-FFF2-40B4-BE49-F238E27FC236}">
-                  <a16:creationId xmlns:a16="http://schemas.microsoft.com/office/drawing/2014/main" id="{03CF6495-3B91-BA26-4338-8F6006BE8C29}"/>
+                  <a16:creationId xmlns:a16="http://schemas.microsoft.com/office/drawing/2014/main" id="{8DAAB301-BA98-4D82-23E6-354878570163}"/>
                 </a:ext>
               </a:extLst>
             </p:cNvPr>
@@ -12606,10 +11193,10 @@
       </p:grpSp>
       <p:cxnSp>
         <p:nvCxnSpPr>
-          <p:cNvPr id="176" name="Straight Arrow Connector 175">
-            <a:extLst>
-              <a:ext uri="{FF2B5EF4-FFF2-40B4-BE49-F238E27FC236}">
-                <a16:creationId xmlns:a16="http://schemas.microsoft.com/office/drawing/2014/main" id="{83721058-E86C-EB18-A1F1-24BD0BF2686D}"/>
+          <p:cNvPr id="173" name="Straight Arrow Connector 172">
+            <a:extLst>
+              <a:ext uri="{FF2B5EF4-FFF2-40B4-BE49-F238E27FC236}">
+                <a16:creationId xmlns:a16="http://schemas.microsoft.com/office/drawing/2014/main" id="{526219D0-7A62-A14B-B0E1-B1C20BB4E6B6}"/>
               </a:ext>
             </a:extLst>
           </p:cNvPr>
@@ -12620,7 +11207,7 @@
         </p:nvCxnSpPr>
         <p:spPr>
           <a:xfrm>
-            <a:off x="653884" y="2013049"/>
+            <a:off x="3675459" y="2502142"/>
             <a:ext cx="173935" cy="0"/>
           </a:xfrm>
           <a:prstGeom prst="straightConnector1">
@@ -12647,10 +11234,10 @@
       </p:cxnSp>
       <p:cxnSp>
         <p:nvCxnSpPr>
-          <p:cNvPr id="177" name="Straight Arrow Connector 176">
-            <a:extLst>
-              <a:ext uri="{FF2B5EF4-FFF2-40B4-BE49-F238E27FC236}">
-                <a16:creationId xmlns:a16="http://schemas.microsoft.com/office/drawing/2014/main" id="{954FA614-589E-5FD9-2BE1-A854DE9D07B9}"/>
+          <p:cNvPr id="174" name="Straight Arrow Connector 173">
+            <a:extLst>
+              <a:ext uri="{FF2B5EF4-FFF2-40B4-BE49-F238E27FC236}">
+                <a16:creationId xmlns:a16="http://schemas.microsoft.com/office/drawing/2014/main" id="{73CA6134-70D5-34FA-00BD-59378BC13DD1}"/>
               </a:ext>
             </a:extLst>
           </p:cNvPr>
@@ -12659,7 +11246,7 @@
         </p:nvCxnSpPr>
         <p:spPr>
           <a:xfrm>
-            <a:off x="650011" y="1587933"/>
+            <a:off x="3671586" y="2077026"/>
             <a:ext cx="177808" cy="0"/>
           </a:xfrm>
           <a:prstGeom prst="straightConnector1">
@@ -12686,10 +11273,10 @@
       </p:cxnSp>
       <p:sp>
         <p:nvSpPr>
-          <p:cNvPr id="178" name="TextBox 177">
-            <a:extLst>
-              <a:ext uri="{FF2B5EF4-FFF2-40B4-BE49-F238E27FC236}">
-                <a16:creationId xmlns:a16="http://schemas.microsoft.com/office/drawing/2014/main" id="{09386CA0-1138-305E-7209-5A63253C8BFC}"/>
+          <p:cNvPr id="184" name="TextBox 183">
+            <a:extLst>
+              <a:ext uri="{FF2B5EF4-FFF2-40B4-BE49-F238E27FC236}">
+                <a16:creationId xmlns:a16="http://schemas.microsoft.com/office/drawing/2014/main" id="{58EBC1B8-4825-3984-18AF-440ADACF2ABF}"/>
               </a:ext>
             </a:extLst>
           </p:cNvPr>
@@ -12698,7 +11285,7 @@
         </p:nvSpPr>
         <p:spPr>
           <a:xfrm>
-            <a:off x="862656" y="1686466"/>
+            <a:off x="3884231" y="2175559"/>
             <a:ext cx="351378" cy="230832"/>
           </a:xfrm>
           <a:prstGeom prst="rect">
@@ -12722,10 +11309,10 @@
       </p:sp>
       <p:cxnSp>
         <p:nvCxnSpPr>
-          <p:cNvPr id="179" name="Straight Arrow Connector 178">
-            <a:extLst>
-              <a:ext uri="{FF2B5EF4-FFF2-40B4-BE49-F238E27FC236}">
-                <a16:creationId xmlns:a16="http://schemas.microsoft.com/office/drawing/2014/main" id="{DE93D071-D6EC-229F-FE75-1042BD0190A0}"/>
+          <p:cNvPr id="187" name="Straight Arrow Connector 186">
+            <a:extLst>
+              <a:ext uri="{FF2B5EF4-FFF2-40B4-BE49-F238E27FC236}">
+                <a16:creationId xmlns:a16="http://schemas.microsoft.com/office/drawing/2014/main" id="{0D200FF7-E333-ACB1-85A2-D9AC30E6FCDF}"/>
               </a:ext>
             </a:extLst>
           </p:cNvPr>
@@ -12736,7 +11323,7 @@
         </p:nvCxnSpPr>
         <p:spPr>
           <a:xfrm flipV="1">
-            <a:off x="1612800" y="2266016"/>
+            <a:off x="4634375" y="2755109"/>
             <a:ext cx="100338" cy="2498"/>
           </a:xfrm>
           <a:prstGeom prst="straightConnector1">
@@ -12763,10 +11350,10 @@
       </p:cxnSp>
       <p:sp>
         <p:nvSpPr>
-          <p:cNvPr id="180" name="TextBox 179">
-            <a:extLst>
-              <a:ext uri="{FF2B5EF4-FFF2-40B4-BE49-F238E27FC236}">
-                <a16:creationId xmlns:a16="http://schemas.microsoft.com/office/drawing/2014/main" id="{FCD657EC-8588-B810-69DD-64CE3E661EA1}"/>
+          <p:cNvPr id="189" name="TextBox 188">
+            <a:extLst>
+              <a:ext uri="{FF2B5EF4-FFF2-40B4-BE49-F238E27FC236}">
+                <a16:creationId xmlns:a16="http://schemas.microsoft.com/office/drawing/2014/main" id="{0E85AB3B-858D-5BF6-ED0E-B3C0624C86F7}"/>
               </a:ext>
             </a:extLst>
           </p:cNvPr>
@@ -12775,7 +11362,7 @@
         </p:nvSpPr>
         <p:spPr>
           <a:xfrm>
-            <a:off x="1358011" y="2152485"/>
+            <a:off x="4379586" y="2641578"/>
             <a:ext cx="332142" cy="230832"/>
           </a:xfrm>
           <a:prstGeom prst="rect">
@@ -12799,10 +11386,10 @@
       </p:sp>
       <p:cxnSp>
         <p:nvCxnSpPr>
-          <p:cNvPr id="181" name="Straight Arrow Connector 180">
-            <a:extLst>
-              <a:ext uri="{FF2B5EF4-FFF2-40B4-BE49-F238E27FC236}">
-                <a16:creationId xmlns:a16="http://schemas.microsoft.com/office/drawing/2014/main" id="{03417F81-FD6A-5C30-1E76-BBE7D416900A}"/>
+          <p:cNvPr id="190" name="Straight Arrow Connector 189">
+            <a:extLst>
+              <a:ext uri="{FF2B5EF4-FFF2-40B4-BE49-F238E27FC236}">
+                <a16:creationId xmlns:a16="http://schemas.microsoft.com/office/drawing/2014/main" id="{663EF25C-11FE-91FB-6359-867A30C024D1}"/>
               </a:ext>
             </a:extLst>
           </p:cNvPr>
@@ -12813,7 +11400,7 @@
         </p:nvCxnSpPr>
         <p:spPr>
           <a:xfrm>
-            <a:off x="1350952" y="1718520"/>
+            <a:off x="4372527" y="2207613"/>
             <a:ext cx="374301" cy="0"/>
           </a:xfrm>
           <a:prstGeom prst="straightConnector1">
@@ -12840,10 +11427,10 @@
       </p:cxnSp>
       <p:cxnSp>
         <p:nvCxnSpPr>
-          <p:cNvPr id="182" name="Straight Arrow Connector 181">
-            <a:extLst>
-              <a:ext uri="{FF2B5EF4-FFF2-40B4-BE49-F238E27FC236}">
-                <a16:creationId xmlns:a16="http://schemas.microsoft.com/office/drawing/2014/main" id="{E2D49F1C-FA17-5F1D-9F29-E692C68C8BDA}"/>
+          <p:cNvPr id="196" name="Straight Arrow Connector 195">
+            <a:extLst>
+              <a:ext uri="{FF2B5EF4-FFF2-40B4-BE49-F238E27FC236}">
+                <a16:creationId xmlns:a16="http://schemas.microsoft.com/office/drawing/2014/main" id="{C4DF3196-3785-A9E7-1F1B-2A6EE6375854}"/>
               </a:ext>
             </a:extLst>
           </p:cNvPr>
@@ -12854,7 +11441,7 @@
         </p:nvCxnSpPr>
         <p:spPr>
           <a:xfrm>
-            <a:off x="1350952" y="1718520"/>
+            <a:off x="4372527" y="2207613"/>
             <a:ext cx="0" cy="213936"/>
           </a:xfrm>
           <a:prstGeom prst="straightConnector1">
@@ -12881,10 +11468,10 @@
       </p:cxnSp>
       <p:cxnSp>
         <p:nvCxnSpPr>
-          <p:cNvPr id="183" name="Straight Arrow Connector 182">
-            <a:extLst>
-              <a:ext uri="{FF2B5EF4-FFF2-40B4-BE49-F238E27FC236}">
-                <a16:creationId xmlns:a16="http://schemas.microsoft.com/office/drawing/2014/main" id="{F62569E9-9ADB-25E0-5AA7-D7C609B03633}"/>
+          <p:cNvPr id="198" name="Straight Arrow Connector 197">
+            <a:extLst>
+              <a:ext uri="{FF2B5EF4-FFF2-40B4-BE49-F238E27FC236}">
+                <a16:creationId xmlns:a16="http://schemas.microsoft.com/office/drawing/2014/main" id="{E418A0F2-C32C-CA49-AA0F-30FCCCAA2766}"/>
               </a:ext>
             </a:extLst>
           </p:cNvPr>
@@ -12895,7 +11482,7 @@
         </p:nvCxnSpPr>
         <p:spPr>
           <a:xfrm>
-            <a:off x="1118267" y="1826661"/>
+            <a:off x="4139842" y="2315754"/>
             <a:ext cx="232685" cy="0"/>
           </a:xfrm>
           <a:prstGeom prst="straightConnector1">
@@ -12922,10 +11509,10 @@
       </p:cxnSp>
       <p:cxnSp>
         <p:nvCxnSpPr>
-          <p:cNvPr id="185" name="Straight Arrow Connector 184">
-            <a:extLst>
-              <a:ext uri="{FF2B5EF4-FFF2-40B4-BE49-F238E27FC236}">
-                <a16:creationId xmlns:a16="http://schemas.microsoft.com/office/drawing/2014/main" id="{45DDE841-DDA8-50C0-DF84-DFEAD66D212E}"/>
+          <p:cNvPr id="36" name="Straight Arrow Connector 35">
+            <a:extLst>
+              <a:ext uri="{FF2B5EF4-FFF2-40B4-BE49-F238E27FC236}">
+                <a16:creationId xmlns:a16="http://schemas.microsoft.com/office/drawing/2014/main" id="{1BC55C5F-A294-A543-9E3E-E324A93D8CA8}"/>
               </a:ext>
             </a:extLst>
           </p:cNvPr>
@@ -12936,8 +11523,8 @@
         </p:nvCxnSpPr>
         <p:spPr>
           <a:xfrm flipV="1">
-            <a:off x="1849620" y="2345419"/>
-            <a:ext cx="0" cy="318976"/>
+            <a:off x="10997645" y="4034709"/>
+            <a:ext cx="0" cy="616523"/>
           </a:xfrm>
           <a:prstGeom prst="straightConnector1">
             <a:avLst/>
@@ -12966,10 +11553,10 @@
       </p:cxnSp>
       <p:cxnSp>
         <p:nvCxnSpPr>
-          <p:cNvPr id="199" name="Straight Connector 198">
-            <a:extLst>
-              <a:ext uri="{FF2B5EF4-FFF2-40B4-BE49-F238E27FC236}">
-                <a16:creationId xmlns:a16="http://schemas.microsoft.com/office/drawing/2014/main" id="{DD9CD45F-603E-9C8E-1E43-C8A5BE41D6EE}"/>
+          <p:cNvPr id="37" name="Straight Connector 36">
+            <a:extLst>
+              <a:ext uri="{FF2B5EF4-FFF2-40B4-BE49-F238E27FC236}">
+                <a16:creationId xmlns:a16="http://schemas.microsoft.com/office/drawing/2014/main" id="{ECC19F9B-6EDF-6B64-E3B0-E660B8C52E68}"/>
               </a:ext>
             </a:extLst>
           </p:cNvPr>
@@ -12980,8 +11567,8 @@
         </p:nvCxnSpPr>
         <p:spPr>
           <a:xfrm flipH="1">
-            <a:off x="1805652" y="2531341"/>
-            <a:ext cx="85431" cy="62194"/>
+            <a:off x="10946889" y="4449728"/>
+            <a:ext cx="107051" cy="69157"/>
           </a:xfrm>
           <a:prstGeom prst="line">
             <a:avLst/>
@@ -13004,10 +11591,10 @@
       </p:cxnSp>
       <p:cxnSp>
         <p:nvCxnSpPr>
-          <p:cNvPr id="201" name="Straight Arrow Connector 200">
-            <a:extLst>
-              <a:ext uri="{FF2B5EF4-FFF2-40B4-BE49-F238E27FC236}">
-                <a16:creationId xmlns:a16="http://schemas.microsoft.com/office/drawing/2014/main" id="{83A0DF4B-DC05-17D1-759D-39EFC1DE02DF}"/>
+          <p:cNvPr id="105" name="Straight Connector 104">
+            <a:extLst>
+              <a:ext uri="{FF2B5EF4-FFF2-40B4-BE49-F238E27FC236}">
+                <a16:creationId xmlns:a16="http://schemas.microsoft.com/office/drawing/2014/main" id="{D07766FF-137E-CFC5-F36B-18899A589011}"/>
               </a:ext>
             </a:extLst>
           </p:cNvPr>
@@ -13017,9 +11604,129 @@
           <p:nvPr/>
         </p:nvCxnSpPr>
         <p:spPr>
-          <a:xfrm>
-            <a:off x="1660150" y="976492"/>
-            <a:ext cx="0" cy="137890"/>
+          <a:xfrm flipH="1">
+            <a:off x="5894187" y="2482125"/>
+            <a:ext cx="107051" cy="69157"/>
+          </a:xfrm>
+          <a:prstGeom prst="line">
+            <a:avLst/>
+          </a:prstGeom>
+        </p:spPr>
+        <p:style>
+          <a:lnRef idx="2">
+            <a:schemeClr val="accent1"/>
+          </a:lnRef>
+          <a:fillRef idx="0">
+            <a:schemeClr val="accent1"/>
+          </a:fillRef>
+          <a:effectRef idx="1">
+            <a:schemeClr val="accent1"/>
+          </a:effectRef>
+          <a:fontRef idx="minor">
+            <a:schemeClr val="tx1"/>
+          </a:fontRef>
+        </p:style>
+      </p:cxnSp>
+      <p:cxnSp>
+        <p:nvCxnSpPr>
+          <p:cNvPr id="146" name="Straight Arrow Connector 145">
+            <a:extLst>
+              <a:ext uri="{FF2B5EF4-FFF2-40B4-BE49-F238E27FC236}">
+                <a16:creationId xmlns:a16="http://schemas.microsoft.com/office/drawing/2014/main" id="{ABE6E774-8C9B-4489-D948-65607F2E188A}"/>
+              </a:ext>
+            </a:extLst>
+          </p:cNvPr>
+          <p:cNvCxnSpPr>
+            <a:cxnSpLocks/>
+          </p:cNvCxnSpPr>
+          <p:nvPr/>
+        </p:nvCxnSpPr>
+        <p:spPr>
+          <a:xfrm flipV="1">
+            <a:off x="4871195" y="2834512"/>
+            <a:ext cx="0" cy="318976"/>
+          </a:xfrm>
+          <a:prstGeom prst="straightConnector1">
+            <a:avLst/>
+          </a:prstGeom>
+          <a:ln>
+            <a:solidFill>
+              <a:srgbClr val="FF0000"/>
+            </a:solidFill>
+            <a:tailEnd type="triangle"/>
+          </a:ln>
+        </p:spPr>
+        <p:style>
+          <a:lnRef idx="2">
+            <a:schemeClr val="accent1"/>
+          </a:lnRef>
+          <a:fillRef idx="0">
+            <a:schemeClr val="accent1"/>
+          </a:fillRef>
+          <a:effectRef idx="1">
+            <a:schemeClr val="accent1"/>
+          </a:effectRef>
+          <a:fontRef idx="minor">
+            <a:schemeClr val="tx1"/>
+          </a:fontRef>
+        </p:style>
+      </p:cxnSp>
+      <p:cxnSp>
+        <p:nvCxnSpPr>
+          <p:cNvPr id="148" name="Straight Connector 147">
+            <a:extLst>
+              <a:ext uri="{FF2B5EF4-FFF2-40B4-BE49-F238E27FC236}">
+                <a16:creationId xmlns:a16="http://schemas.microsoft.com/office/drawing/2014/main" id="{FE9EFFB0-0DED-2330-8209-FC39718441DD}"/>
+              </a:ext>
+            </a:extLst>
+          </p:cNvPr>
+          <p:cNvCxnSpPr>
+            <a:cxnSpLocks/>
+          </p:cNvCxnSpPr>
+          <p:nvPr/>
+        </p:nvCxnSpPr>
+        <p:spPr>
+          <a:xfrm flipH="1">
+            <a:off x="4827227" y="3020434"/>
+            <a:ext cx="85431" cy="62194"/>
+          </a:xfrm>
+          <a:prstGeom prst="line">
+            <a:avLst/>
+          </a:prstGeom>
+        </p:spPr>
+        <p:style>
+          <a:lnRef idx="2">
+            <a:schemeClr val="accent1"/>
+          </a:lnRef>
+          <a:fillRef idx="0">
+            <a:schemeClr val="accent1"/>
+          </a:fillRef>
+          <a:effectRef idx="1">
+            <a:schemeClr val="accent1"/>
+          </a:effectRef>
+          <a:fontRef idx="minor">
+            <a:schemeClr val="tx1"/>
+          </a:fontRef>
+        </p:style>
+      </p:cxnSp>
+      <p:cxnSp>
+        <p:nvCxnSpPr>
+          <p:cNvPr id="152" name="Straight Arrow Connector 151">
+            <a:extLst>
+              <a:ext uri="{FF2B5EF4-FFF2-40B4-BE49-F238E27FC236}">
+                <a16:creationId xmlns:a16="http://schemas.microsoft.com/office/drawing/2014/main" id="{2FC45EE7-792B-F72E-2C03-735BF8B795D9}"/>
+              </a:ext>
+            </a:extLst>
+          </p:cNvPr>
+          <p:cNvCxnSpPr>
+            <a:cxnSpLocks/>
+          </p:cNvCxnSpPr>
+          <p:nvPr/>
+        </p:nvCxnSpPr>
+        <p:spPr>
+          <a:xfrm>
+            <a:off x="4862151" y="1836978"/>
+            <a:ext cx="0" cy="325106"/>
           </a:xfrm>
           <a:prstGeom prst="straightConnector1">
             <a:avLst/>
@@ -13048,10 +11755,10 @@
       </p:cxnSp>
       <p:sp>
         <p:nvSpPr>
-          <p:cNvPr id="202" name="TextBox 201">
-            <a:extLst>
-              <a:ext uri="{FF2B5EF4-FFF2-40B4-BE49-F238E27FC236}">
-                <a16:creationId xmlns:a16="http://schemas.microsoft.com/office/drawing/2014/main" id="{C5E4C3D1-E848-B046-B8D8-FF2644B018B9}"/>
+          <p:cNvPr id="153" name="TextBox 152">
+            <a:extLst>
+              <a:ext uri="{FF2B5EF4-FFF2-40B4-BE49-F238E27FC236}">
+                <a16:creationId xmlns:a16="http://schemas.microsoft.com/office/drawing/2014/main" id="{6C7963B8-EAB3-1251-7B88-E9681119B880}"/>
               </a:ext>
             </a:extLst>
           </p:cNvPr>
@@ -13060,8 +11767,8 @@
         </p:nvSpPr>
         <p:spPr>
           <a:xfrm>
-            <a:off x="1420265" y="807637"/>
-            <a:ext cx="474810" cy="230832"/>
+            <a:off x="4493604" y="1641448"/>
+            <a:ext cx="671979" cy="230832"/>
           </a:xfrm>
           <a:prstGeom prst="rect">
             <a:avLst/>
@@ -13077,17 +11784,69 @@
             <a:pPr algn="ctr"/>
             <a:r>
               <a:rPr lang="en-US" sz="900" dirty="0"/>
-              <a:t>dout1</a:t>
+              <a:t>Not equal</a:t>
             </a:r>
+          </a:p>
+        </p:txBody>
+      </p:sp>
+      <p:sp>
+        <p:nvSpPr>
+          <p:cNvPr id="154" name="Rectangle 153">
+            <a:extLst>
+              <a:ext uri="{FF2B5EF4-FFF2-40B4-BE49-F238E27FC236}">
+                <a16:creationId xmlns:a16="http://schemas.microsoft.com/office/drawing/2014/main" id="{6E64875F-2B8E-5F20-AD69-75128545C0DD}"/>
+              </a:ext>
+            </a:extLst>
+          </p:cNvPr>
+          <p:cNvSpPr/>
+          <p:nvPr/>
+        </p:nvSpPr>
+        <p:spPr>
+          <a:xfrm>
+            <a:off x="4458121" y="1413057"/>
+            <a:ext cx="736311" cy="418585"/>
+          </a:xfrm>
+          <a:prstGeom prst="rect">
+            <a:avLst/>
+          </a:prstGeom>
+          <a:noFill/>
+          <a:ln>
+            <a:solidFill>
+              <a:srgbClr val="0070C0"/>
+            </a:solidFill>
+          </a:ln>
+        </p:spPr>
+        <p:style>
+          <a:lnRef idx="2">
+            <a:schemeClr val="accent1">
+              <a:shade val="15000"/>
+            </a:schemeClr>
+          </a:lnRef>
+          <a:fillRef idx="1">
+            <a:schemeClr val="accent1"/>
+          </a:fillRef>
+          <a:effectRef idx="0">
+            <a:schemeClr val="accent1"/>
+          </a:effectRef>
+          <a:fontRef idx="minor">
+            <a:schemeClr val="lt1"/>
+          </a:fontRef>
+        </p:style>
+        <p:txBody>
+          <a:bodyPr rtlCol="0" anchor="ctr"/>
+          <a:lstStyle/>
+          <a:p>
+            <a:pPr algn="ctr"/>
+            <a:endParaRPr lang="en-US"/>
           </a:p>
         </p:txBody>
       </p:sp>
       <p:cxnSp>
         <p:nvCxnSpPr>
-          <p:cNvPr id="203" name="Straight Arrow Connector 202">
-            <a:extLst>
-              <a:ext uri="{FF2B5EF4-FFF2-40B4-BE49-F238E27FC236}">
-                <a16:creationId xmlns:a16="http://schemas.microsoft.com/office/drawing/2014/main" id="{EE0A7450-E98D-2100-D475-3D6DDD92F800}"/>
+          <p:cNvPr id="155" name="Straight Arrow Connector 154">
+            <a:extLst>
+              <a:ext uri="{FF2B5EF4-FFF2-40B4-BE49-F238E27FC236}">
+                <a16:creationId xmlns:a16="http://schemas.microsoft.com/office/drawing/2014/main" id="{7427857C-18CF-7E87-7DE9-41875BFC41AB}"/>
               </a:ext>
             </a:extLst>
           </p:cNvPr>
@@ -13098,19 +11857,13 @@
         </p:nvCxnSpPr>
         <p:spPr>
           <a:xfrm>
-            <a:off x="1887618" y="1525805"/>
-            <a:ext cx="0" cy="219678"/>
+            <a:off x="5032030" y="1275167"/>
+            <a:ext cx="0" cy="137890"/>
           </a:xfrm>
           <a:prstGeom prst="straightConnector1">
             <a:avLst/>
           </a:prstGeom>
           <a:ln>
-            <a:solidFill>
-              <a:schemeClr val="tx2">
-                <a:lumMod val="75000"/>
-                <a:lumOff val="25000"/>
-              </a:schemeClr>
-            </a:solidFill>
             <a:tailEnd type="triangle"/>
           </a:ln>
         </p:spPr>
@@ -13131,10 +11884,10 @@
       </p:cxnSp>
       <p:sp>
         <p:nvSpPr>
-          <p:cNvPr id="204" name="TextBox 203">
-            <a:extLst>
-              <a:ext uri="{FF2B5EF4-FFF2-40B4-BE49-F238E27FC236}">
-                <a16:creationId xmlns:a16="http://schemas.microsoft.com/office/drawing/2014/main" id="{64F90C90-E069-CC61-165E-6A1EEB7E1194}"/>
+          <p:cNvPr id="156" name="TextBox 155">
+            <a:extLst>
+              <a:ext uri="{FF2B5EF4-FFF2-40B4-BE49-F238E27FC236}">
+                <a16:creationId xmlns:a16="http://schemas.microsoft.com/office/drawing/2014/main" id="{2566064C-F469-508F-113D-556CBC75A869}"/>
               </a:ext>
             </a:extLst>
           </p:cNvPr>
@@ -13143,8 +11896,8 @@
         </p:nvSpPr>
         <p:spPr>
           <a:xfrm>
-            <a:off x="1469171" y="1342773"/>
-            <a:ext cx="671979" cy="230832"/>
+            <a:off x="4815413" y="1108528"/>
+            <a:ext cx="474810" cy="230832"/>
           </a:xfrm>
           <a:prstGeom prst="rect">
             <a:avLst/>
@@ -13160,17 +11913,103 @@
             <a:pPr algn="ctr"/>
             <a:r>
               <a:rPr lang="en-US" sz="900" dirty="0"/>
-              <a:t>Not equal</a:t>
+              <a:t>dout2</a:t>
             </a:r>
           </a:p>
         </p:txBody>
       </p:sp>
+      <p:cxnSp>
+        <p:nvCxnSpPr>
+          <p:cNvPr id="200" name="Straight Arrow Connector 199">
+            <a:extLst>
+              <a:ext uri="{FF2B5EF4-FFF2-40B4-BE49-F238E27FC236}">
+                <a16:creationId xmlns:a16="http://schemas.microsoft.com/office/drawing/2014/main" id="{D4AC79D0-5B76-D005-1A27-F76F271A152F}"/>
+              </a:ext>
+            </a:extLst>
+          </p:cNvPr>
+          <p:cNvCxnSpPr/>
+          <p:nvPr/>
+        </p:nvCxnSpPr>
+        <p:spPr>
+          <a:xfrm flipV="1">
+            <a:off x="8862876" y="3303944"/>
+            <a:ext cx="0" cy="167673"/>
+          </a:xfrm>
+          <a:prstGeom prst="straightConnector1">
+            <a:avLst/>
+          </a:prstGeom>
+          <a:ln>
+            <a:solidFill>
+              <a:srgbClr val="FF0000"/>
+            </a:solidFill>
+            <a:tailEnd type="triangle"/>
+          </a:ln>
+        </p:spPr>
+        <p:style>
+          <a:lnRef idx="2">
+            <a:schemeClr val="accent1"/>
+          </a:lnRef>
+          <a:fillRef idx="0">
+            <a:schemeClr val="accent1"/>
+          </a:fillRef>
+          <a:effectRef idx="1">
+            <a:schemeClr val="accent1"/>
+          </a:effectRef>
+          <a:fontRef idx="minor">
+            <a:schemeClr val="tx1"/>
+          </a:fontRef>
+        </p:style>
+      </p:cxnSp>
+      <p:cxnSp>
+        <p:nvCxnSpPr>
+          <p:cNvPr id="58" name="Straight Arrow Connector 57">
+            <a:extLst>
+              <a:ext uri="{FF2B5EF4-FFF2-40B4-BE49-F238E27FC236}">
+                <a16:creationId xmlns:a16="http://schemas.microsoft.com/office/drawing/2014/main" id="{7573E486-DDBA-B7A3-E389-F5E5A985545B}"/>
+              </a:ext>
+            </a:extLst>
+          </p:cNvPr>
+          <p:cNvCxnSpPr>
+            <a:cxnSpLocks/>
+          </p:cNvCxnSpPr>
+          <p:nvPr/>
+        </p:nvCxnSpPr>
+        <p:spPr>
+          <a:xfrm>
+            <a:off x="6907069" y="5094338"/>
+            <a:ext cx="229874" cy="0"/>
+          </a:xfrm>
+          <a:prstGeom prst="straightConnector1">
+            <a:avLst/>
+          </a:prstGeom>
+          <a:ln>
+            <a:solidFill>
+              <a:srgbClr val="FF0000"/>
+            </a:solidFill>
+            <a:tailEnd type="triangle"/>
+          </a:ln>
+        </p:spPr>
+        <p:style>
+          <a:lnRef idx="2">
+            <a:schemeClr val="accent1"/>
+          </a:lnRef>
+          <a:fillRef idx="0">
+            <a:schemeClr val="accent1"/>
+          </a:fillRef>
+          <a:effectRef idx="1">
+            <a:schemeClr val="accent1"/>
+          </a:effectRef>
+          <a:fontRef idx="minor">
+            <a:schemeClr val="tx1"/>
+          </a:fontRef>
+        </p:style>
+      </p:cxnSp>
       <p:sp>
         <p:nvSpPr>
-          <p:cNvPr id="205" name="Rectangle 204">
-            <a:extLst>
-              <a:ext uri="{FF2B5EF4-FFF2-40B4-BE49-F238E27FC236}">
-                <a16:creationId xmlns:a16="http://schemas.microsoft.com/office/drawing/2014/main" id="{64D9F53B-87E9-E6A7-973D-AEF42ADBB14F}"/>
+          <p:cNvPr id="59" name="Rectangle 58">
+            <a:extLst>
+              <a:ext uri="{FF2B5EF4-FFF2-40B4-BE49-F238E27FC236}">
+                <a16:creationId xmlns:a16="http://schemas.microsoft.com/office/drawing/2014/main" id="{3D2EB1C4-2755-0DE5-C940-8A0D147C2810}"/>
               </a:ext>
             </a:extLst>
           </p:cNvPr>
@@ -13179,18 +12018,15 @@
         </p:nvSpPr>
         <p:spPr>
           <a:xfrm>
-            <a:off x="1433688" y="1114382"/>
-            <a:ext cx="736311" cy="418585"/>
+            <a:off x="6228280" y="4957338"/>
+            <a:ext cx="678789" cy="645791"/>
           </a:xfrm>
           <a:prstGeom prst="rect">
             <a:avLst/>
           </a:prstGeom>
-          <a:noFill/>
-          <a:ln>
-            <a:solidFill>
-              <a:srgbClr val="0070C0"/>
-            </a:solidFill>
-          </a:ln>
+          <a:solidFill>
+            <a:schemeClr val="bg1"/>
+          </a:solidFill>
         </p:spPr>
         <p:style>
           <a:lnRef idx="2">
@@ -13213,16 +12049,69 @@
           <a:lstStyle/>
           <a:p>
             <a:pPr algn="ctr"/>
-            <a:endParaRPr lang="en-US"/>
+            <a:r>
+              <a:rPr lang="en-US" dirty="0"/>
+              <a:t>PC</a:t>
+            </a:r>
+          </a:p>
+        </p:txBody>
+      </p:sp>
+      <p:sp>
+        <p:nvSpPr>
+          <p:cNvPr id="66" name="TextBox 65">
+            <a:extLst>
+              <a:ext uri="{FF2B5EF4-FFF2-40B4-BE49-F238E27FC236}">
+                <a16:creationId xmlns:a16="http://schemas.microsoft.com/office/drawing/2014/main" id="{0BD10473-3570-2913-7509-96632D327051}"/>
+              </a:ext>
+            </a:extLst>
+          </p:cNvPr>
+          <p:cNvSpPr txBox="1"/>
+          <p:nvPr/>
+        </p:nvSpPr>
+        <p:spPr>
+          <a:xfrm>
+            <a:off x="6266442" y="5022889"/>
+            <a:ext cx="643125" cy="553998"/>
+          </a:xfrm>
+          <a:prstGeom prst="rect">
+            <a:avLst/>
+          </a:prstGeom>
+          <a:noFill/>
+        </p:spPr>
+        <p:txBody>
+          <a:bodyPr wrap="none" rtlCol="0">
+            <a:spAutoFit/>
+          </a:bodyPr>
+          <a:lstStyle/>
+          <a:p>
+            <a:pPr algn="ctr"/>
+            <a:r>
+              <a:rPr lang="en-US" sz="1000" dirty="0"/>
+              <a:t>ALU</a:t>
+            </a:r>
+          </a:p>
+          <a:p>
+            <a:pPr algn="ctr"/>
+            <a:r>
+              <a:rPr lang="en-US" sz="1000" dirty="0"/>
+              <a:t>Forward</a:t>
+            </a:r>
+          </a:p>
+          <a:p>
+            <a:pPr algn="ctr"/>
+            <a:r>
+              <a:rPr lang="en-US" sz="1000" dirty="0"/>
+              <a:t>Unit</a:t>
+            </a:r>
           </a:p>
         </p:txBody>
       </p:sp>
       <p:cxnSp>
         <p:nvCxnSpPr>
-          <p:cNvPr id="206" name="Straight Arrow Connector 205">
-            <a:extLst>
-              <a:ext uri="{FF2B5EF4-FFF2-40B4-BE49-F238E27FC236}">
-                <a16:creationId xmlns:a16="http://schemas.microsoft.com/office/drawing/2014/main" id="{21A460EE-EB70-C945-9EB0-A42BA9B94C3F}"/>
+          <p:cNvPr id="67" name="Straight Arrow Connector 66">
+            <a:extLst>
+              <a:ext uri="{FF2B5EF4-FFF2-40B4-BE49-F238E27FC236}">
+                <a16:creationId xmlns:a16="http://schemas.microsoft.com/office/drawing/2014/main" id="{B9835194-3BFD-10CD-326E-7086C789412E}"/>
               </a:ext>
             </a:extLst>
           </p:cNvPr>
@@ -13233,8 +12122,283 @@
         </p:nvCxnSpPr>
         <p:spPr>
           <a:xfrm>
-            <a:off x="2007597" y="976492"/>
-            <a:ext cx="0" cy="137890"/>
+            <a:off x="5765920" y="5027975"/>
+            <a:ext cx="470988" cy="0"/>
+          </a:xfrm>
+          <a:prstGeom prst="straightConnector1">
+            <a:avLst/>
+          </a:prstGeom>
+          <a:ln>
+            <a:tailEnd type="triangle"/>
+          </a:ln>
+        </p:spPr>
+        <p:style>
+          <a:lnRef idx="2">
+            <a:schemeClr val="accent1"/>
+          </a:lnRef>
+          <a:fillRef idx="0">
+            <a:schemeClr val="accent1"/>
+          </a:fillRef>
+          <a:effectRef idx="1">
+            <a:schemeClr val="accent1"/>
+          </a:effectRef>
+          <a:fontRef idx="minor">
+            <a:schemeClr val="tx1"/>
+          </a:fontRef>
+        </p:style>
+      </p:cxnSp>
+      <p:cxnSp>
+        <p:nvCxnSpPr>
+          <p:cNvPr id="75" name="Straight Arrow Connector 74">
+            <a:extLst>
+              <a:ext uri="{FF2B5EF4-FFF2-40B4-BE49-F238E27FC236}">
+                <a16:creationId xmlns:a16="http://schemas.microsoft.com/office/drawing/2014/main" id="{3FEF4D69-29A5-1207-9833-621D95AFAD33}"/>
+              </a:ext>
+            </a:extLst>
+          </p:cNvPr>
+          <p:cNvCxnSpPr>
+            <a:cxnSpLocks/>
+          </p:cNvCxnSpPr>
+          <p:nvPr/>
+        </p:nvCxnSpPr>
+        <p:spPr>
+          <a:xfrm>
+            <a:off x="5901832" y="5193796"/>
+            <a:ext cx="335076" cy="0"/>
+          </a:xfrm>
+          <a:prstGeom prst="straightConnector1">
+            <a:avLst/>
+          </a:prstGeom>
+          <a:ln>
+            <a:tailEnd type="triangle"/>
+          </a:ln>
+        </p:spPr>
+        <p:style>
+          <a:lnRef idx="2">
+            <a:schemeClr val="accent1"/>
+          </a:lnRef>
+          <a:fillRef idx="0">
+            <a:schemeClr val="accent1"/>
+          </a:fillRef>
+          <a:effectRef idx="1">
+            <a:schemeClr val="accent1"/>
+          </a:effectRef>
+          <a:fontRef idx="minor">
+            <a:schemeClr val="tx1"/>
+          </a:fontRef>
+        </p:style>
+      </p:cxnSp>
+      <p:cxnSp>
+        <p:nvCxnSpPr>
+          <p:cNvPr id="78" name="Straight Arrow Connector 77">
+            <a:extLst>
+              <a:ext uri="{FF2B5EF4-FFF2-40B4-BE49-F238E27FC236}">
+                <a16:creationId xmlns:a16="http://schemas.microsoft.com/office/drawing/2014/main" id="{723D0E84-7FA0-BDD6-FDF0-A9AB9722FE67}"/>
+              </a:ext>
+            </a:extLst>
+          </p:cNvPr>
+          <p:cNvCxnSpPr>
+            <a:cxnSpLocks/>
+          </p:cNvCxnSpPr>
+          <p:nvPr/>
+        </p:nvCxnSpPr>
+        <p:spPr>
+          <a:xfrm>
+            <a:off x="5538404" y="5298202"/>
+            <a:ext cx="683932" cy="0"/>
+          </a:xfrm>
+          <a:prstGeom prst="straightConnector1">
+            <a:avLst/>
+          </a:prstGeom>
+          <a:ln>
+            <a:tailEnd type="triangle"/>
+          </a:ln>
+        </p:spPr>
+        <p:style>
+          <a:lnRef idx="2">
+            <a:schemeClr val="accent1"/>
+          </a:lnRef>
+          <a:fillRef idx="0">
+            <a:schemeClr val="accent1"/>
+          </a:fillRef>
+          <a:effectRef idx="1">
+            <a:schemeClr val="accent1"/>
+          </a:effectRef>
+          <a:fontRef idx="minor">
+            <a:schemeClr val="tx1"/>
+          </a:fontRef>
+        </p:style>
+      </p:cxnSp>
+      <p:cxnSp>
+        <p:nvCxnSpPr>
+          <p:cNvPr id="80" name="Straight Connector 79">
+            <a:extLst>
+              <a:ext uri="{FF2B5EF4-FFF2-40B4-BE49-F238E27FC236}">
+                <a16:creationId xmlns:a16="http://schemas.microsoft.com/office/drawing/2014/main" id="{ECA286BA-FE44-E380-0BBD-B76E3B15005B}"/>
+              </a:ext>
+            </a:extLst>
+          </p:cNvPr>
+          <p:cNvCxnSpPr>
+            <a:cxnSpLocks/>
+          </p:cNvCxnSpPr>
+          <p:nvPr/>
+        </p:nvCxnSpPr>
+        <p:spPr>
+          <a:xfrm>
+            <a:off x="5885190" y="4761566"/>
+            <a:ext cx="4121765" cy="0"/>
+          </a:xfrm>
+          <a:prstGeom prst="line">
+            <a:avLst/>
+          </a:prstGeom>
+        </p:spPr>
+        <p:style>
+          <a:lnRef idx="2">
+            <a:schemeClr val="accent1"/>
+          </a:lnRef>
+          <a:fillRef idx="0">
+            <a:schemeClr val="accent1"/>
+          </a:fillRef>
+          <a:effectRef idx="1">
+            <a:schemeClr val="accent1"/>
+          </a:effectRef>
+          <a:fontRef idx="minor">
+            <a:schemeClr val="tx1"/>
+          </a:fontRef>
+        </p:style>
+      </p:cxnSp>
+      <p:cxnSp>
+        <p:nvCxnSpPr>
+          <p:cNvPr id="86" name="Straight Connector 85">
+            <a:extLst>
+              <a:ext uri="{FF2B5EF4-FFF2-40B4-BE49-F238E27FC236}">
+                <a16:creationId xmlns:a16="http://schemas.microsoft.com/office/drawing/2014/main" id="{97725506-B5BD-226C-7AD1-C09790F81C94}"/>
+              </a:ext>
+            </a:extLst>
+          </p:cNvPr>
+          <p:cNvCxnSpPr>
+            <a:cxnSpLocks/>
+          </p:cNvCxnSpPr>
+          <p:nvPr/>
+        </p:nvCxnSpPr>
+        <p:spPr>
+          <a:xfrm>
+            <a:off x="5902908" y="4762568"/>
+            <a:ext cx="0" cy="437124"/>
+          </a:xfrm>
+          <a:prstGeom prst="line">
+            <a:avLst/>
+          </a:prstGeom>
+        </p:spPr>
+        <p:style>
+          <a:lnRef idx="2">
+            <a:schemeClr val="accent1"/>
+          </a:lnRef>
+          <a:fillRef idx="0">
+            <a:schemeClr val="accent1"/>
+          </a:fillRef>
+          <a:effectRef idx="1">
+            <a:schemeClr val="accent1"/>
+          </a:effectRef>
+          <a:fontRef idx="minor">
+            <a:schemeClr val="tx1"/>
+          </a:fontRef>
+        </p:style>
+      </p:cxnSp>
+      <p:cxnSp>
+        <p:nvCxnSpPr>
+          <p:cNvPr id="106" name="Straight Connector 105">
+            <a:extLst>
+              <a:ext uri="{FF2B5EF4-FFF2-40B4-BE49-F238E27FC236}">
+                <a16:creationId xmlns:a16="http://schemas.microsoft.com/office/drawing/2014/main" id="{71CD65D9-0819-F3FB-BBC6-E6EC0D590B41}"/>
+              </a:ext>
+            </a:extLst>
+          </p:cNvPr>
+          <p:cNvCxnSpPr>
+            <a:cxnSpLocks/>
+          </p:cNvCxnSpPr>
+          <p:nvPr/>
+        </p:nvCxnSpPr>
+        <p:spPr>
+          <a:xfrm>
+            <a:off x="5773621" y="4593163"/>
+            <a:ext cx="0" cy="437124"/>
+          </a:xfrm>
+          <a:prstGeom prst="line">
+            <a:avLst/>
+          </a:prstGeom>
+        </p:spPr>
+        <p:style>
+          <a:lnRef idx="2">
+            <a:schemeClr val="accent1"/>
+          </a:lnRef>
+          <a:fillRef idx="0">
+            <a:schemeClr val="accent1"/>
+          </a:fillRef>
+          <a:effectRef idx="1">
+            <a:schemeClr val="accent1"/>
+          </a:effectRef>
+          <a:fontRef idx="minor">
+            <a:schemeClr val="tx1"/>
+          </a:fontRef>
+        </p:style>
+      </p:cxnSp>
+      <p:cxnSp>
+        <p:nvCxnSpPr>
+          <p:cNvPr id="109" name="Straight Connector 108">
+            <a:extLst>
+              <a:ext uri="{FF2B5EF4-FFF2-40B4-BE49-F238E27FC236}">
+                <a16:creationId xmlns:a16="http://schemas.microsoft.com/office/drawing/2014/main" id="{8AC26B0D-B0A5-2DA8-842F-D10BD7A35D69}"/>
+              </a:ext>
+            </a:extLst>
+          </p:cNvPr>
+          <p:cNvCxnSpPr>
+            <a:cxnSpLocks/>
+          </p:cNvCxnSpPr>
+          <p:nvPr/>
+        </p:nvCxnSpPr>
+        <p:spPr>
+          <a:xfrm>
+            <a:off x="5773237" y="4606277"/>
+            <a:ext cx="1700141" cy="0"/>
+          </a:xfrm>
+          <a:prstGeom prst="line">
+            <a:avLst/>
+          </a:prstGeom>
+        </p:spPr>
+        <p:style>
+          <a:lnRef idx="2">
+            <a:schemeClr val="accent1"/>
+          </a:lnRef>
+          <a:fillRef idx="0">
+            <a:schemeClr val="accent1"/>
+          </a:fillRef>
+          <a:effectRef idx="1">
+            <a:schemeClr val="accent1"/>
+          </a:effectRef>
+          <a:fontRef idx="minor">
+            <a:schemeClr val="tx1"/>
+          </a:fontRef>
+        </p:style>
+      </p:cxnSp>
+      <p:cxnSp>
+        <p:nvCxnSpPr>
+          <p:cNvPr id="110" name="Straight Arrow Connector 109">
+            <a:extLst>
+              <a:ext uri="{FF2B5EF4-FFF2-40B4-BE49-F238E27FC236}">
+                <a16:creationId xmlns:a16="http://schemas.microsoft.com/office/drawing/2014/main" id="{DC5F1F91-6CC7-C60C-BCEE-6643813C9FFE}"/>
+              </a:ext>
+            </a:extLst>
+          </p:cNvPr>
+          <p:cNvCxnSpPr>
+            <a:cxnSpLocks/>
+          </p:cNvCxnSpPr>
+          <p:nvPr/>
+        </p:nvCxnSpPr>
+        <p:spPr>
+          <a:xfrm flipV="1">
+            <a:off x="6588931" y="5612860"/>
+            <a:ext cx="0" cy="434187"/>
           </a:xfrm>
           <a:prstGeom prst="straightConnector1">
             <a:avLst/>
@@ -13245,6 +12409,340 @@
             </a:solidFill>
             <a:tailEnd type="triangle"/>
           </a:ln>
+        </p:spPr>
+        <p:style>
+          <a:lnRef idx="2">
+            <a:schemeClr val="accent1"/>
+          </a:lnRef>
+          <a:fillRef idx="0">
+            <a:schemeClr val="accent1"/>
+          </a:fillRef>
+          <a:effectRef idx="1">
+            <a:schemeClr val="accent1"/>
+          </a:effectRef>
+          <a:fontRef idx="minor">
+            <a:schemeClr val="tx1"/>
+          </a:fontRef>
+        </p:style>
+      </p:cxnSp>
+      <p:cxnSp>
+        <p:nvCxnSpPr>
+          <p:cNvPr id="145" name="Straight Connector 144">
+            <a:extLst>
+              <a:ext uri="{FF2B5EF4-FFF2-40B4-BE49-F238E27FC236}">
+                <a16:creationId xmlns:a16="http://schemas.microsoft.com/office/drawing/2014/main" id="{2822CE25-798B-8464-116B-0C053CE44114}"/>
+              </a:ext>
+            </a:extLst>
+          </p:cNvPr>
+          <p:cNvCxnSpPr>
+            <a:cxnSpLocks/>
+          </p:cNvCxnSpPr>
+          <p:nvPr/>
+        </p:nvCxnSpPr>
+        <p:spPr>
+          <a:xfrm flipH="1">
+            <a:off x="6538175" y="5845543"/>
+            <a:ext cx="107051" cy="69157"/>
+          </a:xfrm>
+          <a:prstGeom prst="line">
+            <a:avLst/>
+          </a:prstGeom>
+        </p:spPr>
+        <p:style>
+          <a:lnRef idx="2">
+            <a:schemeClr val="accent1"/>
+          </a:lnRef>
+          <a:fillRef idx="0">
+            <a:schemeClr val="accent1"/>
+          </a:fillRef>
+          <a:effectRef idx="1">
+            <a:schemeClr val="accent1"/>
+          </a:effectRef>
+          <a:fontRef idx="minor">
+            <a:schemeClr val="tx1"/>
+          </a:fontRef>
+        </p:style>
+      </p:cxnSp>
+      <p:cxnSp>
+        <p:nvCxnSpPr>
+          <p:cNvPr id="161" name="Straight Arrow Connector 160">
+            <a:extLst>
+              <a:ext uri="{FF2B5EF4-FFF2-40B4-BE49-F238E27FC236}">
+                <a16:creationId xmlns:a16="http://schemas.microsoft.com/office/drawing/2014/main" id="{E2A0AABA-ADB3-2849-6246-E1410E1EB0A7}"/>
+              </a:ext>
+            </a:extLst>
+          </p:cNvPr>
+          <p:cNvCxnSpPr>
+            <a:cxnSpLocks/>
+          </p:cNvCxnSpPr>
+          <p:nvPr/>
+        </p:nvCxnSpPr>
+        <p:spPr>
+          <a:xfrm>
+            <a:off x="2902302" y="5747045"/>
+            <a:ext cx="442253" cy="0"/>
+          </a:xfrm>
+          <a:prstGeom prst="straightConnector1">
+            <a:avLst/>
+          </a:prstGeom>
+          <a:ln>
+            <a:solidFill>
+              <a:srgbClr val="FF0000"/>
+            </a:solidFill>
+            <a:tailEnd type="triangle"/>
+          </a:ln>
+        </p:spPr>
+        <p:style>
+          <a:lnRef idx="2">
+            <a:schemeClr val="accent1"/>
+          </a:lnRef>
+          <a:fillRef idx="0">
+            <a:schemeClr val="accent1"/>
+          </a:fillRef>
+          <a:effectRef idx="1">
+            <a:schemeClr val="accent1"/>
+          </a:effectRef>
+          <a:fontRef idx="minor">
+            <a:schemeClr val="tx1"/>
+          </a:fontRef>
+        </p:style>
+      </p:cxnSp>
+      <p:cxnSp>
+        <p:nvCxnSpPr>
+          <p:cNvPr id="175" name="Straight Connector 174">
+            <a:extLst>
+              <a:ext uri="{FF2B5EF4-FFF2-40B4-BE49-F238E27FC236}">
+                <a16:creationId xmlns:a16="http://schemas.microsoft.com/office/drawing/2014/main" id="{521D3994-D4BE-156E-DB2D-ABB3E732B793}"/>
+              </a:ext>
+            </a:extLst>
+          </p:cNvPr>
+          <p:cNvCxnSpPr>
+            <a:cxnSpLocks/>
+          </p:cNvCxnSpPr>
+          <p:nvPr/>
+        </p:nvCxnSpPr>
+        <p:spPr>
+          <a:xfrm>
+            <a:off x="2913414" y="5530860"/>
+            <a:ext cx="0" cy="214649"/>
+          </a:xfrm>
+          <a:prstGeom prst="line">
+            <a:avLst/>
+          </a:prstGeom>
+          <a:ln>
+            <a:solidFill>
+              <a:srgbClr val="FF0000"/>
+            </a:solidFill>
+          </a:ln>
+        </p:spPr>
+        <p:style>
+          <a:lnRef idx="2">
+            <a:schemeClr val="accent1"/>
+          </a:lnRef>
+          <a:fillRef idx="0">
+            <a:schemeClr val="accent1"/>
+          </a:fillRef>
+          <a:effectRef idx="1">
+            <a:schemeClr val="accent1"/>
+          </a:effectRef>
+          <a:fontRef idx="minor">
+            <a:schemeClr val="tx1"/>
+          </a:fontRef>
+        </p:style>
+      </p:cxnSp>
+      <p:cxnSp>
+        <p:nvCxnSpPr>
+          <p:cNvPr id="176" name="Straight Arrow Connector 175">
+            <a:extLst>
+              <a:ext uri="{FF2B5EF4-FFF2-40B4-BE49-F238E27FC236}">
+                <a16:creationId xmlns:a16="http://schemas.microsoft.com/office/drawing/2014/main" id="{6E6A93EA-E883-B3A1-2E7C-B387381983D1}"/>
+              </a:ext>
+            </a:extLst>
+          </p:cNvPr>
+          <p:cNvCxnSpPr>
+            <a:cxnSpLocks/>
+          </p:cNvCxnSpPr>
+          <p:nvPr/>
+        </p:nvCxnSpPr>
+        <p:spPr>
+          <a:xfrm>
+            <a:off x="3137850" y="5530152"/>
+            <a:ext cx="211703" cy="0"/>
+          </a:xfrm>
+          <a:prstGeom prst="straightConnector1">
+            <a:avLst/>
+          </a:prstGeom>
+          <a:ln>
+            <a:solidFill>
+              <a:srgbClr val="FF0000"/>
+            </a:solidFill>
+            <a:tailEnd type="triangle"/>
+          </a:ln>
+        </p:spPr>
+        <p:style>
+          <a:lnRef idx="2">
+            <a:schemeClr val="accent1"/>
+          </a:lnRef>
+          <a:fillRef idx="0">
+            <a:schemeClr val="accent1"/>
+          </a:fillRef>
+          <a:effectRef idx="1">
+            <a:schemeClr val="accent1"/>
+          </a:effectRef>
+          <a:fontRef idx="minor">
+            <a:schemeClr val="tx1"/>
+          </a:fontRef>
+        </p:style>
+      </p:cxnSp>
+      <p:cxnSp>
+        <p:nvCxnSpPr>
+          <p:cNvPr id="177" name="Straight Connector 176">
+            <a:extLst>
+              <a:ext uri="{FF2B5EF4-FFF2-40B4-BE49-F238E27FC236}">
+                <a16:creationId xmlns:a16="http://schemas.microsoft.com/office/drawing/2014/main" id="{D3EDA99A-30A4-F982-B715-474CFCA4CF10}"/>
+              </a:ext>
+            </a:extLst>
+          </p:cNvPr>
+          <p:cNvCxnSpPr>
+            <a:cxnSpLocks/>
+          </p:cNvCxnSpPr>
+          <p:nvPr/>
+        </p:nvCxnSpPr>
+        <p:spPr>
+          <a:xfrm flipH="1">
+            <a:off x="2511119" y="5576977"/>
+            <a:ext cx="398618" cy="0"/>
+          </a:xfrm>
+          <a:prstGeom prst="line">
+            <a:avLst/>
+          </a:prstGeom>
+          <a:ln>
+            <a:solidFill>
+              <a:srgbClr val="FF0000"/>
+            </a:solidFill>
+          </a:ln>
+        </p:spPr>
+        <p:style>
+          <a:lnRef idx="2">
+            <a:schemeClr val="accent1"/>
+          </a:lnRef>
+          <a:fillRef idx="0">
+            <a:schemeClr val="accent1"/>
+          </a:fillRef>
+          <a:effectRef idx="1">
+            <a:schemeClr val="accent1"/>
+          </a:effectRef>
+          <a:fontRef idx="minor">
+            <a:schemeClr val="tx1"/>
+          </a:fontRef>
+        </p:style>
+      </p:cxnSp>
+      <p:cxnSp>
+        <p:nvCxnSpPr>
+          <p:cNvPr id="178" name="Straight Connector 177">
+            <a:extLst>
+              <a:ext uri="{FF2B5EF4-FFF2-40B4-BE49-F238E27FC236}">
+                <a16:creationId xmlns:a16="http://schemas.microsoft.com/office/drawing/2014/main" id="{3C226CA3-1732-8170-4B80-9A913F784713}"/>
+              </a:ext>
+            </a:extLst>
+          </p:cNvPr>
+          <p:cNvCxnSpPr>
+            <a:cxnSpLocks/>
+          </p:cNvCxnSpPr>
+          <p:nvPr/>
+        </p:nvCxnSpPr>
+        <p:spPr>
+          <a:xfrm>
+            <a:off x="3136484" y="5250897"/>
+            <a:ext cx="0" cy="279963"/>
+          </a:xfrm>
+          <a:prstGeom prst="line">
+            <a:avLst/>
+          </a:prstGeom>
+          <a:ln>
+            <a:solidFill>
+              <a:srgbClr val="FF0000"/>
+            </a:solidFill>
+          </a:ln>
+        </p:spPr>
+        <p:style>
+          <a:lnRef idx="2">
+            <a:schemeClr val="accent1"/>
+          </a:lnRef>
+          <a:fillRef idx="0">
+            <a:schemeClr val="accent1"/>
+          </a:fillRef>
+          <a:effectRef idx="1">
+            <a:schemeClr val="accent1"/>
+          </a:effectRef>
+          <a:fontRef idx="minor">
+            <a:schemeClr val="tx1"/>
+          </a:fontRef>
+        </p:style>
+      </p:cxnSp>
+      <p:cxnSp>
+        <p:nvCxnSpPr>
+          <p:cNvPr id="179" name="Straight Connector 178">
+            <a:extLst>
+              <a:ext uri="{FF2B5EF4-FFF2-40B4-BE49-F238E27FC236}">
+                <a16:creationId xmlns:a16="http://schemas.microsoft.com/office/drawing/2014/main" id="{4F4AF458-FF60-7841-5DF7-351701BBE355}"/>
+              </a:ext>
+            </a:extLst>
+          </p:cNvPr>
+          <p:cNvCxnSpPr>
+            <a:cxnSpLocks/>
+          </p:cNvCxnSpPr>
+          <p:nvPr/>
+        </p:nvCxnSpPr>
+        <p:spPr>
+          <a:xfrm>
+            <a:off x="2759850" y="5241548"/>
+            <a:ext cx="383938" cy="0"/>
+          </a:xfrm>
+          <a:prstGeom prst="line">
+            <a:avLst/>
+          </a:prstGeom>
+          <a:ln>
+            <a:solidFill>
+              <a:srgbClr val="FF0000"/>
+            </a:solidFill>
+          </a:ln>
+        </p:spPr>
+        <p:style>
+          <a:lnRef idx="2">
+            <a:schemeClr val="accent1"/>
+          </a:lnRef>
+          <a:fillRef idx="0">
+            <a:schemeClr val="accent1"/>
+          </a:fillRef>
+          <a:effectRef idx="1">
+            <a:schemeClr val="accent1"/>
+          </a:effectRef>
+          <a:fontRef idx="minor">
+            <a:schemeClr val="tx1"/>
+          </a:fontRef>
+        </p:style>
+      </p:cxnSp>
+      <p:cxnSp>
+        <p:nvCxnSpPr>
+          <p:cNvPr id="180" name="Straight Connector 179">
+            <a:extLst>
+              <a:ext uri="{FF2B5EF4-FFF2-40B4-BE49-F238E27FC236}">
+                <a16:creationId xmlns:a16="http://schemas.microsoft.com/office/drawing/2014/main" id="{2DFAFABE-FCDA-D3BB-29F9-62EB431D04BC}"/>
+              </a:ext>
+            </a:extLst>
+          </p:cNvPr>
+          <p:cNvCxnSpPr/>
+          <p:nvPr/>
+        </p:nvCxnSpPr>
+        <p:spPr>
+          <a:xfrm flipH="1">
+            <a:off x="2952806" y="5177183"/>
+            <a:ext cx="77899" cy="129540"/>
+          </a:xfrm>
+          <a:prstGeom prst="line">
+            <a:avLst/>
+          </a:prstGeom>
         </p:spPr>
         <p:style>
           <a:lnRef idx="2">
@@ -13263,10 +12761,10 @@
       </p:cxnSp>
       <p:sp>
         <p:nvSpPr>
-          <p:cNvPr id="207" name="TextBox 206">
-            <a:extLst>
-              <a:ext uri="{FF2B5EF4-FFF2-40B4-BE49-F238E27FC236}">
-                <a16:creationId xmlns:a16="http://schemas.microsoft.com/office/drawing/2014/main" id="{324ACC2E-58E8-851E-7F2C-5A0A160ADD22}"/>
+          <p:cNvPr id="181" name="TextBox 180">
+            <a:extLst>
+              <a:ext uri="{FF2B5EF4-FFF2-40B4-BE49-F238E27FC236}">
+                <a16:creationId xmlns:a16="http://schemas.microsoft.com/office/drawing/2014/main" id="{FBB6A677-BE42-45AD-A7A2-3879C2126822}"/>
               </a:ext>
             </a:extLst>
           </p:cNvPr>
@@ -13275,8 +12773,8 @@
         </p:nvSpPr>
         <p:spPr>
           <a:xfrm>
-            <a:off x="1764344" y="803972"/>
-            <a:ext cx="474810" cy="230832"/>
+            <a:off x="2834608" y="5072614"/>
+            <a:ext cx="245580" cy="230832"/>
           </a:xfrm>
           <a:prstGeom prst="rect">
             <a:avLst/>
@@ -13292,17 +12790,54 @@
             <a:pPr algn="ctr"/>
             <a:r>
               <a:rPr lang="en-US" sz="900" dirty="0"/>
-              <a:t>dout2</a:t>
+              <a:t>4</a:t>
             </a:r>
+          </a:p>
+        </p:txBody>
+      </p:sp>
+      <p:sp>
+        <p:nvSpPr>
+          <p:cNvPr id="183" name="TextBox 182">
+            <a:extLst>
+              <a:ext uri="{FF2B5EF4-FFF2-40B4-BE49-F238E27FC236}">
+                <a16:creationId xmlns:a16="http://schemas.microsoft.com/office/drawing/2014/main" id="{3A847D55-8D2B-A033-F3EB-74FED50FA3DC}"/>
+              </a:ext>
+            </a:extLst>
+          </p:cNvPr>
+          <p:cNvSpPr txBox="1"/>
+          <p:nvPr/>
+        </p:nvSpPr>
+        <p:spPr>
+          <a:xfrm>
+            <a:off x="4150005" y="5374286"/>
+            <a:ext cx="861489" cy="246221"/>
+          </a:xfrm>
+          <a:prstGeom prst="rect">
+            <a:avLst/>
+          </a:prstGeom>
+          <a:noFill/>
+        </p:spPr>
+        <p:txBody>
+          <a:bodyPr wrap="square" rtlCol="0">
+            <a:spAutoFit/>
+          </a:bodyPr>
+          <a:lstStyle/>
+          <a:p>
+            <a:pPr algn="ctr"/>
+            <a:r>
+              <a:rPr lang="en-US" sz="1000" dirty="0" err="1"/>
+              <a:t>start_stall</a:t>
+            </a:r>
+            <a:endParaRPr lang="en-US" sz="1000" dirty="0"/>
           </a:p>
         </p:txBody>
       </p:sp>
       <p:cxnSp>
         <p:nvCxnSpPr>
-          <p:cNvPr id="61" name="Straight Connector 60">
-            <a:extLst>
-              <a:ext uri="{FF2B5EF4-FFF2-40B4-BE49-F238E27FC236}">
-                <a16:creationId xmlns:a16="http://schemas.microsoft.com/office/drawing/2014/main" id="{A9B710D8-FF0B-7DFA-9850-657A2D4BD13E}"/>
+          <p:cNvPr id="237" name="Straight Arrow Connector 236">
+            <a:extLst>
+              <a:ext uri="{FF2B5EF4-FFF2-40B4-BE49-F238E27FC236}">
+                <a16:creationId xmlns:a16="http://schemas.microsoft.com/office/drawing/2014/main" id="{3C56AE84-4241-3D64-52E3-630A1A95C92D}"/>
               </a:ext>
             </a:extLst>
           </p:cNvPr>
@@ -13313,12 +12848,15 @@
         </p:nvCxnSpPr>
         <p:spPr>
           <a:xfrm>
-            <a:off x="5773621" y="4593163"/>
-            <a:ext cx="0" cy="437124"/>
-          </a:xfrm>
-          <a:prstGeom prst="line">
-            <a:avLst/>
-          </a:prstGeom>
+            <a:off x="5713904" y="5607852"/>
+            <a:ext cx="0" cy="739872"/>
+          </a:xfrm>
+          <a:prstGeom prst="straightConnector1">
+            <a:avLst/>
+          </a:prstGeom>
+          <a:ln>
+            <a:tailEnd type="none"/>
+          </a:ln>
         </p:spPr>
         <p:style>
           <a:lnRef idx="2">
@@ -13337,10 +12875,10 @@
       </p:cxnSp>
       <p:cxnSp>
         <p:nvCxnSpPr>
-          <p:cNvPr id="62" name="Straight Connector 61">
-            <a:extLst>
-              <a:ext uri="{FF2B5EF4-FFF2-40B4-BE49-F238E27FC236}">
-                <a16:creationId xmlns:a16="http://schemas.microsoft.com/office/drawing/2014/main" id="{0E39A71A-1D4A-92AA-4D7B-F3F79DDDDC6F}"/>
+          <p:cNvPr id="245" name="Straight Arrow Connector 244">
+            <a:extLst>
+              <a:ext uri="{FF2B5EF4-FFF2-40B4-BE49-F238E27FC236}">
+                <a16:creationId xmlns:a16="http://schemas.microsoft.com/office/drawing/2014/main" id="{845DB4F8-12AC-939D-C612-4647A063D1B8}"/>
               </a:ext>
             </a:extLst>
           </p:cNvPr>
@@ -13351,12 +12889,15 @@
         </p:nvCxnSpPr>
         <p:spPr>
           <a:xfrm>
-            <a:off x="5773237" y="4606277"/>
-            <a:ext cx="1700141" cy="0"/>
-          </a:xfrm>
-          <a:prstGeom prst="line">
-            <a:avLst/>
-          </a:prstGeom>
+            <a:off x="7969145" y="3840955"/>
+            <a:ext cx="0" cy="2515397"/>
+          </a:xfrm>
+          <a:prstGeom prst="straightConnector1">
+            <a:avLst/>
+          </a:prstGeom>
+          <a:ln>
+            <a:tailEnd type="none"/>
+          </a:ln>
         </p:spPr>
         <p:style>
           <a:lnRef idx="2">
@@ -13375,10 +12916,10 @@
       </p:cxnSp>
       <p:cxnSp>
         <p:nvCxnSpPr>
-          <p:cNvPr id="132" name="Straight Connector 131">
-            <a:extLst>
-              <a:ext uri="{FF2B5EF4-FFF2-40B4-BE49-F238E27FC236}">
-                <a16:creationId xmlns:a16="http://schemas.microsoft.com/office/drawing/2014/main" id="{C7306C74-0136-403C-8535-66A5F08DF440}"/>
+          <p:cNvPr id="253" name="Straight Connector 252">
+            <a:extLst>
+              <a:ext uri="{FF2B5EF4-FFF2-40B4-BE49-F238E27FC236}">
+                <a16:creationId xmlns:a16="http://schemas.microsoft.com/office/drawing/2014/main" id="{8DE2A8EF-93C3-8D69-D4D5-8D0F0A1AEAB4}"/>
               </a:ext>
             </a:extLst>
           </p:cNvPr>
@@ -13389,8 +12930,8 @@
         </p:nvCxnSpPr>
         <p:spPr>
           <a:xfrm flipV="1">
-            <a:off x="6784918" y="3767711"/>
-            <a:ext cx="0" cy="73244"/>
+            <a:off x="10477527" y="3638618"/>
+            <a:ext cx="0" cy="2555113"/>
           </a:xfrm>
           <a:prstGeom prst="line">
             <a:avLst/>
@@ -13411,6 +12952,743 @@
           </a:fontRef>
         </p:style>
       </p:cxnSp>
+      <p:cxnSp>
+        <p:nvCxnSpPr>
+          <p:cNvPr id="275" name="Straight Arrow Connector 274">
+            <a:extLst>
+              <a:ext uri="{FF2B5EF4-FFF2-40B4-BE49-F238E27FC236}">
+                <a16:creationId xmlns:a16="http://schemas.microsoft.com/office/drawing/2014/main" id="{C8E68A82-E671-20D8-C7E8-C451319C17B6}"/>
+              </a:ext>
+            </a:extLst>
+          </p:cNvPr>
+          <p:cNvCxnSpPr>
+            <a:cxnSpLocks/>
+          </p:cNvCxnSpPr>
+          <p:nvPr/>
+        </p:nvCxnSpPr>
+        <p:spPr>
+          <a:xfrm>
+            <a:off x="5071589" y="5940394"/>
+            <a:ext cx="229874" cy="0"/>
+          </a:xfrm>
+          <a:prstGeom prst="straightConnector1">
+            <a:avLst/>
+          </a:prstGeom>
+          <a:ln>
+            <a:solidFill>
+              <a:srgbClr val="FF0000"/>
+            </a:solidFill>
+            <a:tailEnd type="triangle"/>
+          </a:ln>
+        </p:spPr>
+        <p:style>
+          <a:lnRef idx="2">
+            <a:schemeClr val="accent1"/>
+          </a:lnRef>
+          <a:fillRef idx="0">
+            <a:schemeClr val="accent1"/>
+          </a:fillRef>
+          <a:effectRef idx="1">
+            <a:schemeClr val="accent1"/>
+          </a:effectRef>
+          <a:fontRef idx="minor">
+            <a:schemeClr val="tx1"/>
+          </a:fontRef>
+        </p:style>
+      </p:cxnSp>
+      <p:sp>
+        <p:nvSpPr>
+          <p:cNvPr id="276" name="Rectangle 275">
+            <a:extLst>
+              <a:ext uri="{FF2B5EF4-FFF2-40B4-BE49-F238E27FC236}">
+                <a16:creationId xmlns:a16="http://schemas.microsoft.com/office/drawing/2014/main" id="{387AC282-397C-B121-8B8D-9AE3B9B0358A}"/>
+              </a:ext>
+            </a:extLst>
+          </p:cNvPr>
+          <p:cNvSpPr/>
+          <p:nvPr/>
+        </p:nvSpPr>
+        <p:spPr>
+          <a:xfrm>
+            <a:off x="4392800" y="5803394"/>
+            <a:ext cx="678789" cy="645791"/>
+          </a:xfrm>
+          <a:prstGeom prst="rect">
+            <a:avLst/>
+          </a:prstGeom>
+          <a:solidFill>
+            <a:schemeClr val="bg1"/>
+          </a:solidFill>
+        </p:spPr>
+        <p:style>
+          <a:lnRef idx="2">
+            <a:schemeClr val="accent1">
+              <a:shade val="15000"/>
+            </a:schemeClr>
+          </a:lnRef>
+          <a:fillRef idx="1">
+            <a:schemeClr val="accent1"/>
+          </a:fillRef>
+          <a:effectRef idx="0">
+            <a:schemeClr val="accent1"/>
+          </a:effectRef>
+          <a:fontRef idx="minor">
+            <a:schemeClr val="lt1"/>
+          </a:fontRef>
+        </p:style>
+        <p:txBody>
+          <a:bodyPr rtlCol="0" anchor="ctr"/>
+          <a:lstStyle/>
+          <a:p>
+            <a:pPr algn="ctr"/>
+            <a:r>
+              <a:rPr lang="en-US" dirty="0"/>
+              <a:t>PC</a:t>
+            </a:r>
+          </a:p>
+        </p:txBody>
+      </p:sp>
+      <p:sp>
+        <p:nvSpPr>
+          <p:cNvPr id="277" name="TextBox 276">
+            <a:extLst>
+              <a:ext uri="{FF2B5EF4-FFF2-40B4-BE49-F238E27FC236}">
+                <a16:creationId xmlns:a16="http://schemas.microsoft.com/office/drawing/2014/main" id="{677060F7-EAC3-60D7-2A3C-1EFCAF50AD4D}"/>
+              </a:ext>
+            </a:extLst>
+          </p:cNvPr>
+          <p:cNvSpPr txBox="1"/>
+          <p:nvPr/>
+        </p:nvSpPr>
+        <p:spPr>
+          <a:xfrm>
+            <a:off x="4430962" y="5868945"/>
+            <a:ext cx="643125" cy="553998"/>
+          </a:xfrm>
+          <a:prstGeom prst="rect">
+            <a:avLst/>
+          </a:prstGeom>
+          <a:noFill/>
+        </p:spPr>
+        <p:txBody>
+          <a:bodyPr wrap="none" rtlCol="0">
+            <a:spAutoFit/>
+          </a:bodyPr>
+          <a:lstStyle/>
+          <a:p>
+            <a:pPr algn="ctr"/>
+            <a:r>
+              <a:rPr lang="en-US" sz="1000" dirty="0"/>
+              <a:t>Branch</a:t>
+            </a:r>
+          </a:p>
+          <a:p>
+            <a:pPr algn="ctr"/>
+            <a:r>
+              <a:rPr lang="en-US" sz="1000" dirty="0"/>
+              <a:t>Forward</a:t>
+            </a:r>
+          </a:p>
+          <a:p>
+            <a:pPr algn="ctr"/>
+            <a:r>
+              <a:rPr lang="en-US" sz="1000" dirty="0"/>
+              <a:t>Unit</a:t>
+            </a:r>
+          </a:p>
+        </p:txBody>
+      </p:sp>
+      <p:cxnSp>
+        <p:nvCxnSpPr>
+          <p:cNvPr id="278" name="Straight Arrow Connector 277">
+            <a:extLst>
+              <a:ext uri="{FF2B5EF4-FFF2-40B4-BE49-F238E27FC236}">
+                <a16:creationId xmlns:a16="http://schemas.microsoft.com/office/drawing/2014/main" id="{8A86DDC6-7EF2-A55E-86AB-B039F1025AA6}"/>
+              </a:ext>
+            </a:extLst>
+          </p:cNvPr>
+          <p:cNvCxnSpPr>
+            <a:cxnSpLocks/>
+          </p:cNvCxnSpPr>
+          <p:nvPr/>
+        </p:nvCxnSpPr>
+        <p:spPr>
+          <a:xfrm>
+            <a:off x="4217262" y="5874031"/>
+            <a:ext cx="184166" cy="0"/>
+          </a:xfrm>
+          <a:prstGeom prst="straightConnector1">
+            <a:avLst/>
+          </a:prstGeom>
+          <a:ln>
+            <a:tailEnd type="triangle"/>
+          </a:ln>
+        </p:spPr>
+        <p:style>
+          <a:lnRef idx="2">
+            <a:schemeClr val="accent1"/>
+          </a:lnRef>
+          <a:fillRef idx="0">
+            <a:schemeClr val="accent1"/>
+          </a:fillRef>
+          <a:effectRef idx="1">
+            <a:schemeClr val="accent1"/>
+          </a:effectRef>
+          <a:fontRef idx="minor">
+            <a:schemeClr val="tx1"/>
+          </a:fontRef>
+        </p:style>
+      </p:cxnSp>
+      <p:cxnSp>
+        <p:nvCxnSpPr>
+          <p:cNvPr id="279" name="Straight Arrow Connector 278">
+            <a:extLst>
+              <a:ext uri="{FF2B5EF4-FFF2-40B4-BE49-F238E27FC236}">
+                <a16:creationId xmlns:a16="http://schemas.microsoft.com/office/drawing/2014/main" id="{38160B21-10CC-284C-A2F1-5C49CB784B92}"/>
+              </a:ext>
+            </a:extLst>
+          </p:cNvPr>
+          <p:cNvCxnSpPr>
+            <a:cxnSpLocks/>
+          </p:cNvCxnSpPr>
+          <p:nvPr/>
+        </p:nvCxnSpPr>
+        <p:spPr>
+          <a:xfrm>
+            <a:off x="4120537" y="6039852"/>
+            <a:ext cx="280891" cy="0"/>
+          </a:xfrm>
+          <a:prstGeom prst="straightConnector1">
+            <a:avLst/>
+          </a:prstGeom>
+          <a:ln>
+            <a:tailEnd type="triangle"/>
+          </a:ln>
+        </p:spPr>
+        <p:style>
+          <a:lnRef idx="2">
+            <a:schemeClr val="accent1"/>
+          </a:lnRef>
+          <a:fillRef idx="0">
+            <a:schemeClr val="accent1"/>
+          </a:fillRef>
+          <a:effectRef idx="1">
+            <a:schemeClr val="accent1"/>
+          </a:effectRef>
+          <a:fontRef idx="minor">
+            <a:schemeClr val="tx1"/>
+          </a:fontRef>
+        </p:style>
+      </p:cxnSp>
+      <p:cxnSp>
+        <p:nvCxnSpPr>
+          <p:cNvPr id="280" name="Straight Connector 279">
+            <a:extLst>
+              <a:ext uri="{FF2B5EF4-FFF2-40B4-BE49-F238E27FC236}">
+                <a16:creationId xmlns:a16="http://schemas.microsoft.com/office/drawing/2014/main" id="{D21F7DE8-8DE2-3F34-AA30-18DFD0771516}"/>
+              </a:ext>
+            </a:extLst>
+          </p:cNvPr>
+          <p:cNvCxnSpPr>
+            <a:cxnSpLocks/>
+          </p:cNvCxnSpPr>
+          <p:nvPr/>
+        </p:nvCxnSpPr>
+        <p:spPr>
+          <a:xfrm>
+            <a:off x="4120537" y="5588598"/>
+            <a:ext cx="0" cy="437124"/>
+          </a:xfrm>
+          <a:prstGeom prst="line">
+            <a:avLst/>
+          </a:prstGeom>
+        </p:spPr>
+        <p:style>
+          <a:lnRef idx="2">
+            <a:schemeClr val="accent1"/>
+          </a:lnRef>
+          <a:fillRef idx="0">
+            <a:schemeClr val="accent1"/>
+          </a:fillRef>
+          <a:effectRef idx="1">
+            <a:schemeClr val="accent1"/>
+          </a:effectRef>
+          <a:fontRef idx="minor">
+            <a:schemeClr val="tx1"/>
+          </a:fontRef>
+        </p:style>
+      </p:cxnSp>
+      <p:cxnSp>
+        <p:nvCxnSpPr>
+          <p:cNvPr id="282" name="Straight Connector 281">
+            <a:extLst>
+              <a:ext uri="{FF2B5EF4-FFF2-40B4-BE49-F238E27FC236}">
+                <a16:creationId xmlns:a16="http://schemas.microsoft.com/office/drawing/2014/main" id="{E1949B8D-D95F-E3DB-3679-7809008035CE}"/>
+              </a:ext>
+            </a:extLst>
+          </p:cNvPr>
+          <p:cNvCxnSpPr>
+            <a:cxnSpLocks/>
+          </p:cNvCxnSpPr>
+          <p:nvPr/>
+        </p:nvCxnSpPr>
+        <p:spPr>
+          <a:xfrm>
+            <a:off x="4223876" y="5693493"/>
+            <a:ext cx="1723837" cy="0"/>
+          </a:xfrm>
+          <a:prstGeom prst="line">
+            <a:avLst/>
+          </a:prstGeom>
+        </p:spPr>
+        <p:style>
+          <a:lnRef idx="2">
+            <a:schemeClr val="accent1"/>
+          </a:lnRef>
+          <a:fillRef idx="0">
+            <a:schemeClr val="accent1"/>
+          </a:fillRef>
+          <a:effectRef idx="1">
+            <a:schemeClr val="accent1"/>
+          </a:effectRef>
+          <a:fontRef idx="minor">
+            <a:schemeClr val="tx1"/>
+          </a:fontRef>
+        </p:style>
+      </p:cxnSp>
+      <p:cxnSp>
+        <p:nvCxnSpPr>
+          <p:cNvPr id="283" name="Straight Arrow Connector 282">
+            <a:extLst>
+              <a:ext uri="{FF2B5EF4-FFF2-40B4-BE49-F238E27FC236}">
+                <a16:creationId xmlns:a16="http://schemas.microsoft.com/office/drawing/2014/main" id="{827174C5-C75B-B7CE-F88C-681B3E175F52}"/>
+              </a:ext>
+            </a:extLst>
+          </p:cNvPr>
+          <p:cNvCxnSpPr>
+            <a:cxnSpLocks/>
+          </p:cNvCxnSpPr>
+          <p:nvPr/>
+        </p:nvCxnSpPr>
+        <p:spPr>
+          <a:xfrm flipV="1">
+            <a:off x="4753451" y="6458916"/>
+            <a:ext cx="0" cy="310761"/>
+          </a:xfrm>
+          <a:prstGeom prst="straightConnector1">
+            <a:avLst/>
+          </a:prstGeom>
+          <a:ln>
+            <a:solidFill>
+              <a:srgbClr val="FF0000"/>
+            </a:solidFill>
+            <a:tailEnd type="triangle"/>
+          </a:ln>
+        </p:spPr>
+        <p:style>
+          <a:lnRef idx="2">
+            <a:schemeClr val="accent1"/>
+          </a:lnRef>
+          <a:fillRef idx="0">
+            <a:schemeClr val="accent1"/>
+          </a:fillRef>
+          <a:effectRef idx="1">
+            <a:schemeClr val="accent1"/>
+          </a:effectRef>
+          <a:fontRef idx="minor">
+            <a:schemeClr val="tx1"/>
+          </a:fontRef>
+        </p:style>
+      </p:cxnSp>
+      <p:cxnSp>
+        <p:nvCxnSpPr>
+          <p:cNvPr id="284" name="Straight Connector 283">
+            <a:extLst>
+              <a:ext uri="{FF2B5EF4-FFF2-40B4-BE49-F238E27FC236}">
+                <a16:creationId xmlns:a16="http://schemas.microsoft.com/office/drawing/2014/main" id="{00D33967-F281-4A62-4121-E5FA3DAFA269}"/>
+              </a:ext>
+            </a:extLst>
+          </p:cNvPr>
+          <p:cNvCxnSpPr>
+            <a:cxnSpLocks/>
+          </p:cNvCxnSpPr>
+          <p:nvPr/>
+        </p:nvCxnSpPr>
+        <p:spPr>
+          <a:xfrm flipH="1">
+            <a:off x="4708362" y="6622460"/>
+            <a:ext cx="107051" cy="69157"/>
+          </a:xfrm>
+          <a:prstGeom prst="line">
+            <a:avLst/>
+          </a:prstGeom>
+        </p:spPr>
+        <p:style>
+          <a:lnRef idx="2">
+            <a:schemeClr val="accent1"/>
+          </a:lnRef>
+          <a:fillRef idx="0">
+            <a:schemeClr val="accent1"/>
+          </a:fillRef>
+          <a:effectRef idx="1">
+            <a:schemeClr val="accent1"/>
+          </a:effectRef>
+          <a:fontRef idx="minor">
+            <a:schemeClr val="tx1"/>
+          </a:fontRef>
+        </p:style>
+      </p:cxnSp>
+      <p:sp>
+        <p:nvSpPr>
+          <p:cNvPr id="287" name="TextBox 286">
+            <a:extLst>
+              <a:ext uri="{FF2B5EF4-FFF2-40B4-BE49-F238E27FC236}">
+                <a16:creationId xmlns:a16="http://schemas.microsoft.com/office/drawing/2014/main" id="{CD28274F-92E6-F852-6391-A717240DE2DF}"/>
+              </a:ext>
+            </a:extLst>
+          </p:cNvPr>
+          <p:cNvSpPr txBox="1"/>
+          <p:nvPr/>
+        </p:nvSpPr>
+        <p:spPr>
+          <a:xfrm>
+            <a:off x="3730289" y="6150433"/>
+            <a:ext cx="474810" cy="230832"/>
+          </a:xfrm>
+          <a:prstGeom prst="rect">
+            <a:avLst/>
+          </a:prstGeom>
+          <a:noFill/>
+        </p:spPr>
+        <p:txBody>
+          <a:bodyPr wrap="none" rtlCol="0">
+            <a:spAutoFit/>
+          </a:bodyPr>
+          <a:lstStyle/>
+          <a:p>
+            <a:pPr algn="ctr"/>
+            <a:r>
+              <a:rPr lang="en-US" sz="900" dirty="0"/>
+              <a:t>dout1</a:t>
+            </a:r>
+          </a:p>
+        </p:txBody>
+      </p:sp>
+      <p:cxnSp>
+        <p:nvCxnSpPr>
+          <p:cNvPr id="289" name="Straight Arrow Connector 288">
+            <a:extLst>
+              <a:ext uri="{FF2B5EF4-FFF2-40B4-BE49-F238E27FC236}">
+                <a16:creationId xmlns:a16="http://schemas.microsoft.com/office/drawing/2014/main" id="{B5D2A21B-C882-4B66-E567-0F64E21350DC}"/>
+              </a:ext>
+            </a:extLst>
+          </p:cNvPr>
+          <p:cNvCxnSpPr>
+            <a:cxnSpLocks/>
+          </p:cNvCxnSpPr>
+          <p:nvPr/>
+        </p:nvCxnSpPr>
+        <p:spPr>
+          <a:xfrm>
+            <a:off x="4120537" y="6275417"/>
+            <a:ext cx="264404" cy="0"/>
+          </a:xfrm>
+          <a:prstGeom prst="straightConnector1">
+            <a:avLst/>
+          </a:prstGeom>
+          <a:ln>
+            <a:tailEnd type="triangle"/>
+          </a:ln>
+        </p:spPr>
+        <p:style>
+          <a:lnRef idx="2">
+            <a:schemeClr val="accent1"/>
+          </a:lnRef>
+          <a:fillRef idx="0">
+            <a:schemeClr val="accent1"/>
+          </a:fillRef>
+          <a:effectRef idx="1">
+            <a:schemeClr val="accent1"/>
+          </a:effectRef>
+          <a:fontRef idx="minor">
+            <a:schemeClr val="tx1"/>
+          </a:fontRef>
+        </p:style>
+      </p:cxnSp>
+      <p:cxnSp>
+        <p:nvCxnSpPr>
+          <p:cNvPr id="298" name="Straight Arrow Connector 297">
+            <a:extLst>
+              <a:ext uri="{FF2B5EF4-FFF2-40B4-BE49-F238E27FC236}">
+                <a16:creationId xmlns:a16="http://schemas.microsoft.com/office/drawing/2014/main" id="{70483936-966F-CBD5-A492-4864BA70A64C}"/>
+              </a:ext>
+            </a:extLst>
+          </p:cNvPr>
+          <p:cNvCxnSpPr>
+            <a:cxnSpLocks/>
+          </p:cNvCxnSpPr>
+          <p:nvPr/>
+        </p:nvCxnSpPr>
+        <p:spPr>
+          <a:xfrm>
+            <a:off x="4229389" y="5687367"/>
+            <a:ext cx="0" cy="223428"/>
+          </a:xfrm>
+          <a:prstGeom prst="straightConnector1">
+            <a:avLst/>
+          </a:prstGeom>
+          <a:ln>
+            <a:tailEnd type="none"/>
+          </a:ln>
+        </p:spPr>
+        <p:style>
+          <a:lnRef idx="2">
+            <a:schemeClr val="accent1"/>
+          </a:lnRef>
+          <a:fillRef idx="0">
+            <a:schemeClr val="accent1"/>
+          </a:fillRef>
+          <a:effectRef idx="1">
+            <a:schemeClr val="accent1"/>
+          </a:effectRef>
+          <a:fontRef idx="minor">
+            <a:schemeClr val="tx1"/>
+          </a:fontRef>
+        </p:style>
+      </p:cxnSp>
+      <p:cxnSp>
+        <p:nvCxnSpPr>
+          <p:cNvPr id="305" name="Straight Connector 304">
+            <a:extLst>
+              <a:ext uri="{FF2B5EF4-FFF2-40B4-BE49-F238E27FC236}">
+                <a16:creationId xmlns:a16="http://schemas.microsoft.com/office/drawing/2014/main" id="{1BF4F819-5D45-397F-4F03-C345534984AB}"/>
+              </a:ext>
+            </a:extLst>
+          </p:cNvPr>
+          <p:cNvCxnSpPr>
+            <a:cxnSpLocks/>
+          </p:cNvCxnSpPr>
+          <p:nvPr/>
+        </p:nvCxnSpPr>
+        <p:spPr>
+          <a:xfrm>
+            <a:off x="5947713" y="5692909"/>
+            <a:ext cx="0" cy="503496"/>
+          </a:xfrm>
+          <a:prstGeom prst="line">
+            <a:avLst/>
+          </a:prstGeom>
+        </p:spPr>
+        <p:style>
+          <a:lnRef idx="2">
+            <a:schemeClr val="accent1"/>
+          </a:lnRef>
+          <a:fillRef idx="0">
+            <a:schemeClr val="accent1"/>
+          </a:fillRef>
+          <a:effectRef idx="1">
+            <a:schemeClr val="accent1"/>
+          </a:effectRef>
+          <a:fontRef idx="minor">
+            <a:schemeClr val="tx1"/>
+          </a:fontRef>
+        </p:style>
+      </p:cxnSp>
+      <p:cxnSp>
+        <p:nvCxnSpPr>
+          <p:cNvPr id="315" name="Straight Connector 314">
+            <a:extLst>
+              <a:ext uri="{FF2B5EF4-FFF2-40B4-BE49-F238E27FC236}">
+                <a16:creationId xmlns:a16="http://schemas.microsoft.com/office/drawing/2014/main" id="{811CAF9B-8464-18B3-80C0-E239A4B4AE56}"/>
+              </a:ext>
+            </a:extLst>
+          </p:cNvPr>
+          <p:cNvCxnSpPr>
+            <a:cxnSpLocks/>
+          </p:cNvCxnSpPr>
+          <p:nvPr/>
+        </p:nvCxnSpPr>
+        <p:spPr>
+          <a:xfrm>
+            <a:off x="5937609" y="6192851"/>
+            <a:ext cx="4558438" cy="0"/>
+          </a:xfrm>
+          <a:prstGeom prst="line">
+            <a:avLst/>
+          </a:prstGeom>
+        </p:spPr>
+        <p:style>
+          <a:lnRef idx="2">
+            <a:schemeClr val="accent1"/>
+          </a:lnRef>
+          <a:fillRef idx="0">
+            <a:schemeClr val="accent1"/>
+          </a:fillRef>
+          <a:effectRef idx="1">
+            <a:schemeClr val="accent1"/>
+          </a:effectRef>
+          <a:fontRef idx="minor">
+            <a:schemeClr val="tx1"/>
+          </a:fontRef>
+        </p:style>
+      </p:cxnSp>
+      <p:cxnSp>
+        <p:nvCxnSpPr>
+          <p:cNvPr id="323" name="Straight Arrow Connector 322">
+            <a:extLst>
+              <a:ext uri="{FF2B5EF4-FFF2-40B4-BE49-F238E27FC236}">
+                <a16:creationId xmlns:a16="http://schemas.microsoft.com/office/drawing/2014/main" id="{E1345829-1330-B15F-1690-B34F82C9E175}"/>
+              </a:ext>
+            </a:extLst>
+          </p:cNvPr>
+          <p:cNvCxnSpPr>
+            <a:cxnSpLocks/>
+          </p:cNvCxnSpPr>
+          <p:nvPr/>
+        </p:nvCxnSpPr>
+        <p:spPr>
+          <a:xfrm>
+            <a:off x="4633828" y="1249014"/>
+            <a:ext cx="4113" cy="167475"/>
+          </a:xfrm>
+          <a:prstGeom prst="straightConnector1">
+            <a:avLst/>
+          </a:prstGeom>
+          <a:ln>
+            <a:solidFill>
+              <a:srgbClr val="FF0000"/>
+            </a:solidFill>
+            <a:tailEnd type="triangle"/>
+          </a:ln>
+        </p:spPr>
+        <p:style>
+          <a:lnRef idx="2">
+            <a:schemeClr val="accent1"/>
+          </a:lnRef>
+          <a:fillRef idx="0">
+            <a:schemeClr val="accent1"/>
+          </a:fillRef>
+          <a:effectRef idx="1">
+            <a:schemeClr val="accent1"/>
+          </a:effectRef>
+          <a:fontRef idx="minor">
+            <a:schemeClr val="tx1"/>
+          </a:fontRef>
+        </p:style>
+      </p:cxnSp>
+      <p:cxnSp>
+        <p:nvCxnSpPr>
+          <p:cNvPr id="327" name="Straight Connector 326">
+            <a:extLst>
+              <a:ext uri="{FF2B5EF4-FFF2-40B4-BE49-F238E27FC236}">
+                <a16:creationId xmlns:a16="http://schemas.microsoft.com/office/drawing/2014/main" id="{CBA50DB1-68B5-3972-ACFE-BC8B4F1AC08C}"/>
+              </a:ext>
+            </a:extLst>
+          </p:cNvPr>
+          <p:cNvCxnSpPr>
+            <a:cxnSpLocks/>
+          </p:cNvCxnSpPr>
+          <p:nvPr/>
+        </p:nvCxnSpPr>
+        <p:spPr>
+          <a:xfrm>
+            <a:off x="5700252" y="6345251"/>
+            <a:ext cx="2271251" cy="0"/>
+          </a:xfrm>
+          <a:prstGeom prst="line">
+            <a:avLst/>
+          </a:prstGeom>
+        </p:spPr>
+        <p:style>
+          <a:lnRef idx="2">
+            <a:schemeClr val="accent1"/>
+          </a:lnRef>
+          <a:fillRef idx="0">
+            <a:schemeClr val="accent1"/>
+          </a:fillRef>
+          <a:effectRef idx="1">
+            <a:schemeClr val="accent1"/>
+          </a:effectRef>
+          <a:fontRef idx="minor">
+            <a:schemeClr val="tx1"/>
+          </a:fontRef>
+        </p:style>
+      </p:cxnSp>
+      <p:cxnSp>
+        <p:nvCxnSpPr>
+          <p:cNvPr id="333" name="Straight Connector 332">
+            <a:extLst>
+              <a:ext uri="{FF2B5EF4-FFF2-40B4-BE49-F238E27FC236}">
+                <a16:creationId xmlns:a16="http://schemas.microsoft.com/office/drawing/2014/main" id="{691D3FA7-C286-87B3-AA1E-062BB45C1EAA}"/>
+              </a:ext>
+            </a:extLst>
+          </p:cNvPr>
+          <p:cNvCxnSpPr>
+            <a:cxnSpLocks/>
+          </p:cNvCxnSpPr>
+          <p:nvPr/>
+        </p:nvCxnSpPr>
+        <p:spPr>
+          <a:xfrm>
+            <a:off x="4120537" y="5607852"/>
+            <a:ext cx="1601837" cy="0"/>
+          </a:xfrm>
+          <a:prstGeom prst="line">
+            <a:avLst/>
+          </a:prstGeom>
+        </p:spPr>
+        <p:style>
+          <a:lnRef idx="2">
+            <a:schemeClr val="accent1"/>
+          </a:lnRef>
+          <a:fillRef idx="0">
+            <a:schemeClr val="accent1"/>
+          </a:fillRef>
+          <a:effectRef idx="1">
+            <a:schemeClr val="accent1"/>
+          </a:effectRef>
+          <a:fontRef idx="minor">
+            <a:schemeClr val="tx1"/>
+          </a:fontRef>
+        </p:style>
+      </p:cxnSp>
+      <p:sp>
+        <p:nvSpPr>
+          <p:cNvPr id="335" name="TextBox 334">
+            <a:extLst>
+              <a:ext uri="{FF2B5EF4-FFF2-40B4-BE49-F238E27FC236}">
+                <a16:creationId xmlns:a16="http://schemas.microsoft.com/office/drawing/2014/main" id="{7445925B-CC01-40BD-8B87-8F2069BEAA85}"/>
+              </a:ext>
+            </a:extLst>
+          </p:cNvPr>
+          <p:cNvSpPr txBox="1"/>
+          <p:nvPr/>
+        </p:nvSpPr>
+        <p:spPr>
+          <a:xfrm>
+            <a:off x="1136543" y="1071750"/>
+            <a:ext cx="575799" cy="230832"/>
+          </a:xfrm>
+          <a:prstGeom prst="rect">
+            <a:avLst/>
+          </a:prstGeom>
+          <a:noFill/>
+        </p:spPr>
+        <p:txBody>
+          <a:bodyPr wrap="none" rtlCol="0">
+            <a:spAutoFit/>
+          </a:bodyPr>
+          <a:lstStyle/>
+          <a:p>
+            <a:pPr algn="ctr"/>
+            <a:r>
+              <a:rPr lang="en-US" sz="900" dirty="0" err="1"/>
+              <a:t>next_pc</a:t>
+            </a:r>
+            <a:endParaRPr lang="en-US" sz="900" dirty="0"/>
+          </a:p>
+        </p:txBody>
+      </p:sp>
     </p:spTree>
     <p:extLst>
       <p:ext uri="{BB962C8B-B14F-4D97-AF65-F5344CB8AC3E}">
